--- a/Software Project Management/03. Software Project Initiation.pptx
+++ b/Software Project Management/03. Software Project Initiation.pptx
@@ -5,10 +5,10 @@
     <p:sldMasterId id="2147483708" r:id="rId1"/>
   </p:sldMasterIdLst>
   <p:notesMasterIdLst>
-    <p:notesMasterId r:id="rId31"/>
+    <p:notesMasterId r:id="rId32"/>
   </p:notesMasterIdLst>
   <p:handoutMasterIdLst>
-    <p:handoutMasterId r:id="rId32"/>
+    <p:handoutMasterId r:id="rId33"/>
   </p:handoutMasterIdLst>
   <p:sldIdLst>
     <p:sldId id="256" r:id="rId2"/>
@@ -17,29 +17,30 @@
     <p:sldId id="839" r:id="rId5"/>
     <p:sldId id="851" r:id="rId6"/>
     <p:sldId id="833" r:id="rId7"/>
-    <p:sldId id="855" r:id="rId8"/>
-    <p:sldId id="872" r:id="rId9"/>
-    <p:sldId id="879" r:id="rId10"/>
-    <p:sldId id="873" r:id="rId11"/>
-    <p:sldId id="874" r:id="rId12"/>
-    <p:sldId id="842" r:id="rId13"/>
-    <p:sldId id="835" r:id="rId14"/>
-    <p:sldId id="836" r:id="rId15"/>
-    <p:sldId id="852" r:id="rId16"/>
-    <p:sldId id="853" r:id="rId17"/>
-    <p:sldId id="854" r:id="rId18"/>
-    <p:sldId id="869" r:id="rId19"/>
-    <p:sldId id="867" r:id="rId20"/>
-    <p:sldId id="868" r:id="rId21"/>
-    <p:sldId id="837" r:id="rId22"/>
-    <p:sldId id="838" r:id="rId23"/>
-    <p:sldId id="878" r:id="rId24"/>
-    <p:sldId id="875" r:id="rId25"/>
-    <p:sldId id="876" r:id="rId26"/>
-    <p:sldId id="877" r:id="rId27"/>
-    <p:sldId id="843" r:id="rId28"/>
-    <p:sldId id="830" r:id="rId29"/>
-    <p:sldId id="343" r:id="rId30"/>
+    <p:sldId id="880" r:id="rId8"/>
+    <p:sldId id="855" r:id="rId9"/>
+    <p:sldId id="872" r:id="rId10"/>
+    <p:sldId id="879" r:id="rId11"/>
+    <p:sldId id="873" r:id="rId12"/>
+    <p:sldId id="874" r:id="rId13"/>
+    <p:sldId id="842" r:id="rId14"/>
+    <p:sldId id="835" r:id="rId15"/>
+    <p:sldId id="836" r:id="rId16"/>
+    <p:sldId id="852" r:id="rId17"/>
+    <p:sldId id="853" r:id="rId18"/>
+    <p:sldId id="854" r:id="rId19"/>
+    <p:sldId id="869" r:id="rId20"/>
+    <p:sldId id="867" r:id="rId21"/>
+    <p:sldId id="868" r:id="rId22"/>
+    <p:sldId id="837" r:id="rId23"/>
+    <p:sldId id="838" r:id="rId24"/>
+    <p:sldId id="878" r:id="rId25"/>
+    <p:sldId id="875" r:id="rId26"/>
+    <p:sldId id="876" r:id="rId27"/>
+    <p:sldId id="877" r:id="rId28"/>
+    <p:sldId id="843" r:id="rId29"/>
+    <p:sldId id="830" r:id="rId30"/>
+    <p:sldId id="343" r:id="rId31"/>
   </p:sldIdLst>
   <p:sldSz cx="9144000" cy="6858000" type="screen4x3"/>
   <p:notesSz cx="6858000" cy="9144000"/>
@@ -6528,7 +6529,7 @@
             <a:fld id="{8FCF70C7-1A17-4B8F-8E82-A20E29AAAC58}" type="datetimeFigureOut">
               <a:rPr lang="en-US" smtClean="0"/>
               <a:pPr/>
-              <a:t>5/31/2025</a:t>
+              <a:t>5/21/2026</a:t>
             </a:fld>
             <a:endParaRPr lang="en-US" dirty="0"/>
           </a:p>
@@ -6690,7 +6691,7 @@
             <a:fld id="{B972150E-24DE-4D23-AF8D-CF01896B0C83}" type="datetimeFigureOut">
               <a:rPr lang="en-US" smtClean="0"/>
               <a:pPr/>
-              <a:t>5/31/2025</a:t>
+              <a:t>5/21/2026</a:t>
             </a:fld>
             <a:endParaRPr lang="en-US" dirty="0"/>
           </a:p>
@@ -7024,7 +7025,7 @@
             <a:fld id="{758E95B1-5ED0-4005-B293-784E4C93134E}" type="slidenum">
               <a:rPr lang="en-US" smtClean="0"/>
               <a:pPr/>
-              <a:t>24</a:t>
+              <a:t>25</a:t>
             </a:fld>
             <a:endParaRPr lang="en-US" dirty="0"/>
           </a:p>
@@ -7106,7 +7107,7 @@
             <a:fld id="{758E95B1-5ED0-4005-B293-784E4C93134E}" type="slidenum">
               <a:rPr lang="en-US" smtClean="0"/>
               <a:pPr/>
-              <a:t>25</a:t>
+              <a:t>26</a:t>
             </a:fld>
             <a:endParaRPr lang="en-US" dirty="0"/>
           </a:p>
@@ -7311,7 +7312,7 @@
               <a:pPr>
                 <a:defRPr/>
               </a:pPr>
-              <a:t>5/31/2025</a:t>
+              <a:t>5/21/2026</a:t>
             </a:fld>
             <a:endParaRPr lang="en-US" dirty="0"/>
           </a:p>
@@ -7503,7 +7504,7 @@
               <a:pPr>
                 <a:defRPr/>
               </a:pPr>
-              <a:t>5/31/2025</a:t>
+              <a:t>5/21/2026</a:t>
             </a:fld>
             <a:endParaRPr lang="en-US" dirty="0"/>
           </a:p>
@@ -7705,7 +7706,7 @@
               <a:pPr>
                 <a:defRPr/>
               </a:pPr>
-              <a:t>5/31/2025</a:t>
+              <a:t>5/21/2026</a:t>
             </a:fld>
             <a:endParaRPr lang="en-US" dirty="0"/>
           </a:p>
@@ -7897,7 +7898,7 @@
               <a:pPr>
                 <a:defRPr/>
               </a:pPr>
-              <a:t>5/31/2025</a:t>
+              <a:t>5/21/2026</a:t>
             </a:fld>
             <a:endParaRPr lang="en-US" dirty="0"/>
           </a:p>
@@ -8165,7 +8166,7 @@
               <a:pPr>
                 <a:defRPr/>
               </a:pPr>
-              <a:t>5/31/2025</a:t>
+              <a:t>5/21/2026</a:t>
             </a:fld>
             <a:endParaRPr lang="en-US" dirty="0"/>
           </a:p>
@@ -8475,7 +8476,7 @@
               <a:pPr>
                 <a:defRPr/>
               </a:pPr>
-              <a:t>5/31/2025</a:t>
+              <a:t>5/21/2026</a:t>
             </a:fld>
             <a:endParaRPr lang="en-US" dirty="0"/>
           </a:p>
@@ -8919,7 +8920,7 @@
               <a:pPr>
                 <a:defRPr/>
               </a:pPr>
-              <a:t>5/31/2025</a:t>
+              <a:t>5/21/2026</a:t>
             </a:fld>
             <a:endParaRPr lang="en-US" dirty="0"/>
           </a:p>
@@ -9059,7 +9060,7 @@
               <a:pPr>
                 <a:defRPr/>
               </a:pPr>
-              <a:t>5/31/2025</a:t>
+              <a:t>5/21/2026</a:t>
             </a:fld>
             <a:endParaRPr lang="en-US" dirty="0"/>
           </a:p>
@@ -9176,7 +9177,7 @@
               <a:pPr>
                 <a:defRPr/>
               </a:pPr>
-              <a:t>5/31/2025</a:t>
+              <a:t>5/21/2026</a:t>
             </a:fld>
             <a:endParaRPr lang="en-US" dirty="0"/>
           </a:p>
@@ -9475,7 +9476,7 @@
               <a:pPr>
                 <a:defRPr/>
               </a:pPr>
-              <a:t>5/31/2025</a:t>
+              <a:t>5/21/2026</a:t>
             </a:fld>
             <a:endParaRPr lang="en-US" dirty="0"/>
           </a:p>
@@ -9753,7 +9754,7 @@
               <a:pPr>
                 <a:defRPr/>
               </a:pPr>
-              <a:t>5/31/2025</a:t>
+              <a:t>5/21/2026</a:t>
             </a:fld>
             <a:endParaRPr lang="en-US" dirty="0"/>
           </a:p>
@@ -10001,7 +10002,7 @@
               <a:pPr>
                 <a:defRPr/>
               </a:pPr>
-              <a:t>5/31/2025</a:t>
+              <a:t>5/21/2026</a:t>
             </a:fld>
             <a:endParaRPr lang="en-US" dirty="0"/>
           </a:p>
@@ -10679,6 +10680,347 @@
           <a:p>
             <a:r>
               <a:rPr lang="en-US" dirty="0" smtClean="0"/>
+              <a:t>What Do We Need to Complete?</a:t>
+            </a:r>
+            <a:endParaRPr lang="en-US" dirty="0"/>
+          </a:p>
+        </p:txBody>
+      </p:sp>
+      <p:pic>
+        <p:nvPicPr>
+          <p:cNvPr id="4098" name="Picture 2"/>
+          <p:cNvPicPr>
+            <a:picLocks noChangeAspect="1" noChangeArrowheads="1"/>
+          </p:cNvPicPr>
+          <p:nvPr/>
+        </p:nvPicPr>
+        <p:blipFill>
+          <a:blip r:embed="rId2" cstate="print"/>
+          <a:srcRect/>
+          <a:stretch>
+            <a:fillRect/>
+          </a:stretch>
+        </p:blipFill>
+        <p:spPr bwMode="auto">
+          <a:xfrm>
+            <a:off x="533400" y="2579687"/>
+            <a:ext cx="3181350" cy="3419475"/>
+          </a:xfrm>
+          <a:prstGeom prst="rect">
+            <a:avLst/>
+          </a:prstGeom>
+          <a:noFill/>
+          <a:ln w="9525">
+            <a:noFill/>
+            <a:miter lim="800000"/>
+            <a:headEnd/>
+            <a:tailEnd/>
+          </a:ln>
+          <a:effectLst/>
+        </p:spPr>
+      </p:pic>
+      <p:pic>
+        <p:nvPicPr>
+          <p:cNvPr id="4" name="Picture 4"/>
+          <p:cNvPicPr>
+            <a:picLocks noChangeAspect="1" noChangeArrowheads="1"/>
+          </p:cNvPicPr>
+          <p:nvPr/>
+        </p:nvPicPr>
+        <p:blipFill>
+          <a:blip r:embed="rId3" cstate="print"/>
+          <a:srcRect/>
+          <a:stretch>
+            <a:fillRect/>
+          </a:stretch>
+        </p:blipFill>
+        <p:spPr bwMode="auto">
+          <a:xfrm>
+            <a:off x="3810000" y="3733800"/>
+            <a:ext cx="1333500" cy="1314450"/>
+          </a:xfrm>
+          <a:prstGeom prst="rect">
+            <a:avLst/>
+          </a:prstGeom>
+          <a:noFill/>
+          <a:ln w="9525">
+            <a:noFill/>
+            <a:miter lim="800000"/>
+            <a:headEnd/>
+            <a:tailEnd/>
+          </a:ln>
+        </p:spPr>
+      </p:pic>
+      <p:cxnSp>
+        <p:nvCxnSpPr>
+          <p:cNvPr id="12" name="Straight Arrow Connector 11"/>
+          <p:cNvCxnSpPr/>
+          <p:nvPr/>
+        </p:nvCxnSpPr>
+        <p:spPr>
+          <a:xfrm flipV="1">
+            <a:off x="3124200" y="2960687"/>
+            <a:ext cx="1828800" cy="609600"/>
+          </a:xfrm>
+          <a:prstGeom prst="straightConnector1">
+            <a:avLst/>
+          </a:prstGeom>
+          <a:ln>
+            <a:tailEnd type="arrow"/>
+          </a:ln>
+        </p:spPr>
+        <p:style>
+          <a:lnRef idx="3">
+            <a:schemeClr val="accent2"/>
+          </a:lnRef>
+          <a:fillRef idx="0">
+            <a:schemeClr val="accent2"/>
+          </a:fillRef>
+          <a:effectRef idx="2">
+            <a:schemeClr val="accent2"/>
+          </a:effectRef>
+          <a:fontRef idx="minor">
+            <a:schemeClr val="tx1"/>
+          </a:fontRef>
+        </p:style>
+      </p:cxnSp>
+      <p:sp>
+        <p:nvSpPr>
+          <p:cNvPr id="21" name="Rectangle 20"/>
+          <p:cNvSpPr/>
+          <p:nvPr/>
+        </p:nvSpPr>
+        <p:spPr>
+          <a:xfrm>
+            <a:off x="5562600" y="4343400"/>
+            <a:ext cx="2869503" cy="584775"/>
+          </a:xfrm>
+          <a:prstGeom prst="rect">
+            <a:avLst/>
+          </a:prstGeom>
+        </p:spPr>
+        <p:txBody>
+          <a:bodyPr wrap="none">
+            <a:spAutoFit/>
+          </a:bodyPr>
+          <a:lstStyle/>
+          <a:p>
+            <a:pPr marL="514350" indent="-514350"/>
+            <a:r>
+              <a:rPr lang="en-US" sz="3200" dirty="0" smtClean="0">
+                <a:latin typeface="+mj-lt"/>
+              </a:rPr>
+              <a:t>Product Backlog</a:t>
+            </a:r>
+            <a:endParaRPr lang="en-US" sz="3200" u="sng" dirty="0" smtClean="0">
+              <a:latin typeface="+mj-lt"/>
+            </a:endParaRPr>
+          </a:p>
+        </p:txBody>
+      </p:sp>
+      <p:sp>
+        <p:nvSpPr>
+          <p:cNvPr id="14" name="Rectangle 13"/>
+          <p:cNvSpPr/>
+          <p:nvPr/>
+        </p:nvSpPr>
+        <p:spPr>
+          <a:xfrm>
+            <a:off x="609600" y="1752600"/>
+            <a:ext cx="4572000" cy="769441"/>
+          </a:xfrm>
+          <a:prstGeom prst="rect">
+            <a:avLst/>
+          </a:prstGeom>
+        </p:spPr>
+        <p:style>
+          <a:lnRef idx="2">
+            <a:schemeClr val="dk1"/>
+          </a:lnRef>
+          <a:fillRef idx="1">
+            <a:schemeClr val="lt1"/>
+          </a:fillRef>
+          <a:effectRef idx="0">
+            <a:schemeClr val="dk1"/>
+          </a:effectRef>
+          <a:fontRef idx="minor">
+            <a:schemeClr val="dk1"/>
+          </a:fontRef>
+        </p:style>
+        <p:txBody>
+          <a:bodyPr wrap="square">
+            <a:spAutoFit/>
+          </a:bodyPr>
+          <a:lstStyle/>
+          <a:p>
+            <a:pPr algn="ctr"/>
+            <a:r>
+              <a:rPr lang="en-US" sz="2200" dirty="0" smtClean="0">
+                <a:solidFill>
+                  <a:schemeClr val="tx1"/>
+                </a:solidFill>
+                <a:latin typeface="+mj-lt"/>
+              </a:rPr>
+              <a:t>Refer to the </a:t>
+            </a:r>
+            <a:r>
+              <a:rPr lang="en-US" sz="2200" b="1" dirty="0" smtClean="0">
+                <a:solidFill>
+                  <a:schemeClr val="tx1"/>
+                </a:solidFill>
+                <a:latin typeface="+mj-lt"/>
+              </a:rPr>
+              <a:t>Software Requirements</a:t>
+            </a:r>
+            <a:r>
+              <a:rPr lang="en-US" sz="2200" dirty="0" smtClean="0">
+                <a:solidFill>
+                  <a:schemeClr val="tx1"/>
+                </a:solidFill>
+                <a:latin typeface="+mj-lt"/>
+              </a:rPr>
+              <a:t> course for more information.</a:t>
+            </a:r>
+            <a:endParaRPr lang="en-US" sz="2200" dirty="0">
+              <a:solidFill>
+                <a:schemeClr val="tx1"/>
+              </a:solidFill>
+              <a:latin typeface="+mj-lt"/>
+            </a:endParaRPr>
+          </a:p>
+        </p:txBody>
+      </p:sp>
+      <p:pic>
+        <p:nvPicPr>
+          <p:cNvPr id="1026" name="Picture 2" descr="https://encrypted-tbn0.gstatic.com/images?q=tbn:ANd9GcSFjELCnVms4p5uVj-2QT-D0xKkPIXw-rq3XA&amp;s"/>
+          <p:cNvPicPr>
+            <a:picLocks noChangeAspect="1" noChangeArrowheads="1"/>
+          </p:cNvPicPr>
+          <p:nvPr/>
+        </p:nvPicPr>
+        <p:blipFill>
+          <a:blip r:embed="rId4" cstate="print"/>
+          <a:srcRect/>
+          <a:stretch>
+            <a:fillRect/>
+          </a:stretch>
+        </p:blipFill>
+        <p:spPr bwMode="auto">
+          <a:xfrm>
+            <a:off x="5486400" y="1828800"/>
+            <a:ext cx="2143125" cy="2143125"/>
+          </a:xfrm>
+          <a:prstGeom prst="rect">
+            <a:avLst/>
+          </a:prstGeom>
+          <a:noFill/>
+        </p:spPr>
+      </p:pic>
+      <p:sp>
+        <p:nvSpPr>
+          <p:cNvPr id="11" name="Rectangle 10"/>
+          <p:cNvSpPr/>
+          <p:nvPr/>
+        </p:nvSpPr>
+        <p:spPr>
+          <a:xfrm>
+            <a:off x="3733800" y="5486400"/>
+            <a:ext cx="4572000" cy="830997"/>
+          </a:xfrm>
+          <a:prstGeom prst="rect">
+            <a:avLst/>
+          </a:prstGeom>
+        </p:spPr>
+        <p:style>
+          <a:lnRef idx="2">
+            <a:schemeClr val="dk1"/>
+          </a:lnRef>
+          <a:fillRef idx="1">
+            <a:schemeClr val="lt1"/>
+          </a:fillRef>
+          <a:effectRef idx="0">
+            <a:schemeClr val="dk1"/>
+          </a:effectRef>
+          <a:fontRef idx="minor">
+            <a:schemeClr val="dk1"/>
+          </a:fontRef>
+        </p:style>
+        <p:txBody>
+          <a:bodyPr>
+            <a:spAutoFit/>
+          </a:bodyPr>
+          <a:lstStyle/>
+          <a:p>
+            <a:pPr algn="ctr"/>
+            <a:r>
+              <a:rPr lang="en-US" sz="2400" dirty="0" smtClean="0"/>
+              <a:t>(</a:t>
+            </a:r>
+            <a:r>
+              <a:rPr lang="en-US" sz="2400" i="1" dirty="0" smtClean="0">
+                <a:solidFill>
+                  <a:srgbClr val="C00000"/>
+                </a:solidFill>
+              </a:rPr>
+              <a:t>Partial</a:t>
+            </a:r>
+            <a:r>
+              <a:rPr lang="en-US" sz="2400" dirty="0" smtClean="0"/>
+              <a:t>) Software Requirements Specification or Product Backlog</a:t>
+            </a:r>
+            <a:endParaRPr lang="en-US" sz="2400" dirty="0"/>
+          </a:p>
+        </p:txBody>
+      </p:sp>
+    </p:spTree>
+  </p:cSld>
+  <p:clrMapOvr>
+    <a:masterClrMapping/>
+  </p:clrMapOvr>
+  <p:timing>
+    <p:tnLst>
+      <p:par>
+        <p:cTn id="1" dur="indefinite" restart="never" nodeType="tmRoot"/>
+      </p:par>
+    </p:tnLst>
+  </p:timing>
+</p:sld>
+</file>
+
+<file path=ppt/slides/slide11.xml><?xml version="1.0" encoding="utf-8"?>
+<p:sld xmlns:a="http://schemas.openxmlformats.org/drawingml/2006/main" xmlns:r="http://schemas.openxmlformats.org/officeDocument/2006/relationships" xmlns:p="http://schemas.openxmlformats.org/presentationml/2006/main">
+  <p:cSld>
+    <p:spTree>
+      <p:nvGrpSpPr>
+        <p:cNvPr id="1" name=""/>
+        <p:cNvGrpSpPr/>
+        <p:nvPr/>
+      </p:nvGrpSpPr>
+      <p:grpSpPr>
+        <a:xfrm>
+          <a:off x="0" y="0"/>
+          <a:ext cx="0" cy="0"/>
+          <a:chOff x="0" y="0"/>
+          <a:chExt cx="0" cy="0"/>
+        </a:xfrm>
+      </p:grpSpPr>
+      <p:sp>
+        <p:nvSpPr>
+          <p:cNvPr id="2" name="Title 1"/>
+          <p:cNvSpPr>
+            <a:spLocks noGrp="1"/>
+          </p:cNvSpPr>
+          <p:nvPr>
+            <p:ph type="title"/>
+          </p:nvPr>
+        </p:nvSpPr>
+        <p:spPr/>
+        <p:txBody>
+          <a:bodyPr/>
+          <a:lstStyle/>
+          <a:p>
+            <a:r>
+              <a:rPr lang="en-US" dirty="0" smtClean="0"/>
               <a:t>Which Architecture?</a:t>
             </a:r>
             <a:endParaRPr lang="en-US" dirty="0"/>
@@ -10965,16 +11307,7 @@
                 </a:solidFill>
                 <a:latin typeface="+mj-lt"/>
               </a:rPr>
-              <a:t>Refer </a:t>
-            </a:r>
-            <a:r>
-              <a:rPr lang="en-US" sz="2200" dirty="0" smtClean="0">
-                <a:solidFill>
-                  <a:schemeClr val="tx1"/>
-                </a:solidFill>
-                <a:latin typeface="+mj-lt"/>
-              </a:rPr>
-              <a:t>to the </a:t>
+              <a:t>Refer to the </a:t>
             </a:r>
             <a:r>
               <a:rPr lang="en-US" sz="2200" b="1" dirty="0" smtClean="0">
@@ -11000,16 +11333,7 @@
                 </a:solidFill>
                 <a:latin typeface="+mj-lt"/>
               </a:rPr>
-              <a:t>for </a:t>
-            </a:r>
-            <a:r>
-              <a:rPr lang="en-US" sz="2200" dirty="0" smtClean="0">
-                <a:solidFill>
-                  <a:schemeClr val="tx1"/>
-                </a:solidFill>
-                <a:latin typeface="+mj-lt"/>
-              </a:rPr>
-              <a:t>more information.</a:t>
+              <a:t>for more information.</a:t>
             </a:r>
             <a:endParaRPr lang="en-US" sz="2200" dirty="0">
               <a:solidFill>
@@ -11028,7 +11352,7 @@
 </p:sld>
 </file>
 
-<file path=ppt/slides/slide11.xml><?xml version="1.0" encoding="utf-8"?>
+<file path=ppt/slides/slide12.xml><?xml version="1.0" encoding="utf-8"?>
 <p:sld xmlns:a="http://schemas.openxmlformats.org/drawingml/2006/main" xmlns:r="http://schemas.openxmlformats.org/officeDocument/2006/relationships" xmlns:p="http://schemas.openxmlformats.org/presentationml/2006/main">
   <p:cSld>
     <p:spTree>
@@ -11366,16 +11690,7 @@
                 </a:solidFill>
                 <a:latin typeface="+mj-lt"/>
               </a:rPr>
-              <a:t>Refer </a:t>
-            </a:r>
-            <a:r>
-              <a:rPr lang="en-US" sz="2200" dirty="0" smtClean="0">
-                <a:solidFill>
-                  <a:schemeClr val="tx1"/>
-                </a:solidFill>
-                <a:latin typeface="+mj-lt"/>
-              </a:rPr>
-              <a:t>to the </a:t>
+              <a:t>Refer to the </a:t>
             </a:r>
             <a:r>
               <a:rPr lang="en-US" sz="2200" b="1" dirty="0" smtClean="0">
@@ -11411,16 +11726,7 @@
                 </a:solidFill>
                 <a:latin typeface="+mj-lt"/>
               </a:rPr>
-              <a:t> courses for </a:t>
-            </a:r>
-            <a:r>
-              <a:rPr lang="en-US" sz="2200" dirty="0" smtClean="0">
-                <a:solidFill>
-                  <a:schemeClr val="tx1"/>
-                </a:solidFill>
-                <a:latin typeface="+mj-lt"/>
-              </a:rPr>
-              <a:t>more information.</a:t>
+              <a:t> courses for more information.</a:t>
             </a:r>
             <a:endParaRPr lang="en-US" sz="2200" dirty="0">
               <a:solidFill>
@@ -11446,7 +11752,7 @@
 </p:sld>
 </file>
 
-<file path=ppt/slides/slide12.xml><?xml version="1.0" encoding="utf-8"?>
+<file path=ppt/slides/slide13.xml><?xml version="1.0" encoding="utf-8"?>
 <p:sld xmlns:a="http://schemas.openxmlformats.org/drawingml/2006/main" xmlns:r="http://schemas.openxmlformats.org/officeDocument/2006/relationships" xmlns:p="http://schemas.openxmlformats.org/presentationml/2006/main">
   <p:cSld>
     <p:spTree>
@@ -11497,7 +11803,7 @@
 </p:sld>
 </file>
 
-<file path=ppt/slides/slide13.xml><?xml version="1.0" encoding="utf-8"?>
+<file path=ppt/slides/slide14.xml><?xml version="1.0" encoding="utf-8"?>
 <p:sld xmlns:a="http://schemas.openxmlformats.org/drawingml/2006/main" xmlns:r="http://schemas.openxmlformats.org/officeDocument/2006/relationships" xmlns:p="http://schemas.openxmlformats.org/presentationml/2006/main">
   <p:cSld>
     <p:spTree>
@@ -11618,7 +11924,7 @@
 </p:sld>
 </file>
 
-<file path=ppt/slides/slide14.xml><?xml version="1.0" encoding="utf-8"?>
+<file path=ppt/slides/slide15.xml><?xml version="1.0" encoding="utf-8"?>
 <p:sld xmlns:a="http://schemas.openxmlformats.org/drawingml/2006/main" xmlns:r="http://schemas.openxmlformats.org/officeDocument/2006/relationships" xmlns:p="http://schemas.openxmlformats.org/presentationml/2006/main">
   <p:cSld>
     <p:spTree>
@@ -11918,7 +12224,7 @@
 </p:sld>
 </file>
 
-<file path=ppt/slides/slide15.xml><?xml version="1.0" encoding="utf-8"?>
+<file path=ppt/slides/slide16.xml><?xml version="1.0" encoding="utf-8"?>
 <p:sld xmlns:a="http://schemas.openxmlformats.org/drawingml/2006/main" xmlns:r="http://schemas.openxmlformats.org/officeDocument/2006/relationships" xmlns:p="http://schemas.openxmlformats.org/presentationml/2006/main">
   <p:cSld>
     <p:spTree>
@@ -12050,7 +12356,7 @@
 </p:sld>
 </file>
 
-<file path=ppt/slides/slide16.xml><?xml version="1.0" encoding="utf-8"?>
+<file path=ppt/slides/slide17.xml><?xml version="1.0" encoding="utf-8"?>
 <p:sld xmlns:a="http://schemas.openxmlformats.org/drawingml/2006/main" xmlns:r="http://schemas.openxmlformats.org/officeDocument/2006/relationships" xmlns:p="http://schemas.openxmlformats.org/presentationml/2006/main">
   <p:cSld>
     <p:spTree>
@@ -12246,7 +12552,7 @@
 </p:sld>
 </file>
 
-<file path=ppt/slides/slide17.xml><?xml version="1.0" encoding="utf-8"?>
+<file path=ppt/slides/slide18.xml><?xml version="1.0" encoding="utf-8"?>
 <p:sld xmlns:a="http://schemas.openxmlformats.org/drawingml/2006/main" xmlns:r="http://schemas.openxmlformats.org/officeDocument/2006/relationships" xmlns:p="http://schemas.openxmlformats.org/presentationml/2006/main">
   <p:cSld>
     <p:spTree>
@@ -12437,130 +12743,6 @@
 </p:sld>
 </file>
 
-<file path=ppt/slides/slide18.xml><?xml version="1.0" encoding="utf-8"?>
-<p:sld xmlns:a="http://schemas.openxmlformats.org/drawingml/2006/main" xmlns:r="http://schemas.openxmlformats.org/officeDocument/2006/relationships" xmlns:p="http://schemas.openxmlformats.org/presentationml/2006/main">
-  <p:cSld>
-    <p:spTree>
-      <p:nvGrpSpPr>
-        <p:cNvPr id="1" name=""/>
-        <p:cNvGrpSpPr/>
-        <p:nvPr/>
-      </p:nvGrpSpPr>
-      <p:grpSpPr>
-        <a:xfrm>
-          <a:off x="0" y="0"/>
-          <a:ext cx="0" cy="0"/>
-          <a:chOff x="0" y="0"/>
-          <a:chExt cx="0" cy="0"/>
-        </a:xfrm>
-      </p:grpSpPr>
-      <p:sp>
-        <p:nvSpPr>
-          <p:cNvPr id="2" name="Title 1"/>
-          <p:cNvSpPr>
-            <a:spLocks noGrp="1"/>
-          </p:cNvSpPr>
-          <p:nvPr>
-            <p:ph type="title"/>
-          </p:nvPr>
-        </p:nvSpPr>
-        <p:spPr/>
-        <p:txBody>
-          <a:bodyPr/>
-          <a:lstStyle/>
-          <a:p>
-            <a:r>
-              <a:rPr lang="en-US" dirty="0" smtClean="0"/>
-              <a:t>Stakeholder Analysis</a:t>
-            </a:r>
-            <a:endParaRPr lang="en-US" dirty="0"/>
-          </a:p>
-        </p:txBody>
-      </p:sp>
-      <p:sp>
-        <p:nvSpPr>
-          <p:cNvPr id="3" name="Content Placeholder 2"/>
-          <p:cNvSpPr>
-            <a:spLocks noGrp="1"/>
-          </p:cNvSpPr>
-          <p:nvPr>
-            <p:ph idx="1"/>
-          </p:nvPr>
-        </p:nvSpPr>
-        <p:spPr/>
-        <p:txBody>
-          <a:bodyPr/>
-          <a:lstStyle/>
-          <a:p>
-            <a:r>
-              <a:rPr lang="en-US" sz="2400" dirty="0" smtClean="0"/>
-              <a:t>Businesses cannot exist without external customers.</a:t>
-            </a:r>
-          </a:p>
-          <a:p>
-            <a:r>
-              <a:rPr lang="en-US" sz="2400" dirty="0" smtClean="0"/>
-              <a:t>External customers </a:t>
-            </a:r>
-            <a:r>
-              <a:rPr lang="en-US" sz="2400" dirty="0" smtClean="0">
-                <a:sym typeface="Wingdings" pitchFamily="2" charset="2"/>
-              </a:rPr>
-              <a:t> </a:t>
-            </a:r>
-            <a:r>
-              <a:rPr lang="en-US" sz="2400" dirty="0" smtClean="0"/>
-              <a:t>External stakeholders.</a:t>
-            </a:r>
-          </a:p>
-          <a:p>
-            <a:r>
-              <a:rPr lang="en-US" sz="2400" dirty="0" smtClean="0"/>
-              <a:t>Internal customers </a:t>
-            </a:r>
-            <a:r>
-              <a:rPr lang="en-US" sz="2400" dirty="0" smtClean="0">
-                <a:sym typeface="Wingdings" pitchFamily="2" charset="2"/>
-              </a:rPr>
-              <a:t> Internal stakeholders.</a:t>
-            </a:r>
-          </a:p>
-        </p:txBody>
-      </p:sp>
-      <p:pic>
-        <p:nvPicPr>
-          <p:cNvPr id="4" name="Picture 2" descr="https://www.pmi.org/kasimage/5e15b89e-6c9b-4e40-8e56-0c5d2c975aee/f2.jpg"/>
-          <p:cNvPicPr>
-            <a:picLocks noChangeAspect="1" noChangeArrowheads="1"/>
-          </p:cNvPicPr>
-          <p:nvPr/>
-        </p:nvPicPr>
-        <p:blipFill>
-          <a:blip r:embed="rId2" cstate="print"/>
-          <a:srcRect/>
-          <a:stretch>
-            <a:fillRect/>
-          </a:stretch>
-        </p:blipFill>
-        <p:spPr bwMode="auto">
-          <a:xfrm>
-            <a:off x="2286000" y="3270504"/>
-            <a:ext cx="4126992" cy="2901696"/>
-          </a:xfrm>
-          <a:prstGeom prst="rect">
-            <a:avLst/>
-          </a:prstGeom>
-          <a:noFill/>
-        </p:spPr>
-      </p:pic>
-    </p:spTree>
-  </p:cSld>
-  <p:clrMapOvr>
-    <a:masterClrMapping/>
-  </p:clrMapOvr>
-</p:sld>
-</file>
-
 <file path=ppt/slides/slide19.xml><?xml version="1.0" encoding="utf-8"?>
 <p:sld xmlns:a="http://schemas.openxmlformats.org/drawingml/2006/main" xmlns:r="http://schemas.openxmlformats.org/officeDocument/2006/relationships" xmlns:p="http://schemas.openxmlformats.org/presentationml/2006/main">
   <p:cSld>
@@ -12595,15 +12777,65 @@
           <a:p>
             <a:r>
               <a:rPr lang="en-US" dirty="0" smtClean="0"/>
-              <a:t>SWOT Analysis</a:t>
+              <a:t>Stakeholder Analysis</a:t>
             </a:r>
             <a:endParaRPr lang="en-US" dirty="0"/>
+          </a:p>
+        </p:txBody>
+      </p:sp>
+      <p:sp>
+        <p:nvSpPr>
+          <p:cNvPr id="3" name="Content Placeholder 2"/>
+          <p:cNvSpPr>
+            <a:spLocks noGrp="1"/>
+          </p:cNvSpPr>
+          <p:nvPr>
+            <p:ph idx="1"/>
+          </p:nvPr>
+        </p:nvSpPr>
+        <p:spPr/>
+        <p:txBody>
+          <a:bodyPr/>
+          <a:lstStyle/>
+          <a:p>
+            <a:r>
+              <a:rPr lang="en-US" sz="2400" dirty="0" smtClean="0"/>
+              <a:t>Businesses cannot exist without external customers.</a:t>
+            </a:r>
+          </a:p>
+          <a:p>
+            <a:r>
+              <a:rPr lang="en-US" sz="2400" dirty="0" smtClean="0"/>
+              <a:t>External customers </a:t>
+            </a:r>
+            <a:r>
+              <a:rPr lang="en-US" sz="2400" dirty="0" smtClean="0">
+                <a:sym typeface="Wingdings" pitchFamily="2" charset="2"/>
+              </a:rPr>
+              <a:t> </a:t>
+            </a:r>
+            <a:r>
+              <a:rPr lang="en-US" sz="2400" dirty="0" smtClean="0"/>
+              <a:t>External stakeholders.</a:t>
+            </a:r>
+          </a:p>
+          <a:p>
+            <a:r>
+              <a:rPr lang="en-US" sz="2400" dirty="0" smtClean="0"/>
+              <a:t>Internal customers </a:t>
+            </a:r>
+            <a:r>
+              <a:rPr lang="en-US" sz="2400" dirty="0" smtClean="0">
+                <a:sym typeface="Wingdings" pitchFamily="2" charset="2"/>
+              </a:rPr>
+              <a:t> Internal stakeholders.</a:t>
+            </a:r>
           </a:p>
         </p:txBody>
       </p:sp>
       <p:pic>
         <p:nvPicPr>
-          <p:cNvPr id="3" name="Picture 2"/>
+          <p:cNvPr id="4" name="Picture 2" descr="https://www.pmi.org/kasimage/5e15b89e-6c9b-4e40-8e56-0c5d2c975aee/f2.jpg"/>
           <p:cNvPicPr>
             <a:picLocks noChangeAspect="1" noChangeArrowheads="1"/>
           </p:cNvPicPr>
@@ -12618,19 +12850,13 @@
         </p:blipFill>
         <p:spPr bwMode="auto">
           <a:xfrm>
-            <a:off x="2006600" y="2133600"/>
-            <a:ext cx="5080000" cy="3651250"/>
+            <a:off x="2286000" y="3270504"/>
+            <a:ext cx="4126992" cy="2901696"/>
           </a:xfrm>
           <a:prstGeom prst="rect">
             <a:avLst/>
           </a:prstGeom>
           <a:noFill/>
-          <a:ln w="9525">
-            <a:noFill/>
-            <a:miter lim="800000"/>
-            <a:headEnd/>
-            <a:tailEnd/>
-          </a:ln>
         </p:spPr>
       </p:pic>
     </p:spTree>
@@ -12790,11 +13016,7 @@
             </a:pPr>
             <a:r>
               <a:rPr lang="en-US" sz="2200" dirty="0" smtClean="0"/>
-              <a:t>To create </a:t>
-            </a:r>
-            <a:r>
-              <a:rPr lang="en-US" sz="2200" dirty="0" smtClean="0"/>
-              <a:t>a </a:t>
+              <a:t>To create a </a:t>
             </a:r>
             <a:r>
               <a:rPr lang="en-US" sz="2200" i="1" dirty="0" smtClean="0">
@@ -12821,11 +13043,7 @@
             </a:pPr>
             <a:r>
               <a:rPr lang="en-US" sz="2200" dirty="0" smtClean="0"/>
-              <a:t>To </a:t>
-            </a:r>
-            <a:r>
-              <a:rPr lang="en-US" sz="2200" dirty="0" smtClean="0"/>
-              <a:t>create </a:t>
+              <a:t>To create </a:t>
             </a:r>
             <a:r>
               <a:rPr lang="en-US" sz="2200" smtClean="0"/>
@@ -12856,11 +13074,7 @@
             </a:pPr>
             <a:r>
               <a:rPr lang="en-US" sz="2200" dirty="0" smtClean="0"/>
-              <a:t>To </a:t>
-            </a:r>
-            <a:r>
-              <a:rPr lang="en-US" sz="2200" dirty="0" smtClean="0"/>
-              <a:t>create a </a:t>
+              <a:t>To create a </a:t>
             </a:r>
             <a:r>
               <a:rPr lang="en-US" sz="2200" i="1" dirty="0" smtClean="0">
@@ -12914,11 +13128,7 @@
             </a:pPr>
             <a:r>
               <a:rPr lang="en-US" sz="2200" dirty="0" smtClean="0"/>
-              <a:t>To </a:t>
-            </a:r>
-            <a:r>
-              <a:rPr lang="en-US" sz="2200" dirty="0" smtClean="0"/>
-              <a:t>create a </a:t>
+              <a:t>To create a </a:t>
             </a:r>
             <a:r>
               <a:rPr lang="en-US" sz="2200" i="1" dirty="0" smtClean="0">
@@ -12945,11 +13155,7 @@
             </a:pPr>
             <a:r>
               <a:rPr lang="en-US" sz="2200" dirty="0" smtClean="0"/>
-              <a:t>To </a:t>
-            </a:r>
-            <a:r>
-              <a:rPr lang="en-US" sz="2200" dirty="0" smtClean="0"/>
-              <a:t>create a </a:t>
+              <a:t>To create a </a:t>
             </a:r>
             <a:r>
               <a:rPr lang="en-US" sz="2200" i="1" dirty="0" smtClean="0">
@@ -13053,6 +13259,86 @@
           <a:p>
             <a:r>
               <a:rPr lang="en-US" dirty="0" smtClean="0"/>
+              <a:t>SWOT Analysis</a:t>
+            </a:r>
+            <a:endParaRPr lang="en-US" dirty="0"/>
+          </a:p>
+        </p:txBody>
+      </p:sp>
+      <p:pic>
+        <p:nvPicPr>
+          <p:cNvPr id="3" name="Picture 2"/>
+          <p:cNvPicPr>
+            <a:picLocks noChangeAspect="1" noChangeArrowheads="1"/>
+          </p:cNvPicPr>
+          <p:nvPr/>
+        </p:nvPicPr>
+        <p:blipFill>
+          <a:blip r:embed="rId2" cstate="print"/>
+          <a:srcRect/>
+          <a:stretch>
+            <a:fillRect/>
+          </a:stretch>
+        </p:blipFill>
+        <p:spPr bwMode="auto">
+          <a:xfrm>
+            <a:off x="2006600" y="2133600"/>
+            <a:ext cx="5080000" cy="3651250"/>
+          </a:xfrm>
+          <a:prstGeom prst="rect">
+            <a:avLst/>
+          </a:prstGeom>
+          <a:noFill/>
+          <a:ln w="9525">
+            <a:noFill/>
+            <a:miter lim="800000"/>
+            <a:headEnd/>
+            <a:tailEnd/>
+          </a:ln>
+        </p:spPr>
+      </p:pic>
+    </p:spTree>
+  </p:cSld>
+  <p:clrMapOvr>
+    <a:masterClrMapping/>
+  </p:clrMapOvr>
+</p:sld>
+</file>
+
+<file path=ppt/slides/slide21.xml><?xml version="1.0" encoding="utf-8"?>
+<p:sld xmlns:a="http://schemas.openxmlformats.org/drawingml/2006/main" xmlns:r="http://schemas.openxmlformats.org/officeDocument/2006/relationships" xmlns:p="http://schemas.openxmlformats.org/presentationml/2006/main">
+  <p:cSld>
+    <p:spTree>
+      <p:nvGrpSpPr>
+        <p:cNvPr id="1" name=""/>
+        <p:cNvGrpSpPr/>
+        <p:nvPr/>
+      </p:nvGrpSpPr>
+      <p:grpSpPr>
+        <a:xfrm>
+          <a:off x="0" y="0"/>
+          <a:ext cx="0" cy="0"/>
+          <a:chOff x="0" y="0"/>
+          <a:chExt cx="0" cy="0"/>
+        </a:xfrm>
+      </p:grpSpPr>
+      <p:sp>
+        <p:nvSpPr>
+          <p:cNvPr id="2" name="Title 1"/>
+          <p:cNvSpPr>
+            <a:spLocks noGrp="1"/>
+          </p:cNvSpPr>
+          <p:nvPr>
+            <p:ph type="title"/>
+          </p:nvPr>
+        </p:nvSpPr>
+        <p:spPr/>
+        <p:txBody>
+          <a:bodyPr/>
+          <a:lstStyle/>
+          <a:p>
+            <a:r>
+              <a:rPr lang="en-US" dirty="0" smtClean="0"/>
               <a:t>Benchmarking</a:t>
             </a:r>
             <a:endParaRPr lang="en-US" dirty="0"/>
@@ -13099,7 +13385,7 @@
 </p:sld>
 </file>
 
-<file path=ppt/slides/slide21.xml><?xml version="1.0" encoding="utf-8"?>
+<file path=ppt/slides/slide22.xml><?xml version="1.0" encoding="utf-8"?>
 <p:sld xmlns:a="http://schemas.openxmlformats.org/drawingml/2006/main" xmlns:r="http://schemas.openxmlformats.org/officeDocument/2006/relationships" xmlns:p="http://schemas.openxmlformats.org/presentationml/2006/main">
   <p:cSld>
     <p:spTree>
@@ -13203,7 +13489,7 @@
 </p:sld>
 </file>
 
-<file path=ppt/slides/slide22.xml><?xml version="1.0" encoding="utf-8"?>
+<file path=ppt/slides/slide23.xml><?xml version="1.0" encoding="utf-8"?>
 <p:sld xmlns:a="http://schemas.openxmlformats.org/drawingml/2006/main" xmlns:r="http://schemas.openxmlformats.org/officeDocument/2006/relationships" xmlns:p="http://schemas.openxmlformats.org/presentationml/2006/main">
   <p:cSld>
     <p:spTree>
@@ -13307,7 +13593,7 @@
 </p:sld>
 </file>
 
-<file path=ppt/slides/slide23.xml><?xml version="1.0" encoding="utf-8"?>
+<file path=ppt/slides/slide24.xml><?xml version="1.0" encoding="utf-8"?>
 <p:sld xmlns:a="http://schemas.openxmlformats.org/drawingml/2006/main" xmlns:r="http://schemas.openxmlformats.org/officeDocument/2006/relationships" xmlns:p="http://schemas.openxmlformats.org/presentationml/2006/main">
   <p:cSld>
     <p:spTree>
@@ -13358,7 +13644,7 @@
 </p:sld>
 </file>
 
-<file path=ppt/slides/slide24.xml><?xml version="1.0" encoding="utf-8"?>
+<file path=ppt/slides/slide25.xml><?xml version="1.0" encoding="utf-8"?>
 <p:sld xmlns:a="http://schemas.openxmlformats.org/drawingml/2006/main" xmlns:r="http://schemas.openxmlformats.org/officeDocument/2006/relationships" xmlns:p="http://schemas.openxmlformats.org/presentationml/2006/main">
   <p:cSld>
     <p:spTree>
@@ -13700,7 +13986,7 @@
 </p:sld>
 </file>
 
-<file path=ppt/slides/slide25.xml><?xml version="1.0" encoding="utf-8"?>
+<file path=ppt/slides/slide26.xml><?xml version="1.0" encoding="utf-8"?>
 <p:sld xmlns:a="http://schemas.openxmlformats.org/drawingml/2006/main" xmlns:r="http://schemas.openxmlformats.org/officeDocument/2006/relationships" xmlns:p="http://schemas.openxmlformats.org/presentationml/2006/main">
   <p:cSld>
     <p:spTree>
@@ -13941,7 +14227,7 @@
 </p:sld>
 </file>
 
-<file path=ppt/slides/slide26.xml><?xml version="1.0" encoding="utf-8"?>
+<file path=ppt/slides/slide27.xml><?xml version="1.0" encoding="utf-8"?>
 <p:sld xmlns:a="http://schemas.openxmlformats.org/drawingml/2006/main" xmlns:r="http://schemas.openxmlformats.org/officeDocument/2006/relationships" xmlns:p="http://schemas.openxmlformats.org/presentationml/2006/main">
   <p:cSld>
     <p:spTree>
@@ -14139,7 +14425,7 @@
 </p:sld>
 </file>
 
-<file path=ppt/slides/slide27.xml><?xml version="1.0" encoding="utf-8"?>
+<file path=ppt/slides/slide28.xml><?xml version="1.0" encoding="utf-8"?>
 <p:sld xmlns:a="http://schemas.openxmlformats.org/drawingml/2006/main" xmlns:r="http://schemas.openxmlformats.org/officeDocument/2006/relationships" xmlns:p="http://schemas.openxmlformats.org/presentationml/2006/main">
   <p:cSld>
     <p:spTree>
@@ -14190,7 +14476,7 @@
 </p:sld>
 </file>
 
-<file path=ppt/slides/slide28.xml><?xml version="1.0" encoding="utf-8"?>
+<file path=ppt/slides/slide29.xml><?xml version="1.0" encoding="utf-8"?>
 <p:sld xmlns:a="http://schemas.openxmlformats.org/drawingml/2006/main" xmlns:r="http://schemas.openxmlformats.org/officeDocument/2006/relationships" xmlns:p="http://schemas.openxmlformats.org/presentationml/2006/main">
   <p:cSld>
     <p:spTree>
@@ -14485,16 +14771,7 @@
                 </a:solidFill>
                 <a:latin typeface="+mj-lt"/>
               </a:rPr>
-              <a:t>Refer </a:t>
-            </a:r>
-            <a:r>
-              <a:rPr lang="en-US" sz="2200" dirty="0" smtClean="0">
-                <a:solidFill>
-                  <a:schemeClr val="tx1"/>
-                </a:solidFill>
-                <a:latin typeface="+mj-lt"/>
-              </a:rPr>
-              <a:t>to the </a:t>
+              <a:t>Refer to the </a:t>
             </a:r>
             <a:r>
               <a:rPr lang="en-US" sz="2200" b="1" dirty="0" smtClean="0">
@@ -14520,23 +14797,8 @@
                 </a:solidFill>
                 <a:latin typeface="+mj-lt"/>
               </a:rPr>
-              <a:t>for </a:t>
-            </a:r>
-            <a:r>
-              <a:rPr lang="en-US" sz="2200" dirty="0" smtClean="0">
-                <a:solidFill>
-                  <a:schemeClr val="tx1"/>
-                </a:solidFill>
-                <a:latin typeface="+mj-lt"/>
-              </a:rPr>
-              <a:t>more information.</a:t>
-            </a:r>
-            <a:endParaRPr lang="en-US" sz="2200" dirty="0" smtClean="0">
-              <a:solidFill>
-                <a:schemeClr val="tx1"/>
-              </a:solidFill>
-              <a:latin typeface="+mj-lt"/>
-            </a:endParaRPr>
+              <a:t>for more information.</a:t>
+            </a:r>
           </a:p>
         </p:txBody>
       </p:sp>
@@ -14545,86 +14807,6 @@
   <p:clrMapOvr>
     <a:masterClrMapping/>
   </p:clrMapOvr>
-</p:sld>
-</file>
-
-<file path=ppt/slides/slide29.xml><?xml version="1.0" encoding="utf-8"?>
-<p:sld xmlns:a="http://schemas.openxmlformats.org/drawingml/2006/main" xmlns:r="http://schemas.openxmlformats.org/officeDocument/2006/relationships" xmlns:p="http://schemas.openxmlformats.org/presentationml/2006/main">
-  <p:cSld>
-    <p:spTree>
-      <p:nvGrpSpPr>
-        <p:cNvPr id="1" name=""/>
-        <p:cNvGrpSpPr/>
-        <p:nvPr/>
-      </p:nvGrpSpPr>
-      <p:grpSpPr>
-        <a:xfrm>
-          <a:off x="0" y="0"/>
-          <a:ext cx="0" cy="0"/>
-          <a:chOff x="0" y="0"/>
-          <a:chExt cx="0" cy="0"/>
-        </a:xfrm>
-      </p:grpSpPr>
-      <p:sp>
-        <p:nvSpPr>
-          <p:cNvPr id="18434" name="Title 1"/>
-          <p:cNvSpPr>
-            <a:spLocks noGrp="1"/>
-          </p:cNvSpPr>
-          <p:nvPr>
-            <p:ph type="title"/>
-          </p:nvPr>
-        </p:nvSpPr>
-        <p:spPr/>
-        <p:txBody>
-          <a:bodyPr/>
-          <a:lstStyle/>
-          <a:p>
-            <a:pPr eaLnBrk="1" hangingPunct="1"/>
-            <a:r>
-              <a:rPr lang="en-US" dirty="0" smtClean="0"/>
-              <a:t>Thank You &amp; See You Again</a:t>
-            </a:r>
-          </a:p>
-        </p:txBody>
-      </p:sp>
-      <p:pic>
-        <p:nvPicPr>
-          <p:cNvPr id="5" name="Content Placeholder 4"/>
-          <p:cNvPicPr>
-            <a:picLocks noGrp="1" noChangeAspect="1" noChangeArrowheads="1"/>
-          </p:cNvPicPr>
-          <p:nvPr>
-            <p:ph idx="1"/>
-          </p:nvPr>
-        </p:nvPicPr>
-        <p:blipFill>
-          <a:blip r:embed="rId2" cstate="print"/>
-          <a:srcRect/>
-          <a:stretch>
-            <a:fillRect/>
-          </a:stretch>
-        </p:blipFill>
-        <p:spPr>
-          <a:xfrm>
-            <a:off x="1143000" y="1676400"/>
-            <a:ext cx="6810375" cy="4525963"/>
-          </a:xfrm>
-          <a:noFill/>
-        </p:spPr>
-      </p:pic>
-    </p:spTree>
-  </p:cSld>
-  <p:clrMapOvr>
-    <a:masterClrMapping/>
-  </p:clrMapOvr>
-  <p:timing>
-    <p:tnLst>
-      <p:par>
-        <p:cTn id="1" dur="indefinite" restart="never" nodeType="tmRoot"/>
-      </p:par>
-    </p:tnLst>
-  </p:timing>
 </p:sld>
 </file>
 
@@ -14766,11 +14948,7 @@
             </a:pPr>
             <a:r>
               <a:rPr lang="en-US" sz="2400" dirty="0" smtClean="0"/>
-              <a:t>Architecture</a:t>
-            </a:r>
-            <a:r>
-              <a:rPr lang="en-US" sz="2400" dirty="0" smtClean="0"/>
-              <a:t>.</a:t>
+              <a:t>Architecture.</a:t>
             </a:r>
           </a:p>
           <a:p>
@@ -14790,11 +14968,7 @@
             </a:pPr>
             <a:r>
               <a:rPr lang="en-US" sz="2400" dirty="0" smtClean="0"/>
-              <a:t>Feasibility </a:t>
-            </a:r>
-            <a:r>
-              <a:rPr lang="en-US" sz="2400" dirty="0" smtClean="0"/>
-              <a:t>study report.</a:t>
+              <a:t>Feasibility study report.</a:t>
             </a:r>
           </a:p>
           <a:p>
@@ -14814,11 +14988,7 @@
             </a:pPr>
             <a:r>
               <a:rPr lang="en-US" sz="2400" dirty="0" smtClean="0"/>
-              <a:t>Process </a:t>
-            </a:r>
-            <a:r>
-              <a:rPr lang="en-US" sz="2400" dirty="0" smtClean="0"/>
-              <a:t>definition document.</a:t>
+              <a:t>Process definition document.</a:t>
             </a:r>
           </a:p>
           <a:p>
@@ -14835,6 +15005,86 @@
   <p:clrMapOvr>
     <a:masterClrMapping/>
   </p:clrMapOvr>
+</p:sld>
+</file>
+
+<file path=ppt/slides/slide30.xml><?xml version="1.0" encoding="utf-8"?>
+<p:sld xmlns:a="http://schemas.openxmlformats.org/drawingml/2006/main" xmlns:r="http://schemas.openxmlformats.org/officeDocument/2006/relationships" xmlns:p="http://schemas.openxmlformats.org/presentationml/2006/main">
+  <p:cSld>
+    <p:spTree>
+      <p:nvGrpSpPr>
+        <p:cNvPr id="1" name=""/>
+        <p:cNvGrpSpPr/>
+        <p:nvPr/>
+      </p:nvGrpSpPr>
+      <p:grpSpPr>
+        <a:xfrm>
+          <a:off x="0" y="0"/>
+          <a:ext cx="0" cy="0"/>
+          <a:chOff x="0" y="0"/>
+          <a:chExt cx="0" cy="0"/>
+        </a:xfrm>
+      </p:grpSpPr>
+      <p:sp>
+        <p:nvSpPr>
+          <p:cNvPr id="18434" name="Title 1"/>
+          <p:cNvSpPr>
+            <a:spLocks noGrp="1"/>
+          </p:cNvSpPr>
+          <p:nvPr>
+            <p:ph type="title"/>
+          </p:nvPr>
+        </p:nvSpPr>
+        <p:spPr/>
+        <p:txBody>
+          <a:bodyPr/>
+          <a:lstStyle/>
+          <a:p>
+            <a:pPr eaLnBrk="1" hangingPunct="1"/>
+            <a:r>
+              <a:rPr lang="en-US" dirty="0" smtClean="0"/>
+              <a:t>Thank You &amp; See You Again</a:t>
+            </a:r>
+          </a:p>
+        </p:txBody>
+      </p:sp>
+      <p:pic>
+        <p:nvPicPr>
+          <p:cNvPr id="5" name="Content Placeholder 4"/>
+          <p:cNvPicPr>
+            <a:picLocks noGrp="1" noChangeAspect="1" noChangeArrowheads="1"/>
+          </p:cNvPicPr>
+          <p:nvPr>
+            <p:ph idx="1"/>
+          </p:nvPr>
+        </p:nvPicPr>
+        <p:blipFill>
+          <a:blip r:embed="rId2" cstate="print"/>
+          <a:srcRect/>
+          <a:stretch>
+            <a:fillRect/>
+          </a:stretch>
+        </p:blipFill>
+        <p:spPr>
+          <a:xfrm>
+            <a:off x="1143000" y="1676400"/>
+            <a:ext cx="6810375" cy="4525963"/>
+          </a:xfrm>
+          <a:noFill/>
+        </p:spPr>
+      </p:pic>
+    </p:spTree>
+  </p:cSld>
+  <p:clrMapOvr>
+    <a:masterClrMapping/>
+  </p:clrMapOvr>
+  <p:timing>
+    <p:tnLst>
+      <p:par>
+        <p:cTn id="1" dur="indefinite" restart="never" nodeType="tmRoot"/>
+      </p:par>
+    </p:tnLst>
+  </p:timing>
 </p:sld>
 </file>
 
@@ -15341,6 +15591,241 @@
       </p:grpSpPr>
       <p:pic>
         <p:nvPicPr>
+          <p:cNvPr id="5" name="Picture 3"/>
+          <p:cNvPicPr>
+            <a:picLocks noChangeAspect="1" noChangeArrowheads="1"/>
+          </p:cNvPicPr>
+          <p:nvPr/>
+        </p:nvPicPr>
+        <p:blipFill>
+          <a:blip r:embed="rId2" cstate="print"/>
+          <a:srcRect/>
+          <a:stretch>
+            <a:fillRect/>
+          </a:stretch>
+        </p:blipFill>
+        <p:spPr bwMode="auto">
+          <a:xfrm>
+            <a:off x="6429786" y="332437"/>
+            <a:ext cx="2257014" cy="1496363"/>
+          </a:xfrm>
+          <a:prstGeom prst="rect">
+            <a:avLst/>
+          </a:prstGeom>
+          <a:noFill/>
+          <a:ln w="9525">
+            <a:noFill/>
+            <a:miter lim="800000"/>
+            <a:headEnd/>
+            <a:tailEnd/>
+          </a:ln>
+        </p:spPr>
+      </p:pic>
+      <p:sp>
+        <p:nvSpPr>
+          <p:cNvPr id="2" name="Title 1"/>
+          <p:cNvSpPr>
+            <a:spLocks noGrp="1"/>
+          </p:cNvSpPr>
+          <p:nvPr>
+            <p:ph type="title"/>
+          </p:nvPr>
+        </p:nvSpPr>
+        <p:spPr/>
+        <p:txBody>
+          <a:bodyPr/>
+          <a:lstStyle/>
+          <a:p>
+            <a:r>
+              <a:rPr lang="en-US" dirty="0" smtClean="0"/>
+              <a:t>Team Forming</a:t>
+            </a:r>
+            <a:endParaRPr lang="en-US" dirty="0"/>
+          </a:p>
+        </p:txBody>
+      </p:sp>
+      <p:sp>
+        <p:nvSpPr>
+          <p:cNvPr id="3" name="Content Placeholder 2"/>
+          <p:cNvSpPr>
+            <a:spLocks noGrp="1"/>
+          </p:cNvSpPr>
+          <p:nvPr>
+            <p:ph idx="1"/>
+          </p:nvPr>
+        </p:nvSpPr>
+        <p:spPr>
+          <a:xfrm>
+            <a:off x="457200" y="1676400"/>
+            <a:ext cx="8229600" cy="3429000"/>
+          </a:xfrm>
+        </p:spPr>
+        <p:txBody>
+          <a:bodyPr/>
+          <a:lstStyle/>
+          <a:p>
+            <a:r>
+              <a:rPr lang="en-US" sz="2000" dirty="0" smtClean="0">
+                <a:latin typeface="Calibri" pitchFamily="34" charset="0"/>
+              </a:rPr>
+              <a:t>Select 8 </a:t>
+            </a:r>
+            <a:r>
+              <a:rPr lang="en-US" sz="2000" i="1" dirty="0" smtClean="0">
+                <a:solidFill>
+                  <a:srgbClr val="C00000"/>
+                </a:solidFill>
+                <a:latin typeface="Calibri" pitchFamily="34" charset="0"/>
+              </a:rPr>
+              <a:t>team leaders</a:t>
+            </a:r>
+            <a:r>
+              <a:rPr lang="en-US" sz="2000" dirty="0" smtClean="0">
+                <a:latin typeface="Calibri" pitchFamily="34" charset="0"/>
+              </a:rPr>
+              <a:t>. </a:t>
+            </a:r>
+            <a:endParaRPr lang="vi-VN" sz="2000" dirty="0" smtClean="0">
+              <a:latin typeface="Calibri" pitchFamily="34" charset="0"/>
+            </a:endParaRPr>
+          </a:p>
+          <a:p>
+            <a:r>
+              <a:rPr lang="en-US" sz="2000" dirty="0" smtClean="0">
+                <a:latin typeface="Calibri" pitchFamily="34" charset="0"/>
+              </a:rPr>
+              <a:t>Students select a team for themselves. Each team has </a:t>
+            </a:r>
+            <a:r>
+              <a:rPr lang="en-US" sz="2000" i="1" dirty="0" smtClean="0">
+                <a:solidFill>
+                  <a:srgbClr val="C00000"/>
+                </a:solidFill>
+                <a:latin typeface="Calibri" pitchFamily="34" charset="0"/>
+              </a:rPr>
+              <a:t>maximum of 5 members (including a team leader)</a:t>
+            </a:r>
+            <a:r>
+              <a:rPr lang="en-US" sz="2000" dirty="0" smtClean="0">
+                <a:latin typeface="Calibri" pitchFamily="34" charset="0"/>
+              </a:rPr>
+              <a:t>.</a:t>
+            </a:r>
+          </a:p>
+          <a:p>
+            <a:r>
+              <a:rPr lang="en-US" sz="2000" dirty="0" smtClean="0">
+                <a:latin typeface="Calibri" pitchFamily="34" charset="0"/>
+              </a:rPr>
+              <a:t>If there are surplus students, some teams can have 8 people.</a:t>
+            </a:r>
+          </a:p>
+          <a:p>
+            <a:r>
+              <a:rPr lang="en-US" sz="2000" dirty="0" smtClean="0">
+                <a:latin typeface="Calibri" pitchFamily="34" charset="0"/>
+              </a:rPr>
+              <a:t>Team leaders send their team members list to class leader.</a:t>
+            </a:r>
+            <a:endParaRPr lang="vi-VN" sz="2000" dirty="0" smtClean="0">
+              <a:latin typeface="Calibri" pitchFamily="34" charset="0"/>
+            </a:endParaRPr>
+          </a:p>
+          <a:p>
+            <a:r>
+              <a:rPr lang="en-US" sz="2000" dirty="0" smtClean="0">
+                <a:latin typeface="Calibri" pitchFamily="34" charset="0"/>
+              </a:rPr>
+              <a:t>The class leader collects and puts all the information to a class management file</a:t>
+            </a:r>
+            <a:r>
+              <a:rPr lang="vi-VN" sz="2000" dirty="0" smtClean="0">
+                <a:latin typeface="Calibri" pitchFamily="34" charset="0"/>
+              </a:rPr>
+              <a:t>.</a:t>
+            </a:r>
+            <a:endParaRPr lang="en-US" sz="2000" dirty="0" smtClean="0">
+              <a:latin typeface="Calibri" pitchFamily="34" charset="0"/>
+            </a:endParaRPr>
+          </a:p>
+          <a:p>
+            <a:r>
+              <a:rPr lang="en-US" sz="2000" dirty="0" smtClean="0">
+                <a:latin typeface="Calibri" pitchFamily="34" charset="0"/>
+              </a:rPr>
+              <a:t>The class leader </a:t>
+            </a:r>
+            <a:r>
+              <a:rPr lang="en-US" sz="2000" i="1" dirty="0" smtClean="0">
+                <a:solidFill>
+                  <a:srgbClr val="C00000"/>
+                </a:solidFill>
+                <a:latin typeface="Calibri" pitchFamily="34" charset="0"/>
+              </a:rPr>
+              <a:t>is authorized</a:t>
+            </a:r>
+            <a:r>
+              <a:rPr lang="en-US" sz="2000" dirty="0" smtClean="0">
+                <a:latin typeface="Calibri" pitchFamily="34" charset="0"/>
+              </a:rPr>
+              <a:t> to assign a team for an individual who is late to class or absent.</a:t>
+            </a:r>
+          </a:p>
+        </p:txBody>
+      </p:sp>
+      <p:pic>
+        <p:nvPicPr>
+          <p:cNvPr id="11266" name="Picture 2" descr="https://cavemaninasuit.com/wp-content/uploads/2020/09/multidisc_teams-1.jpg"/>
+          <p:cNvPicPr>
+            <a:picLocks noChangeAspect="1" noChangeArrowheads="1"/>
+          </p:cNvPicPr>
+          <p:nvPr/>
+        </p:nvPicPr>
+        <p:blipFill>
+          <a:blip r:embed="rId3" cstate="print"/>
+          <a:srcRect/>
+          <a:stretch>
+            <a:fillRect/>
+          </a:stretch>
+        </p:blipFill>
+        <p:spPr bwMode="auto">
+          <a:xfrm>
+            <a:off x="3810000" y="4953000"/>
+            <a:ext cx="2333625" cy="1311275"/>
+          </a:xfrm>
+          <a:prstGeom prst="rect">
+            <a:avLst/>
+          </a:prstGeom>
+          <a:noFill/>
+        </p:spPr>
+      </p:pic>
+    </p:spTree>
+  </p:cSld>
+  <p:clrMapOvr>
+    <a:masterClrMapping/>
+  </p:clrMapOvr>
+</p:sld>
+</file>
+
+<file path=ppt/slides/slide8.xml><?xml version="1.0" encoding="utf-8"?>
+<p:sld xmlns:a="http://schemas.openxmlformats.org/drawingml/2006/main" xmlns:r="http://schemas.openxmlformats.org/officeDocument/2006/relationships" xmlns:p="http://schemas.openxmlformats.org/presentationml/2006/main">
+  <p:cSld>
+    <p:spTree>
+      <p:nvGrpSpPr>
+        <p:cNvPr id="1" name=""/>
+        <p:cNvGrpSpPr/>
+        <p:nvPr/>
+      </p:nvGrpSpPr>
+      <p:grpSpPr>
+        <a:xfrm>
+          <a:off x="0" y="0"/>
+          <a:ext cx="0" cy="0"/>
+          <a:chOff x="0" y="0"/>
+          <a:chExt cx="0" cy="0"/>
+        </a:xfrm>
+      </p:grpSpPr>
+      <p:pic>
+        <p:nvPicPr>
           <p:cNvPr id="7" name="Picture 2" descr="http://www.resg.org.uk/wp-content/themes/resg-theme/images/resg-wordle.png"/>
           <p:cNvPicPr>
             <a:picLocks noChangeAspect="1" noChangeArrowheads="1"/>
@@ -15493,10 +15978,6 @@
               </a:rPr>
               <a:t>)</a:t>
             </a:r>
-            <a:endParaRPr lang="en-US" sz="2200" dirty="0" smtClean="0">
-              <a:latin typeface="Consolas" pitchFamily="49" charset="0"/>
-              <a:cs typeface="Courier New" pitchFamily="49" charset="0"/>
-            </a:endParaRPr>
           </a:p>
         </p:txBody>
       </p:sp>
@@ -15592,7 +16073,7 @@
 </p:sld>
 </file>
 
-<file path=ppt/slides/slide8.xml><?xml version="1.0" encoding="utf-8"?>
+<file path=ppt/slides/slide9.xml><?xml version="1.0" encoding="utf-8"?>
 <p:sld xmlns:a="http://schemas.openxmlformats.org/drawingml/2006/main" xmlns:r="http://schemas.openxmlformats.org/officeDocument/2006/relationships" xmlns:p="http://schemas.openxmlformats.org/presentationml/2006/main">
   <p:cSld>
     <p:spTree>
@@ -15833,16 +16314,7 @@
                 </a:solidFill>
                 <a:latin typeface="+mj-lt"/>
               </a:rPr>
-              <a:t>Refer </a:t>
-            </a:r>
-            <a:r>
-              <a:rPr lang="en-US" sz="2200" dirty="0" smtClean="0">
-                <a:solidFill>
-                  <a:schemeClr val="tx1"/>
-                </a:solidFill>
-                <a:latin typeface="+mj-lt"/>
-              </a:rPr>
-              <a:t>to the </a:t>
+              <a:t>Refer to the </a:t>
             </a:r>
             <a:r>
               <a:rPr lang="en-US" sz="2200" b="1" dirty="0" smtClean="0">
@@ -15860,16 +16332,7 @@
                 </a:solidFill>
                 <a:latin typeface="+mj-lt"/>
               </a:rPr>
-              <a:t> course for </a:t>
-            </a:r>
-            <a:r>
-              <a:rPr lang="en-US" sz="2200" dirty="0" smtClean="0">
-                <a:solidFill>
-                  <a:schemeClr val="tx1"/>
-                </a:solidFill>
-                <a:latin typeface="+mj-lt"/>
-              </a:rPr>
-              <a:t>more information.</a:t>
+              <a:t> course for more information.</a:t>
             </a:r>
             <a:endParaRPr lang="en-US" sz="2200" dirty="0">
               <a:solidFill>
@@ -15877,365 +16340,6 @@
               </a:solidFill>
               <a:latin typeface="+mj-lt"/>
             </a:endParaRPr>
-          </a:p>
-        </p:txBody>
-      </p:sp>
-    </p:spTree>
-  </p:cSld>
-  <p:clrMapOvr>
-    <a:masterClrMapping/>
-  </p:clrMapOvr>
-  <p:timing>
-    <p:tnLst>
-      <p:par>
-        <p:cTn id="1" dur="indefinite" restart="never" nodeType="tmRoot"/>
-      </p:par>
-    </p:tnLst>
-  </p:timing>
-</p:sld>
-</file>
-
-<file path=ppt/slides/slide9.xml><?xml version="1.0" encoding="utf-8"?>
-<p:sld xmlns:a="http://schemas.openxmlformats.org/drawingml/2006/main" xmlns:r="http://schemas.openxmlformats.org/officeDocument/2006/relationships" xmlns:p="http://schemas.openxmlformats.org/presentationml/2006/main">
-  <p:cSld>
-    <p:spTree>
-      <p:nvGrpSpPr>
-        <p:cNvPr id="1" name=""/>
-        <p:cNvGrpSpPr/>
-        <p:nvPr/>
-      </p:nvGrpSpPr>
-      <p:grpSpPr>
-        <a:xfrm>
-          <a:off x="0" y="0"/>
-          <a:ext cx="0" cy="0"/>
-          <a:chOff x="0" y="0"/>
-          <a:chExt cx="0" cy="0"/>
-        </a:xfrm>
-      </p:grpSpPr>
-      <p:sp>
-        <p:nvSpPr>
-          <p:cNvPr id="2" name="Title 1"/>
-          <p:cNvSpPr>
-            <a:spLocks noGrp="1"/>
-          </p:cNvSpPr>
-          <p:nvPr>
-            <p:ph type="title"/>
-          </p:nvPr>
-        </p:nvSpPr>
-        <p:spPr/>
-        <p:txBody>
-          <a:bodyPr/>
-          <a:lstStyle/>
-          <a:p>
-            <a:r>
-              <a:rPr lang="en-US" dirty="0" smtClean="0"/>
-              <a:t>What Do We Need to Complete?</a:t>
-            </a:r>
-            <a:endParaRPr lang="en-US" dirty="0"/>
-          </a:p>
-        </p:txBody>
-      </p:sp>
-      <p:pic>
-        <p:nvPicPr>
-          <p:cNvPr id="4098" name="Picture 2"/>
-          <p:cNvPicPr>
-            <a:picLocks noChangeAspect="1" noChangeArrowheads="1"/>
-          </p:cNvPicPr>
-          <p:nvPr/>
-        </p:nvPicPr>
-        <p:blipFill>
-          <a:blip r:embed="rId2" cstate="print"/>
-          <a:srcRect/>
-          <a:stretch>
-            <a:fillRect/>
-          </a:stretch>
-        </p:blipFill>
-        <p:spPr bwMode="auto">
-          <a:xfrm>
-            <a:off x="533400" y="2579687"/>
-            <a:ext cx="3181350" cy="3419475"/>
-          </a:xfrm>
-          <a:prstGeom prst="rect">
-            <a:avLst/>
-          </a:prstGeom>
-          <a:noFill/>
-          <a:ln w="9525">
-            <a:noFill/>
-            <a:miter lim="800000"/>
-            <a:headEnd/>
-            <a:tailEnd/>
-          </a:ln>
-          <a:effectLst/>
-        </p:spPr>
-      </p:pic>
-      <p:pic>
-        <p:nvPicPr>
-          <p:cNvPr id="4" name="Picture 4"/>
-          <p:cNvPicPr>
-            <a:picLocks noChangeAspect="1" noChangeArrowheads="1"/>
-          </p:cNvPicPr>
-          <p:nvPr/>
-        </p:nvPicPr>
-        <p:blipFill>
-          <a:blip r:embed="rId3" cstate="print"/>
-          <a:srcRect/>
-          <a:stretch>
-            <a:fillRect/>
-          </a:stretch>
-        </p:blipFill>
-        <p:spPr bwMode="auto">
-          <a:xfrm>
-            <a:off x="3810000" y="3733800"/>
-            <a:ext cx="1333500" cy="1314450"/>
-          </a:xfrm>
-          <a:prstGeom prst="rect">
-            <a:avLst/>
-          </a:prstGeom>
-          <a:noFill/>
-          <a:ln w="9525">
-            <a:noFill/>
-            <a:miter lim="800000"/>
-            <a:headEnd/>
-            <a:tailEnd/>
-          </a:ln>
-        </p:spPr>
-      </p:pic>
-      <p:cxnSp>
-        <p:nvCxnSpPr>
-          <p:cNvPr id="12" name="Straight Arrow Connector 11"/>
-          <p:cNvCxnSpPr/>
-          <p:nvPr/>
-        </p:nvCxnSpPr>
-        <p:spPr>
-          <a:xfrm flipV="1">
-            <a:off x="3124200" y="2960687"/>
-            <a:ext cx="1828800" cy="609600"/>
-          </a:xfrm>
-          <a:prstGeom prst="straightConnector1">
-            <a:avLst/>
-          </a:prstGeom>
-          <a:ln>
-            <a:tailEnd type="arrow"/>
-          </a:ln>
-        </p:spPr>
-        <p:style>
-          <a:lnRef idx="3">
-            <a:schemeClr val="accent2"/>
-          </a:lnRef>
-          <a:fillRef idx="0">
-            <a:schemeClr val="accent2"/>
-          </a:fillRef>
-          <a:effectRef idx="2">
-            <a:schemeClr val="accent2"/>
-          </a:effectRef>
-          <a:fontRef idx="minor">
-            <a:schemeClr val="tx1"/>
-          </a:fontRef>
-        </p:style>
-      </p:cxnSp>
-      <p:sp>
-        <p:nvSpPr>
-          <p:cNvPr id="21" name="Rectangle 20"/>
-          <p:cNvSpPr/>
-          <p:nvPr/>
-        </p:nvSpPr>
-        <p:spPr>
-          <a:xfrm>
-            <a:off x="5562600" y="4343400"/>
-            <a:ext cx="2869503" cy="584775"/>
-          </a:xfrm>
-          <a:prstGeom prst="rect">
-            <a:avLst/>
-          </a:prstGeom>
-        </p:spPr>
-        <p:txBody>
-          <a:bodyPr wrap="none">
-            <a:spAutoFit/>
-          </a:bodyPr>
-          <a:lstStyle/>
-          <a:p>
-            <a:pPr marL="514350" indent="-514350"/>
-            <a:r>
-              <a:rPr lang="en-US" sz="3200" dirty="0" smtClean="0">
-                <a:latin typeface="+mj-lt"/>
-              </a:rPr>
-              <a:t>Product Backlog</a:t>
-            </a:r>
-            <a:endParaRPr lang="en-US" sz="3200" u="sng" dirty="0" smtClean="0">
-              <a:latin typeface="+mj-lt"/>
-            </a:endParaRPr>
-          </a:p>
-        </p:txBody>
-      </p:sp>
-      <p:sp>
-        <p:nvSpPr>
-          <p:cNvPr id="14" name="Rectangle 13"/>
-          <p:cNvSpPr/>
-          <p:nvPr/>
-        </p:nvSpPr>
-        <p:spPr>
-          <a:xfrm>
-            <a:off x="609600" y="1752600"/>
-            <a:ext cx="4572000" cy="769441"/>
-          </a:xfrm>
-          <a:prstGeom prst="rect">
-            <a:avLst/>
-          </a:prstGeom>
-        </p:spPr>
-        <p:style>
-          <a:lnRef idx="2">
-            <a:schemeClr val="dk1"/>
-          </a:lnRef>
-          <a:fillRef idx="1">
-            <a:schemeClr val="lt1"/>
-          </a:fillRef>
-          <a:effectRef idx="0">
-            <a:schemeClr val="dk1"/>
-          </a:effectRef>
-          <a:fontRef idx="minor">
-            <a:schemeClr val="dk1"/>
-          </a:fontRef>
-        </p:style>
-        <p:txBody>
-          <a:bodyPr wrap="square">
-            <a:spAutoFit/>
-          </a:bodyPr>
-          <a:lstStyle/>
-          <a:p>
-            <a:pPr algn="ctr"/>
-            <a:r>
-              <a:rPr lang="en-US" sz="2200" dirty="0" smtClean="0">
-                <a:solidFill>
-                  <a:schemeClr val="tx1"/>
-                </a:solidFill>
-                <a:latin typeface="+mj-lt"/>
-              </a:rPr>
-              <a:t>Refer </a:t>
-            </a:r>
-            <a:r>
-              <a:rPr lang="en-US" sz="2200" dirty="0" smtClean="0">
-                <a:solidFill>
-                  <a:schemeClr val="tx1"/>
-                </a:solidFill>
-                <a:latin typeface="+mj-lt"/>
-              </a:rPr>
-              <a:t>to the </a:t>
-            </a:r>
-            <a:r>
-              <a:rPr lang="en-US" sz="2200" b="1" dirty="0" smtClean="0">
-                <a:solidFill>
-                  <a:schemeClr val="tx1"/>
-                </a:solidFill>
-                <a:latin typeface="+mj-lt"/>
-              </a:rPr>
-              <a:t>Software Requirements</a:t>
-            </a:r>
-            <a:r>
-              <a:rPr lang="en-US" sz="2200" dirty="0" smtClean="0">
-                <a:solidFill>
-                  <a:schemeClr val="tx1"/>
-                </a:solidFill>
-                <a:latin typeface="+mj-lt"/>
-              </a:rPr>
-              <a:t> course for </a:t>
-            </a:r>
-            <a:r>
-              <a:rPr lang="en-US" sz="2200" dirty="0" smtClean="0">
-                <a:solidFill>
-                  <a:schemeClr val="tx1"/>
-                </a:solidFill>
-                <a:latin typeface="+mj-lt"/>
-              </a:rPr>
-              <a:t>more information.</a:t>
-            </a:r>
-            <a:endParaRPr lang="en-US" sz="2200" dirty="0">
-              <a:solidFill>
-                <a:schemeClr val="tx1"/>
-              </a:solidFill>
-              <a:latin typeface="+mj-lt"/>
-            </a:endParaRPr>
-          </a:p>
-        </p:txBody>
-      </p:sp>
-      <p:pic>
-        <p:nvPicPr>
-          <p:cNvPr id="1026" name="Picture 2" descr="https://encrypted-tbn0.gstatic.com/images?q=tbn:ANd9GcSFjELCnVms4p5uVj-2QT-D0xKkPIXw-rq3XA&amp;s"/>
-          <p:cNvPicPr>
-            <a:picLocks noChangeAspect="1" noChangeArrowheads="1"/>
-          </p:cNvPicPr>
-          <p:nvPr/>
-        </p:nvPicPr>
-        <p:blipFill>
-          <a:blip r:embed="rId4" cstate="print"/>
-          <a:srcRect/>
-          <a:stretch>
-            <a:fillRect/>
-          </a:stretch>
-        </p:blipFill>
-        <p:spPr bwMode="auto">
-          <a:xfrm>
-            <a:off x="5486400" y="1828800"/>
-            <a:ext cx="2143125" cy="2143125"/>
-          </a:xfrm>
-          <a:prstGeom prst="rect">
-            <a:avLst/>
-          </a:prstGeom>
-          <a:noFill/>
-        </p:spPr>
-      </p:pic>
-      <p:sp>
-        <p:nvSpPr>
-          <p:cNvPr id="11" name="Rectangle 10"/>
-          <p:cNvSpPr/>
-          <p:nvPr/>
-        </p:nvSpPr>
-        <p:spPr>
-          <a:xfrm>
-            <a:off x="3733800" y="5486400"/>
-            <a:ext cx="4572000" cy="830997"/>
-          </a:xfrm>
-          <a:prstGeom prst="rect">
-            <a:avLst/>
-          </a:prstGeom>
-        </p:spPr>
-        <p:style>
-          <a:lnRef idx="2">
-            <a:schemeClr val="dk1"/>
-          </a:lnRef>
-          <a:fillRef idx="1">
-            <a:schemeClr val="lt1"/>
-          </a:fillRef>
-          <a:effectRef idx="0">
-            <a:schemeClr val="dk1"/>
-          </a:effectRef>
-          <a:fontRef idx="minor">
-            <a:schemeClr val="dk1"/>
-          </a:fontRef>
-        </p:style>
-        <p:txBody>
-          <a:bodyPr>
-            <a:spAutoFit/>
-          </a:bodyPr>
-          <a:lstStyle/>
-          <a:p>
-            <a:pPr algn="ctr"/>
-            <a:r>
-              <a:rPr lang="en-US" sz="2400" dirty="0" smtClean="0"/>
-              <a:t>(</a:t>
-            </a:r>
-            <a:r>
-              <a:rPr lang="en-US" sz="2400" i="1" dirty="0" smtClean="0">
-                <a:solidFill>
-                  <a:srgbClr val="C00000"/>
-                </a:solidFill>
-              </a:rPr>
-              <a:t>Partial</a:t>
-            </a:r>
-            <a:r>
-              <a:rPr lang="en-US" sz="2400" dirty="0" smtClean="0"/>
-              <a:t>) Software Requirements Specification or Product Backlog</a:t>
-            </a:r>
-            <a:endParaRPr lang="en-US" sz="2400" dirty="0"/>
           </a:p>
         </p:txBody>
       </p:sp>

--- a/Software Project Management/03. Software Project Initiation.pptx
+++ b/Software Project Management/03. Software Project Initiation.pptx
@@ -15,9 +15,9 @@
     <p:sldId id="499" r:id="rId3"/>
     <p:sldId id="671" r:id="rId4"/>
     <p:sldId id="839" r:id="rId5"/>
-    <p:sldId id="851" r:id="rId6"/>
-    <p:sldId id="833" r:id="rId7"/>
-    <p:sldId id="880" r:id="rId8"/>
+    <p:sldId id="880" r:id="rId6"/>
+    <p:sldId id="851" r:id="rId7"/>
+    <p:sldId id="833" r:id="rId8"/>
     <p:sldId id="855" r:id="rId9"/>
     <p:sldId id="872" r:id="rId10"/>
     <p:sldId id="879" r:id="rId11"/>
@@ -2702,731 +2702,6 @@
       <dsp:cNvGrpSpPr/>
     </dsp:nvGrpSpPr>
     <dsp:grpSpPr/>
-    <dsp:sp modelId="{56CABD1B-944E-49F7-866A-C6598132C0E2}">
-      <dsp:nvSpPr>
-        <dsp:cNvPr id="0" name=""/>
-        <dsp:cNvSpPr/>
-      </dsp:nvSpPr>
-      <dsp:spPr>
-        <a:xfrm>
-          <a:off x="0" y="324839"/>
-          <a:ext cx="4572000" cy="327600"/>
-        </a:xfrm>
-        <a:prstGeom prst="rect">
-          <a:avLst/>
-        </a:prstGeom>
-        <a:solidFill>
-          <a:schemeClr val="lt1">
-            <a:alpha val="90000"/>
-            <a:hueOff val="0"/>
-            <a:satOff val="0"/>
-            <a:lumOff val="0"/>
-            <a:alphaOff val="0"/>
-          </a:schemeClr>
-        </a:solidFill>
-        <a:ln w="25400" cap="flat" cmpd="sng" algn="ctr">
-          <a:solidFill>
-            <a:schemeClr val="accent1">
-              <a:hueOff val="0"/>
-              <a:satOff val="0"/>
-              <a:lumOff val="0"/>
-              <a:alphaOff val="0"/>
-            </a:schemeClr>
-          </a:solidFill>
-          <a:prstDash val="solid"/>
-        </a:ln>
-        <a:effectLst/>
-      </dsp:spPr>
-      <dsp:style>
-        <a:lnRef idx="2">
-          <a:scrgbClr r="0" g="0" b="0"/>
-        </a:lnRef>
-        <a:fillRef idx="1">
-          <a:scrgbClr r="0" g="0" b="0"/>
-        </a:fillRef>
-        <a:effectRef idx="0">
-          <a:scrgbClr r="0" g="0" b="0"/>
-        </a:effectRef>
-        <a:fontRef idx="minor"/>
-      </dsp:style>
-    </dsp:sp>
-    <dsp:sp modelId="{4F622BEB-62C0-41FB-AA25-3807F8F602A7}">
-      <dsp:nvSpPr>
-        <dsp:cNvPr id="0" name=""/>
-        <dsp:cNvSpPr/>
-      </dsp:nvSpPr>
-      <dsp:spPr>
-        <a:xfrm>
-          <a:off x="228600" y="132959"/>
-          <a:ext cx="3200400" cy="383760"/>
-        </a:xfrm>
-        <a:prstGeom prst="roundRect">
-          <a:avLst/>
-        </a:prstGeom>
-        <a:solidFill>
-          <a:schemeClr val="accent1">
-            <a:hueOff val="0"/>
-            <a:satOff val="0"/>
-            <a:lumOff val="0"/>
-            <a:alphaOff val="0"/>
-          </a:schemeClr>
-        </a:solidFill>
-        <a:ln w="25400" cap="flat" cmpd="sng" algn="ctr">
-          <a:solidFill>
-            <a:schemeClr val="lt1">
-              <a:hueOff val="0"/>
-              <a:satOff val="0"/>
-              <a:lumOff val="0"/>
-              <a:alphaOff val="0"/>
-            </a:schemeClr>
-          </a:solidFill>
-          <a:prstDash val="solid"/>
-        </a:ln>
-        <a:effectLst/>
-      </dsp:spPr>
-      <dsp:style>
-        <a:lnRef idx="2">
-          <a:scrgbClr r="0" g="0" b="0"/>
-        </a:lnRef>
-        <a:fillRef idx="1">
-          <a:scrgbClr r="0" g="0" b="0"/>
-        </a:fillRef>
-        <a:effectRef idx="0">
-          <a:scrgbClr r="0" g="0" b="0"/>
-        </a:effectRef>
-        <a:fontRef idx="minor">
-          <a:schemeClr val="lt1"/>
-        </a:fontRef>
-      </dsp:style>
-      <dsp:txBody>
-        <a:bodyPr spcFirstLastPara="0" vert="horz" wrap="square" lIns="120968" tIns="0" rIns="120968" bIns="0" numCol="1" spcCol="1270" anchor="ctr" anchorCtr="0">
-          <a:noAutofit/>
-        </a:bodyPr>
-        <a:lstStyle/>
-        <a:p>
-          <a:pPr lvl="0" algn="l" defTabSz="977900">
-            <a:lnSpc>
-              <a:spcPct val="90000"/>
-            </a:lnSpc>
-            <a:spcBef>
-              <a:spcPct val="0"/>
-            </a:spcBef>
-            <a:spcAft>
-              <a:spcPct val="35000"/>
-            </a:spcAft>
-          </a:pPr>
-          <a:r>
-            <a:rPr lang="en-US" sz="2200" kern="1200" dirty="0" smtClean="0"/>
-            <a:t>Purpose</a:t>
-          </a:r>
-          <a:endParaRPr lang="en-US" sz="2200" kern="1200" dirty="0"/>
-        </a:p>
-      </dsp:txBody>
-      <dsp:txXfrm>
-        <a:off x="228600" y="132959"/>
-        <a:ext cx="3200400" cy="383760"/>
-      </dsp:txXfrm>
-    </dsp:sp>
-    <dsp:sp modelId="{8B5298D1-CF53-49BC-9023-0EE6E258E573}">
-      <dsp:nvSpPr>
-        <dsp:cNvPr id="0" name=""/>
-        <dsp:cNvSpPr/>
-      </dsp:nvSpPr>
-      <dsp:spPr>
-        <a:xfrm>
-          <a:off x="0" y="914519"/>
-          <a:ext cx="4572000" cy="327600"/>
-        </a:xfrm>
-        <a:prstGeom prst="rect">
-          <a:avLst/>
-        </a:prstGeom>
-        <a:solidFill>
-          <a:schemeClr val="lt1">
-            <a:alpha val="90000"/>
-            <a:hueOff val="0"/>
-            <a:satOff val="0"/>
-            <a:lumOff val="0"/>
-            <a:alphaOff val="0"/>
-          </a:schemeClr>
-        </a:solidFill>
-        <a:ln w="25400" cap="flat" cmpd="sng" algn="ctr">
-          <a:solidFill>
-            <a:schemeClr val="accent1">
-              <a:hueOff val="0"/>
-              <a:satOff val="0"/>
-              <a:lumOff val="0"/>
-              <a:alphaOff val="0"/>
-            </a:schemeClr>
-          </a:solidFill>
-          <a:prstDash val="solid"/>
-        </a:ln>
-        <a:effectLst/>
-      </dsp:spPr>
-      <dsp:style>
-        <a:lnRef idx="2">
-          <a:scrgbClr r="0" g="0" b="0"/>
-        </a:lnRef>
-        <a:fillRef idx="1">
-          <a:scrgbClr r="0" g="0" b="0"/>
-        </a:fillRef>
-        <a:effectRef idx="0">
-          <a:scrgbClr r="0" g="0" b="0"/>
-        </a:effectRef>
-        <a:fontRef idx="minor"/>
-      </dsp:style>
-    </dsp:sp>
-    <dsp:sp modelId="{0ABD91B7-67D8-4835-9472-249FD879718E}">
-      <dsp:nvSpPr>
-        <dsp:cNvPr id="0" name=""/>
-        <dsp:cNvSpPr/>
-      </dsp:nvSpPr>
-      <dsp:spPr>
-        <a:xfrm>
-          <a:off x="228600" y="722639"/>
-          <a:ext cx="3200400" cy="383760"/>
-        </a:xfrm>
-        <a:prstGeom prst="roundRect">
-          <a:avLst/>
-        </a:prstGeom>
-        <a:solidFill>
-          <a:schemeClr val="accent2"/>
-        </a:solidFill>
-        <a:ln w="25400" cap="flat" cmpd="sng" algn="ctr">
-          <a:solidFill>
-            <a:schemeClr val="lt1">
-              <a:hueOff val="0"/>
-              <a:satOff val="0"/>
-              <a:lumOff val="0"/>
-              <a:alphaOff val="0"/>
-            </a:schemeClr>
-          </a:solidFill>
-          <a:prstDash val="solid"/>
-        </a:ln>
-        <a:effectLst/>
-      </dsp:spPr>
-      <dsp:style>
-        <a:lnRef idx="2">
-          <a:scrgbClr r="0" g="0" b="0"/>
-        </a:lnRef>
-        <a:fillRef idx="1">
-          <a:scrgbClr r="0" g="0" b="0"/>
-        </a:fillRef>
-        <a:effectRef idx="0">
-          <a:scrgbClr r="0" g="0" b="0"/>
-        </a:effectRef>
-        <a:fontRef idx="minor">
-          <a:schemeClr val="lt1"/>
-        </a:fontRef>
-      </dsp:style>
-      <dsp:txBody>
-        <a:bodyPr spcFirstLastPara="0" vert="horz" wrap="square" lIns="120968" tIns="0" rIns="120968" bIns="0" numCol="1" spcCol="1270" anchor="ctr" anchorCtr="0">
-          <a:noAutofit/>
-        </a:bodyPr>
-        <a:lstStyle/>
-        <a:p>
-          <a:pPr lvl="0" algn="l" defTabSz="977900">
-            <a:lnSpc>
-              <a:spcPct val="90000"/>
-            </a:lnSpc>
-            <a:spcBef>
-              <a:spcPct val="0"/>
-            </a:spcBef>
-            <a:spcAft>
-              <a:spcPct val="35000"/>
-            </a:spcAft>
-          </a:pPr>
-          <a:r>
-            <a:rPr lang="en-US" sz="2200" kern="1200" dirty="0" smtClean="0"/>
-            <a:t>Reason</a:t>
-          </a:r>
-          <a:endParaRPr lang="en-US" sz="2200" kern="1200" dirty="0"/>
-        </a:p>
-      </dsp:txBody>
-      <dsp:txXfrm>
-        <a:off x="228600" y="722639"/>
-        <a:ext cx="3200400" cy="383760"/>
-      </dsp:txXfrm>
-    </dsp:sp>
-    <dsp:sp modelId="{8011D070-568F-4A84-BD56-7ABA35D47A61}">
-      <dsp:nvSpPr>
-        <dsp:cNvPr id="0" name=""/>
-        <dsp:cNvSpPr/>
-      </dsp:nvSpPr>
-      <dsp:spPr>
-        <a:xfrm>
-          <a:off x="0" y="1504200"/>
-          <a:ext cx="4572000" cy="327600"/>
-        </a:xfrm>
-        <a:prstGeom prst="rect">
-          <a:avLst/>
-        </a:prstGeom>
-        <a:solidFill>
-          <a:schemeClr val="lt1">
-            <a:alpha val="90000"/>
-            <a:hueOff val="0"/>
-            <a:satOff val="0"/>
-            <a:lumOff val="0"/>
-            <a:alphaOff val="0"/>
-          </a:schemeClr>
-        </a:solidFill>
-        <a:ln w="25400" cap="flat" cmpd="sng" algn="ctr">
-          <a:solidFill>
-            <a:schemeClr val="accent1">
-              <a:hueOff val="0"/>
-              <a:satOff val="0"/>
-              <a:lumOff val="0"/>
-              <a:alphaOff val="0"/>
-            </a:schemeClr>
-          </a:solidFill>
-          <a:prstDash val="solid"/>
-        </a:ln>
-        <a:effectLst/>
-      </dsp:spPr>
-      <dsp:style>
-        <a:lnRef idx="2">
-          <a:scrgbClr r="0" g="0" b="0"/>
-        </a:lnRef>
-        <a:fillRef idx="1">
-          <a:scrgbClr r="0" g="0" b="0"/>
-        </a:fillRef>
-        <a:effectRef idx="0">
-          <a:scrgbClr r="0" g="0" b="0"/>
-        </a:effectRef>
-        <a:fontRef idx="minor"/>
-      </dsp:style>
-    </dsp:sp>
-    <dsp:sp modelId="{AD646C37-0DDC-40B6-BFF6-68C35C41D431}">
-      <dsp:nvSpPr>
-        <dsp:cNvPr id="0" name=""/>
-        <dsp:cNvSpPr/>
-      </dsp:nvSpPr>
-      <dsp:spPr>
-        <a:xfrm>
-          <a:off x="228600" y="1312320"/>
-          <a:ext cx="3200400" cy="383760"/>
-        </a:xfrm>
-        <a:prstGeom prst="roundRect">
-          <a:avLst/>
-        </a:prstGeom>
-        <a:solidFill>
-          <a:schemeClr val="accent3"/>
-        </a:solidFill>
-        <a:ln w="25400" cap="flat" cmpd="sng" algn="ctr">
-          <a:solidFill>
-            <a:schemeClr val="lt1">
-              <a:hueOff val="0"/>
-              <a:satOff val="0"/>
-              <a:lumOff val="0"/>
-              <a:alphaOff val="0"/>
-            </a:schemeClr>
-          </a:solidFill>
-          <a:prstDash val="solid"/>
-        </a:ln>
-        <a:effectLst/>
-      </dsp:spPr>
-      <dsp:style>
-        <a:lnRef idx="2">
-          <a:scrgbClr r="0" g="0" b="0"/>
-        </a:lnRef>
-        <a:fillRef idx="1">
-          <a:scrgbClr r="0" g="0" b="0"/>
-        </a:fillRef>
-        <a:effectRef idx="0">
-          <a:scrgbClr r="0" g="0" b="0"/>
-        </a:effectRef>
-        <a:fontRef idx="minor">
-          <a:schemeClr val="lt1"/>
-        </a:fontRef>
-      </dsp:style>
-      <dsp:txBody>
-        <a:bodyPr spcFirstLastPara="0" vert="horz" wrap="square" lIns="120968" tIns="0" rIns="120968" bIns="0" numCol="1" spcCol="1270" anchor="ctr" anchorCtr="0">
-          <a:noAutofit/>
-        </a:bodyPr>
-        <a:lstStyle/>
-        <a:p>
-          <a:pPr lvl="0" algn="l" defTabSz="977900">
-            <a:lnSpc>
-              <a:spcPct val="90000"/>
-            </a:lnSpc>
-            <a:spcBef>
-              <a:spcPct val="0"/>
-            </a:spcBef>
-            <a:spcAft>
-              <a:spcPct val="35000"/>
-            </a:spcAft>
-          </a:pPr>
-          <a:r>
-            <a:rPr lang="en-US" sz="2200" kern="1200" dirty="0" smtClean="0"/>
-            <a:t>Background information</a:t>
-          </a:r>
-          <a:endParaRPr lang="en-US" sz="2200" kern="1200" dirty="0"/>
-        </a:p>
-      </dsp:txBody>
-      <dsp:txXfrm>
-        <a:off x="228600" y="1312320"/>
-        <a:ext cx="3200400" cy="383760"/>
-      </dsp:txXfrm>
-    </dsp:sp>
-    <dsp:sp modelId="{2CC94E98-C2BC-40BA-BA2C-53E02A202477}">
-      <dsp:nvSpPr>
-        <dsp:cNvPr id="0" name=""/>
-        <dsp:cNvSpPr/>
-      </dsp:nvSpPr>
-      <dsp:spPr>
-        <a:xfrm>
-          <a:off x="0" y="2093880"/>
-          <a:ext cx="4572000" cy="327600"/>
-        </a:xfrm>
-        <a:prstGeom prst="rect">
-          <a:avLst/>
-        </a:prstGeom>
-        <a:solidFill>
-          <a:schemeClr val="lt1">
-            <a:alpha val="90000"/>
-            <a:hueOff val="0"/>
-            <a:satOff val="0"/>
-            <a:lumOff val="0"/>
-            <a:alphaOff val="0"/>
-          </a:schemeClr>
-        </a:solidFill>
-        <a:ln w="25400" cap="flat" cmpd="sng" algn="ctr">
-          <a:solidFill>
-            <a:schemeClr val="accent1">
-              <a:hueOff val="0"/>
-              <a:satOff val="0"/>
-              <a:lumOff val="0"/>
-              <a:alphaOff val="0"/>
-            </a:schemeClr>
-          </a:solidFill>
-          <a:prstDash val="solid"/>
-        </a:ln>
-        <a:effectLst/>
-      </dsp:spPr>
-      <dsp:style>
-        <a:lnRef idx="2">
-          <a:scrgbClr r="0" g="0" b="0"/>
-        </a:lnRef>
-        <a:fillRef idx="1">
-          <a:scrgbClr r="0" g="0" b="0"/>
-        </a:fillRef>
-        <a:effectRef idx="0">
-          <a:scrgbClr r="0" g="0" b="0"/>
-        </a:effectRef>
-        <a:fontRef idx="minor"/>
-      </dsp:style>
-    </dsp:sp>
-    <dsp:sp modelId="{90065A47-6053-496C-B292-B863C5F1C893}">
-      <dsp:nvSpPr>
-        <dsp:cNvPr id="0" name=""/>
-        <dsp:cNvSpPr/>
-      </dsp:nvSpPr>
-      <dsp:spPr>
-        <a:xfrm>
-          <a:off x="273133" y="1902000"/>
-          <a:ext cx="3200400" cy="383760"/>
-        </a:xfrm>
-        <a:prstGeom prst="roundRect">
-          <a:avLst/>
-        </a:prstGeom>
-        <a:solidFill>
-          <a:schemeClr val="accent4"/>
-        </a:solidFill>
-        <a:ln w="25400" cap="flat" cmpd="sng" algn="ctr">
-          <a:solidFill>
-            <a:schemeClr val="lt1">
-              <a:hueOff val="0"/>
-              <a:satOff val="0"/>
-              <a:lumOff val="0"/>
-              <a:alphaOff val="0"/>
-            </a:schemeClr>
-          </a:solidFill>
-          <a:prstDash val="solid"/>
-        </a:ln>
-        <a:effectLst/>
-      </dsp:spPr>
-      <dsp:style>
-        <a:lnRef idx="2">
-          <a:scrgbClr r="0" g="0" b="0"/>
-        </a:lnRef>
-        <a:fillRef idx="1">
-          <a:scrgbClr r="0" g="0" b="0"/>
-        </a:fillRef>
-        <a:effectRef idx="0">
-          <a:scrgbClr r="0" g="0" b="0"/>
-        </a:effectRef>
-        <a:fontRef idx="minor">
-          <a:schemeClr val="lt1"/>
-        </a:fontRef>
-      </dsp:style>
-      <dsp:txBody>
-        <a:bodyPr spcFirstLastPara="0" vert="horz" wrap="square" lIns="120968" tIns="0" rIns="120968" bIns="0" numCol="1" spcCol="1270" anchor="ctr" anchorCtr="0">
-          <a:noAutofit/>
-        </a:bodyPr>
-        <a:lstStyle/>
-        <a:p>
-          <a:pPr lvl="0" algn="l" defTabSz="977900">
-            <a:lnSpc>
-              <a:spcPct val="90000"/>
-            </a:lnSpc>
-            <a:spcBef>
-              <a:spcPct val="0"/>
-            </a:spcBef>
-            <a:spcAft>
-              <a:spcPct val="35000"/>
-            </a:spcAft>
-          </a:pPr>
-          <a:r>
-            <a:rPr lang="en-US" sz="2200" kern="1200" dirty="0" smtClean="0"/>
-            <a:t>The evaluation criteria</a:t>
-          </a:r>
-          <a:endParaRPr lang="en-US" sz="2200" kern="1200" dirty="0"/>
-        </a:p>
-      </dsp:txBody>
-      <dsp:txXfrm>
-        <a:off x="273133" y="1902000"/>
-        <a:ext cx="3200400" cy="383760"/>
-      </dsp:txXfrm>
-    </dsp:sp>
-    <dsp:sp modelId="{10C80C59-D601-4AD4-9AE0-F459A2AD1F9A}">
-      <dsp:nvSpPr>
-        <dsp:cNvPr id="0" name=""/>
-        <dsp:cNvSpPr/>
-      </dsp:nvSpPr>
-      <dsp:spPr>
-        <a:xfrm>
-          <a:off x="0" y="2683560"/>
-          <a:ext cx="4572000" cy="327600"/>
-        </a:xfrm>
-        <a:prstGeom prst="rect">
-          <a:avLst/>
-        </a:prstGeom>
-        <a:solidFill>
-          <a:schemeClr val="lt1">
-            <a:alpha val="90000"/>
-            <a:hueOff val="0"/>
-            <a:satOff val="0"/>
-            <a:lumOff val="0"/>
-            <a:alphaOff val="0"/>
-          </a:schemeClr>
-        </a:solidFill>
-        <a:ln w="25400" cap="flat" cmpd="sng" algn="ctr">
-          <a:solidFill>
-            <a:schemeClr val="accent1">
-              <a:hueOff val="0"/>
-              <a:satOff val="0"/>
-              <a:lumOff val="0"/>
-              <a:alphaOff val="0"/>
-            </a:schemeClr>
-          </a:solidFill>
-          <a:prstDash val="solid"/>
-        </a:ln>
-        <a:effectLst/>
-      </dsp:spPr>
-      <dsp:style>
-        <a:lnRef idx="2">
-          <a:scrgbClr r="0" g="0" b="0"/>
-        </a:lnRef>
-        <a:fillRef idx="1">
-          <a:scrgbClr r="0" g="0" b="0"/>
-        </a:fillRef>
-        <a:effectRef idx="0">
-          <a:scrgbClr r="0" g="0" b="0"/>
-        </a:effectRef>
-        <a:fontRef idx="minor"/>
-      </dsp:style>
-    </dsp:sp>
-    <dsp:sp modelId="{1F9781A0-24EF-4D22-863B-387A9EB35B5D}">
-      <dsp:nvSpPr>
-        <dsp:cNvPr id="0" name=""/>
-        <dsp:cNvSpPr/>
-      </dsp:nvSpPr>
-      <dsp:spPr>
-        <a:xfrm>
-          <a:off x="273133" y="2491680"/>
-          <a:ext cx="3200400" cy="383760"/>
-        </a:xfrm>
-        <a:prstGeom prst="roundRect">
-          <a:avLst/>
-        </a:prstGeom>
-        <a:solidFill>
-          <a:schemeClr val="accent5"/>
-        </a:solidFill>
-        <a:ln w="25400" cap="flat" cmpd="sng" algn="ctr">
-          <a:solidFill>
-            <a:schemeClr val="lt1">
-              <a:hueOff val="0"/>
-              <a:satOff val="0"/>
-              <a:lumOff val="0"/>
-              <a:alphaOff val="0"/>
-            </a:schemeClr>
-          </a:solidFill>
-          <a:prstDash val="solid"/>
-        </a:ln>
-        <a:effectLst/>
-      </dsp:spPr>
-      <dsp:style>
-        <a:lnRef idx="2">
-          <a:scrgbClr r="0" g="0" b="0"/>
-        </a:lnRef>
-        <a:fillRef idx="1">
-          <a:scrgbClr r="0" g="0" b="0"/>
-        </a:fillRef>
-        <a:effectRef idx="0">
-          <a:scrgbClr r="0" g="0" b="0"/>
-        </a:effectRef>
-        <a:fontRef idx="minor">
-          <a:schemeClr val="lt1"/>
-        </a:fontRef>
-      </dsp:style>
-      <dsp:txBody>
-        <a:bodyPr spcFirstLastPara="0" vert="horz" wrap="square" lIns="120968" tIns="0" rIns="120968" bIns="0" numCol="1" spcCol="1270" anchor="ctr" anchorCtr="0">
-          <a:noAutofit/>
-        </a:bodyPr>
-        <a:lstStyle/>
-        <a:p>
-          <a:pPr lvl="0" algn="l" defTabSz="977900">
-            <a:lnSpc>
-              <a:spcPct val="90000"/>
-            </a:lnSpc>
-            <a:spcBef>
-              <a:spcPct val="0"/>
-            </a:spcBef>
-            <a:spcAft>
-              <a:spcPct val="35000"/>
-            </a:spcAft>
-          </a:pPr>
-          <a:r>
-            <a:rPr lang="en-US" sz="2200" kern="1200" dirty="0" smtClean="0"/>
-            <a:t>The study findings</a:t>
-          </a:r>
-          <a:endParaRPr lang="en-US" sz="2200" kern="1200" dirty="0"/>
-        </a:p>
-      </dsp:txBody>
-      <dsp:txXfrm>
-        <a:off x="273133" y="2491680"/>
-        <a:ext cx="3200400" cy="383760"/>
-      </dsp:txXfrm>
-    </dsp:sp>
-    <dsp:sp modelId="{ECAED0D9-0A7B-453D-970D-A96E8C7059E3}">
-      <dsp:nvSpPr>
-        <dsp:cNvPr id="0" name=""/>
-        <dsp:cNvSpPr/>
-      </dsp:nvSpPr>
-      <dsp:spPr>
-        <a:xfrm>
-          <a:off x="0" y="3273240"/>
-          <a:ext cx="4572000" cy="327600"/>
-        </a:xfrm>
-        <a:prstGeom prst="rect">
-          <a:avLst/>
-        </a:prstGeom>
-        <a:solidFill>
-          <a:schemeClr val="lt1">
-            <a:alpha val="90000"/>
-            <a:hueOff val="0"/>
-            <a:satOff val="0"/>
-            <a:lumOff val="0"/>
-            <a:alphaOff val="0"/>
-          </a:schemeClr>
-        </a:solidFill>
-        <a:ln w="25400" cap="flat" cmpd="sng" algn="ctr">
-          <a:solidFill>
-            <a:schemeClr val="accent1">
-              <a:hueOff val="0"/>
-              <a:satOff val="0"/>
-              <a:lumOff val="0"/>
-              <a:alphaOff val="0"/>
-            </a:schemeClr>
-          </a:solidFill>
-          <a:prstDash val="solid"/>
-        </a:ln>
-        <a:effectLst/>
-      </dsp:spPr>
-      <dsp:style>
-        <a:lnRef idx="2">
-          <a:scrgbClr r="0" g="0" b="0"/>
-        </a:lnRef>
-        <a:fillRef idx="1">
-          <a:scrgbClr r="0" g="0" b="0"/>
-        </a:fillRef>
-        <a:effectRef idx="0">
-          <a:scrgbClr r="0" g="0" b="0"/>
-        </a:effectRef>
-        <a:fontRef idx="minor"/>
-      </dsp:style>
-    </dsp:sp>
-    <dsp:sp modelId="{D321BBAD-41C6-45AB-9362-3E65DEBF3BC5}">
-      <dsp:nvSpPr>
-        <dsp:cNvPr id="0" name=""/>
-        <dsp:cNvSpPr/>
-      </dsp:nvSpPr>
-      <dsp:spPr>
-        <a:xfrm>
-          <a:off x="273133" y="3081360"/>
-          <a:ext cx="3200400" cy="383760"/>
-        </a:xfrm>
-        <a:prstGeom prst="roundRect">
-          <a:avLst/>
-        </a:prstGeom>
-        <a:solidFill>
-          <a:schemeClr val="accent6"/>
-        </a:solidFill>
-        <a:ln w="25400" cap="flat" cmpd="sng" algn="ctr">
-          <a:solidFill>
-            <a:schemeClr val="lt1">
-              <a:hueOff val="0"/>
-              <a:satOff val="0"/>
-              <a:lumOff val="0"/>
-              <a:alphaOff val="0"/>
-            </a:schemeClr>
-          </a:solidFill>
-          <a:prstDash val="solid"/>
-        </a:ln>
-        <a:effectLst/>
-      </dsp:spPr>
-      <dsp:style>
-        <a:lnRef idx="2">
-          <a:scrgbClr r="0" g="0" b="0"/>
-        </a:lnRef>
-        <a:fillRef idx="1">
-          <a:scrgbClr r="0" g="0" b="0"/>
-        </a:fillRef>
-        <a:effectRef idx="0">
-          <a:scrgbClr r="0" g="0" b="0"/>
-        </a:effectRef>
-        <a:fontRef idx="minor">
-          <a:schemeClr val="lt1"/>
-        </a:fontRef>
-      </dsp:style>
-      <dsp:txBody>
-        <a:bodyPr spcFirstLastPara="0" vert="horz" wrap="square" lIns="120968" tIns="0" rIns="120968" bIns="0" numCol="1" spcCol="1270" anchor="ctr" anchorCtr="0">
-          <a:noAutofit/>
-        </a:bodyPr>
-        <a:lstStyle/>
-        <a:p>
-          <a:pPr lvl="0" algn="l" defTabSz="977900">
-            <a:lnSpc>
-              <a:spcPct val="90000"/>
-            </a:lnSpc>
-            <a:spcBef>
-              <a:spcPct val="0"/>
-            </a:spcBef>
-            <a:spcAft>
-              <a:spcPct val="35000"/>
-            </a:spcAft>
-          </a:pPr>
-          <a:r>
-            <a:rPr lang="en-US" sz="2200" kern="1200" dirty="0" smtClean="0"/>
-            <a:t>The recommendations</a:t>
-          </a:r>
-          <a:endParaRPr lang="en-US" sz="2200" kern="1200" dirty="0"/>
-        </a:p>
-      </dsp:txBody>
-      <dsp:txXfrm>
-        <a:off x="273133" y="3081360"/>
-        <a:ext cx="3200400" cy="383760"/>
-      </dsp:txXfrm>
-    </dsp:sp>
   </dsp:spTree>
 </dsp:drawing>
 </file>
@@ -3439,491 +2714,6 @@
       <dsp:cNvGrpSpPr/>
     </dsp:nvGrpSpPr>
     <dsp:grpSpPr/>
-    <dsp:sp modelId="{00169986-F2F3-4B85-8ED4-5DAA51E975C1}">
-      <dsp:nvSpPr>
-        <dsp:cNvPr id="0" name=""/>
-        <dsp:cNvSpPr/>
-      </dsp:nvSpPr>
-      <dsp:spPr>
-        <a:xfrm>
-          <a:off x="0" y="416400"/>
-          <a:ext cx="6172199" cy="630000"/>
-        </a:xfrm>
-        <a:prstGeom prst="rect">
-          <a:avLst/>
-        </a:prstGeom>
-        <a:solidFill>
-          <a:schemeClr val="lt1">
-            <a:alpha val="90000"/>
-            <a:hueOff val="0"/>
-            <a:satOff val="0"/>
-            <a:lumOff val="0"/>
-            <a:alphaOff val="0"/>
-          </a:schemeClr>
-        </a:solidFill>
-        <a:ln w="25400" cap="flat" cmpd="sng" algn="ctr">
-          <a:solidFill>
-            <a:schemeClr val="accent1">
-              <a:hueOff val="0"/>
-              <a:satOff val="0"/>
-              <a:lumOff val="0"/>
-              <a:alphaOff val="0"/>
-            </a:schemeClr>
-          </a:solidFill>
-          <a:prstDash val="solid"/>
-        </a:ln>
-        <a:effectLst/>
-      </dsp:spPr>
-      <dsp:style>
-        <a:lnRef idx="2">
-          <a:scrgbClr r="0" g="0" b="0"/>
-        </a:lnRef>
-        <a:fillRef idx="1">
-          <a:scrgbClr r="0" g="0" b="0"/>
-        </a:fillRef>
-        <a:effectRef idx="0">
-          <a:scrgbClr r="0" g="0" b="0"/>
-        </a:effectRef>
-        <a:fontRef idx="minor"/>
-      </dsp:style>
-    </dsp:sp>
-    <dsp:sp modelId="{DE21590D-5DE3-41E9-874A-72B6B165BD0F}">
-      <dsp:nvSpPr>
-        <dsp:cNvPr id="0" name=""/>
-        <dsp:cNvSpPr/>
-      </dsp:nvSpPr>
-      <dsp:spPr>
-        <a:xfrm>
-          <a:off x="368730" y="47400"/>
-          <a:ext cx="5425431" cy="738000"/>
-        </a:xfrm>
-        <a:prstGeom prst="roundRect">
-          <a:avLst/>
-        </a:prstGeom>
-        <a:solidFill>
-          <a:schemeClr val="accent1">
-            <a:hueOff val="0"/>
-            <a:satOff val="0"/>
-            <a:lumOff val="0"/>
-            <a:alphaOff val="0"/>
-          </a:schemeClr>
-        </a:solidFill>
-        <a:ln w="25400" cap="flat" cmpd="sng" algn="ctr">
-          <a:solidFill>
-            <a:schemeClr val="lt1">
-              <a:hueOff val="0"/>
-              <a:satOff val="0"/>
-              <a:lumOff val="0"/>
-              <a:alphaOff val="0"/>
-            </a:schemeClr>
-          </a:solidFill>
-          <a:prstDash val="solid"/>
-        </a:ln>
-        <a:effectLst/>
-      </dsp:spPr>
-      <dsp:style>
-        <a:lnRef idx="2">
-          <a:scrgbClr r="0" g="0" b="0"/>
-        </a:lnRef>
-        <a:fillRef idx="1">
-          <a:scrgbClr r="0" g="0" b="0"/>
-        </a:fillRef>
-        <a:effectRef idx="0">
-          <a:scrgbClr r="0" g="0" b="0"/>
-        </a:effectRef>
-        <a:fontRef idx="minor">
-          <a:schemeClr val="lt1"/>
-        </a:fontRef>
-      </dsp:style>
-      <dsp:txBody>
-        <a:bodyPr spcFirstLastPara="0" vert="horz" wrap="square" lIns="163306" tIns="0" rIns="163306" bIns="0" numCol="1" spcCol="1270" anchor="ctr" anchorCtr="0">
-          <a:noAutofit/>
-        </a:bodyPr>
-        <a:lstStyle/>
-        <a:p>
-          <a:pPr lvl="0" algn="l" defTabSz="977900">
-            <a:lnSpc>
-              <a:spcPct val="90000"/>
-            </a:lnSpc>
-            <a:spcBef>
-              <a:spcPct val="0"/>
-            </a:spcBef>
-            <a:spcAft>
-              <a:spcPct val="35000"/>
-            </a:spcAft>
-          </a:pPr>
-          <a:r>
-            <a:rPr lang="en-US" sz="2200" kern="1200" dirty="0" smtClean="0"/>
-            <a:t>Helps in analyzing requirements completely</a:t>
-          </a:r>
-          <a:endParaRPr lang="en-US" sz="2200" kern="1200" dirty="0"/>
-        </a:p>
-      </dsp:txBody>
-      <dsp:txXfrm>
-        <a:off x="368730" y="47400"/>
-        <a:ext cx="5425431" cy="738000"/>
-      </dsp:txXfrm>
-    </dsp:sp>
-    <dsp:sp modelId="{0ED62FB5-CD8C-4E35-9A42-1C6E2E6D9675}">
-      <dsp:nvSpPr>
-        <dsp:cNvPr id="0" name=""/>
-        <dsp:cNvSpPr/>
-      </dsp:nvSpPr>
-      <dsp:spPr>
-        <a:xfrm>
-          <a:off x="0" y="1550400"/>
-          <a:ext cx="6172199" cy="630000"/>
-        </a:xfrm>
-        <a:prstGeom prst="rect">
-          <a:avLst/>
-        </a:prstGeom>
-        <a:solidFill>
-          <a:schemeClr val="lt1">
-            <a:alpha val="90000"/>
-            <a:hueOff val="0"/>
-            <a:satOff val="0"/>
-            <a:lumOff val="0"/>
-            <a:alphaOff val="0"/>
-          </a:schemeClr>
-        </a:solidFill>
-        <a:ln w="25400" cap="flat" cmpd="sng" algn="ctr">
-          <a:solidFill>
-            <a:schemeClr val="accent1">
-              <a:hueOff val="0"/>
-              <a:satOff val="0"/>
-              <a:lumOff val="0"/>
-              <a:alphaOff val="0"/>
-            </a:schemeClr>
-          </a:solidFill>
-          <a:prstDash val="solid"/>
-        </a:ln>
-        <a:effectLst/>
-      </dsp:spPr>
-      <dsp:style>
-        <a:lnRef idx="2">
-          <a:scrgbClr r="0" g="0" b="0"/>
-        </a:lnRef>
-        <a:fillRef idx="1">
-          <a:scrgbClr r="0" g="0" b="0"/>
-        </a:fillRef>
-        <a:effectRef idx="0">
-          <a:scrgbClr r="0" g="0" b="0"/>
-        </a:effectRef>
-        <a:fontRef idx="minor"/>
-      </dsp:style>
-    </dsp:sp>
-    <dsp:sp modelId="{C264362E-209D-4D40-9D36-3FDCF2274E08}">
-      <dsp:nvSpPr>
-        <dsp:cNvPr id="0" name=""/>
-        <dsp:cNvSpPr/>
-      </dsp:nvSpPr>
-      <dsp:spPr>
-        <a:xfrm>
-          <a:off x="308610" y="1181400"/>
-          <a:ext cx="5425431" cy="738000"/>
-        </a:xfrm>
-        <a:prstGeom prst="roundRect">
-          <a:avLst/>
-        </a:prstGeom>
-        <a:solidFill>
-          <a:schemeClr val="accent2"/>
-        </a:solidFill>
-        <a:ln w="25400" cap="flat" cmpd="sng" algn="ctr">
-          <a:solidFill>
-            <a:schemeClr val="lt1">
-              <a:hueOff val="0"/>
-              <a:satOff val="0"/>
-              <a:lumOff val="0"/>
-              <a:alphaOff val="0"/>
-            </a:schemeClr>
-          </a:solidFill>
-          <a:prstDash val="solid"/>
-        </a:ln>
-        <a:effectLst/>
-      </dsp:spPr>
-      <dsp:style>
-        <a:lnRef idx="2">
-          <a:scrgbClr r="0" g="0" b="0"/>
-        </a:lnRef>
-        <a:fillRef idx="1">
-          <a:scrgbClr r="0" g="0" b="0"/>
-        </a:fillRef>
-        <a:effectRef idx="0">
-          <a:scrgbClr r="0" g="0" b="0"/>
-        </a:effectRef>
-        <a:fontRef idx="minor">
-          <a:schemeClr val="lt1"/>
-        </a:fontRef>
-      </dsp:style>
-      <dsp:txBody>
-        <a:bodyPr spcFirstLastPara="0" vert="horz" wrap="square" lIns="163306" tIns="0" rIns="163306" bIns="0" numCol="1" spcCol="1270" anchor="ctr" anchorCtr="0">
-          <a:noAutofit/>
-        </a:bodyPr>
-        <a:lstStyle/>
-        <a:p>
-          <a:pPr lvl="0" algn="l" defTabSz="977900">
-            <a:lnSpc>
-              <a:spcPct val="90000"/>
-            </a:lnSpc>
-            <a:spcBef>
-              <a:spcPct val="0"/>
-            </a:spcBef>
-            <a:spcAft>
-              <a:spcPct val="35000"/>
-            </a:spcAft>
-          </a:pPr>
-          <a:r>
-            <a:rPr lang="en-US" sz="2200" kern="1200" dirty="0" smtClean="0"/>
-            <a:t>Helps in indentifying and planning for risks</a:t>
-          </a:r>
-          <a:endParaRPr lang="en-US" sz="2200" kern="1200" dirty="0"/>
-        </a:p>
-      </dsp:txBody>
-      <dsp:txXfrm>
-        <a:off x="308610" y="1181400"/>
-        <a:ext cx="5425431" cy="738000"/>
-      </dsp:txXfrm>
-    </dsp:sp>
-    <dsp:sp modelId="{3EB6538B-407D-401A-B5D9-4166DB5DE084}">
-      <dsp:nvSpPr>
-        <dsp:cNvPr id="0" name=""/>
-        <dsp:cNvSpPr/>
-      </dsp:nvSpPr>
-      <dsp:spPr>
-        <a:xfrm>
-          <a:off x="0" y="2684400"/>
-          <a:ext cx="6172199" cy="630000"/>
-        </a:xfrm>
-        <a:prstGeom prst="rect">
-          <a:avLst/>
-        </a:prstGeom>
-        <a:solidFill>
-          <a:schemeClr val="lt1">
-            <a:alpha val="90000"/>
-            <a:hueOff val="0"/>
-            <a:satOff val="0"/>
-            <a:lumOff val="0"/>
-            <a:alphaOff val="0"/>
-          </a:schemeClr>
-        </a:solidFill>
-        <a:ln w="25400" cap="flat" cmpd="sng" algn="ctr">
-          <a:solidFill>
-            <a:schemeClr val="accent1">
-              <a:hueOff val="0"/>
-              <a:satOff val="0"/>
-              <a:lumOff val="0"/>
-              <a:alphaOff val="0"/>
-            </a:schemeClr>
-          </a:solidFill>
-          <a:prstDash val="solid"/>
-        </a:ln>
-        <a:effectLst/>
-      </dsp:spPr>
-      <dsp:style>
-        <a:lnRef idx="2">
-          <a:scrgbClr r="0" g="0" b="0"/>
-        </a:lnRef>
-        <a:fillRef idx="1">
-          <a:scrgbClr r="0" g="0" b="0"/>
-        </a:fillRef>
-        <a:effectRef idx="0">
-          <a:scrgbClr r="0" g="0" b="0"/>
-        </a:effectRef>
-        <a:fontRef idx="minor"/>
-      </dsp:style>
-    </dsp:sp>
-    <dsp:sp modelId="{06AF805B-F6F3-4E8C-87A7-7C5E13722586}">
-      <dsp:nvSpPr>
-        <dsp:cNvPr id="0" name=""/>
-        <dsp:cNvSpPr/>
-      </dsp:nvSpPr>
-      <dsp:spPr>
-        <a:xfrm>
-          <a:off x="308610" y="2315400"/>
-          <a:ext cx="5425431" cy="738000"/>
-        </a:xfrm>
-        <a:prstGeom prst="roundRect">
-          <a:avLst/>
-        </a:prstGeom>
-        <a:solidFill>
-          <a:schemeClr val="accent3"/>
-        </a:solidFill>
-        <a:ln w="25400" cap="flat" cmpd="sng" algn="ctr">
-          <a:solidFill>
-            <a:schemeClr val="lt1">
-              <a:hueOff val="0"/>
-              <a:satOff val="0"/>
-              <a:lumOff val="0"/>
-              <a:alphaOff val="0"/>
-            </a:schemeClr>
-          </a:solidFill>
-          <a:prstDash val="solid"/>
-        </a:ln>
-        <a:effectLst/>
-      </dsp:spPr>
-      <dsp:style>
-        <a:lnRef idx="2">
-          <a:scrgbClr r="0" g="0" b="0"/>
-        </a:lnRef>
-        <a:fillRef idx="1">
-          <a:scrgbClr r="0" g="0" b="0"/>
-        </a:fillRef>
-        <a:effectRef idx="0">
-          <a:scrgbClr r="0" g="0" b="0"/>
-        </a:effectRef>
-        <a:fontRef idx="minor">
-          <a:schemeClr val="lt1"/>
-        </a:fontRef>
-      </dsp:style>
-      <dsp:txBody>
-        <a:bodyPr spcFirstLastPara="0" vert="horz" wrap="square" lIns="163306" tIns="0" rIns="163306" bIns="0" numCol="1" spcCol="1270" anchor="ctr" anchorCtr="0">
-          <a:noAutofit/>
-        </a:bodyPr>
-        <a:lstStyle/>
-        <a:p>
-          <a:pPr lvl="0" algn="l" defTabSz="977900">
-            <a:lnSpc>
-              <a:spcPct val="90000"/>
-            </a:lnSpc>
-            <a:spcBef>
-              <a:spcPct val="0"/>
-            </a:spcBef>
-            <a:spcAft>
-              <a:spcPct val="35000"/>
-            </a:spcAft>
-          </a:pPr>
-          <a:r>
-            <a:rPr lang="en-US" sz="2200" kern="1200" dirty="0" smtClean="0"/>
-            <a:t>Helps in making cost/benefit analysis</a:t>
-          </a:r>
-          <a:endParaRPr lang="en-US" sz="2200" kern="1200" dirty="0"/>
-        </a:p>
-      </dsp:txBody>
-      <dsp:txXfrm>
-        <a:off x="308610" y="2315400"/>
-        <a:ext cx="5425431" cy="738000"/>
-      </dsp:txXfrm>
-    </dsp:sp>
-    <dsp:sp modelId="{961EFD2A-04EA-415C-8C6D-9CC07418E6C7}">
-      <dsp:nvSpPr>
-        <dsp:cNvPr id="0" name=""/>
-        <dsp:cNvSpPr/>
-      </dsp:nvSpPr>
-      <dsp:spPr>
-        <a:xfrm>
-          <a:off x="0" y="3818400"/>
-          <a:ext cx="6172199" cy="630000"/>
-        </a:xfrm>
-        <a:prstGeom prst="rect">
-          <a:avLst/>
-        </a:prstGeom>
-        <a:solidFill>
-          <a:schemeClr val="lt1">
-            <a:alpha val="90000"/>
-            <a:hueOff val="0"/>
-            <a:satOff val="0"/>
-            <a:lumOff val="0"/>
-            <a:alphaOff val="0"/>
-          </a:schemeClr>
-        </a:solidFill>
-        <a:ln w="25400" cap="flat" cmpd="sng" algn="ctr">
-          <a:solidFill>
-            <a:schemeClr val="accent1">
-              <a:hueOff val="0"/>
-              <a:satOff val="0"/>
-              <a:lumOff val="0"/>
-              <a:alphaOff val="0"/>
-            </a:schemeClr>
-          </a:solidFill>
-          <a:prstDash val="solid"/>
-        </a:ln>
-        <a:effectLst/>
-      </dsp:spPr>
-      <dsp:style>
-        <a:lnRef idx="2">
-          <a:scrgbClr r="0" g="0" b="0"/>
-        </a:lnRef>
-        <a:fillRef idx="1">
-          <a:scrgbClr r="0" g="0" b="0"/>
-        </a:fillRef>
-        <a:effectRef idx="0">
-          <a:scrgbClr r="0" g="0" b="0"/>
-        </a:effectRef>
-        <a:fontRef idx="minor"/>
-      </dsp:style>
-    </dsp:sp>
-    <dsp:sp modelId="{5FAA833E-6D98-490D-A6E4-DC5E02D539A9}">
-      <dsp:nvSpPr>
-        <dsp:cNvPr id="0" name=""/>
-        <dsp:cNvSpPr/>
-      </dsp:nvSpPr>
-      <dsp:spPr>
-        <a:xfrm>
-          <a:off x="308610" y="3449400"/>
-          <a:ext cx="5425431" cy="738000"/>
-        </a:xfrm>
-        <a:prstGeom prst="roundRect">
-          <a:avLst/>
-        </a:prstGeom>
-        <a:solidFill>
-          <a:schemeClr val="accent4"/>
-        </a:solidFill>
-        <a:ln w="25400" cap="flat" cmpd="sng" algn="ctr">
-          <a:solidFill>
-            <a:schemeClr val="lt1">
-              <a:hueOff val="0"/>
-              <a:satOff val="0"/>
-              <a:lumOff val="0"/>
-              <a:alphaOff val="0"/>
-            </a:schemeClr>
-          </a:solidFill>
-          <a:prstDash val="solid"/>
-        </a:ln>
-        <a:effectLst/>
-      </dsp:spPr>
-      <dsp:style>
-        <a:lnRef idx="2">
-          <a:scrgbClr r="0" g="0" b="0"/>
-        </a:lnRef>
-        <a:fillRef idx="1">
-          <a:scrgbClr r="0" g="0" b="0"/>
-        </a:fillRef>
-        <a:effectRef idx="0">
-          <a:scrgbClr r="0" g="0" b="0"/>
-        </a:effectRef>
-        <a:fontRef idx="minor">
-          <a:schemeClr val="lt1"/>
-        </a:fontRef>
-      </dsp:style>
-      <dsp:txBody>
-        <a:bodyPr spcFirstLastPara="0" vert="horz" wrap="square" lIns="163306" tIns="0" rIns="163306" bIns="0" numCol="1" spcCol="1270" anchor="ctr" anchorCtr="0">
-          <a:noAutofit/>
-        </a:bodyPr>
-        <a:lstStyle/>
-        <a:p>
-          <a:pPr lvl="0" algn="l" defTabSz="977900">
-            <a:lnSpc>
-              <a:spcPct val="90000"/>
-            </a:lnSpc>
-            <a:spcBef>
-              <a:spcPct val="0"/>
-            </a:spcBef>
-            <a:spcAft>
-              <a:spcPct val="35000"/>
-            </a:spcAft>
-          </a:pPr>
-          <a:r>
-            <a:rPr lang="en-US" sz="2200" kern="1200" dirty="0" smtClean="0"/>
-            <a:t>Helps in making plan for training developers for implementing the system.</a:t>
-          </a:r>
-          <a:endParaRPr lang="en-US" sz="2200" kern="1200" dirty="0"/>
-        </a:p>
-      </dsp:txBody>
-      <dsp:txXfrm>
-        <a:off x="308610" y="3449400"/>
-        <a:ext cx="5425431" cy="738000"/>
-      </dsp:txXfrm>
-    </dsp:sp>
   </dsp:spTree>
 </dsp:drawing>
 </file>
@@ -6529,7 +5319,7 @@
             <a:fld id="{8FCF70C7-1A17-4B8F-8E82-A20E29AAAC58}" type="datetimeFigureOut">
               <a:rPr lang="en-US" smtClean="0"/>
               <a:pPr/>
-              <a:t>5/21/2026</a:t>
+              <a:t>6/7/2026</a:t>
             </a:fld>
             <a:endParaRPr lang="en-US" dirty="0"/>
           </a:p>
@@ -6691,7 +5481,7 @@
             <a:fld id="{B972150E-24DE-4D23-AF8D-CF01896B0C83}" type="datetimeFigureOut">
               <a:rPr lang="en-US" smtClean="0"/>
               <a:pPr/>
-              <a:t>5/21/2026</a:t>
+              <a:t>6/7/2026</a:t>
             </a:fld>
             <a:endParaRPr lang="en-US" dirty="0"/>
           </a:p>
@@ -7312,7 +6102,7 @@
               <a:pPr>
                 <a:defRPr/>
               </a:pPr>
-              <a:t>5/21/2026</a:t>
+              <a:t>6/7/2026</a:t>
             </a:fld>
             <a:endParaRPr lang="en-US" dirty="0"/>
           </a:p>
@@ -7504,7 +6294,7 @@
               <a:pPr>
                 <a:defRPr/>
               </a:pPr>
-              <a:t>5/21/2026</a:t>
+              <a:t>6/7/2026</a:t>
             </a:fld>
             <a:endParaRPr lang="en-US" dirty="0"/>
           </a:p>
@@ -7706,7 +6496,7 @@
               <a:pPr>
                 <a:defRPr/>
               </a:pPr>
-              <a:t>5/21/2026</a:t>
+              <a:t>6/7/2026</a:t>
             </a:fld>
             <a:endParaRPr lang="en-US" dirty="0"/>
           </a:p>
@@ -7898,7 +6688,7 @@
               <a:pPr>
                 <a:defRPr/>
               </a:pPr>
-              <a:t>5/21/2026</a:t>
+              <a:t>6/7/2026</a:t>
             </a:fld>
             <a:endParaRPr lang="en-US" dirty="0"/>
           </a:p>
@@ -8166,7 +6956,7 @@
               <a:pPr>
                 <a:defRPr/>
               </a:pPr>
-              <a:t>5/21/2026</a:t>
+              <a:t>6/7/2026</a:t>
             </a:fld>
             <a:endParaRPr lang="en-US" dirty="0"/>
           </a:p>
@@ -8476,7 +7266,7 @@
               <a:pPr>
                 <a:defRPr/>
               </a:pPr>
-              <a:t>5/21/2026</a:t>
+              <a:t>6/7/2026</a:t>
             </a:fld>
             <a:endParaRPr lang="en-US" dirty="0"/>
           </a:p>
@@ -8920,7 +7710,7 @@
               <a:pPr>
                 <a:defRPr/>
               </a:pPr>
-              <a:t>5/21/2026</a:t>
+              <a:t>6/7/2026</a:t>
             </a:fld>
             <a:endParaRPr lang="en-US" dirty="0"/>
           </a:p>
@@ -9060,7 +7850,7 @@
               <a:pPr>
                 <a:defRPr/>
               </a:pPr>
-              <a:t>5/21/2026</a:t>
+              <a:t>6/7/2026</a:t>
             </a:fld>
             <a:endParaRPr lang="en-US" dirty="0"/>
           </a:p>
@@ -9177,7 +7967,7 @@
               <a:pPr>
                 <a:defRPr/>
               </a:pPr>
-              <a:t>5/21/2026</a:t>
+              <a:t>6/7/2026</a:t>
             </a:fld>
             <a:endParaRPr lang="en-US" dirty="0"/>
           </a:p>
@@ -9476,7 +8266,7 @@
               <a:pPr>
                 <a:defRPr/>
               </a:pPr>
-              <a:t>5/21/2026</a:t>
+              <a:t>6/7/2026</a:t>
             </a:fld>
             <a:endParaRPr lang="en-US" dirty="0"/>
           </a:p>
@@ -9754,7 +8544,7 @@
               <a:pPr>
                 <a:defRPr/>
               </a:pPr>
-              <a:t>5/21/2026</a:t>
+              <a:t>6/7/2026</a:t>
             </a:fld>
             <a:endParaRPr lang="en-US" dirty="0"/>
           </a:p>
@@ -10002,7 +8792,7 @@
               <a:pPr>
                 <a:defRPr/>
               </a:pPr>
-              <a:t>5/21/2026</a:t>
+              <a:t>6/7/2026</a:t>
             </a:fld>
             <a:endParaRPr lang="en-US" dirty="0"/>
           </a:p>
@@ -15229,6 +14019,241 @@
       </p:grpSpPr>
       <p:pic>
         <p:nvPicPr>
+          <p:cNvPr id="5" name="Picture 3"/>
+          <p:cNvPicPr>
+            <a:picLocks noChangeAspect="1" noChangeArrowheads="1"/>
+          </p:cNvPicPr>
+          <p:nvPr/>
+        </p:nvPicPr>
+        <p:blipFill>
+          <a:blip r:embed="rId2" cstate="print"/>
+          <a:srcRect/>
+          <a:stretch>
+            <a:fillRect/>
+          </a:stretch>
+        </p:blipFill>
+        <p:spPr bwMode="auto">
+          <a:xfrm>
+            <a:off x="6429786" y="332437"/>
+            <a:ext cx="2257014" cy="1496363"/>
+          </a:xfrm>
+          <a:prstGeom prst="rect">
+            <a:avLst/>
+          </a:prstGeom>
+          <a:noFill/>
+          <a:ln w="9525">
+            <a:noFill/>
+            <a:miter lim="800000"/>
+            <a:headEnd/>
+            <a:tailEnd/>
+          </a:ln>
+        </p:spPr>
+      </p:pic>
+      <p:sp>
+        <p:nvSpPr>
+          <p:cNvPr id="2" name="Title 1"/>
+          <p:cNvSpPr>
+            <a:spLocks noGrp="1"/>
+          </p:cNvSpPr>
+          <p:nvPr>
+            <p:ph type="title"/>
+          </p:nvPr>
+        </p:nvSpPr>
+        <p:spPr/>
+        <p:txBody>
+          <a:bodyPr/>
+          <a:lstStyle/>
+          <a:p>
+            <a:r>
+              <a:rPr lang="en-US" dirty="0" smtClean="0"/>
+              <a:t>Team Forming</a:t>
+            </a:r>
+            <a:endParaRPr lang="en-US" dirty="0"/>
+          </a:p>
+        </p:txBody>
+      </p:sp>
+      <p:sp>
+        <p:nvSpPr>
+          <p:cNvPr id="3" name="Content Placeholder 2"/>
+          <p:cNvSpPr>
+            <a:spLocks noGrp="1"/>
+          </p:cNvSpPr>
+          <p:nvPr>
+            <p:ph idx="1"/>
+          </p:nvPr>
+        </p:nvSpPr>
+        <p:spPr>
+          <a:xfrm>
+            <a:off x="457200" y="1676400"/>
+            <a:ext cx="8229600" cy="3429000"/>
+          </a:xfrm>
+        </p:spPr>
+        <p:txBody>
+          <a:bodyPr/>
+          <a:lstStyle/>
+          <a:p>
+            <a:r>
+              <a:rPr lang="en-US" sz="2000" dirty="0" smtClean="0">
+                <a:latin typeface="Calibri" pitchFamily="34" charset="0"/>
+              </a:rPr>
+              <a:t>Select 8 </a:t>
+            </a:r>
+            <a:r>
+              <a:rPr lang="en-US" sz="2000" i="1" dirty="0" smtClean="0">
+                <a:solidFill>
+                  <a:srgbClr val="C00000"/>
+                </a:solidFill>
+                <a:latin typeface="Calibri" pitchFamily="34" charset="0"/>
+              </a:rPr>
+              <a:t>team leaders</a:t>
+            </a:r>
+            <a:r>
+              <a:rPr lang="en-US" sz="2000" dirty="0" smtClean="0">
+                <a:latin typeface="Calibri" pitchFamily="34" charset="0"/>
+              </a:rPr>
+              <a:t>. </a:t>
+            </a:r>
+            <a:endParaRPr lang="vi-VN" sz="2000" dirty="0" smtClean="0">
+              <a:latin typeface="Calibri" pitchFamily="34" charset="0"/>
+            </a:endParaRPr>
+          </a:p>
+          <a:p>
+            <a:r>
+              <a:rPr lang="en-US" sz="2000" dirty="0" smtClean="0">
+                <a:latin typeface="Calibri" pitchFamily="34" charset="0"/>
+              </a:rPr>
+              <a:t>Students select a team for themselves. Each team has </a:t>
+            </a:r>
+            <a:r>
+              <a:rPr lang="en-US" sz="2000" i="1" dirty="0" smtClean="0">
+                <a:solidFill>
+                  <a:srgbClr val="C00000"/>
+                </a:solidFill>
+                <a:latin typeface="Calibri" pitchFamily="34" charset="0"/>
+              </a:rPr>
+              <a:t>maximum of 5 members (including a team leader)</a:t>
+            </a:r>
+            <a:r>
+              <a:rPr lang="en-US" sz="2000" dirty="0" smtClean="0">
+                <a:latin typeface="Calibri" pitchFamily="34" charset="0"/>
+              </a:rPr>
+              <a:t>.</a:t>
+            </a:r>
+          </a:p>
+          <a:p>
+            <a:r>
+              <a:rPr lang="en-US" sz="2000" dirty="0" smtClean="0">
+                <a:latin typeface="Calibri" pitchFamily="34" charset="0"/>
+              </a:rPr>
+              <a:t>If there are surplus students, some teams can have 8 people.</a:t>
+            </a:r>
+          </a:p>
+          <a:p>
+            <a:r>
+              <a:rPr lang="en-US" sz="2000" dirty="0" smtClean="0">
+                <a:latin typeface="Calibri" pitchFamily="34" charset="0"/>
+              </a:rPr>
+              <a:t>Team leaders send their team members list to class leader.</a:t>
+            </a:r>
+            <a:endParaRPr lang="vi-VN" sz="2000" dirty="0" smtClean="0">
+              <a:latin typeface="Calibri" pitchFamily="34" charset="0"/>
+            </a:endParaRPr>
+          </a:p>
+          <a:p>
+            <a:r>
+              <a:rPr lang="en-US" sz="2000" dirty="0" smtClean="0">
+                <a:latin typeface="Calibri" pitchFamily="34" charset="0"/>
+              </a:rPr>
+              <a:t>The class leader collects and puts all the information to a class management file</a:t>
+            </a:r>
+            <a:r>
+              <a:rPr lang="vi-VN" sz="2000" dirty="0" smtClean="0">
+                <a:latin typeface="Calibri" pitchFamily="34" charset="0"/>
+              </a:rPr>
+              <a:t>.</a:t>
+            </a:r>
+            <a:endParaRPr lang="en-US" sz="2000" dirty="0" smtClean="0">
+              <a:latin typeface="Calibri" pitchFamily="34" charset="0"/>
+            </a:endParaRPr>
+          </a:p>
+          <a:p>
+            <a:r>
+              <a:rPr lang="en-US" sz="2000" dirty="0" smtClean="0">
+                <a:latin typeface="Calibri" pitchFamily="34" charset="0"/>
+              </a:rPr>
+              <a:t>The class leader </a:t>
+            </a:r>
+            <a:r>
+              <a:rPr lang="en-US" sz="2000" i="1" dirty="0" smtClean="0">
+                <a:solidFill>
+                  <a:srgbClr val="C00000"/>
+                </a:solidFill>
+                <a:latin typeface="Calibri" pitchFamily="34" charset="0"/>
+              </a:rPr>
+              <a:t>is authorized</a:t>
+            </a:r>
+            <a:r>
+              <a:rPr lang="en-US" sz="2000" dirty="0" smtClean="0">
+                <a:latin typeface="Calibri" pitchFamily="34" charset="0"/>
+              </a:rPr>
+              <a:t> to assign a team for an individual who is late to class or absent.</a:t>
+            </a:r>
+          </a:p>
+        </p:txBody>
+      </p:sp>
+      <p:pic>
+        <p:nvPicPr>
+          <p:cNvPr id="11266" name="Picture 2" descr="https://cavemaninasuit.com/wp-content/uploads/2020/09/multidisc_teams-1.jpg"/>
+          <p:cNvPicPr>
+            <a:picLocks noChangeAspect="1" noChangeArrowheads="1"/>
+          </p:cNvPicPr>
+          <p:nvPr/>
+        </p:nvPicPr>
+        <p:blipFill>
+          <a:blip r:embed="rId3" cstate="print"/>
+          <a:srcRect/>
+          <a:stretch>
+            <a:fillRect/>
+          </a:stretch>
+        </p:blipFill>
+        <p:spPr bwMode="auto">
+          <a:xfrm>
+            <a:off x="3810000" y="4953000"/>
+            <a:ext cx="2333625" cy="1311275"/>
+          </a:xfrm>
+          <a:prstGeom prst="rect">
+            <a:avLst/>
+          </a:prstGeom>
+          <a:noFill/>
+        </p:spPr>
+      </p:pic>
+    </p:spTree>
+  </p:cSld>
+  <p:clrMapOvr>
+    <a:masterClrMapping/>
+  </p:clrMapOvr>
+</p:sld>
+</file>
+
+<file path=ppt/slides/slide6.xml><?xml version="1.0" encoding="utf-8"?>
+<p:sld xmlns:a="http://schemas.openxmlformats.org/drawingml/2006/main" xmlns:r="http://schemas.openxmlformats.org/officeDocument/2006/relationships" xmlns:p="http://schemas.openxmlformats.org/presentationml/2006/main">
+  <p:cSld>
+    <p:spTree>
+      <p:nvGrpSpPr>
+        <p:cNvPr id="1" name=""/>
+        <p:cNvGrpSpPr/>
+        <p:nvPr/>
+      </p:nvGrpSpPr>
+      <p:grpSpPr>
+        <a:xfrm>
+          <a:off x="0" y="0"/>
+          <a:ext cx="0" cy="0"/>
+          <a:chOff x="0" y="0"/>
+          <a:chExt cx="0" cy="0"/>
+        </a:xfrm>
+      </p:grpSpPr>
+      <p:pic>
+        <p:nvPicPr>
           <p:cNvPr id="45059" name="Picture 3"/>
           <p:cNvPicPr>
             <a:picLocks noChangeAspect="1" noChangeArrowheads="1"/>
@@ -15434,7 +14459,7 @@
 </p:sld>
 </file>
 
-<file path=ppt/slides/slide6.xml><?xml version="1.0" encoding="utf-8"?>
+<file path=ppt/slides/slide7.xml><?xml version="1.0" encoding="utf-8"?>
 <p:sld xmlns:a="http://schemas.openxmlformats.org/drawingml/2006/main" xmlns:r="http://schemas.openxmlformats.org/officeDocument/2006/relationships" xmlns:p="http://schemas.openxmlformats.org/presentationml/2006/main">
   <p:cSld>
     <p:spTree>
@@ -15569,241 +14594,6 @@
       </p:par>
     </p:tnLst>
   </p:timing>
-</p:sld>
-</file>
-
-<file path=ppt/slides/slide7.xml><?xml version="1.0" encoding="utf-8"?>
-<p:sld xmlns:a="http://schemas.openxmlformats.org/drawingml/2006/main" xmlns:r="http://schemas.openxmlformats.org/officeDocument/2006/relationships" xmlns:p="http://schemas.openxmlformats.org/presentationml/2006/main">
-  <p:cSld>
-    <p:spTree>
-      <p:nvGrpSpPr>
-        <p:cNvPr id="1" name=""/>
-        <p:cNvGrpSpPr/>
-        <p:nvPr/>
-      </p:nvGrpSpPr>
-      <p:grpSpPr>
-        <a:xfrm>
-          <a:off x="0" y="0"/>
-          <a:ext cx="0" cy="0"/>
-          <a:chOff x="0" y="0"/>
-          <a:chExt cx="0" cy="0"/>
-        </a:xfrm>
-      </p:grpSpPr>
-      <p:pic>
-        <p:nvPicPr>
-          <p:cNvPr id="5" name="Picture 3"/>
-          <p:cNvPicPr>
-            <a:picLocks noChangeAspect="1" noChangeArrowheads="1"/>
-          </p:cNvPicPr>
-          <p:nvPr/>
-        </p:nvPicPr>
-        <p:blipFill>
-          <a:blip r:embed="rId2" cstate="print"/>
-          <a:srcRect/>
-          <a:stretch>
-            <a:fillRect/>
-          </a:stretch>
-        </p:blipFill>
-        <p:spPr bwMode="auto">
-          <a:xfrm>
-            <a:off x="6429786" y="332437"/>
-            <a:ext cx="2257014" cy="1496363"/>
-          </a:xfrm>
-          <a:prstGeom prst="rect">
-            <a:avLst/>
-          </a:prstGeom>
-          <a:noFill/>
-          <a:ln w="9525">
-            <a:noFill/>
-            <a:miter lim="800000"/>
-            <a:headEnd/>
-            <a:tailEnd/>
-          </a:ln>
-        </p:spPr>
-      </p:pic>
-      <p:sp>
-        <p:nvSpPr>
-          <p:cNvPr id="2" name="Title 1"/>
-          <p:cNvSpPr>
-            <a:spLocks noGrp="1"/>
-          </p:cNvSpPr>
-          <p:nvPr>
-            <p:ph type="title"/>
-          </p:nvPr>
-        </p:nvSpPr>
-        <p:spPr/>
-        <p:txBody>
-          <a:bodyPr/>
-          <a:lstStyle/>
-          <a:p>
-            <a:r>
-              <a:rPr lang="en-US" dirty="0" smtClean="0"/>
-              <a:t>Team Forming</a:t>
-            </a:r>
-            <a:endParaRPr lang="en-US" dirty="0"/>
-          </a:p>
-        </p:txBody>
-      </p:sp>
-      <p:sp>
-        <p:nvSpPr>
-          <p:cNvPr id="3" name="Content Placeholder 2"/>
-          <p:cNvSpPr>
-            <a:spLocks noGrp="1"/>
-          </p:cNvSpPr>
-          <p:nvPr>
-            <p:ph idx="1"/>
-          </p:nvPr>
-        </p:nvSpPr>
-        <p:spPr>
-          <a:xfrm>
-            <a:off x="457200" y="1676400"/>
-            <a:ext cx="8229600" cy="3429000"/>
-          </a:xfrm>
-        </p:spPr>
-        <p:txBody>
-          <a:bodyPr/>
-          <a:lstStyle/>
-          <a:p>
-            <a:r>
-              <a:rPr lang="en-US" sz="2000" dirty="0" smtClean="0">
-                <a:latin typeface="Calibri" pitchFamily="34" charset="0"/>
-              </a:rPr>
-              <a:t>Select 8 </a:t>
-            </a:r>
-            <a:r>
-              <a:rPr lang="en-US" sz="2000" i="1" dirty="0" smtClean="0">
-                <a:solidFill>
-                  <a:srgbClr val="C00000"/>
-                </a:solidFill>
-                <a:latin typeface="Calibri" pitchFamily="34" charset="0"/>
-              </a:rPr>
-              <a:t>team leaders</a:t>
-            </a:r>
-            <a:r>
-              <a:rPr lang="en-US" sz="2000" dirty="0" smtClean="0">
-                <a:latin typeface="Calibri" pitchFamily="34" charset="0"/>
-              </a:rPr>
-              <a:t>. </a:t>
-            </a:r>
-            <a:endParaRPr lang="vi-VN" sz="2000" dirty="0" smtClean="0">
-              <a:latin typeface="Calibri" pitchFamily="34" charset="0"/>
-            </a:endParaRPr>
-          </a:p>
-          <a:p>
-            <a:r>
-              <a:rPr lang="en-US" sz="2000" dirty="0" smtClean="0">
-                <a:latin typeface="Calibri" pitchFamily="34" charset="0"/>
-              </a:rPr>
-              <a:t>Students select a team for themselves. Each team has </a:t>
-            </a:r>
-            <a:r>
-              <a:rPr lang="en-US" sz="2000" i="1" dirty="0" smtClean="0">
-                <a:solidFill>
-                  <a:srgbClr val="C00000"/>
-                </a:solidFill>
-                <a:latin typeface="Calibri" pitchFamily="34" charset="0"/>
-              </a:rPr>
-              <a:t>maximum of 5 members (including a team leader)</a:t>
-            </a:r>
-            <a:r>
-              <a:rPr lang="en-US" sz="2000" dirty="0" smtClean="0">
-                <a:latin typeface="Calibri" pitchFamily="34" charset="0"/>
-              </a:rPr>
-              <a:t>.</a:t>
-            </a:r>
-          </a:p>
-          <a:p>
-            <a:r>
-              <a:rPr lang="en-US" sz="2000" dirty="0" smtClean="0">
-                <a:latin typeface="Calibri" pitchFamily="34" charset="0"/>
-              </a:rPr>
-              <a:t>If there are surplus students, some teams can have 8 people.</a:t>
-            </a:r>
-          </a:p>
-          <a:p>
-            <a:r>
-              <a:rPr lang="en-US" sz="2000" dirty="0" smtClean="0">
-                <a:latin typeface="Calibri" pitchFamily="34" charset="0"/>
-              </a:rPr>
-              <a:t>Team leaders send their team members list to class leader.</a:t>
-            </a:r>
-            <a:endParaRPr lang="vi-VN" sz="2000" dirty="0" smtClean="0">
-              <a:latin typeface="Calibri" pitchFamily="34" charset="0"/>
-            </a:endParaRPr>
-          </a:p>
-          <a:p>
-            <a:r>
-              <a:rPr lang="en-US" sz="2000" dirty="0" smtClean="0">
-                <a:latin typeface="Calibri" pitchFamily="34" charset="0"/>
-              </a:rPr>
-              <a:t>The class leader collects and puts all the information to a class management file</a:t>
-            </a:r>
-            <a:r>
-              <a:rPr lang="vi-VN" sz="2000" dirty="0" smtClean="0">
-                <a:latin typeface="Calibri" pitchFamily="34" charset="0"/>
-              </a:rPr>
-              <a:t>.</a:t>
-            </a:r>
-            <a:endParaRPr lang="en-US" sz="2000" dirty="0" smtClean="0">
-              <a:latin typeface="Calibri" pitchFamily="34" charset="0"/>
-            </a:endParaRPr>
-          </a:p>
-          <a:p>
-            <a:r>
-              <a:rPr lang="en-US" sz="2000" dirty="0" smtClean="0">
-                <a:latin typeface="Calibri" pitchFamily="34" charset="0"/>
-              </a:rPr>
-              <a:t>The class leader </a:t>
-            </a:r>
-            <a:r>
-              <a:rPr lang="en-US" sz="2000" i="1" dirty="0" smtClean="0">
-                <a:solidFill>
-                  <a:srgbClr val="C00000"/>
-                </a:solidFill>
-                <a:latin typeface="Calibri" pitchFamily="34" charset="0"/>
-              </a:rPr>
-              <a:t>is authorized</a:t>
-            </a:r>
-            <a:r>
-              <a:rPr lang="en-US" sz="2000" dirty="0" smtClean="0">
-                <a:latin typeface="Calibri" pitchFamily="34" charset="0"/>
-              </a:rPr>
-              <a:t> to assign a team for an individual who is late to class or absent.</a:t>
-            </a:r>
-          </a:p>
-        </p:txBody>
-      </p:sp>
-      <p:pic>
-        <p:nvPicPr>
-          <p:cNvPr id="11266" name="Picture 2" descr="https://cavemaninasuit.com/wp-content/uploads/2020/09/multidisc_teams-1.jpg"/>
-          <p:cNvPicPr>
-            <a:picLocks noChangeAspect="1" noChangeArrowheads="1"/>
-          </p:cNvPicPr>
-          <p:nvPr/>
-        </p:nvPicPr>
-        <p:blipFill>
-          <a:blip r:embed="rId3" cstate="print"/>
-          <a:srcRect/>
-          <a:stretch>
-            <a:fillRect/>
-          </a:stretch>
-        </p:blipFill>
-        <p:spPr bwMode="auto">
-          <a:xfrm>
-            <a:off x="3810000" y="4953000"/>
-            <a:ext cx="2333625" cy="1311275"/>
-          </a:xfrm>
-          <a:prstGeom prst="rect">
-            <a:avLst/>
-          </a:prstGeom>
-          <a:noFill/>
-        </p:spPr>
-      </p:pic>
-    </p:spTree>
-  </p:cSld>
-  <p:clrMapOvr>
-    <a:masterClrMapping/>
-  </p:clrMapOvr>
 </p:sld>
 </file>
 

--- a/Software Project Management/03. Software Project Initiation.pptx
+++ b/Software Project Management/03. Software Project Initiation.pptx
@@ -5,42 +5,47 @@
     <p:sldMasterId id="2147483708" r:id="rId1"/>
   </p:sldMasterIdLst>
   <p:notesMasterIdLst>
-    <p:notesMasterId r:id="rId32"/>
+    <p:notesMasterId r:id="rId37"/>
   </p:notesMasterIdLst>
   <p:handoutMasterIdLst>
-    <p:handoutMasterId r:id="rId33"/>
+    <p:handoutMasterId r:id="rId38"/>
   </p:handoutMasterIdLst>
   <p:sldIdLst>
     <p:sldId id="256" r:id="rId2"/>
     <p:sldId id="499" r:id="rId3"/>
     <p:sldId id="671" r:id="rId4"/>
     <p:sldId id="839" r:id="rId5"/>
-    <p:sldId id="880" r:id="rId6"/>
-    <p:sldId id="851" r:id="rId7"/>
-    <p:sldId id="833" r:id="rId8"/>
-    <p:sldId id="855" r:id="rId9"/>
-    <p:sldId id="872" r:id="rId10"/>
-    <p:sldId id="879" r:id="rId11"/>
-    <p:sldId id="873" r:id="rId12"/>
-    <p:sldId id="874" r:id="rId13"/>
-    <p:sldId id="842" r:id="rId14"/>
-    <p:sldId id="835" r:id="rId15"/>
-    <p:sldId id="836" r:id="rId16"/>
-    <p:sldId id="852" r:id="rId17"/>
-    <p:sldId id="853" r:id="rId18"/>
-    <p:sldId id="854" r:id="rId19"/>
-    <p:sldId id="869" r:id="rId20"/>
-    <p:sldId id="867" r:id="rId21"/>
-    <p:sldId id="868" r:id="rId22"/>
-    <p:sldId id="837" r:id="rId23"/>
-    <p:sldId id="838" r:id="rId24"/>
-    <p:sldId id="878" r:id="rId25"/>
-    <p:sldId id="875" r:id="rId26"/>
-    <p:sldId id="876" r:id="rId27"/>
-    <p:sldId id="877" r:id="rId28"/>
-    <p:sldId id="843" r:id="rId29"/>
-    <p:sldId id="830" r:id="rId30"/>
-    <p:sldId id="343" r:id="rId31"/>
+    <p:sldId id="881" r:id="rId6"/>
+    <p:sldId id="882" r:id="rId7"/>
+    <p:sldId id="883" r:id="rId8"/>
+    <p:sldId id="884" r:id="rId9"/>
+    <p:sldId id="888" r:id="rId10"/>
+    <p:sldId id="885" r:id="rId11"/>
+    <p:sldId id="886" r:id="rId12"/>
+    <p:sldId id="887" r:id="rId13"/>
+    <p:sldId id="855" r:id="rId14"/>
+    <p:sldId id="872" r:id="rId15"/>
+    <p:sldId id="879" r:id="rId16"/>
+    <p:sldId id="873" r:id="rId17"/>
+    <p:sldId id="874" r:id="rId18"/>
+    <p:sldId id="842" r:id="rId19"/>
+    <p:sldId id="835" r:id="rId20"/>
+    <p:sldId id="836" r:id="rId21"/>
+    <p:sldId id="852" r:id="rId22"/>
+    <p:sldId id="853" r:id="rId23"/>
+    <p:sldId id="854" r:id="rId24"/>
+    <p:sldId id="869" r:id="rId25"/>
+    <p:sldId id="867" r:id="rId26"/>
+    <p:sldId id="868" r:id="rId27"/>
+    <p:sldId id="837" r:id="rId28"/>
+    <p:sldId id="838" r:id="rId29"/>
+    <p:sldId id="878" r:id="rId30"/>
+    <p:sldId id="875" r:id="rId31"/>
+    <p:sldId id="876" r:id="rId32"/>
+    <p:sldId id="877" r:id="rId33"/>
+    <p:sldId id="843" r:id="rId34"/>
+    <p:sldId id="830" r:id="rId35"/>
+    <p:sldId id="343" r:id="rId36"/>
   </p:sldIdLst>
   <p:sldSz cx="9144000" cy="6858000" type="screen4x3"/>
   <p:notesSz cx="6858000" cy="9144000"/>
@@ -2702,6 +2707,731 @@
       <dsp:cNvGrpSpPr/>
     </dsp:nvGrpSpPr>
     <dsp:grpSpPr/>
+    <dsp:sp modelId="{56CABD1B-944E-49F7-866A-C6598132C0E2}">
+      <dsp:nvSpPr>
+        <dsp:cNvPr id="0" name=""/>
+        <dsp:cNvSpPr/>
+      </dsp:nvSpPr>
+      <dsp:spPr>
+        <a:xfrm>
+          <a:off x="0" y="324839"/>
+          <a:ext cx="4572000" cy="327600"/>
+        </a:xfrm>
+        <a:prstGeom prst="rect">
+          <a:avLst/>
+        </a:prstGeom>
+        <a:solidFill>
+          <a:schemeClr val="lt1">
+            <a:alpha val="90000"/>
+            <a:hueOff val="0"/>
+            <a:satOff val="0"/>
+            <a:lumOff val="0"/>
+            <a:alphaOff val="0"/>
+          </a:schemeClr>
+        </a:solidFill>
+        <a:ln w="25400" cap="flat" cmpd="sng" algn="ctr">
+          <a:solidFill>
+            <a:schemeClr val="accent1">
+              <a:hueOff val="0"/>
+              <a:satOff val="0"/>
+              <a:lumOff val="0"/>
+              <a:alphaOff val="0"/>
+            </a:schemeClr>
+          </a:solidFill>
+          <a:prstDash val="solid"/>
+        </a:ln>
+        <a:effectLst/>
+      </dsp:spPr>
+      <dsp:style>
+        <a:lnRef idx="2">
+          <a:scrgbClr r="0" g="0" b="0"/>
+        </a:lnRef>
+        <a:fillRef idx="1">
+          <a:scrgbClr r="0" g="0" b="0"/>
+        </a:fillRef>
+        <a:effectRef idx="0">
+          <a:scrgbClr r="0" g="0" b="0"/>
+        </a:effectRef>
+        <a:fontRef idx="minor"/>
+      </dsp:style>
+    </dsp:sp>
+    <dsp:sp modelId="{4F622BEB-62C0-41FB-AA25-3807F8F602A7}">
+      <dsp:nvSpPr>
+        <dsp:cNvPr id="0" name=""/>
+        <dsp:cNvSpPr/>
+      </dsp:nvSpPr>
+      <dsp:spPr>
+        <a:xfrm>
+          <a:off x="228600" y="132959"/>
+          <a:ext cx="3200400" cy="383760"/>
+        </a:xfrm>
+        <a:prstGeom prst="roundRect">
+          <a:avLst/>
+        </a:prstGeom>
+        <a:solidFill>
+          <a:schemeClr val="accent1">
+            <a:hueOff val="0"/>
+            <a:satOff val="0"/>
+            <a:lumOff val="0"/>
+            <a:alphaOff val="0"/>
+          </a:schemeClr>
+        </a:solidFill>
+        <a:ln w="25400" cap="flat" cmpd="sng" algn="ctr">
+          <a:solidFill>
+            <a:schemeClr val="lt1">
+              <a:hueOff val="0"/>
+              <a:satOff val="0"/>
+              <a:lumOff val="0"/>
+              <a:alphaOff val="0"/>
+            </a:schemeClr>
+          </a:solidFill>
+          <a:prstDash val="solid"/>
+        </a:ln>
+        <a:effectLst/>
+      </dsp:spPr>
+      <dsp:style>
+        <a:lnRef idx="2">
+          <a:scrgbClr r="0" g="0" b="0"/>
+        </a:lnRef>
+        <a:fillRef idx="1">
+          <a:scrgbClr r="0" g="0" b="0"/>
+        </a:fillRef>
+        <a:effectRef idx="0">
+          <a:scrgbClr r="0" g="0" b="0"/>
+        </a:effectRef>
+        <a:fontRef idx="minor">
+          <a:schemeClr val="lt1"/>
+        </a:fontRef>
+      </dsp:style>
+      <dsp:txBody>
+        <a:bodyPr spcFirstLastPara="0" vert="horz" wrap="square" lIns="120968" tIns="0" rIns="120968" bIns="0" numCol="1" spcCol="1270" anchor="ctr" anchorCtr="0">
+          <a:noAutofit/>
+        </a:bodyPr>
+        <a:lstStyle/>
+        <a:p>
+          <a:pPr lvl="0" algn="l" defTabSz="977900">
+            <a:lnSpc>
+              <a:spcPct val="90000"/>
+            </a:lnSpc>
+            <a:spcBef>
+              <a:spcPct val="0"/>
+            </a:spcBef>
+            <a:spcAft>
+              <a:spcPct val="35000"/>
+            </a:spcAft>
+          </a:pPr>
+          <a:r>
+            <a:rPr lang="en-US" sz="2200" kern="1200" dirty="0" smtClean="0"/>
+            <a:t>Purpose</a:t>
+          </a:r>
+          <a:endParaRPr lang="en-US" sz="2200" kern="1200" dirty="0"/>
+        </a:p>
+      </dsp:txBody>
+      <dsp:txXfrm>
+        <a:off x="228600" y="132959"/>
+        <a:ext cx="3200400" cy="383760"/>
+      </dsp:txXfrm>
+    </dsp:sp>
+    <dsp:sp modelId="{8B5298D1-CF53-49BC-9023-0EE6E258E573}">
+      <dsp:nvSpPr>
+        <dsp:cNvPr id="0" name=""/>
+        <dsp:cNvSpPr/>
+      </dsp:nvSpPr>
+      <dsp:spPr>
+        <a:xfrm>
+          <a:off x="0" y="914519"/>
+          <a:ext cx="4572000" cy="327600"/>
+        </a:xfrm>
+        <a:prstGeom prst="rect">
+          <a:avLst/>
+        </a:prstGeom>
+        <a:solidFill>
+          <a:schemeClr val="lt1">
+            <a:alpha val="90000"/>
+            <a:hueOff val="0"/>
+            <a:satOff val="0"/>
+            <a:lumOff val="0"/>
+            <a:alphaOff val="0"/>
+          </a:schemeClr>
+        </a:solidFill>
+        <a:ln w="25400" cap="flat" cmpd="sng" algn="ctr">
+          <a:solidFill>
+            <a:schemeClr val="accent1">
+              <a:hueOff val="0"/>
+              <a:satOff val="0"/>
+              <a:lumOff val="0"/>
+              <a:alphaOff val="0"/>
+            </a:schemeClr>
+          </a:solidFill>
+          <a:prstDash val="solid"/>
+        </a:ln>
+        <a:effectLst/>
+      </dsp:spPr>
+      <dsp:style>
+        <a:lnRef idx="2">
+          <a:scrgbClr r="0" g="0" b="0"/>
+        </a:lnRef>
+        <a:fillRef idx="1">
+          <a:scrgbClr r="0" g="0" b="0"/>
+        </a:fillRef>
+        <a:effectRef idx="0">
+          <a:scrgbClr r="0" g="0" b="0"/>
+        </a:effectRef>
+        <a:fontRef idx="minor"/>
+      </dsp:style>
+    </dsp:sp>
+    <dsp:sp modelId="{0ABD91B7-67D8-4835-9472-249FD879718E}">
+      <dsp:nvSpPr>
+        <dsp:cNvPr id="0" name=""/>
+        <dsp:cNvSpPr/>
+      </dsp:nvSpPr>
+      <dsp:spPr>
+        <a:xfrm>
+          <a:off x="228600" y="722639"/>
+          <a:ext cx="3200400" cy="383760"/>
+        </a:xfrm>
+        <a:prstGeom prst="roundRect">
+          <a:avLst/>
+        </a:prstGeom>
+        <a:solidFill>
+          <a:schemeClr val="accent2"/>
+        </a:solidFill>
+        <a:ln w="25400" cap="flat" cmpd="sng" algn="ctr">
+          <a:solidFill>
+            <a:schemeClr val="lt1">
+              <a:hueOff val="0"/>
+              <a:satOff val="0"/>
+              <a:lumOff val="0"/>
+              <a:alphaOff val="0"/>
+            </a:schemeClr>
+          </a:solidFill>
+          <a:prstDash val="solid"/>
+        </a:ln>
+        <a:effectLst/>
+      </dsp:spPr>
+      <dsp:style>
+        <a:lnRef idx="2">
+          <a:scrgbClr r="0" g="0" b="0"/>
+        </a:lnRef>
+        <a:fillRef idx="1">
+          <a:scrgbClr r="0" g="0" b="0"/>
+        </a:fillRef>
+        <a:effectRef idx="0">
+          <a:scrgbClr r="0" g="0" b="0"/>
+        </a:effectRef>
+        <a:fontRef idx="minor">
+          <a:schemeClr val="lt1"/>
+        </a:fontRef>
+      </dsp:style>
+      <dsp:txBody>
+        <a:bodyPr spcFirstLastPara="0" vert="horz" wrap="square" lIns="120968" tIns="0" rIns="120968" bIns="0" numCol="1" spcCol="1270" anchor="ctr" anchorCtr="0">
+          <a:noAutofit/>
+        </a:bodyPr>
+        <a:lstStyle/>
+        <a:p>
+          <a:pPr lvl="0" algn="l" defTabSz="977900">
+            <a:lnSpc>
+              <a:spcPct val="90000"/>
+            </a:lnSpc>
+            <a:spcBef>
+              <a:spcPct val="0"/>
+            </a:spcBef>
+            <a:spcAft>
+              <a:spcPct val="35000"/>
+            </a:spcAft>
+          </a:pPr>
+          <a:r>
+            <a:rPr lang="en-US" sz="2200" kern="1200" dirty="0" smtClean="0"/>
+            <a:t>Reason</a:t>
+          </a:r>
+          <a:endParaRPr lang="en-US" sz="2200" kern="1200" dirty="0"/>
+        </a:p>
+      </dsp:txBody>
+      <dsp:txXfrm>
+        <a:off x="228600" y="722639"/>
+        <a:ext cx="3200400" cy="383760"/>
+      </dsp:txXfrm>
+    </dsp:sp>
+    <dsp:sp modelId="{8011D070-568F-4A84-BD56-7ABA35D47A61}">
+      <dsp:nvSpPr>
+        <dsp:cNvPr id="0" name=""/>
+        <dsp:cNvSpPr/>
+      </dsp:nvSpPr>
+      <dsp:spPr>
+        <a:xfrm>
+          <a:off x="0" y="1504200"/>
+          <a:ext cx="4572000" cy="327600"/>
+        </a:xfrm>
+        <a:prstGeom prst="rect">
+          <a:avLst/>
+        </a:prstGeom>
+        <a:solidFill>
+          <a:schemeClr val="lt1">
+            <a:alpha val="90000"/>
+            <a:hueOff val="0"/>
+            <a:satOff val="0"/>
+            <a:lumOff val="0"/>
+            <a:alphaOff val="0"/>
+          </a:schemeClr>
+        </a:solidFill>
+        <a:ln w="25400" cap="flat" cmpd="sng" algn="ctr">
+          <a:solidFill>
+            <a:schemeClr val="accent1">
+              <a:hueOff val="0"/>
+              <a:satOff val="0"/>
+              <a:lumOff val="0"/>
+              <a:alphaOff val="0"/>
+            </a:schemeClr>
+          </a:solidFill>
+          <a:prstDash val="solid"/>
+        </a:ln>
+        <a:effectLst/>
+      </dsp:spPr>
+      <dsp:style>
+        <a:lnRef idx="2">
+          <a:scrgbClr r="0" g="0" b="0"/>
+        </a:lnRef>
+        <a:fillRef idx="1">
+          <a:scrgbClr r="0" g="0" b="0"/>
+        </a:fillRef>
+        <a:effectRef idx="0">
+          <a:scrgbClr r="0" g="0" b="0"/>
+        </a:effectRef>
+        <a:fontRef idx="minor"/>
+      </dsp:style>
+    </dsp:sp>
+    <dsp:sp modelId="{AD646C37-0DDC-40B6-BFF6-68C35C41D431}">
+      <dsp:nvSpPr>
+        <dsp:cNvPr id="0" name=""/>
+        <dsp:cNvSpPr/>
+      </dsp:nvSpPr>
+      <dsp:spPr>
+        <a:xfrm>
+          <a:off x="228600" y="1312320"/>
+          <a:ext cx="3200400" cy="383760"/>
+        </a:xfrm>
+        <a:prstGeom prst="roundRect">
+          <a:avLst/>
+        </a:prstGeom>
+        <a:solidFill>
+          <a:schemeClr val="accent3"/>
+        </a:solidFill>
+        <a:ln w="25400" cap="flat" cmpd="sng" algn="ctr">
+          <a:solidFill>
+            <a:schemeClr val="lt1">
+              <a:hueOff val="0"/>
+              <a:satOff val="0"/>
+              <a:lumOff val="0"/>
+              <a:alphaOff val="0"/>
+            </a:schemeClr>
+          </a:solidFill>
+          <a:prstDash val="solid"/>
+        </a:ln>
+        <a:effectLst/>
+      </dsp:spPr>
+      <dsp:style>
+        <a:lnRef idx="2">
+          <a:scrgbClr r="0" g="0" b="0"/>
+        </a:lnRef>
+        <a:fillRef idx="1">
+          <a:scrgbClr r="0" g="0" b="0"/>
+        </a:fillRef>
+        <a:effectRef idx="0">
+          <a:scrgbClr r="0" g="0" b="0"/>
+        </a:effectRef>
+        <a:fontRef idx="minor">
+          <a:schemeClr val="lt1"/>
+        </a:fontRef>
+      </dsp:style>
+      <dsp:txBody>
+        <a:bodyPr spcFirstLastPara="0" vert="horz" wrap="square" lIns="120968" tIns="0" rIns="120968" bIns="0" numCol="1" spcCol="1270" anchor="ctr" anchorCtr="0">
+          <a:noAutofit/>
+        </a:bodyPr>
+        <a:lstStyle/>
+        <a:p>
+          <a:pPr lvl="0" algn="l" defTabSz="977900">
+            <a:lnSpc>
+              <a:spcPct val="90000"/>
+            </a:lnSpc>
+            <a:spcBef>
+              <a:spcPct val="0"/>
+            </a:spcBef>
+            <a:spcAft>
+              <a:spcPct val="35000"/>
+            </a:spcAft>
+          </a:pPr>
+          <a:r>
+            <a:rPr lang="en-US" sz="2200" kern="1200" dirty="0" smtClean="0"/>
+            <a:t>Background information</a:t>
+          </a:r>
+          <a:endParaRPr lang="en-US" sz="2200" kern="1200" dirty="0"/>
+        </a:p>
+      </dsp:txBody>
+      <dsp:txXfrm>
+        <a:off x="228600" y="1312320"/>
+        <a:ext cx="3200400" cy="383760"/>
+      </dsp:txXfrm>
+    </dsp:sp>
+    <dsp:sp modelId="{2CC94E98-C2BC-40BA-BA2C-53E02A202477}">
+      <dsp:nvSpPr>
+        <dsp:cNvPr id="0" name=""/>
+        <dsp:cNvSpPr/>
+      </dsp:nvSpPr>
+      <dsp:spPr>
+        <a:xfrm>
+          <a:off x="0" y="2093880"/>
+          <a:ext cx="4572000" cy="327600"/>
+        </a:xfrm>
+        <a:prstGeom prst="rect">
+          <a:avLst/>
+        </a:prstGeom>
+        <a:solidFill>
+          <a:schemeClr val="lt1">
+            <a:alpha val="90000"/>
+            <a:hueOff val="0"/>
+            <a:satOff val="0"/>
+            <a:lumOff val="0"/>
+            <a:alphaOff val="0"/>
+          </a:schemeClr>
+        </a:solidFill>
+        <a:ln w="25400" cap="flat" cmpd="sng" algn="ctr">
+          <a:solidFill>
+            <a:schemeClr val="accent1">
+              <a:hueOff val="0"/>
+              <a:satOff val="0"/>
+              <a:lumOff val="0"/>
+              <a:alphaOff val="0"/>
+            </a:schemeClr>
+          </a:solidFill>
+          <a:prstDash val="solid"/>
+        </a:ln>
+        <a:effectLst/>
+      </dsp:spPr>
+      <dsp:style>
+        <a:lnRef idx="2">
+          <a:scrgbClr r="0" g="0" b="0"/>
+        </a:lnRef>
+        <a:fillRef idx="1">
+          <a:scrgbClr r="0" g="0" b="0"/>
+        </a:fillRef>
+        <a:effectRef idx="0">
+          <a:scrgbClr r="0" g="0" b="0"/>
+        </a:effectRef>
+        <a:fontRef idx="minor"/>
+      </dsp:style>
+    </dsp:sp>
+    <dsp:sp modelId="{90065A47-6053-496C-B292-B863C5F1C893}">
+      <dsp:nvSpPr>
+        <dsp:cNvPr id="0" name=""/>
+        <dsp:cNvSpPr/>
+      </dsp:nvSpPr>
+      <dsp:spPr>
+        <a:xfrm>
+          <a:off x="273133" y="1902000"/>
+          <a:ext cx="3200400" cy="383760"/>
+        </a:xfrm>
+        <a:prstGeom prst="roundRect">
+          <a:avLst/>
+        </a:prstGeom>
+        <a:solidFill>
+          <a:schemeClr val="accent4"/>
+        </a:solidFill>
+        <a:ln w="25400" cap="flat" cmpd="sng" algn="ctr">
+          <a:solidFill>
+            <a:schemeClr val="lt1">
+              <a:hueOff val="0"/>
+              <a:satOff val="0"/>
+              <a:lumOff val="0"/>
+              <a:alphaOff val="0"/>
+            </a:schemeClr>
+          </a:solidFill>
+          <a:prstDash val="solid"/>
+        </a:ln>
+        <a:effectLst/>
+      </dsp:spPr>
+      <dsp:style>
+        <a:lnRef idx="2">
+          <a:scrgbClr r="0" g="0" b="0"/>
+        </a:lnRef>
+        <a:fillRef idx="1">
+          <a:scrgbClr r="0" g="0" b="0"/>
+        </a:fillRef>
+        <a:effectRef idx="0">
+          <a:scrgbClr r="0" g="0" b="0"/>
+        </a:effectRef>
+        <a:fontRef idx="minor">
+          <a:schemeClr val="lt1"/>
+        </a:fontRef>
+      </dsp:style>
+      <dsp:txBody>
+        <a:bodyPr spcFirstLastPara="0" vert="horz" wrap="square" lIns="120968" tIns="0" rIns="120968" bIns="0" numCol="1" spcCol="1270" anchor="ctr" anchorCtr="0">
+          <a:noAutofit/>
+        </a:bodyPr>
+        <a:lstStyle/>
+        <a:p>
+          <a:pPr lvl="0" algn="l" defTabSz="977900">
+            <a:lnSpc>
+              <a:spcPct val="90000"/>
+            </a:lnSpc>
+            <a:spcBef>
+              <a:spcPct val="0"/>
+            </a:spcBef>
+            <a:spcAft>
+              <a:spcPct val="35000"/>
+            </a:spcAft>
+          </a:pPr>
+          <a:r>
+            <a:rPr lang="en-US" sz="2200" kern="1200" dirty="0" smtClean="0"/>
+            <a:t>The evaluation criteria</a:t>
+          </a:r>
+          <a:endParaRPr lang="en-US" sz="2200" kern="1200" dirty="0"/>
+        </a:p>
+      </dsp:txBody>
+      <dsp:txXfrm>
+        <a:off x="273133" y="1902000"/>
+        <a:ext cx="3200400" cy="383760"/>
+      </dsp:txXfrm>
+    </dsp:sp>
+    <dsp:sp modelId="{10C80C59-D601-4AD4-9AE0-F459A2AD1F9A}">
+      <dsp:nvSpPr>
+        <dsp:cNvPr id="0" name=""/>
+        <dsp:cNvSpPr/>
+      </dsp:nvSpPr>
+      <dsp:spPr>
+        <a:xfrm>
+          <a:off x="0" y="2683560"/>
+          <a:ext cx="4572000" cy="327600"/>
+        </a:xfrm>
+        <a:prstGeom prst="rect">
+          <a:avLst/>
+        </a:prstGeom>
+        <a:solidFill>
+          <a:schemeClr val="lt1">
+            <a:alpha val="90000"/>
+            <a:hueOff val="0"/>
+            <a:satOff val="0"/>
+            <a:lumOff val="0"/>
+            <a:alphaOff val="0"/>
+          </a:schemeClr>
+        </a:solidFill>
+        <a:ln w="25400" cap="flat" cmpd="sng" algn="ctr">
+          <a:solidFill>
+            <a:schemeClr val="accent1">
+              <a:hueOff val="0"/>
+              <a:satOff val="0"/>
+              <a:lumOff val="0"/>
+              <a:alphaOff val="0"/>
+            </a:schemeClr>
+          </a:solidFill>
+          <a:prstDash val="solid"/>
+        </a:ln>
+        <a:effectLst/>
+      </dsp:spPr>
+      <dsp:style>
+        <a:lnRef idx="2">
+          <a:scrgbClr r="0" g="0" b="0"/>
+        </a:lnRef>
+        <a:fillRef idx="1">
+          <a:scrgbClr r="0" g="0" b="0"/>
+        </a:fillRef>
+        <a:effectRef idx="0">
+          <a:scrgbClr r="0" g="0" b="0"/>
+        </a:effectRef>
+        <a:fontRef idx="minor"/>
+      </dsp:style>
+    </dsp:sp>
+    <dsp:sp modelId="{1F9781A0-24EF-4D22-863B-387A9EB35B5D}">
+      <dsp:nvSpPr>
+        <dsp:cNvPr id="0" name=""/>
+        <dsp:cNvSpPr/>
+      </dsp:nvSpPr>
+      <dsp:spPr>
+        <a:xfrm>
+          <a:off x="273133" y="2491680"/>
+          <a:ext cx="3200400" cy="383760"/>
+        </a:xfrm>
+        <a:prstGeom prst="roundRect">
+          <a:avLst/>
+        </a:prstGeom>
+        <a:solidFill>
+          <a:schemeClr val="accent5"/>
+        </a:solidFill>
+        <a:ln w="25400" cap="flat" cmpd="sng" algn="ctr">
+          <a:solidFill>
+            <a:schemeClr val="lt1">
+              <a:hueOff val="0"/>
+              <a:satOff val="0"/>
+              <a:lumOff val="0"/>
+              <a:alphaOff val="0"/>
+            </a:schemeClr>
+          </a:solidFill>
+          <a:prstDash val="solid"/>
+        </a:ln>
+        <a:effectLst/>
+      </dsp:spPr>
+      <dsp:style>
+        <a:lnRef idx="2">
+          <a:scrgbClr r="0" g="0" b="0"/>
+        </a:lnRef>
+        <a:fillRef idx="1">
+          <a:scrgbClr r="0" g="0" b="0"/>
+        </a:fillRef>
+        <a:effectRef idx="0">
+          <a:scrgbClr r="0" g="0" b="0"/>
+        </a:effectRef>
+        <a:fontRef idx="minor">
+          <a:schemeClr val="lt1"/>
+        </a:fontRef>
+      </dsp:style>
+      <dsp:txBody>
+        <a:bodyPr spcFirstLastPara="0" vert="horz" wrap="square" lIns="120968" tIns="0" rIns="120968" bIns="0" numCol="1" spcCol="1270" anchor="ctr" anchorCtr="0">
+          <a:noAutofit/>
+        </a:bodyPr>
+        <a:lstStyle/>
+        <a:p>
+          <a:pPr lvl="0" algn="l" defTabSz="977900">
+            <a:lnSpc>
+              <a:spcPct val="90000"/>
+            </a:lnSpc>
+            <a:spcBef>
+              <a:spcPct val="0"/>
+            </a:spcBef>
+            <a:spcAft>
+              <a:spcPct val="35000"/>
+            </a:spcAft>
+          </a:pPr>
+          <a:r>
+            <a:rPr lang="en-US" sz="2200" kern="1200" dirty="0" smtClean="0"/>
+            <a:t>The study findings</a:t>
+          </a:r>
+          <a:endParaRPr lang="en-US" sz="2200" kern="1200" dirty="0"/>
+        </a:p>
+      </dsp:txBody>
+      <dsp:txXfrm>
+        <a:off x="273133" y="2491680"/>
+        <a:ext cx="3200400" cy="383760"/>
+      </dsp:txXfrm>
+    </dsp:sp>
+    <dsp:sp modelId="{ECAED0D9-0A7B-453D-970D-A96E8C7059E3}">
+      <dsp:nvSpPr>
+        <dsp:cNvPr id="0" name=""/>
+        <dsp:cNvSpPr/>
+      </dsp:nvSpPr>
+      <dsp:spPr>
+        <a:xfrm>
+          <a:off x="0" y="3273240"/>
+          <a:ext cx="4572000" cy="327600"/>
+        </a:xfrm>
+        <a:prstGeom prst="rect">
+          <a:avLst/>
+        </a:prstGeom>
+        <a:solidFill>
+          <a:schemeClr val="lt1">
+            <a:alpha val="90000"/>
+            <a:hueOff val="0"/>
+            <a:satOff val="0"/>
+            <a:lumOff val="0"/>
+            <a:alphaOff val="0"/>
+          </a:schemeClr>
+        </a:solidFill>
+        <a:ln w="25400" cap="flat" cmpd="sng" algn="ctr">
+          <a:solidFill>
+            <a:schemeClr val="accent1">
+              <a:hueOff val="0"/>
+              <a:satOff val="0"/>
+              <a:lumOff val="0"/>
+              <a:alphaOff val="0"/>
+            </a:schemeClr>
+          </a:solidFill>
+          <a:prstDash val="solid"/>
+        </a:ln>
+        <a:effectLst/>
+      </dsp:spPr>
+      <dsp:style>
+        <a:lnRef idx="2">
+          <a:scrgbClr r="0" g="0" b="0"/>
+        </a:lnRef>
+        <a:fillRef idx="1">
+          <a:scrgbClr r="0" g="0" b="0"/>
+        </a:fillRef>
+        <a:effectRef idx="0">
+          <a:scrgbClr r="0" g="0" b="0"/>
+        </a:effectRef>
+        <a:fontRef idx="minor"/>
+      </dsp:style>
+    </dsp:sp>
+    <dsp:sp modelId="{D321BBAD-41C6-45AB-9362-3E65DEBF3BC5}">
+      <dsp:nvSpPr>
+        <dsp:cNvPr id="0" name=""/>
+        <dsp:cNvSpPr/>
+      </dsp:nvSpPr>
+      <dsp:spPr>
+        <a:xfrm>
+          <a:off x="273133" y="3081360"/>
+          <a:ext cx="3200400" cy="383760"/>
+        </a:xfrm>
+        <a:prstGeom prst="roundRect">
+          <a:avLst/>
+        </a:prstGeom>
+        <a:solidFill>
+          <a:schemeClr val="accent6"/>
+        </a:solidFill>
+        <a:ln w="25400" cap="flat" cmpd="sng" algn="ctr">
+          <a:solidFill>
+            <a:schemeClr val="lt1">
+              <a:hueOff val="0"/>
+              <a:satOff val="0"/>
+              <a:lumOff val="0"/>
+              <a:alphaOff val="0"/>
+            </a:schemeClr>
+          </a:solidFill>
+          <a:prstDash val="solid"/>
+        </a:ln>
+        <a:effectLst/>
+      </dsp:spPr>
+      <dsp:style>
+        <a:lnRef idx="2">
+          <a:scrgbClr r="0" g="0" b="0"/>
+        </a:lnRef>
+        <a:fillRef idx="1">
+          <a:scrgbClr r="0" g="0" b="0"/>
+        </a:fillRef>
+        <a:effectRef idx="0">
+          <a:scrgbClr r="0" g="0" b="0"/>
+        </a:effectRef>
+        <a:fontRef idx="minor">
+          <a:schemeClr val="lt1"/>
+        </a:fontRef>
+      </dsp:style>
+      <dsp:txBody>
+        <a:bodyPr spcFirstLastPara="0" vert="horz" wrap="square" lIns="120968" tIns="0" rIns="120968" bIns="0" numCol="1" spcCol="1270" anchor="ctr" anchorCtr="0">
+          <a:noAutofit/>
+        </a:bodyPr>
+        <a:lstStyle/>
+        <a:p>
+          <a:pPr lvl="0" algn="l" defTabSz="977900">
+            <a:lnSpc>
+              <a:spcPct val="90000"/>
+            </a:lnSpc>
+            <a:spcBef>
+              <a:spcPct val="0"/>
+            </a:spcBef>
+            <a:spcAft>
+              <a:spcPct val="35000"/>
+            </a:spcAft>
+          </a:pPr>
+          <a:r>
+            <a:rPr lang="en-US" sz="2200" kern="1200" dirty="0" smtClean="0"/>
+            <a:t>The recommendations</a:t>
+          </a:r>
+          <a:endParaRPr lang="en-US" sz="2200" kern="1200" dirty="0"/>
+        </a:p>
+      </dsp:txBody>
+      <dsp:txXfrm>
+        <a:off x="273133" y="3081360"/>
+        <a:ext cx="3200400" cy="383760"/>
+      </dsp:txXfrm>
+    </dsp:sp>
   </dsp:spTree>
 </dsp:drawing>
 </file>
@@ -2714,6 +3444,491 @@
       <dsp:cNvGrpSpPr/>
     </dsp:nvGrpSpPr>
     <dsp:grpSpPr/>
+    <dsp:sp modelId="{00169986-F2F3-4B85-8ED4-5DAA51E975C1}">
+      <dsp:nvSpPr>
+        <dsp:cNvPr id="0" name=""/>
+        <dsp:cNvSpPr/>
+      </dsp:nvSpPr>
+      <dsp:spPr>
+        <a:xfrm>
+          <a:off x="0" y="416400"/>
+          <a:ext cx="6172199" cy="630000"/>
+        </a:xfrm>
+        <a:prstGeom prst="rect">
+          <a:avLst/>
+        </a:prstGeom>
+        <a:solidFill>
+          <a:schemeClr val="lt1">
+            <a:alpha val="90000"/>
+            <a:hueOff val="0"/>
+            <a:satOff val="0"/>
+            <a:lumOff val="0"/>
+            <a:alphaOff val="0"/>
+          </a:schemeClr>
+        </a:solidFill>
+        <a:ln w="25400" cap="flat" cmpd="sng" algn="ctr">
+          <a:solidFill>
+            <a:schemeClr val="accent1">
+              <a:hueOff val="0"/>
+              <a:satOff val="0"/>
+              <a:lumOff val="0"/>
+              <a:alphaOff val="0"/>
+            </a:schemeClr>
+          </a:solidFill>
+          <a:prstDash val="solid"/>
+        </a:ln>
+        <a:effectLst/>
+      </dsp:spPr>
+      <dsp:style>
+        <a:lnRef idx="2">
+          <a:scrgbClr r="0" g="0" b="0"/>
+        </a:lnRef>
+        <a:fillRef idx="1">
+          <a:scrgbClr r="0" g="0" b="0"/>
+        </a:fillRef>
+        <a:effectRef idx="0">
+          <a:scrgbClr r="0" g="0" b="0"/>
+        </a:effectRef>
+        <a:fontRef idx="minor"/>
+      </dsp:style>
+    </dsp:sp>
+    <dsp:sp modelId="{DE21590D-5DE3-41E9-874A-72B6B165BD0F}">
+      <dsp:nvSpPr>
+        <dsp:cNvPr id="0" name=""/>
+        <dsp:cNvSpPr/>
+      </dsp:nvSpPr>
+      <dsp:spPr>
+        <a:xfrm>
+          <a:off x="368730" y="47400"/>
+          <a:ext cx="5425431" cy="738000"/>
+        </a:xfrm>
+        <a:prstGeom prst="roundRect">
+          <a:avLst/>
+        </a:prstGeom>
+        <a:solidFill>
+          <a:schemeClr val="accent1">
+            <a:hueOff val="0"/>
+            <a:satOff val="0"/>
+            <a:lumOff val="0"/>
+            <a:alphaOff val="0"/>
+          </a:schemeClr>
+        </a:solidFill>
+        <a:ln w="25400" cap="flat" cmpd="sng" algn="ctr">
+          <a:solidFill>
+            <a:schemeClr val="lt1">
+              <a:hueOff val="0"/>
+              <a:satOff val="0"/>
+              <a:lumOff val="0"/>
+              <a:alphaOff val="0"/>
+            </a:schemeClr>
+          </a:solidFill>
+          <a:prstDash val="solid"/>
+        </a:ln>
+        <a:effectLst/>
+      </dsp:spPr>
+      <dsp:style>
+        <a:lnRef idx="2">
+          <a:scrgbClr r="0" g="0" b="0"/>
+        </a:lnRef>
+        <a:fillRef idx="1">
+          <a:scrgbClr r="0" g="0" b="0"/>
+        </a:fillRef>
+        <a:effectRef idx="0">
+          <a:scrgbClr r="0" g="0" b="0"/>
+        </a:effectRef>
+        <a:fontRef idx="minor">
+          <a:schemeClr val="lt1"/>
+        </a:fontRef>
+      </dsp:style>
+      <dsp:txBody>
+        <a:bodyPr spcFirstLastPara="0" vert="horz" wrap="square" lIns="163306" tIns="0" rIns="163306" bIns="0" numCol="1" spcCol="1270" anchor="ctr" anchorCtr="0">
+          <a:noAutofit/>
+        </a:bodyPr>
+        <a:lstStyle/>
+        <a:p>
+          <a:pPr lvl="0" algn="l" defTabSz="977900">
+            <a:lnSpc>
+              <a:spcPct val="90000"/>
+            </a:lnSpc>
+            <a:spcBef>
+              <a:spcPct val="0"/>
+            </a:spcBef>
+            <a:spcAft>
+              <a:spcPct val="35000"/>
+            </a:spcAft>
+          </a:pPr>
+          <a:r>
+            <a:rPr lang="en-US" sz="2200" kern="1200" dirty="0" smtClean="0"/>
+            <a:t>Helps in analyzing requirements completely</a:t>
+          </a:r>
+          <a:endParaRPr lang="en-US" sz="2200" kern="1200" dirty="0"/>
+        </a:p>
+      </dsp:txBody>
+      <dsp:txXfrm>
+        <a:off x="368730" y="47400"/>
+        <a:ext cx="5425431" cy="738000"/>
+      </dsp:txXfrm>
+    </dsp:sp>
+    <dsp:sp modelId="{0ED62FB5-CD8C-4E35-9A42-1C6E2E6D9675}">
+      <dsp:nvSpPr>
+        <dsp:cNvPr id="0" name=""/>
+        <dsp:cNvSpPr/>
+      </dsp:nvSpPr>
+      <dsp:spPr>
+        <a:xfrm>
+          <a:off x="0" y="1550400"/>
+          <a:ext cx="6172199" cy="630000"/>
+        </a:xfrm>
+        <a:prstGeom prst="rect">
+          <a:avLst/>
+        </a:prstGeom>
+        <a:solidFill>
+          <a:schemeClr val="lt1">
+            <a:alpha val="90000"/>
+            <a:hueOff val="0"/>
+            <a:satOff val="0"/>
+            <a:lumOff val="0"/>
+            <a:alphaOff val="0"/>
+          </a:schemeClr>
+        </a:solidFill>
+        <a:ln w="25400" cap="flat" cmpd="sng" algn="ctr">
+          <a:solidFill>
+            <a:schemeClr val="accent1">
+              <a:hueOff val="0"/>
+              <a:satOff val="0"/>
+              <a:lumOff val="0"/>
+              <a:alphaOff val="0"/>
+            </a:schemeClr>
+          </a:solidFill>
+          <a:prstDash val="solid"/>
+        </a:ln>
+        <a:effectLst/>
+      </dsp:spPr>
+      <dsp:style>
+        <a:lnRef idx="2">
+          <a:scrgbClr r="0" g="0" b="0"/>
+        </a:lnRef>
+        <a:fillRef idx="1">
+          <a:scrgbClr r="0" g="0" b="0"/>
+        </a:fillRef>
+        <a:effectRef idx="0">
+          <a:scrgbClr r="0" g="0" b="0"/>
+        </a:effectRef>
+        <a:fontRef idx="minor"/>
+      </dsp:style>
+    </dsp:sp>
+    <dsp:sp modelId="{C264362E-209D-4D40-9D36-3FDCF2274E08}">
+      <dsp:nvSpPr>
+        <dsp:cNvPr id="0" name=""/>
+        <dsp:cNvSpPr/>
+      </dsp:nvSpPr>
+      <dsp:spPr>
+        <a:xfrm>
+          <a:off x="308610" y="1181400"/>
+          <a:ext cx="5425431" cy="738000"/>
+        </a:xfrm>
+        <a:prstGeom prst="roundRect">
+          <a:avLst/>
+        </a:prstGeom>
+        <a:solidFill>
+          <a:schemeClr val="accent2"/>
+        </a:solidFill>
+        <a:ln w="25400" cap="flat" cmpd="sng" algn="ctr">
+          <a:solidFill>
+            <a:schemeClr val="lt1">
+              <a:hueOff val="0"/>
+              <a:satOff val="0"/>
+              <a:lumOff val="0"/>
+              <a:alphaOff val="0"/>
+            </a:schemeClr>
+          </a:solidFill>
+          <a:prstDash val="solid"/>
+        </a:ln>
+        <a:effectLst/>
+      </dsp:spPr>
+      <dsp:style>
+        <a:lnRef idx="2">
+          <a:scrgbClr r="0" g="0" b="0"/>
+        </a:lnRef>
+        <a:fillRef idx="1">
+          <a:scrgbClr r="0" g="0" b="0"/>
+        </a:fillRef>
+        <a:effectRef idx="0">
+          <a:scrgbClr r="0" g="0" b="0"/>
+        </a:effectRef>
+        <a:fontRef idx="minor">
+          <a:schemeClr val="lt1"/>
+        </a:fontRef>
+      </dsp:style>
+      <dsp:txBody>
+        <a:bodyPr spcFirstLastPara="0" vert="horz" wrap="square" lIns="163306" tIns="0" rIns="163306" bIns="0" numCol="1" spcCol="1270" anchor="ctr" anchorCtr="0">
+          <a:noAutofit/>
+        </a:bodyPr>
+        <a:lstStyle/>
+        <a:p>
+          <a:pPr lvl="0" algn="l" defTabSz="977900">
+            <a:lnSpc>
+              <a:spcPct val="90000"/>
+            </a:lnSpc>
+            <a:spcBef>
+              <a:spcPct val="0"/>
+            </a:spcBef>
+            <a:spcAft>
+              <a:spcPct val="35000"/>
+            </a:spcAft>
+          </a:pPr>
+          <a:r>
+            <a:rPr lang="en-US" sz="2200" kern="1200" dirty="0" smtClean="0"/>
+            <a:t>Helps in indentifying and planning for risks</a:t>
+          </a:r>
+          <a:endParaRPr lang="en-US" sz="2200" kern="1200" dirty="0"/>
+        </a:p>
+      </dsp:txBody>
+      <dsp:txXfrm>
+        <a:off x="308610" y="1181400"/>
+        <a:ext cx="5425431" cy="738000"/>
+      </dsp:txXfrm>
+    </dsp:sp>
+    <dsp:sp modelId="{3EB6538B-407D-401A-B5D9-4166DB5DE084}">
+      <dsp:nvSpPr>
+        <dsp:cNvPr id="0" name=""/>
+        <dsp:cNvSpPr/>
+      </dsp:nvSpPr>
+      <dsp:spPr>
+        <a:xfrm>
+          <a:off x="0" y="2684400"/>
+          <a:ext cx="6172199" cy="630000"/>
+        </a:xfrm>
+        <a:prstGeom prst="rect">
+          <a:avLst/>
+        </a:prstGeom>
+        <a:solidFill>
+          <a:schemeClr val="lt1">
+            <a:alpha val="90000"/>
+            <a:hueOff val="0"/>
+            <a:satOff val="0"/>
+            <a:lumOff val="0"/>
+            <a:alphaOff val="0"/>
+          </a:schemeClr>
+        </a:solidFill>
+        <a:ln w="25400" cap="flat" cmpd="sng" algn="ctr">
+          <a:solidFill>
+            <a:schemeClr val="accent1">
+              <a:hueOff val="0"/>
+              <a:satOff val="0"/>
+              <a:lumOff val="0"/>
+              <a:alphaOff val="0"/>
+            </a:schemeClr>
+          </a:solidFill>
+          <a:prstDash val="solid"/>
+        </a:ln>
+        <a:effectLst/>
+      </dsp:spPr>
+      <dsp:style>
+        <a:lnRef idx="2">
+          <a:scrgbClr r="0" g="0" b="0"/>
+        </a:lnRef>
+        <a:fillRef idx="1">
+          <a:scrgbClr r="0" g="0" b="0"/>
+        </a:fillRef>
+        <a:effectRef idx="0">
+          <a:scrgbClr r="0" g="0" b="0"/>
+        </a:effectRef>
+        <a:fontRef idx="minor"/>
+      </dsp:style>
+    </dsp:sp>
+    <dsp:sp modelId="{06AF805B-F6F3-4E8C-87A7-7C5E13722586}">
+      <dsp:nvSpPr>
+        <dsp:cNvPr id="0" name=""/>
+        <dsp:cNvSpPr/>
+      </dsp:nvSpPr>
+      <dsp:spPr>
+        <a:xfrm>
+          <a:off x="308610" y="2315400"/>
+          <a:ext cx="5425431" cy="738000"/>
+        </a:xfrm>
+        <a:prstGeom prst="roundRect">
+          <a:avLst/>
+        </a:prstGeom>
+        <a:solidFill>
+          <a:schemeClr val="accent3"/>
+        </a:solidFill>
+        <a:ln w="25400" cap="flat" cmpd="sng" algn="ctr">
+          <a:solidFill>
+            <a:schemeClr val="lt1">
+              <a:hueOff val="0"/>
+              <a:satOff val="0"/>
+              <a:lumOff val="0"/>
+              <a:alphaOff val="0"/>
+            </a:schemeClr>
+          </a:solidFill>
+          <a:prstDash val="solid"/>
+        </a:ln>
+        <a:effectLst/>
+      </dsp:spPr>
+      <dsp:style>
+        <a:lnRef idx="2">
+          <a:scrgbClr r="0" g="0" b="0"/>
+        </a:lnRef>
+        <a:fillRef idx="1">
+          <a:scrgbClr r="0" g="0" b="0"/>
+        </a:fillRef>
+        <a:effectRef idx="0">
+          <a:scrgbClr r="0" g="0" b="0"/>
+        </a:effectRef>
+        <a:fontRef idx="minor">
+          <a:schemeClr val="lt1"/>
+        </a:fontRef>
+      </dsp:style>
+      <dsp:txBody>
+        <a:bodyPr spcFirstLastPara="0" vert="horz" wrap="square" lIns="163306" tIns="0" rIns="163306" bIns="0" numCol="1" spcCol="1270" anchor="ctr" anchorCtr="0">
+          <a:noAutofit/>
+        </a:bodyPr>
+        <a:lstStyle/>
+        <a:p>
+          <a:pPr lvl="0" algn="l" defTabSz="977900">
+            <a:lnSpc>
+              <a:spcPct val="90000"/>
+            </a:lnSpc>
+            <a:spcBef>
+              <a:spcPct val="0"/>
+            </a:spcBef>
+            <a:spcAft>
+              <a:spcPct val="35000"/>
+            </a:spcAft>
+          </a:pPr>
+          <a:r>
+            <a:rPr lang="en-US" sz="2200" kern="1200" dirty="0" smtClean="0"/>
+            <a:t>Helps in making cost/benefit analysis</a:t>
+          </a:r>
+          <a:endParaRPr lang="en-US" sz="2200" kern="1200" dirty="0"/>
+        </a:p>
+      </dsp:txBody>
+      <dsp:txXfrm>
+        <a:off x="308610" y="2315400"/>
+        <a:ext cx="5425431" cy="738000"/>
+      </dsp:txXfrm>
+    </dsp:sp>
+    <dsp:sp modelId="{961EFD2A-04EA-415C-8C6D-9CC07418E6C7}">
+      <dsp:nvSpPr>
+        <dsp:cNvPr id="0" name=""/>
+        <dsp:cNvSpPr/>
+      </dsp:nvSpPr>
+      <dsp:spPr>
+        <a:xfrm>
+          <a:off x="0" y="3818400"/>
+          <a:ext cx="6172199" cy="630000"/>
+        </a:xfrm>
+        <a:prstGeom prst="rect">
+          <a:avLst/>
+        </a:prstGeom>
+        <a:solidFill>
+          <a:schemeClr val="lt1">
+            <a:alpha val="90000"/>
+            <a:hueOff val="0"/>
+            <a:satOff val="0"/>
+            <a:lumOff val="0"/>
+            <a:alphaOff val="0"/>
+          </a:schemeClr>
+        </a:solidFill>
+        <a:ln w="25400" cap="flat" cmpd="sng" algn="ctr">
+          <a:solidFill>
+            <a:schemeClr val="accent1">
+              <a:hueOff val="0"/>
+              <a:satOff val="0"/>
+              <a:lumOff val="0"/>
+              <a:alphaOff val="0"/>
+            </a:schemeClr>
+          </a:solidFill>
+          <a:prstDash val="solid"/>
+        </a:ln>
+        <a:effectLst/>
+      </dsp:spPr>
+      <dsp:style>
+        <a:lnRef idx="2">
+          <a:scrgbClr r="0" g="0" b="0"/>
+        </a:lnRef>
+        <a:fillRef idx="1">
+          <a:scrgbClr r="0" g="0" b="0"/>
+        </a:fillRef>
+        <a:effectRef idx="0">
+          <a:scrgbClr r="0" g="0" b="0"/>
+        </a:effectRef>
+        <a:fontRef idx="minor"/>
+      </dsp:style>
+    </dsp:sp>
+    <dsp:sp modelId="{5FAA833E-6D98-490D-A6E4-DC5E02D539A9}">
+      <dsp:nvSpPr>
+        <dsp:cNvPr id="0" name=""/>
+        <dsp:cNvSpPr/>
+      </dsp:nvSpPr>
+      <dsp:spPr>
+        <a:xfrm>
+          <a:off x="308610" y="3449400"/>
+          <a:ext cx="5425431" cy="738000"/>
+        </a:xfrm>
+        <a:prstGeom prst="roundRect">
+          <a:avLst/>
+        </a:prstGeom>
+        <a:solidFill>
+          <a:schemeClr val="accent4"/>
+        </a:solidFill>
+        <a:ln w="25400" cap="flat" cmpd="sng" algn="ctr">
+          <a:solidFill>
+            <a:schemeClr val="lt1">
+              <a:hueOff val="0"/>
+              <a:satOff val="0"/>
+              <a:lumOff val="0"/>
+              <a:alphaOff val="0"/>
+            </a:schemeClr>
+          </a:solidFill>
+          <a:prstDash val="solid"/>
+        </a:ln>
+        <a:effectLst/>
+      </dsp:spPr>
+      <dsp:style>
+        <a:lnRef idx="2">
+          <a:scrgbClr r="0" g="0" b="0"/>
+        </a:lnRef>
+        <a:fillRef idx="1">
+          <a:scrgbClr r="0" g="0" b="0"/>
+        </a:fillRef>
+        <a:effectRef idx="0">
+          <a:scrgbClr r="0" g="0" b="0"/>
+        </a:effectRef>
+        <a:fontRef idx="minor">
+          <a:schemeClr val="lt1"/>
+        </a:fontRef>
+      </dsp:style>
+      <dsp:txBody>
+        <a:bodyPr spcFirstLastPara="0" vert="horz" wrap="square" lIns="163306" tIns="0" rIns="163306" bIns="0" numCol="1" spcCol="1270" anchor="ctr" anchorCtr="0">
+          <a:noAutofit/>
+        </a:bodyPr>
+        <a:lstStyle/>
+        <a:p>
+          <a:pPr lvl="0" algn="l" defTabSz="977900">
+            <a:lnSpc>
+              <a:spcPct val="90000"/>
+            </a:lnSpc>
+            <a:spcBef>
+              <a:spcPct val="0"/>
+            </a:spcBef>
+            <a:spcAft>
+              <a:spcPct val="35000"/>
+            </a:spcAft>
+          </a:pPr>
+          <a:r>
+            <a:rPr lang="en-US" sz="2200" kern="1200" dirty="0" smtClean="0"/>
+            <a:t>Helps in making plan for training developers for implementing the system.</a:t>
+          </a:r>
+          <a:endParaRPr lang="en-US" sz="2200" kern="1200" dirty="0"/>
+        </a:p>
+      </dsp:txBody>
+      <dsp:txXfrm>
+        <a:off x="308610" y="3449400"/>
+        <a:ext cx="5425431" cy="738000"/>
+      </dsp:txXfrm>
+    </dsp:sp>
   </dsp:spTree>
 </dsp:drawing>
 </file>
@@ -5812,12 +7027,12 @@
           <a:bodyPr/>
           <a:lstStyle/>
           <a:p>
-            <a:fld id="{758E95B1-5ED0-4005-B293-784E4C93134E}" type="slidenum">
+            <a:fld id="{B4E670EC-EF90-4A84-9798-83F1F2DBB460}" type="slidenum">
               <a:rPr lang="en-US" smtClean="0"/>
               <a:pPr/>
-              <a:t>25</a:t>
+              <a:t>7</a:t>
             </a:fld>
-            <a:endParaRPr lang="en-US" dirty="0"/>
+            <a:endParaRPr lang="en-US"/>
           </a:p>
         </p:txBody>
       </p:sp>
@@ -5894,10 +7109,174 @@
           <a:bodyPr/>
           <a:lstStyle/>
           <a:p>
+            <a:fld id="{B4E670EC-EF90-4A84-9798-83F1F2DBB460}" type="slidenum">
+              <a:rPr lang="en-US" smtClean="0"/>
+              <a:pPr/>
+              <a:t>8</a:t>
+            </a:fld>
+            <a:endParaRPr lang="en-US"/>
+          </a:p>
+        </p:txBody>
+      </p:sp>
+    </p:spTree>
+  </p:cSld>
+  <p:clrMapOvr>
+    <a:masterClrMapping/>
+  </p:clrMapOvr>
+</p:notes>
+</file>
+
+<file path=ppt/notesSlides/notesSlide3.xml><?xml version="1.0" encoding="utf-8"?>
+<p:notes xmlns:a="http://schemas.openxmlformats.org/drawingml/2006/main" xmlns:r="http://schemas.openxmlformats.org/officeDocument/2006/relationships" xmlns:p="http://schemas.openxmlformats.org/presentationml/2006/main">
+  <p:cSld>
+    <p:spTree>
+      <p:nvGrpSpPr>
+        <p:cNvPr id="1" name=""/>
+        <p:cNvGrpSpPr/>
+        <p:nvPr/>
+      </p:nvGrpSpPr>
+      <p:grpSpPr>
+        <a:xfrm>
+          <a:off x="0" y="0"/>
+          <a:ext cx="0" cy="0"/>
+          <a:chOff x="0" y="0"/>
+          <a:chExt cx="0" cy="0"/>
+        </a:xfrm>
+      </p:grpSpPr>
+      <p:sp>
+        <p:nvSpPr>
+          <p:cNvPr id="2" name="Slide Image Placeholder 1"/>
+          <p:cNvSpPr>
+            <a:spLocks noGrp="1" noRot="1" noChangeAspect="1"/>
+          </p:cNvSpPr>
+          <p:nvPr>
+            <p:ph type="sldImg"/>
+          </p:nvPr>
+        </p:nvSpPr>
+        <p:spPr/>
+      </p:sp>
+      <p:sp>
+        <p:nvSpPr>
+          <p:cNvPr id="3" name="Notes Placeholder 2"/>
+          <p:cNvSpPr>
+            <a:spLocks noGrp="1"/>
+          </p:cNvSpPr>
+          <p:nvPr>
+            <p:ph type="body" idx="1"/>
+          </p:nvPr>
+        </p:nvSpPr>
+        <p:spPr/>
+        <p:txBody>
+          <a:bodyPr>
+            <a:normAutofit/>
+          </a:bodyPr>
+          <a:lstStyle/>
+          <a:p>
+            <a:endParaRPr lang="en-US" dirty="0"/>
+          </a:p>
+        </p:txBody>
+      </p:sp>
+      <p:sp>
+        <p:nvSpPr>
+          <p:cNvPr id="4" name="Slide Number Placeholder 3"/>
+          <p:cNvSpPr>
+            <a:spLocks noGrp="1"/>
+          </p:cNvSpPr>
+          <p:nvPr>
+            <p:ph type="sldNum" sz="quarter" idx="10"/>
+          </p:nvPr>
+        </p:nvSpPr>
+        <p:spPr/>
+        <p:txBody>
+          <a:bodyPr/>
+          <a:lstStyle/>
+          <a:p>
             <a:fld id="{758E95B1-5ED0-4005-B293-784E4C93134E}" type="slidenum">
               <a:rPr lang="en-US" smtClean="0"/>
               <a:pPr/>
-              <a:t>26</a:t>
+              <a:t>30</a:t>
+            </a:fld>
+            <a:endParaRPr lang="en-US" dirty="0"/>
+          </a:p>
+        </p:txBody>
+      </p:sp>
+    </p:spTree>
+  </p:cSld>
+  <p:clrMapOvr>
+    <a:masterClrMapping/>
+  </p:clrMapOvr>
+</p:notes>
+</file>
+
+<file path=ppt/notesSlides/notesSlide4.xml><?xml version="1.0" encoding="utf-8"?>
+<p:notes xmlns:a="http://schemas.openxmlformats.org/drawingml/2006/main" xmlns:r="http://schemas.openxmlformats.org/officeDocument/2006/relationships" xmlns:p="http://schemas.openxmlformats.org/presentationml/2006/main">
+  <p:cSld>
+    <p:spTree>
+      <p:nvGrpSpPr>
+        <p:cNvPr id="1" name=""/>
+        <p:cNvGrpSpPr/>
+        <p:nvPr/>
+      </p:nvGrpSpPr>
+      <p:grpSpPr>
+        <a:xfrm>
+          <a:off x="0" y="0"/>
+          <a:ext cx="0" cy="0"/>
+          <a:chOff x="0" y="0"/>
+          <a:chExt cx="0" cy="0"/>
+        </a:xfrm>
+      </p:grpSpPr>
+      <p:sp>
+        <p:nvSpPr>
+          <p:cNvPr id="2" name="Slide Image Placeholder 1"/>
+          <p:cNvSpPr>
+            <a:spLocks noGrp="1" noRot="1" noChangeAspect="1"/>
+          </p:cNvSpPr>
+          <p:nvPr>
+            <p:ph type="sldImg"/>
+          </p:nvPr>
+        </p:nvSpPr>
+        <p:spPr/>
+      </p:sp>
+      <p:sp>
+        <p:nvSpPr>
+          <p:cNvPr id="3" name="Notes Placeholder 2"/>
+          <p:cNvSpPr>
+            <a:spLocks noGrp="1"/>
+          </p:cNvSpPr>
+          <p:nvPr>
+            <p:ph type="body" idx="1"/>
+          </p:nvPr>
+        </p:nvSpPr>
+        <p:spPr/>
+        <p:txBody>
+          <a:bodyPr>
+            <a:normAutofit/>
+          </a:bodyPr>
+          <a:lstStyle/>
+          <a:p>
+            <a:endParaRPr lang="en-US" dirty="0"/>
+          </a:p>
+        </p:txBody>
+      </p:sp>
+      <p:sp>
+        <p:nvSpPr>
+          <p:cNvPr id="4" name="Slide Number Placeholder 3"/>
+          <p:cNvSpPr>
+            <a:spLocks noGrp="1"/>
+          </p:cNvSpPr>
+          <p:nvPr>
+            <p:ph type="sldNum" sz="quarter" idx="10"/>
+          </p:nvPr>
+        </p:nvSpPr>
+        <p:spPr/>
+        <p:txBody>
+          <a:bodyPr/>
+          <a:lstStyle/>
+          <a:p>
+            <a:fld id="{758E95B1-5ED0-4005-B293-784E4C93134E}" type="slidenum">
+              <a:rPr lang="en-US" smtClean="0"/>
+              <a:pPr/>
+              <a:t>31</a:t>
             </a:fld>
             <a:endParaRPr lang="en-US" dirty="0"/>
           </a:p>
@@ -9468,6 +10847,1115 @@
           <a:bodyPr/>
           <a:lstStyle/>
           <a:p>
+            <a:endParaRPr lang="en-US" dirty="0"/>
+          </a:p>
+        </p:txBody>
+      </p:sp>
+      <p:pic>
+        <p:nvPicPr>
+          <p:cNvPr id="52226" name="Picture 2"/>
+          <p:cNvPicPr>
+            <a:picLocks noChangeAspect="1" noChangeArrowheads="1"/>
+          </p:cNvPicPr>
+          <p:nvPr/>
+        </p:nvPicPr>
+        <p:blipFill>
+          <a:blip r:embed="rId2" cstate="print"/>
+          <a:srcRect/>
+          <a:stretch>
+            <a:fillRect/>
+          </a:stretch>
+        </p:blipFill>
+        <p:spPr bwMode="auto">
+          <a:xfrm>
+            <a:off x="1589088" y="2460625"/>
+            <a:ext cx="5965825" cy="2416175"/>
+          </a:xfrm>
+          <a:prstGeom prst="rect">
+            <a:avLst/>
+          </a:prstGeom>
+          <a:noFill/>
+          <a:ln w="9525">
+            <a:noFill/>
+            <a:miter lim="800000"/>
+            <a:headEnd/>
+            <a:tailEnd/>
+          </a:ln>
+        </p:spPr>
+      </p:pic>
+    </p:spTree>
+  </p:cSld>
+  <p:clrMapOvr>
+    <a:masterClrMapping/>
+  </p:clrMapOvr>
+</p:sld>
+</file>
+
+<file path=ppt/slides/slide11.xml><?xml version="1.0" encoding="utf-8"?>
+<p:sld xmlns:a="http://schemas.openxmlformats.org/drawingml/2006/main" xmlns:r="http://schemas.openxmlformats.org/officeDocument/2006/relationships" xmlns:p="http://schemas.openxmlformats.org/presentationml/2006/main">
+  <p:cSld>
+    <p:spTree>
+      <p:nvGrpSpPr>
+        <p:cNvPr id="1" name=""/>
+        <p:cNvGrpSpPr/>
+        <p:nvPr/>
+      </p:nvGrpSpPr>
+      <p:grpSpPr>
+        <a:xfrm>
+          <a:off x="0" y="0"/>
+          <a:ext cx="0" cy="0"/>
+          <a:chOff x="0" y="0"/>
+          <a:chExt cx="0" cy="0"/>
+        </a:xfrm>
+      </p:grpSpPr>
+      <p:sp>
+        <p:nvSpPr>
+          <p:cNvPr id="2" name="Title 1"/>
+          <p:cNvSpPr>
+            <a:spLocks noGrp="1"/>
+          </p:cNvSpPr>
+          <p:nvPr>
+            <p:ph type="title"/>
+          </p:nvPr>
+        </p:nvSpPr>
+        <p:spPr/>
+        <p:txBody>
+          <a:bodyPr/>
+          <a:lstStyle/>
+          <a:p>
+            <a:r>
+              <a:rPr lang="en-US" dirty="0" smtClean="0"/>
+              <a:t>Documenting Team Project Idea</a:t>
+            </a:r>
+            <a:endParaRPr lang="en-US" dirty="0"/>
+          </a:p>
+        </p:txBody>
+      </p:sp>
+      <p:sp>
+        <p:nvSpPr>
+          <p:cNvPr id="3" name="Content Placeholder 2"/>
+          <p:cNvSpPr>
+            <a:spLocks noGrp="1"/>
+          </p:cNvSpPr>
+          <p:nvPr>
+            <p:ph idx="1"/>
+          </p:nvPr>
+        </p:nvSpPr>
+        <p:spPr>
+          <a:xfrm>
+            <a:off x="457200" y="1600200"/>
+            <a:ext cx="5715000" cy="4525963"/>
+          </a:xfrm>
+        </p:spPr>
+        <p:txBody>
+          <a:bodyPr/>
+          <a:lstStyle/>
+          <a:p>
+            <a:r>
+              <a:rPr lang="en-US" sz="2400" dirty="0" smtClean="0">
+                <a:latin typeface="Calibri" pitchFamily="34" charset="0"/>
+                <a:cs typeface="Calibri" pitchFamily="34" charset="0"/>
+              </a:rPr>
+              <a:t>Group number</a:t>
+            </a:r>
+            <a:r>
+              <a:rPr lang="vi-VN" sz="2400" dirty="0" smtClean="0">
+                <a:latin typeface="Calibri" pitchFamily="34" charset="0"/>
+                <a:cs typeface="Calibri" pitchFamily="34" charset="0"/>
+              </a:rPr>
+              <a:t>: X (1 </a:t>
+            </a:r>
+            <a:r>
+              <a:rPr lang="en-US" sz="2400" dirty="0" smtClean="0">
+                <a:latin typeface="Calibri" pitchFamily="34" charset="0"/>
+                <a:cs typeface="Calibri" pitchFamily="34" charset="0"/>
+              </a:rPr>
+              <a:t>line</a:t>
+            </a:r>
+            <a:r>
+              <a:rPr lang="vi-VN" sz="2400" dirty="0" smtClean="0">
+                <a:latin typeface="Calibri" pitchFamily="34" charset="0"/>
+                <a:cs typeface="Calibri" pitchFamily="34" charset="0"/>
+              </a:rPr>
+              <a:t>)</a:t>
+            </a:r>
+            <a:r>
+              <a:rPr lang="en-US" sz="2400" dirty="0" smtClean="0">
+                <a:latin typeface="Calibri" pitchFamily="34" charset="0"/>
+                <a:cs typeface="Calibri" pitchFamily="34" charset="0"/>
+              </a:rPr>
+              <a:t>.</a:t>
+            </a:r>
+            <a:endParaRPr lang="vi-VN" sz="2400" dirty="0" smtClean="0">
+              <a:latin typeface="Calibri" pitchFamily="34" charset="0"/>
+              <a:cs typeface="Calibri" pitchFamily="34" charset="0"/>
+            </a:endParaRPr>
+          </a:p>
+          <a:p>
+            <a:r>
+              <a:rPr lang="en-US" sz="2400" dirty="0" smtClean="0">
+                <a:latin typeface="Calibri" pitchFamily="34" charset="0"/>
+                <a:cs typeface="Calibri" pitchFamily="34" charset="0"/>
+              </a:rPr>
+              <a:t>Project name</a:t>
+            </a:r>
+            <a:r>
+              <a:rPr lang="vi-VN" sz="2400" dirty="0" smtClean="0">
+                <a:latin typeface="Calibri" pitchFamily="34" charset="0"/>
+                <a:cs typeface="Calibri" pitchFamily="34" charset="0"/>
+              </a:rPr>
+              <a:t>: ABC (</a:t>
+            </a:r>
+            <a:r>
+              <a:rPr lang="en-US" sz="2400" dirty="0" smtClean="0">
+                <a:latin typeface="Calibri" pitchFamily="34" charset="0"/>
+                <a:cs typeface="Calibri" pitchFamily="34" charset="0"/>
+              </a:rPr>
+              <a:t>1 line</a:t>
+            </a:r>
+            <a:r>
+              <a:rPr lang="vi-VN" sz="2400" dirty="0" smtClean="0">
+                <a:latin typeface="Calibri" pitchFamily="34" charset="0"/>
+                <a:cs typeface="Calibri" pitchFamily="34" charset="0"/>
+              </a:rPr>
+              <a:t>)</a:t>
+            </a:r>
+            <a:r>
+              <a:rPr lang="en-US" sz="2400" dirty="0" smtClean="0">
+                <a:latin typeface="Calibri" pitchFamily="34" charset="0"/>
+                <a:cs typeface="Calibri" pitchFamily="34" charset="0"/>
+              </a:rPr>
+              <a:t>.</a:t>
+            </a:r>
+          </a:p>
+          <a:p>
+            <a:r>
+              <a:rPr lang="en-US" sz="2400" dirty="0" smtClean="0">
+                <a:latin typeface="Calibri" pitchFamily="34" charset="0"/>
+                <a:cs typeface="Calibri" pitchFamily="34" charset="0"/>
+              </a:rPr>
+              <a:t>Sponsor, customers</a:t>
+            </a:r>
+            <a:endParaRPr lang="vi-VN" sz="2400" dirty="0" smtClean="0">
+              <a:latin typeface="Calibri" pitchFamily="34" charset="0"/>
+              <a:cs typeface="Calibri" pitchFamily="34" charset="0"/>
+            </a:endParaRPr>
+          </a:p>
+          <a:p>
+            <a:r>
+              <a:rPr lang="en-US" sz="2400" i="1" dirty="0" smtClean="0">
+                <a:solidFill>
+                  <a:srgbClr val="C00000"/>
+                </a:solidFill>
+                <a:latin typeface="Calibri" pitchFamily="34" charset="0"/>
+                <a:cs typeface="Calibri" pitchFamily="34" charset="0"/>
+              </a:rPr>
+              <a:t>Problems</a:t>
+            </a:r>
+            <a:r>
+              <a:rPr lang="vi-VN" sz="2400" dirty="0" smtClean="0">
+                <a:latin typeface="Calibri" pitchFamily="34" charset="0"/>
+                <a:cs typeface="Calibri" pitchFamily="34" charset="0"/>
+              </a:rPr>
+              <a:t> (</a:t>
+            </a:r>
+            <a:r>
+              <a:rPr lang="en-US" sz="2400" u="sng" dirty="0" smtClean="0">
+                <a:latin typeface="Calibri" pitchFamily="34" charset="0"/>
+                <a:cs typeface="Calibri" pitchFamily="34" charset="0"/>
+              </a:rPr>
+              <a:t>NOT features</a:t>
+            </a:r>
+            <a:r>
+              <a:rPr lang="vi-VN" sz="2400" dirty="0" smtClean="0">
+                <a:latin typeface="Calibri" pitchFamily="34" charset="0"/>
+                <a:cs typeface="Calibri" pitchFamily="34" charset="0"/>
+              </a:rPr>
+              <a:t>)</a:t>
+            </a:r>
+            <a:r>
+              <a:rPr lang="en-US" sz="2400" dirty="0" smtClean="0">
+                <a:latin typeface="Calibri" pitchFamily="34" charset="0"/>
+                <a:cs typeface="Calibri" pitchFamily="34" charset="0"/>
+              </a:rPr>
+              <a:t>, </a:t>
+            </a:r>
+            <a:r>
+              <a:rPr lang="vi-VN" sz="2400" dirty="0" smtClean="0">
+                <a:latin typeface="Calibri" pitchFamily="34" charset="0"/>
+                <a:cs typeface="Calibri" pitchFamily="34" charset="0"/>
+              </a:rPr>
+              <a:t>pain points</a:t>
+            </a:r>
+            <a:r>
+              <a:rPr lang="en-US" sz="2400" dirty="0" smtClean="0">
+                <a:latin typeface="Calibri" pitchFamily="34" charset="0"/>
+                <a:cs typeface="Calibri" pitchFamily="34" charset="0"/>
+              </a:rPr>
+              <a:t>.</a:t>
+            </a:r>
+            <a:endParaRPr lang="vi-VN" sz="2400" dirty="0" smtClean="0">
+              <a:latin typeface="Calibri" pitchFamily="34" charset="0"/>
+              <a:cs typeface="Calibri" pitchFamily="34" charset="0"/>
+            </a:endParaRPr>
+          </a:p>
+          <a:p>
+            <a:r>
+              <a:rPr lang="en-US" sz="2400" i="1" dirty="0" smtClean="0">
+                <a:solidFill>
+                  <a:srgbClr val="C00000"/>
+                </a:solidFill>
+                <a:latin typeface="Calibri" pitchFamily="34" charset="0"/>
+                <a:cs typeface="Calibri" pitchFamily="34" charset="0"/>
+              </a:rPr>
+              <a:t>Solution</a:t>
+            </a:r>
+            <a:r>
+              <a:rPr lang="vi-VN" sz="2400" dirty="0" smtClean="0">
+                <a:latin typeface="Calibri" pitchFamily="34" charset="0"/>
+                <a:cs typeface="Calibri" pitchFamily="34" charset="0"/>
+              </a:rPr>
+              <a:t>: </a:t>
+            </a:r>
+            <a:r>
+              <a:rPr lang="en-US" sz="2400" dirty="0" smtClean="0">
+                <a:latin typeface="Calibri" pitchFamily="34" charset="0"/>
+                <a:cs typeface="Calibri" pitchFamily="34" charset="0"/>
+              </a:rPr>
+              <a:t>The core business use case (The real world scenario or workflow).</a:t>
+            </a:r>
+            <a:endParaRPr lang="vi-VN" sz="2400" dirty="0" smtClean="0">
+              <a:latin typeface="Calibri" pitchFamily="34" charset="0"/>
+              <a:cs typeface="Calibri" pitchFamily="34" charset="0"/>
+            </a:endParaRPr>
+          </a:p>
+          <a:p>
+            <a:r>
+              <a:rPr lang="en-US" sz="2400" i="1" dirty="0" smtClean="0">
+                <a:solidFill>
+                  <a:srgbClr val="C00000"/>
+                </a:solidFill>
+                <a:latin typeface="Calibri" pitchFamily="34" charset="0"/>
+                <a:cs typeface="Calibri" pitchFamily="34" charset="0"/>
+              </a:rPr>
+              <a:t>Reason</a:t>
+            </a:r>
+            <a:r>
+              <a:rPr lang="en-US" sz="2400" dirty="0" smtClean="0">
+                <a:latin typeface="Calibri" pitchFamily="34" charset="0"/>
+                <a:cs typeface="Calibri" pitchFamily="34" charset="0"/>
+              </a:rPr>
+              <a:t> to solve the problems.</a:t>
+            </a:r>
+          </a:p>
+          <a:p>
+            <a:r>
+              <a:rPr lang="vi-VN" sz="2400" dirty="0" smtClean="0">
+                <a:latin typeface="Calibri" pitchFamily="34" charset="0"/>
+                <a:cs typeface="Calibri" pitchFamily="34" charset="0"/>
+              </a:rPr>
+              <a:t>Competitors</a:t>
+            </a:r>
+            <a:r>
+              <a:rPr lang="en-US" sz="2400" dirty="0" smtClean="0">
+                <a:latin typeface="Calibri" pitchFamily="34" charset="0"/>
+                <a:cs typeface="Calibri" pitchFamily="34" charset="0"/>
+              </a:rPr>
+              <a:t> (minimum 3)</a:t>
+            </a:r>
+            <a:r>
+              <a:rPr lang="vi-VN" sz="2400" dirty="0" smtClean="0">
+                <a:latin typeface="Calibri" pitchFamily="34" charset="0"/>
+                <a:cs typeface="Calibri" pitchFamily="34" charset="0"/>
+              </a:rPr>
+              <a:t>.</a:t>
+            </a:r>
+            <a:endParaRPr lang="en-US" sz="2400" dirty="0" smtClean="0">
+              <a:latin typeface="Calibri" pitchFamily="34" charset="0"/>
+              <a:cs typeface="Calibri" pitchFamily="34" charset="0"/>
+            </a:endParaRPr>
+          </a:p>
+          <a:p>
+            <a:r>
+              <a:rPr lang="en-US" sz="2400" dirty="0" smtClean="0">
+                <a:latin typeface="Calibri" pitchFamily="34" charset="0"/>
+                <a:cs typeface="Calibri" pitchFamily="34" charset="0"/>
+              </a:rPr>
+              <a:t>Your d</a:t>
+            </a:r>
+            <a:r>
+              <a:rPr lang="vi-VN" sz="2400" dirty="0" smtClean="0">
+                <a:latin typeface="Calibri" pitchFamily="34" charset="0"/>
+                <a:cs typeface="Calibri" pitchFamily="34" charset="0"/>
+              </a:rPr>
+              <a:t>ifferentiators</a:t>
+            </a:r>
+            <a:r>
+              <a:rPr lang="en-US" sz="2400" dirty="0" smtClean="0">
+                <a:latin typeface="Calibri" pitchFamily="34" charset="0"/>
+                <a:cs typeface="Calibri" pitchFamily="34" charset="0"/>
+              </a:rPr>
+              <a:t>.</a:t>
+            </a:r>
+            <a:endParaRPr lang="vi-VN" sz="2400" dirty="0" smtClean="0">
+              <a:latin typeface="Calibri" pitchFamily="34" charset="0"/>
+              <a:cs typeface="Calibri" pitchFamily="34" charset="0"/>
+            </a:endParaRPr>
+          </a:p>
+        </p:txBody>
+      </p:sp>
+      <p:pic>
+        <p:nvPicPr>
+          <p:cNvPr id="8" name="Picture 1"/>
+          <p:cNvPicPr>
+            <a:picLocks noChangeAspect="1" noChangeArrowheads="1"/>
+          </p:cNvPicPr>
+          <p:nvPr/>
+        </p:nvPicPr>
+        <p:blipFill>
+          <a:blip r:embed="rId2" cstate="print"/>
+          <a:srcRect/>
+          <a:stretch>
+            <a:fillRect/>
+          </a:stretch>
+        </p:blipFill>
+        <p:spPr bwMode="auto">
+          <a:xfrm>
+            <a:off x="6324600" y="2415540"/>
+            <a:ext cx="2400300" cy="2461260"/>
+          </a:xfrm>
+          <a:prstGeom prst="rect">
+            <a:avLst/>
+          </a:prstGeom>
+          <a:noFill/>
+          <a:ln w="9525">
+            <a:noFill/>
+            <a:miter lim="800000"/>
+            <a:headEnd/>
+            <a:tailEnd/>
+          </a:ln>
+        </p:spPr>
+      </p:pic>
+    </p:spTree>
+  </p:cSld>
+  <p:clrMapOvr>
+    <a:masterClrMapping/>
+  </p:clrMapOvr>
+  <p:timing>
+    <p:tnLst>
+      <p:par>
+        <p:cTn id="1" dur="indefinite" restart="never" nodeType="tmRoot"/>
+      </p:par>
+    </p:tnLst>
+  </p:timing>
+</p:sld>
+</file>
+
+<file path=ppt/slides/slide12.xml><?xml version="1.0" encoding="utf-8"?>
+<p:sld xmlns:a="http://schemas.openxmlformats.org/drawingml/2006/main" xmlns:r="http://schemas.openxmlformats.org/officeDocument/2006/relationships" xmlns:p="http://schemas.openxmlformats.org/presentationml/2006/main">
+  <p:cSld>
+    <p:spTree>
+      <p:nvGrpSpPr>
+        <p:cNvPr id="1" name=""/>
+        <p:cNvGrpSpPr/>
+        <p:nvPr/>
+      </p:nvGrpSpPr>
+      <p:grpSpPr>
+        <a:xfrm>
+          <a:off x="0" y="0"/>
+          <a:ext cx="0" cy="0"/>
+          <a:chOff x="0" y="0"/>
+          <a:chExt cx="0" cy="0"/>
+        </a:xfrm>
+      </p:grpSpPr>
+      <p:sp>
+        <p:nvSpPr>
+          <p:cNvPr id="2" name="Title 1"/>
+          <p:cNvSpPr>
+            <a:spLocks noGrp="1"/>
+          </p:cNvSpPr>
+          <p:nvPr>
+            <p:ph type="title"/>
+          </p:nvPr>
+        </p:nvSpPr>
+        <p:spPr/>
+        <p:txBody>
+          <a:bodyPr/>
+          <a:lstStyle/>
+          <a:p>
+            <a:r>
+              <a:rPr lang="en-US" dirty="0" smtClean="0"/>
+              <a:t>Tools</a:t>
+            </a:r>
+            <a:endParaRPr lang="en-US" dirty="0"/>
+          </a:p>
+        </p:txBody>
+      </p:sp>
+      <p:sp>
+        <p:nvSpPr>
+          <p:cNvPr id="3" name="Content Placeholder 2"/>
+          <p:cNvSpPr>
+            <a:spLocks noGrp="1"/>
+          </p:cNvSpPr>
+          <p:nvPr>
+            <p:ph idx="1"/>
+          </p:nvPr>
+        </p:nvSpPr>
+        <p:spPr/>
+        <p:txBody>
+          <a:bodyPr/>
+          <a:lstStyle/>
+          <a:p>
+            <a:r>
+              <a:rPr lang="en-US" sz="2400" dirty="0" smtClean="0">
+                <a:hlinkClick r:id="rId2"/>
+              </a:rPr>
+              <a:t>https://chatgpt.com/</a:t>
+            </a:r>
+          </a:p>
+          <a:p>
+            <a:r>
+              <a:rPr lang="en-US" sz="2400" dirty="0" smtClean="0">
+                <a:hlinkClick r:id="rId2"/>
+              </a:rPr>
+              <a:t>https://www.trendhunter.com/</a:t>
+            </a:r>
+          </a:p>
+          <a:p>
+            <a:r>
+              <a:rPr lang="en-US" sz="2400" dirty="0" smtClean="0">
+                <a:hlinkClick r:id="rId2"/>
+              </a:rPr>
+              <a:t>https://miro.com/</a:t>
+            </a:r>
+            <a:endParaRPr lang="en-US" sz="2400" dirty="0" smtClean="0"/>
+          </a:p>
+          <a:p>
+            <a:r>
+              <a:rPr lang="en-US" sz="2400" dirty="0" smtClean="0">
+                <a:hlinkClick r:id="rId3"/>
+              </a:rPr>
+              <a:t>https://www.figma.com/figjam/</a:t>
+            </a:r>
+            <a:endParaRPr lang="en-US" sz="2400" dirty="0" smtClean="0"/>
+          </a:p>
+          <a:p>
+            <a:r>
+              <a:rPr lang="en-US" sz="2400" dirty="0" smtClean="0">
+                <a:hlinkClick r:id="rId4"/>
+              </a:rPr>
+              <a:t>https://www.notion.com/</a:t>
+            </a:r>
+            <a:endParaRPr lang="en-US" sz="2400" dirty="0" smtClean="0"/>
+          </a:p>
+          <a:p>
+            <a:r>
+              <a:rPr lang="en-US" sz="2400" dirty="0" smtClean="0">
+                <a:hlinkClick r:id="rId5"/>
+              </a:rPr>
+              <a:t>https://workspace.google.com/products/docs/</a:t>
+            </a:r>
+            <a:endParaRPr lang="en-US" sz="2400" dirty="0" smtClean="0"/>
+          </a:p>
+          <a:p>
+            <a:endParaRPr lang="en-US" sz="2400" dirty="0" smtClean="0"/>
+          </a:p>
+          <a:p>
+            <a:endParaRPr lang="en-US" sz="2400" dirty="0"/>
+          </a:p>
+        </p:txBody>
+      </p:sp>
+    </p:spTree>
+  </p:cSld>
+  <p:clrMapOvr>
+    <a:masterClrMapping/>
+  </p:clrMapOvr>
+</p:sld>
+</file>
+
+<file path=ppt/slides/slide13.xml><?xml version="1.0" encoding="utf-8"?>
+<p:sld xmlns:a="http://schemas.openxmlformats.org/drawingml/2006/main" xmlns:r="http://schemas.openxmlformats.org/officeDocument/2006/relationships" xmlns:p="http://schemas.openxmlformats.org/presentationml/2006/main">
+  <p:cSld>
+    <p:spTree>
+      <p:nvGrpSpPr>
+        <p:cNvPr id="1" name=""/>
+        <p:cNvGrpSpPr/>
+        <p:nvPr/>
+      </p:nvGrpSpPr>
+      <p:grpSpPr>
+        <a:xfrm>
+          <a:off x="0" y="0"/>
+          <a:ext cx="0" cy="0"/>
+          <a:chOff x="0" y="0"/>
+          <a:chExt cx="0" cy="0"/>
+        </a:xfrm>
+      </p:grpSpPr>
+      <p:pic>
+        <p:nvPicPr>
+          <p:cNvPr id="7" name="Picture 2" descr="http://www.resg.org.uk/wp-content/themes/resg-theme/images/resg-wordle.png"/>
+          <p:cNvPicPr>
+            <a:picLocks noChangeAspect="1" noChangeArrowheads="1"/>
+          </p:cNvPicPr>
+          <p:nvPr/>
+        </p:nvPicPr>
+        <p:blipFill>
+          <a:blip r:embed="rId2" cstate="print"/>
+          <a:srcRect/>
+          <a:stretch>
+            <a:fillRect/>
+          </a:stretch>
+        </p:blipFill>
+        <p:spPr bwMode="auto">
+          <a:xfrm>
+            <a:off x="4953000" y="1638300"/>
+            <a:ext cx="3276600" cy="1066800"/>
+          </a:xfrm>
+          <a:prstGeom prst="rect">
+            <a:avLst/>
+          </a:prstGeom>
+          <a:noFill/>
+        </p:spPr>
+      </p:pic>
+      <p:sp>
+        <p:nvSpPr>
+          <p:cNvPr id="2" name="Title 1"/>
+          <p:cNvSpPr>
+            <a:spLocks noGrp="1"/>
+          </p:cNvSpPr>
+          <p:nvPr>
+            <p:ph type="title"/>
+          </p:nvPr>
+        </p:nvSpPr>
+        <p:spPr/>
+        <p:txBody>
+          <a:bodyPr/>
+          <a:lstStyle/>
+          <a:p>
+            <a:r>
+              <a:rPr lang="en-US" dirty="0" smtClean="0"/>
+              <a:t>Kickoff Meeting</a:t>
+            </a:r>
+            <a:endParaRPr lang="en-US" dirty="0"/>
+          </a:p>
+        </p:txBody>
+      </p:sp>
+      <p:pic>
+        <p:nvPicPr>
+          <p:cNvPr id="1026" name="Picture 2" descr="Image result for kick-off meeting"/>
+          <p:cNvPicPr>
+            <a:picLocks noChangeAspect="1" noChangeArrowheads="1"/>
+          </p:cNvPicPr>
+          <p:nvPr/>
+        </p:nvPicPr>
+        <p:blipFill>
+          <a:blip r:embed="rId3" cstate="print"/>
+          <a:srcRect/>
+          <a:stretch>
+            <a:fillRect/>
+          </a:stretch>
+        </p:blipFill>
+        <p:spPr bwMode="auto">
+          <a:xfrm>
+            <a:off x="941778" y="1683222"/>
+            <a:ext cx="3630222" cy="1745778"/>
+          </a:xfrm>
+          <a:prstGeom prst="rect">
+            <a:avLst/>
+          </a:prstGeom>
+          <a:noFill/>
+        </p:spPr>
+      </p:pic>
+      <p:sp>
+        <p:nvSpPr>
+          <p:cNvPr id="5" name="Rectangle 4"/>
+          <p:cNvSpPr/>
+          <p:nvPr/>
+        </p:nvSpPr>
+        <p:spPr>
+          <a:xfrm>
+            <a:off x="2819400" y="4268450"/>
+            <a:ext cx="5791200" cy="1446550"/>
+          </a:xfrm>
+          <a:prstGeom prst="rect">
+            <a:avLst/>
+          </a:prstGeom>
+        </p:spPr>
+        <p:txBody>
+          <a:bodyPr wrap="square">
+            <a:spAutoFit/>
+          </a:bodyPr>
+          <a:lstStyle/>
+          <a:p>
+            <a:pPr marL="342900" indent="-342900">
+              <a:buFont typeface="+mj-lt"/>
+              <a:buAutoNum type="arabicPeriod"/>
+            </a:pPr>
+            <a:r>
+              <a:rPr lang="en-US" sz="2200" dirty="0" smtClean="0">
+                <a:latin typeface="Consolas" pitchFamily="49" charset="0"/>
+                <a:cs typeface="Courier New" pitchFamily="49" charset="0"/>
+              </a:rPr>
+              <a:t>Executive Summary (</a:t>
+            </a:r>
+            <a:r>
+              <a:rPr lang="en-US" sz="2200" i="1" dirty="0" smtClean="0">
+                <a:solidFill>
+                  <a:srgbClr val="C00000"/>
+                </a:solidFill>
+                <a:latin typeface="Consolas" pitchFamily="49" charset="0"/>
+                <a:cs typeface="Courier New" pitchFamily="49" charset="0"/>
+              </a:rPr>
+              <a:t>Business Requirements</a:t>
+            </a:r>
+            <a:r>
+              <a:rPr lang="en-US" sz="2200" dirty="0" smtClean="0">
+                <a:latin typeface="Consolas" pitchFamily="49" charset="0"/>
+                <a:cs typeface="Courier New" pitchFamily="49" charset="0"/>
+              </a:rPr>
+              <a:t>)</a:t>
+            </a:r>
+          </a:p>
+          <a:p>
+            <a:pPr marL="342900" indent="-342900">
+              <a:buFont typeface="+mj-lt"/>
+              <a:buAutoNum type="arabicPeriod"/>
+            </a:pPr>
+            <a:r>
+              <a:rPr lang="en-US" sz="2200" dirty="0" smtClean="0">
+                <a:latin typeface="Consolas" pitchFamily="49" charset="0"/>
+                <a:cs typeface="Courier New" pitchFamily="49" charset="0"/>
+              </a:rPr>
+              <a:t>Project Vision and Scope (</a:t>
+            </a:r>
+            <a:r>
+              <a:rPr lang="en-US" sz="2200" i="1" dirty="0" smtClean="0">
+                <a:solidFill>
+                  <a:srgbClr val="C00000"/>
+                </a:solidFill>
+                <a:latin typeface="Consolas" pitchFamily="49" charset="0"/>
+                <a:cs typeface="Courier New" pitchFamily="49" charset="0"/>
+              </a:rPr>
+              <a:t>User Requirements</a:t>
+            </a:r>
+            <a:r>
+              <a:rPr lang="en-US" sz="2200" dirty="0" smtClean="0">
+                <a:latin typeface="Consolas" pitchFamily="49" charset="0"/>
+                <a:cs typeface="Courier New" pitchFamily="49" charset="0"/>
+              </a:rPr>
+              <a:t>)</a:t>
+            </a:r>
+          </a:p>
+        </p:txBody>
+      </p:sp>
+      <p:pic>
+        <p:nvPicPr>
+          <p:cNvPr id="8" name="Picture 2" descr="http://fastbiz101.com/101/wpfast-content/uploads/2016/06/review.jpeg"/>
+          <p:cNvPicPr>
+            <a:picLocks noChangeAspect="1" noChangeArrowheads="1"/>
+          </p:cNvPicPr>
+          <p:nvPr/>
+        </p:nvPicPr>
+        <p:blipFill>
+          <a:blip r:embed="rId4" cstate="print"/>
+          <a:srcRect/>
+          <a:stretch>
+            <a:fillRect/>
+          </a:stretch>
+        </p:blipFill>
+        <p:spPr bwMode="auto">
+          <a:xfrm>
+            <a:off x="5867400" y="2781300"/>
+            <a:ext cx="1600200" cy="800100"/>
+          </a:xfrm>
+          <a:prstGeom prst="rect">
+            <a:avLst/>
+          </a:prstGeom>
+          <a:noFill/>
+        </p:spPr>
+      </p:pic>
+      <p:pic>
+        <p:nvPicPr>
+          <p:cNvPr id="9" name="Picture 2"/>
+          <p:cNvPicPr>
+            <a:picLocks noChangeAspect="1" noChangeArrowheads="1"/>
+          </p:cNvPicPr>
+          <p:nvPr/>
+        </p:nvPicPr>
+        <p:blipFill>
+          <a:blip r:embed="rId5" cstate="print"/>
+          <a:srcRect/>
+          <a:stretch>
+            <a:fillRect/>
+          </a:stretch>
+        </p:blipFill>
+        <p:spPr bwMode="auto">
+          <a:xfrm>
+            <a:off x="457200" y="3810000"/>
+            <a:ext cx="1714500" cy="2286000"/>
+          </a:xfrm>
+          <a:prstGeom prst="rect">
+            <a:avLst/>
+          </a:prstGeom>
+          <a:noFill/>
+          <a:ln w="9525">
+            <a:noFill/>
+            <a:miter lim="800000"/>
+            <a:headEnd/>
+            <a:tailEnd/>
+          </a:ln>
+        </p:spPr>
+      </p:pic>
+      <p:pic>
+        <p:nvPicPr>
+          <p:cNvPr id="6" name="Picture 2" descr="http://kurld.com/images/wallpapers/document-image/document-image-17.jpg"/>
+          <p:cNvPicPr>
+            <a:picLocks noChangeAspect="1" noChangeArrowheads="1"/>
+          </p:cNvPicPr>
+          <p:nvPr/>
+        </p:nvPicPr>
+        <p:blipFill>
+          <a:blip r:embed="rId6" cstate="print"/>
+          <a:srcRect/>
+          <a:stretch>
+            <a:fillRect/>
+          </a:stretch>
+        </p:blipFill>
+        <p:spPr bwMode="auto">
+          <a:xfrm>
+            <a:off x="1066800" y="4038600"/>
+            <a:ext cx="1567542" cy="1755648"/>
+          </a:xfrm>
+          <a:prstGeom prst="rect">
+            <a:avLst/>
+          </a:prstGeom>
+          <a:noFill/>
+        </p:spPr>
+      </p:pic>
+    </p:spTree>
+  </p:cSld>
+  <p:clrMapOvr>
+    <a:masterClrMapping/>
+  </p:clrMapOvr>
+</p:sld>
+</file>
+
+<file path=ppt/slides/slide14.xml><?xml version="1.0" encoding="utf-8"?>
+<p:sld xmlns:a="http://schemas.openxmlformats.org/drawingml/2006/main" xmlns:r="http://schemas.openxmlformats.org/officeDocument/2006/relationships" xmlns:p="http://schemas.openxmlformats.org/presentationml/2006/main">
+  <p:cSld>
+    <p:spTree>
+      <p:nvGrpSpPr>
+        <p:cNvPr id="1" name=""/>
+        <p:cNvGrpSpPr/>
+        <p:nvPr/>
+      </p:nvGrpSpPr>
+      <p:grpSpPr>
+        <a:xfrm>
+          <a:off x="0" y="0"/>
+          <a:ext cx="0" cy="0"/>
+          <a:chOff x="0" y="0"/>
+          <a:chExt cx="0" cy="0"/>
+        </a:xfrm>
+      </p:grpSpPr>
+      <p:pic>
+        <p:nvPicPr>
+          <p:cNvPr id="116738" name="Picture 2" descr="https://media.licdn.com/mpr/mpr/shrinknp_400_400/p/8/005/06e/2c4/3ea6fad.jpg"/>
+          <p:cNvPicPr>
+            <a:picLocks noChangeAspect="1" noChangeArrowheads="1"/>
+          </p:cNvPicPr>
+          <p:nvPr/>
+        </p:nvPicPr>
+        <p:blipFill>
+          <a:blip r:embed="rId2" cstate="print"/>
+          <a:srcRect/>
+          <a:stretch>
+            <a:fillRect/>
+          </a:stretch>
+        </p:blipFill>
+        <p:spPr bwMode="auto">
+          <a:xfrm>
+            <a:off x="4939051" y="1849438"/>
+            <a:ext cx="1905000" cy="1905000"/>
+          </a:xfrm>
+          <a:prstGeom prst="rect">
+            <a:avLst/>
+          </a:prstGeom>
+          <a:noFill/>
+        </p:spPr>
+      </p:pic>
+      <p:sp>
+        <p:nvSpPr>
+          <p:cNvPr id="2" name="Title 1"/>
+          <p:cNvSpPr>
+            <a:spLocks noGrp="1"/>
+          </p:cNvSpPr>
+          <p:nvPr>
+            <p:ph type="title"/>
+          </p:nvPr>
+        </p:nvSpPr>
+        <p:spPr/>
+        <p:txBody>
+          <a:bodyPr/>
+          <a:lstStyle/>
+          <a:p>
+            <a:r>
+              <a:rPr lang="en-US" dirty="0" smtClean="0"/>
+              <a:t>How Will the Solution Work?</a:t>
+            </a:r>
+            <a:endParaRPr lang="en-US" dirty="0"/>
+          </a:p>
+        </p:txBody>
+      </p:sp>
+      <p:pic>
+        <p:nvPicPr>
+          <p:cNvPr id="4098" name="Picture 2"/>
+          <p:cNvPicPr>
+            <a:picLocks noChangeAspect="1" noChangeArrowheads="1"/>
+          </p:cNvPicPr>
+          <p:nvPr/>
+        </p:nvPicPr>
+        <p:blipFill>
+          <a:blip r:embed="rId3" cstate="print"/>
+          <a:srcRect/>
+          <a:stretch>
+            <a:fillRect/>
+          </a:stretch>
+        </p:blipFill>
+        <p:spPr bwMode="auto">
+          <a:xfrm>
+            <a:off x="671851" y="2752725"/>
+            <a:ext cx="3181350" cy="3419475"/>
+          </a:xfrm>
+          <a:prstGeom prst="rect">
+            <a:avLst/>
+          </a:prstGeom>
+          <a:noFill/>
+          <a:ln w="9525">
+            <a:noFill/>
+            <a:miter lim="800000"/>
+            <a:headEnd/>
+            <a:tailEnd/>
+          </a:ln>
+          <a:effectLst/>
+        </p:spPr>
+      </p:pic>
+      <p:pic>
+        <p:nvPicPr>
+          <p:cNvPr id="4" name="Picture 4"/>
+          <p:cNvPicPr>
+            <a:picLocks noChangeAspect="1" noChangeArrowheads="1"/>
+          </p:cNvPicPr>
+          <p:nvPr/>
+        </p:nvPicPr>
+        <p:blipFill>
+          <a:blip r:embed="rId4" cstate="print"/>
+          <a:srcRect/>
+          <a:stretch>
+            <a:fillRect/>
+          </a:stretch>
+        </p:blipFill>
+        <p:spPr bwMode="auto">
+          <a:xfrm>
+            <a:off x="3948451" y="3906838"/>
+            <a:ext cx="1333500" cy="1314450"/>
+          </a:xfrm>
+          <a:prstGeom prst="rect">
+            <a:avLst/>
+          </a:prstGeom>
+          <a:noFill/>
+          <a:ln w="9525">
+            <a:noFill/>
+            <a:miter lim="800000"/>
+            <a:headEnd/>
+            <a:tailEnd/>
+          </a:ln>
+        </p:spPr>
+      </p:pic>
+      <p:cxnSp>
+        <p:nvCxnSpPr>
+          <p:cNvPr id="12" name="Straight Arrow Connector 11"/>
+          <p:cNvCxnSpPr/>
+          <p:nvPr/>
+        </p:nvCxnSpPr>
+        <p:spPr>
+          <a:xfrm flipV="1">
+            <a:off x="3262651" y="3133725"/>
+            <a:ext cx="1828800" cy="609600"/>
+          </a:xfrm>
+          <a:prstGeom prst="straightConnector1">
+            <a:avLst/>
+          </a:prstGeom>
+          <a:ln>
+            <a:tailEnd type="arrow"/>
+          </a:ln>
+        </p:spPr>
+        <p:style>
+          <a:lnRef idx="3">
+            <a:schemeClr val="accent2"/>
+          </a:lnRef>
+          <a:fillRef idx="0">
+            <a:schemeClr val="accent2"/>
+          </a:fillRef>
+          <a:effectRef idx="2">
+            <a:schemeClr val="accent2"/>
+          </a:effectRef>
+          <a:fontRef idx="minor">
+            <a:schemeClr val="tx1"/>
+          </a:fontRef>
+        </p:style>
+      </p:cxnSp>
+      <p:sp>
+        <p:nvSpPr>
+          <p:cNvPr id="21" name="Rectangle 20"/>
+          <p:cNvSpPr/>
+          <p:nvPr/>
+        </p:nvSpPr>
+        <p:spPr>
+          <a:xfrm>
+            <a:off x="6767851" y="2828925"/>
+            <a:ext cx="1842749" cy="584775"/>
+          </a:xfrm>
+          <a:prstGeom prst="rect">
+            <a:avLst/>
+          </a:prstGeom>
+        </p:spPr>
+        <p:txBody>
+          <a:bodyPr wrap="none">
+            <a:spAutoFit/>
+          </a:bodyPr>
+          <a:lstStyle/>
+          <a:p>
+            <a:pPr marL="514350" indent="-514350"/>
+            <a:r>
+              <a:rPr lang="en-US" sz="3200" dirty="0" smtClean="0">
+                <a:latin typeface="+mj-lt"/>
+              </a:rPr>
+              <a:t>Prototype</a:t>
+            </a:r>
+            <a:endParaRPr lang="en-US" sz="3200" u="sng" dirty="0" smtClean="0">
+              <a:latin typeface="+mj-lt"/>
+            </a:endParaRPr>
+          </a:p>
+        </p:txBody>
+      </p:sp>
+      <p:sp>
+        <p:nvSpPr>
+          <p:cNvPr id="14" name="Rectangle 13"/>
+          <p:cNvSpPr/>
+          <p:nvPr/>
+        </p:nvSpPr>
+        <p:spPr>
+          <a:xfrm>
+            <a:off x="762000" y="1676400"/>
+            <a:ext cx="4038600" cy="1107996"/>
+          </a:xfrm>
+          <a:prstGeom prst="rect">
+            <a:avLst/>
+          </a:prstGeom>
+        </p:spPr>
+        <p:style>
+          <a:lnRef idx="2">
+            <a:schemeClr val="dk1"/>
+          </a:lnRef>
+          <a:fillRef idx="1">
+            <a:schemeClr val="lt1"/>
+          </a:fillRef>
+          <a:effectRef idx="0">
+            <a:schemeClr val="dk1"/>
+          </a:effectRef>
+          <a:fontRef idx="minor">
+            <a:schemeClr val="dk1"/>
+          </a:fontRef>
+        </p:style>
+        <p:txBody>
+          <a:bodyPr wrap="square">
+            <a:spAutoFit/>
+          </a:bodyPr>
+          <a:lstStyle/>
+          <a:p>
+            <a:pPr algn="ctr"/>
+            <a:r>
+              <a:rPr lang="en-US" sz="2200" dirty="0" smtClean="0">
+                <a:solidFill>
+                  <a:schemeClr val="tx1"/>
+                </a:solidFill>
+                <a:latin typeface="+mj-lt"/>
+              </a:rPr>
+              <a:t>Refer to the </a:t>
+            </a:r>
+            <a:r>
+              <a:rPr lang="en-US" sz="2200" b="1" dirty="0" smtClean="0">
+                <a:solidFill>
+                  <a:schemeClr val="tx1"/>
+                </a:solidFill>
+                <a:latin typeface="+mj-lt"/>
+              </a:rPr>
+              <a:t>Designing the User Interface</a:t>
+            </a:r>
+            <a:r>
+              <a:rPr lang="en-US" sz="2200" dirty="0" smtClean="0">
+                <a:solidFill>
+                  <a:schemeClr val="tx1"/>
+                </a:solidFill>
+                <a:latin typeface="+mj-lt"/>
+              </a:rPr>
+              <a:t> course for more information.</a:t>
+            </a:r>
+            <a:endParaRPr lang="en-US" sz="2200" dirty="0">
+              <a:solidFill>
+                <a:schemeClr val="tx1"/>
+              </a:solidFill>
+              <a:latin typeface="+mj-lt"/>
+            </a:endParaRPr>
+          </a:p>
+        </p:txBody>
+      </p:sp>
+    </p:spTree>
+  </p:cSld>
+  <p:clrMapOvr>
+    <a:masterClrMapping/>
+  </p:clrMapOvr>
+  <p:timing>
+    <p:tnLst>
+      <p:par>
+        <p:cTn id="1" dur="indefinite" restart="never" nodeType="tmRoot"/>
+      </p:par>
+    </p:tnLst>
+  </p:timing>
+</p:sld>
+</file>
+
+<file path=ppt/slides/slide15.xml><?xml version="1.0" encoding="utf-8"?>
+<p:sld xmlns:a="http://schemas.openxmlformats.org/drawingml/2006/main" xmlns:r="http://schemas.openxmlformats.org/officeDocument/2006/relationships" xmlns:p="http://schemas.openxmlformats.org/presentationml/2006/main">
+  <p:cSld>
+    <p:spTree>
+      <p:nvGrpSpPr>
+        <p:cNvPr id="1" name=""/>
+        <p:cNvGrpSpPr/>
+        <p:nvPr/>
+      </p:nvGrpSpPr>
+      <p:grpSpPr>
+        <a:xfrm>
+          <a:off x="0" y="0"/>
+          <a:ext cx="0" cy="0"/>
+          <a:chOff x="0" y="0"/>
+          <a:chExt cx="0" cy="0"/>
+        </a:xfrm>
+      </p:grpSpPr>
+      <p:sp>
+        <p:nvSpPr>
+          <p:cNvPr id="2" name="Title 1"/>
+          <p:cNvSpPr>
+            <a:spLocks noGrp="1"/>
+          </p:cNvSpPr>
+          <p:nvPr>
+            <p:ph type="title"/>
+          </p:nvPr>
+        </p:nvSpPr>
+        <p:spPr/>
+        <p:txBody>
+          <a:bodyPr/>
+          <a:lstStyle/>
+          <a:p>
             <a:r>
               <a:rPr lang="en-US" dirty="0" smtClean="0"/>
               <a:t>What Do We Need to Complete?</a:t>
@@ -9777,7 +12265,7 @@
 </p:sld>
 </file>
 
-<file path=ppt/slides/slide11.xml><?xml version="1.0" encoding="utf-8"?>
+<file path=ppt/slides/slide16.xml><?xml version="1.0" encoding="utf-8"?>
 <p:sld xmlns:a="http://schemas.openxmlformats.org/drawingml/2006/main" xmlns:r="http://schemas.openxmlformats.org/officeDocument/2006/relationships" xmlns:p="http://schemas.openxmlformats.org/presentationml/2006/main">
   <p:cSld>
     <p:spTree>
@@ -10142,7 +12630,7 @@
 </p:sld>
 </file>
 
-<file path=ppt/slides/slide12.xml><?xml version="1.0" encoding="utf-8"?>
+<file path=ppt/slides/slide17.xml><?xml version="1.0" encoding="utf-8"?>
 <p:sld xmlns:a="http://schemas.openxmlformats.org/drawingml/2006/main" xmlns:r="http://schemas.openxmlformats.org/officeDocument/2006/relationships" xmlns:p="http://schemas.openxmlformats.org/presentationml/2006/main">
   <p:cSld>
     <p:spTree>
@@ -10542,7 +13030,7 @@
 </p:sld>
 </file>
 
-<file path=ppt/slides/slide13.xml><?xml version="1.0" encoding="utf-8"?>
+<file path=ppt/slides/slide18.xml><?xml version="1.0" encoding="utf-8"?>
 <p:sld xmlns:a="http://schemas.openxmlformats.org/drawingml/2006/main" xmlns:r="http://schemas.openxmlformats.org/officeDocument/2006/relationships" xmlns:p="http://schemas.openxmlformats.org/presentationml/2006/main">
   <p:cSld>
     <p:spTree>
@@ -10593,7 +13081,7 @@
 </p:sld>
 </file>
 
-<file path=ppt/slides/slide14.xml><?xml version="1.0" encoding="utf-8"?>
+<file path=ppt/slides/slide19.xml><?xml version="1.0" encoding="utf-8"?>
 <p:sld xmlns:a="http://schemas.openxmlformats.org/drawingml/2006/main" xmlns:r="http://schemas.openxmlformats.org/officeDocument/2006/relationships" xmlns:p="http://schemas.openxmlformats.org/presentationml/2006/main">
   <p:cSld>
     <p:spTree>
@@ -10714,7 +13202,365 @@
 </p:sld>
 </file>
 
-<file path=ppt/slides/slide15.xml><?xml version="1.0" encoding="utf-8"?>
+<file path=ppt/slides/slide2.xml><?xml version="1.0" encoding="utf-8"?>
+<p:sld xmlns:a="http://schemas.openxmlformats.org/drawingml/2006/main" xmlns:r="http://schemas.openxmlformats.org/officeDocument/2006/relationships" xmlns:p="http://schemas.openxmlformats.org/presentationml/2006/main">
+  <p:cSld>
+    <p:spTree>
+      <p:nvGrpSpPr>
+        <p:cNvPr id="1" name=""/>
+        <p:cNvGrpSpPr/>
+        <p:nvPr/>
+      </p:nvGrpSpPr>
+      <p:grpSpPr>
+        <a:xfrm>
+          <a:off x="0" y="0"/>
+          <a:ext cx="0" cy="0"/>
+          <a:chOff x="0" y="0"/>
+          <a:chExt cx="0" cy="0"/>
+        </a:xfrm>
+      </p:grpSpPr>
+      <p:sp>
+        <p:nvSpPr>
+          <p:cNvPr id="2" name="Title 1"/>
+          <p:cNvSpPr>
+            <a:spLocks noGrp="1"/>
+          </p:cNvSpPr>
+          <p:nvPr>
+            <p:ph type="title"/>
+          </p:nvPr>
+        </p:nvSpPr>
+        <p:spPr/>
+        <p:txBody>
+          <a:bodyPr/>
+          <a:lstStyle/>
+          <a:p>
+            <a:r>
+              <a:rPr lang="en-US" dirty="0" smtClean="0"/>
+              <a:t>Objectives</a:t>
+            </a:r>
+            <a:endParaRPr lang="en-US" dirty="0"/>
+          </a:p>
+        </p:txBody>
+      </p:sp>
+      <p:sp>
+        <p:nvSpPr>
+          <p:cNvPr id="3" name="Content Placeholder 2"/>
+          <p:cNvSpPr>
+            <a:spLocks noGrp="1"/>
+          </p:cNvSpPr>
+          <p:nvPr>
+            <p:ph idx="1"/>
+          </p:nvPr>
+        </p:nvSpPr>
+        <p:spPr>
+          <a:xfrm>
+            <a:off x="457200" y="1600200"/>
+            <a:ext cx="5562600" cy="4343400"/>
+          </a:xfrm>
+        </p:spPr>
+        <p:txBody>
+          <a:bodyPr/>
+          <a:lstStyle/>
+          <a:p>
+            <a:pPr marL="457200" indent="-457200">
+              <a:buFont typeface="Wingdings" pitchFamily="2" charset="2"/>
+              <a:buChar char="Ø"/>
+            </a:pPr>
+            <a:r>
+              <a:rPr lang="en-US" sz="2200" dirty="0" smtClean="0"/>
+              <a:t>To create an </a:t>
+            </a:r>
+            <a:r>
+              <a:rPr lang="en-US" sz="2200" i="1" dirty="0" smtClean="0">
+                <a:solidFill>
+                  <a:srgbClr val="C00000"/>
+                </a:solidFill>
+              </a:rPr>
+              <a:t>executive summary document</a:t>
+            </a:r>
+            <a:r>
+              <a:rPr lang="en-US" sz="2200" dirty="0" smtClean="0"/>
+              <a:t>.</a:t>
+            </a:r>
+          </a:p>
+          <a:p>
+            <a:pPr marL="457200" indent="-457200">
+              <a:buFont typeface="Wingdings" pitchFamily="2" charset="2"/>
+              <a:buChar char="Ø"/>
+            </a:pPr>
+            <a:r>
+              <a:rPr lang="en-US" sz="2200" dirty="0" smtClean="0"/>
+              <a:t>To create a </a:t>
+            </a:r>
+            <a:r>
+              <a:rPr lang="en-US" sz="2200" i="1" dirty="0" smtClean="0">
+                <a:solidFill>
+                  <a:srgbClr val="C00000"/>
+                </a:solidFill>
+              </a:rPr>
+              <a:t>project vision and scope document</a:t>
+            </a:r>
+            <a:r>
+              <a:rPr lang="en-US" sz="2200" dirty="0" smtClean="0"/>
+              <a:t>.</a:t>
+            </a:r>
+          </a:p>
+          <a:p>
+            <a:pPr marL="457200" indent="-457200">
+              <a:buFont typeface="Wingdings" pitchFamily="2" charset="2"/>
+              <a:buChar char="Ø"/>
+            </a:pPr>
+            <a:r>
+              <a:rPr lang="en-US" sz="2200" dirty="0" smtClean="0"/>
+              <a:t>To create a </a:t>
+            </a:r>
+            <a:r>
+              <a:rPr lang="en-US" sz="2200" i="1" dirty="0" smtClean="0">
+                <a:solidFill>
+                  <a:srgbClr val="C00000"/>
+                </a:solidFill>
+              </a:rPr>
+              <a:t>mockup</a:t>
+            </a:r>
+            <a:r>
+              <a:rPr lang="en-US" sz="2200" dirty="0" smtClean="0"/>
+              <a:t> and </a:t>
+            </a:r>
+            <a:r>
+              <a:rPr lang="en-US" sz="2200" i="1" dirty="0" smtClean="0">
+                <a:solidFill>
+                  <a:srgbClr val="C00000"/>
+                </a:solidFill>
+              </a:rPr>
+              <a:t>prototype</a:t>
+            </a:r>
+            <a:r>
+              <a:rPr lang="en-US" sz="2200" dirty="0" smtClean="0"/>
+              <a:t>.</a:t>
+            </a:r>
+            <a:endParaRPr lang="en-US" sz="2200" i="1" dirty="0" smtClean="0">
+              <a:solidFill>
+                <a:srgbClr val="C00000"/>
+              </a:solidFill>
+            </a:endParaRPr>
+          </a:p>
+          <a:p>
+            <a:pPr marL="457200" indent="-457200">
+              <a:buFont typeface="Wingdings" pitchFamily="2" charset="2"/>
+              <a:buChar char="Ø"/>
+            </a:pPr>
+            <a:r>
+              <a:rPr lang="en-US" sz="2200" dirty="0" smtClean="0"/>
+              <a:t>To create a </a:t>
+            </a:r>
+            <a:r>
+              <a:rPr lang="en-US" sz="2200" i="1" dirty="0" smtClean="0">
+                <a:solidFill>
+                  <a:srgbClr val="C00000"/>
+                </a:solidFill>
+              </a:rPr>
+              <a:t>software requirements specification</a:t>
+            </a:r>
+            <a:r>
+              <a:rPr lang="en-US" sz="2200" dirty="0" smtClean="0"/>
+              <a:t>.</a:t>
+            </a:r>
+            <a:endParaRPr lang="en-US" sz="2200" i="1" dirty="0" smtClean="0">
+              <a:solidFill>
+                <a:srgbClr val="C00000"/>
+              </a:solidFill>
+            </a:endParaRPr>
+          </a:p>
+          <a:p>
+            <a:pPr marL="457200" indent="-457200">
+              <a:buFont typeface="Wingdings" pitchFamily="2" charset="2"/>
+              <a:buChar char="Ø"/>
+            </a:pPr>
+            <a:r>
+              <a:rPr lang="en-US" sz="2200" dirty="0" smtClean="0"/>
+              <a:t>To create </a:t>
+            </a:r>
+            <a:r>
+              <a:rPr lang="en-US" sz="2200" smtClean="0"/>
+              <a:t>an </a:t>
+            </a:r>
+            <a:r>
+              <a:rPr lang="en-US" sz="2200" i="1" smtClean="0">
+                <a:solidFill>
+                  <a:srgbClr val="C00000"/>
+                </a:solidFill>
+              </a:rPr>
+              <a:t>architecture</a:t>
+            </a:r>
+            <a:r>
+              <a:rPr lang="en-US" sz="2200" smtClean="0"/>
+              <a:t>.</a:t>
+            </a:r>
+            <a:endParaRPr lang="en-US" sz="2200" i="1" dirty="0" smtClean="0">
+              <a:solidFill>
+                <a:srgbClr val="C00000"/>
+              </a:solidFill>
+            </a:endParaRPr>
+          </a:p>
+          <a:p>
+            <a:pPr marL="457200" indent="-457200">
+              <a:buFont typeface="Wingdings" pitchFamily="2" charset="2"/>
+              <a:buChar char="Ø"/>
+            </a:pPr>
+            <a:r>
+              <a:rPr lang="en-US" sz="2200" dirty="0" smtClean="0"/>
+              <a:t>To create a </a:t>
+            </a:r>
+            <a:r>
+              <a:rPr lang="en-US" sz="2200" i="1" dirty="0" smtClean="0">
+                <a:solidFill>
+                  <a:srgbClr val="C00000"/>
+                </a:solidFill>
+              </a:rPr>
+              <a:t>feasibility study report</a:t>
+            </a:r>
+            <a:r>
+              <a:rPr lang="en-US" sz="2200" dirty="0" smtClean="0"/>
+              <a:t>.</a:t>
+            </a:r>
+            <a:endParaRPr lang="en-US" sz="2200" i="1" dirty="0" smtClean="0">
+              <a:solidFill>
+                <a:srgbClr val="C00000"/>
+              </a:solidFill>
+            </a:endParaRPr>
+          </a:p>
+          <a:p>
+            <a:pPr marL="457200" indent="-457200">
+              <a:buFont typeface="Wingdings" pitchFamily="2" charset="2"/>
+              <a:buChar char="Ø"/>
+            </a:pPr>
+            <a:r>
+              <a:rPr lang="en-US" sz="2200" dirty="0" smtClean="0"/>
+              <a:t>To create a </a:t>
+            </a:r>
+            <a:r>
+              <a:rPr lang="en-US" sz="2200" i="1" dirty="0" smtClean="0">
+                <a:solidFill>
+                  <a:srgbClr val="C00000"/>
+                </a:solidFill>
+              </a:rPr>
+              <a:t>proof of concept</a:t>
+            </a:r>
+            <a:r>
+              <a:rPr lang="en-US" sz="2200" dirty="0" smtClean="0"/>
+              <a:t>.</a:t>
+            </a:r>
+            <a:endParaRPr lang="en-US" sz="2200" i="1" dirty="0" smtClean="0">
+              <a:solidFill>
+                <a:srgbClr val="C00000"/>
+              </a:solidFill>
+            </a:endParaRPr>
+          </a:p>
+          <a:p>
+            <a:pPr marL="457200" indent="-457200">
+              <a:buFont typeface="Wingdings" pitchFamily="2" charset="2"/>
+              <a:buChar char="Ø"/>
+            </a:pPr>
+            <a:r>
+              <a:rPr lang="en-US" sz="2200" dirty="0" smtClean="0"/>
+              <a:t>To create a </a:t>
+            </a:r>
+            <a:r>
+              <a:rPr lang="en-US" sz="2200" i="1" dirty="0" smtClean="0">
+                <a:solidFill>
+                  <a:srgbClr val="C00000"/>
+                </a:solidFill>
+              </a:rPr>
+              <a:t>project charter</a:t>
+            </a:r>
+            <a:r>
+              <a:rPr lang="en-US" sz="2200" dirty="0" smtClean="0"/>
+              <a:t>.</a:t>
+            </a:r>
+            <a:endParaRPr lang="en-US" sz="2200" i="1" dirty="0" smtClean="0">
+              <a:solidFill>
+                <a:srgbClr val="C00000"/>
+              </a:solidFill>
+            </a:endParaRPr>
+          </a:p>
+          <a:p>
+            <a:pPr marL="457200" indent="-457200">
+              <a:buFont typeface="Wingdings" pitchFamily="2" charset="2"/>
+              <a:buChar char="Ø"/>
+            </a:pPr>
+            <a:r>
+              <a:rPr lang="en-US" sz="2200" dirty="0" smtClean="0"/>
+              <a:t>To create a </a:t>
+            </a:r>
+            <a:r>
+              <a:rPr lang="en-US" sz="2200" i="1" dirty="0" smtClean="0">
+                <a:solidFill>
+                  <a:srgbClr val="C00000"/>
+                </a:solidFill>
+              </a:rPr>
+              <a:t>process definition document</a:t>
+            </a:r>
+            <a:r>
+              <a:rPr lang="en-US" sz="2200" dirty="0" smtClean="0"/>
+              <a:t>.</a:t>
+            </a:r>
+            <a:endParaRPr lang="en-US" sz="2200" i="1" dirty="0" smtClean="0">
+              <a:solidFill>
+                <a:srgbClr val="C00000"/>
+              </a:solidFill>
+            </a:endParaRPr>
+          </a:p>
+        </p:txBody>
+      </p:sp>
+      <p:pic>
+        <p:nvPicPr>
+          <p:cNvPr id="4" name="Picture 2"/>
+          <p:cNvPicPr>
+            <a:picLocks noChangeAspect="1" noChangeArrowheads="1"/>
+          </p:cNvPicPr>
+          <p:nvPr/>
+        </p:nvPicPr>
+        <p:blipFill>
+          <a:blip r:embed="rId2" cstate="print"/>
+          <a:srcRect/>
+          <a:stretch>
+            <a:fillRect/>
+          </a:stretch>
+        </p:blipFill>
+        <p:spPr bwMode="auto">
+          <a:xfrm>
+            <a:off x="6000750" y="2609850"/>
+            <a:ext cx="2762250" cy="2114550"/>
+          </a:xfrm>
+          <a:prstGeom prst="rect">
+            <a:avLst/>
+          </a:prstGeom>
+          <a:noFill/>
+          <a:ln w="9525">
+            <a:noFill/>
+            <a:miter lim="800000"/>
+            <a:headEnd/>
+            <a:tailEnd/>
+          </a:ln>
+          <a:effectLst/>
+        </p:spPr>
+      </p:pic>
+    </p:spTree>
+  </p:cSld>
+  <p:clrMapOvr>
+    <a:masterClrMapping/>
+  </p:clrMapOvr>
+  <p:timing>
+    <p:tnLst>
+      <p:par>
+        <p:cTn id="1" dur="indefinite" restart="never" nodeType="tmRoot"/>
+      </p:par>
+    </p:tnLst>
+  </p:timing>
+</p:sld>
+</file>
+
+<file path=ppt/slides/slide20.xml><?xml version="1.0" encoding="utf-8"?>
 <p:sld xmlns:a="http://schemas.openxmlformats.org/drawingml/2006/main" xmlns:r="http://schemas.openxmlformats.org/officeDocument/2006/relationships" xmlns:p="http://schemas.openxmlformats.org/presentationml/2006/main">
   <p:cSld>
     <p:spTree>
@@ -11014,7 +13860,7 @@
 </p:sld>
 </file>
 
-<file path=ppt/slides/slide16.xml><?xml version="1.0" encoding="utf-8"?>
+<file path=ppt/slides/slide21.xml><?xml version="1.0" encoding="utf-8"?>
 <p:sld xmlns:a="http://schemas.openxmlformats.org/drawingml/2006/main" xmlns:r="http://schemas.openxmlformats.org/officeDocument/2006/relationships" xmlns:p="http://schemas.openxmlformats.org/presentationml/2006/main">
   <p:cSld>
     <p:spTree>
@@ -11146,7 +13992,7 @@
 </p:sld>
 </file>
 
-<file path=ppt/slides/slide17.xml><?xml version="1.0" encoding="utf-8"?>
+<file path=ppt/slides/slide22.xml><?xml version="1.0" encoding="utf-8"?>
 <p:sld xmlns:a="http://schemas.openxmlformats.org/drawingml/2006/main" xmlns:r="http://schemas.openxmlformats.org/officeDocument/2006/relationships" xmlns:p="http://schemas.openxmlformats.org/presentationml/2006/main">
   <p:cSld>
     <p:spTree>
@@ -11342,7 +14188,7 @@
 </p:sld>
 </file>
 
-<file path=ppt/slides/slide18.xml><?xml version="1.0" encoding="utf-8"?>
+<file path=ppt/slides/slide23.xml><?xml version="1.0" encoding="utf-8"?>
 <p:sld xmlns:a="http://schemas.openxmlformats.org/drawingml/2006/main" xmlns:r="http://schemas.openxmlformats.org/officeDocument/2006/relationships" xmlns:p="http://schemas.openxmlformats.org/presentationml/2006/main">
   <p:cSld>
     <p:spTree>
@@ -11533,7 +14379,7 @@
 </p:sld>
 </file>
 
-<file path=ppt/slides/slide19.xml><?xml version="1.0" encoding="utf-8"?>
+<file path=ppt/slides/slide24.xml><?xml version="1.0" encoding="utf-8"?>
 <p:sld xmlns:a="http://schemas.openxmlformats.org/drawingml/2006/main" xmlns:r="http://schemas.openxmlformats.org/officeDocument/2006/relationships" xmlns:p="http://schemas.openxmlformats.org/presentationml/2006/main">
   <p:cSld>
     <p:spTree>
@@ -11657,365 +14503,7 @@
 </p:sld>
 </file>
 
-<file path=ppt/slides/slide2.xml><?xml version="1.0" encoding="utf-8"?>
-<p:sld xmlns:a="http://schemas.openxmlformats.org/drawingml/2006/main" xmlns:r="http://schemas.openxmlformats.org/officeDocument/2006/relationships" xmlns:p="http://schemas.openxmlformats.org/presentationml/2006/main">
-  <p:cSld>
-    <p:spTree>
-      <p:nvGrpSpPr>
-        <p:cNvPr id="1" name=""/>
-        <p:cNvGrpSpPr/>
-        <p:nvPr/>
-      </p:nvGrpSpPr>
-      <p:grpSpPr>
-        <a:xfrm>
-          <a:off x="0" y="0"/>
-          <a:ext cx="0" cy="0"/>
-          <a:chOff x="0" y="0"/>
-          <a:chExt cx="0" cy="0"/>
-        </a:xfrm>
-      </p:grpSpPr>
-      <p:sp>
-        <p:nvSpPr>
-          <p:cNvPr id="2" name="Title 1"/>
-          <p:cNvSpPr>
-            <a:spLocks noGrp="1"/>
-          </p:cNvSpPr>
-          <p:nvPr>
-            <p:ph type="title"/>
-          </p:nvPr>
-        </p:nvSpPr>
-        <p:spPr/>
-        <p:txBody>
-          <a:bodyPr/>
-          <a:lstStyle/>
-          <a:p>
-            <a:r>
-              <a:rPr lang="en-US" dirty="0" smtClean="0"/>
-              <a:t>Objectives</a:t>
-            </a:r>
-            <a:endParaRPr lang="en-US" dirty="0"/>
-          </a:p>
-        </p:txBody>
-      </p:sp>
-      <p:sp>
-        <p:nvSpPr>
-          <p:cNvPr id="3" name="Content Placeholder 2"/>
-          <p:cNvSpPr>
-            <a:spLocks noGrp="1"/>
-          </p:cNvSpPr>
-          <p:nvPr>
-            <p:ph idx="1"/>
-          </p:nvPr>
-        </p:nvSpPr>
-        <p:spPr>
-          <a:xfrm>
-            <a:off x="457200" y="1600200"/>
-            <a:ext cx="5562600" cy="4343400"/>
-          </a:xfrm>
-        </p:spPr>
-        <p:txBody>
-          <a:bodyPr/>
-          <a:lstStyle/>
-          <a:p>
-            <a:pPr marL="457200" indent="-457200">
-              <a:buFont typeface="Wingdings" pitchFamily="2" charset="2"/>
-              <a:buChar char="Ø"/>
-            </a:pPr>
-            <a:r>
-              <a:rPr lang="en-US" sz="2200" dirty="0" smtClean="0"/>
-              <a:t>To create an </a:t>
-            </a:r>
-            <a:r>
-              <a:rPr lang="en-US" sz="2200" i="1" dirty="0" smtClean="0">
-                <a:solidFill>
-                  <a:srgbClr val="C00000"/>
-                </a:solidFill>
-              </a:rPr>
-              <a:t>executive summary document</a:t>
-            </a:r>
-            <a:r>
-              <a:rPr lang="en-US" sz="2200" dirty="0" smtClean="0"/>
-              <a:t>.</a:t>
-            </a:r>
-          </a:p>
-          <a:p>
-            <a:pPr marL="457200" indent="-457200">
-              <a:buFont typeface="Wingdings" pitchFamily="2" charset="2"/>
-              <a:buChar char="Ø"/>
-            </a:pPr>
-            <a:r>
-              <a:rPr lang="en-US" sz="2200" dirty="0" smtClean="0"/>
-              <a:t>To create a </a:t>
-            </a:r>
-            <a:r>
-              <a:rPr lang="en-US" sz="2200" i="1" dirty="0" smtClean="0">
-                <a:solidFill>
-                  <a:srgbClr val="C00000"/>
-                </a:solidFill>
-              </a:rPr>
-              <a:t>project vision and scope document</a:t>
-            </a:r>
-            <a:r>
-              <a:rPr lang="en-US" sz="2200" dirty="0" smtClean="0"/>
-              <a:t>.</a:t>
-            </a:r>
-          </a:p>
-          <a:p>
-            <a:pPr marL="457200" indent="-457200">
-              <a:buFont typeface="Wingdings" pitchFamily="2" charset="2"/>
-              <a:buChar char="Ø"/>
-            </a:pPr>
-            <a:r>
-              <a:rPr lang="en-US" sz="2200" dirty="0" smtClean="0"/>
-              <a:t>To create a </a:t>
-            </a:r>
-            <a:r>
-              <a:rPr lang="en-US" sz="2200" i="1" dirty="0" smtClean="0">
-                <a:solidFill>
-                  <a:srgbClr val="C00000"/>
-                </a:solidFill>
-              </a:rPr>
-              <a:t>mockup</a:t>
-            </a:r>
-            <a:r>
-              <a:rPr lang="en-US" sz="2200" dirty="0" smtClean="0"/>
-              <a:t> and </a:t>
-            </a:r>
-            <a:r>
-              <a:rPr lang="en-US" sz="2200" i="1" dirty="0" smtClean="0">
-                <a:solidFill>
-                  <a:srgbClr val="C00000"/>
-                </a:solidFill>
-              </a:rPr>
-              <a:t>prototype</a:t>
-            </a:r>
-            <a:r>
-              <a:rPr lang="en-US" sz="2200" dirty="0" smtClean="0"/>
-              <a:t>.</a:t>
-            </a:r>
-            <a:endParaRPr lang="en-US" sz="2200" i="1" dirty="0" smtClean="0">
-              <a:solidFill>
-                <a:srgbClr val="C00000"/>
-              </a:solidFill>
-            </a:endParaRPr>
-          </a:p>
-          <a:p>
-            <a:pPr marL="457200" indent="-457200">
-              <a:buFont typeface="Wingdings" pitchFamily="2" charset="2"/>
-              <a:buChar char="Ø"/>
-            </a:pPr>
-            <a:r>
-              <a:rPr lang="en-US" sz="2200" dirty="0" smtClean="0"/>
-              <a:t>To create a </a:t>
-            </a:r>
-            <a:r>
-              <a:rPr lang="en-US" sz="2200" i="1" dirty="0" smtClean="0">
-                <a:solidFill>
-                  <a:srgbClr val="C00000"/>
-                </a:solidFill>
-              </a:rPr>
-              <a:t>software requirements specification</a:t>
-            </a:r>
-            <a:r>
-              <a:rPr lang="en-US" sz="2200" dirty="0" smtClean="0"/>
-              <a:t>.</a:t>
-            </a:r>
-            <a:endParaRPr lang="en-US" sz="2200" i="1" dirty="0" smtClean="0">
-              <a:solidFill>
-                <a:srgbClr val="C00000"/>
-              </a:solidFill>
-            </a:endParaRPr>
-          </a:p>
-          <a:p>
-            <a:pPr marL="457200" indent="-457200">
-              <a:buFont typeface="Wingdings" pitchFamily="2" charset="2"/>
-              <a:buChar char="Ø"/>
-            </a:pPr>
-            <a:r>
-              <a:rPr lang="en-US" sz="2200" dirty="0" smtClean="0"/>
-              <a:t>To create </a:t>
-            </a:r>
-            <a:r>
-              <a:rPr lang="en-US" sz="2200" smtClean="0"/>
-              <a:t>an </a:t>
-            </a:r>
-            <a:r>
-              <a:rPr lang="en-US" sz="2200" i="1" smtClean="0">
-                <a:solidFill>
-                  <a:srgbClr val="C00000"/>
-                </a:solidFill>
-              </a:rPr>
-              <a:t>architecture</a:t>
-            </a:r>
-            <a:r>
-              <a:rPr lang="en-US" sz="2200" smtClean="0"/>
-              <a:t>.</a:t>
-            </a:r>
-            <a:endParaRPr lang="en-US" sz="2200" i="1" dirty="0" smtClean="0">
-              <a:solidFill>
-                <a:srgbClr val="C00000"/>
-              </a:solidFill>
-            </a:endParaRPr>
-          </a:p>
-          <a:p>
-            <a:pPr marL="457200" indent="-457200">
-              <a:buFont typeface="Wingdings" pitchFamily="2" charset="2"/>
-              <a:buChar char="Ø"/>
-            </a:pPr>
-            <a:r>
-              <a:rPr lang="en-US" sz="2200" dirty="0" smtClean="0"/>
-              <a:t>To create a </a:t>
-            </a:r>
-            <a:r>
-              <a:rPr lang="en-US" sz="2200" i="1" dirty="0" smtClean="0">
-                <a:solidFill>
-                  <a:srgbClr val="C00000"/>
-                </a:solidFill>
-              </a:rPr>
-              <a:t>feasibility study report</a:t>
-            </a:r>
-            <a:r>
-              <a:rPr lang="en-US" sz="2200" dirty="0" smtClean="0"/>
-              <a:t>.</a:t>
-            </a:r>
-            <a:endParaRPr lang="en-US" sz="2200" i="1" dirty="0" smtClean="0">
-              <a:solidFill>
-                <a:srgbClr val="C00000"/>
-              </a:solidFill>
-            </a:endParaRPr>
-          </a:p>
-          <a:p>
-            <a:pPr marL="457200" indent="-457200">
-              <a:buFont typeface="Wingdings" pitchFamily="2" charset="2"/>
-              <a:buChar char="Ø"/>
-            </a:pPr>
-            <a:r>
-              <a:rPr lang="en-US" sz="2200" dirty="0" smtClean="0"/>
-              <a:t>To create a </a:t>
-            </a:r>
-            <a:r>
-              <a:rPr lang="en-US" sz="2200" i="1" dirty="0" smtClean="0">
-                <a:solidFill>
-                  <a:srgbClr val="C00000"/>
-                </a:solidFill>
-              </a:rPr>
-              <a:t>proof of concept</a:t>
-            </a:r>
-            <a:r>
-              <a:rPr lang="en-US" sz="2200" dirty="0" smtClean="0"/>
-              <a:t>.</a:t>
-            </a:r>
-            <a:endParaRPr lang="en-US" sz="2200" i="1" dirty="0" smtClean="0">
-              <a:solidFill>
-                <a:srgbClr val="C00000"/>
-              </a:solidFill>
-            </a:endParaRPr>
-          </a:p>
-          <a:p>
-            <a:pPr marL="457200" indent="-457200">
-              <a:buFont typeface="Wingdings" pitchFamily="2" charset="2"/>
-              <a:buChar char="Ø"/>
-            </a:pPr>
-            <a:r>
-              <a:rPr lang="en-US" sz="2200" dirty="0" smtClean="0"/>
-              <a:t>To create a </a:t>
-            </a:r>
-            <a:r>
-              <a:rPr lang="en-US" sz="2200" i="1" dirty="0" smtClean="0">
-                <a:solidFill>
-                  <a:srgbClr val="C00000"/>
-                </a:solidFill>
-              </a:rPr>
-              <a:t>project charter</a:t>
-            </a:r>
-            <a:r>
-              <a:rPr lang="en-US" sz="2200" dirty="0" smtClean="0"/>
-              <a:t>.</a:t>
-            </a:r>
-            <a:endParaRPr lang="en-US" sz="2200" i="1" dirty="0" smtClean="0">
-              <a:solidFill>
-                <a:srgbClr val="C00000"/>
-              </a:solidFill>
-            </a:endParaRPr>
-          </a:p>
-          <a:p>
-            <a:pPr marL="457200" indent="-457200">
-              <a:buFont typeface="Wingdings" pitchFamily="2" charset="2"/>
-              <a:buChar char="Ø"/>
-            </a:pPr>
-            <a:r>
-              <a:rPr lang="en-US" sz="2200" dirty="0" smtClean="0"/>
-              <a:t>To create a </a:t>
-            </a:r>
-            <a:r>
-              <a:rPr lang="en-US" sz="2200" i="1" dirty="0" smtClean="0">
-                <a:solidFill>
-                  <a:srgbClr val="C00000"/>
-                </a:solidFill>
-              </a:rPr>
-              <a:t>process definition document</a:t>
-            </a:r>
-            <a:r>
-              <a:rPr lang="en-US" sz="2200" dirty="0" smtClean="0"/>
-              <a:t>.</a:t>
-            </a:r>
-            <a:endParaRPr lang="en-US" sz="2200" i="1" dirty="0" smtClean="0">
-              <a:solidFill>
-                <a:srgbClr val="C00000"/>
-              </a:solidFill>
-            </a:endParaRPr>
-          </a:p>
-        </p:txBody>
-      </p:sp>
-      <p:pic>
-        <p:nvPicPr>
-          <p:cNvPr id="4" name="Picture 2"/>
-          <p:cNvPicPr>
-            <a:picLocks noChangeAspect="1" noChangeArrowheads="1"/>
-          </p:cNvPicPr>
-          <p:nvPr/>
-        </p:nvPicPr>
-        <p:blipFill>
-          <a:blip r:embed="rId2" cstate="print"/>
-          <a:srcRect/>
-          <a:stretch>
-            <a:fillRect/>
-          </a:stretch>
-        </p:blipFill>
-        <p:spPr bwMode="auto">
-          <a:xfrm>
-            <a:off x="6000750" y="2609850"/>
-            <a:ext cx="2762250" cy="2114550"/>
-          </a:xfrm>
-          <a:prstGeom prst="rect">
-            <a:avLst/>
-          </a:prstGeom>
-          <a:noFill/>
-          <a:ln w="9525">
-            <a:noFill/>
-            <a:miter lim="800000"/>
-            <a:headEnd/>
-            <a:tailEnd/>
-          </a:ln>
-          <a:effectLst/>
-        </p:spPr>
-      </p:pic>
-    </p:spTree>
-  </p:cSld>
-  <p:clrMapOvr>
-    <a:masterClrMapping/>
-  </p:clrMapOvr>
-  <p:timing>
-    <p:tnLst>
-      <p:par>
-        <p:cTn id="1" dur="indefinite" restart="never" nodeType="tmRoot"/>
-      </p:par>
-    </p:tnLst>
-  </p:timing>
-</p:sld>
-</file>
-
-<file path=ppt/slides/slide20.xml><?xml version="1.0" encoding="utf-8"?>
+<file path=ppt/slides/slide25.xml><?xml version="1.0" encoding="utf-8"?>
 <p:sld xmlns:a="http://schemas.openxmlformats.org/drawingml/2006/main" xmlns:r="http://schemas.openxmlformats.org/officeDocument/2006/relationships" xmlns:p="http://schemas.openxmlformats.org/presentationml/2006/main">
   <p:cSld>
     <p:spTree>
@@ -12095,7 +14583,7 @@
 </p:sld>
 </file>
 
-<file path=ppt/slides/slide21.xml><?xml version="1.0" encoding="utf-8"?>
+<file path=ppt/slides/slide26.xml><?xml version="1.0" encoding="utf-8"?>
 <p:sld xmlns:a="http://schemas.openxmlformats.org/drawingml/2006/main" xmlns:r="http://schemas.openxmlformats.org/officeDocument/2006/relationships" xmlns:p="http://schemas.openxmlformats.org/presentationml/2006/main">
   <p:cSld>
     <p:spTree>
@@ -12175,7 +14663,7 @@
 </p:sld>
 </file>
 
-<file path=ppt/slides/slide22.xml><?xml version="1.0" encoding="utf-8"?>
+<file path=ppt/slides/slide27.xml><?xml version="1.0" encoding="utf-8"?>
 <p:sld xmlns:a="http://schemas.openxmlformats.org/drawingml/2006/main" xmlns:r="http://schemas.openxmlformats.org/officeDocument/2006/relationships" xmlns:p="http://schemas.openxmlformats.org/presentationml/2006/main">
   <p:cSld>
     <p:spTree>
@@ -12279,7 +14767,7 @@
 </p:sld>
 </file>
 
-<file path=ppt/slides/slide23.xml><?xml version="1.0" encoding="utf-8"?>
+<file path=ppt/slides/slide28.xml><?xml version="1.0" encoding="utf-8"?>
 <p:sld xmlns:a="http://schemas.openxmlformats.org/drawingml/2006/main" xmlns:r="http://schemas.openxmlformats.org/officeDocument/2006/relationships" xmlns:p="http://schemas.openxmlformats.org/presentationml/2006/main">
   <p:cSld>
     <p:spTree>
@@ -12383,7 +14871,7 @@
 </p:sld>
 </file>
 
-<file path=ppt/slides/slide24.xml><?xml version="1.0" encoding="utf-8"?>
+<file path=ppt/slides/slide29.xml><?xml version="1.0" encoding="utf-8"?>
 <p:sld xmlns:a="http://schemas.openxmlformats.org/drawingml/2006/main" xmlns:r="http://schemas.openxmlformats.org/officeDocument/2006/relationships" xmlns:p="http://schemas.openxmlformats.org/presentationml/2006/main">
   <p:cSld>
     <p:spTree>
@@ -12434,7 +14922,205 @@
 </p:sld>
 </file>
 
-<file path=ppt/slides/slide25.xml><?xml version="1.0" encoding="utf-8"?>
+<file path=ppt/slides/slide3.xml><?xml version="1.0" encoding="utf-8"?>
+<p:sld xmlns:a="http://schemas.openxmlformats.org/drawingml/2006/main" xmlns:r="http://schemas.openxmlformats.org/officeDocument/2006/relationships" xmlns:p="http://schemas.openxmlformats.org/presentationml/2006/main">
+  <p:cSld>
+    <p:spTree>
+      <p:nvGrpSpPr>
+        <p:cNvPr id="1" name=""/>
+        <p:cNvGrpSpPr/>
+        <p:nvPr/>
+      </p:nvGrpSpPr>
+      <p:grpSpPr>
+        <a:xfrm>
+          <a:off x="0" y="0"/>
+          <a:ext cx="0" cy="0"/>
+          <a:chOff x="0" y="0"/>
+          <a:chExt cx="0" cy="0"/>
+        </a:xfrm>
+      </p:grpSpPr>
+      <p:pic>
+        <p:nvPicPr>
+          <p:cNvPr id="1028" name="Picture 4"/>
+          <p:cNvPicPr>
+            <a:picLocks noChangeAspect="1" noChangeArrowheads="1"/>
+          </p:cNvPicPr>
+          <p:nvPr/>
+        </p:nvPicPr>
+        <p:blipFill>
+          <a:blip r:embed="rId2" cstate="print"/>
+          <a:srcRect/>
+          <a:stretch>
+            <a:fillRect/>
+          </a:stretch>
+        </p:blipFill>
+        <p:spPr bwMode="auto">
+          <a:xfrm>
+            <a:off x="6477000" y="2438400"/>
+            <a:ext cx="2390775" cy="2390775"/>
+          </a:xfrm>
+          <a:prstGeom prst="rect">
+            <a:avLst/>
+          </a:prstGeom>
+          <a:noFill/>
+          <a:ln w="9525">
+            <a:noFill/>
+            <a:miter lim="800000"/>
+            <a:headEnd/>
+            <a:tailEnd/>
+          </a:ln>
+        </p:spPr>
+      </p:pic>
+      <p:sp>
+        <p:nvSpPr>
+          <p:cNvPr id="2" name="Title 1"/>
+          <p:cNvSpPr>
+            <a:spLocks noGrp="1"/>
+          </p:cNvSpPr>
+          <p:nvPr>
+            <p:ph type="title"/>
+          </p:nvPr>
+        </p:nvSpPr>
+        <p:spPr/>
+        <p:txBody>
+          <a:bodyPr/>
+          <a:lstStyle/>
+          <a:p>
+            <a:r>
+              <a:rPr lang="en-US" dirty="0" smtClean="0"/>
+              <a:t>Contents</a:t>
+            </a:r>
+            <a:endParaRPr lang="en-US" dirty="0"/>
+          </a:p>
+        </p:txBody>
+      </p:sp>
+      <p:sp>
+        <p:nvSpPr>
+          <p:cNvPr id="3" name="Content Placeholder 2"/>
+          <p:cNvSpPr>
+            <a:spLocks noGrp="1"/>
+          </p:cNvSpPr>
+          <p:nvPr>
+            <p:ph idx="1"/>
+          </p:nvPr>
+        </p:nvSpPr>
+        <p:spPr>
+          <a:xfrm>
+            <a:off x="457200" y="1600200"/>
+            <a:ext cx="6096000" cy="4525963"/>
+          </a:xfrm>
+        </p:spPr>
+        <p:txBody>
+          <a:bodyPr/>
+          <a:lstStyle/>
+          <a:p>
+            <a:pPr marL="571500" indent="-571500">
+              <a:buFont typeface="+mj-lt"/>
+              <a:buAutoNum type="romanUcPeriod"/>
+            </a:pPr>
+            <a:r>
+              <a:rPr lang="en-US" sz="2400" dirty="0" smtClean="0"/>
+              <a:t>Executive summary.</a:t>
+            </a:r>
+          </a:p>
+          <a:p>
+            <a:pPr marL="571500" indent="-571500">
+              <a:buFont typeface="+mj-lt"/>
+              <a:buAutoNum type="romanUcPeriod"/>
+            </a:pPr>
+            <a:r>
+              <a:rPr lang="en-US" sz="2400" dirty="0" smtClean="0"/>
+              <a:t>Project vision and scope.</a:t>
+            </a:r>
+          </a:p>
+          <a:p>
+            <a:pPr marL="571500" indent="-571500">
+              <a:buFont typeface="+mj-lt"/>
+              <a:buAutoNum type="romanUcPeriod"/>
+            </a:pPr>
+            <a:r>
+              <a:rPr lang="en-US" sz="2400" dirty="0" smtClean="0"/>
+              <a:t>Mockup, prototype.</a:t>
+            </a:r>
+          </a:p>
+          <a:p>
+            <a:pPr marL="571500" indent="-571500">
+              <a:buFont typeface="+mj-lt"/>
+              <a:buAutoNum type="romanUcPeriod"/>
+            </a:pPr>
+            <a:r>
+              <a:rPr lang="en-US" sz="2400" dirty="0" smtClean="0"/>
+              <a:t>Software requirements specification.</a:t>
+            </a:r>
+          </a:p>
+          <a:p>
+            <a:pPr marL="571500" indent="-571500">
+              <a:buFont typeface="+mj-lt"/>
+              <a:buAutoNum type="romanUcPeriod"/>
+            </a:pPr>
+            <a:r>
+              <a:rPr lang="en-US" sz="2400" dirty="0" smtClean="0"/>
+              <a:t>Architecture.</a:t>
+            </a:r>
+          </a:p>
+          <a:p>
+            <a:pPr marL="571500" indent="-571500">
+              <a:buFont typeface="+mj-lt"/>
+              <a:buAutoNum type="romanUcPeriod"/>
+            </a:pPr>
+            <a:r>
+              <a:rPr lang="en-US" sz="2400" dirty="0" smtClean="0"/>
+              <a:t>Proof of concept.</a:t>
+            </a:r>
+          </a:p>
+          <a:p>
+            <a:pPr marL="571500" indent="-571500">
+              <a:buFont typeface="+mj-lt"/>
+              <a:buAutoNum type="romanUcPeriod"/>
+            </a:pPr>
+            <a:r>
+              <a:rPr lang="en-US" sz="2400" dirty="0" smtClean="0"/>
+              <a:t>Feasibility study report.</a:t>
+            </a:r>
+          </a:p>
+          <a:p>
+            <a:pPr marL="571500" indent="-571500">
+              <a:buFont typeface="+mj-lt"/>
+              <a:buAutoNum type="romanUcPeriod"/>
+            </a:pPr>
+            <a:r>
+              <a:rPr lang="en-US" sz="2400" dirty="0" smtClean="0"/>
+              <a:t>Project charter.</a:t>
+            </a:r>
+          </a:p>
+          <a:p>
+            <a:pPr marL="571500" indent="-571500">
+              <a:buFont typeface="+mj-lt"/>
+              <a:buAutoNum type="romanUcPeriod"/>
+            </a:pPr>
+            <a:r>
+              <a:rPr lang="en-US" sz="2400" dirty="0" smtClean="0"/>
+              <a:t>Process definition document.</a:t>
+            </a:r>
+          </a:p>
+          <a:p>
+            <a:pPr marL="571500" indent="-571500">
+              <a:buFont typeface="+mj-lt"/>
+              <a:buAutoNum type="romanUcPeriod"/>
+            </a:pPr>
+            <a:endParaRPr lang="en-US" sz="2400" dirty="0" smtClean="0"/>
+          </a:p>
+        </p:txBody>
+      </p:sp>
+    </p:spTree>
+  </p:cSld>
+  <p:clrMapOvr>
+    <a:masterClrMapping/>
+  </p:clrMapOvr>
+</p:sld>
+</file>
+
+<file path=ppt/slides/slide30.xml><?xml version="1.0" encoding="utf-8"?>
 <p:sld xmlns:a="http://schemas.openxmlformats.org/drawingml/2006/main" xmlns:r="http://schemas.openxmlformats.org/officeDocument/2006/relationships" xmlns:p="http://schemas.openxmlformats.org/presentationml/2006/main">
   <p:cSld>
     <p:spTree>
@@ -12776,7 +15462,7 @@
 </p:sld>
 </file>
 
-<file path=ppt/slides/slide26.xml><?xml version="1.0" encoding="utf-8"?>
+<file path=ppt/slides/slide31.xml><?xml version="1.0" encoding="utf-8"?>
 <p:sld xmlns:a="http://schemas.openxmlformats.org/drawingml/2006/main" xmlns:r="http://schemas.openxmlformats.org/officeDocument/2006/relationships" xmlns:p="http://schemas.openxmlformats.org/presentationml/2006/main">
   <p:cSld>
     <p:spTree>
@@ -13017,7 +15703,7 @@
 </p:sld>
 </file>
 
-<file path=ppt/slides/slide27.xml><?xml version="1.0" encoding="utf-8"?>
+<file path=ppt/slides/slide32.xml><?xml version="1.0" encoding="utf-8"?>
 <p:sld xmlns:a="http://schemas.openxmlformats.org/drawingml/2006/main" xmlns:r="http://schemas.openxmlformats.org/officeDocument/2006/relationships" xmlns:p="http://schemas.openxmlformats.org/presentationml/2006/main">
   <p:cSld>
     <p:spTree>
@@ -13215,7 +15901,7 @@
 </p:sld>
 </file>
 
-<file path=ppt/slides/slide28.xml><?xml version="1.0" encoding="utf-8"?>
+<file path=ppt/slides/slide33.xml><?xml version="1.0" encoding="utf-8"?>
 <p:sld xmlns:a="http://schemas.openxmlformats.org/drawingml/2006/main" xmlns:r="http://schemas.openxmlformats.org/officeDocument/2006/relationships" xmlns:p="http://schemas.openxmlformats.org/presentationml/2006/main">
   <p:cSld>
     <p:spTree>
@@ -13266,7 +15952,7 @@
 </p:sld>
 </file>
 
-<file path=ppt/slides/slide29.xml><?xml version="1.0" encoding="utf-8"?>
+<file path=ppt/slides/slide34.xml><?xml version="1.0" encoding="utf-8"?>
 <p:sld xmlns:a="http://schemas.openxmlformats.org/drawingml/2006/main" xmlns:r="http://schemas.openxmlformats.org/officeDocument/2006/relationships" xmlns:p="http://schemas.openxmlformats.org/presentationml/2006/main">
   <p:cSld>
     <p:spTree>
@@ -13600,205 +16286,7 @@
 </p:sld>
 </file>
 
-<file path=ppt/slides/slide3.xml><?xml version="1.0" encoding="utf-8"?>
-<p:sld xmlns:a="http://schemas.openxmlformats.org/drawingml/2006/main" xmlns:r="http://schemas.openxmlformats.org/officeDocument/2006/relationships" xmlns:p="http://schemas.openxmlformats.org/presentationml/2006/main">
-  <p:cSld>
-    <p:spTree>
-      <p:nvGrpSpPr>
-        <p:cNvPr id="1" name=""/>
-        <p:cNvGrpSpPr/>
-        <p:nvPr/>
-      </p:nvGrpSpPr>
-      <p:grpSpPr>
-        <a:xfrm>
-          <a:off x="0" y="0"/>
-          <a:ext cx="0" cy="0"/>
-          <a:chOff x="0" y="0"/>
-          <a:chExt cx="0" cy="0"/>
-        </a:xfrm>
-      </p:grpSpPr>
-      <p:pic>
-        <p:nvPicPr>
-          <p:cNvPr id="1028" name="Picture 4"/>
-          <p:cNvPicPr>
-            <a:picLocks noChangeAspect="1" noChangeArrowheads="1"/>
-          </p:cNvPicPr>
-          <p:nvPr/>
-        </p:nvPicPr>
-        <p:blipFill>
-          <a:blip r:embed="rId2" cstate="print"/>
-          <a:srcRect/>
-          <a:stretch>
-            <a:fillRect/>
-          </a:stretch>
-        </p:blipFill>
-        <p:spPr bwMode="auto">
-          <a:xfrm>
-            <a:off x="6477000" y="2438400"/>
-            <a:ext cx="2390775" cy="2390775"/>
-          </a:xfrm>
-          <a:prstGeom prst="rect">
-            <a:avLst/>
-          </a:prstGeom>
-          <a:noFill/>
-          <a:ln w="9525">
-            <a:noFill/>
-            <a:miter lim="800000"/>
-            <a:headEnd/>
-            <a:tailEnd/>
-          </a:ln>
-        </p:spPr>
-      </p:pic>
-      <p:sp>
-        <p:nvSpPr>
-          <p:cNvPr id="2" name="Title 1"/>
-          <p:cNvSpPr>
-            <a:spLocks noGrp="1"/>
-          </p:cNvSpPr>
-          <p:nvPr>
-            <p:ph type="title"/>
-          </p:nvPr>
-        </p:nvSpPr>
-        <p:spPr/>
-        <p:txBody>
-          <a:bodyPr/>
-          <a:lstStyle/>
-          <a:p>
-            <a:r>
-              <a:rPr lang="en-US" dirty="0" smtClean="0"/>
-              <a:t>Contents</a:t>
-            </a:r>
-            <a:endParaRPr lang="en-US" dirty="0"/>
-          </a:p>
-        </p:txBody>
-      </p:sp>
-      <p:sp>
-        <p:nvSpPr>
-          <p:cNvPr id="3" name="Content Placeholder 2"/>
-          <p:cNvSpPr>
-            <a:spLocks noGrp="1"/>
-          </p:cNvSpPr>
-          <p:nvPr>
-            <p:ph idx="1"/>
-          </p:nvPr>
-        </p:nvSpPr>
-        <p:spPr>
-          <a:xfrm>
-            <a:off x="457200" y="1600200"/>
-            <a:ext cx="6096000" cy="4525963"/>
-          </a:xfrm>
-        </p:spPr>
-        <p:txBody>
-          <a:bodyPr/>
-          <a:lstStyle/>
-          <a:p>
-            <a:pPr marL="571500" indent="-571500">
-              <a:buFont typeface="+mj-lt"/>
-              <a:buAutoNum type="romanUcPeriod"/>
-            </a:pPr>
-            <a:r>
-              <a:rPr lang="en-US" sz="2400" dirty="0" smtClean="0"/>
-              <a:t>Executive summary.</a:t>
-            </a:r>
-          </a:p>
-          <a:p>
-            <a:pPr marL="571500" indent="-571500">
-              <a:buFont typeface="+mj-lt"/>
-              <a:buAutoNum type="romanUcPeriod"/>
-            </a:pPr>
-            <a:r>
-              <a:rPr lang="en-US" sz="2400" dirty="0" smtClean="0"/>
-              <a:t>Project vision and scope.</a:t>
-            </a:r>
-          </a:p>
-          <a:p>
-            <a:pPr marL="571500" indent="-571500">
-              <a:buFont typeface="+mj-lt"/>
-              <a:buAutoNum type="romanUcPeriod"/>
-            </a:pPr>
-            <a:r>
-              <a:rPr lang="en-US" sz="2400" dirty="0" smtClean="0"/>
-              <a:t>Mockup, prototype.</a:t>
-            </a:r>
-          </a:p>
-          <a:p>
-            <a:pPr marL="571500" indent="-571500">
-              <a:buFont typeface="+mj-lt"/>
-              <a:buAutoNum type="romanUcPeriod"/>
-            </a:pPr>
-            <a:r>
-              <a:rPr lang="en-US" sz="2400" dirty="0" smtClean="0"/>
-              <a:t>Software requirements specification.</a:t>
-            </a:r>
-          </a:p>
-          <a:p>
-            <a:pPr marL="571500" indent="-571500">
-              <a:buFont typeface="+mj-lt"/>
-              <a:buAutoNum type="romanUcPeriod"/>
-            </a:pPr>
-            <a:r>
-              <a:rPr lang="en-US" sz="2400" dirty="0" smtClean="0"/>
-              <a:t>Architecture.</a:t>
-            </a:r>
-          </a:p>
-          <a:p>
-            <a:pPr marL="571500" indent="-571500">
-              <a:buFont typeface="+mj-lt"/>
-              <a:buAutoNum type="romanUcPeriod"/>
-            </a:pPr>
-            <a:r>
-              <a:rPr lang="en-US" sz="2400" dirty="0" smtClean="0"/>
-              <a:t>Proof of concept.</a:t>
-            </a:r>
-          </a:p>
-          <a:p>
-            <a:pPr marL="571500" indent="-571500">
-              <a:buFont typeface="+mj-lt"/>
-              <a:buAutoNum type="romanUcPeriod"/>
-            </a:pPr>
-            <a:r>
-              <a:rPr lang="en-US" sz="2400" dirty="0" smtClean="0"/>
-              <a:t>Feasibility study report.</a:t>
-            </a:r>
-          </a:p>
-          <a:p>
-            <a:pPr marL="571500" indent="-571500">
-              <a:buFont typeface="+mj-lt"/>
-              <a:buAutoNum type="romanUcPeriod"/>
-            </a:pPr>
-            <a:r>
-              <a:rPr lang="en-US" sz="2400" dirty="0" smtClean="0"/>
-              <a:t>Project charter.</a:t>
-            </a:r>
-          </a:p>
-          <a:p>
-            <a:pPr marL="571500" indent="-571500">
-              <a:buFont typeface="+mj-lt"/>
-              <a:buAutoNum type="romanUcPeriod"/>
-            </a:pPr>
-            <a:r>
-              <a:rPr lang="en-US" sz="2400" dirty="0" smtClean="0"/>
-              <a:t>Process definition document.</a:t>
-            </a:r>
-          </a:p>
-          <a:p>
-            <a:pPr marL="571500" indent="-571500">
-              <a:buFont typeface="+mj-lt"/>
-              <a:buAutoNum type="romanUcPeriod"/>
-            </a:pPr>
-            <a:endParaRPr lang="en-US" sz="2400" dirty="0" smtClean="0"/>
-          </a:p>
-        </p:txBody>
-      </p:sp>
-    </p:spTree>
-  </p:cSld>
-  <p:clrMapOvr>
-    <a:masterClrMapping/>
-  </p:clrMapOvr>
-</p:sld>
-</file>
-
-<file path=ppt/slides/slide30.xml><?xml version="1.0" encoding="utf-8"?>
+<file path=ppt/slides/slide35.xml><?xml version="1.0" encoding="utf-8"?>
 <p:sld xmlns:a="http://schemas.openxmlformats.org/drawingml/2006/main" xmlns:r="http://schemas.openxmlformats.org/officeDocument/2006/relationships" xmlns:p="http://schemas.openxmlformats.org/presentationml/2006/main">
   <p:cSld>
     <p:spTree>
@@ -14017,9 +16505,115 @@
           <a:chExt cx="0" cy="0"/>
         </a:xfrm>
       </p:grpSpPr>
+      <p:sp>
+        <p:nvSpPr>
+          <p:cNvPr id="2" name="Title 1"/>
+          <p:cNvSpPr>
+            <a:spLocks noGrp="1"/>
+          </p:cNvSpPr>
+          <p:nvPr>
+            <p:ph type="title"/>
+          </p:nvPr>
+        </p:nvSpPr>
+        <p:spPr/>
+        <p:txBody>
+          <a:bodyPr/>
+          <a:lstStyle/>
+          <a:p>
+            <a:r>
+              <a:rPr lang="en-US" dirty="0" smtClean="0"/>
+              <a:t>Team Forming</a:t>
+            </a:r>
+            <a:endParaRPr lang="en-US" dirty="0"/>
+          </a:p>
+        </p:txBody>
+      </p:sp>
+      <p:sp>
+        <p:nvSpPr>
+          <p:cNvPr id="3" name="Content Placeholder 2"/>
+          <p:cNvSpPr>
+            <a:spLocks noGrp="1"/>
+          </p:cNvSpPr>
+          <p:nvPr>
+            <p:ph idx="1"/>
+          </p:nvPr>
+        </p:nvSpPr>
+        <p:spPr/>
+        <p:txBody>
+          <a:bodyPr/>
+          <a:lstStyle/>
+          <a:p>
+            <a:r>
+              <a:rPr lang="en-US" dirty="0" smtClean="0">
+                <a:latin typeface="Calibri" pitchFamily="34" charset="0"/>
+              </a:rPr>
+              <a:t>Each team has </a:t>
+            </a:r>
+            <a:r>
+              <a:rPr lang="en-US" i="1" dirty="0" smtClean="0">
+                <a:solidFill>
+                  <a:srgbClr val="C00000"/>
+                </a:solidFill>
+                <a:latin typeface="Calibri" pitchFamily="34" charset="0"/>
+              </a:rPr>
+              <a:t>maximum </a:t>
+            </a:r>
+            <a:r>
+              <a:rPr lang="en-US" i="1" dirty="0" smtClean="0">
+                <a:solidFill>
+                  <a:srgbClr val="C00000"/>
+                </a:solidFill>
+                <a:latin typeface="Calibri" pitchFamily="34" charset="0"/>
+              </a:rPr>
+              <a:t>of 6 members</a:t>
+            </a:r>
+            <a:r>
+              <a:rPr lang="en-US" dirty="0" smtClean="0">
+                <a:latin typeface="Calibri" pitchFamily="34" charset="0"/>
+              </a:rPr>
+              <a:t>.</a:t>
+            </a:r>
+          </a:p>
+          <a:p>
+            <a:r>
+              <a:rPr lang="en-US" dirty="0" smtClean="0">
+                <a:latin typeface="Calibri" pitchFamily="34" charset="0"/>
+              </a:rPr>
+              <a:t>If there are surplus students, some teams </a:t>
+            </a:r>
+            <a:r>
+              <a:rPr lang="en-US" dirty="0" smtClean="0">
+                <a:latin typeface="Calibri" pitchFamily="34" charset="0"/>
+              </a:rPr>
+              <a:t>may </a:t>
+            </a:r>
+            <a:r>
+              <a:rPr lang="en-US" dirty="0" smtClean="0">
+                <a:latin typeface="Calibri" pitchFamily="34" charset="0"/>
+              </a:rPr>
+              <a:t>have </a:t>
+            </a:r>
+            <a:r>
+              <a:rPr lang="en-US" dirty="0" smtClean="0">
+                <a:latin typeface="Calibri" pitchFamily="34" charset="0"/>
+              </a:rPr>
+              <a:t>7 </a:t>
+            </a:r>
+            <a:r>
+              <a:rPr lang="en-US" dirty="0" smtClean="0">
+                <a:latin typeface="Calibri" pitchFamily="34" charset="0"/>
+              </a:rPr>
+              <a:t>people.</a:t>
+            </a:r>
+          </a:p>
+          <a:p>
+            <a:endParaRPr lang="en-US" dirty="0"/>
+          </a:p>
+        </p:txBody>
+      </p:sp>
       <p:pic>
         <p:nvPicPr>
-          <p:cNvPr id="5" name="Picture 3"/>
+          <p:cNvPr id="4" name="Picture 3"/>
           <p:cNvPicPr>
             <a:picLocks noChangeAspect="1" noChangeArrowheads="1"/>
           </p:cNvPicPr>
@@ -14034,7 +16628,7 @@
         </p:blipFill>
         <p:spPr bwMode="auto">
           <a:xfrm>
-            <a:off x="6429786" y="332437"/>
+            <a:off x="5562600" y="3685237"/>
             <a:ext cx="2257014" cy="1496363"/>
           </a:xfrm>
           <a:prstGeom prst="rect">
@@ -14049,161 +16643,9 @@
           </a:ln>
         </p:spPr>
       </p:pic>
-      <p:sp>
-        <p:nvSpPr>
-          <p:cNvPr id="2" name="Title 1"/>
-          <p:cNvSpPr>
-            <a:spLocks noGrp="1"/>
-          </p:cNvSpPr>
-          <p:nvPr>
-            <p:ph type="title"/>
-          </p:nvPr>
-        </p:nvSpPr>
-        <p:spPr/>
-        <p:txBody>
-          <a:bodyPr/>
-          <a:lstStyle/>
-          <a:p>
-            <a:r>
-              <a:rPr lang="en-US" dirty="0" smtClean="0"/>
-              <a:t>Team Forming</a:t>
-            </a:r>
-            <a:endParaRPr lang="en-US" dirty="0"/>
-          </a:p>
-        </p:txBody>
-      </p:sp>
-      <p:sp>
-        <p:nvSpPr>
-          <p:cNvPr id="3" name="Content Placeholder 2"/>
-          <p:cNvSpPr>
-            <a:spLocks noGrp="1"/>
-          </p:cNvSpPr>
-          <p:nvPr>
-            <p:ph idx="1"/>
-          </p:nvPr>
-        </p:nvSpPr>
-        <p:spPr>
-          <a:xfrm>
-            <a:off x="457200" y="1676400"/>
-            <a:ext cx="8229600" cy="3429000"/>
-          </a:xfrm>
-        </p:spPr>
-        <p:txBody>
-          <a:bodyPr/>
-          <a:lstStyle/>
-          <a:p>
-            <a:r>
-              <a:rPr lang="en-US" sz="2000" dirty="0" smtClean="0">
-                <a:latin typeface="Calibri" pitchFamily="34" charset="0"/>
-              </a:rPr>
-              <a:t>Select 8 </a:t>
-            </a:r>
-            <a:r>
-              <a:rPr lang="en-US" sz="2000" i="1" dirty="0" smtClean="0">
-                <a:solidFill>
-                  <a:srgbClr val="C00000"/>
-                </a:solidFill>
-                <a:latin typeface="Calibri" pitchFamily="34" charset="0"/>
-              </a:rPr>
-              <a:t>team leaders</a:t>
-            </a:r>
-            <a:r>
-              <a:rPr lang="en-US" sz="2000" dirty="0" smtClean="0">
-                <a:latin typeface="Calibri" pitchFamily="34" charset="0"/>
-              </a:rPr>
-              <a:t>. </a:t>
-            </a:r>
-            <a:endParaRPr lang="vi-VN" sz="2000" dirty="0" smtClean="0">
-              <a:latin typeface="Calibri" pitchFamily="34" charset="0"/>
-            </a:endParaRPr>
-          </a:p>
-          <a:p>
-            <a:r>
-              <a:rPr lang="en-US" sz="2000" dirty="0" smtClean="0">
-                <a:latin typeface="Calibri" pitchFamily="34" charset="0"/>
-              </a:rPr>
-              <a:t>Students select a team for themselves. Each team has </a:t>
-            </a:r>
-            <a:r>
-              <a:rPr lang="en-US" sz="2000" i="1" dirty="0" smtClean="0">
-                <a:solidFill>
-                  <a:srgbClr val="C00000"/>
-                </a:solidFill>
-                <a:latin typeface="Calibri" pitchFamily="34" charset="0"/>
-              </a:rPr>
-              <a:t>maximum of 5 members (including a team leader)</a:t>
-            </a:r>
-            <a:r>
-              <a:rPr lang="en-US" sz="2000" dirty="0" smtClean="0">
-                <a:latin typeface="Calibri" pitchFamily="34" charset="0"/>
-              </a:rPr>
-              <a:t>.</a:t>
-            </a:r>
-          </a:p>
-          <a:p>
-            <a:r>
-              <a:rPr lang="en-US" sz="2000" dirty="0" smtClean="0">
-                <a:latin typeface="Calibri" pitchFamily="34" charset="0"/>
-              </a:rPr>
-              <a:t>If there are surplus students, some teams can have 8 people.</a:t>
-            </a:r>
-          </a:p>
-          <a:p>
-            <a:r>
-              <a:rPr lang="en-US" sz="2000" dirty="0" smtClean="0">
-                <a:latin typeface="Calibri" pitchFamily="34" charset="0"/>
-              </a:rPr>
-              <a:t>Team leaders send their team members list to class leader.</a:t>
-            </a:r>
-            <a:endParaRPr lang="vi-VN" sz="2000" dirty="0" smtClean="0">
-              <a:latin typeface="Calibri" pitchFamily="34" charset="0"/>
-            </a:endParaRPr>
-          </a:p>
-          <a:p>
-            <a:r>
-              <a:rPr lang="en-US" sz="2000" dirty="0" smtClean="0">
-                <a:latin typeface="Calibri" pitchFamily="34" charset="0"/>
-              </a:rPr>
-              <a:t>The class leader collects and puts all the information to a class management file</a:t>
-            </a:r>
-            <a:r>
-              <a:rPr lang="vi-VN" sz="2000" dirty="0" smtClean="0">
-                <a:latin typeface="Calibri" pitchFamily="34" charset="0"/>
-              </a:rPr>
-              <a:t>.</a:t>
-            </a:r>
-            <a:endParaRPr lang="en-US" sz="2000" dirty="0" smtClean="0">
-              <a:latin typeface="Calibri" pitchFamily="34" charset="0"/>
-            </a:endParaRPr>
-          </a:p>
-          <a:p>
-            <a:r>
-              <a:rPr lang="en-US" sz="2000" dirty="0" smtClean="0">
-                <a:latin typeface="Calibri" pitchFamily="34" charset="0"/>
-              </a:rPr>
-              <a:t>The class leader </a:t>
-            </a:r>
-            <a:r>
-              <a:rPr lang="en-US" sz="2000" i="1" dirty="0" smtClean="0">
-                <a:solidFill>
-                  <a:srgbClr val="C00000"/>
-                </a:solidFill>
-                <a:latin typeface="Calibri" pitchFamily="34" charset="0"/>
-              </a:rPr>
-              <a:t>is authorized</a:t>
-            </a:r>
-            <a:r>
-              <a:rPr lang="en-US" sz="2000" dirty="0" smtClean="0">
-                <a:latin typeface="Calibri" pitchFamily="34" charset="0"/>
-              </a:rPr>
-              <a:t> to assign a team for an individual who is late to class or absent.</a:t>
-            </a:r>
-          </a:p>
-        </p:txBody>
-      </p:sp>
       <p:pic>
         <p:nvPicPr>
-          <p:cNvPr id="11266" name="Picture 2" descr="https://cavemaninasuit.com/wp-content/uploads/2020/09/multidisc_teams-1.jpg"/>
+          <p:cNvPr id="5" name="Picture 2" descr="https://cavemaninasuit.com/wp-content/uploads/2020/09/multidisc_teams-1.jpg"/>
           <p:cNvPicPr>
             <a:picLocks noChangeAspect="1" noChangeArrowheads="1"/>
           </p:cNvPicPr>
@@ -14218,7 +16660,7 @@
         </p:blipFill>
         <p:spPr bwMode="auto">
           <a:xfrm>
-            <a:off x="3810000" y="4953000"/>
+            <a:off x="1828800" y="3717925"/>
             <a:ext cx="2333625" cy="1311275"/>
           </a:xfrm>
           <a:prstGeom prst="rect">
@@ -14252,9 +16694,67 @@
           <a:chExt cx="0" cy="0"/>
         </a:xfrm>
       </p:grpSpPr>
+      <p:sp>
+        <p:nvSpPr>
+          <p:cNvPr id="2" name="Title 1"/>
+          <p:cNvSpPr>
+            <a:spLocks noGrp="1"/>
+          </p:cNvSpPr>
+          <p:nvPr>
+            <p:ph type="title"/>
+          </p:nvPr>
+        </p:nvSpPr>
+        <p:spPr/>
+        <p:txBody>
+          <a:bodyPr/>
+          <a:lstStyle/>
+          <a:p>
+            <a:r>
+              <a:rPr lang="en-US" dirty="0" smtClean="0"/>
+              <a:t>Brainstorming Project Ideas</a:t>
+            </a:r>
+            <a:endParaRPr lang="en-US" dirty="0"/>
+          </a:p>
+        </p:txBody>
+      </p:sp>
+      <p:sp>
+        <p:nvSpPr>
+          <p:cNvPr id="3" name="Content Placeholder 2"/>
+          <p:cNvSpPr>
+            <a:spLocks noGrp="1"/>
+          </p:cNvSpPr>
+          <p:nvPr>
+            <p:ph idx="1"/>
+          </p:nvPr>
+        </p:nvSpPr>
+        <p:spPr/>
+        <p:txBody>
+          <a:bodyPr/>
+          <a:lstStyle/>
+          <a:p>
+            <a:r>
+              <a:rPr lang="en-US" sz="2400" dirty="0" smtClean="0"/>
+              <a:t>RFPs</a:t>
+            </a:r>
+          </a:p>
+          <a:p>
+            <a:r>
+              <a:rPr lang="en-US" sz="2400" dirty="0" smtClean="0"/>
+              <a:t>Research idea</a:t>
+            </a:r>
+          </a:p>
+          <a:p>
+            <a:r>
+              <a:rPr lang="en-US" sz="2400" dirty="0" smtClean="0"/>
+              <a:t>Products</a:t>
+            </a:r>
+            <a:endParaRPr lang="en-US" sz="2400" dirty="0" smtClean="0"/>
+          </a:p>
+        </p:txBody>
+      </p:sp>
       <p:pic>
         <p:nvPicPr>
-          <p:cNvPr id="45059" name="Picture 3"/>
+          <p:cNvPr id="4" name="Picture 3"/>
           <p:cNvPicPr>
             <a:picLocks noChangeAspect="1" noChangeArrowheads="1"/>
           </p:cNvPicPr>
@@ -14269,8 +16769,8 @@
         </p:blipFill>
         <p:spPr bwMode="auto">
           <a:xfrm>
-            <a:off x="914400" y="4267200"/>
-            <a:ext cx="2857500" cy="1828800"/>
+            <a:off x="3915186" y="1524000"/>
+            <a:ext cx="2257014" cy="1496363"/>
           </a:xfrm>
           <a:prstGeom prst="rect">
             <a:avLst/>
@@ -14284,143 +16784,9 @@
           </a:ln>
         </p:spPr>
       </p:pic>
-      <p:sp>
-        <p:nvSpPr>
-          <p:cNvPr id="2" name="Title 1"/>
-          <p:cNvSpPr>
-            <a:spLocks noGrp="1"/>
-          </p:cNvSpPr>
-          <p:nvPr>
-            <p:ph type="title"/>
-          </p:nvPr>
-        </p:nvSpPr>
-        <p:spPr/>
-        <p:txBody>
-          <a:bodyPr/>
-          <a:lstStyle/>
-          <a:p>
-            <a:r>
-              <a:rPr lang="en-US" dirty="0" smtClean="0"/>
-              <a:t>We Have To Ensure That [1]</a:t>
-            </a:r>
-            <a:endParaRPr lang="en-US" dirty="0"/>
-          </a:p>
-        </p:txBody>
-      </p:sp>
-      <p:sp>
-        <p:nvSpPr>
-          <p:cNvPr id="3" name="Content Placeholder 2"/>
-          <p:cNvSpPr>
-            <a:spLocks noGrp="1"/>
-          </p:cNvSpPr>
-          <p:nvPr>
-            <p:ph idx="1"/>
-          </p:nvPr>
-        </p:nvSpPr>
-        <p:spPr>
-          <a:xfrm>
-            <a:off x="457200" y="1752600"/>
-            <a:ext cx="8229600" cy="2133600"/>
-          </a:xfrm>
-        </p:spPr>
-        <p:txBody>
-          <a:bodyPr/>
-          <a:lstStyle/>
-          <a:p>
-            <a:r>
-              <a:rPr lang="en-US" sz="2400" dirty="0" smtClean="0"/>
-              <a:t>Project will be </a:t>
-            </a:r>
-            <a:r>
-              <a:rPr lang="en-US" sz="2400" i="1" dirty="0" smtClean="0">
-                <a:solidFill>
-                  <a:srgbClr val="C00000"/>
-                </a:solidFill>
-              </a:rPr>
-              <a:t>within cost</a:t>
-            </a:r>
-            <a:r>
-              <a:rPr lang="en-US" sz="2400" dirty="0" smtClean="0"/>
-              <a:t>.</a:t>
-            </a:r>
-          </a:p>
-          <a:p>
-            <a:r>
-              <a:rPr lang="en-US" sz="2400" dirty="0" smtClean="0"/>
-              <a:t>Project will be delivered </a:t>
-            </a:r>
-            <a:r>
-              <a:rPr lang="en-US" sz="2400" i="1" dirty="0" smtClean="0">
-                <a:solidFill>
-                  <a:srgbClr val="C00000"/>
-                </a:solidFill>
-              </a:rPr>
-              <a:t>on time</a:t>
-            </a:r>
-            <a:r>
-              <a:rPr lang="en-US" sz="2400" dirty="0" smtClean="0"/>
-              <a:t>.</a:t>
-            </a:r>
-          </a:p>
-          <a:p>
-            <a:r>
-              <a:rPr lang="en-US" sz="2400" dirty="0" smtClean="0"/>
-              <a:t>Project will be </a:t>
-            </a:r>
-            <a:r>
-              <a:rPr lang="en-US" sz="2400" i="1" dirty="0" smtClean="0">
-                <a:solidFill>
-                  <a:srgbClr val="C00000"/>
-                </a:solidFill>
-              </a:rPr>
-              <a:t>within scope</a:t>
-            </a:r>
-            <a:r>
-              <a:rPr lang="en-US" sz="2400" dirty="0" smtClean="0"/>
-              <a:t>.</a:t>
-            </a:r>
-          </a:p>
-          <a:p>
-            <a:r>
-              <a:rPr lang="en-US" sz="2400" dirty="0" smtClean="0"/>
-              <a:t>Project will meet customer </a:t>
-            </a:r>
-            <a:r>
-              <a:rPr lang="en-US" sz="2400" i="1" dirty="0" smtClean="0">
-                <a:solidFill>
-                  <a:srgbClr val="C00000"/>
-                </a:solidFill>
-              </a:rPr>
-              <a:t>quality requirements</a:t>
-            </a:r>
-            <a:r>
-              <a:rPr lang="en-US" sz="2400" dirty="0" smtClean="0"/>
-              <a:t>.</a:t>
-            </a:r>
-          </a:p>
-          <a:p>
-            <a:r>
-              <a:rPr lang="en-US" sz="2400" dirty="0" smtClean="0"/>
-              <a:t>Customer will be </a:t>
-            </a:r>
-            <a:r>
-              <a:rPr lang="en-US" sz="2400" i="1" dirty="0" smtClean="0">
-                <a:solidFill>
-                  <a:srgbClr val="C00000"/>
-                </a:solidFill>
-              </a:rPr>
-              <a:t>happy</a:t>
-            </a:r>
-            <a:r>
-              <a:rPr lang="en-US" sz="2400" dirty="0" smtClean="0"/>
-              <a:t>.</a:t>
-            </a:r>
-          </a:p>
-        </p:txBody>
-      </p:sp>
       <p:pic>
         <p:nvPicPr>
-          <p:cNvPr id="5" name="Picture 4" descr="https://qph.ec.quoracdn.net/main-custom-t-7249-600x315-lusxrkycuejsfvmmkfygfxnqzfvkqcvy.jpeg"/>
+          <p:cNvPr id="5" name="Picture 2" descr="https://storiesonboard.com/blog/wp-content/uploads/2017/12/brainstorming-techniques.png"/>
           <p:cNvPicPr>
             <a:picLocks noChangeAspect="1" noChangeArrowheads="1"/>
           </p:cNvPicPr>
@@ -14435,8 +16801,87 @@
         </p:blipFill>
         <p:spPr bwMode="auto">
           <a:xfrm>
-            <a:off x="4572000" y="4143375"/>
-            <a:ext cx="3429000" cy="1800225"/>
+            <a:off x="685800" y="3124200"/>
+            <a:ext cx="3810000" cy="3048000"/>
+          </a:xfrm>
+          <a:prstGeom prst="rect">
+            <a:avLst/>
+          </a:prstGeom>
+          <a:noFill/>
+        </p:spPr>
+      </p:pic>
+      <p:sp>
+        <p:nvSpPr>
+          <p:cNvPr id="6" name="Rectangle 5"/>
+          <p:cNvSpPr/>
+          <p:nvPr/>
+        </p:nvSpPr>
+        <p:spPr>
+          <a:xfrm>
+            <a:off x="4648200" y="3055203"/>
+            <a:ext cx="3962400" cy="830997"/>
+          </a:xfrm>
+          <a:prstGeom prst="rect">
+            <a:avLst/>
+          </a:prstGeom>
+        </p:spPr>
+        <p:txBody>
+          <a:bodyPr wrap="square">
+            <a:spAutoFit/>
+          </a:bodyPr>
+          <a:lstStyle/>
+          <a:p>
+            <a:pPr algn="ctr"/>
+            <a:r>
+              <a:rPr lang="en-US" sz="2400" b="1" dirty="0" smtClean="0">
+                <a:latin typeface="Calibri" pitchFamily="34" charset="0"/>
+                <a:cs typeface="Calibri" pitchFamily="34" charset="0"/>
+              </a:rPr>
+              <a:t>6 </a:t>
+            </a:r>
+            <a:r>
+              <a:rPr lang="en-US" sz="2400" b="1" dirty="0" smtClean="0">
+                <a:latin typeface="Calibri" pitchFamily="34" charset="0"/>
+                <a:cs typeface="Calibri" pitchFamily="34" charset="0"/>
+              </a:rPr>
+              <a:t>members</a:t>
+            </a:r>
+          </a:p>
+          <a:p>
+            <a:pPr algn="ctr"/>
+            <a:r>
+              <a:rPr lang="en-US" sz="2400" b="1" dirty="0" smtClean="0">
+                <a:latin typeface="Calibri" pitchFamily="34" charset="0"/>
+                <a:cs typeface="Calibri" pitchFamily="34" charset="0"/>
+              </a:rPr>
+              <a:t>8 hours per week / member</a:t>
+            </a:r>
+            <a:endParaRPr lang="vi-VN" sz="2400" b="1" dirty="0">
+              <a:latin typeface="Calibri" pitchFamily="34" charset="0"/>
+              <a:cs typeface="Calibri" pitchFamily="34" charset="0"/>
+            </a:endParaRPr>
+          </a:p>
+        </p:txBody>
+      </p:sp>
+      <p:pic>
+        <p:nvPicPr>
+          <p:cNvPr id="7" name="Picture 2" descr="http://www.texasrockgym.com/wp-content/uploads/2016/04/exercise.jpg"/>
+          <p:cNvPicPr>
+            <a:picLocks noChangeAspect="1" noChangeArrowheads="1"/>
+          </p:cNvPicPr>
+          <p:nvPr/>
+        </p:nvPicPr>
+        <p:blipFill>
+          <a:blip r:embed="rId4" cstate="print"/>
+          <a:srcRect/>
+          <a:stretch>
+            <a:fillRect/>
+          </a:stretch>
+        </p:blipFill>
+        <p:spPr bwMode="auto">
+          <a:xfrm>
+            <a:off x="5410200" y="4114800"/>
+            <a:ext cx="2602992" cy="1600200"/>
           </a:xfrm>
           <a:prstGeom prst="rect">
             <a:avLst/>
@@ -14449,13 +16894,6 @@
   <p:clrMapOvr>
     <a:masterClrMapping/>
   </p:clrMapOvr>
-  <p:timing>
-    <p:tnLst>
-      <p:par>
-        <p:cTn id="1" dur="indefinite" restart="never" nodeType="tmRoot"/>
-      </p:par>
-    </p:tnLst>
-  </p:timing>
 </p:sld>
 </file>
 
@@ -14486,53 +16924,84 @@
             <p:ph type="title"/>
           </p:nvPr>
         </p:nvSpPr>
-        <p:spPr>
-          <a:xfrm>
-            <a:off x="457200" y="609600"/>
-            <a:ext cx="8229600" cy="1143000"/>
-          </a:xfrm>
-        </p:spPr>
+        <p:spPr/>
         <p:txBody>
           <a:bodyPr/>
           <a:lstStyle/>
           <a:p>
             <a:r>
               <a:rPr lang="en-US" dirty="0" smtClean="0"/>
-              <a:t>But How? Where Do We Start?</a:t>
+              <a:t>Products: </a:t>
+            </a:r>
+            <a:r>
+              <a:rPr lang="en-US" dirty="0" smtClean="0"/>
+              <a:t>Practical Problems</a:t>
             </a:r>
             <a:endParaRPr lang="en-US" dirty="0"/>
+          </a:p>
+        </p:txBody>
+      </p:sp>
+      <p:sp>
+        <p:nvSpPr>
+          <p:cNvPr id="3" name="Content Placeholder 2"/>
+          <p:cNvSpPr>
+            <a:spLocks noGrp="1"/>
+          </p:cNvSpPr>
+          <p:nvPr>
+            <p:ph idx="1"/>
+          </p:nvPr>
+        </p:nvSpPr>
+        <p:spPr/>
+        <p:txBody>
+          <a:bodyPr/>
+          <a:lstStyle/>
+          <a:p>
+            <a:r>
+              <a:rPr lang="en-US" sz="2200" dirty="0" smtClean="0"/>
+              <a:t>Apps on your mobile device, your most visited websites.</a:t>
+            </a:r>
+          </a:p>
+          <a:p>
+            <a:r>
+              <a:rPr lang="en-US" sz="2200" dirty="0" smtClean="0"/>
+              <a:t>Trending apps on Google Play, App Store.</a:t>
+            </a:r>
+          </a:p>
+          <a:p>
+            <a:r>
+              <a:rPr lang="en-US" sz="2200" dirty="0" smtClean="0"/>
+              <a:t>Open source software.</a:t>
+            </a:r>
+          </a:p>
+          <a:p>
+            <a:r>
+              <a:rPr lang="en-US" sz="2200" dirty="0" smtClean="0"/>
+              <a:t>Your daily job responsibilities.</a:t>
+            </a:r>
+          </a:p>
+          <a:p>
+            <a:r>
+              <a:rPr lang="en-US" sz="2200" dirty="0" smtClean="0"/>
+              <a:t>Your current </a:t>
+            </a:r>
+            <a:r>
+              <a:rPr lang="en-US" sz="2200" i="1" dirty="0" smtClean="0">
+                <a:solidFill>
+                  <a:srgbClr val="C00000"/>
+                </a:solidFill>
+              </a:rPr>
+              <a:t>obstacles</a:t>
+            </a:r>
+            <a:r>
+              <a:rPr lang="en-US" sz="2200" dirty="0" smtClean="0"/>
+              <a:t>?</a:t>
+            </a:r>
           </a:p>
         </p:txBody>
       </p:sp>
       <p:pic>
         <p:nvPicPr>
-          <p:cNvPr id="2050" name="Picture 2" descr="http://www.texasrockgym.com/wp-content/uploads/2016/04/exercise.jpg"/>
-          <p:cNvPicPr>
-            <a:picLocks noChangeAspect="1" noChangeArrowheads="1"/>
-          </p:cNvPicPr>
-          <p:nvPr/>
-        </p:nvPicPr>
-        <p:blipFill>
-          <a:blip r:embed="rId2" cstate="print"/>
-          <a:srcRect/>
-          <a:stretch>
-            <a:fillRect/>
-          </a:stretch>
-        </p:blipFill>
-        <p:spPr bwMode="auto">
-          <a:xfrm>
-            <a:off x="5410200" y="3200400"/>
-            <a:ext cx="2602992" cy="1600200"/>
-          </a:xfrm>
-          <a:prstGeom prst="rect">
-            <a:avLst/>
-          </a:prstGeom>
-          <a:noFill/>
-        </p:spPr>
-      </p:pic>
-      <p:pic>
-        <p:nvPicPr>
-          <p:cNvPr id="1028" name="Picture 4" descr="http://www.hopecenterjackson.com/wp-content/uploads/2014/12/2627622411_what_will_you_do_xlarge_xlarge.jpeg"/>
+          <p:cNvPr id="4" name="Picture 2" descr="https://bizflyportal.mediacdn.vn/thumb_wm/1000,100/bizflyportal/techblog/app/so-sanh-google-play-va-app-store-1-16819015419562.jpg"/>
           <p:cNvPicPr>
             <a:picLocks noChangeAspect="1" noChangeArrowheads="1"/>
           </p:cNvPicPr>
@@ -14547,34 +17016,8 @@
         </p:blipFill>
         <p:spPr bwMode="auto">
           <a:xfrm>
-            <a:off x="1066800" y="2057400"/>
-            <a:ext cx="2667000" cy="2667000"/>
-          </a:xfrm>
-          <a:prstGeom prst="rect">
-            <a:avLst/>
-          </a:prstGeom>
-          <a:noFill/>
-        </p:spPr>
-      </p:pic>
-      <p:pic>
-        <p:nvPicPr>
-          <p:cNvPr id="1030" name="Picture 6" descr="https://i2.wp.com/www.ljv.li/wp-content/uploads/2015/12/Fragezeichen-PP.jpg"/>
-          <p:cNvPicPr>
-            <a:picLocks noChangeAspect="1" noChangeArrowheads="1"/>
-          </p:cNvPicPr>
-          <p:nvPr/>
-        </p:nvPicPr>
-        <p:blipFill>
-          <a:blip r:embed="rId4" cstate="print"/>
-          <a:srcRect/>
-          <a:stretch>
-            <a:fillRect/>
-          </a:stretch>
-        </p:blipFill>
-        <p:spPr bwMode="auto">
-          <a:xfrm>
-            <a:off x="533400" y="3962400"/>
-            <a:ext cx="3982720" cy="2783344"/>
+            <a:off x="2743200" y="3962400"/>
+            <a:ext cx="3810000" cy="2141220"/>
           </a:xfrm>
           <a:prstGeom prst="rect">
             <a:avLst/>
@@ -14587,13 +17030,6 @@
   <p:clrMapOvr>
     <a:masterClrMapping/>
   </p:clrMapOvr>
-  <p:timing>
-    <p:tnLst>
-      <p:par>
-        <p:cTn id="1" dur="indefinite" restart="never" nodeType="tmRoot"/>
-      </p:par>
-    </p:tnLst>
-  </p:timing>
 </p:sld>
 </file>
 
@@ -14614,32 +17050,6 @@
           <a:chExt cx="0" cy="0"/>
         </a:xfrm>
       </p:grpSpPr>
-      <p:pic>
-        <p:nvPicPr>
-          <p:cNvPr id="7" name="Picture 2" descr="http://www.resg.org.uk/wp-content/themes/resg-theme/images/resg-wordle.png"/>
-          <p:cNvPicPr>
-            <a:picLocks noChangeAspect="1" noChangeArrowheads="1"/>
-          </p:cNvPicPr>
-          <p:nvPr/>
-        </p:nvPicPr>
-        <p:blipFill>
-          <a:blip r:embed="rId2" cstate="print"/>
-          <a:srcRect/>
-          <a:stretch>
-            <a:fillRect/>
-          </a:stretch>
-        </p:blipFill>
-        <p:spPr bwMode="auto">
-          <a:xfrm>
-            <a:off x="4953000" y="1638300"/>
-            <a:ext cx="3276600" cy="1066800"/>
-          </a:xfrm>
-          <a:prstGeom prst="rect">
-            <a:avLst/>
-          </a:prstGeom>
-          <a:noFill/>
-        </p:spPr>
-      </p:pic>
       <p:sp>
         <p:nvSpPr>
           <p:cNvPr id="2" name="Title 1"/>
@@ -14657,7 +17067,11 @@
           <a:p>
             <a:r>
               <a:rPr lang="en-US" dirty="0" smtClean="0"/>
-              <a:t>Kickoff Meeting</a:t>
+              <a:t>Evaluating the </a:t>
+            </a:r>
+            <a:r>
+              <a:rPr lang="en-US" dirty="0" smtClean="0"/>
+              <a:t>Project Ideas</a:t>
             </a:r>
             <a:endParaRPr lang="en-US" dirty="0"/>
           </a:p>
@@ -14665,7 +17079,7 @@
       </p:sp>
       <p:pic>
         <p:nvPicPr>
-          <p:cNvPr id="1026" name="Picture 2" descr="Image result for kick-off meeting"/>
+          <p:cNvPr id="2051" name="Picture 3"/>
           <p:cNvPicPr>
             <a:picLocks noChangeAspect="1" noChangeArrowheads="1"/>
           </p:cNvPicPr>
@@ -14680,142 +17094,8 @@
         </p:blipFill>
         <p:spPr bwMode="auto">
           <a:xfrm>
-            <a:off x="941778" y="1683222"/>
-            <a:ext cx="3630222" cy="1745778"/>
-          </a:xfrm>
-          <a:prstGeom prst="rect">
-            <a:avLst/>
-          </a:prstGeom>
-          <a:noFill/>
-        </p:spPr>
-      </p:pic>
-      <p:sp>
-        <p:nvSpPr>
-          <p:cNvPr id="5" name="Rectangle 4"/>
-          <p:cNvSpPr/>
-          <p:nvPr/>
-        </p:nvSpPr>
-        <p:spPr>
-          <a:xfrm>
-            <a:off x="2819400" y="4268450"/>
-            <a:ext cx="5791200" cy="1446550"/>
-          </a:xfrm>
-          <a:prstGeom prst="rect">
-            <a:avLst/>
-          </a:prstGeom>
-        </p:spPr>
-        <p:txBody>
-          <a:bodyPr wrap="square">
-            <a:spAutoFit/>
-          </a:bodyPr>
-          <a:lstStyle/>
-          <a:p>
-            <a:pPr marL="342900" indent="-342900">
-              <a:buFont typeface="+mj-lt"/>
-              <a:buAutoNum type="arabicPeriod"/>
-            </a:pPr>
-            <a:r>
-              <a:rPr lang="en-US" sz="2200" dirty="0" smtClean="0">
-                <a:latin typeface="Consolas" pitchFamily="49" charset="0"/>
-                <a:cs typeface="Courier New" pitchFamily="49" charset="0"/>
-              </a:rPr>
-              <a:t>Executive Summary (</a:t>
-            </a:r>
-            <a:r>
-              <a:rPr lang="en-US" sz="2200" i="1" dirty="0" smtClean="0">
-                <a:solidFill>
-                  <a:srgbClr val="C00000"/>
-                </a:solidFill>
-                <a:latin typeface="Consolas" pitchFamily="49" charset="0"/>
-                <a:cs typeface="Courier New" pitchFamily="49" charset="0"/>
-              </a:rPr>
-              <a:t>Business Requirements</a:t>
-            </a:r>
-            <a:r>
-              <a:rPr lang="en-US" sz="2200" dirty="0" smtClean="0">
-                <a:latin typeface="Consolas" pitchFamily="49" charset="0"/>
-                <a:cs typeface="Courier New" pitchFamily="49" charset="0"/>
-              </a:rPr>
-              <a:t>)</a:t>
-            </a:r>
-          </a:p>
-          <a:p>
-            <a:pPr marL="342900" indent="-342900">
-              <a:buFont typeface="+mj-lt"/>
-              <a:buAutoNum type="arabicPeriod"/>
-            </a:pPr>
-            <a:r>
-              <a:rPr lang="en-US" sz="2200" dirty="0" smtClean="0">
-                <a:latin typeface="Consolas" pitchFamily="49" charset="0"/>
-                <a:cs typeface="Courier New" pitchFamily="49" charset="0"/>
-              </a:rPr>
-              <a:t>Project Vision and Scope (</a:t>
-            </a:r>
-            <a:r>
-              <a:rPr lang="en-US" sz="2200" i="1" dirty="0" smtClean="0">
-                <a:solidFill>
-                  <a:srgbClr val="C00000"/>
-                </a:solidFill>
-                <a:latin typeface="Consolas" pitchFamily="49" charset="0"/>
-                <a:cs typeface="Courier New" pitchFamily="49" charset="0"/>
-              </a:rPr>
-              <a:t>User Requirements</a:t>
-            </a:r>
-            <a:r>
-              <a:rPr lang="en-US" sz="2200" dirty="0" smtClean="0">
-                <a:latin typeface="Consolas" pitchFamily="49" charset="0"/>
-                <a:cs typeface="Courier New" pitchFamily="49" charset="0"/>
-              </a:rPr>
-              <a:t>)</a:t>
-            </a:r>
-          </a:p>
-        </p:txBody>
-      </p:sp>
-      <p:pic>
-        <p:nvPicPr>
-          <p:cNvPr id="8" name="Picture 2" descr="http://fastbiz101.com/101/wpfast-content/uploads/2016/06/review.jpeg"/>
-          <p:cNvPicPr>
-            <a:picLocks noChangeAspect="1" noChangeArrowheads="1"/>
-          </p:cNvPicPr>
-          <p:nvPr/>
-        </p:nvPicPr>
-        <p:blipFill>
-          <a:blip r:embed="rId4" cstate="print"/>
-          <a:srcRect/>
-          <a:stretch>
-            <a:fillRect/>
-          </a:stretch>
-        </p:blipFill>
-        <p:spPr bwMode="auto">
-          <a:xfrm>
-            <a:off x="5867400" y="2781300"/>
-            <a:ext cx="1600200" cy="800100"/>
-          </a:xfrm>
-          <a:prstGeom prst="rect">
-            <a:avLst/>
-          </a:prstGeom>
-          <a:noFill/>
-        </p:spPr>
-      </p:pic>
-      <p:pic>
-        <p:nvPicPr>
-          <p:cNvPr id="9" name="Picture 2"/>
-          <p:cNvPicPr>
-            <a:picLocks noChangeAspect="1" noChangeArrowheads="1"/>
-          </p:cNvPicPr>
-          <p:nvPr/>
-        </p:nvPicPr>
-        <p:blipFill>
-          <a:blip r:embed="rId5" cstate="print"/>
-          <a:srcRect/>
-          <a:stretch>
-            <a:fillRect/>
-          </a:stretch>
-        </p:blipFill>
-        <p:spPr bwMode="auto">
-          <a:xfrm>
-            <a:off x="457200" y="3810000"/>
-            <a:ext cx="1714500" cy="2286000"/>
+            <a:off x="3581400" y="2286000"/>
+            <a:ext cx="2103120" cy="2735580"/>
           </a:xfrm>
           <a:prstGeom prst="rect">
             <a:avLst/>
@@ -14831,14 +17111,14 @@
       </p:pic>
       <p:pic>
         <p:nvPicPr>
-          <p:cNvPr id="6" name="Picture 2" descr="http://kurld.com/images/wallpapers/document-image/document-image-17.jpg"/>
+          <p:cNvPr id="4" name="Picture 2" descr="http://www.texasrockgym.com/wp-content/uploads/2016/04/exercise.jpg"/>
           <p:cNvPicPr>
             <a:picLocks noChangeAspect="1" noChangeArrowheads="1"/>
           </p:cNvPicPr>
           <p:nvPr/>
         </p:nvPicPr>
         <p:blipFill>
-          <a:blip r:embed="rId6" cstate="print"/>
+          <a:blip r:embed="rId4" cstate="print"/>
           <a:srcRect/>
           <a:stretch>
             <a:fillRect/>
@@ -14846,8 +17126,8 @@
         </p:blipFill>
         <p:spPr bwMode="auto">
           <a:xfrm>
-            <a:off x="1066800" y="4038600"/>
-            <a:ext cx="1567542" cy="1755648"/>
+            <a:off x="5867400" y="3581400"/>
+            <a:ext cx="2602992" cy="1600200"/>
           </a:xfrm>
           <a:prstGeom prst="rect">
             <a:avLst/>
@@ -14855,11 +17135,133 @@
           <a:noFill/>
         </p:spPr>
       </p:pic>
+      <p:pic>
+        <p:nvPicPr>
+          <p:cNvPr id="5" name="Picture 2" descr="https://ideascale.com/wp-content/uploads/2015/02/Innovation-Leadership.png"/>
+          <p:cNvPicPr>
+            <a:picLocks noChangeAspect="1" noChangeArrowheads="1"/>
+          </p:cNvPicPr>
+          <p:nvPr/>
+        </p:nvPicPr>
+        <p:blipFill>
+          <a:blip r:embed="rId5" cstate="print"/>
+          <a:srcRect/>
+          <a:stretch>
+            <a:fillRect/>
+          </a:stretch>
+        </p:blipFill>
+        <p:spPr bwMode="auto">
+          <a:xfrm>
+            <a:off x="685800" y="2781300"/>
+            <a:ext cx="2857500" cy="2857500"/>
+          </a:xfrm>
+          <a:prstGeom prst="rect">
+            <a:avLst/>
+          </a:prstGeom>
+          <a:noFill/>
+        </p:spPr>
+      </p:pic>
+      <p:sp>
+        <p:nvSpPr>
+          <p:cNvPr id="6" name="Rectangle 5"/>
+          <p:cNvSpPr/>
+          <p:nvPr/>
+        </p:nvSpPr>
+        <p:spPr>
+          <a:xfrm>
+            <a:off x="6019800" y="2000071"/>
+            <a:ext cx="2209800" cy="1200329"/>
+          </a:xfrm>
+          <a:prstGeom prst="rect">
+            <a:avLst/>
+          </a:prstGeom>
+        </p:spPr>
+        <p:txBody>
+          <a:bodyPr wrap="square">
+            <a:spAutoFit/>
+          </a:bodyPr>
+          <a:lstStyle/>
+          <a:p>
+            <a:pPr algn="ctr"/>
+            <a:r>
+              <a:rPr lang="en-US" sz="2400" b="1" dirty="0" smtClean="0">
+                <a:latin typeface="Calibri" pitchFamily="34" charset="0"/>
+                <a:cs typeface="Calibri" pitchFamily="34" charset="0"/>
+              </a:rPr>
+              <a:t>6 </a:t>
+            </a:r>
+            <a:r>
+              <a:rPr lang="en-US" sz="2400" b="1" dirty="0" smtClean="0">
+                <a:latin typeface="Calibri" pitchFamily="34" charset="0"/>
+                <a:cs typeface="Calibri" pitchFamily="34" charset="0"/>
+              </a:rPr>
+              <a:t>members</a:t>
+            </a:r>
+          </a:p>
+          <a:p>
+            <a:pPr algn="ctr"/>
+            <a:r>
+              <a:rPr lang="en-US" sz="2400" b="1" dirty="0" smtClean="0">
+                <a:latin typeface="Calibri" pitchFamily="34" charset="0"/>
+                <a:cs typeface="Calibri" pitchFamily="34" charset="0"/>
+              </a:rPr>
+              <a:t>8 hours per week / member</a:t>
+            </a:r>
+            <a:endParaRPr lang="vi-VN" sz="2400" b="1" dirty="0">
+              <a:latin typeface="Calibri" pitchFamily="34" charset="0"/>
+              <a:cs typeface="Calibri" pitchFamily="34" charset="0"/>
+            </a:endParaRPr>
+          </a:p>
+        </p:txBody>
+      </p:sp>
+      <p:sp>
+        <p:nvSpPr>
+          <p:cNvPr id="7" name="Rectangle 6"/>
+          <p:cNvSpPr/>
+          <p:nvPr/>
+        </p:nvSpPr>
+        <p:spPr>
+          <a:xfrm>
+            <a:off x="990600" y="1790700"/>
+            <a:ext cx="2209800" cy="830997"/>
+          </a:xfrm>
+          <a:prstGeom prst="rect">
+            <a:avLst/>
+          </a:prstGeom>
+        </p:spPr>
+        <p:txBody>
+          <a:bodyPr wrap="square">
+            <a:spAutoFit/>
+          </a:bodyPr>
+          <a:lstStyle/>
+          <a:p>
+            <a:pPr algn="ctr"/>
+            <a:r>
+              <a:rPr lang="en-US" sz="2400" b="1" dirty="0" smtClean="0">
+                <a:latin typeface="Calibri" pitchFamily="34" charset="0"/>
+                <a:cs typeface="Calibri" pitchFamily="34" charset="0"/>
+              </a:rPr>
+              <a:t>Solving real world problem</a:t>
+            </a:r>
+            <a:endParaRPr lang="vi-VN" sz="2400" b="1" dirty="0">
+              <a:latin typeface="Calibri" pitchFamily="34" charset="0"/>
+              <a:cs typeface="Calibri" pitchFamily="34" charset="0"/>
+            </a:endParaRPr>
+          </a:p>
+        </p:txBody>
+      </p:sp>
     </p:spTree>
   </p:cSld>
   <p:clrMapOvr>
     <a:masterClrMapping/>
   </p:clrMapOvr>
+  <p:timing>
+    <p:tnLst>
+      <p:par>
+        <p:cTn id="1" dur="indefinite" restart="never" nodeType="tmRoot"/>
+      </p:par>
+    </p:tnLst>
+  </p:timing>
 </p:sld>
 </file>
 
@@ -14880,32 +17282,6 @@
           <a:chExt cx="0" cy="0"/>
         </a:xfrm>
       </p:grpSpPr>
-      <p:pic>
-        <p:nvPicPr>
-          <p:cNvPr id="116738" name="Picture 2" descr="https://media.licdn.com/mpr/mpr/shrinknp_400_400/p/8/005/06e/2c4/3ea6fad.jpg"/>
-          <p:cNvPicPr>
-            <a:picLocks noChangeAspect="1" noChangeArrowheads="1"/>
-          </p:cNvPicPr>
-          <p:nvPr/>
-        </p:nvPicPr>
-        <p:blipFill>
-          <a:blip r:embed="rId2" cstate="print"/>
-          <a:srcRect/>
-          <a:stretch>
-            <a:fillRect/>
-          </a:stretch>
-        </p:blipFill>
-        <p:spPr bwMode="auto">
-          <a:xfrm>
-            <a:off x="4939051" y="1849438"/>
-            <a:ext cx="1905000" cy="1905000"/>
-          </a:xfrm>
-          <a:prstGeom prst="rect">
-            <a:avLst/>
-          </a:prstGeom>
-          <a:noFill/>
-        </p:spPr>
-      </p:pic>
       <p:sp>
         <p:nvSpPr>
           <p:cNvPr id="2" name="Title 1"/>
@@ -14923,213 +17299,44 @@
           <a:p>
             <a:r>
               <a:rPr lang="en-US" dirty="0" smtClean="0"/>
-              <a:t>How Will the Solution Work?</a:t>
+              <a:t>Team Project Idea Selection</a:t>
             </a:r>
             <a:endParaRPr lang="en-US" dirty="0"/>
-          </a:p>
-        </p:txBody>
-      </p:sp>
-      <p:pic>
-        <p:nvPicPr>
-          <p:cNvPr id="4098" name="Picture 2"/>
-          <p:cNvPicPr>
-            <a:picLocks noChangeAspect="1" noChangeArrowheads="1"/>
-          </p:cNvPicPr>
-          <p:nvPr/>
-        </p:nvPicPr>
-        <p:blipFill>
-          <a:blip r:embed="rId3" cstate="print"/>
-          <a:srcRect/>
-          <a:stretch>
-            <a:fillRect/>
-          </a:stretch>
-        </p:blipFill>
-        <p:spPr bwMode="auto">
-          <a:xfrm>
-            <a:off x="671851" y="2752725"/>
-            <a:ext cx="3181350" cy="3419475"/>
-          </a:xfrm>
-          <a:prstGeom prst="rect">
-            <a:avLst/>
-          </a:prstGeom>
-          <a:noFill/>
-          <a:ln w="9525">
-            <a:noFill/>
-            <a:miter lim="800000"/>
-            <a:headEnd/>
-            <a:tailEnd/>
-          </a:ln>
-          <a:effectLst/>
-        </p:spPr>
-      </p:pic>
-      <p:pic>
-        <p:nvPicPr>
-          <p:cNvPr id="4" name="Picture 4"/>
-          <p:cNvPicPr>
-            <a:picLocks noChangeAspect="1" noChangeArrowheads="1"/>
-          </p:cNvPicPr>
-          <p:nvPr/>
-        </p:nvPicPr>
-        <p:blipFill>
-          <a:blip r:embed="rId4" cstate="print"/>
-          <a:srcRect/>
-          <a:stretch>
-            <a:fillRect/>
-          </a:stretch>
-        </p:blipFill>
-        <p:spPr bwMode="auto">
-          <a:xfrm>
-            <a:off x="3948451" y="3906838"/>
-            <a:ext cx="1333500" cy="1314450"/>
-          </a:xfrm>
-          <a:prstGeom prst="rect">
-            <a:avLst/>
-          </a:prstGeom>
-          <a:noFill/>
-          <a:ln w="9525">
-            <a:noFill/>
-            <a:miter lim="800000"/>
-            <a:headEnd/>
-            <a:tailEnd/>
-          </a:ln>
-        </p:spPr>
-      </p:pic>
-      <p:cxnSp>
-        <p:nvCxnSpPr>
-          <p:cNvPr id="12" name="Straight Arrow Connector 11"/>
-          <p:cNvCxnSpPr/>
-          <p:nvPr/>
-        </p:nvCxnSpPr>
-        <p:spPr>
-          <a:xfrm flipV="1">
-            <a:off x="3262651" y="3133725"/>
-            <a:ext cx="1828800" cy="609600"/>
-          </a:xfrm>
-          <a:prstGeom prst="straightConnector1">
-            <a:avLst/>
-          </a:prstGeom>
-          <a:ln>
-            <a:tailEnd type="arrow"/>
-          </a:ln>
-        </p:spPr>
-        <p:style>
-          <a:lnRef idx="3">
-            <a:schemeClr val="accent2"/>
-          </a:lnRef>
-          <a:fillRef idx="0">
-            <a:schemeClr val="accent2"/>
-          </a:fillRef>
-          <a:effectRef idx="2">
-            <a:schemeClr val="accent2"/>
-          </a:effectRef>
-          <a:fontRef idx="minor">
-            <a:schemeClr val="tx1"/>
-          </a:fontRef>
-        </p:style>
-      </p:cxnSp>
-      <p:sp>
-        <p:nvSpPr>
-          <p:cNvPr id="21" name="Rectangle 20"/>
-          <p:cNvSpPr/>
-          <p:nvPr/>
-        </p:nvSpPr>
-        <p:spPr>
-          <a:xfrm>
-            <a:off x="6767851" y="2828925"/>
-            <a:ext cx="1842749" cy="584775"/>
-          </a:xfrm>
-          <a:prstGeom prst="rect">
-            <a:avLst/>
-          </a:prstGeom>
-        </p:spPr>
-        <p:txBody>
-          <a:bodyPr wrap="none">
-            <a:spAutoFit/>
-          </a:bodyPr>
-          <a:lstStyle/>
-          <a:p>
-            <a:pPr marL="514350" indent="-514350"/>
-            <a:r>
-              <a:rPr lang="en-US" sz="3200" dirty="0" smtClean="0">
-                <a:latin typeface="+mj-lt"/>
-              </a:rPr>
-              <a:t>Prototype</a:t>
-            </a:r>
-            <a:endParaRPr lang="en-US" sz="3200" u="sng" dirty="0" smtClean="0">
-              <a:latin typeface="+mj-lt"/>
-            </a:endParaRPr>
           </a:p>
         </p:txBody>
       </p:sp>
       <p:sp>
         <p:nvSpPr>
-          <p:cNvPr id="14" name="Rectangle 13"/>
-          <p:cNvSpPr/>
-          <p:nvPr/>
+          <p:cNvPr id="3" name="Content Placeholder 2"/>
+          <p:cNvSpPr>
+            <a:spLocks noGrp="1"/>
+          </p:cNvSpPr>
+          <p:nvPr>
+            <p:ph idx="1"/>
+          </p:nvPr>
         </p:nvSpPr>
-        <p:spPr>
-          <a:xfrm>
-            <a:off x="762000" y="1676400"/>
-            <a:ext cx="4038600" cy="1107996"/>
-          </a:xfrm>
-          <a:prstGeom prst="rect">
-            <a:avLst/>
-          </a:prstGeom>
-        </p:spPr>
-        <p:style>
-          <a:lnRef idx="2">
-            <a:schemeClr val="dk1"/>
-          </a:lnRef>
-          <a:fillRef idx="1">
-            <a:schemeClr val="lt1"/>
-          </a:fillRef>
-          <a:effectRef idx="0">
-            <a:schemeClr val="dk1"/>
-          </a:effectRef>
-          <a:fontRef idx="minor">
-            <a:schemeClr val="dk1"/>
-          </a:fontRef>
-        </p:style>
+        <p:spPr/>
         <p:txBody>
-          <a:bodyPr wrap="square">
-            <a:spAutoFit/>
-          </a:bodyPr>
+          <a:bodyPr/>
           <a:lstStyle/>
           <a:p>
-            <a:pPr algn="ctr"/>
-            <a:r>
-              <a:rPr lang="en-US" sz="2200" dirty="0" smtClean="0">
-                <a:solidFill>
-                  <a:schemeClr val="tx1"/>
-                </a:solidFill>
-                <a:latin typeface="+mj-lt"/>
-              </a:rPr>
-              <a:t>Refer to the </a:t>
-            </a:r>
-            <a:r>
-              <a:rPr lang="en-US" sz="2200" b="1" dirty="0" smtClean="0">
-                <a:solidFill>
-                  <a:schemeClr val="tx1"/>
-                </a:solidFill>
-                <a:latin typeface="+mj-lt"/>
-              </a:rPr>
-              <a:t>Designing the User Interface</a:t>
-            </a:r>
-            <a:r>
-              <a:rPr lang="en-US" sz="2200" dirty="0" smtClean="0">
-                <a:solidFill>
-                  <a:schemeClr val="tx1"/>
-                </a:solidFill>
-                <a:latin typeface="+mj-lt"/>
-              </a:rPr>
-              <a:t> course for more information.</a:t>
-            </a:r>
-            <a:endParaRPr lang="en-US" sz="2200" dirty="0">
-              <a:solidFill>
-                <a:schemeClr val="tx1"/>
-              </a:solidFill>
-              <a:latin typeface="+mj-lt"/>
-            </a:endParaRPr>
+            <a:r>
+              <a:rPr lang="en-US" dirty="0" smtClean="0"/>
+              <a:t>Sponsor? Budget? Problems? Business Use Cases? </a:t>
+            </a:r>
+            <a:r>
+              <a:rPr lang="en-US" dirty="0" smtClean="0"/>
+              <a:t>Problem </a:t>
+            </a:r>
+            <a:r>
+              <a:rPr lang="en-US" dirty="0" smtClean="0"/>
+              <a:t>Relevance (Competitors, Related Word</a:t>
+            </a:r>
+            <a:r>
+              <a:rPr lang="en-US" smtClean="0"/>
+              <a:t>, Evaluation)?</a:t>
+            </a:r>
+            <a:endParaRPr lang="en-US" dirty="0"/>
           </a:p>
         </p:txBody>
       </p:sp>
@@ -15138,13 +17345,6 @@
   <p:clrMapOvr>
     <a:masterClrMapping/>
   </p:clrMapOvr>
-  <p:timing>
-    <p:tnLst>
-      <p:par>
-        <p:cTn id="1" dur="indefinite" restart="never" nodeType="tmRoot"/>
-      </p:par>
-    </p:tnLst>
-  </p:timing>
 </p:sld>
 </file>
 

--- a/Software Project Management/03. Software Project Initiation.pptx
+++ b/Software Project Management/03. Software Project Initiation.pptx
@@ -2707,731 +2707,6 @@
       <dsp:cNvGrpSpPr/>
     </dsp:nvGrpSpPr>
     <dsp:grpSpPr/>
-    <dsp:sp modelId="{56CABD1B-944E-49F7-866A-C6598132C0E2}">
-      <dsp:nvSpPr>
-        <dsp:cNvPr id="0" name=""/>
-        <dsp:cNvSpPr/>
-      </dsp:nvSpPr>
-      <dsp:spPr>
-        <a:xfrm>
-          <a:off x="0" y="324839"/>
-          <a:ext cx="4572000" cy="327600"/>
-        </a:xfrm>
-        <a:prstGeom prst="rect">
-          <a:avLst/>
-        </a:prstGeom>
-        <a:solidFill>
-          <a:schemeClr val="lt1">
-            <a:alpha val="90000"/>
-            <a:hueOff val="0"/>
-            <a:satOff val="0"/>
-            <a:lumOff val="0"/>
-            <a:alphaOff val="0"/>
-          </a:schemeClr>
-        </a:solidFill>
-        <a:ln w="25400" cap="flat" cmpd="sng" algn="ctr">
-          <a:solidFill>
-            <a:schemeClr val="accent1">
-              <a:hueOff val="0"/>
-              <a:satOff val="0"/>
-              <a:lumOff val="0"/>
-              <a:alphaOff val="0"/>
-            </a:schemeClr>
-          </a:solidFill>
-          <a:prstDash val="solid"/>
-        </a:ln>
-        <a:effectLst/>
-      </dsp:spPr>
-      <dsp:style>
-        <a:lnRef idx="2">
-          <a:scrgbClr r="0" g="0" b="0"/>
-        </a:lnRef>
-        <a:fillRef idx="1">
-          <a:scrgbClr r="0" g="0" b="0"/>
-        </a:fillRef>
-        <a:effectRef idx="0">
-          <a:scrgbClr r="0" g="0" b="0"/>
-        </a:effectRef>
-        <a:fontRef idx="minor"/>
-      </dsp:style>
-    </dsp:sp>
-    <dsp:sp modelId="{4F622BEB-62C0-41FB-AA25-3807F8F602A7}">
-      <dsp:nvSpPr>
-        <dsp:cNvPr id="0" name=""/>
-        <dsp:cNvSpPr/>
-      </dsp:nvSpPr>
-      <dsp:spPr>
-        <a:xfrm>
-          <a:off x="228600" y="132959"/>
-          <a:ext cx="3200400" cy="383760"/>
-        </a:xfrm>
-        <a:prstGeom prst="roundRect">
-          <a:avLst/>
-        </a:prstGeom>
-        <a:solidFill>
-          <a:schemeClr val="accent1">
-            <a:hueOff val="0"/>
-            <a:satOff val="0"/>
-            <a:lumOff val="0"/>
-            <a:alphaOff val="0"/>
-          </a:schemeClr>
-        </a:solidFill>
-        <a:ln w="25400" cap="flat" cmpd="sng" algn="ctr">
-          <a:solidFill>
-            <a:schemeClr val="lt1">
-              <a:hueOff val="0"/>
-              <a:satOff val="0"/>
-              <a:lumOff val="0"/>
-              <a:alphaOff val="0"/>
-            </a:schemeClr>
-          </a:solidFill>
-          <a:prstDash val="solid"/>
-        </a:ln>
-        <a:effectLst/>
-      </dsp:spPr>
-      <dsp:style>
-        <a:lnRef idx="2">
-          <a:scrgbClr r="0" g="0" b="0"/>
-        </a:lnRef>
-        <a:fillRef idx="1">
-          <a:scrgbClr r="0" g="0" b="0"/>
-        </a:fillRef>
-        <a:effectRef idx="0">
-          <a:scrgbClr r="0" g="0" b="0"/>
-        </a:effectRef>
-        <a:fontRef idx="minor">
-          <a:schemeClr val="lt1"/>
-        </a:fontRef>
-      </dsp:style>
-      <dsp:txBody>
-        <a:bodyPr spcFirstLastPara="0" vert="horz" wrap="square" lIns="120968" tIns="0" rIns="120968" bIns="0" numCol="1" spcCol="1270" anchor="ctr" anchorCtr="0">
-          <a:noAutofit/>
-        </a:bodyPr>
-        <a:lstStyle/>
-        <a:p>
-          <a:pPr lvl="0" algn="l" defTabSz="977900">
-            <a:lnSpc>
-              <a:spcPct val="90000"/>
-            </a:lnSpc>
-            <a:spcBef>
-              <a:spcPct val="0"/>
-            </a:spcBef>
-            <a:spcAft>
-              <a:spcPct val="35000"/>
-            </a:spcAft>
-          </a:pPr>
-          <a:r>
-            <a:rPr lang="en-US" sz="2200" kern="1200" dirty="0" smtClean="0"/>
-            <a:t>Purpose</a:t>
-          </a:r>
-          <a:endParaRPr lang="en-US" sz="2200" kern="1200" dirty="0"/>
-        </a:p>
-      </dsp:txBody>
-      <dsp:txXfrm>
-        <a:off x="228600" y="132959"/>
-        <a:ext cx="3200400" cy="383760"/>
-      </dsp:txXfrm>
-    </dsp:sp>
-    <dsp:sp modelId="{8B5298D1-CF53-49BC-9023-0EE6E258E573}">
-      <dsp:nvSpPr>
-        <dsp:cNvPr id="0" name=""/>
-        <dsp:cNvSpPr/>
-      </dsp:nvSpPr>
-      <dsp:spPr>
-        <a:xfrm>
-          <a:off x="0" y="914519"/>
-          <a:ext cx="4572000" cy="327600"/>
-        </a:xfrm>
-        <a:prstGeom prst="rect">
-          <a:avLst/>
-        </a:prstGeom>
-        <a:solidFill>
-          <a:schemeClr val="lt1">
-            <a:alpha val="90000"/>
-            <a:hueOff val="0"/>
-            <a:satOff val="0"/>
-            <a:lumOff val="0"/>
-            <a:alphaOff val="0"/>
-          </a:schemeClr>
-        </a:solidFill>
-        <a:ln w="25400" cap="flat" cmpd="sng" algn="ctr">
-          <a:solidFill>
-            <a:schemeClr val="accent1">
-              <a:hueOff val="0"/>
-              <a:satOff val="0"/>
-              <a:lumOff val="0"/>
-              <a:alphaOff val="0"/>
-            </a:schemeClr>
-          </a:solidFill>
-          <a:prstDash val="solid"/>
-        </a:ln>
-        <a:effectLst/>
-      </dsp:spPr>
-      <dsp:style>
-        <a:lnRef idx="2">
-          <a:scrgbClr r="0" g="0" b="0"/>
-        </a:lnRef>
-        <a:fillRef idx="1">
-          <a:scrgbClr r="0" g="0" b="0"/>
-        </a:fillRef>
-        <a:effectRef idx="0">
-          <a:scrgbClr r="0" g="0" b="0"/>
-        </a:effectRef>
-        <a:fontRef idx="minor"/>
-      </dsp:style>
-    </dsp:sp>
-    <dsp:sp modelId="{0ABD91B7-67D8-4835-9472-249FD879718E}">
-      <dsp:nvSpPr>
-        <dsp:cNvPr id="0" name=""/>
-        <dsp:cNvSpPr/>
-      </dsp:nvSpPr>
-      <dsp:spPr>
-        <a:xfrm>
-          <a:off x="228600" y="722639"/>
-          <a:ext cx="3200400" cy="383760"/>
-        </a:xfrm>
-        <a:prstGeom prst="roundRect">
-          <a:avLst/>
-        </a:prstGeom>
-        <a:solidFill>
-          <a:schemeClr val="accent2"/>
-        </a:solidFill>
-        <a:ln w="25400" cap="flat" cmpd="sng" algn="ctr">
-          <a:solidFill>
-            <a:schemeClr val="lt1">
-              <a:hueOff val="0"/>
-              <a:satOff val="0"/>
-              <a:lumOff val="0"/>
-              <a:alphaOff val="0"/>
-            </a:schemeClr>
-          </a:solidFill>
-          <a:prstDash val="solid"/>
-        </a:ln>
-        <a:effectLst/>
-      </dsp:spPr>
-      <dsp:style>
-        <a:lnRef idx="2">
-          <a:scrgbClr r="0" g="0" b="0"/>
-        </a:lnRef>
-        <a:fillRef idx="1">
-          <a:scrgbClr r="0" g="0" b="0"/>
-        </a:fillRef>
-        <a:effectRef idx="0">
-          <a:scrgbClr r="0" g="0" b="0"/>
-        </a:effectRef>
-        <a:fontRef idx="minor">
-          <a:schemeClr val="lt1"/>
-        </a:fontRef>
-      </dsp:style>
-      <dsp:txBody>
-        <a:bodyPr spcFirstLastPara="0" vert="horz" wrap="square" lIns="120968" tIns="0" rIns="120968" bIns="0" numCol="1" spcCol="1270" anchor="ctr" anchorCtr="0">
-          <a:noAutofit/>
-        </a:bodyPr>
-        <a:lstStyle/>
-        <a:p>
-          <a:pPr lvl="0" algn="l" defTabSz="977900">
-            <a:lnSpc>
-              <a:spcPct val="90000"/>
-            </a:lnSpc>
-            <a:spcBef>
-              <a:spcPct val="0"/>
-            </a:spcBef>
-            <a:spcAft>
-              <a:spcPct val="35000"/>
-            </a:spcAft>
-          </a:pPr>
-          <a:r>
-            <a:rPr lang="en-US" sz="2200" kern="1200" dirty="0" smtClean="0"/>
-            <a:t>Reason</a:t>
-          </a:r>
-          <a:endParaRPr lang="en-US" sz="2200" kern="1200" dirty="0"/>
-        </a:p>
-      </dsp:txBody>
-      <dsp:txXfrm>
-        <a:off x="228600" y="722639"/>
-        <a:ext cx="3200400" cy="383760"/>
-      </dsp:txXfrm>
-    </dsp:sp>
-    <dsp:sp modelId="{8011D070-568F-4A84-BD56-7ABA35D47A61}">
-      <dsp:nvSpPr>
-        <dsp:cNvPr id="0" name=""/>
-        <dsp:cNvSpPr/>
-      </dsp:nvSpPr>
-      <dsp:spPr>
-        <a:xfrm>
-          <a:off x="0" y="1504200"/>
-          <a:ext cx="4572000" cy="327600"/>
-        </a:xfrm>
-        <a:prstGeom prst="rect">
-          <a:avLst/>
-        </a:prstGeom>
-        <a:solidFill>
-          <a:schemeClr val="lt1">
-            <a:alpha val="90000"/>
-            <a:hueOff val="0"/>
-            <a:satOff val="0"/>
-            <a:lumOff val="0"/>
-            <a:alphaOff val="0"/>
-          </a:schemeClr>
-        </a:solidFill>
-        <a:ln w="25400" cap="flat" cmpd="sng" algn="ctr">
-          <a:solidFill>
-            <a:schemeClr val="accent1">
-              <a:hueOff val="0"/>
-              <a:satOff val="0"/>
-              <a:lumOff val="0"/>
-              <a:alphaOff val="0"/>
-            </a:schemeClr>
-          </a:solidFill>
-          <a:prstDash val="solid"/>
-        </a:ln>
-        <a:effectLst/>
-      </dsp:spPr>
-      <dsp:style>
-        <a:lnRef idx="2">
-          <a:scrgbClr r="0" g="0" b="0"/>
-        </a:lnRef>
-        <a:fillRef idx="1">
-          <a:scrgbClr r="0" g="0" b="0"/>
-        </a:fillRef>
-        <a:effectRef idx="0">
-          <a:scrgbClr r="0" g="0" b="0"/>
-        </a:effectRef>
-        <a:fontRef idx="minor"/>
-      </dsp:style>
-    </dsp:sp>
-    <dsp:sp modelId="{AD646C37-0DDC-40B6-BFF6-68C35C41D431}">
-      <dsp:nvSpPr>
-        <dsp:cNvPr id="0" name=""/>
-        <dsp:cNvSpPr/>
-      </dsp:nvSpPr>
-      <dsp:spPr>
-        <a:xfrm>
-          <a:off x="228600" y="1312320"/>
-          <a:ext cx="3200400" cy="383760"/>
-        </a:xfrm>
-        <a:prstGeom prst="roundRect">
-          <a:avLst/>
-        </a:prstGeom>
-        <a:solidFill>
-          <a:schemeClr val="accent3"/>
-        </a:solidFill>
-        <a:ln w="25400" cap="flat" cmpd="sng" algn="ctr">
-          <a:solidFill>
-            <a:schemeClr val="lt1">
-              <a:hueOff val="0"/>
-              <a:satOff val="0"/>
-              <a:lumOff val="0"/>
-              <a:alphaOff val="0"/>
-            </a:schemeClr>
-          </a:solidFill>
-          <a:prstDash val="solid"/>
-        </a:ln>
-        <a:effectLst/>
-      </dsp:spPr>
-      <dsp:style>
-        <a:lnRef idx="2">
-          <a:scrgbClr r="0" g="0" b="0"/>
-        </a:lnRef>
-        <a:fillRef idx="1">
-          <a:scrgbClr r="0" g="0" b="0"/>
-        </a:fillRef>
-        <a:effectRef idx="0">
-          <a:scrgbClr r="0" g="0" b="0"/>
-        </a:effectRef>
-        <a:fontRef idx="minor">
-          <a:schemeClr val="lt1"/>
-        </a:fontRef>
-      </dsp:style>
-      <dsp:txBody>
-        <a:bodyPr spcFirstLastPara="0" vert="horz" wrap="square" lIns="120968" tIns="0" rIns="120968" bIns="0" numCol="1" spcCol="1270" anchor="ctr" anchorCtr="0">
-          <a:noAutofit/>
-        </a:bodyPr>
-        <a:lstStyle/>
-        <a:p>
-          <a:pPr lvl="0" algn="l" defTabSz="977900">
-            <a:lnSpc>
-              <a:spcPct val="90000"/>
-            </a:lnSpc>
-            <a:spcBef>
-              <a:spcPct val="0"/>
-            </a:spcBef>
-            <a:spcAft>
-              <a:spcPct val="35000"/>
-            </a:spcAft>
-          </a:pPr>
-          <a:r>
-            <a:rPr lang="en-US" sz="2200" kern="1200" dirty="0" smtClean="0"/>
-            <a:t>Background information</a:t>
-          </a:r>
-          <a:endParaRPr lang="en-US" sz="2200" kern="1200" dirty="0"/>
-        </a:p>
-      </dsp:txBody>
-      <dsp:txXfrm>
-        <a:off x="228600" y="1312320"/>
-        <a:ext cx="3200400" cy="383760"/>
-      </dsp:txXfrm>
-    </dsp:sp>
-    <dsp:sp modelId="{2CC94E98-C2BC-40BA-BA2C-53E02A202477}">
-      <dsp:nvSpPr>
-        <dsp:cNvPr id="0" name=""/>
-        <dsp:cNvSpPr/>
-      </dsp:nvSpPr>
-      <dsp:spPr>
-        <a:xfrm>
-          <a:off x="0" y="2093880"/>
-          <a:ext cx="4572000" cy="327600"/>
-        </a:xfrm>
-        <a:prstGeom prst="rect">
-          <a:avLst/>
-        </a:prstGeom>
-        <a:solidFill>
-          <a:schemeClr val="lt1">
-            <a:alpha val="90000"/>
-            <a:hueOff val="0"/>
-            <a:satOff val="0"/>
-            <a:lumOff val="0"/>
-            <a:alphaOff val="0"/>
-          </a:schemeClr>
-        </a:solidFill>
-        <a:ln w="25400" cap="flat" cmpd="sng" algn="ctr">
-          <a:solidFill>
-            <a:schemeClr val="accent1">
-              <a:hueOff val="0"/>
-              <a:satOff val="0"/>
-              <a:lumOff val="0"/>
-              <a:alphaOff val="0"/>
-            </a:schemeClr>
-          </a:solidFill>
-          <a:prstDash val="solid"/>
-        </a:ln>
-        <a:effectLst/>
-      </dsp:spPr>
-      <dsp:style>
-        <a:lnRef idx="2">
-          <a:scrgbClr r="0" g="0" b="0"/>
-        </a:lnRef>
-        <a:fillRef idx="1">
-          <a:scrgbClr r="0" g="0" b="0"/>
-        </a:fillRef>
-        <a:effectRef idx="0">
-          <a:scrgbClr r="0" g="0" b="0"/>
-        </a:effectRef>
-        <a:fontRef idx="minor"/>
-      </dsp:style>
-    </dsp:sp>
-    <dsp:sp modelId="{90065A47-6053-496C-B292-B863C5F1C893}">
-      <dsp:nvSpPr>
-        <dsp:cNvPr id="0" name=""/>
-        <dsp:cNvSpPr/>
-      </dsp:nvSpPr>
-      <dsp:spPr>
-        <a:xfrm>
-          <a:off x="273133" y="1902000"/>
-          <a:ext cx="3200400" cy="383760"/>
-        </a:xfrm>
-        <a:prstGeom prst="roundRect">
-          <a:avLst/>
-        </a:prstGeom>
-        <a:solidFill>
-          <a:schemeClr val="accent4"/>
-        </a:solidFill>
-        <a:ln w="25400" cap="flat" cmpd="sng" algn="ctr">
-          <a:solidFill>
-            <a:schemeClr val="lt1">
-              <a:hueOff val="0"/>
-              <a:satOff val="0"/>
-              <a:lumOff val="0"/>
-              <a:alphaOff val="0"/>
-            </a:schemeClr>
-          </a:solidFill>
-          <a:prstDash val="solid"/>
-        </a:ln>
-        <a:effectLst/>
-      </dsp:spPr>
-      <dsp:style>
-        <a:lnRef idx="2">
-          <a:scrgbClr r="0" g="0" b="0"/>
-        </a:lnRef>
-        <a:fillRef idx="1">
-          <a:scrgbClr r="0" g="0" b="0"/>
-        </a:fillRef>
-        <a:effectRef idx="0">
-          <a:scrgbClr r="0" g="0" b="0"/>
-        </a:effectRef>
-        <a:fontRef idx="minor">
-          <a:schemeClr val="lt1"/>
-        </a:fontRef>
-      </dsp:style>
-      <dsp:txBody>
-        <a:bodyPr spcFirstLastPara="0" vert="horz" wrap="square" lIns="120968" tIns="0" rIns="120968" bIns="0" numCol="1" spcCol="1270" anchor="ctr" anchorCtr="0">
-          <a:noAutofit/>
-        </a:bodyPr>
-        <a:lstStyle/>
-        <a:p>
-          <a:pPr lvl="0" algn="l" defTabSz="977900">
-            <a:lnSpc>
-              <a:spcPct val="90000"/>
-            </a:lnSpc>
-            <a:spcBef>
-              <a:spcPct val="0"/>
-            </a:spcBef>
-            <a:spcAft>
-              <a:spcPct val="35000"/>
-            </a:spcAft>
-          </a:pPr>
-          <a:r>
-            <a:rPr lang="en-US" sz="2200" kern="1200" dirty="0" smtClean="0"/>
-            <a:t>The evaluation criteria</a:t>
-          </a:r>
-          <a:endParaRPr lang="en-US" sz="2200" kern="1200" dirty="0"/>
-        </a:p>
-      </dsp:txBody>
-      <dsp:txXfrm>
-        <a:off x="273133" y="1902000"/>
-        <a:ext cx="3200400" cy="383760"/>
-      </dsp:txXfrm>
-    </dsp:sp>
-    <dsp:sp modelId="{10C80C59-D601-4AD4-9AE0-F459A2AD1F9A}">
-      <dsp:nvSpPr>
-        <dsp:cNvPr id="0" name=""/>
-        <dsp:cNvSpPr/>
-      </dsp:nvSpPr>
-      <dsp:spPr>
-        <a:xfrm>
-          <a:off x="0" y="2683560"/>
-          <a:ext cx="4572000" cy="327600"/>
-        </a:xfrm>
-        <a:prstGeom prst="rect">
-          <a:avLst/>
-        </a:prstGeom>
-        <a:solidFill>
-          <a:schemeClr val="lt1">
-            <a:alpha val="90000"/>
-            <a:hueOff val="0"/>
-            <a:satOff val="0"/>
-            <a:lumOff val="0"/>
-            <a:alphaOff val="0"/>
-          </a:schemeClr>
-        </a:solidFill>
-        <a:ln w="25400" cap="flat" cmpd="sng" algn="ctr">
-          <a:solidFill>
-            <a:schemeClr val="accent1">
-              <a:hueOff val="0"/>
-              <a:satOff val="0"/>
-              <a:lumOff val="0"/>
-              <a:alphaOff val="0"/>
-            </a:schemeClr>
-          </a:solidFill>
-          <a:prstDash val="solid"/>
-        </a:ln>
-        <a:effectLst/>
-      </dsp:spPr>
-      <dsp:style>
-        <a:lnRef idx="2">
-          <a:scrgbClr r="0" g="0" b="0"/>
-        </a:lnRef>
-        <a:fillRef idx="1">
-          <a:scrgbClr r="0" g="0" b="0"/>
-        </a:fillRef>
-        <a:effectRef idx="0">
-          <a:scrgbClr r="0" g="0" b="0"/>
-        </a:effectRef>
-        <a:fontRef idx="minor"/>
-      </dsp:style>
-    </dsp:sp>
-    <dsp:sp modelId="{1F9781A0-24EF-4D22-863B-387A9EB35B5D}">
-      <dsp:nvSpPr>
-        <dsp:cNvPr id="0" name=""/>
-        <dsp:cNvSpPr/>
-      </dsp:nvSpPr>
-      <dsp:spPr>
-        <a:xfrm>
-          <a:off x="273133" y="2491680"/>
-          <a:ext cx="3200400" cy="383760"/>
-        </a:xfrm>
-        <a:prstGeom prst="roundRect">
-          <a:avLst/>
-        </a:prstGeom>
-        <a:solidFill>
-          <a:schemeClr val="accent5"/>
-        </a:solidFill>
-        <a:ln w="25400" cap="flat" cmpd="sng" algn="ctr">
-          <a:solidFill>
-            <a:schemeClr val="lt1">
-              <a:hueOff val="0"/>
-              <a:satOff val="0"/>
-              <a:lumOff val="0"/>
-              <a:alphaOff val="0"/>
-            </a:schemeClr>
-          </a:solidFill>
-          <a:prstDash val="solid"/>
-        </a:ln>
-        <a:effectLst/>
-      </dsp:spPr>
-      <dsp:style>
-        <a:lnRef idx="2">
-          <a:scrgbClr r="0" g="0" b="0"/>
-        </a:lnRef>
-        <a:fillRef idx="1">
-          <a:scrgbClr r="0" g="0" b="0"/>
-        </a:fillRef>
-        <a:effectRef idx="0">
-          <a:scrgbClr r="0" g="0" b="0"/>
-        </a:effectRef>
-        <a:fontRef idx="minor">
-          <a:schemeClr val="lt1"/>
-        </a:fontRef>
-      </dsp:style>
-      <dsp:txBody>
-        <a:bodyPr spcFirstLastPara="0" vert="horz" wrap="square" lIns="120968" tIns="0" rIns="120968" bIns="0" numCol="1" spcCol="1270" anchor="ctr" anchorCtr="0">
-          <a:noAutofit/>
-        </a:bodyPr>
-        <a:lstStyle/>
-        <a:p>
-          <a:pPr lvl="0" algn="l" defTabSz="977900">
-            <a:lnSpc>
-              <a:spcPct val="90000"/>
-            </a:lnSpc>
-            <a:spcBef>
-              <a:spcPct val="0"/>
-            </a:spcBef>
-            <a:spcAft>
-              <a:spcPct val="35000"/>
-            </a:spcAft>
-          </a:pPr>
-          <a:r>
-            <a:rPr lang="en-US" sz="2200" kern="1200" dirty="0" smtClean="0"/>
-            <a:t>The study findings</a:t>
-          </a:r>
-          <a:endParaRPr lang="en-US" sz="2200" kern="1200" dirty="0"/>
-        </a:p>
-      </dsp:txBody>
-      <dsp:txXfrm>
-        <a:off x="273133" y="2491680"/>
-        <a:ext cx="3200400" cy="383760"/>
-      </dsp:txXfrm>
-    </dsp:sp>
-    <dsp:sp modelId="{ECAED0D9-0A7B-453D-970D-A96E8C7059E3}">
-      <dsp:nvSpPr>
-        <dsp:cNvPr id="0" name=""/>
-        <dsp:cNvSpPr/>
-      </dsp:nvSpPr>
-      <dsp:spPr>
-        <a:xfrm>
-          <a:off x="0" y="3273240"/>
-          <a:ext cx="4572000" cy="327600"/>
-        </a:xfrm>
-        <a:prstGeom prst="rect">
-          <a:avLst/>
-        </a:prstGeom>
-        <a:solidFill>
-          <a:schemeClr val="lt1">
-            <a:alpha val="90000"/>
-            <a:hueOff val="0"/>
-            <a:satOff val="0"/>
-            <a:lumOff val="0"/>
-            <a:alphaOff val="0"/>
-          </a:schemeClr>
-        </a:solidFill>
-        <a:ln w="25400" cap="flat" cmpd="sng" algn="ctr">
-          <a:solidFill>
-            <a:schemeClr val="accent1">
-              <a:hueOff val="0"/>
-              <a:satOff val="0"/>
-              <a:lumOff val="0"/>
-              <a:alphaOff val="0"/>
-            </a:schemeClr>
-          </a:solidFill>
-          <a:prstDash val="solid"/>
-        </a:ln>
-        <a:effectLst/>
-      </dsp:spPr>
-      <dsp:style>
-        <a:lnRef idx="2">
-          <a:scrgbClr r="0" g="0" b="0"/>
-        </a:lnRef>
-        <a:fillRef idx="1">
-          <a:scrgbClr r="0" g="0" b="0"/>
-        </a:fillRef>
-        <a:effectRef idx="0">
-          <a:scrgbClr r="0" g="0" b="0"/>
-        </a:effectRef>
-        <a:fontRef idx="minor"/>
-      </dsp:style>
-    </dsp:sp>
-    <dsp:sp modelId="{D321BBAD-41C6-45AB-9362-3E65DEBF3BC5}">
-      <dsp:nvSpPr>
-        <dsp:cNvPr id="0" name=""/>
-        <dsp:cNvSpPr/>
-      </dsp:nvSpPr>
-      <dsp:spPr>
-        <a:xfrm>
-          <a:off x="273133" y="3081360"/>
-          <a:ext cx="3200400" cy="383760"/>
-        </a:xfrm>
-        <a:prstGeom prst="roundRect">
-          <a:avLst/>
-        </a:prstGeom>
-        <a:solidFill>
-          <a:schemeClr val="accent6"/>
-        </a:solidFill>
-        <a:ln w="25400" cap="flat" cmpd="sng" algn="ctr">
-          <a:solidFill>
-            <a:schemeClr val="lt1">
-              <a:hueOff val="0"/>
-              <a:satOff val="0"/>
-              <a:lumOff val="0"/>
-              <a:alphaOff val="0"/>
-            </a:schemeClr>
-          </a:solidFill>
-          <a:prstDash val="solid"/>
-        </a:ln>
-        <a:effectLst/>
-      </dsp:spPr>
-      <dsp:style>
-        <a:lnRef idx="2">
-          <a:scrgbClr r="0" g="0" b="0"/>
-        </a:lnRef>
-        <a:fillRef idx="1">
-          <a:scrgbClr r="0" g="0" b="0"/>
-        </a:fillRef>
-        <a:effectRef idx="0">
-          <a:scrgbClr r="0" g="0" b="0"/>
-        </a:effectRef>
-        <a:fontRef idx="minor">
-          <a:schemeClr val="lt1"/>
-        </a:fontRef>
-      </dsp:style>
-      <dsp:txBody>
-        <a:bodyPr spcFirstLastPara="0" vert="horz" wrap="square" lIns="120968" tIns="0" rIns="120968" bIns="0" numCol="1" spcCol="1270" anchor="ctr" anchorCtr="0">
-          <a:noAutofit/>
-        </a:bodyPr>
-        <a:lstStyle/>
-        <a:p>
-          <a:pPr lvl="0" algn="l" defTabSz="977900">
-            <a:lnSpc>
-              <a:spcPct val="90000"/>
-            </a:lnSpc>
-            <a:spcBef>
-              <a:spcPct val="0"/>
-            </a:spcBef>
-            <a:spcAft>
-              <a:spcPct val="35000"/>
-            </a:spcAft>
-          </a:pPr>
-          <a:r>
-            <a:rPr lang="en-US" sz="2200" kern="1200" dirty="0" smtClean="0"/>
-            <a:t>The recommendations</a:t>
-          </a:r>
-          <a:endParaRPr lang="en-US" sz="2200" kern="1200" dirty="0"/>
-        </a:p>
-      </dsp:txBody>
-      <dsp:txXfrm>
-        <a:off x="273133" y="3081360"/>
-        <a:ext cx="3200400" cy="383760"/>
-      </dsp:txXfrm>
-    </dsp:sp>
   </dsp:spTree>
 </dsp:drawing>
 </file>
@@ -3444,491 +2719,6 @@
       <dsp:cNvGrpSpPr/>
     </dsp:nvGrpSpPr>
     <dsp:grpSpPr/>
-    <dsp:sp modelId="{00169986-F2F3-4B85-8ED4-5DAA51E975C1}">
-      <dsp:nvSpPr>
-        <dsp:cNvPr id="0" name=""/>
-        <dsp:cNvSpPr/>
-      </dsp:nvSpPr>
-      <dsp:spPr>
-        <a:xfrm>
-          <a:off x="0" y="416400"/>
-          <a:ext cx="6172199" cy="630000"/>
-        </a:xfrm>
-        <a:prstGeom prst="rect">
-          <a:avLst/>
-        </a:prstGeom>
-        <a:solidFill>
-          <a:schemeClr val="lt1">
-            <a:alpha val="90000"/>
-            <a:hueOff val="0"/>
-            <a:satOff val="0"/>
-            <a:lumOff val="0"/>
-            <a:alphaOff val="0"/>
-          </a:schemeClr>
-        </a:solidFill>
-        <a:ln w="25400" cap="flat" cmpd="sng" algn="ctr">
-          <a:solidFill>
-            <a:schemeClr val="accent1">
-              <a:hueOff val="0"/>
-              <a:satOff val="0"/>
-              <a:lumOff val="0"/>
-              <a:alphaOff val="0"/>
-            </a:schemeClr>
-          </a:solidFill>
-          <a:prstDash val="solid"/>
-        </a:ln>
-        <a:effectLst/>
-      </dsp:spPr>
-      <dsp:style>
-        <a:lnRef idx="2">
-          <a:scrgbClr r="0" g="0" b="0"/>
-        </a:lnRef>
-        <a:fillRef idx="1">
-          <a:scrgbClr r="0" g="0" b="0"/>
-        </a:fillRef>
-        <a:effectRef idx="0">
-          <a:scrgbClr r="0" g="0" b="0"/>
-        </a:effectRef>
-        <a:fontRef idx="minor"/>
-      </dsp:style>
-    </dsp:sp>
-    <dsp:sp modelId="{DE21590D-5DE3-41E9-874A-72B6B165BD0F}">
-      <dsp:nvSpPr>
-        <dsp:cNvPr id="0" name=""/>
-        <dsp:cNvSpPr/>
-      </dsp:nvSpPr>
-      <dsp:spPr>
-        <a:xfrm>
-          <a:off x="368730" y="47400"/>
-          <a:ext cx="5425431" cy="738000"/>
-        </a:xfrm>
-        <a:prstGeom prst="roundRect">
-          <a:avLst/>
-        </a:prstGeom>
-        <a:solidFill>
-          <a:schemeClr val="accent1">
-            <a:hueOff val="0"/>
-            <a:satOff val="0"/>
-            <a:lumOff val="0"/>
-            <a:alphaOff val="0"/>
-          </a:schemeClr>
-        </a:solidFill>
-        <a:ln w="25400" cap="flat" cmpd="sng" algn="ctr">
-          <a:solidFill>
-            <a:schemeClr val="lt1">
-              <a:hueOff val="0"/>
-              <a:satOff val="0"/>
-              <a:lumOff val="0"/>
-              <a:alphaOff val="0"/>
-            </a:schemeClr>
-          </a:solidFill>
-          <a:prstDash val="solid"/>
-        </a:ln>
-        <a:effectLst/>
-      </dsp:spPr>
-      <dsp:style>
-        <a:lnRef idx="2">
-          <a:scrgbClr r="0" g="0" b="0"/>
-        </a:lnRef>
-        <a:fillRef idx="1">
-          <a:scrgbClr r="0" g="0" b="0"/>
-        </a:fillRef>
-        <a:effectRef idx="0">
-          <a:scrgbClr r="0" g="0" b="0"/>
-        </a:effectRef>
-        <a:fontRef idx="minor">
-          <a:schemeClr val="lt1"/>
-        </a:fontRef>
-      </dsp:style>
-      <dsp:txBody>
-        <a:bodyPr spcFirstLastPara="0" vert="horz" wrap="square" lIns="163306" tIns="0" rIns="163306" bIns="0" numCol="1" spcCol="1270" anchor="ctr" anchorCtr="0">
-          <a:noAutofit/>
-        </a:bodyPr>
-        <a:lstStyle/>
-        <a:p>
-          <a:pPr lvl="0" algn="l" defTabSz="977900">
-            <a:lnSpc>
-              <a:spcPct val="90000"/>
-            </a:lnSpc>
-            <a:spcBef>
-              <a:spcPct val="0"/>
-            </a:spcBef>
-            <a:spcAft>
-              <a:spcPct val="35000"/>
-            </a:spcAft>
-          </a:pPr>
-          <a:r>
-            <a:rPr lang="en-US" sz="2200" kern="1200" dirty="0" smtClean="0"/>
-            <a:t>Helps in analyzing requirements completely</a:t>
-          </a:r>
-          <a:endParaRPr lang="en-US" sz="2200" kern="1200" dirty="0"/>
-        </a:p>
-      </dsp:txBody>
-      <dsp:txXfrm>
-        <a:off x="368730" y="47400"/>
-        <a:ext cx="5425431" cy="738000"/>
-      </dsp:txXfrm>
-    </dsp:sp>
-    <dsp:sp modelId="{0ED62FB5-CD8C-4E35-9A42-1C6E2E6D9675}">
-      <dsp:nvSpPr>
-        <dsp:cNvPr id="0" name=""/>
-        <dsp:cNvSpPr/>
-      </dsp:nvSpPr>
-      <dsp:spPr>
-        <a:xfrm>
-          <a:off x="0" y="1550400"/>
-          <a:ext cx="6172199" cy="630000"/>
-        </a:xfrm>
-        <a:prstGeom prst="rect">
-          <a:avLst/>
-        </a:prstGeom>
-        <a:solidFill>
-          <a:schemeClr val="lt1">
-            <a:alpha val="90000"/>
-            <a:hueOff val="0"/>
-            <a:satOff val="0"/>
-            <a:lumOff val="0"/>
-            <a:alphaOff val="0"/>
-          </a:schemeClr>
-        </a:solidFill>
-        <a:ln w="25400" cap="flat" cmpd="sng" algn="ctr">
-          <a:solidFill>
-            <a:schemeClr val="accent1">
-              <a:hueOff val="0"/>
-              <a:satOff val="0"/>
-              <a:lumOff val="0"/>
-              <a:alphaOff val="0"/>
-            </a:schemeClr>
-          </a:solidFill>
-          <a:prstDash val="solid"/>
-        </a:ln>
-        <a:effectLst/>
-      </dsp:spPr>
-      <dsp:style>
-        <a:lnRef idx="2">
-          <a:scrgbClr r="0" g="0" b="0"/>
-        </a:lnRef>
-        <a:fillRef idx="1">
-          <a:scrgbClr r="0" g="0" b="0"/>
-        </a:fillRef>
-        <a:effectRef idx="0">
-          <a:scrgbClr r="0" g="0" b="0"/>
-        </a:effectRef>
-        <a:fontRef idx="minor"/>
-      </dsp:style>
-    </dsp:sp>
-    <dsp:sp modelId="{C264362E-209D-4D40-9D36-3FDCF2274E08}">
-      <dsp:nvSpPr>
-        <dsp:cNvPr id="0" name=""/>
-        <dsp:cNvSpPr/>
-      </dsp:nvSpPr>
-      <dsp:spPr>
-        <a:xfrm>
-          <a:off x="308610" y="1181400"/>
-          <a:ext cx="5425431" cy="738000"/>
-        </a:xfrm>
-        <a:prstGeom prst="roundRect">
-          <a:avLst/>
-        </a:prstGeom>
-        <a:solidFill>
-          <a:schemeClr val="accent2"/>
-        </a:solidFill>
-        <a:ln w="25400" cap="flat" cmpd="sng" algn="ctr">
-          <a:solidFill>
-            <a:schemeClr val="lt1">
-              <a:hueOff val="0"/>
-              <a:satOff val="0"/>
-              <a:lumOff val="0"/>
-              <a:alphaOff val="0"/>
-            </a:schemeClr>
-          </a:solidFill>
-          <a:prstDash val="solid"/>
-        </a:ln>
-        <a:effectLst/>
-      </dsp:spPr>
-      <dsp:style>
-        <a:lnRef idx="2">
-          <a:scrgbClr r="0" g="0" b="0"/>
-        </a:lnRef>
-        <a:fillRef idx="1">
-          <a:scrgbClr r="0" g="0" b="0"/>
-        </a:fillRef>
-        <a:effectRef idx="0">
-          <a:scrgbClr r="0" g="0" b="0"/>
-        </a:effectRef>
-        <a:fontRef idx="minor">
-          <a:schemeClr val="lt1"/>
-        </a:fontRef>
-      </dsp:style>
-      <dsp:txBody>
-        <a:bodyPr spcFirstLastPara="0" vert="horz" wrap="square" lIns="163306" tIns="0" rIns="163306" bIns="0" numCol="1" spcCol="1270" anchor="ctr" anchorCtr="0">
-          <a:noAutofit/>
-        </a:bodyPr>
-        <a:lstStyle/>
-        <a:p>
-          <a:pPr lvl="0" algn="l" defTabSz="977900">
-            <a:lnSpc>
-              <a:spcPct val="90000"/>
-            </a:lnSpc>
-            <a:spcBef>
-              <a:spcPct val="0"/>
-            </a:spcBef>
-            <a:spcAft>
-              <a:spcPct val="35000"/>
-            </a:spcAft>
-          </a:pPr>
-          <a:r>
-            <a:rPr lang="en-US" sz="2200" kern="1200" dirty="0" smtClean="0"/>
-            <a:t>Helps in indentifying and planning for risks</a:t>
-          </a:r>
-          <a:endParaRPr lang="en-US" sz="2200" kern="1200" dirty="0"/>
-        </a:p>
-      </dsp:txBody>
-      <dsp:txXfrm>
-        <a:off x="308610" y="1181400"/>
-        <a:ext cx="5425431" cy="738000"/>
-      </dsp:txXfrm>
-    </dsp:sp>
-    <dsp:sp modelId="{3EB6538B-407D-401A-B5D9-4166DB5DE084}">
-      <dsp:nvSpPr>
-        <dsp:cNvPr id="0" name=""/>
-        <dsp:cNvSpPr/>
-      </dsp:nvSpPr>
-      <dsp:spPr>
-        <a:xfrm>
-          <a:off x="0" y="2684400"/>
-          <a:ext cx="6172199" cy="630000"/>
-        </a:xfrm>
-        <a:prstGeom prst="rect">
-          <a:avLst/>
-        </a:prstGeom>
-        <a:solidFill>
-          <a:schemeClr val="lt1">
-            <a:alpha val="90000"/>
-            <a:hueOff val="0"/>
-            <a:satOff val="0"/>
-            <a:lumOff val="0"/>
-            <a:alphaOff val="0"/>
-          </a:schemeClr>
-        </a:solidFill>
-        <a:ln w="25400" cap="flat" cmpd="sng" algn="ctr">
-          <a:solidFill>
-            <a:schemeClr val="accent1">
-              <a:hueOff val="0"/>
-              <a:satOff val="0"/>
-              <a:lumOff val="0"/>
-              <a:alphaOff val="0"/>
-            </a:schemeClr>
-          </a:solidFill>
-          <a:prstDash val="solid"/>
-        </a:ln>
-        <a:effectLst/>
-      </dsp:spPr>
-      <dsp:style>
-        <a:lnRef idx="2">
-          <a:scrgbClr r="0" g="0" b="0"/>
-        </a:lnRef>
-        <a:fillRef idx="1">
-          <a:scrgbClr r="0" g="0" b="0"/>
-        </a:fillRef>
-        <a:effectRef idx="0">
-          <a:scrgbClr r="0" g="0" b="0"/>
-        </a:effectRef>
-        <a:fontRef idx="minor"/>
-      </dsp:style>
-    </dsp:sp>
-    <dsp:sp modelId="{06AF805B-F6F3-4E8C-87A7-7C5E13722586}">
-      <dsp:nvSpPr>
-        <dsp:cNvPr id="0" name=""/>
-        <dsp:cNvSpPr/>
-      </dsp:nvSpPr>
-      <dsp:spPr>
-        <a:xfrm>
-          <a:off x="308610" y="2315400"/>
-          <a:ext cx="5425431" cy="738000"/>
-        </a:xfrm>
-        <a:prstGeom prst="roundRect">
-          <a:avLst/>
-        </a:prstGeom>
-        <a:solidFill>
-          <a:schemeClr val="accent3"/>
-        </a:solidFill>
-        <a:ln w="25400" cap="flat" cmpd="sng" algn="ctr">
-          <a:solidFill>
-            <a:schemeClr val="lt1">
-              <a:hueOff val="0"/>
-              <a:satOff val="0"/>
-              <a:lumOff val="0"/>
-              <a:alphaOff val="0"/>
-            </a:schemeClr>
-          </a:solidFill>
-          <a:prstDash val="solid"/>
-        </a:ln>
-        <a:effectLst/>
-      </dsp:spPr>
-      <dsp:style>
-        <a:lnRef idx="2">
-          <a:scrgbClr r="0" g="0" b="0"/>
-        </a:lnRef>
-        <a:fillRef idx="1">
-          <a:scrgbClr r="0" g="0" b="0"/>
-        </a:fillRef>
-        <a:effectRef idx="0">
-          <a:scrgbClr r="0" g="0" b="0"/>
-        </a:effectRef>
-        <a:fontRef idx="minor">
-          <a:schemeClr val="lt1"/>
-        </a:fontRef>
-      </dsp:style>
-      <dsp:txBody>
-        <a:bodyPr spcFirstLastPara="0" vert="horz" wrap="square" lIns="163306" tIns="0" rIns="163306" bIns="0" numCol="1" spcCol="1270" anchor="ctr" anchorCtr="0">
-          <a:noAutofit/>
-        </a:bodyPr>
-        <a:lstStyle/>
-        <a:p>
-          <a:pPr lvl="0" algn="l" defTabSz="977900">
-            <a:lnSpc>
-              <a:spcPct val="90000"/>
-            </a:lnSpc>
-            <a:spcBef>
-              <a:spcPct val="0"/>
-            </a:spcBef>
-            <a:spcAft>
-              <a:spcPct val="35000"/>
-            </a:spcAft>
-          </a:pPr>
-          <a:r>
-            <a:rPr lang="en-US" sz="2200" kern="1200" dirty="0" smtClean="0"/>
-            <a:t>Helps in making cost/benefit analysis</a:t>
-          </a:r>
-          <a:endParaRPr lang="en-US" sz="2200" kern="1200" dirty="0"/>
-        </a:p>
-      </dsp:txBody>
-      <dsp:txXfrm>
-        <a:off x="308610" y="2315400"/>
-        <a:ext cx="5425431" cy="738000"/>
-      </dsp:txXfrm>
-    </dsp:sp>
-    <dsp:sp modelId="{961EFD2A-04EA-415C-8C6D-9CC07418E6C7}">
-      <dsp:nvSpPr>
-        <dsp:cNvPr id="0" name=""/>
-        <dsp:cNvSpPr/>
-      </dsp:nvSpPr>
-      <dsp:spPr>
-        <a:xfrm>
-          <a:off x="0" y="3818400"/>
-          <a:ext cx="6172199" cy="630000"/>
-        </a:xfrm>
-        <a:prstGeom prst="rect">
-          <a:avLst/>
-        </a:prstGeom>
-        <a:solidFill>
-          <a:schemeClr val="lt1">
-            <a:alpha val="90000"/>
-            <a:hueOff val="0"/>
-            <a:satOff val="0"/>
-            <a:lumOff val="0"/>
-            <a:alphaOff val="0"/>
-          </a:schemeClr>
-        </a:solidFill>
-        <a:ln w="25400" cap="flat" cmpd="sng" algn="ctr">
-          <a:solidFill>
-            <a:schemeClr val="accent1">
-              <a:hueOff val="0"/>
-              <a:satOff val="0"/>
-              <a:lumOff val="0"/>
-              <a:alphaOff val="0"/>
-            </a:schemeClr>
-          </a:solidFill>
-          <a:prstDash val="solid"/>
-        </a:ln>
-        <a:effectLst/>
-      </dsp:spPr>
-      <dsp:style>
-        <a:lnRef idx="2">
-          <a:scrgbClr r="0" g="0" b="0"/>
-        </a:lnRef>
-        <a:fillRef idx="1">
-          <a:scrgbClr r="0" g="0" b="0"/>
-        </a:fillRef>
-        <a:effectRef idx="0">
-          <a:scrgbClr r="0" g="0" b="0"/>
-        </a:effectRef>
-        <a:fontRef idx="minor"/>
-      </dsp:style>
-    </dsp:sp>
-    <dsp:sp modelId="{5FAA833E-6D98-490D-A6E4-DC5E02D539A9}">
-      <dsp:nvSpPr>
-        <dsp:cNvPr id="0" name=""/>
-        <dsp:cNvSpPr/>
-      </dsp:nvSpPr>
-      <dsp:spPr>
-        <a:xfrm>
-          <a:off x="308610" y="3449400"/>
-          <a:ext cx="5425431" cy="738000"/>
-        </a:xfrm>
-        <a:prstGeom prst="roundRect">
-          <a:avLst/>
-        </a:prstGeom>
-        <a:solidFill>
-          <a:schemeClr val="accent4"/>
-        </a:solidFill>
-        <a:ln w="25400" cap="flat" cmpd="sng" algn="ctr">
-          <a:solidFill>
-            <a:schemeClr val="lt1">
-              <a:hueOff val="0"/>
-              <a:satOff val="0"/>
-              <a:lumOff val="0"/>
-              <a:alphaOff val="0"/>
-            </a:schemeClr>
-          </a:solidFill>
-          <a:prstDash val="solid"/>
-        </a:ln>
-        <a:effectLst/>
-      </dsp:spPr>
-      <dsp:style>
-        <a:lnRef idx="2">
-          <a:scrgbClr r="0" g="0" b="0"/>
-        </a:lnRef>
-        <a:fillRef idx="1">
-          <a:scrgbClr r="0" g="0" b="0"/>
-        </a:fillRef>
-        <a:effectRef idx="0">
-          <a:scrgbClr r="0" g="0" b="0"/>
-        </a:effectRef>
-        <a:fontRef idx="minor">
-          <a:schemeClr val="lt1"/>
-        </a:fontRef>
-      </dsp:style>
-      <dsp:txBody>
-        <a:bodyPr spcFirstLastPara="0" vert="horz" wrap="square" lIns="163306" tIns="0" rIns="163306" bIns="0" numCol="1" spcCol="1270" anchor="ctr" anchorCtr="0">
-          <a:noAutofit/>
-        </a:bodyPr>
-        <a:lstStyle/>
-        <a:p>
-          <a:pPr lvl="0" algn="l" defTabSz="977900">
-            <a:lnSpc>
-              <a:spcPct val="90000"/>
-            </a:lnSpc>
-            <a:spcBef>
-              <a:spcPct val="0"/>
-            </a:spcBef>
-            <a:spcAft>
-              <a:spcPct val="35000"/>
-            </a:spcAft>
-          </a:pPr>
-          <a:r>
-            <a:rPr lang="en-US" sz="2200" kern="1200" dirty="0" smtClean="0"/>
-            <a:t>Helps in making plan for training developers for implementing the system.</a:t>
-          </a:r>
-          <a:endParaRPr lang="en-US" sz="2200" kern="1200" dirty="0"/>
-        </a:p>
-      </dsp:txBody>
-      <dsp:txXfrm>
-        <a:off x="308610" y="3449400"/>
-        <a:ext cx="5425431" cy="738000"/>
-      </dsp:txXfrm>
-    </dsp:sp>
   </dsp:spTree>
 </dsp:drawing>
 </file>
@@ -10847,6 +9637,10 @@
           <a:bodyPr/>
           <a:lstStyle/>
           <a:p>
+            <a:r>
+              <a:rPr lang="en-US" smtClean="0"/>
+              <a:t>Team Project Idea Selection</a:t>
+            </a:r>
             <a:endParaRPr lang="en-US" dirty="0"/>
           </a:p>
         </p:txBody>
@@ -16556,16 +15350,7 @@
                 </a:solidFill>
                 <a:latin typeface="Calibri" pitchFamily="34" charset="0"/>
               </a:rPr>
-              <a:t>maximum </a:t>
-            </a:r>
-            <a:r>
-              <a:rPr lang="en-US" i="1" dirty="0" smtClean="0">
-                <a:solidFill>
-                  <a:srgbClr val="C00000"/>
-                </a:solidFill>
-                <a:latin typeface="Calibri" pitchFamily="34" charset="0"/>
-              </a:rPr>
-              <a:t>of 6 members</a:t>
+              <a:t>maximum of 6 members</a:t>
             </a:r>
             <a:r>
               <a:rPr lang="en-US" dirty="0" smtClean="0">
@@ -16579,31 +15364,7 @@
               <a:rPr lang="en-US" dirty="0" smtClean="0">
                 <a:latin typeface="Calibri" pitchFamily="34" charset="0"/>
               </a:rPr>
-              <a:t>If there are surplus students, some teams </a:t>
-            </a:r>
-            <a:r>
-              <a:rPr lang="en-US" dirty="0" smtClean="0">
-                <a:latin typeface="Calibri" pitchFamily="34" charset="0"/>
-              </a:rPr>
-              <a:t>may </a:t>
-            </a:r>
-            <a:r>
-              <a:rPr lang="en-US" dirty="0" smtClean="0">
-                <a:latin typeface="Calibri" pitchFamily="34" charset="0"/>
-              </a:rPr>
-              <a:t>have </a:t>
-            </a:r>
-            <a:r>
-              <a:rPr lang="en-US" dirty="0" smtClean="0">
-                <a:latin typeface="Calibri" pitchFamily="34" charset="0"/>
-              </a:rPr>
-              <a:t>7 </a:t>
-            </a:r>
-            <a:r>
-              <a:rPr lang="en-US" dirty="0" smtClean="0">
-                <a:latin typeface="Calibri" pitchFamily="34" charset="0"/>
-              </a:rPr>
-              <a:t>people.</a:t>
+              <a:t>If there are surplus students, some teams may have 7 people.</a:t>
             </a:r>
           </a:p>
           <a:p>
@@ -16748,7 +15509,6 @@
               <a:rPr lang="en-US" sz="2400" dirty="0" smtClean="0"/>
               <a:t>Products</a:t>
             </a:r>
-            <a:endParaRPr lang="en-US" sz="2400" dirty="0" smtClean="0"/>
           </a:p>
         </p:txBody>
       </p:sp>
@@ -16837,14 +15597,7 @@
                 <a:latin typeface="Calibri" pitchFamily="34" charset="0"/>
                 <a:cs typeface="Calibri" pitchFamily="34" charset="0"/>
               </a:rPr>
-              <a:t>6 </a:t>
-            </a:r>
-            <a:r>
-              <a:rPr lang="en-US" sz="2400" b="1" dirty="0" smtClean="0">
-                <a:latin typeface="Calibri" pitchFamily="34" charset="0"/>
-                <a:cs typeface="Calibri" pitchFamily="34" charset="0"/>
-              </a:rPr>
-              <a:t>members</a:t>
+              <a:t>6 members</a:t>
             </a:r>
           </a:p>
           <a:p>
@@ -16931,11 +15684,7 @@
           <a:p>
             <a:r>
               <a:rPr lang="en-US" dirty="0" smtClean="0"/>
-              <a:t>Products: </a:t>
-            </a:r>
-            <a:r>
-              <a:rPr lang="en-US" dirty="0" smtClean="0"/>
-              <a:t>Practical Problems</a:t>
+              <a:t>Products: Practical Problems</a:t>
             </a:r>
             <a:endParaRPr lang="en-US" dirty="0"/>
           </a:p>
@@ -17067,11 +15816,7 @@
           <a:p>
             <a:r>
               <a:rPr lang="en-US" dirty="0" smtClean="0"/>
-              <a:t>Evaluating the </a:t>
-            </a:r>
-            <a:r>
-              <a:rPr lang="en-US" dirty="0" smtClean="0"/>
-              <a:t>Project Ideas</a:t>
+              <a:t>Evaluating the Project Ideas</a:t>
             </a:r>
             <a:endParaRPr lang="en-US" dirty="0"/>
           </a:p>
@@ -17188,14 +15933,7 @@
                 <a:latin typeface="Calibri" pitchFamily="34" charset="0"/>
                 <a:cs typeface="Calibri" pitchFamily="34" charset="0"/>
               </a:rPr>
-              <a:t>6 </a:t>
-            </a:r>
-            <a:r>
-              <a:rPr lang="en-US" sz="2400" b="1" dirty="0" smtClean="0">
-                <a:latin typeface="Calibri" pitchFamily="34" charset="0"/>
-                <a:cs typeface="Calibri" pitchFamily="34" charset="0"/>
-              </a:rPr>
-              <a:t>members</a:t>
+              <a:t>6 members</a:t>
             </a:r>
           </a:p>
           <a:p>
@@ -17321,22 +16059,102 @@
           <a:lstStyle/>
           <a:p>
             <a:r>
-              <a:rPr lang="en-US" dirty="0" smtClean="0"/>
-              <a:t>Sponsor? Budget? Problems? Business Use Cases? </a:t>
-            </a:r>
-            <a:r>
-              <a:rPr lang="en-US" dirty="0" smtClean="0"/>
-              <a:t>Problem </a:t>
-            </a:r>
-            <a:r>
-              <a:rPr lang="en-US" dirty="0" smtClean="0"/>
-              <a:t>Relevance (Competitors, Related Word</a:t>
-            </a:r>
-            <a:r>
-              <a:rPr lang="en-US" smtClean="0"/>
-              <a:t>, Evaluation)?</a:t>
-            </a:r>
-            <a:endParaRPr lang="en-US" dirty="0"/>
+              <a:rPr lang="en-US" sz="2000" dirty="0" smtClean="0"/>
+              <a:t>Sponsor? Client?</a:t>
+            </a:r>
+          </a:p>
+          <a:p>
+            <a:pPr lvl="1"/>
+            <a:r>
+              <a:rPr lang="en-US" sz="1800" dirty="0" smtClean="0"/>
+              <a:t>Name, address, phone number?</a:t>
+            </a:r>
+            <a:endParaRPr lang="en-US" sz="1800" dirty="0" smtClean="0"/>
+          </a:p>
+          <a:p>
+            <a:r>
+              <a:rPr lang="en-US" sz="2000" dirty="0" smtClean="0"/>
+              <a:t>Budget?</a:t>
+            </a:r>
+          </a:p>
+          <a:p>
+            <a:r>
+              <a:rPr lang="en-US" sz="2000" dirty="0" smtClean="0"/>
+              <a:t>Problems?</a:t>
+            </a:r>
+          </a:p>
+          <a:p>
+            <a:r>
+              <a:rPr lang="en-US" sz="2000" dirty="0" smtClean="0"/>
+              <a:t>Business </a:t>
+            </a:r>
+            <a:r>
+              <a:rPr lang="en-US" sz="2000" dirty="0" smtClean="0"/>
+              <a:t>Use </a:t>
+            </a:r>
+            <a:r>
+              <a:rPr lang="en-US" sz="2000" dirty="0" smtClean="0"/>
+              <a:t>Cases?</a:t>
+            </a:r>
+          </a:p>
+          <a:p>
+            <a:r>
+              <a:rPr lang="en-US" sz="2000" dirty="0" smtClean="0"/>
+              <a:t>Problem Relevance?</a:t>
+            </a:r>
+          </a:p>
+          <a:p>
+            <a:pPr lvl="1"/>
+            <a:r>
+              <a:rPr lang="en-US" sz="1800" dirty="0" smtClean="0"/>
+              <a:t>Competitors? Similar Products?</a:t>
+            </a:r>
+          </a:p>
+          <a:p>
+            <a:pPr lvl="1"/>
+            <a:r>
+              <a:rPr lang="en-US" sz="1800" dirty="0" smtClean="0"/>
+              <a:t>Product purchased by </a:t>
+            </a:r>
+            <a:r>
+              <a:rPr lang="en-US" sz="1800" dirty="0" smtClean="0"/>
+              <a:t>yourself?</a:t>
+            </a:r>
+            <a:endParaRPr lang="en-US" sz="1800" dirty="0" smtClean="0"/>
+          </a:p>
+          <a:p>
+            <a:pPr lvl="1"/>
+            <a:r>
+              <a:rPr lang="en-US" sz="1800" dirty="0" smtClean="0"/>
+              <a:t>Related Word? Evaluation?</a:t>
+            </a:r>
+          </a:p>
+          <a:p>
+            <a:r>
+              <a:rPr lang="en-US" sz="2000" dirty="0" smtClean="0"/>
+              <a:t>Stakeholders?</a:t>
+            </a:r>
+          </a:p>
+          <a:p>
+            <a:pPr lvl="1"/>
+            <a:r>
+              <a:rPr lang="en-US" sz="1800" dirty="0" smtClean="0"/>
+              <a:t>Can you meet with them or reach an agreement?</a:t>
+            </a:r>
+            <a:endParaRPr lang="en-US" sz="1800" dirty="0" smtClean="0"/>
+          </a:p>
+          <a:p>
+            <a:r>
+              <a:rPr lang="en-US" sz="2000" dirty="0" smtClean="0"/>
+              <a:t>Time?</a:t>
+            </a:r>
+          </a:p>
+          <a:p>
+            <a:r>
+              <a:rPr lang="en-US" sz="2000" dirty="0" smtClean="0"/>
+              <a:t>Cost?</a:t>
+            </a:r>
+            <a:endParaRPr lang="en-US" sz="2000" dirty="0"/>
           </a:p>
         </p:txBody>
       </p:sp>

--- a/Software Project Management/03. Software Project Initiation.pptx
+++ b/Software Project Management/03. Software Project Initiation.pptx
@@ -5,10 +5,10 @@
     <p:sldMasterId id="2147483708" r:id="rId1"/>
   </p:sldMasterIdLst>
   <p:notesMasterIdLst>
-    <p:notesMasterId r:id="rId37"/>
+    <p:notesMasterId r:id="rId36"/>
   </p:notesMasterIdLst>
   <p:handoutMasterIdLst>
-    <p:handoutMasterId r:id="rId38"/>
+    <p:handoutMasterId r:id="rId37"/>
   </p:handoutMasterIdLst>
   <p:sldIdLst>
     <p:sldId id="256" r:id="rId2"/>
@@ -18,34 +18,33 @@
     <p:sldId id="881" r:id="rId6"/>
     <p:sldId id="882" r:id="rId7"/>
     <p:sldId id="883" r:id="rId8"/>
-    <p:sldId id="884" r:id="rId9"/>
-    <p:sldId id="888" r:id="rId10"/>
-    <p:sldId id="885" r:id="rId11"/>
-    <p:sldId id="886" r:id="rId12"/>
-    <p:sldId id="887" r:id="rId13"/>
-    <p:sldId id="855" r:id="rId14"/>
-    <p:sldId id="872" r:id="rId15"/>
-    <p:sldId id="879" r:id="rId16"/>
-    <p:sldId id="873" r:id="rId17"/>
-    <p:sldId id="874" r:id="rId18"/>
-    <p:sldId id="842" r:id="rId19"/>
-    <p:sldId id="835" r:id="rId20"/>
-    <p:sldId id="836" r:id="rId21"/>
-    <p:sldId id="852" r:id="rId22"/>
-    <p:sldId id="853" r:id="rId23"/>
-    <p:sldId id="854" r:id="rId24"/>
-    <p:sldId id="869" r:id="rId25"/>
-    <p:sldId id="867" r:id="rId26"/>
-    <p:sldId id="868" r:id="rId27"/>
-    <p:sldId id="837" r:id="rId28"/>
-    <p:sldId id="838" r:id="rId29"/>
-    <p:sldId id="878" r:id="rId30"/>
-    <p:sldId id="875" r:id="rId31"/>
-    <p:sldId id="876" r:id="rId32"/>
-    <p:sldId id="877" r:id="rId33"/>
-    <p:sldId id="843" r:id="rId34"/>
-    <p:sldId id="830" r:id="rId35"/>
-    <p:sldId id="343" r:id="rId36"/>
+    <p:sldId id="888" r:id="rId9"/>
+    <p:sldId id="884" r:id="rId10"/>
+    <p:sldId id="886" r:id="rId11"/>
+    <p:sldId id="887" r:id="rId12"/>
+    <p:sldId id="855" r:id="rId13"/>
+    <p:sldId id="872" r:id="rId14"/>
+    <p:sldId id="879" r:id="rId15"/>
+    <p:sldId id="873" r:id="rId16"/>
+    <p:sldId id="874" r:id="rId17"/>
+    <p:sldId id="842" r:id="rId18"/>
+    <p:sldId id="835" r:id="rId19"/>
+    <p:sldId id="836" r:id="rId20"/>
+    <p:sldId id="852" r:id="rId21"/>
+    <p:sldId id="853" r:id="rId22"/>
+    <p:sldId id="854" r:id="rId23"/>
+    <p:sldId id="869" r:id="rId24"/>
+    <p:sldId id="867" r:id="rId25"/>
+    <p:sldId id="868" r:id="rId26"/>
+    <p:sldId id="837" r:id="rId27"/>
+    <p:sldId id="838" r:id="rId28"/>
+    <p:sldId id="878" r:id="rId29"/>
+    <p:sldId id="875" r:id="rId30"/>
+    <p:sldId id="876" r:id="rId31"/>
+    <p:sldId id="877" r:id="rId32"/>
+    <p:sldId id="843" r:id="rId33"/>
+    <p:sldId id="830" r:id="rId34"/>
+    <p:sldId id="343" r:id="rId35"/>
   </p:sldIdLst>
   <p:sldSz cx="9144000" cy="6858000" type="screen4x3"/>
   <p:notesSz cx="6858000" cy="9144000"/>
@@ -5902,7 +5901,7 @@
             <a:fld id="{B4E670EC-EF90-4A84-9798-83F1F2DBB460}" type="slidenum">
               <a:rPr lang="en-US" smtClean="0"/>
               <a:pPr/>
-              <a:t>8</a:t>
+              <a:t>9</a:t>
             </a:fld>
             <a:endParaRPr lang="en-US"/>
           </a:p>
@@ -5984,7 +5983,7 @@
             <a:fld id="{758E95B1-5ED0-4005-B293-784E4C93134E}" type="slidenum">
               <a:rPr lang="en-US" smtClean="0"/>
               <a:pPr/>
-              <a:t>30</a:t>
+              <a:t>29</a:t>
             </a:fld>
             <a:endParaRPr lang="en-US" dirty="0"/>
           </a:p>
@@ -6066,7 +6065,7 @@
             <a:fld id="{758E95B1-5ED0-4005-B293-784E4C93134E}" type="slidenum">
               <a:rPr lang="en-US" smtClean="0"/>
               <a:pPr/>
-              <a:t>31</a:t>
+              <a:t>30</a:t>
             </a:fld>
             <a:endParaRPr lang="en-US" dirty="0"/>
           </a:p>
@@ -9638,86 +9637,6 @@
           <a:lstStyle/>
           <a:p>
             <a:r>
-              <a:rPr lang="en-US" smtClean="0"/>
-              <a:t>Team Project Idea Selection</a:t>
-            </a:r>
-            <a:endParaRPr lang="en-US" dirty="0"/>
-          </a:p>
-        </p:txBody>
-      </p:sp>
-      <p:pic>
-        <p:nvPicPr>
-          <p:cNvPr id="52226" name="Picture 2"/>
-          <p:cNvPicPr>
-            <a:picLocks noChangeAspect="1" noChangeArrowheads="1"/>
-          </p:cNvPicPr>
-          <p:nvPr/>
-        </p:nvPicPr>
-        <p:blipFill>
-          <a:blip r:embed="rId2" cstate="print"/>
-          <a:srcRect/>
-          <a:stretch>
-            <a:fillRect/>
-          </a:stretch>
-        </p:blipFill>
-        <p:spPr bwMode="auto">
-          <a:xfrm>
-            <a:off x="1589088" y="2460625"/>
-            <a:ext cx="5965825" cy="2416175"/>
-          </a:xfrm>
-          <a:prstGeom prst="rect">
-            <a:avLst/>
-          </a:prstGeom>
-          <a:noFill/>
-          <a:ln w="9525">
-            <a:noFill/>
-            <a:miter lim="800000"/>
-            <a:headEnd/>
-            <a:tailEnd/>
-          </a:ln>
-        </p:spPr>
-      </p:pic>
-    </p:spTree>
-  </p:cSld>
-  <p:clrMapOvr>
-    <a:masterClrMapping/>
-  </p:clrMapOvr>
-</p:sld>
-</file>
-
-<file path=ppt/slides/slide11.xml><?xml version="1.0" encoding="utf-8"?>
-<p:sld xmlns:a="http://schemas.openxmlformats.org/drawingml/2006/main" xmlns:r="http://schemas.openxmlformats.org/officeDocument/2006/relationships" xmlns:p="http://schemas.openxmlformats.org/presentationml/2006/main">
-  <p:cSld>
-    <p:spTree>
-      <p:nvGrpSpPr>
-        <p:cNvPr id="1" name=""/>
-        <p:cNvGrpSpPr/>
-        <p:nvPr/>
-      </p:nvGrpSpPr>
-      <p:grpSpPr>
-        <a:xfrm>
-          <a:off x="0" y="0"/>
-          <a:ext cx="0" cy="0"/>
-          <a:chOff x="0" y="0"/>
-          <a:chExt cx="0" cy="0"/>
-        </a:xfrm>
-      </p:grpSpPr>
-      <p:sp>
-        <p:nvSpPr>
-          <p:cNvPr id="2" name="Title 1"/>
-          <p:cNvSpPr>
-            <a:spLocks noGrp="1"/>
-          </p:cNvSpPr>
-          <p:nvPr>
-            <p:ph type="title"/>
-          </p:nvPr>
-        </p:nvSpPr>
-        <p:spPr/>
-        <p:txBody>
-          <a:bodyPr/>
-          <a:lstStyle/>
-          <a:p>
-            <a:r>
               <a:rPr lang="en-US" dirty="0" smtClean="0"/>
               <a:t>Documenting Team Project Idea</a:t>
             </a:r>
@@ -10045,7 +9964,7 @@
 </p:sld>
 </file>
 
-<file path=ppt/slides/slide12.xml><?xml version="1.0" encoding="utf-8"?>
+<file path=ppt/slides/slide11.xml><?xml version="1.0" encoding="utf-8"?>
 <p:sld xmlns:a="http://schemas.openxmlformats.org/drawingml/2006/main" xmlns:r="http://schemas.openxmlformats.org/officeDocument/2006/relationships" xmlns:p="http://schemas.openxmlformats.org/presentationml/2006/main">
   <p:cSld>
     <p:spTree>
@@ -10167,7 +10086,7 @@
 </p:sld>
 </file>
 
-<file path=ppt/slides/slide13.xml><?xml version="1.0" encoding="utf-8"?>
+<file path=ppt/slides/slide12.xml><?xml version="1.0" encoding="utf-8"?>
 <p:sld xmlns:a="http://schemas.openxmlformats.org/drawingml/2006/main" xmlns:r="http://schemas.openxmlformats.org/officeDocument/2006/relationships" xmlns:p="http://schemas.openxmlformats.org/presentationml/2006/main">
   <p:cSld>
     <p:spTree>
@@ -10433,7 +10352,7 @@
 </p:sld>
 </file>
 
-<file path=ppt/slides/slide14.xml><?xml version="1.0" encoding="utf-8"?>
+<file path=ppt/slides/slide13.xml><?xml version="1.0" encoding="utf-8"?>
 <p:sld xmlns:a="http://schemas.openxmlformats.org/drawingml/2006/main" xmlns:r="http://schemas.openxmlformats.org/officeDocument/2006/relationships" xmlns:p="http://schemas.openxmlformats.org/presentationml/2006/main">
   <p:cSld>
     <p:spTree>
@@ -10718,7 +10637,7 @@
 </p:sld>
 </file>
 
-<file path=ppt/slides/slide15.xml><?xml version="1.0" encoding="utf-8"?>
+<file path=ppt/slides/slide14.xml><?xml version="1.0" encoding="utf-8"?>
 <p:sld xmlns:a="http://schemas.openxmlformats.org/drawingml/2006/main" xmlns:r="http://schemas.openxmlformats.org/officeDocument/2006/relationships" xmlns:p="http://schemas.openxmlformats.org/presentationml/2006/main">
   <p:cSld>
     <p:spTree>
@@ -11059,7 +10978,7 @@
 </p:sld>
 </file>
 
-<file path=ppt/slides/slide16.xml><?xml version="1.0" encoding="utf-8"?>
+<file path=ppt/slides/slide15.xml><?xml version="1.0" encoding="utf-8"?>
 <p:sld xmlns:a="http://schemas.openxmlformats.org/drawingml/2006/main" xmlns:r="http://schemas.openxmlformats.org/officeDocument/2006/relationships" xmlns:p="http://schemas.openxmlformats.org/presentationml/2006/main">
   <p:cSld>
     <p:spTree>
@@ -11424,7 +11343,7 @@
 </p:sld>
 </file>
 
-<file path=ppt/slides/slide17.xml><?xml version="1.0" encoding="utf-8"?>
+<file path=ppt/slides/slide16.xml><?xml version="1.0" encoding="utf-8"?>
 <p:sld xmlns:a="http://schemas.openxmlformats.org/drawingml/2006/main" xmlns:r="http://schemas.openxmlformats.org/officeDocument/2006/relationships" xmlns:p="http://schemas.openxmlformats.org/presentationml/2006/main">
   <p:cSld>
     <p:spTree>
@@ -11824,7 +11743,7 @@
 </p:sld>
 </file>
 
-<file path=ppt/slides/slide18.xml><?xml version="1.0" encoding="utf-8"?>
+<file path=ppt/slides/slide17.xml><?xml version="1.0" encoding="utf-8"?>
 <p:sld xmlns:a="http://schemas.openxmlformats.org/drawingml/2006/main" xmlns:r="http://schemas.openxmlformats.org/officeDocument/2006/relationships" xmlns:p="http://schemas.openxmlformats.org/presentationml/2006/main">
   <p:cSld>
     <p:spTree>
@@ -11875,7 +11794,7 @@
 </p:sld>
 </file>
 
-<file path=ppt/slides/slide19.xml><?xml version="1.0" encoding="utf-8"?>
+<file path=ppt/slides/slide18.xml><?xml version="1.0" encoding="utf-8"?>
 <p:sld xmlns:a="http://schemas.openxmlformats.org/drawingml/2006/main" xmlns:r="http://schemas.openxmlformats.org/officeDocument/2006/relationships" xmlns:p="http://schemas.openxmlformats.org/presentationml/2006/main">
   <p:cSld>
     <p:spTree>
@@ -11996,365 +11915,7 @@
 </p:sld>
 </file>
 
-<file path=ppt/slides/slide2.xml><?xml version="1.0" encoding="utf-8"?>
-<p:sld xmlns:a="http://schemas.openxmlformats.org/drawingml/2006/main" xmlns:r="http://schemas.openxmlformats.org/officeDocument/2006/relationships" xmlns:p="http://schemas.openxmlformats.org/presentationml/2006/main">
-  <p:cSld>
-    <p:spTree>
-      <p:nvGrpSpPr>
-        <p:cNvPr id="1" name=""/>
-        <p:cNvGrpSpPr/>
-        <p:nvPr/>
-      </p:nvGrpSpPr>
-      <p:grpSpPr>
-        <a:xfrm>
-          <a:off x="0" y="0"/>
-          <a:ext cx="0" cy="0"/>
-          <a:chOff x="0" y="0"/>
-          <a:chExt cx="0" cy="0"/>
-        </a:xfrm>
-      </p:grpSpPr>
-      <p:sp>
-        <p:nvSpPr>
-          <p:cNvPr id="2" name="Title 1"/>
-          <p:cNvSpPr>
-            <a:spLocks noGrp="1"/>
-          </p:cNvSpPr>
-          <p:nvPr>
-            <p:ph type="title"/>
-          </p:nvPr>
-        </p:nvSpPr>
-        <p:spPr/>
-        <p:txBody>
-          <a:bodyPr/>
-          <a:lstStyle/>
-          <a:p>
-            <a:r>
-              <a:rPr lang="en-US" dirty="0" smtClean="0"/>
-              <a:t>Objectives</a:t>
-            </a:r>
-            <a:endParaRPr lang="en-US" dirty="0"/>
-          </a:p>
-        </p:txBody>
-      </p:sp>
-      <p:sp>
-        <p:nvSpPr>
-          <p:cNvPr id="3" name="Content Placeholder 2"/>
-          <p:cNvSpPr>
-            <a:spLocks noGrp="1"/>
-          </p:cNvSpPr>
-          <p:nvPr>
-            <p:ph idx="1"/>
-          </p:nvPr>
-        </p:nvSpPr>
-        <p:spPr>
-          <a:xfrm>
-            <a:off x="457200" y="1600200"/>
-            <a:ext cx="5562600" cy="4343400"/>
-          </a:xfrm>
-        </p:spPr>
-        <p:txBody>
-          <a:bodyPr/>
-          <a:lstStyle/>
-          <a:p>
-            <a:pPr marL="457200" indent="-457200">
-              <a:buFont typeface="Wingdings" pitchFamily="2" charset="2"/>
-              <a:buChar char="Ø"/>
-            </a:pPr>
-            <a:r>
-              <a:rPr lang="en-US" sz="2200" dirty="0" smtClean="0"/>
-              <a:t>To create an </a:t>
-            </a:r>
-            <a:r>
-              <a:rPr lang="en-US" sz="2200" i="1" dirty="0" smtClean="0">
-                <a:solidFill>
-                  <a:srgbClr val="C00000"/>
-                </a:solidFill>
-              </a:rPr>
-              <a:t>executive summary document</a:t>
-            </a:r>
-            <a:r>
-              <a:rPr lang="en-US" sz="2200" dirty="0" smtClean="0"/>
-              <a:t>.</a:t>
-            </a:r>
-          </a:p>
-          <a:p>
-            <a:pPr marL="457200" indent="-457200">
-              <a:buFont typeface="Wingdings" pitchFamily="2" charset="2"/>
-              <a:buChar char="Ø"/>
-            </a:pPr>
-            <a:r>
-              <a:rPr lang="en-US" sz="2200" dirty="0" smtClean="0"/>
-              <a:t>To create a </a:t>
-            </a:r>
-            <a:r>
-              <a:rPr lang="en-US" sz="2200" i="1" dirty="0" smtClean="0">
-                <a:solidFill>
-                  <a:srgbClr val="C00000"/>
-                </a:solidFill>
-              </a:rPr>
-              <a:t>project vision and scope document</a:t>
-            </a:r>
-            <a:r>
-              <a:rPr lang="en-US" sz="2200" dirty="0" smtClean="0"/>
-              <a:t>.</a:t>
-            </a:r>
-          </a:p>
-          <a:p>
-            <a:pPr marL="457200" indent="-457200">
-              <a:buFont typeface="Wingdings" pitchFamily="2" charset="2"/>
-              <a:buChar char="Ø"/>
-            </a:pPr>
-            <a:r>
-              <a:rPr lang="en-US" sz="2200" dirty="0" smtClean="0"/>
-              <a:t>To create a </a:t>
-            </a:r>
-            <a:r>
-              <a:rPr lang="en-US" sz="2200" i="1" dirty="0" smtClean="0">
-                <a:solidFill>
-                  <a:srgbClr val="C00000"/>
-                </a:solidFill>
-              </a:rPr>
-              <a:t>mockup</a:t>
-            </a:r>
-            <a:r>
-              <a:rPr lang="en-US" sz="2200" dirty="0" smtClean="0"/>
-              <a:t> and </a:t>
-            </a:r>
-            <a:r>
-              <a:rPr lang="en-US" sz="2200" i="1" dirty="0" smtClean="0">
-                <a:solidFill>
-                  <a:srgbClr val="C00000"/>
-                </a:solidFill>
-              </a:rPr>
-              <a:t>prototype</a:t>
-            </a:r>
-            <a:r>
-              <a:rPr lang="en-US" sz="2200" dirty="0" smtClean="0"/>
-              <a:t>.</a:t>
-            </a:r>
-            <a:endParaRPr lang="en-US" sz="2200" i="1" dirty="0" smtClean="0">
-              <a:solidFill>
-                <a:srgbClr val="C00000"/>
-              </a:solidFill>
-            </a:endParaRPr>
-          </a:p>
-          <a:p>
-            <a:pPr marL="457200" indent="-457200">
-              <a:buFont typeface="Wingdings" pitchFamily="2" charset="2"/>
-              <a:buChar char="Ø"/>
-            </a:pPr>
-            <a:r>
-              <a:rPr lang="en-US" sz="2200" dirty="0" smtClean="0"/>
-              <a:t>To create a </a:t>
-            </a:r>
-            <a:r>
-              <a:rPr lang="en-US" sz="2200" i="1" dirty="0" smtClean="0">
-                <a:solidFill>
-                  <a:srgbClr val="C00000"/>
-                </a:solidFill>
-              </a:rPr>
-              <a:t>software requirements specification</a:t>
-            </a:r>
-            <a:r>
-              <a:rPr lang="en-US" sz="2200" dirty="0" smtClean="0"/>
-              <a:t>.</a:t>
-            </a:r>
-            <a:endParaRPr lang="en-US" sz="2200" i="1" dirty="0" smtClean="0">
-              <a:solidFill>
-                <a:srgbClr val="C00000"/>
-              </a:solidFill>
-            </a:endParaRPr>
-          </a:p>
-          <a:p>
-            <a:pPr marL="457200" indent="-457200">
-              <a:buFont typeface="Wingdings" pitchFamily="2" charset="2"/>
-              <a:buChar char="Ø"/>
-            </a:pPr>
-            <a:r>
-              <a:rPr lang="en-US" sz="2200" dirty="0" smtClean="0"/>
-              <a:t>To create </a:t>
-            </a:r>
-            <a:r>
-              <a:rPr lang="en-US" sz="2200" smtClean="0"/>
-              <a:t>an </a:t>
-            </a:r>
-            <a:r>
-              <a:rPr lang="en-US" sz="2200" i="1" smtClean="0">
-                <a:solidFill>
-                  <a:srgbClr val="C00000"/>
-                </a:solidFill>
-              </a:rPr>
-              <a:t>architecture</a:t>
-            </a:r>
-            <a:r>
-              <a:rPr lang="en-US" sz="2200" smtClean="0"/>
-              <a:t>.</a:t>
-            </a:r>
-            <a:endParaRPr lang="en-US" sz="2200" i="1" dirty="0" smtClean="0">
-              <a:solidFill>
-                <a:srgbClr val="C00000"/>
-              </a:solidFill>
-            </a:endParaRPr>
-          </a:p>
-          <a:p>
-            <a:pPr marL="457200" indent="-457200">
-              <a:buFont typeface="Wingdings" pitchFamily="2" charset="2"/>
-              <a:buChar char="Ø"/>
-            </a:pPr>
-            <a:r>
-              <a:rPr lang="en-US" sz="2200" dirty="0" smtClean="0"/>
-              <a:t>To create a </a:t>
-            </a:r>
-            <a:r>
-              <a:rPr lang="en-US" sz="2200" i="1" dirty="0" smtClean="0">
-                <a:solidFill>
-                  <a:srgbClr val="C00000"/>
-                </a:solidFill>
-              </a:rPr>
-              <a:t>feasibility study report</a:t>
-            </a:r>
-            <a:r>
-              <a:rPr lang="en-US" sz="2200" dirty="0" smtClean="0"/>
-              <a:t>.</a:t>
-            </a:r>
-            <a:endParaRPr lang="en-US" sz="2200" i="1" dirty="0" smtClean="0">
-              <a:solidFill>
-                <a:srgbClr val="C00000"/>
-              </a:solidFill>
-            </a:endParaRPr>
-          </a:p>
-          <a:p>
-            <a:pPr marL="457200" indent="-457200">
-              <a:buFont typeface="Wingdings" pitchFamily="2" charset="2"/>
-              <a:buChar char="Ø"/>
-            </a:pPr>
-            <a:r>
-              <a:rPr lang="en-US" sz="2200" dirty="0" smtClean="0"/>
-              <a:t>To create a </a:t>
-            </a:r>
-            <a:r>
-              <a:rPr lang="en-US" sz="2200" i="1" dirty="0" smtClean="0">
-                <a:solidFill>
-                  <a:srgbClr val="C00000"/>
-                </a:solidFill>
-              </a:rPr>
-              <a:t>proof of concept</a:t>
-            </a:r>
-            <a:r>
-              <a:rPr lang="en-US" sz="2200" dirty="0" smtClean="0"/>
-              <a:t>.</a:t>
-            </a:r>
-            <a:endParaRPr lang="en-US" sz="2200" i="1" dirty="0" smtClean="0">
-              <a:solidFill>
-                <a:srgbClr val="C00000"/>
-              </a:solidFill>
-            </a:endParaRPr>
-          </a:p>
-          <a:p>
-            <a:pPr marL="457200" indent="-457200">
-              <a:buFont typeface="Wingdings" pitchFamily="2" charset="2"/>
-              <a:buChar char="Ø"/>
-            </a:pPr>
-            <a:r>
-              <a:rPr lang="en-US" sz="2200" dirty="0" smtClean="0"/>
-              <a:t>To create a </a:t>
-            </a:r>
-            <a:r>
-              <a:rPr lang="en-US" sz="2200" i="1" dirty="0" smtClean="0">
-                <a:solidFill>
-                  <a:srgbClr val="C00000"/>
-                </a:solidFill>
-              </a:rPr>
-              <a:t>project charter</a:t>
-            </a:r>
-            <a:r>
-              <a:rPr lang="en-US" sz="2200" dirty="0" smtClean="0"/>
-              <a:t>.</a:t>
-            </a:r>
-            <a:endParaRPr lang="en-US" sz="2200" i="1" dirty="0" smtClean="0">
-              <a:solidFill>
-                <a:srgbClr val="C00000"/>
-              </a:solidFill>
-            </a:endParaRPr>
-          </a:p>
-          <a:p>
-            <a:pPr marL="457200" indent="-457200">
-              <a:buFont typeface="Wingdings" pitchFamily="2" charset="2"/>
-              <a:buChar char="Ø"/>
-            </a:pPr>
-            <a:r>
-              <a:rPr lang="en-US" sz="2200" dirty="0" smtClean="0"/>
-              <a:t>To create a </a:t>
-            </a:r>
-            <a:r>
-              <a:rPr lang="en-US" sz="2200" i="1" dirty="0" smtClean="0">
-                <a:solidFill>
-                  <a:srgbClr val="C00000"/>
-                </a:solidFill>
-              </a:rPr>
-              <a:t>process definition document</a:t>
-            </a:r>
-            <a:r>
-              <a:rPr lang="en-US" sz="2200" dirty="0" smtClean="0"/>
-              <a:t>.</a:t>
-            </a:r>
-            <a:endParaRPr lang="en-US" sz="2200" i="1" dirty="0" smtClean="0">
-              <a:solidFill>
-                <a:srgbClr val="C00000"/>
-              </a:solidFill>
-            </a:endParaRPr>
-          </a:p>
-        </p:txBody>
-      </p:sp>
-      <p:pic>
-        <p:nvPicPr>
-          <p:cNvPr id="4" name="Picture 2"/>
-          <p:cNvPicPr>
-            <a:picLocks noChangeAspect="1" noChangeArrowheads="1"/>
-          </p:cNvPicPr>
-          <p:nvPr/>
-        </p:nvPicPr>
-        <p:blipFill>
-          <a:blip r:embed="rId2" cstate="print"/>
-          <a:srcRect/>
-          <a:stretch>
-            <a:fillRect/>
-          </a:stretch>
-        </p:blipFill>
-        <p:spPr bwMode="auto">
-          <a:xfrm>
-            <a:off x="6000750" y="2609850"/>
-            <a:ext cx="2762250" cy="2114550"/>
-          </a:xfrm>
-          <a:prstGeom prst="rect">
-            <a:avLst/>
-          </a:prstGeom>
-          <a:noFill/>
-          <a:ln w="9525">
-            <a:noFill/>
-            <a:miter lim="800000"/>
-            <a:headEnd/>
-            <a:tailEnd/>
-          </a:ln>
-          <a:effectLst/>
-        </p:spPr>
-      </p:pic>
-    </p:spTree>
-  </p:cSld>
-  <p:clrMapOvr>
-    <a:masterClrMapping/>
-  </p:clrMapOvr>
-  <p:timing>
-    <p:tnLst>
-      <p:par>
-        <p:cTn id="1" dur="indefinite" restart="never" nodeType="tmRoot"/>
-      </p:par>
-    </p:tnLst>
-  </p:timing>
-</p:sld>
-</file>
-
-<file path=ppt/slides/slide20.xml><?xml version="1.0" encoding="utf-8"?>
+<file path=ppt/slides/slide19.xml><?xml version="1.0" encoding="utf-8"?>
 <p:sld xmlns:a="http://schemas.openxmlformats.org/drawingml/2006/main" xmlns:r="http://schemas.openxmlformats.org/officeDocument/2006/relationships" xmlns:p="http://schemas.openxmlformats.org/presentationml/2006/main">
   <p:cSld>
     <p:spTree>
@@ -12654,7 +12215,365 @@
 </p:sld>
 </file>
 
-<file path=ppt/slides/slide21.xml><?xml version="1.0" encoding="utf-8"?>
+<file path=ppt/slides/slide2.xml><?xml version="1.0" encoding="utf-8"?>
+<p:sld xmlns:a="http://schemas.openxmlformats.org/drawingml/2006/main" xmlns:r="http://schemas.openxmlformats.org/officeDocument/2006/relationships" xmlns:p="http://schemas.openxmlformats.org/presentationml/2006/main">
+  <p:cSld>
+    <p:spTree>
+      <p:nvGrpSpPr>
+        <p:cNvPr id="1" name=""/>
+        <p:cNvGrpSpPr/>
+        <p:nvPr/>
+      </p:nvGrpSpPr>
+      <p:grpSpPr>
+        <a:xfrm>
+          <a:off x="0" y="0"/>
+          <a:ext cx="0" cy="0"/>
+          <a:chOff x="0" y="0"/>
+          <a:chExt cx="0" cy="0"/>
+        </a:xfrm>
+      </p:grpSpPr>
+      <p:sp>
+        <p:nvSpPr>
+          <p:cNvPr id="2" name="Title 1"/>
+          <p:cNvSpPr>
+            <a:spLocks noGrp="1"/>
+          </p:cNvSpPr>
+          <p:nvPr>
+            <p:ph type="title"/>
+          </p:nvPr>
+        </p:nvSpPr>
+        <p:spPr/>
+        <p:txBody>
+          <a:bodyPr/>
+          <a:lstStyle/>
+          <a:p>
+            <a:r>
+              <a:rPr lang="en-US" dirty="0" smtClean="0"/>
+              <a:t>Objectives</a:t>
+            </a:r>
+            <a:endParaRPr lang="en-US" dirty="0"/>
+          </a:p>
+        </p:txBody>
+      </p:sp>
+      <p:sp>
+        <p:nvSpPr>
+          <p:cNvPr id="3" name="Content Placeholder 2"/>
+          <p:cNvSpPr>
+            <a:spLocks noGrp="1"/>
+          </p:cNvSpPr>
+          <p:nvPr>
+            <p:ph idx="1"/>
+          </p:nvPr>
+        </p:nvSpPr>
+        <p:spPr>
+          <a:xfrm>
+            <a:off x="457200" y="1600200"/>
+            <a:ext cx="5562600" cy="4343400"/>
+          </a:xfrm>
+        </p:spPr>
+        <p:txBody>
+          <a:bodyPr/>
+          <a:lstStyle/>
+          <a:p>
+            <a:pPr marL="457200" indent="-457200">
+              <a:buFont typeface="Wingdings" pitchFamily="2" charset="2"/>
+              <a:buChar char="Ø"/>
+            </a:pPr>
+            <a:r>
+              <a:rPr lang="en-US" sz="2200" dirty="0" smtClean="0"/>
+              <a:t>To create an </a:t>
+            </a:r>
+            <a:r>
+              <a:rPr lang="en-US" sz="2200" i="1" dirty="0" smtClean="0">
+                <a:solidFill>
+                  <a:srgbClr val="C00000"/>
+                </a:solidFill>
+              </a:rPr>
+              <a:t>executive summary document</a:t>
+            </a:r>
+            <a:r>
+              <a:rPr lang="en-US" sz="2200" dirty="0" smtClean="0"/>
+              <a:t>.</a:t>
+            </a:r>
+          </a:p>
+          <a:p>
+            <a:pPr marL="457200" indent="-457200">
+              <a:buFont typeface="Wingdings" pitchFamily="2" charset="2"/>
+              <a:buChar char="Ø"/>
+            </a:pPr>
+            <a:r>
+              <a:rPr lang="en-US" sz="2200" dirty="0" smtClean="0"/>
+              <a:t>To create a </a:t>
+            </a:r>
+            <a:r>
+              <a:rPr lang="en-US" sz="2200" i="1" dirty="0" smtClean="0">
+                <a:solidFill>
+                  <a:srgbClr val="C00000"/>
+                </a:solidFill>
+              </a:rPr>
+              <a:t>project vision and scope document</a:t>
+            </a:r>
+            <a:r>
+              <a:rPr lang="en-US" sz="2200" dirty="0" smtClean="0"/>
+              <a:t>.</a:t>
+            </a:r>
+          </a:p>
+          <a:p>
+            <a:pPr marL="457200" indent="-457200">
+              <a:buFont typeface="Wingdings" pitchFamily="2" charset="2"/>
+              <a:buChar char="Ø"/>
+            </a:pPr>
+            <a:r>
+              <a:rPr lang="en-US" sz="2200" dirty="0" smtClean="0"/>
+              <a:t>To create a </a:t>
+            </a:r>
+            <a:r>
+              <a:rPr lang="en-US" sz="2200" i="1" dirty="0" smtClean="0">
+                <a:solidFill>
+                  <a:srgbClr val="C00000"/>
+                </a:solidFill>
+              </a:rPr>
+              <a:t>mockup</a:t>
+            </a:r>
+            <a:r>
+              <a:rPr lang="en-US" sz="2200" dirty="0" smtClean="0"/>
+              <a:t> and </a:t>
+            </a:r>
+            <a:r>
+              <a:rPr lang="en-US" sz="2200" i="1" dirty="0" smtClean="0">
+                <a:solidFill>
+                  <a:srgbClr val="C00000"/>
+                </a:solidFill>
+              </a:rPr>
+              <a:t>prototype</a:t>
+            </a:r>
+            <a:r>
+              <a:rPr lang="en-US" sz="2200" dirty="0" smtClean="0"/>
+              <a:t>.</a:t>
+            </a:r>
+            <a:endParaRPr lang="en-US" sz="2200" i="1" dirty="0" smtClean="0">
+              <a:solidFill>
+                <a:srgbClr val="C00000"/>
+              </a:solidFill>
+            </a:endParaRPr>
+          </a:p>
+          <a:p>
+            <a:pPr marL="457200" indent="-457200">
+              <a:buFont typeface="Wingdings" pitchFamily="2" charset="2"/>
+              <a:buChar char="Ø"/>
+            </a:pPr>
+            <a:r>
+              <a:rPr lang="en-US" sz="2200" dirty="0" smtClean="0"/>
+              <a:t>To create a </a:t>
+            </a:r>
+            <a:r>
+              <a:rPr lang="en-US" sz="2200" i="1" dirty="0" smtClean="0">
+                <a:solidFill>
+                  <a:srgbClr val="C00000"/>
+                </a:solidFill>
+              </a:rPr>
+              <a:t>software requirements specification</a:t>
+            </a:r>
+            <a:r>
+              <a:rPr lang="en-US" sz="2200" dirty="0" smtClean="0"/>
+              <a:t>.</a:t>
+            </a:r>
+            <a:endParaRPr lang="en-US" sz="2200" i="1" dirty="0" smtClean="0">
+              <a:solidFill>
+                <a:srgbClr val="C00000"/>
+              </a:solidFill>
+            </a:endParaRPr>
+          </a:p>
+          <a:p>
+            <a:pPr marL="457200" indent="-457200">
+              <a:buFont typeface="Wingdings" pitchFamily="2" charset="2"/>
+              <a:buChar char="Ø"/>
+            </a:pPr>
+            <a:r>
+              <a:rPr lang="en-US" sz="2200" dirty="0" smtClean="0"/>
+              <a:t>To create </a:t>
+            </a:r>
+            <a:r>
+              <a:rPr lang="en-US" sz="2200" smtClean="0"/>
+              <a:t>an </a:t>
+            </a:r>
+            <a:r>
+              <a:rPr lang="en-US" sz="2200" i="1" smtClean="0">
+                <a:solidFill>
+                  <a:srgbClr val="C00000"/>
+                </a:solidFill>
+              </a:rPr>
+              <a:t>architecture</a:t>
+            </a:r>
+            <a:r>
+              <a:rPr lang="en-US" sz="2200" smtClean="0"/>
+              <a:t>.</a:t>
+            </a:r>
+            <a:endParaRPr lang="en-US" sz="2200" i="1" dirty="0" smtClean="0">
+              <a:solidFill>
+                <a:srgbClr val="C00000"/>
+              </a:solidFill>
+            </a:endParaRPr>
+          </a:p>
+          <a:p>
+            <a:pPr marL="457200" indent="-457200">
+              <a:buFont typeface="Wingdings" pitchFamily="2" charset="2"/>
+              <a:buChar char="Ø"/>
+            </a:pPr>
+            <a:r>
+              <a:rPr lang="en-US" sz="2200" dirty="0" smtClean="0"/>
+              <a:t>To create a </a:t>
+            </a:r>
+            <a:r>
+              <a:rPr lang="en-US" sz="2200" i="1" dirty="0" smtClean="0">
+                <a:solidFill>
+                  <a:srgbClr val="C00000"/>
+                </a:solidFill>
+              </a:rPr>
+              <a:t>feasibility study report</a:t>
+            </a:r>
+            <a:r>
+              <a:rPr lang="en-US" sz="2200" dirty="0" smtClean="0"/>
+              <a:t>.</a:t>
+            </a:r>
+            <a:endParaRPr lang="en-US" sz="2200" i="1" dirty="0" smtClean="0">
+              <a:solidFill>
+                <a:srgbClr val="C00000"/>
+              </a:solidFill>
+            </a:endParaRPr>
+          </a:p>
+          <a:p>
+            <a:pPr marL="457200" indent="-457200">
+              <a:buFont typeface="Wingdings" pitchFamily="2" charset="2"/>
+              <a:buChar char="Ø"/>
+            </a:pPr>
+            <a:r>
+              <a:rPr lang="en-US" sz="2200" dirty="0" smtClean="0"/>
+              <a:t>To create a </a:t>
+            </a:r>
+            <a:r>
+              <a:rPr lang="en-US" sz="2200" i="1" dirty="0" smtClean="0">
+                <a:solidFill>
+                  <a:srgbClr val="C00000"/>
+                </a:solidFill>
+              </a:rPr>
+              <a:t>proof of concept</a:t>
+            </a:r>
+            <a:r>
+              <a:rPr lang="en-US" sz="2200" dirty="0" smtClean="0"/>
+              <a:t>.</a:t>
+            </a:r>
+            <a:endParaRPr lang="en-US" sz="2200" i="1" dirty="0" smtClean="0">
+              <a:solidFill>
+                <a:srgbClr val="C00000"/>
+              </a:solidFill>
+            </a:endParaRPr>
+          </a:p>
+          <a:p>
+            <a:pPr marL="457200" indent="-457200">
+              <a:buFont typeface="Wingdings" pitchFamily="2" charset="2"/>
+              <a:buChar char="Ø"/>
+            </a:pPr>
+            <a:r>
+              <a:rPr lang="en-US" sz="2200" dirty="0" smtClean="0"/>
+              <a:t>To create a </a:t>
+            </a:r>
+            <a:r>
+              <a:rPr lang="en-US" sz="2200" i="1" dirty="0" smtClean="0">
+                <a:solidFill>
+                  <a:srgbClr val="C00000"/>
+                </a:solidFill>
+              </a:rPr>
+              <a:t>project charter</a:t>
+            </a:r>
+            <a:r>
+              <a:rPr lang="en-US" sz="2200" dirty="0" smtClean="0"/>
+              <a:t>.</a:t>
+            </a:r>
+            <a:endParaRPr lang="en-US" sz="2200" i="1" dirty="0" smtClean="0">
+              <a:solidFill>
+                <a:srgbClr val="C00000"/>
+              </a:solidFill>
+            </a:endParaRPr>
+          </a:p>
+          <a:p>
+            <a:pPr marL="457200" indent="-457200">
+              <a:buFont typeface="Wingdings" pitchFamily="2" charset="2"/>
+              <a:buChar char="Ø"/>
+            </a:pPr>
+            <a:r>
+              <a:rPr lang="en-US" sz="2200" dirty="0" smtClean="0"/>
+              <a:t>To create a </a:t>
+            </a:r>
+            <a:r>
+              <a:rPr lang="en-US" sz="2200" i="1" dirty="0" smtClean="0">
+                <a:solidFill>
+                  <a:srgbClr val="C00000"/>
+                </a:solidFill>
+              </a:rPr>
+              <a:t>process definition document</a:t>
+            </a:r>
+            <a:r>
+              <a:rPr lang="en-US" sz="2200" dirty="0" smtClean="0"/>
+              <a:t>.</a:t>
+            </a:r>
+            <a:endParaRPr lang="en-US" sz="2200" i="1" dirty="0" smtClean="0">
+              <a:solidFill>
+                <a:srgbClr val="C00000"/>
+              </a:solidFill>
+            </a:endParaRPr>
+          </a:p>
+        </p:txBody>
+      </p:sp>
+      <p:pic>
+        <p:nvPicPr>
+          <p:cNvPr id="4" name="Picture 2"/>
+          <p:cNvPicPr>
+            <a:picLocks noChangeAspect="1" noChangeArrowheads="1"/>
+          </p:cNvPicPr>
+          <p:nvPr/>
+        </p:nvPicPr>
+        <p:blipFill>
+          <a:blip r:embed="rId2" cstate="print"/>
+          <a:srcRect/>
+          <a:stretch>
+            <a:fillRect/>
+          </a:stretch>
+        </p:blipFill>
+        <p:spPr bwMode="auto">
+          <a:xfrm>
+            <a:off x="6000750" y="2609850"/>
+            <a:ext cx="2762250" cy="2114550"/>
+          </a:xfrm>
+          <a:prstGeom prst="rect">
+            <a:avLst/>
+          </a:prstGeom>
+          <a:noFill/>
+          <a:ln w="9525">
+            <a:noFill/>
+            <a:miter lim="800000"/>
+            <a:headEnd/>
+            <a:tailEnd/>
+          </a:ln>
+          <a:effectLst/>
+        </p:spPr>
+      </p:pic>
+    </p:spTree>
+  </p:cSld>
+  <p:clrMapOvr>
+    <a:masterClrMapping/>
+  </p:clrMapOvr>
+  <p:timing>
+    <p:tnLst>
+      <p:par>
+        <p:cTn id="1" dur="indefinite" restart="never" nodeType="tmRoot"/>
+      </p:par>
+    </p:tnLst>
+  </p:timing>
+</p:sld>
+</file>
+
+<file path=ppt/slides/slide20.xml><?xml version="1.0" encoding="utf-8"?>
 <p:sld xmlns:a="http://schemas.openxmlformats.org/drawingml/2006/main" xmlns:r="http://schemas.openxmlformats.org/officeDocument/2006/relationships" xmlns:p="http://schemas.openxmlformats.org/presentationml/2006/main">
   <p:cSld>
     <p:spTree>
@@ -12786,7 +12705,7 @@
 </p:sld>
 </file>
 
-<file path=ppt/slides/slide22.xml><?xml version="1.0" encoding="utf-8"?>
+<file path=ppt/slides/slide21.xml><?xml version="1.0" encoding="utf-8"?>
 <p:sld xmlns:a="http://schemas.openxmlformats.org/drawingml/2006/main" xmlns:r="http://schemas.openxmlformats.org/officeDocument/2006/relationships" xmlns:p="http://schemas.openxmlformats.org/presentationml/2006/main">
   <p:cSld>
     <p:spTree>
@@ -12982,7 +12901,7 @@
 </p:sld>
 </file>
 
-<file path=ppt/slides/slide23.xml><?xml version="1.0" encoding="utf-8"?>
+<file path=ppt/slides/slide22.xml><?xml version="1.0" encoding="utf-8"?>
 <p:sld xmlns:a="http://schemas.openxmlformats.org/drawingml/2006/main" xmlns:r="http://schemas.openxmlformats.org/officeDocument/2006/relationships" xmlns:p="http://schemas.openxmlformats.org/presentationml/2006/main">
   <p:cSld>
     <p:spTree>
@@ -13173,7 +13092,7 @@
 </p:sld>
 </file>
 
-<file path=ppt/slides/slide24.xml><?xml version="1.0" encoding="utf-8"?>
+<file path=ppt/slides/slide23.xml><?xml version="1.0" encoding="utf-8"?>
 <p:sld xmlns:a="http://schemas.openxmlformats.org/drawingml/2006/main" xmlns:r="http://schemas.openxmlformats.org/officeDocument/2006/relationships" xmlns:p="http://schemas.openxmlformats.org/presentationml/2006/main">
   <p:cSld>
     <p:spTree>
@@ -13297,7 +13216,7 @@
 </p:sld>
 </file>
 
-<file path=ppt/slides/slide25.xml><?xml version="1.0" encoding="utf-8"?>
+<file path=ppt/slides/slide24.xml><?xml version="1.0" encoding="utf-8"?>
 <p:sld xmlns:a="http://schemas.openxmlformats.org/drawingml/2006/main" xmlns:r="http://schemas.openxmlformats.org/officeDocument/2006/relationships" xmlns:p="http://schemas.openxmlformats.org/presentationml/2006/main">
   <p:cSld>
     <p:spTree>
@@ -13377,7 +13296,7 @@
 </p:sld>
 </file>
 
-<file path=ppt/slides/slide26.xml><?xml version="1.0" encoding="utf-8"?>
+<file path=ppt/slides/slide25.xml><?xml version="1.0" encoding="utf-8"?>
 <p:sld xmlns:a="http://schemas.openxmlformats.org/drawingml/2006/main" xmlns:r="http://schemas.openxmlformats.org/officeDocument/2006/relationships" xmlns:p="http://schemas.openxmlformats.org/presentationml/2006/main">
   <p:cSld>
     <p:spTree>
@@ -13457,7 +13376,7 @@
 </p:sld>
 </file>
 
-<file path=ppt/slides/slide27.xml><?xml version="1.0" encoding="utf-8"?>
+<file path=ppt/slides/slide26.xml><?xml version="1.0" encoding="utf-8"?>
 <p:sld xmlns:a="http://schemas.openxmlformats.org/drawingml/2006/main" xmlns:r="http://schemas.openxmlformats.org/officeDocument/2006/relationships" xmlns:p="http://schemas.openxmlformats.org/presentationml/2006/main">
   <p:cSld>
     <p:spTree>
@@ -13561,7 +13480,7 @@
 </p:sld>
 </file>
 
-<file path=ppt/slides/slide28.xml><?xml version="1.0" encoding="utf-8"?>
+<file path=ppt/slides/slide27.xml><?xml version="1.0" encoding="utf-8"?>
 <p:sld xmlns:a="http://schemas.openxmlformats.org/drawingml/2006/main" xmlns:r="http://schemas.openxmlformats.org/officeDocument/2006/relationships" xmlns:p="http://schemas.openxmlformats.org/presentationml/2006/main">
   <p:cSld>
     <p:spTree>
@@ -13665,7 +13584,7 @@
 </p:sld>
 </file>
 
-<file path=ppt/slides/slide29.xml><?xml version="1.0" encoding="utf-8"?>
+<file path=ppt/slides/slide28.xml><?xml version="1.0" encoding="utf-8"?>
 <p:sld xmlns:a="http://schemas.openxmlformats.org/drawingml/2006/main" xmlns:r="http://schemas.openxmlformats.org/officeDocument/2006/relationships" xmlns:p="http://schemas.openxmlformats.org/presentationml/2006/main">
   <p:cSld>
     <p:spTree>
@@ -13716,205 +13635,7 @@
 </p:sld>
 </file>
 
-<file path=ppt/slides/slide3.xml><?xml version="1.0" encoding="utf-8"?>
-<p:sld xmlns:a="http://schemas.openxmlformats.org/drawingml/2006/main" xmlns:r="http://schemas.openxmlformats.org/officeDocument/2006/relationships" xmlns:p="http://schemas.openxmlformats.org/presentationml/2006/main">
-  <p:cSld>
-    <p:spTree>
-      <p:nvGrpSpPr>
-        <p:cNvPr id="1" name=""/>
-        <p:cNvGrpSpPr/>
-        <p:nvPr/>
-      </p:nvGrpSpPr>
-      <p:grpSpPr>
-        <a:xfrm>
-          <a:off x="0" y="0"/>
-          <a:ext cx="0" cy="0"/>
-          <a:chOff x="0" y="0"/>
-          <a:chExt cx="0" cy="0"/>
-        </a:xfrm>
-      </p:grpSpPr>
-      <p:pic>
-        <p:nvPicPr>
-          <p:cNvPr id="1028" name="Picture 4"/>
-          <p:cNvPicPr>
-            <a:picLocks noChangeAspect="1" noChangeArrowheads="1"/>
-          </p:cNvPicPr>
-          <p:nvPr/>
-        </p:nvPicPr>
-        <p:blipFill>
-          <a:blip r:embed="rId2" cstate="print"/>
-          <a:srcRect/>
-          <a:stretch>
-            <a:fillRect/>
-          </a:stretch>
-        </p:blipFill>
-        <p:spPr bwMode="auto">
-          <a:xfrm>
-            <a:off x="6477000" y="2438400"/>
-            <a:ext cx="2390775" cy="2390775"/>
-          </a:xfrm>
-          <a:prstGeom prst="rect">
-            <a:avLst/>
-          </a:prstGeom>
-          <a:noFill/>
-          <a:ln w="9525">
-            <a:noFill/>
-            <a:miter lim="800000"/>
-            <a:headEnd/>
-            <a:tailEnd/>
-          </a:ln>
-        </p:spPr>
-      </p:pic>
-      <p:sp>
-        <p:nvSpPr>
-          <p:cNvPr id="2" name="Title 1"/>
-          <p:cNvSpPr>
-            <a:spLocks noGrp="1"/>
-          </p:cNvSpPr>
-          <p:nvPr>
-            <p:ph type="title"/>
-          </p:nvPr>
-        </p:nvSpPr>
-        <p:spPr/>
-        <p:txBody>
-          <a:bodyPr/>
-          <a:lstStyle/>
-          <a:p>
-            <a:r>
-              <a:rPr lang="en-US" dirty="0" smtClean="0"/>
-              <a:t>Contents</a:t>
-            </a:r>
-            <a:endParaRPr lang="en-US" dirty="0"/>
-          </a:p>
-        </p:txBody>
-      </p:sp>
-      <p:sp>
-        <p:nvSpPr>
-          <p:cNvPr id="3" name="Content Placeholder 2"/>
-          <p:cNvSpPr>
-            <a:spLocks noGrp="1"/>
-          </p:cNvSpPr>
-          <p:nvPr>
-            <p:ph idx="1"/>
-          </p:nvPr>
-        </p:nvSpPr>
-        <p:spPr>
-          <a:xfrm>
-            <a:off x="457200" y="1600200"/>
-            <a:ext cx="6096000" cy="4525963"/>
-          </a:xfrm>
-        </p:spPr>
-        <p:txBody>
-          <a:bodyPr/>
-          <a:lstStyle/>
-          <a:p>
-            <a:pPr marL="571500" indent="-571500">
-              <a:buFont typeface="+mj-lt"/>
-              <a:buAutoNum type="romanUcPeriod"/>
-            </a:pPr>
-            <a:r>
-              <a:rPr lang="en-US" sz="2400" dirty="0" smtClean="0"/>
-              <a:t>Executive summary.</a:t>
-            </a:r>
-          </a:p>
-          <a:p>
-            <a:pPr marL="571500" indent="-571500">
-              <a:buFont typeface="+mj-lt"/>
-              <a:buAutoNum type="romanUcPeriod"/>
-            </a:pPr>
-            <a:r>
-              <a:rPr lang="en-US" sz="2400" dirty="0" smtClean="0"/>
-              <a:t>Project vision and scope.</a:t>
-            </a:r>
-          </a:p>
-          <a:p>
-            <a:pPr marL="571500" indent="-571500">
-              <a:buFont typeface="+mj-lt"/>
-              <a:buAutoNum type="romanUcPeriod"/>
-            </a:pPr>
-            <a:r>
-              <a:rPr lang="en-US" sz="2400" dirty="0" smtClean="0"/>
-              <a:t>Mockup, prototype.</a:t>
-            </a:r>
-          </a:p>
-          <a:p>
-            <a:pPr marL="571500" indent="-571500">
-              <a:buFont typeface="+mj-lt"/>
-              <a:buAutoNum type="romanUcPeriod"/>
-            </a:pPr>
-            <a:r>
-              <a:rPr lang="en-US" sz="2400" dirty="0" smtClean="0"/>
-              <a:t>Software requirements specification.</a:t>
-            </a:r>
-          </a:p>
-          <a:p>
-            <a:pPr marL="571500" indent="-571500">
-              <a:buFont typeface="+mj-lt"/>
-              <a:buAutoNum type="romanUcPeriod"/>
-            </a:pPr>
-            <a:r>
-              <a:rPr lang="en-US" sz="2400" dirty="0" smtClean="0"/>
-              <a:t>Architecture.</a:t>
-            </a:r>
-          </a:p>
-          <a:p>
-            <a:pPr marL="571500" indent="-571500">
-              <a:buFont typeface="+mj-lt"/>
-              <a:buAutoNum type="romanUcPeriod"/>
-            </a:pPr>
-            <a:r>
-              <a:rPr lang="en-US" sz="2400" dirty="0" smtClean="0"/>
-              <a:t>Proof of concept.</a:t>
-            </a:r>
-          </a:p>
-          <a:p>
-            <a:pPr marL="571500" indent="-571500">
-              <a:buFont typeface="+mj-lt"/>
-              <a:buAutoNum type="romanUcPeriod"/>
-            </a:pPr>
-            <a:r>
-              <a:rPr lang="en-US" sz="2400" dirty="0" smtClean="0"/>
-              <a:t>Feasibility study report.</a:t>
-            </a:r>
-          </a:p>
-          <a:p>
-            <a:pPr marL="571500" indent="-571500">
-              <a:buFont typeface="+mj-lt"/>
-              <a:buAutoNum type="romanUcPeriod"/>
-            </a:pPr>
-            <a:r>
-              <a:rPr lang="en-US" sz="2400" dirty="0" smtClean="0"/>
-              <a:t>Project charter.</a:t>
-            </a:r>
-          </a:p>
-          <a:p>
-            <a:pPr marL="571500" indent="-571500">
-              <a:buFont typeface="+mj-lt"/>
-              <a:buAutoNum type="romanUcPeriod"/>
-            </a:pPr>
-            <a:r>
-              <a:rPr lang="en-US" sz="2400" dirty="0" smtClean="0"/>
-              <a:t>Process definition document.</a:t>
-            </a:r>
-          </a:p>
-          <a:p>
-            <a:pPr marL="571500" indent="-571500">
-              <a:buFont typeface="+mj-lt"/>
-              <a:buAutoNum type="romanUcPeriod"/>
-            </a:pPr>
-            <a:endParaRPr lang="en-US" sz="2400" dirty="0" smtClean="0"/>
-          </a:p>
-        </p:txBody>
-      </p:sp>
-    </p:spTree>
-  </p:cSld>
-  <p:clrMapOvr>
-    <a:masterClrMapping/>
-  </p:clrMapOvr>
-</p:sld>
-</file>
-
-<file path=ppt/slides/slide30.xml><?xml version="1.0" encoding="utf-8"?>
+<file path=ppt/slides/slide29.xml><?xml version="1.0" encoding="utf-8"?>
 <p:sld xmlns:a="http://schemas.openxmlformats.org/drawingml/2006/main" xmlns:r="http://schemas.openxmlformats.org/officeDocument/2006/relationships" xmlns:p="http://schemas.openxmlformats.org/presentationml/2006/main">
   <p:cSld>
     <p:spTree>
@@ -14256,7 +13977,205 @@
 </p:sld>
 </file>
 
-<file path=ppt/slides/slide31.xml><?xml version="1.0" encoding="utf-8"?>
+<file path=ppt/slides/slide3.xml><?xml version="1.0" encoding="utf-8"?>
+<p:sld xmlns:a="http://schemas.openxmlformats.org/drawingml/2006/main" xmlns:r="http://schemas.openxmlformats.org/officeDocument/2006/relationships" xmlns:p="http://schemas.openxmlformats.org/presentationml/2006/main">
+  <p:cSld>
+    <p:spTree>
+      <p:nvGrpSpPr>
+        <p:cNvPr id="1" name=""/>
+        <p:cNvGrpSpPr/>
+        <p:nvPr/>
+      </p:nvGrpSpPr>
+      <p:grpSpPr>
+        <a:xfrm>
+          <a:off x="0" y="0"/>
+          <a:ext cx="0" cy="0"/>
+          <a:chOff x="0" y="0"/>
+          <a:chExt cx="0" cy="0"/>
+        </a:xfrm>
+      </p:grpSpPr>
+      <p:pic>
+        <p:nvPicPr>
+          <p:cNvPr id="1028" name="Picture 4"/>
+          <p:cNvPicPr>
+            <a:picLocks noChangeAspect="1" noChangeArrowheads="1"/>
+          </p:cNvPicPr>
+          <p:nvPr/>
+        </p:nvPicPr>
+        <p:blipFill>
+          <a:blip r:embed="rId2" cstate="print"/>
+          <a:srcRect/>
+          <a:stretch>
+            <a:fillRect/>
+          </a:stretch>
+        </p:blipFill>
+        <p:spPr bwMode="auto">
+          <a:xfrm>
+            <a:off x="6477000" y="2438400"/>
+            <a:ext cx="2390775" cy="2390775"/>
+          </a:xfrm>
+          <a:prstGeom prst="rect">
+            <a:avLst/>
+          </a:prstGeom>
+          <a:noFill/>
+          <a:ln w="9525">
+            <a:noFill/>
+            <a:miter lim="800000"/>
+            <a:headEnd/>
+            <a:tailEnd/>
+          </a:ln>
+        </p:spPr>
+      </p:pic>
+      <p:sp>
+        <p:nvSpPr>
+          <p:cNvPr id="2" name="Title 1"/>
+          <p:cNvSpPr>
+            <a:spLocks noGrp="1"/>
+          </p:cNvSpPr>
+          <p:nvPr>
+            <p:ph type="title"/>
+          </p:nvPr>
+        </p:nvSpPr>
+        <p:spPr/>
+        <p:txBody>
+          <a:bodyPr/>
+          <a:lstStyle/>
+          <a:p>
+            <a:r>
+              <a:rPr lang="en-US" dirty="0" smtClean="0"/>
+              <a:t>Contents</a:t>
+            </a:r>
+            <a:endParaRPr lang="en-US" dirty="0"/>
+          </a:p>
+        </p:txBody>
+      </p:sp>
+      <p:sp>
+        <p:nvSpPr>
+          <p:cNvPr id="3" name="Content Placeholder 2"/>
+          <p:cNvSpPr>
+            <a:spLocks noGrp="1"/>
+          </p:cNvSpPr>
+          <p:nvPr>
+            <p:ph idx="1"/>
+          </p:nvPr>
+        </p:nvSpPr>
+        <p:spPr>
+          <a:xfrm>
+            <a:off x="457200" y="1600200"/>
+            <a:ext cx="6096000" cy="4525963"/>
+          </a:xfrm>
+        </p:spPr>
+        <p:txBody>
+          <a:bodyPr/>
+          <a:lstStyle/>
+          <a:p>
+            <a:pPr marL="571500" indent="-571500">
+              <a:buFont typeface="+mj-lt"/>
+              <a:buAutoNum type="romanUcPeriod"/>
+            </a:pPr>
+            <a:r>
+              <a:rPr lang="en-US" sz="2400" dirty="0" smtClean="0"/>
+              <a:t>Executive summary.</a:t>
+            </a:r>
+          </a:p>
+          <a:p>
+            <a:pPr marL="571500" indent="-571500">
+              <a:buFont typeface="+mj-lt"/>
+              <a:buAutoNum type="romanUcPeriod"/>
+            </a:pPr>
+            <a:r>
+              <a:rPr lang="en-US" sz="2400" dirty="0" smtClean="0"/>
+              <a:t>Project vision and scope.</a:t>
+            </a:r>
+          </a:p>
+          <a:p>
+            <a:pPr marL="571500" indent="-571500">
+              <a:buFont typeface="+mj-lt"/>
+              <a:buAutoNum type="romanUcPeriod"/>
+            </a:pPr>
+            <a:r>
+              <a:rPr lang="en-US" sz="2400" dirty="0" smtClean="0"/>
+              <a:t>Mockup, prototype.</a:t>
+            </a:r>
+          </a:p>
+          <a:p>
+            <a:pPr marL="571500" indent="-571500">
+              <a:buFont typeface="+mj-lt"/>
+              <a:buAutoNum type="romanUcPeriod"/>
+            </a:pPr>
+            <a:r>
+              <a:rPr lang="en-US" sz="2400" dirty="0" smtClean="0"/>
+              <a:t>Software requirements specification.</a:t>
+            </a:r>
+          </a:p>
+          <a:p>
+            <a:pPr marL="571500" indent="-571500">
+              <a:buFont typeface="+mj-lt"/>
+              <a:buAutoNum type="romanUcPeriod"/>
+            </a:pPr>
+            <a:r>
+              <a:rPr lang="en-US" sz="2400" dirty="0" smtClean="0"/>
+              <a:t>Architecture.</a:t>
+            </a:r>
+          </a:p>
+          <a:p>
+            <a:pPr marL="571500" indent="-571500">
+              <a:buFont typeface="+mj-lt"/>
+              <a:buAutoNum type="romanUcPeriod"/>
+            </a:pPr>
+            <a:r>
+              <a:rPr lang="en-US" sz="2400" dirty="0" smtClean="0"/>
+              <a:t>Proof of concept.</a:t>
+            </a:r>
+          </a:p>
+          <a:p>
+            <a:pPr marL="571500" indent="-571500">
+              <a:buFont typeface="+mj-lt"/>
+              <a:buAutoNum type="romanUcPeriod"/>
+            </a:pPr>
+            <a:r>
+              <a:rPr lang="en-US" sz="2400" dirty="0" smtClean="0"/>
+              <a:t>Feasibility study report.</a:t>
+            </a:r>
+          </a:p>
+          <a:p>
+            <a:pPr marL="571500" indent="-571500">
+              <a:buFont typeface="+mj-lt"/>
+              <a:buAutoNum type="romanUcPeriod"/>
+            </a:pPr>
+            <a:r>
+              <a:rPr lang="en-US" sz="2400" dirty="0" smtClean="0"/>
+              <a:t>Project charter.</a:t>
+            </a:r>
+          </a:p>
+          <a:p>
+            <a:pPr marL="571500" indent="-571500">
+              <a:buFont typeface="+mj-lt"/>
+              <a:buAutoNum type="romanUcPeriod"/>
+            </a:pPr>
+            <a:r>
+              <a:rPr lang="en-US" sz="2400" dirty="0" smtClean="0"/>
+              <a:t>Process definition document.</a:t>
+            </a:r>
+          </a:p>
+          <a:p>
+            <a:pPr marL="571500" indent="-571500">
+              <a:buFont typeface="+mj-lt"/>
+              <a:buAutoNum type="romanUcPeriod"/>
+            </a:pPr>
+            <a:endParaRPr lang="en-US" sz="2400" dirty="0" smtClean="0"/>
+          </a:p>
+        </p:txBody>
+      </p:sp>
+    </p:spTree>
+  </p:cSld>
+  <p:clrMapOvr>
+    <a:masterClrMapping/>
+  </p:clrMapOvr>
+</p:sld>
+</file>
+
+<file path=ppt/slides/slide30.xml><?xml version="1.0" encoding="utf-8"?>
 <p:sld xmlns:a="http://schemas.openxmlformats.org/drawingml/2006/main" xmlns:r="http://schemas.openxmlformats.org/officeDocument/2006/relationships" xmlns:p="http://schemas.openxmlformats.org/presentationml/2006/main">
   <p:cSld>
     <p:spTree>
@@ -14497,7 +14416,7 @@
 </p:sld>
 </file>
 
-<file path=ppt/slides/slide32.xml><?xml version="1.0" encoding="utf-8"?>
+<file path=ppt/slides/slide31.xml><?xml version="1.0" encoding="utf-8"?>
 <p:sld xmlns:a="http://schemas.openxmlformats.org/drawingml/2006/main" xmlns:r="http://schemas.openxmlformats.org/officeDocument/2006/relationships" xmlns:p="http://schemas.openxmlformats.org/presentationml/2006/main">
   <p:cSld>
     <p:spTree>
@@ -14695,7 +14614,7 @@
 </p:sld>
 </file>
 
-<file path=ppt/slides/slide33.xml><?xml version="1.0" encoding="utf-8"?>
+<file path=ppt/slides/slide32.xml><?xml version="1.0" encoding="utf-8"?>
 <p:sld xmlns:a="http://schemas.openxmlformats.org/drawingml/2006/main" xmlns:r="http://schemas.openxmlformats.org/officeDocument/2006/relationships" xmlns:p="http://schemas.openxmlformats.org/presentationml/2006/main">
   <p:cSld>
     <p:spTree>
@@ -14746,7 +14665,7 @@
 </p:sld>
 </file>
 
-<file path=ppt/slides/slide34.xml><?xml version="1.0" encoding="utf-8"?>
+<file path=ppt/slides/slide33.xml><?xml version="1.0" encoding="utf-8"?>
 <p:sld xmlns:a="http://schemas.openxmlformats.org/drawingml/2006/main" xmlns:r="http://schemas.openxmlformats.org/officeDocument/2006/relationships" xmlns:p="http://schemas.openxmlformats.org/presentationml/2006/main">
   <p:cSld>
     <p:spTree>
@@ -15080,7 +14999,7 @@
 </p:sld>
 </file>
 
-<file path=ppt/slides/slide35.xml><?xml version="1.0" encoding="utf-8"?>
+<file path=ppt/slides/slide34.xml><?xml version="1.0" encoding="utf-8"?>
 <p:sld xmlns:a="http://schemas.openxmlformats.org/drawingml/2006/main" xmlns:r="http://schemas.openxmlformats.org/officeDocument/2006/relationships" xmlns:p="http://schemas.openxmlformats.org/presentationml/2006/main">
   <p:cSld>
     <p:spTree>
@@ -15822,16 +15741,131 @@
           </a:p>
         </p:txBody>
       </p:sp>
+      <p:sp>
+        <p:nvSpPr>
+          <p:cNvPr id="3" name="Content Placeholder 2"/>
+          <p:cNvSpPr>
+            <a:spLocks noGrp="1"/>
+          </p:cNvSpPr>
+          <p:nvPr>
+            <p:ph idx="1"/>
+          </p:nvPr>
+        </p:nvSpPr>
+        <p:spPr/>
+        <p:txBody>
+          <a:bodyPr/>
+          <a:lstStyle/>
+          <a:p>
+            <a:r>
+              <a:rPr lang="en-US" sz="2000" dirty="0" smtClean="0"/>
+              <a:t>Sponsor? Client?</a:t>
+            </a:r>
+          </a:p>
+          <a:p>
+            <a:pPr lvl="1"/>
+            <a:r>
+              <a:rPr lang="en-US" sz="1800" dirty="0" smtClean="0"/>
+              <a:t>Name, address, phone number?</a:t>
+            </a:r>
+            <a:endParaRPr lang="en-US" sz="1800" dirty="0" smtClean="0"/>
+          </a:p>
+          <a:p>
+            <a:r>
+              <a:rPr lang="en-US" sz="2000" dirty="0" smtClean="0"/>
+              <a:t>Budget?</a:t>
+            </a:r>
+          </a:p>
+          <a:p>
+            <a:r>
+              <a:rPr lang="en-US" sz="2000" dirty="0" smtClean="0"/>
+              <a:t>Problems?</a:t>
+            </a:r>
+          </a:p>
+          <a:p>
+            <a:r>
+              <a:rPr lang="en-US" sz="2000" dirty="0" smtClean="0"/>
+              <a:t>Business </a:t>
+            </a:r>
+            <a:r>
+              <a:rPr lang="en-US" sz="2000" dirty="0" smtClean="0"/>
+              <a:t>Use </a:t>
+            </a:r>
+            <a:r>
+              <a:rPr lang="en-US" sz="2000" dirty="0" smtClean="0"/>
+              <a:t>Cases?</a:t>
+            </a:r>
+          </a:p>
+          <a:p>
+            <a:r>
+              <a:rPr lang="en-US" sz="2000" dirty="0" smtClean="0"/>
+              <a:t>Problem Relevance?</a:t>
+            </a:r>
+          </a:p>
+          <a:p>
+            <a:pPr lvl="1"/>
+            <a:r>
+              <a:rPr lang="en-US" sz="1800" dirty="0" smtClean="0"/>
+              <a:t>Competitors? Similar Products?</a:t>
+            </a:r>
+          </a:p>
+          <a:p>
+            <a:pPr lvl="1"/>
+            <a:r>
+              <a:rPr lang="en-US" sz="1800" dirty="0" smtClean="0"/>
+              <a:t>Product purchased by </a:t>
+            </a:r>
+            <a:r>
+              <a:rPr lang="en-US" sz="1800" dirty="0" smtClean="0"/>
+              <a:t>yourself?</a:t>
+            </a:r>
+            <a:endParaRPr lang="en-US" sz="1800" dirty="0" smtClean="0"/>
+          </a:p>
+          <a:p>
+            <a:pPr lvl="1"/>
+            <a:r>
+              <a:rPr lang="en-US" sz="1800" dirty="0" smtClean="0"/>
+              <a:t>Related Word? Evaluation?</a:t>
+            </a:r>
+          </a:p>
+          <a:p>
+            <a:r>
+              <a:rPr lang="en-US" sz="2000" dirty="0" smtClean="0"/>
+              <a:t>Stakeholders?</a:t>
+            </a:r>
+          </a:p>
+          <a:p>
+            <a:pPr lvl="1"/>
+            <a:r>
+              <a:rPr lang="en-US" sz="1800" dirty="0" smtClean="0"/>
+              <a:t>Can you meet with them or reach an agreement?</a:t>
+            </a:r>
+            <a:endParaRPr lang="en-US" sz="1800" dirty="0" smtClean="0"/>
+          </a:p>
+          <a:p>
+            <a:r>
+              <a:rPr lang="en-US" sz="2000" dirty="0" smtClean="0"/>
+              <a:t>Time?</a:t>
+            </a:r>
+          </a:p>
+          <a:p>
+            <a:r>
+              <a:rPr lang="en-US" sz="2000" dirty="0" smtClean="0"/>
+              <a:t>Cost?</a:t>
+            </a:r>
+            <a:endParaRPr lang="en-US" sz="2000" dirty="0"/>
+          </a:p>
+        </p:txBody>
+      </p:sp>
       <p:pic>
         <p:nvPicPr>
-          <p:cNvPr id="2051" name="Picture 3"/>
+          <p:cNvPr id="5" name="Picture 3"/>
           <p:cNvPicPr>
             <a:picLocks noChangeAspect="1" noChangeArrowheads="1"/>
           </p:cNvPicPr>
           <p:nvPr/>
         </p:nvPicPr>
         <p:blipFill>
-          <a:blip r:embed="rId3" cstate="print"/>
+          <a:blip r:embed="rId2" cstate="print"/>
           <a:srcRect/>
           <a:stretch>
             <a:fillRect/>
@@ -15839,7 +15873,7 @@
         </p:blipFill>
         <p:spPr bwMode="auto">
           <a:xfrm>
-            <a:off x="3581400" y="2286000"/>
+            <a:off x="6248400" y="1752600"/>
             <a:ext cx="2103120" cy="2735580"/>
           </a:xfrm>
           <a:prstGeom prst="rect">
@@ -15854,152 +15888,11 @@
           </a:ln>
         </p:spPr>
       </p:pic>
-      <p:pic>
-        <p:nvPicPr>
-          <p:cNvPr id="4" name="Picture 2" descr="http://www.texasrockgym.com/wp-content/uploads/2016/04/exercise.jpg"/>
-          <p:cNvPicPr>
-            <a:picLocks noChangeAspect="1" noChangeArrowheads="1"/>
-          </p:cNvPicPr>
-          <p:nvPr/>
-        </p:nvPicPr>
-        <p:blipFill>
-          <a:blip r:embed="rId4" cstate="print"/>
-          <a:srcRect/>
-          <a:stretch>
-            <a:fillRect/>
-          </a:stretch>
-        </p:blipFill>
-        <p:spPr bwMode="auto">
-          <a:xfrm>
-            <a:off x="5867400" y="3581400"/>
-            <a:ext cx="2602992" cy="1600200"/>
-          </a:xfrm>
-          <a:prstGeom prst="rect">
-            <a:avLst/>
-          </a:prstGeom>
-          <a:noFill/>
-        </p:spPr>
-      </p:pic>
-      <p:pic>
-        <p:nvPicPr>
-          <p:cNvPr id="5" name="Picture 2" descr="https://ideascale.com/wp-content/uploads/2015/02/Innovation-Leadership.png"/>
-          <p:cNvPicPr>
-            <a:picLocks noChangeAspect="1" noChangeArrowheads="1"/>
-          </p:cNvPicPr>
-          <p:nvPr/>
-        </p:nvPicPr>
-        <p:blipFill>
-          <a:blip r:embed="rId5" cstate="print"/>
-          <a:srcRect/>
-          <a:stretch>
-            <a:fillRect/>
-          </a:stretch>
-        </p:blipFill>
-        <p:spPr bwMode="auto">
-          <a:xfrm>
-            <a:off x="685800" y="2781300"/>
-            <a:ext cx="2857500" cy="2857500"/>
-          </a:xfrm>
-          <a:prstGeom prst="rect">
-            <a:avLst/>
-          </a:prstGeom>
-          <a:noFill/>
-        </p:spPr>
-      </p:pic>
-      <p:sp>
-        <p:nvSpPr>
-          <p:cNvPr id="6" name="Rectangle 5"/>
-          <p:cNvSpPr/>
-          <p:nvPr/>
-        </p:nvSpPr>
-        <p:spPr>
-          <a:xfrm>
-            <a:off x="6019800" y="2000071"/>
-            <a:ext cx="2209800" cy="1200329"/>
-          </a:xfrm>
-          <a:prstGeom prst="rect">
-            <a:avLst/>
-          </a:prstGeom>
-        </p:spPr>
-        <p:txBody>
-          <a:bodyPr wrap="square">
-            <a:spAutoFit/>
-          </a:bodyPr>
-          <a:lstStyle/>
-          <a:p>
-            <a:pPr algn="ctr"/>
-            <a:r>
-              <a:rPr lang="en-US" sz="2400" b="1" dirty="0" smtClean="0">
-                <a:latin typeface="Calibri" pitchFamily="34" charset="0"/>
-                <a:cs typeface="Calibri" pitchFamily="34" charset="0"/>
-              </a:rPr>
-              <a:t>6 members</a:t>
-            </a:r>
-          </a:p>
-          <a:p>
-            <a:pPr algn="ctr"/>
-            <a:r>
-              <a:rPr lang="en-US" sz="2400" b="1" dirty="0" smtClean="0">
-                <a:latin typeface="Calibri" pitchFamily="34" charset="0"/>
-                <a:cs typeface="Calibri" pitchFamily="34" charset="0"/>
-              </a:rPr>
-              <a:t>8 hours per week / member</a:t>
-            </a:r>
-            <a:endParaRPr lang="vi-VN" sz="2400" b="1" dirty="0">
-              <a:latin typeface="Calibri" pitchFamily="34" charset="0"/>
-              <a:cs typeface="Calibri" pitchFamily="34" charset="0"/>
-            </a:endParaRPr>
-          </a:p>
-        </p:txBody>
-      </p:sp>
-      <p:sp>
-        <p:nvSpPr>
-          <p:cNvPr id="7" name="Rectangle 6"/>
-          <p:cNvSpPr/>
-          <p:nvPr/>
-        </p:nvSpPr>
-        <p:spPr>
-          <a:xfrm>
-            <a:off x="990600" y="1790700"/>
-            <a:ext cx="2209800" cy="830997"/>
-          </a:xfrm>
-          <a:prstGeom prst="rect">
-            <a:avLst/>
-          </a:prstGeom>
-        </p:spPr>
-        <p:txBody>
-          <a:bodyPr wrap="square">
-            <a:spAutoFit/>
-          </a:bodyPr>
-          <a:lstStyle/>
-          <a:p>
-            <a:pPr algn="ctr"/>
-            <a:r>
-              <a:rPr lang="en-US" sz="2400" b="1" dirty="0" smtClean="0">
-                <a:latin typeface="Calibri" pitchFamily="34" charset="0"/>
-                <a:cs typeface="Calibri" pitchFamily="34" charset="0"/>
-              </a:rPr>
-              <a:t>Solving real world problem</a:t>
-            </a:r>
-            <a:endParaRPr lang="vi-VN" sz="2400" b="1" dirty="0">
-              <a:latin typeface="Calibri" pitchFamily="34" charset="0"/>
-              <a:cs typeface="Calibri" pitchFamily="34" charset="0"/>
-            </a:endParaRPr>
-          </a:p>
-        </p:txBody>
-      </p:sp>
     </p:spTree>
   </p:cSld>
   <p:clrMapOvr>
     <a:masterClrMapping/>
   </p:clrMapOvr>
-  <p:timing>
-    <p:tnLst>
-      <p:par>
-        <p:cTn id="1" dur="indefinite" restart="never" nodeType="tmRoot"/>
-      </p:par>
-    </p:tnLst>
-  </p:timing>
 </p:sld>
 </file>
 
@@ -16043,126 +15936,191 @@
           </a:p>
         </p:txBody>
       </p:sp>
+      <p:pic>
+        <p:nvPicPr>
+          <p:cNvPr id="4" name="Picture 2" descr="http://www.texasrockgym.com/wp-content/uploads/2016/04/exercise.jpg"/>
+          <p:cNvPicPr>
+            <a:picLocks noChangeAspect="1" noChangeArrowheads="1"/>
+          </p:cNvPicPr>
+          <p:nvPr/>
+        </p:nvPicPr>
+        <p:blipFill>
+          <a:blip r:embed="rId3" cstate="print"/>
+          <a:srcRect/>
+          <a:stretch>
+            <a:fillRect/>
+          </a:stretch>
+        </p:blipFill>
+        <p:spPr bwMode="auto">
+          <a:xfrm>
+            <a:off x="5562600" y="2514600"/>
+            <a:ext cx="2602992" cy="1600200"/>
+          </a:xfrm>
+          <a:prstGeom prst="rect">
+            <a:avLst/>
+          </a:prstGeom>
+          <a:noFill/>
+        </p:spPr>
+      </p:pic>
+      <p:pic>
+        <p:nvPicPr>
+          <p:cNvPr id="5" name="Picture 2" descr="https://ideascale.com/wp-content/uploads/2015/02/Innovation-Leadership.png"/>
+          <p:cNvPicPr>
+            <a:picLocks noChangeAspect="1" noChangeArrowheads="1"/>
+          </p:cNvPicPr>
+          <p:nvPr/>
+        </p:nvPicPr>
+        <p:blipFill>
+          <a:blip r:embed="rId4" cstate="print"/>
+          <a:srcRect/>
+          <a:stretch>
+            <a:fillRect/>
+          </a:stretch>
+        </p:blipFill>
+        <p:spPr bwMode="auto">
+          <a:xfrm>
+            <a:off x="990600" y="2362200"/>
+            <a:ext cx="1905000" cy="1905000"/>
+          </a:xfrm>
+          <a:prstGeom prst="rect">
+            <a:avLst/>
+          </a:prstGeom>
+          <a:noFill/>
+        </p:spPr>
+      </p:pic>
       <p:sp>
         <p:nvSpPr>
-          <p:cNvPr id="3" name="Content Placeholder 2"/>
-          <p:cNvSpPr>
-            <a:spLocks noGrp="1"/>
-          </p:cNvSpPr>
-          <p:nvPr>
-            <p:ph idx="1"/>
-          </p:nvPr>
+          <p:cNvPr id="6" name="Rectangle 5"/>
+          <p:cNvSpPr/>
+          <p:nvPr/>
         </p:nvSpPr>
-        <p:spPr/>
+        <p:spPr>
+          <a:xfrm>
+            <a:off x="4724400" y="1600200"/>
+            <a:ext cx="3962400" cy="830997"/>
+          </a:xfrm>
+          <a:prstGeom prst="rect">
+            <a:avLst/>
+          </a:prstGeom>
+        </p:spPr>
         <p:txBody>
-          <a:bodyPr/>
+          <a:bodyPr wrap="square">
+            <a:spAutoFit/>
+          </a:bodyPr>
           <a:lstStyle/>
           <a:p>
-            <a:r>
-              <a:rPr lang="en-US" sz="2000" dirty="0" smtClean="0"/>
-              <a:t>Sponsor? Client?</a:t>
-            </a:r>
-          </a:p>
-          <a:p>
-            <a:pPr lvl="1"/>
-            <a:r>
-              <a:rPr lang="en-US" sz="1800" dirty="0" smtClean="0"/>
-              <a:t>Name, address, phone number?</a:t>
-            </a:r>
-            <a:endParaRPr lang="en-US" sz="1800" dirty="0" smtClean="0"/>
-          </a:p>
-          <a:p>
-            <a:r>
-              <a:rPr lang="en-US" sz="2000" dirty="0" smtClean="0"/>
-              <a:t>Budget?</a:t>
-            </a:r>
-          </a:p>
-          <a:p>
-            <a:r>
-              <a:rPr lang="en-US" sz="2000" dirty="0" smtClean="0"/>
-              <a:t>Problems?</a:t>
-            </a:r>
-          </a:p>
-          <a:p>
-            <a:r>
-              <a:rPr lang="en-US" sz="2000" dirty="0" smtClean="0"/>
-              <a:t>Business </a:t>
-            </a:r>
-            <a:r>
-              <a:rPr lang="en-US" sz="2000" dirty="0" smtClean="0"/>
-              <a:t>Use </a:t>
-            </a:r>
-            <a:r>
-              <a:rPr lang="en-US" sz="2000" dirty="0" smtClean="0"/>
-              <a:t>Cases?</a:t>
-            </a:r>
-          </a:p>
-          <a:p>
-            <a:r>
-              <a:rPr lang="en-US" sz="2000" dirty="0" smtClean="0"/>
-              <a:t>Problem Relevance?</a:t>
-            </a:r>
-          </a:p>
-          <a:p>
-            <a:pPr lvl="1"/>
-            <a:r>
-              <a:rPr lang="en-US" sz="1800" dirty="0" smtClean="0"/>
-              <a:t>Competitors? Similar Products?</a:t>
-            </a:r>
-          </a:p>
-          <a:p>
-            <a:pPr lvl="1"/>
-            <a:r>
-              <a:rPr lang="en-US" sz="1800" dirty="0" smtClean="0"/>
-              <a:t>Product purchased by </a:t>
-            </a:r>
-            <a:r>
-              <a:rPr lang="en-US" sz="1800" dirty="0" smtClean="0"/>
-              <a:t>yourself?</a:t>
-            </a:r>
-            <a:endParaRPr lang="en-US" sz="1800" dirty="0" smtClean="0"/>
-          </a:p>
-          <a:p>
-            <a:pPr lvl="1"/>
-            <a:r>
-              <a:rPr lang="en-US" sz="1800" dirty="0" smtClean="0"/>
-              <a:t>Related Word? Evaluation?</a:t>
-            </a:r>
-          </a:p>
-          <a:p>
-            <a:r>
-              <a:rPr lang="en-US" sz="2000" dirty="0" smtClean="0"/>
-              <a:t>Stakeholders?</a:t>
-            </a:r>
-          </a:p>
-          <a:p>
-            <a:pPr lvl="1"/>
-            <a:r>
-              <a:rPr lang="en-US" sz="1800" dirty="0" smtClean="0"/>
-              <a:t>Can you meet with them or reach an agreement?</a:t>
-            </a:r>
-            <a:endParaRPr lang="en-US" sz="1800" dirty="0" smtClean="0"/>
-          </a:p>
-          <a:p>
-            <a:r>
-              <a:rPr lang="en-US" sz="2000" dirty="0" smtClean="0"/>
-              <a:t>Time?</a:t>
-            </a:r>
-          </a:p>
-          <a:p>
-            <a:r>
-              <a:rPr lang="en-US" sz="2000" dirty="0" smtClean="0"/>
-              <a:t>Cost?</a:t>
-            </a:r>
-            <a:endParaRPr lang="en-US" sz="2000" dirty="0"/>
+            <a:pPr algn="ctr"/>
+            <a:r>
+              <a:rPr lang="en-US" sz="2400" b="1" dirty="0" smtClean="0">
+                <a:latin typeface="Calibri" pitchFamily="34" charset="0"/>
+                <a:cs typeface="Calibri" pitchFamily="34" charset="0"/>
+              </a:rPr>
+              <a:t>6 members</a:t>
+            </a:r>
+          </a:p>
+          <a:p>
+            <a:pPr algn="ctr"/>
+            <a:r>
+              <a:rPr lang="en-US" sz="2400" b="1" dirty="0" smtClean="0">
+                <a:latin typeface="Calibri" pitchFamily="34" charset="0"/>
+                <a:cs typeface="Calibri" pitchFamily="34" charset="0"/>
+              </a:rPr>
+              <a:t>8 hours per week / member</a:t>
+            </a:r>
+            <a:endParaRPr lang="vi-VN" sz="2400" b="1" dirty="0">
+              <a:latin typeface="Calibri" pitchFamily="34" charset="0"/>
+              <a:cs typeface="Calibri" pitchFamily="34" charset="0"/>
+            </a:endParaRPr>
           </a:p>
         </p:txBody>
       </p:sp>
+      <p:sp>
+        <p:nvSpPr>
+          <p:cNvPr id="7" name="Rectangle 6"/>
+          <p:cNvSpPr/>
+          <p:nvPr/>
+        </p:nvSpPr>
+        <p:spPr>
+          <a:xfrm>
+            <a:off x="990600" y="1447800"/>
+            <a:ext cx="2209800" cy="830997"/>
+          </a:xfrm>
+          <a:prstGeom prst="rect">
+            <a:avLst/>
+          </a:prstGeom>
+        </p:spPr>
+        <p:txBody>
+          <a:bodyPr wrap="square">
+            <a:spAutoFit/>
+          </a:bodyPr>
+          <a:lstStyle/>
+          <a:p>
+            <a:pPr algn="ctr"/>
+            <a:r>
+              <a:rPr lang="en-US" sz="2400" b="1" dirty="0" smtClean="0">
+                <a:latin typeface="Calibri" pitchFamily="34" charset="0"/>
+                <a:cs typeface="Calibri" pitchFamily="34" charset="0"/>
+              </a:rPr>
+              <a:t>Solving real world </a:t>
+            </a:r>
+            <a:r>
+              <a:rPr lang="en-US" sz="2400" b="1" dirty="0" smtClean="0">
+                <a:latin typeface="Calibri" pitchFamily="34" charset="0"/>
+                <a:cs typeface="Calibri" pitchFamily="34" charset="0"/>
+              </a:rPr>
+              <a:t>problems</a:t>
+            </a:r>
+            <a:endParaRPr lang="vi-VN" sz="2400" b="1" dirty="0">
+              <a:latin typeface="Calibri" pitchFamily="34" charset="0"/>
+              <a:cs typeface="Calibri" pitchFamily="34" charset="0"/>
+            </a:endParaRPr>
+          </a:p>
+        </p:txBody>
+      </p:sp>
+      <p:pic>
+        <p:nvPicPr>
+          <p:cNvPr id="8" name="Picture 2"/>
+          <p:cNvPicPr>
+            <a:picLocks noChangeAspect="1" noChangeArrowheads="1"/>
+          </p:cNvPicPr>
+          <p:nvPr/>
+        </p:nvPicPr>
+        <p:blipFill>
+          <a:blip r:embed="rId5" cstate="print"/>
+          <a:srcRect/>
+          <a:stretch>
+            <a:fillRect/>
+          </a:stretch>
+        </p:blipFill>
+        <p:spPr bwMode="auto">
+          <a:xfrm>
+            <a:off x="1676400" y="3908425"/>
+            <a:ext cx="5965825" cy="2416175"/>
+          </a:xfrm>
+          <a:prstGeom prst="rect">
+            <a:avLst/>
+          </a:prstGeom>
+          <a:noFill/>
+          <a:ln w="9525">
+            <a:noFill/>
+            <a:miter lim="800000"/>
+            <a:headEnd/>
+            <a:tailEnd/>
+          </a:ln>
+        </p:spPr>
+      </p:pic>
     </p:spTree>
   </p:cSld>
   <p:clrMapOvr>
     <a:masterClrMapping/>
   </p:clrMapOvr>
+  <p:timing>
+    <p:tnLst>
+      <p:par>
+        <p:cTn id="1" dur="indefinite" restart="never" nodeType="tmRoot"/>
+      </p:par>
+    </p:tnLst>
+  </p:timing>
 </p:sld>
 </file>
 

--- a/Software Project Management/03. Software Project Initiation.pptx
+++ b/Software Project Management/03. Software Project Initiation.pptx
@@ -15758,7 +15758,15 @@
           <a:p>
             <a:r>
               <a:rPr lang="en-US" sz="2000" dirty="0" smtClean="0"/>
-              <a:t>Sponsor? Client?</a:t>
+              <a:t>Project </a:t>
+            </a:r>
+            <a:r>
+              <a:rPr lang="en-US" sz="2000" dirty="0" smtClean="0"/>
+              <a:t>Origins? Sponsor</a:t>
+            </a:r>
+            <a:r>
+              <a:rPr lang="en-US" sz="2000" dirty="0" smtClean="0"/>
+              <a:t>? Client?</a:t>
             </a:r>
           </a:p>
           <a:p>
@@ -15784,20 +15792,6 @@
           <a:p>
             <a:r>
               <a:rPr lang="en-US" sz="2000" dirty="0" smtClean="0"/>
-              <a:t>Business </a:t>
-            </a:r>
-            <a:r>
-              <a:rPr lang="en-US" sz="2000" dirty="0" smtClean="0"/>
-              <a:t>Use </a:t>
-            </a:r>
-            <a:r>
-              <a:rPr lang="en-US" sz="2000" dirty="0" smtClean="0"/>
-              <a:t>Cases?</a:t>
-            </a:r>
-          </a:p>
-          <a:p>
-            <a:r>
-              <a:rPr lang="en-US" sz="2000" dirty="0" smtClean="0"/>
               <a:t>Problem Relevance?</a:t>
             </a:r>
           </a:p>
@@ -15805,7 +15799,7 @@
             <a:pPr lvl="1"/>
             <a:r>
               <a:rPr lang="en-US" sz="1800" dirty="0" smtClean="0"/>
-              <a:t>Competitors? Similar Products?</a:t>
+              <a:t>Competitors? Similar products? Business goals?</a:t>
             </a:r>
           </a:p>
           <a:p>
@@ -15824,7 +15818,7 @@
             <a:pPr lvl="1"/>
             <a:r>
               <a:rPr lang="en-US" sz="1800" dirty="0" smtClean="0"/>
-              <a:t>Related Word? Evaluation?</a:t>
+              <a:t>Related work? Evaluation?</a:t>
             </a:r>
           </a:p>
           <a:p>
@@ -15839,7 +15833,12 @@
               <a:rPr lang="en-US" sz="1800" dirty="0" smtClean="0"/>
               <a:t>Can you meet with them or reach an agreement?</a:t>
             </a:r>
-            <a:endParaRPr lang="en-US" sz="1800" dirty="0" smtClean="0"/>
+          </a:p>
+          <a:p>
+            <a:r>
+              <a:rPr lang="en-US" sz="2000" dirty="0" smtClean="0"/>
+              <a:t>Business Use Cases?</a:t>
+            </a:r>
           </a:p>
           <a:p>
             <a:r>
@@ -15873,7 +15872,7 @@
         </p:blipFill>
         <p:spPr bwMode="auto">
           <a:xfrm>
-            <a:off x="6248400" y="1752600"/>
+            <a:off x="6248400" y="2065020"/>
             <a:ext cx="2103120" cy="2735580"/>
           </a:xfrm>
           <a:prstGeom prst="rect">

--- a/Software Project Management/03. Software Project Initiation.pptx
+++ b/Software Project Management/03. Software Project Initiation.pptx
@@ -5,10 +5,10 @@
     <p:sldMasterId id="2147483708" r:id="rId1"/>
   </p:sldMasterIdLst>
   <p:notesMasterIdLst>
-    <p:notesMasterId r:id="rId36"/>
+    <p:notesMasterId r:id="rId25"/>
   </p:notesMasterIdLst>
   <p:handoutMasterIdLst>
-    <p:handoutMasterId r:id="rId37"/>
+    <p:handoutMasterId r:id="rId26"/>
   </p:handoutMasterIdLst>
   <p:sldIdLst>
     <p:sldId id="256" r:id="rId2"/>
@@ -28,23 +28,12 @@
     <p:sldId id="873" r:id="rId16"/>
     <p:sldId id="874" r:id="rId17"/>
     <p:sldId id="842" r:id="rId18"/>
-    <p:sldId id="835" r:id="rId19"/>
-    <p:sldId id="836" r:id="rId20"/>
-    <p:sldId id="852" r:id="rId21"/>
-    <p:sldId id="853" r:id="rId22"/>
-    <p:sldId id="854" r:id="rId23"/>
-    <p:sldId id="869" r:id="rId24"/>
-    <p:sldId id="867" r:id="rId25"/>
-    <p:sldId id="868" r:id="rId26"/>
-    <p:sldId id="837" r:id="rId27"/>
-    <p:sldId id="838" r:id="rId28"/>
-    <p:sldId id="878" r:id="rId29"/>
-    <p:sldId id="875" r:id="rId30"/>
-    <p:sldId id="876" r:id="rId31"/>
-    <p:sldId id="877" r:id="rId32"/>
-    <p:sldId id="843" r:id="rId33"/>
-    <p:sldId id="830" r:id="rId34"/>
-    <p:sldId id="343" r:id="rId35"/>
+    <p:sldId id="875" r:id="rId19"/>
+    <p:sldId id="876" r:id="rId20"/>
+    <p:sldId id="877" r:id="rId21"/>
+    <p:sldId id="843" r:id="rId22"/>
+    <p:sldId id="830" r:id="rId23"/>
+    <p:sldId id="343" r:id="rId24"/>
   </p:sldIdLst>
   <p:sldSz cx="9144000" cy="6858000" type="screen4x3"/>
   <p:notesSz cx="6858000" cy="9144000"/>
@@ -176,5070 +165,6 @@
 </p:presentation>
 </file>
 
-<file path=ppt/diagrams/colors1.xml><?xml version="1.0" encoding="utf-8"?>
-<dgm:colorsDef xmlns:dgm="http://schemas.openxmlformats.org/drawingml/2006/diagram" xmlns:a="http://schemas.openxmlformats.org/drawingml/2006/main" uniqueId="urn:microsoft.com/office/officeart/2005/8/colors/accent1_2">
-  <dgm:title val=""/>
-  <dgm:desc val=""/>
-  <dgm:catLst>
-    <dgm:cat type="accent1" pri="11200"/>
-  </dgm:catLst>
-  <dgm:styleLbl name="node0">
-    <dgm:fillClrLst meth="repeat">
-      <a:schemeClr val="accent1"/>
-    </dgm:fillClrLst>
-    <dgm:linClrLst meth="repeat">
-      <a:schemeClr val="lt1"/>
-    </dgm:linClrLst>
-    <dgm:effectClrLst/>
-    <dgm:txLinClrLst/>
-    <dgm:txFillClrLst/>
-    <dgm:txEffectClrLst/>
-  </dgm:styleLbl>
-  <dgm:styleLbl name="alignNode1">
-    <dgm:fillClrLst meth="repeat">
-      <a:schemeClr val="accent1"/>
-    </dgm:fillClrLst>
-    <dgm:linClrLst meth="repeat">
-      <a:schemeClr val="accent1"/>
-    </dgm:linClrLst>
-    <dgm:effectClrLst/>
-    <dgm:txLinClrLst/>
-    <dgm:txFillClrLst/>
-    <dgm:txEffectClrLst/>
-  </dgm:styleLbl>
-  <dgm:styleLbl name="node1">
-    <dgm:fillClrLst meth="repeat">
-      <a:schemeClr val="accent1"/>
-    </dgm:fillClrLst>
-    <dgm:linClrLst meth="repeat">
-      <a:schemeClr val="lt1"/>
-    </dgm:linClrLst>
-    <dgm:effectClrLst/>
-    <dgm:txLinClrLst/>
-    <dgm:txFillClrLst/>
-    <dgm:txEffectClrLst/>
-  </dgm:styleLbl>
-  <dgm:styleLbl name="lnNode1">
-    <dgm:fillClrLst meth="repeat">
-      <a:schemeClr val="accent1"/>
-    </dgm:fillClrLst>
-    <dgm:linClrLst meth="repeat">
-      <a:schemeClr val="lt1"/>
-    </dgm:linClrLst>
-    <dgm:effectClrLst/>
-    <dgm:txLinClrLst/>
-    <dgm:txFillClrLst/>
-    <dgm:txEffectClrLst/>
-  </dgm:styleLbl>
-  <dgm:styleLbl name="vennNode1">
-    <dgm:fillClrLst meth="repeat">
-      <a:schemeClr val="accent1">
-        <a:alpha val="50000"/>
-      </a:schemeClr>
-    </dgm:fillClrLst>
-    <dgm:linClrLst meth="repeat">
-      <a:schemeClr val="lt1"/>
-    </dgm:linClrLst>
-    <dgm:effectClrLst/>
-    <dgm:txLinClrLst/>
-    <dgm:txFillClrLst/>
-    <dgm:txEffectClrLst/>
-  </dgm:styleLbl>
-  <dgm:styleLbl name="node2">
-    <dgm:fillClrLst meth="repeat">
-      <a:schemeClr val="accent1"/>
-    </dgm:fillClrLst>
-    <dgm:linClrLst meth="repeat">
-      <a:schemeClr val="lt1"/>
-    </dgm:linClrLst>
-    <dgm:effectClrLst/>
-    <dgm:txLinClrLst/>
-    <dgm:txFillClrLst/>
-    <dgm:txEffectClrLst/>
-  </dgm:styleLbl>
-  <dgm:styleLbl name="node3">
-    <dgm:fillClrLst meth="repeat">
-      <a:schemeClr val="accent1"/>
-    </dgm:fillClrLst>
-    <dgm:linClrLst meth="repeat">
-      <a:schemeClr val="lt1"/>
-    </dgm:linClrLst>
-    <dgm:effectClrLst/>
-    <dgm:txLinClrLst/>
-    <dgm:txFillClrLst/>
-    <dgm:txEffectClrLst/>
-  </dgm:styleLbl>
-  <dgm:styleLbl name="node4">
-    <dgm:fillClrLst meth="repeat">
-      <a:schemeClr val="accent1"/>
-    </dgm:fillClrLst>
-    <dgm:linClrLst meth="repeat">
-      <a:schemeClr val="lt1"/>
-    </dgm:linClrLst>
-    <dgm:effectClrLst/>
-    <dgm:txLinClrLst/>
-    <dgm:txFillClrLst/>
-    <dgm:txEffectClrLst/>
-  </dgm:styleLbl>
-  <dgm:styleLbl name="fgImgPlace1">
-    <dgm:fillClrLst meth="repeat">
-      <a:schemeClr val="accent1">
-        <a:tint val="50000"/>
-      </a:schemeClr>
-    </dgm:fillClrLst>
-    <dgm:linClrLst meth="repeat">
-      <a:schemeClr val="lt1"/>
-    </dgm:linClrLst>
-    <dgm:effectClrLst/>
-    <dgm:txLinClrLst/>
-    <dgm:txFillClrLst meth="repeat">
-      <a:schemeClr val="lt1"/>
-    </dgm:txFillClrLst>
-    <dgm:txEffectClrLst/>
-  </dgm:styleLbl>
-  <dgm:styleLbl name="alignImgPlace1">
-    <dgm:fillClrLst meth="repeat">
-      <a:schemeClr val="accent1">
-        <a:tint val="50000"/>
-      </a:schemeClr>
-    </dgm:fillClrLst>
-    <dgm:linClrLst meth="repeat">
-      <a:schemeClr val="lt1"/>
-    </dgm:linClrLst>
-    <dgm:effectClrLst/>
-    <dgm:txLinClrLst/>
-    <dgm:txFillClrLst meth="repeat">
-      <a:schemeClr val="lt1"/>
-    </dgm:txFillClrLst>
-    <dgm:txEffectClrLst/>
-  </dgm:styleLbl>
-  <dgm:styleLbl name="bgImgPlace1">
-    <dgm:fillClrLst meth="repeat">
-      <a:schemeClr val="accent1">
-        <a:tint val="50000"/>
-      </a:schemeClr>
-    </dgm:fillClrLst>
-    <dgm:linClrLst meth="repeat">
-      <a:schemeClr val="lt1"/>
-    </dgm:linClrLst>
-    <dgm:effectClrLst/>
-    <dgm:txLinClrLst/>
-    <dgm:txFillClrLst meth="repeat">
-      <a:schemeClr val="lt1"/>
-    </dgm:txFillClrLst>
-    <dgm:txEffectClrLst/>
-  </dgm:styleLbl>
-  <dgm:styleLbl name="sibTrans2D1">
-    <dgm:fillClrLst meth="repeat">
-      <a:schemeClr val="accent1">
-        <a:tint val="60000"/>
-      </a:schemeClr>
-    </dgm:fillClrLst>
-    <dgm:linClrLst meth="repeat">
-      <a:schemeClr val="accent1">
-        <a:tint val="60000"/>
-      </a:schemeClr>
-    </dgm:linClrLst>
-    <dgm:effectClrLst/>
-    <dgm:txLinClrLst/>
-    <dgm:txFillClrLst/>
-    <dgm:txEffectClrLst/>
-  </dgm:styleLbl>
-  <dgm:styleLbl name="fgSibTrans2D1">
-    <dgm:fillClrLst meth="repeat">
-      <a:schemeClr val="accent1">
-        <a:tint val="60000"/>
-      </a:schemeClr>
-    </dgm:fillClrLst>
-    <dgm:linClrLst meth="repeat">
-      <a:schemeClr val="accent1">
-        <a:tint val="60000"/>
-      </a:schemeClr>
-    </dgm:linClrLst>
-    <dgm:effectClrLst/>
-    <dgm:txLinClrLst/>
-    <dgm:txFillClrLst/>
-    <dgm:txEffectClrLst/>
-  </dgm:styleLbl>
-  <dgm:styleLbl name="bgSibTrans2D1">
-    <dgm:fillClrLst meth="repeat">
-      <a:schemeClr val="accent1">
-        <a:tint val="60000"/>
-      </a:schemeClr>
-    </dgm:fillClrLst>
-    <dgm:linClrLst meth="repeat">
-      <a:schemeClr val="accent1">
-        <a:tint val="60000"/>
-      </a:schemeClr>
-    </dgm:linClrLst>
-    <dgm:effectClrLst/>
-    <dgm:txLinClrLst/>
-    <dgm:txFillClrLst/>
-    <dgm:txEffectClrLst/>
-  </dgm:styleLbl>
-  <dgm:styleLbl name="sibTrans1D1">
-    <dgm:fillClrLst meth="repeat">
-      <a:schemeClr val="accent1"/>
-    </dgm:fillClrLst>
-    <dgm:linClrLst meth="repeat">
-      <a:schemeClr val="accent1"/>
-    </dgm:linClrLst>
-    <dgm:effectClrLst/>
-    <dgm:txLinClrLst/>
-    <dgm:txFillClrLst meth="repeat">
-      <a:schemeClr val="tx1"/>
-    </dgm:txFillClrLst>
-    <dgm:txEffectClrLst/>
-  </dgm:styleLbl>
-  <dgm:styleLbl name="callout">
-    <dgm:fillClrLst meth="repeat">
-      <a:schemeClr val="accent1"/>
-    </dgm:fillClrLst>
-    <dgm:linClrLst meth="repeat">
-      <a:schemeClr val="accent1">
-        <a:tint val="50000"/>
-      </a:schemeClr>
-    </dgm:linClrLst>
-    <dgm:effectClrLst/>
-    <dgm:txLinClrLst/>
-    <dgm:txFillClrLst meth="repeat">
-      <a:schemeClr val="tx1"/>
-    </dgm:txFillClrLst>
-    <dgm:txEffectClrLst/>
-  </dgm:styleLbl>
-  <dgm:styleLbl name="asst0">
-    <dgm:fillClrLst meth="repeat">
-      <a:schemeClr val="accent1"/>
-    </dgm:fillClrLst>
-    <dgm:linClrLst meth="repeat">
-      <a:schemeClr val="lt1"/>
-    </dgm:linClrLst>
-    <dgm:effectClrLst/>
-    <dgm:txLinClrLst/>
-    <dgm:txFillClrLst/>
-    <dgm:txEffectClrLst/>
-  </dgm:styleLbl>
-  <dgm:styleLbl name="asst1">
-    <dgm:fillClrLst meth="repeat">
-      <a:schemeClr val="accent1"/>
-    </dgm:fillClrLst>
-    <dgm:linClrLst meth="repeat">
-      <a:schemeClr val="lt1"/>
-    </dgm:linClrLst>
-    <dgm:effectClrLst/>
-    <dgm:txLinClrLst/>
-    <dgm:txFillClrLst/>
-    <dgm:txEffectClrLst/>
-  </dgm:styleLbl>
-  <dgm:styleLbl name="asst2">
-    <dgm:fillClrLst meth="repeat">
-      <a:schemeClr val="accent1"/>
-    </dgm:fillClrLst>
-    <dgm:linClrLst meth="repeat">
-      <a:schemeClr val="lt1"/>
-    </dgm:linClrLst>
-    <dgm:effectClrLst/>
-    <dgm:txLinClrLst/>
-    <dgm:txFillClrLst/>
-    <dgm:txEffectClrLst/>
-  </dgm:styleLbl>
-  <dgm:styleLbl name="asst3">
-    <dgm:fillClrLst meth="repeat">
-      <a:schemeClr val="accent1"/>
-    </dgm:fillClrLst>
-    <dgm:linClrLst meth="repeat">
-      <a:schemeClr val="lt1"/>
-    </dgm:linClrLst>
-    <dgm:effectClrLst/>
-    <dgm:txLinClrLst/>
-    <dgm:txFillClrLst/>
-    <dgm:txEffectClrLst/>
-  </dgm:styleLbl>
-  <dgm:styleLbl name="asst4">
-    <dgm:fillClrLst meth="repeat">
-      <a:schemeClr val="accent1"/>
-    </dgm:fillClrLst>
-    <dgm:linClrLst meth="repeat">
-      <a:schemeClr val="lt1"/>
-    </dgm:linClrLst>
-    <dgm:effectClrLst/>
-    <dgm:txLinClrLst/>
-    <dgm:txFillClrLst/>
-    <dgm:txEffectClrLst/>
-  </dgm:styleLbl>
-  <dgm:styleLbl name="parChTrans2D1">
-    <dgm:fillClrLst meth="repeat">
-      <a:schemeClr val="accent1">
-        <a:tint val="60000"/>
-      </a:schemeClr>
-    </dgm:fillClrLst>
-    <dgm:linClrLst meth="repeat">
-      <a:schemeClr val="accent1">
-        <a:tint val="60000"/>
-      </a:schemeClr>
-    </dgm:linClrLst>
-    <dgm:effectClrLst/>
-    <dgm:txLinClrLst/>
-    <dgm:txFillClrLst meth="repeat">
-      <a:schemeClr val="lt1"/>
-    </dgm:txFillClrLst>
-    <dgm:txEffectClrLst/>
-  </dgm:styleLbl>
-  <dgm:styleLbl name="parChTrans2D2">
-    <dgm:fillClrLst meth="repeat">
-      <a:schemeClr val="accent1"/>
-    </dgm:fillClrLst>
-    <dgm:linClrLst meth="repeat">
-      <a:schemeClr val="accent1"/>
-    </dgm:linClrLst>
-    <dgm:effectClrLst/>
-    <dgm:txLinClrLst/>
-    <dgm:txFillClrLst meth="repeat">
-      <a:schemeClr val="lt1"/>
-    </dgm:txFillClrLst>
-    <dgm:txEffectClrLst/>
-  </dgm:styleLbl>
-  <dgm:styleLbl name="parChTrans2D3">
-    <dgm:fillClrLst meth="repeat">
-      <a:schemeClr val="accent1"/>
-    </dgm:fillClrLst>
-    <dgm:linClrLst meth="repeat">
-      <a:schemeClr val="accent1"/>
-    </dgm:linClrLst>
-    <dgm:effectClrLst/>
-    <dgm:txLinClrLst/>
-    <dgm:txFillClrLst meth="repeat">
-      <a:schemeClr val="lt1"/>
-    </dgm:txFillClrLst>
-    <dgm:txEffectClrLst/>
-  </dgm:styleLbl>
-  <dgm:styleLbl name="parChTrans2D4">
-    <dgm:fillClrLst meth="repeat">
-      <a:schemeClr val="accent1"/>
-    </dgm:fillClrLst>
-    <dgm:linClrLst meth="repeat">
-      <a:schemeClr val="accent1"/>
-    </dgm:linClrLst>
-    <dgm:effectClrLst/>
-    <dgm:txLinClrLst/>
-    <dgm:txFillClrLst meth="repeat">
-      <a:schemeClr val="lt1"/>
-    </dgm:txFillClrLst>
-    <dgm:txEffectClrLst/>
-  </dgm:styleLbl>
-  <dgm:styleLbl name="parChTrans1D1">
-    <dgm:fillClrLst meth="repeat">
-      <a:schemeClr val="accent1"/>
-    </dgm:fillClrLst>
-    <dgm:linClrLst meth="repeat">
-      <a:schemeClr val="accent1">
-        <a:shade val="60000"/>
-      </a:schemeClr>
-    </dgm:linClrLst>
-    <dgm:effectClrLst/>
-    <dgm:txLinClrLst/>
-    <dgm:txFillClrLst meth="repeat">
-      <a:schemeClr val="tx1"/>
-    </dgm:txFillClrLst>
-    <dgm:txEffectClrLst/>
-  </dgm:styleLbl>
-  <dgm:styleLbl name="parChTrans1D2">
-    <dgm:fillClrLst meth="repeat">
-      <a:schemeClr val="accent1"/>
-    </dgm:fillClrLst>
-    <dgm:linClrLst meth="repeat">
-      <a:schemeClr val="accent1">
-        <a:shade val="60000"/>
-      </a:schemeClr>
-    </dgm:linClrLst>
-    <dgm:effectClrLst/>
-    <dgm:txLinClrLst/>
-    <dgm:txFillClrLst meth="repeat">
-      <a:schemeClr val="tx1"/>
-    </dgm:txFillClrLst>
-    <dgm:txEffectClrLst/>
-  </dgm:styleLbl>
-  <dgm:styleLbl name="parChTrans1D3">
-    <dgm:fillClrLst meth="repeat">
-      <a:schemeClr val="accent1"/>
-    </dgm:fillClrLst>
-    <dgm:linClrLst meth="repeat">
-      <a:schemeClr val="accent1">
-        <a:shade val="80000"/>
-      </a:schemeClr>
-    </dgm:linClrLst>
-    <dgm:effectClrLst/>
-    <dgm:txLinClrLst/>
-    <dgm:txFillClrLst meth="repeat">
-      <a:schemeClr val="tx1"/>
-    </dgm:txFillClrLst>
-    <dgm:txEffectClrLst/>
-  </dgm:styleLbl>
-  <dgm:styleLbl name="parChTrans1D4">
-    <dgm:fillClrLst meth="repeat">
-      <a:schemeClr val="accent1"/>
-    </dgm:fillClrLst>
-    <dgm:linClrLst meth="repeat">
-      <a:schemeClr val="accent1">
-        <a:shade val="80000"/>
-      </a:schemeClr>
-    </dgm:linClrLst>
-    <dgm:effectClrLst/>
-    <dgm:txLinClrLst/>
-    <dgm:txFillClrLst meth="repeat">
-      <a:schemeClr val="tx1"/>
-    </dgm:txFillClrLst>
-    <dgm:txEffectClrLst/>
-  </dgm:styleLbl>
-  <dgm:styleLbl name="fgAcc1">
-    <dgm:fillClrLst meth="repeat">
-      <a:schemeClr val="lt1">
-        <a:alpha val="90000"/>
-      </a:schemeClr>
-    </dgm:fillClrLst>
-    <dgm:linClrLst meth="repeat">
-      <a:schemeClr val="accent1"/>
-    </dgm:linClrLst>
-    <dgm:effectClrLst/>
-    <dgm:txLinClrLst/>
-    <dgm:txFillClrLst meth="repeat">
-      <a:schemeClr val="dk1"/>
-    </dgm:txFillClrLst>
-    <dgm:txEffectClrLst/>
-  </dgm:styleLbl>
-  <dgm:styleLbl name="conFgAcc1">
-    <dgm:fillClrLst meth="repeat">
-      <a:schemeClr val="lt1">
-        <a:alpha val="90000"/>
-      </a:schemeClr>
-    </dgm:fillClrLst>
-    <dgm:linClrLst meth="repeat">
-      <a:schemeClr val="accent1"/>
-    </dgm:linClrLst>
-    <dgm:effectClrLst/>
-    <dgm:txLinClrLst/>
-    <dgm:txFillClrLst meth="repeat">
-      <a:schemeClr val="dk1"/>
-    </dgm:txFillClrLst>
-    <dgm:txEffectClrLst/>
-  </dgm:styleLbl>
-  <dgm:styleLbl name="alignAcc1">
-    <dgm:fillClrLst meth="repeat">
-      <a:schemeClr val="lt1">
-        <a:alpha val="90000"/>
-      </a:schemeClr>
-    </dgm:fillClrLst>
-    <dgm:linClrLst meth="repeat">
-      <a:schemeClr val="accent1"/>
-    </dgm:linClrLst>
-    <dgm:effectClrLst/>
-    <dgm:txLinClrLst/>
-    <dgm:txFillClrLst meth="repeat">
-      <a:schemeClr val="dk1"/>
-    </dgm:txFillClrLst>
-    <dgm:txEffectClrLst/>
-  </dgm:styleLbl>
-  <dgm:styleLbl name="trAlignAcc1">
-    <dgm:fillClrLst meth="repeat">
-      <a:schemeClr val="lt1">
-        <a:alpha val="40000"/>
-      </a:schemeClr>
-    </dgm:fillClrLst>
-    <dgm:linClrLst meth="repeat">
-      <a:schemeClr val="accent1"/>
-    </dgm:linClrLst>
-    <dgm:effectClrLst/>
-    <dgm:txLinClrLst/>
-    <dgm:txFillClrLst meth="repeat">
-      <a:schemeClr val="dk1"/>
-    </dgm:txFillClrLst>
-    <dgm:txEffectClrLst/>
-  </dgm:styleLbl>
-  <dgm:styleLbl name="bgAcc1">
-    <dgm:fillClrLst meth="repeat">
-      <a:schemeClr val="lt1">
-        <a:alpha val="90000"/>
-      </a:schemeClr>
-    </dgm:fillClrLst>
-    <dgm:linClrLst meth="repeat">
-      <a:schemeClr val="accent1"/>
-    </dgm:linClrLst>
-    <dgm:effectClrLst/>
-    <dgm:txLinClrLst/>
-    <dgm:txFillClrLst meth="repeat">
-      <a:schemeClr val="dk1"/>
-    </dgm:txFillClrLst>
-    <dgm:txEffectClrLst/>
-  </dgm:styleLbl>
-  <dgm:styleLbl name="solidFgAcc1">
-    <dgm:fillClrLst meth="repeat">
-      <a:schemeClr val="lt1"/>
-    </dgm:fillClrLst>
-    <dgm:linClrLst meth="repeat">
-      <a:schemeClr val="accent1"/>
-    </dgm:linClrLst>
-    <dgm:effectClrLst/>
-    <dgm:txLinClrLst/>
-    <dgm:txFillClrLst meth="repeat">
-      <a:schemeClr val="dk1"/>
-    </dgm:txFillClrLst>
-    <dgm:txEffectClrLst/>
-  </dgm:styleLbl>
-  <dgm:styleLbl name="solidAlignAcc1">
-    <dgm:fillClrLst meth="repeat">
-      <a:schemeClr val="lt1"/>
-    </dgm:fillClrLst>
-    <dgm:linClrLst meth="repeat">
-      <a:schemeClr val="accent1"/>
-    </dgm:linClrLst>
-    <dgm:effectClrLst/>
-    <dgm:txLinClrLst/>
-    <dgm:txFillClrLst meth="repeat">
-      <a:schemeClr val="dk1"/>
-    </dgm:txFillClrLst>
-    <dgm:txEffectClrLst/>
-  </dgm:styleLbl>
-  <dgm:styleLbl name="solidBgAcc1">
-    <dgm:fillClrLst meth="repeat">
-      <a:schemeClr val="lt1"/>
-    </dgm:fillClrLst>
-    <dgm:linClrLst meth="repeat">
-      <a:schemeClr val="accent1"/>
-    </dgm:linClrLst>
-    <dgm:effectClrLst/>
-    <dgm:txLinClrLst/>
-    <dgm:txFillClrLst meth="repeat">
-      <a:schemeClr val="dk1"/>
-    </dgm:txFillClrLst>
-    <dgm:txEffectClrLst/>
-  </dgm:styleLbl>
-  <dgm:styleLbl name="fgAccFollowNode1">
-    <dgm:fillClrLst meth="repeat">
-      <a:schemeClr val="accent1">
-        <a:alpha val="90000"/>
-        <a:tint val="40000"/>
-      </a:schemeClr>
-    </dgm:fillClrLst>
-    <dgm:linClrLst meth="repeat">
-      <a:schemeClr val="accent1">
-        <a:alpha val="90000"/>
-        <a:tint val="40000"/>
-      </a:schemeClr>
-    </dgm:linClrLst>
-    <dgm:effectClrLst/>
-    <dgm:txLinClrLst/>
-    <dgm:txFillClrLst meth="repeat">
-      <a:schemeClr val="dk1"/>
-    </dgm:txFillClrLst>
-    <dgm:txEffectClrLst/>
-  </dgm:styleLbl>
-  <dgm:styleLbl name="alignAccFollowNode1">
-    <dgm:fillClrLst meth="repeat">
-      <a:schemeClr val="accent1">
-        <a:alpha val="90000"/>
-        <a:tint val="40000"/>
-      </a:schemeClr>
-    </dgm:fillClrLst>
-    <dgm:linClrLst meth="repeat">
-      <a:schemeClr val="accent1">
-        <a:alpha val="90000"/>
-        <a:tint val="40000"/>
-      </a:schemeClr>
-    </dgm:linClrLst>
-    <dgm:effectClrLst/>
-    <dgm:txLinClrLst/>
-    <dgm:txFillClrLst meth="repeat">
-      <a:schemeClr val="dk1"/>
-    </dgm:txFillClrLst>
-    <dgm:txEffectClrLst/>
-  </dgm:styleLbl>
-  <dgm:styleLbl name="bgAccFollowNode1">
-    <dgm:fillClrLst meth="repeat">
-      <a:schemeClr val="accent1">
-        <a:alpha val="90000"/>
-        <a:tint val="40000"/>
-      </a:schemeClr>
-    </dgm:fillClrLst>
-    <dgm:linClrLst meth="repeat">
-      <a:schemeClr val="accent1">
-        <a:alpha val="90000"/>
-        <a:tint val="40000"/>
-      </a:schemeClr>
-    </dgm:linClrLst>
-    <dgm:effectClrLst/>
-    <dgm:txLinClrLst/>
-    <dgm:txFillClrLst meth="repeat">
-      <a:schemeClr val="dk1"/>
-    </dgm:txFillClrLst>
-    <dgm:txEffectClrLst/>
-  </dgm:styleLbl>
-  <dgm:styleLbl name="fgAcc0">
-    <dgm:fillClrLst meth="repeat">
-      <a:schemeClr val="lt1">
-        <a:alpha val="90000"/>
-      </a:schemeClr>
-    </dgm:fillClrLst>
-    <dgm:linClrLst meth="repeat">
-      <a:schemeClr val="accent1"/>
-    </dgm:linClrLst>
-    <dgm:effectClrLst/>
-    <dgm:txLinClrLst/>
-    <dgm:txFillClrLst meth="repeat">
-      <a:schemeClr val="dk1"/>
-    </dgm:txFillClrLst>
-    <dgm:txEffectClrLst/>
-  </dgm:styleLbl>
-  <dgm:styleLbl name="fgAcc2">
-    <dgm:fillClrLst meth="repeat">
-      <a:schemeClr val="lt1">
-        <a:alpha val="90000"/>
-      </a:schemeClr>
-    </dgm:fillClrLst>
-    <dgm:linClrLst meth="repeat">
-      <a:schemeClr val="accent1"/>
-    </dgm:linClrLst>
-    <dgm:effectClrLst/>
-    <dgm:txLinClrLst/>
-    <dgm:txFillClrLst meth="repeat">
-      <a:schemeClr val="dk1"/>
-    </dgm:txFillClrLst>
-    <dgm:txEffectClrLst/>
-  </dgm:styleLbl>
-  <dgm:styleLbl name="fgAcc3">
-    <dgm:fillClrLst meth="repeat">
-      <a:schemeClr val="lt1">
-        <a:alpha val="90000"/>
-      </a:schemeClr>
-    </dgm:fillClrLst>
-    <dgm:linClrLst meth="repeat">
-      <a:schemeClr val="accent1"/>
-    </dgm:linClrLst>
-    <dgm:effectClrLst/>
-    <dgm:txLinClrLst/>
-    <dgm:txFillClrLst meth="repeat">
-      <a:schemeClr val="dk1"/>
-    </dgm:txFillClrLst>
-    <dgm:txEffectClrLst/>
-  </dgm:styleLbl>
-  <dgm:styleLbl name="fgAcc4">
-    <dgm:fillClrLst meth="repeat">
-      <a:schemeClr val="lt1">
-        <a:alpha val="90000"/>
-      </a:schemeClr>
-    </dgm:fillClrLst>
-    <dgm:linClrLst meth="repeat">
-      <a:schemeClr val="accent1"/>
-    </dgm:linClrLst>
-    <dgm:effectClrLst/>
-    <dgm:txLinClrLst/>
-    <dgm:txFillClrLst meth="repeat">
-      <a:schemeClr val="dk1"/>
-    </dgm:txFillClrLst>
-    <dgm:txEffectClrLst/>
-  </dgm:styleLbl>
-  <dgm:styleLbl name="bgShp">
-    <dgm:fillClrLst meth="repeat">
-      <a:schemeClr val="accent1">
-        <a:tint val="40000"/>
-      </a:schemeClr>
-    </dgm:fillClrLst>
-    <dgm:linClrLst meth="repeat">
-      <a:schemeClr val="accent1"/>
-    </dgm:linClrLst>
-    <dgm:effectClrLst/>
-    <dgm:txLinClrLst/>
-    <dgm:txFillClrLst meth="repeat">
-      <a:schemeClr val="dk1"/>
-    </dgm:txFillClrLst>
-    <dgm:txEffectClrLst/>
-  </dgm:styleLbl>
-  <dgm:styleLbl name="dkBgShp">
-    <dgm:fillClrLst meth="repeat">
-      <a:schemeClr val="accent1">
-        <a:shade val="80000"/>
-      </a:schemeClr>
-    </dgm:fillClrLst>
-    <dgm:linClrLst meth="repeat">
-      <a:schemeClr val="accent1"/>
-    </dgm:linClrLst>
-    <dgm:effectClrLst/>
-    <dgm:txLinClrLst/>
-    <dgm:txFillClrLst meth="repeat">
-      <a:schemeClr val="lt1"/>
-    </dgm:txFillClrLst>
-    <dgm:txEffectClrLst/>
-  </dgm:styleLbl>
-  <dgm:styleLbl name="trBgShp">
-    <dgm:fillClrLst meth="repeat">
-      <a:schemeClr val="accent1">
-        <a:tint val="50000"/>
-        <a:alpha val="40000"/>
-      </a:schemeClr>
-    </dgm:fillClrLst>
-    <dgm:linClrLst meth="repeat">
-      <a:schemeClr val="accent1"/>
-    </dgm:linClrLst>
-    <dgm:effectClrLst/>
-    <dgm:txLinClrLst/>
-    <dgm:txFillClrLst meth="repeat">
-      <a:schemeClr val="lt1"/>
-    </dgm:txFillClrLst>
-    <dgm:txEffectClrLst/>
-  </dgm:styleLbl>
-  <dgm:styleLbl name="fgShp">
-    <dgm:fillClrLst meth="repeat">
-      <a:schemeClr val="accent1">
-        <a:tint val="60000"/>
-      </a:schemeClr>
-    </dgm:fillClrLst>
-    <dgm:linClrLst meth="repeat">
-      <a:schemeClr val="lt1"/>
-    </dgm:linClrLst>
-    <dgm:effectClrLst/>
-    <dgm:txLinClrLst/>
-    <dgm:txFillClrLst meth="repeat">
-      <a:schemeClr val="dk1"/>
-    </dgm:txFillClrLst>
-    <dgm:txEffectClrLst/>
-  </dgm:styleLbl>
-  <dgm:styleLbl name="revTx">
-    <dgm:fillClrLst meth="repeat">
-      <a:schemeClr val="lt1">
-        <a:alpha val="0"/>
-      </a:schemeClr>
-    </dgm:fillClrLst>
-    <dgm:linClrLst meth="repeat">
-      <a:schemeClr val="dk1">
-        <a:alpha val="0"/>
-      </a:schemeClr>
-    </dgm:linClrLst>
-    <dgm:effectClrLst/>
-    <dgm:txLinClrLst/>
-    <dgm:txFillClrLst meth="repeat">
-      <a:schemeClr val="tx1"/>
-    </dgm:txFillClrLst>
-    <dgm:txEffectClrLst/>
-  </dgm:styleLbl>
-</dgm:colorsDef>
-</file>
-
-<file path=ppt/diagrams/colors2.xml><?xml version="1.0" encoding="utf-8"?>
-<dgm:colorsDef xmlns:dgm="http://schemas.openxmlformats.org/drawingml/2006/diagram" xmlns:a="http://schemas.openxmlformats.org/drawingml/2006/main" uniqueId="urn:microsoft.com/office/officeart/2005/8/colors/accent1_2">
-  <dgm:title val=""/>
-  <dgm:desc val=""/>
-  <dgm:catLst>
-    <dgm:cat type="accent1" pri="11200"/>
-  </dgm:catLst>
-  <dgm:styleLbl name="node0">
-    <dgm:fillClrLst meth="repeat">
-      <a:schemeClr val="accent1"/>
-    </dgm:fillClrLst>
-    <dgm:linClrLst meth="repeat">
-      <a:schemeClr val="lt1"/>
-    </dgm:linClrLst>
-    <dgm:effectClrLst/>
-    <dgm:txLinClrLst/>
-    <dgm:txFillClrLst/>
-    <dgm:txEffectClrLst/>
-  </dgm:styleLbl>
-  <dgm:styleLbl name="alignNode1">
-    <dgm:fillClrLst meth="repeat">
-      <a:schemeClr val="accent1"/>
-    </dgm:fillClrLst>
-    <dgm:linClrLst meth="repeat">
-      <a:schemeClr val="accent1"/>
-    </dgm:linClrLst>
-    <dgm:effectClrLst/>
-    <dgm:txLinClrLst/>
-    <dgm:txFillClrLst/>
-    <dgm:txEffectClrLst/>
-  </dgm:styleLbl>
-  <dgm:styleLbl name="node1">
-    <dgm:fillClrLst meth="repeat">
-      <a:schemeClr val="accent1"/>
-    </dgm:fillClrLst>
-    <dgm:linClrLst meth="repeat">
-      <a:schemeClr val="lt1"/>
-    </dgm:linClrLst>
-    <dgm:effectClrLst/>
-    <dgm:txLinClrLst/>
-    <dgm:txFillClrLst/>
-    <dgm:txEffectClrLst/>
-  </dgm:styleLbl>
-  <dgm:styleLbl name="lnNode1">
-    <dgm:fillClrLst meth="repeat">
-      <a:schemeClr val="accent1"/>
-    </dgm:fillClrLst>
-    <dgm:linClrLst meth="repeat">
-      <a:schemeClr val="lt1"/>
-    </dgm:linClrLst>
-    <dgm:effectClrLst/>
-    <dgm:txLinClrLst/>
-    <dgm:txFillClrLst/>
-    <dgm:txEffectClrLst/>
-  </dgm:styleLbl>
-  <dgm:styleLbl name="vennNode1">
-    <dgm:fillClrLst meth="repeat">
-      <a:schemeClr val="accent1">
-        <a:alpha val="50000"/>
-      </a:schemeClr>
-    </dgm:fillClrLst>
-    <dgm:linClrLst meth="repeat">
-      <a:schemeClr val="lt1"/>
-    </dgm:linClrLst>
-    <dgm:effectClrLst/>
-    <dgm:txLinClrLst/>
-    <dgm:txFillClrLst/>
-    <dgm:txEffectClrLst/>
-  </dgm:styleLbl>
-  <dgm:styleLbl name="node2">
-    <dgm:fillClrLst meth="repeat">
-      <a:schemeClr val="accent1"/>
-    </dgm:fillClrLst>
-    <dgm:linClrLst meth="repeat">
-      <a:schemeClr val="lt1"/>
-    </dgm:linClrLst>
-    <dgm:effectClrLst/>
-    <dgm:txLinClrLst/>
-    <dgm:txFillClrLst/>
-    <dgm:txEffectClrLst/>
-  </dgm:styleLbl>
-  <dgm:styleLbl name="node3">
-    <dgm:fillClrLst meth="repeat">
-      <a:schemeClr val="accent1"/>
-    </dgm:fillClrLst>
-    <dgm:linClrLst meth="repeat">
-      <a:schemeClr val="lt1"/>
-    </dgm:linClrLst>
-    <dgm:effectClrLst/>
-    <dgm:txLinClrLst/>
-    <dgm:txFillClrLst/>
-    <dgm:txEffectClrLst/>
-  </dgm:styleLbl>
-  <dgm:styleLbl name="node4">
-    <dgm:fillClrLst meth="repeat">
-      <a:schemeClr val="accent1"/>
-    </dgm:fillClrLst>
-    <dgm:linClrLst meth="repeat">
-      <a:schemeClr val="lt1"/>
-    </dgm:linClrLst>
-    <dgm:effectClrLst/>
-    <dgm:txLinClrLst/>
-    <dgm:txFillClrLst/>
-    <dgm:txEffectClrLst/>
-  </dgm:styleLbl>
-  <dgm:styleLbl name="fgImgPlace1">
-    <dgm:fillClrLst meth="repeat">
-      <a:schemeClr val="accent1">
-        <a:tint val="50000"/>
-      </a:schemeClr>
-    </dgm:fillClrLst>
-    <dgm:linClrLst meth="repeat">
-      <a:schemeClr val="lt1"/>
-    </dgm:linClrLst>
-    <dgm:effectClrLst/>
-    <dgm:txLinClrLst/>
-    <dgm:txFillClrLst meth="repeat">
-      <a:schemeClr val="lt1"/>
-    </dgm:txFillClrLst>
-    <dgm:txEffectClrLst/>
-  </dgm:styleLbl>
-  <dgm:styleLbl name="alignImgPlace1">
-    <dgm:fillClrLst meth="repeat">
-      <a:schemeClr val="accent1">
-        <a:tint val="50000"/>
-      </a:schemeClr>
-    </dgm:fillClrLst>
-    <dgm:linClrLst meth="repeat">
-      <a:schemeClr val="lt1"/>
-    </dgm:linClrLst>
-    <dgm:effectClrLst/>
-    <dgm:txLinClrLst/>
-    <dgm:txFillClrLst meth="repeat">
-      <a:schemeClr val="lt1"/>
-    </dgm:txFillClrLst>
-    <dgm:txEffectClrLst/>
-  </dgm:styleLbl>
-  <dgm:styleLbl name="bgImgPlace1">
-    <dgm:fillClrLst meth="repeat">
-      <a:schemeClr val="accent1">
-        <a:tint val="50000"/>
-      </a:schemeClr>
-    </dgm:fillClrLst>
-    <dgm:linClrLst meth="repeat">
-      <a:schemeClr val="lt1"/>
-    </dgm:linClrLst>
-    <dgm:effectClrLst/>
-    <dgm:txLinClrLst/>
-    <dgm:txFillClrLst meth="repeat">
-      <a:schemeClr val="lt1"/>
-    </dgm:txFillClrLst>
-    <dgm:txEffectClrLst/>
-  </dgm:styleLbl>
-  <dgm:styleLbl name="sibTrans2D1">
-    <dgm:fillClrLst meth="repeat">
-      <a:schemeClr val="accent1">
-        <a:tint val="60000"/>
-      </a:schemeClr>
-    </dgm:fillClrLst>
-    <dgm:linClrLst meth="repeat">
-      <a:schemeClr val="accent1">
-        <a:tint val="60000"/>
-      </a:schemeClr>
-    </dgm:linClrLst>
-    <dgm:effectClrLst/>
-    <dgm:txLinClrLst/>
-    <dgm:txFillClrLst/>
-    <dgm:txEffectClrLst/>
-  </dgm:styleLbl>
-  <dgm:styleLbl name="fgSibTrans2D1">
-    <dgm:fillClrLst meth="repeat">
-      <a:schemeClr val="accent1">
-        <a:tint val="60000"/>
-      </a:schemeClr>
-    </dgm:fillClrLst>
-    <dgm:linClrLst meth="repeat">
-      <a:schemeClr val="accent1">
-        <a:tint val="60000"/>
-      </a:schemeClr>
-    </dgm:linClrLst>
-    <dgm:effectClrLst/>
-    <dgm:txLinClrLst/>
-    <dgm:txFillClrLst/>
-    <dgm:txEffectClrLst/>
-  </dgm:styleLbl>
-  <dgm:styleLbl name="bgSibTrans2D1">
-    <dgm:fillClrLst meth="repeat">
-      <a:schemeClr val="accent1">
-        <a:tint val="60000"/>
-      </a:schemeClr>
-    </dgm:fillClrLst>
-    <dgm:linClrLst meth="repeat">
-      <a:schemeClr val="accent1">
-        <a:tint val="60000"/>
-      </a:schemeClr>
-    </dgm:linClrLst>
-    <dgm:effectClrLst/>
-    <dgm:txLinClrLst/>
-    <dgm:txFillClrLst/>
-    <dgm:txEffectClrLst/>
-  </dgm:styleLbl>
-  <dgm:styleLbl name="sibTrans1D1">
-    <dgm:fillClrLst meth="repeat">
-      <a:schemeClr val="accent1"/>
-    </dgm:fillClrLst>
-    <dgm:linClrLst meth="repeat">
-      <a:schemeClr val="accent1"/>
-    </dgm:linClrLst>
-    <dgm:effectClrLst/>
-    <dgm:txLinClrLst/>
-    <dgm:txFillClrLst meth="repeat">
-      <a:schemeClr val="tx1"/>
-    </dgm:txFillClrLst>
-    <dgm:txEffectClrLst/>
-  </dgm:styleLbl>
-  <dgm:styleLbl name="callout">
-    <dgm:fillClrLst meth="repeat">
-      <a:schemeClr val="accent1"/>
-    </dgm:fillClrLst>
-    <dgm:linClrLst meth="repeat">
-      <a:schemeClr val="accent1">
-        <a:tint val="50000"/>
-      </a:schemeClr>
-    </dgm:linClrLst>
-    <dgm:effectClrLst/>
-    <dgm:txLinClrLst/>
-    <dgm:txFillClrLst meth="repeat">
-      <a:schemeClr val="tx1"/>
-    </dgm:txFillClrLst>
-    <dgm:txEffectClrLst/>
-  </dgm:styleLbl>
-  <dgm:styleLbl name="asst0">
-    <dgm:fillClrLst meth="repeat">
-      <a:schemeClr val="accent1"/>
-    </dgm:fillClrLst>
-    <dgm:linClrLst meth="repeat">
-      <a:schemeClr val="lt1"/>
-    </dgm:linClrLst>
-    <dgm:effectClrLst/>
-    <dgm:txLinClrLst/>
-    <dgm:txFillClrLst/>
-    <dgm:txEffectClrLst/>
-  </dgm:styleLbl>
-  <dgm:styleLbl name="asst1">
-    <dgm:fillClrLst meth="repeat">
-      <a:schemeClr val="accent1"/>
-    </dgm:fillClrLst>
-    <dgm:linClrLst meth="repeat">
-      <a:schemeClr val="lt1"/>
-    </dgm:linClrLst>
-    <dgm:effectClrLst/>
-    <dgm:txLinClrLst/>
-    <dgm:txFillClrLst/>
-    <dgm:txEffectClrLst/>
-  </dgm:styleLbl>
-  <dgm:styleLbl name="asst2">
-    <dgm:fillClrLst meth="repeat">
-      <a:schemeClr val="accent1"/>
-    </dgm:fillClrLst>
-    <dgm:linClrLst meth="repeat">
-      <a:schemeClr val="lt1"/>
-    </dgm:linClrLst>
-    <dgm:effectClrLst/>
-    <dgm:txLinClrLst/>
-    <dgm:txFillClrLst/>
-    <dgm:txEffectClrLst/>
-  </dgm:styleLbl>
-  <dgm:styleLbl name="asst3">
-    <dgm:fillClrLst meth="repeat">
-      <a:schemeClr val="accent1"/>
-    </dgm:fillClrLst>
-    <dgm:linClrLst meth="repeat">
-      <a:schemeClr val="lt1"/>
-    </dgm:linClrLst>
-    <dgm:effectClrLst/>
-    <dgm:txLinClrLst/>
-    <dgm:txFillClrLst/>
-    <dgm:txEffectClrLst/>
-  </dgm:styleLbl>
-  <dgm:styleLbl name="asst4">
-    <dgm:fillClrLst meth="repeat">
-      <a:schemeClr val="accent1"/>
-    </dgm:fillClrLst>
-    <dgm:linClrLst meth="repeat">
-      <a:schemeClr val="lt1"/>
-    </dgm:linClrLst>
-    <dgm:effectClrLst/>
-    <dgm:txLinClrLst/>
-    <dgm:txFillClrLst/>
-    <dgm:txEffectClrLst/>
-  </dgm:styleLbl>
-  <dgm:styleLbl name="parChTrans2D1">
-    <dgm:fillClrLst meth="repeat">
-      <a:schemeClr val="accent1">
-        <a:tint val="60000"/>
-      </a:schemeClr>
-    </dgm:fillClrLst>
-    <dgm:linClrLst meth="repeat">
-      <a:schemeClr val="accent1">
-        <a:tint val="60000"/>
-      </a:schemeClr>
-    </dgm:linClrLst>
-    <dgm:effectClrLst/>
-    <dgm:txLinClrLst/>
-    <dgm:txFillClrLst meth="repeat">
-      <a:schemeClr val="lt1"/>
-    </dgm:txFillClrLst>
-    <dgm:txEffectClrLst/>
-  </dgm:styleLbl>
-  <dgm:styleLbl name="parChTrans2D2">
-    <dgm:fillClrLst meth="repeat">
-      <a:schemeClr val="accent1"/>
-    </dgm:fillClrLst>
-    <dgm:linClrLst meth="repeat">
-      <a:schemeClr val="accent1"/>
-    </dgm:linClrLst>
-    <dgm:effectClrLst/>
-    <dgm:txLinClrLst/>
-    <dgm:txFillClrLst meth="repeat">
-      <a:schemeClr val="lt1"/>
-    </dgm:txFillClrLst>
-    <dgm:txEffectClrLst/>
-  </dgm:styleLbl>
-  <dgm:styleLbl name="parChTrans2D3">
-    <dgm:fillClrLst meth="repeat">
-      <a:schemeClr val="accent1"/>
-    </dgm:fillClrLst>
-    <dgm:linClrLst meth="repeat">
-      <a:schemeClr val="accent1"/>
-    </dgm:linClrLst>
-    <dgm:effectClrLst/>
-    <dgm:txLinClrLst/>
-    <dgm:txFillClrLst meth="repeat">
-      <a:schemeClr val="lt1"/>
-    </dgm:txFillClrLst>
-    <dgm:txEffectClrLst/>
-  </dgm:styleLbl>
-  <dgm:styleLbl name="parChTrans2D4">
-    <dgm:fillClrLst meth="repeat">
-      <a:schemeClr val="accent1"/>
-    </dgm:fillClrLst>
-    <dgm:linClrLst meth="repeat">
-      <a:schemeClr val="accent1"/>
-    </dgm:linClrLst>
-    <dgm:effectClrLst/>
-    <dgm:txLinClrLst/>
-    <dgm:txFillClrLst meth="repeat">
-      <a:schemeClr val="lt1"/>
-    </dgm:txFillClrLst>
-    <dgm:txEffectClrLst/>
-  </dgm:styleLbl>
-  <dgm:styleLbl name="parChTrans1D1">
-    <dgm:fillClrLst meth="repeat">
-      <a:schemeClr val="accent1"/>
-    </dgm:fillClrLst>
-    <dgm:linClrLst meth="repeat">
-      <a:schemeClr val="accent1">
-        <a:shade val="60000"/>
-      </a:schemeClr>
-    </dgm:linClrLst>
-    <dgm:effectClrLst/>
-    <dgm:txLinClrLst/>
-    <dgm:txFillClrLst meth="repeat">
-      <a:schemeClr val="tx1"/>
-    </dgm:txFillClrLst>
-    <dgm:txEffectClrLst/>
-  </dgm:styleLbl>
-  <dgm:styleLbl name="parChTrans1D2">
-    <dgm:fillClrLst meth="repeat">
-      <a:schemeClr val="accent1"/>
-    </dgm:fillClrLst>
-    <dgm:linClrLst meth="repeat">
-      <a:schemeClr val="accent1">
-        <a:shade val="60000"/>
-      </a:schemeClr>
-    </dgm:linClrLst>
-    <dgm:effectClrLst/>
-    <dgm:txLinClrLst/>
-    <dgm:txFillClrLst meth="repeat">
-      <a:schemeClr val="tx1"/>
-    </dgm:txFillClrLst>
-    <dgm:txEffectClrLst/>
-  </dgm:styleLbl>
-  <dgm:styleLbl name="parChTrans1D3">
-    <dgm:fillClrLst meth="repeat">
-      <a:schemeClr val="accent1"/>
-    </dgm:fillClrLst>
-    <dgm:linClrLst meth="repeat">
-      <a:schemeClr val="accent1">
-        <a:shade val="80000"/>
-      </a:schemeClr>
-    </dgm:linClrLst>
-    <dgm:effectClrLst/>
-    <dgm:txLinClrLst/>
-    <dgm:txFillClrLst meth="repeat">
-      <a:schemeClr val="tx1"/>
-    </dgm:txFillClrLst>
-    <dgm:txEffectClrLst/>
-  </dgm:styleLbl>
-  <dgm:styleLbl name="parChTrans1D4">
-    <dgm:fillClrLst meth="repeat">
-      <a:schemeClr val="accent1"/>
-    </dgm:fillClrLst>
-    <dgm:linClrLst meth="repeat">
-      <a:schemeClr val="accent1">
-        <a:shade val="80000"/>
-      </a:schemeClr>
-    </dgm:linClrLst>
-    <dgm:effectClrLst/>
-    <dgm:txLinClrLst/>
-    <dgm:txFillClrLst meth="repeat">
-      <a:schemeClr val="tx1"/>
-    </dgm:txFillClrLst>
-    <dgm:txEffectClrLst/>
-  </dgm:styleLbl>
-  <dgm:styleLbl name="fgAcc1">
-    <dgm:fillClrLst meth="repeat">
-      <a:schemeClr val="lt1">
-        <a:alpha val="90000"/>
-      </a:schemeClr>
-    </dgm:fillClrLst>
-    <dgm:linClrLst meth="repeat">
-      <a:schemeClr val="accent1"/>
-    </dgm:linClrLst>
-    <dgm:effectClrLst/>
-    <dgm:txLinClrLst/>
-    <dgm:txFillClrLst meth="repeat">
-      <a:schemeClr val="dk1"/>
-    </dgm:txFillClrLst>
-    <dgm:txEffectClrLst/>
-  </dgm:styleLbl>
-  <dgm:styleLbl name="conFgAcc1">
-    <dgm:fillClrLst meth="repeat">
-      <a:schemeClr val="lt1">
-        <a:alpha val="90000"/>
-      </a:schemeClr>
-    </dgm:fillClrLst>
-    <dgm:linClrLst meth="repeat">
-      <a:schemeClr val="accent1"/>
-    </dgm:linClrLst>
-    <dgm:effectClrLst/>
-    <dgm:txLinClrLst/>
-    <dgm:txFillClrLst meth="repeat">
-      <a:schemeClr val="dk1"/>
-    </dgm:txFillClrLst>
-    <dgm:txEffectClrLst/>
-  </dgm:styleLbl>
-  <dgm:styleLbl name="alignAcc1">
-    <dgm:fillClrLst meth="repeat">
-      <a:schemeClr val="lt1">
-        <a:alpha val="90000"/>
-      </a:schemeClr>
-    </dgm:fillClrLst>
-    <dgm:linClrLst meth="repeat">
-      <a:schemeClr val="accent1"/>
-    </dgm:linClrLst>
-    <dgm:effectClrLst/>
-    <dgm:txLinClrLst/>
-    <dgm:txFillClrLst meth="repeat">
-      <a:schemeClr val="dk1"/>
-    </dgm:txFillClrLst>
-    <dgm:txEffectClrLst/>
-  </dgm:styleLbl>
-  <dgm:styleLbl name="trAlignAcc1">
-    <dgm:fillClrLst meth="repeat">
-      <a:schemeClr val="lt1">
-        <a:alpha val="40000"/>
-      </a:schemeClr>
-    </dgm:fillClrLst>
-    <dgm:linClrLst meth="repeat">
-      <a:schemeClr val="accent1"/>
-    </dgm:linClrLst>
-    <dgm:effectClrLst/>
-    <dgm:txLinClrLst/>
-    <dgm:txFillClrLst meth="repeat">
-      <a:schemeClr val="dk1"/>
-    </dgm:txFillClrLst>
-    <dgm:txEffectClrLst/>
-  </dgm:styleLbl>
-  <dgm:styleLbl name="bgAcc1">
-    <dgm:fillClrLst meth="repeat">
-      <a:schemeClr val="lt1">
-        <a:alpha val="90000"/>
-      </a:schemeClr>
-    </dgm:fillClrLst>
-    <dgm:linClrLst meth="repeat">
-      <a:schemeClr val="accent1"/>
-    </dgm:linClrLst>
-    <dgm:effectClrLst/>
-    <dgm:txLinClrLst/>
-    <dgm:txFillClrLst meth="repeat">
-      <a:schemeClr val="dk1"/>
-    </dgm:txFillClrLst>
-    <dgm:txEffectClrLst/>
-  </dgm:styleLbl>
-  <dgm:styleLbl name="solidFgAcc1">
-    <dgm:fillClrLst meth="repeat">
-      <a:schemeClr val="lt1"/>
-    </dgm:fillClrLst>
-    <dgm:linClrLst meth="repeat">
-      <a:schemeClr val="accent1"/>
-    </dgm:linClrLst>
-    <dgm:effectClrLst/>
-    <dgm:txLinClrLst/>
-    <dgm:txFillClrLst meth="repeat">
-      <a:schemeClr val="dk1"/>
-    </dgm:txFillClrLst>
-    <dgm:txEffectClrLst/>
-  </dgm:styleLbl>
-  <dgm:styleLbl name="solidAlignAcc1">
-    <dgm:fillClrLst meth="repeat">
-      <a:schemeClr val="lt1"/>
-    </dgm:fillClrLst>
-    <dgm:linClrLst meth="repeat">
-      <a:schemeClr val="accent1"/>
-    </dgm:linClrLst>
-    <dgm:effectClrLst/>
-    <dgm:txLinClrLst/>
-    <dgm:txFillClrLst meth="repeat">
-      <a:schemeClr val="dk1"/>
-    </dgm:txFillClrLst>
-    <dgm:txEffectClrLst/>
-  </dgm:styleLbl>
-  <dgm:styleLbl name="solidBgAcc1">
-    <dgm:fillClrLst meth="repeat">
-      <a:schemeClr val="lt1"/>
-    </dgm:fillClrLst>
-    <dgm:linClrLst meth="repeat">
-      <a:schemeClr val="accent1"/>
-    </dgm:linClrLst>
-    <dgm:effectClrLst/>
-    <dgm:txLinClrLst/>
-    <dgm:txFillClrLst meth="repeat">
-      <a:schemeClr val="dk1"/>
-    </dgm:txFillClrLst>
-    <dgm:txEffectClrLst/>
-  </dgm:styleLbl>
-  <dgm:styleLbl name="fgAccFollowNode1">
-    <dgm:fillClrLst meth="repeat">
-      <a:schemeClr val="accent1">
-        <a:alpha val="90000"/>
-        <a:tint val="40000"/>
-      </a:schemeClr>
-    </dgm:fillClrLst>
-    <dgm:linClrLst meth="repeat">
-      <a:schemeClr val="accent1">
-        <a:alpha val="90000"/>
-        <a:tint val="40000"/>
-      </a:schemeClr>
-    </dgm:linClrLst>
-    <dgm:effectClrLst/>
-    <dgm:txLinClrLst/>
-    <dgm:txFillClrLst meth="repeat">
-      <a:schemeClr val="dk1"/>
-    </dgm:txFillClrLst>
-    <dgm:txEffectClrLst/>
-  </dgm:styleLbl>
-  <dgm:styleLbl name="alignAccFollowNode1">
-    <dgm:fillClrLst meth="repeat">
-      <a:schemeClr val="accent1">
-        <a:alpha val="90000"/>
-        <a:tint val="40000"/>
-      </a:schemeClr>
-    </dgm:fillClrLst>
-    <dgm:linClrLst meth="repeat">
-      <a:schemeClr val="accent1">
-        <a:alpha val="90000"/>
-        <a:tint val="40000"/>
-      </a:schemeClr>
-    </dgm:linClrLst>
-    <dgm:effectClrLst/>
-    <dgm:txLinClrLst/>
-    <dgm:txFillClrLst meth="repeat">
-      <a:schemeClr val="dk1"/>
-    </dgm:txFillClrLst>
-    <dgm:txEffectClrLst/>
-  </dgm:styleLbl>
-  <dgm:styleLbl name="bgAccFollowNode1">
-    <dgm:fillClrLst meth="repeat">
-      <a:schemeClr val="accent1">
-        <a:alpha val="90000"/>
-        <a:tint val="40000"/>
-      </a:schemeClr>
-    </dgm:fillClrLst>
-    <dgm:linClrLst meth="repeat">
-      <a:schemeClr val="accent1">
-        <a:alpha val="90000"/>
-        <a:tint val="40000"/>
-      </a:schemeClr>
-    </dgm:linClrLst>
-    <dgm:effectClrLst/>
-    <dgm:txLinClrLst/>
-    <dgm:txFillClrLst meth="repeat">
-      <a:schemeClr val="dk1"/>
-    </dgm:txFillClrLst>
-    <dgm:txEffectClrLst/>
-  </dgm:styleLbl>
-  <dgm:styleLbl name="fgAcc0">
-    <dgm:fillClrLst meth="repeat">
-      <a:schemeClr val="lt1">
-        <a:alpha val="90000"/>
-      </a:schemeClr>
-    </dgm:fillClrLst>
-    <dgm:linClrLst meth="repeat">
-      <a:schemeClr val="accent1"/>
-    </dgm:linClrLst>
-    <dgm:effectClrLst/>
-    <dgm:txLinClrLst/>
-    <dgm:txFillClrLst meth="repeat">
-      <a:schemeClr val="dk1"/>
-    </dgm:txFillClrLst>
-    <dgm:txEffectClrLst/>
-  </dgm:styleLbl>
-  <dgm:styleLbl name="fgAcc2">
-    <dgm:fillClrLst meth="repeat">
-      <a:schemeClr val="lt1">
-        <a:alpha val="90000"/>
-      </a:schemeClr>
-    </dgm:fillClrLst>
-    <dgm:linClrLst meth="repeat">
-      <a:schemeClr val="accent1"/>
-    </dgm:linClrLst>
-    <dgm:effectClrLst/>
-    <dgm:txLinClrLst/>
-    <dgm:txFillClrLst meth="repeat">
-      <a:schemeClr val="dk1"/>
-    </dgm:txFillClrLst>
-    <dgm:txEffectClrLst/>
-  </dgm:styleLbl>
-  <dgm:styleLbl name="fgAcc3">
-    <dgm:fillClrLst meth="repeat">
-      <a:schemeClr val="lt1">
-        <a:alpha val="90000"/>
-      </a:schemeClr>
-    </dgm:fillClrLst>
-    <dgm:linClrLst meth="repeat">
-      <a:schemeClr val="accent1"/>
-    </dgm:linClrLst>
-    <dgm:effectClrLst/>
-    <dgm:txLinClrLst/>
-    <dgm:txFillClrLst meth="repeat">
-      <a:schemeClr val="dk1"/>
-    </dgm:txFillClrLst>
-    <dgm:txEffectClrLst/>
-  </dgm:styleLbl>
-  <dgm:styleLbl name="fgAcc4">
-    <dgm:fillClrLst meth="repeat">
-      <a:schemeClr val="lt1">
-        <a:alpha val="90000"/>
-      </a:schemeClr>
-    </dgm:fillClrLst>
-    <dgm:linClrLst meth="repeat">
-      <a:schemeClr val="accent1"/>
-    </dgm:linClrLst>
-    <dgm:effectClrLst/>
-    <dgm:txLinClrLst/>
-    <dgm:txFillClrLst meth="repeat">
-      <a:schemeClr val="dk1"/>
-    </dgm:txFillClrLst>
-    <dgm:txEffectClrLst/>
-  </dgm:styleLbl>
-  <dgm:styleLbl name="bgShp">
-    <dgm:fillClrLst meth="repeat">
-      <a:schemeClr val="accent1">
-        <a:tint val="40000"/>
-      </a:schemeClr>
-    </dgm:fillClrLst>
-    <dgm:linClrLst meth="repeat">
-      <a:schemeClr val="accent1"/>
-    </dgm:linClrLst>
-    <dgm:effectClrLst/>
-    <dgm:txLinClrLst/>
-    <dgm:txFillClrLst meth="repeat">
-      <a:schemeClr val="dk1"/>
-    </dgm:txFillClrLst>
-    <dgm:txEffectClrLst/>
-  </dgm:styleLbl>
-  <dgm:styleLbl name="dkBgShp">
-    <dgm:fillClrLst meth="repeat">
-      <a:schemeClr val="accent1">
-        <a:shade val="80000"/>
-      </a:schemeClr>
-    </dgm:fillClrLst>
-    <dgm:linClrLst meth="repeat">
-      <a:schemeClr val="accent1"/>
-    </dgm:linClrLst>
-    <dgm:effectClrLst/>
-    <dgm:txLinClrLst/>
-    <dgm:txFillClrLst meth="repeat">
-      <a:schemeClr val="lt1"/>
-    </dgm:txFillClrLst>
-    <dgm:txEffectClrLst/>
-  </dgm:styleLbl>
-  <dgm:styleLbl name="trBgShp">
-    <dgm:fillClrLst meth="repeat">
-      <a:schemeClr val="accent1">
-        <a:tint val="50000"/>
-        <a:alpha val="40000"/>
-      </a:schemeClr>
-    </dgm:fillClrLst>
-    <dgm:linClrLst meth="repeat">
-      <a:schemeClr val="accent1"/>
-    </dgm:linClrLst>
-    <dgm:effectClrLst/>
-    <dgm:txLinClrLst/>
-    <dgm:txFillClrLst meth="repeat">
-      <a:schemeClr val="lt1"/>
-    </dgm:txFillClrLst>
-    <dgm:txEffectClrLst/>
-  </dgm:styleLbl>
-  <dgm:styleLbl name="fgShp">
-    <dgm:fillClrLst meth="repeat">
-      <a:schemeClr val="accent1">
-        <a:tint val="60000"/>
-      </a:schemeClr>
-    </dgm:fillClrLst>
-    <dgm:linClrLst meth="repeat">
-      <a:schemeClr val="lt1"/>
-    </dgm:linClrLst>
-    <dgm:effectClrLst/>
-    <dgm:txLinClrLst/>
-    <dgm:txFillClrLst meth="repeat">
-      <a:schemeClr val="dk1"/>
-    </dgm:txFillClrLst>
-    <dgm:txEffectClrLst/>
-  </dgm:styleLbl>
-  <dgm:styleLbl name="revTx">
-    <dgm:fillClrLst meth="repeat">
-      <a:schemeClr val="lt1">
-        <a:alpha val="0"/>
-      </a:schemeClr>
-    </dgm:fillClrLst>
-    <dgm:linClrLst meth="repeat">
-      <a:schemeClr val="dk1">
-        <a:alpha val="0"/>
-      </a:schemeClr>
-    </dgm:linClrLst>
-    <dgm:effectClrLst/>
-    <dgm:txLinClrLst/>
-    <dgm:txFillClrLst meth="repeat">
-      <a:schemeClr val="tx1"/>
-    </dgm:txFillClrLst>
-    <dgm:txEffectClrLst/>
-  </dgm:styleLbl>
-</dgm:colorsDef>
-</file>
-
-<file path=ppt/diagrams/data1.xml><?xml version="1.0" encoding="utf-8"?>
-<dgm:dataModel xmlns:dgm="http://schemas.openxmlformats.org/drawingml/2006/diagram" xmlns:a="http://schemas.openxmlformats.org/drawingml/2006/main">
-  <dgm:ptLst>
-    <dgm:pt modelId="{FD345B50-5AD1-478C-8BEE-7B1273750DCB}" type="doc">
-      <dgm:prSet loTypeId="urn:microsoft.com/office/officeart/2005/8/layout/list1" loCatId="list" qsTypeId="urn:microsoft.com/office/officeart/2005/8/quickstyle/simple1" qsCatId="simple" csTypeId="urn:microsoft.com/office/officeart/2005/8/colors/accent1_2" csCatId="accent1" phldr="1"/>
-      <dgm:spPr/>
-      <dgm:t>
-        <a:bodyPr/>
-        <a:lstStyle/>
-        <a:p>
-          <a:endParaRPr lang="en-US"/>
-        </a:p>
-      </dgm:t>
-    </dgm:pt>
-    <dgm:pt modelId="{8CA78F25-E4A0-4965-A658-0084AB99CA1F}">
-      <dgm:prSet phldrT="[Text]" custT="1"/>
-      <dgm:spPr/>
-      <dgm:t>
-        <a:bodyPr/>
-        <a:lstStyle/>
-        <a:p>
-          <a:r>
-            <a:rPr lang="en-US" sz="2200" dirty="0" smtClean="0"/>
-            <a:t>Purpose</a:t>
-          </a:r>
-          <a:endParaRPr lang="en-US" sz="2200" dirty="0"/>
-        </a:p>
-      </dgm:t>
-    </dgm:pt>
-    <dgm:pt modelId="{2276D278-2A6B-416B-83EB-6F9D11A1587D}" type="parTrans" cxnId="{EF286308-48AB-46EF-B1DF-DCC2ECE74862}">
-      <dgm:prSet/>
-      <dgm:spPr/>
-      <dgm:t>
-        <a:bodyPr/>
-        <a:lstStyle/>
-        <a:p>
-          <a:endParaRPr lang="en-US"/>
-        </a:p>
-      </dgm:t>
-    </dgm:pt>
-    <dgm:pt modelId="{1C2299ED-875C-4AAF-9A51-9AFB85C9EB7C}" type="sibTrans" cxnId="{EF286308-48AB-46EF-B1DF-DCC2ECE74862}">
-      <dgm:prSet/>
-      <dgm:spPr/>
-      <dgm:t>
-        <a:bodyPr/>
-        <a:lstStyle/>
-        <a:p>
-          <a:endParaRPr lang="en-US"/>
-        </a:p>
-      </dgm:t>
-    </dgm:pt>
-    <dgm:pt modelId="{17F78D15-90A9-4321-80C0-7F95643E32E1}">
-      <dgm:prSet phldrT="[Text]" custT="1"/>
-      <dgm:spPr>
-        <a:solidFill>
-          <a:schemeClr val="accent2"/>
-        </a:solidFill>
-      </dgm:spPr>
-      <dgm:t>
-        <a:bodyPr/>
-        <a:lstStyle/>
-        <a:p>
-          <a:r>
-            <a:rPr lang="en-US" sz="2200" dirty="0" smtClean="0"/>
-            <a:t>Reason</a:t>
-          </a:r>
-          <a:endParaRPr lang="en-US" sz="2200" dirty="0"/>
-        </a:p>
-      </dgm:t>
-    </dgm:pt>
-    <dgm:pt modelId="{2D735C95-75E5-4BBE-97EF-B0901070C931}" type="parTrans" cxnId="{5B3739E5-13D4-4099-938B-7C5F29A12EC1}">
-      <dgm:prSet/>
-      <dgm:spPr/>
-      <dgm:t>
-        <a:bodyPr/>
-        <a:lstStyle/>
-        <a:p>
-          <a:endParaRPr lang="en-US"/>
-        </a:p>
-      </dgm:t>
-    </dgm:pt>
-    <dgm:pt modelId="{2C28AF82-B4B5-4FD7-B94F-BCF13943E541}" type="sibTrans" cxnId="{5B3739E5-13D4-4099-938B-7C5F29A12EC1}">
-      <dgm:prSet/>
-      <dgm:spPr/>
-      <dgm:t>
-        <a:bodyPr/>
-        <a:lstStyle/>
-        <a:p>
-          <a:endParaRPr lang="en-US"/>
-        </a:p>
-      </dgm:t>
-    </dgm:pt>
-    <dgm:pt modelId="{F14627D2-99F3-4BB9-ACF0-9B3757D4BA23}">
-      <dgm:prSet phldrT="[Text]" custT="1"/>
-      <dgm:spPr>
-        <a:solidFill>
-          <a:schemeClr val="accent4"/>
-        </a:solidFill>
-      </dgm:spPr>
-      <dgm:t>
-        <a:bodyPr/>
-        <a:lstStyle/>
-        <a:p>
-          <a:r>
-            <a:rPr lang="en-US" sz="2200" dirty="0" smtClean="0"/>
-            <a:t>The evaluation criteria</a:t>
-          </a:r>
-          <a:endParaRPr lang="en-US" sz="2200" dirty="0"/>
-        </a:p>
-      </dgm:t>
-    </dgm:pt>
-    <dgm:pt modelId="{D0C48550-9AD0-477C-BC8B-C1F7314E24CF}" type="parTrans" cxnId="{1BF9344A-9CDC-4EEE-B226-8D9F4E47A0E6}">
-      <dgm:prSet/>
-      <dgm:spPr/>
-      <dgm:t>
-        <a:bodyPr/>
-        <a:lstStyle/>
-        <a:p>
-          <a:endParaRPr lang="en-US"/>
-        </a:p>
-      </dgm:t>
-    </dgm:pt>
-    <dgm:pt modelId="{BC2FB94A-0519-4109-B86D-1185FC588AD9}" type="sibTrans" cxnId="{1BF9344A-9CDC-4EEE-B226-8D9F4E47A0E6}">
-      <dgm:prSet/>
-      <dgm:spPr/>
-      <dgm:t>
-        <a:bodyPr/>
-        <a:lstStyle/>
-        <a:p>
-          <a:endParaRPr lang="en-US"/>
-        </a:p>
-      </dgm:t>
-    </dgm:pt>
-    <dgm:pt modelId="{BE2D09AC-4CBB-4424-A502-FFF2C66BDC24}">
-      <dgm:prSet phldrT="[Text]" custT="1"/>
-      <dgm:spPr>
-        <a:solidFill>
-          <a:schemeClr val="accent5"/>
-        </a:solidFill>
-      </dgm:spPr>
-      <dgm:t>
-        <a:bodyPr/>
-        <a:lstStyle/>
-        <a:p>
-          <a:r>
-            <a:rPr lang="en-US" sz="2200" dirty="0" smtClean="0"/>
-            <a:t>The study findings</a:t>
-          </a:r>
-          <a:endParaRPr lang="en-US" sz="2200" dirty="0"/>
-        </a:p>
-      </dgm:t>
-    </dgm:pt>
-    <dgm:pt modelId="{E5366607-D931-467B-8B18-B07F15C0B1C9}" type="parTrans" cxnId="{668A54BA-3784-42F1-9F39-8C2FC1623344}">
-      <dgm:prSet/>
-      <dgm:spPr/>
-      <dgm:t>
-        <a:bodyPr/>
-        <a:lstStyle/>
-        <a:p>
-          <a:endParaRPr lang="en-US"/>
-        </a:p>
-      </dgm:t>
-    </dgm:pt>
-    <dgm:pt modelId="{D40DD221-2846-496B-8E8B-A849F60C0C47}" type="sibTrans" cxnId="{668A54BA-3784-42F1-9F39-8C2FC1623344}">
-      <dgm:prSet/>
-      <dgm:spPr/>
-      <dgm:t>
-        <a:bodyPr/>
-        <a:lstStyle/>
-        <a:p>
-          <a:endParaRPr lang="en-US"/>
-        </a:p>
-      </dgm:t>
-    </dgm:pt>
-    <dgm:pt modelId="{700EE0F2-D2BF-46CD-ABAB-85E8CD19E387}">
-      <dgm:prSet phldrT="[Text]" custT="1"/>
-      <dgm:spPr>
-        <a:solidFill>
-          <a:schemeClr val="accent6"/>
-        </a:solidFill>
-      </dgm:spPr>
-      <dgm:t>
-        <a:bodyPr/>
-        <a:lstStyle/>
-        <a:p>
-          <a:r>
-            <a:rPr lang="en-US" sz="2200" dirty="0" smtClean="0"/>
-            <a:t>The recommendations</a:t>
-          </a:r>
-          <a:endParaRPr lang="en-US" sz="2200" dirty="0"/>
-        </a:p>
-      </dgm:t>
-    </dgm:pt>
-    <dgm:pt modelId="{B29AB8E3-4DBF-4361-A563-941D6FF583AA}" type="parTrans" cxnId="{0AB6244E-E6D1-4603-8608-7786CE568958}">
-      <dgm:prSet/>
-      <dgm:spPr/>
-      <dgm:t>
-        <a:bodyPr/>
-        <a:lstStyle/>
-        <a:p>
-          <a:endParaRPr lang="en-US"/>
-        </a:p>
-      </dgm:t>
-    </dgm:pt>
-    <dgm:pt modelId="{F27186F8-E82E-4AD8-ADC6-D28CDC967827}" type="sibTrans" cxnId="{0AB6244E-E6D1-4603-8608-7786CE568958}">
-      <dgm:prSet/>
-      <dgm:spPr/>
-      <dgm:t>
-        <a:bodyPr/>
-        <a:lstStyle/>
-        <a:p>
-          <a:endParaRPr lang="en-US"/>
-        </a:p>
-      </dgm:t>
-    </dgm:pt>
-    <dgm:pt modelId="{0100315B-D429-4EAC-8AA1-BEFCB3B6B2D9}">
-      <dgm:prSet phldrT="[Text]" custT="1"/>
-      <dgm:spPr>
-        <a:solidFill>
-          <a:schemeClr val="accent3"/>
-        </a:solidFill>
-      </dgm:spPr>
-      <dgm:t>
-        <a:bodyPr/>
-        <a:lstStyle/>
-        <a:p>
-          <a:r>
-            <a:rPr lang="en-US" sz="2200" dirty="0" smtClean="0"/>
-            <a:t>Background information</a:t>
-          </a:r>
-          <a:endParaRPr lang="en-US" sz="2200" dirty="0"/>
-        </a:p>
-      </dgm:t>
-    </dgm:pt>
-    <dgm:pt modelId="{DBA45244-1A55-431F-9254-F51FEE3E1101}" type="parTrans" cxnId="{CE57512A-58E2-42DA-B069-996FF30E4A1C}">
-      <dgm:prSet/>
-      <dgm:spPr/>
-    </dgm:pt>
-    <dgm:pt modelId="{D24FC51D-FCC1-4684-B9BB-807CB7CF9A0A}" type="sibTrans" cxnId="{CE57512A-58E2-42DA-B069-996FF30E4A1C}">
-      <dgm:prSet/>
-      <dgm:spPr/>
-    </dgm:pt>
-    <dgm:pt modelId="{9EFE8DBD-3349-4550-A4EC-39766CB04F86}" type="pres">
-      <dgm:prSet presAssocID="{FD345B50-5AD1-478C-8BEE-7B1273750DCB}" presName="linear" presStyleCnt="0">
-        <dgm:presLayoutVars>
-          <dgm:dir/>
-          <dgm:animLvl val="lvl"/>
-          <dgm:resizeHandles val="exact"/>
-        </dgm:presLayoutVars>
-      </dgm:prSet>
-      <dgm:spPr/>
-      <dgm:t>
-        <a:bodyPr/>
-        <a:lstStyle/>
-        <a:p>
-          <a:endParaRPr lang="en-US"/>
-        </a:p>
-      </dgm:t>
-    </dgm:pt>
-    <dgm:pt modelId="{DF23568B-F979-44DF-84C3-ADBBD77DD4B6}" type="pres">
-      <dgm:prSet presAssocID="{8CA78F25-E4A0-4965-A658-0084AB99CA1F}" presName="parentLin" presStyleCnt="0"/>
-      <dgm:spPr/>
-    </dgm:pt>
-    <dgm:pt modelId="{5C1DC1E6-7DCB-43E0-BA21-A8A0AB80CD78}" type="pres">
-      <dgm:prSet presAssocID="{8CA78F25-E4A0-4965-A658-0084AB99CA1F}" presName="parentLeftMargin" presStyleLbl="node1" presStyleIdx="0" presStyleCnt="6"/>
-      <dgm:spPr/>
-      <dgm:t>
-        <a:bodyPr/>
-        <a:lstStyle/>
-        <a:p>
-          <a:endParaRPr lang="en-US"/>
-        </a:p>
-      </dgm:t>
-    </dgm:pt>
-    <dgm:pt modelId="{4F622BEB-62C0-41FB-AA25-3807F8F602A7}" type="pres">
-      <dgm:prSet presAssocID="{8CA78F25-E4A0-4965-A658-0084AB99CA1F}" presName="parentText" presStyleLbl="node1" presStyleIdx="0" presStyleCnt="6">
-        <dgm:presLayoutVars>
-          <dgm:chMax val="0"/>
-          <dgm:bulletEnabled val="1"/>
-        </dgm:presLayoutVars>
-      </dgm:prSet>
-      <dgm:spPr/>
-      <dgm:t>
-        <a:bodyPr/>
-        <a:lstStyle/>
-        <a:p>
-          <a:endParaRPr lang="en-US"/>
-        </a:p>
-      </dgm:t>
-    </dgm:pt>
-    <dgm:pt modelId="{F112E137-4C01-4626-80BD-8612A623F0E4}" type="pres">
-      <dgm:prSet presAssocID="{8CA78F25-E4A0-4965-A658-0084AB99CA1F}" presName="negativeSpace" presStyleCnt="0"/>
-      <dgm:spPr/>
-    </dgm:pt>
-    <dgm:pt modelId="{56CABD1B-944E-49F7-866A-C6598132C0E2}" type="pres">
-      <dgm:prSet presAssocID="{8CA78F25-E4A0-4965-A658-0084AB99CA1F}" presName="childText" presStyleLbl="conFgAcc1" presStyleIdx="0" presStyleCnt="6">
-        <dgm:presLayoutVars>
-          <dgm:bulletEnabled val="1"/>
-        </dgm:presLayoutVars>
-      </dgm:prSet>
-      <dgm:spPr/>
-    </dgm:pt>
-    <dgm:pt modelId="{81ACD076-1FCC-4FF6-A274-B3BD90DC9978}" type="pres">
-      <dgm:prSet presAssocID="{1C2299ED-875C-4AAF-9A51-9AFB85C9EB7C}" presName="spaceBetweenRectangles" presStyleCnt="0"/>
-      <dgm:spPr/>
-    </dgm:pt>
-    <dgm:pt modelId="{EAA56398-F73A-4FE2-B746-BD84BFC141F8}" type="pres">
-      <dgm:prSet presAssocID="{17F78D15-90A9-4321-80C0-7F95643E32E1}" presName="parentLin" presStyleCnt="0"/>
-      <dgm:spPr/>
-    </dgm:pt>
-    <dgm:pt modelId="{A5CDB8F0-A3D9-4691-8832-2F348E9FEF4B}" type="pres">
-      <dgm:prSet presAssocID="{17F78D15-90A9-4321-80C0-7F95643E32E1}" presName="parentLeftMargin" presStyleLbl="node1" presStyleIdx="0" presStyleCnt="6"/>
-      <dgm:spPr/>
-      <dgm:t>
-        <a:bodyPr/>
-        <a:lstStyle/>
-        <a:p>
-          <a:endParaRPr lang="en-US"/>
-        </a:p>
-      </dgm:t>
-    </dgm:pt>
-    <dgm:pt modelId="{0ABD91B7-67D8-4835-9472-249FD879718E}" type="pres">
-      <dgm:prSet presAssocID="{17F78D15-90A9-4321-80C0-7F95643E32E1}" presName="parentText" presStyleLbl="node1" presStyleIdx="1" presStyleCnt="6">
-        <dgm:presLayoutVars>
-          <dgm:chMax val="0"/>
-          <dgm:bulletEnabled val="1"/>
-        </dgm:presLayoutVars>
-      </dgm:prSet>
-      <dgm:spPr/>
-      <dgm:t>
-        <a:bodyPr/>
-        <a:lstStyle/>
-        <a:p>
-          <a:endParaRPr lang="en-US"/>
-        </a:p>
-      </dgm:t>
-    </dgm:pt>
-    <dgm:pt modelId="{46C1D4E5-54DD-4F5D-8B65-D8E3491AED12}" type="pres">
-      <dgm:prSet presAssocID="{17F78D15-90A9-4321-80C0-7F95643E32E1}" presName="negativeSpace" presStyleCnt="0"/>
-      <dgm:spPr/>
-    </dgm:pt>
-    <dgm:pt modelId="{8B5298D1-CF53-49BC-9023-0EE6E258E573}" type="pres">
-      <dgm:prSet presAssocID="{17F78D15-90A9-4321-80C0-7F95643E32E1}" presName="childText" presStyleLbl="conFgAcc1" presStyleIdx="1" presStyleCnt="6">
-        <dgm:presLayoutVars>
-          <dgm:bulletEnabled val="1"/>
-        </dgm:presLayoutVars>
-      </dgm:prSet>
-      <dgm:spPr/>
-    </dgm:pt>
-    <dgm:pt modelId="{AB539887-6226-438A-9686-BCE467EC5E8D}" type="pres">
-      <dgm:prSet presAssocID="{2C28AF82-B4B5-4FD7-B94F-BCF13943E541}" presName="spaceBetweenRectangles" presStyleCnt="0"/>
-      <dgm:spPr/>
-    </dgm:pt>
-    <dgm:pt modelId="{D0E10FBA-41A3-4B5B-B01A-D81B69CB9BA2}" type="pres">
-      <dgm:prSet presAssocID="{0100315B-D429-4EAC-8AA1-BEFCB3B6B2D9}" presName="parentLin" presStyleCnt="0"/>
-      <dgm:spPr/>
-    </dgm:pt>
-    <dgm:pt modelId="{4290549B-C467-406D-AC08-B83AFD29D973}" type="pres">
-      <dgm:prSet presAssocID="{0100315B-D429-4EAC-8AA1-BEFCB3B6B2D9}" presName="parentLeftMargin" presStyleLbl="node1" presStyleIdx="1" presStyleCnt="6"/>
-      <dgm:spPr/>
-      <dgm:t>
-        <a:bodyPr/>
-        <a:lstStyle/>
-        <a:p>
-          <a:endParaRPr lang="en-US"/>
-        </a:p>
-      </dgm:t>
-    </dgm:pt>
-    <dgm:pt modelId="{AD646C37-0DDC-40B6-BFF6-68C35C41D431}" type="pres">
-      <dgm:prSet presAssocID="{0100315B-D429-4EAC-8AA1-BEFCB3B6B2D9}" presName="parentText" presStyleLbl="node1" presStyleIdx="2" presStyleCnt="6">
-        <dgm:presLayoutVars>
-          <dgm:chMax val="0"/>
-          <dgm:bulletEnabled val="1"/>
-        </dgm:presLayoutVars>
-      </dgm:prSet>
-      <dgm:spPr/>
-      <dgm:t>
-        <a:bodyPr/>
-        <a:lstStyle/>
-        <a:p>
-          <a:endParaRPr lang="en-US"/>
-        </a:p>
-      </dgm:t>
-    </dgm:pt>
-    <dgm:pt modelId="{BD781924-C0DF-43D6-B614-711C5553AD2F}" type="pres">
-      <dgm:prSet presAssocID="{0100315B-D429-4EAC-8AA1-BEFCB3B6B2D9}" presName="negativeSpace" presStyleCnt="0"/>
-      <dgm:spPr/>
-    </dgm:pt>
-    <dgm:pt modelId="{8011D070-568F-4A84-BD56-7ABA35D47A61}" type="pres">
-      <dgm:prSet presAssocID="{0100315B-D429-4EAC-8AA1-BEFCB3B6B2D9}" presName="childText" presStyleLbl="conFgAcc1" presStyleIdx="2" presStyleCnt="6">
-        <dgm:presLayoutVars>
-          <dgm:bulletEnabled val="1"/>
-        </dgm:presLayoutVars>
-      </dgm:prSet>
-      <dgm:spPr/>
-    </dgm:pt>
-    <dgm:pt modelId="{75BE8DB7-21DB-46A5-9B89-C43D3257A63A}" type="pres">
-      <dgm:prSet presAssocID="{D24FC51D-FCC1-4684-B9BB-807CB7CF9A0A}" presName="spaceBetweenRectangles" presStyleCnt="0"/>
-      <dgm:spPr/>
-    </dgm:pt>
-    <dgm:pt modelId="{22B3EFEA-0ED8-4B23-A002-30559B3EF99F}" type="pres">
-      <dgm:prSet presAssocID="{F14627D2-99F3-4BB9-ACF0-9B3757D4BA23}" presName="parentLin" presStyleCnt="0"/>
-      <dgm:spPr/>
-    </dgm:pt>
-    <dgm:pt modelId="{1599F2CB-C4E6-4818-A1E7-E4DBD180D586}" type="pres">
-      <dgm:prSet presAssocID="{F14627D2-99F3-4BB9-ACF0-9B3757D4BA23}" presName="parentLeftMargin" presStyleLbl="node1" presStyleIdx="2" presStyleCnt="6" custScaleX="119481"/>
-      <dgm:spPr/>
-      <dgm:t>
-        <a:bodyPr/>
-        <a:lstStyle/>
-        <a:p>
-          <a:endParaRPr lang="en-US"/>
-        </a:p>
-      </dgm:t>
-    </dgm:pt>
-    <dgm:pt modelId="{90065A47-6053-496C-B292-B863C5F1C893}" type="pres">
-      <dgm:prSet presAssocID="{F14627D2-99F3-4BB9-ACF0-9B3757D4BA23}" presName="parentText" presStyleLbl="node1" presStyleIdx="3" presStyleCnt="6">
-        <dgm:presLayoutVars>
-          <dgm:chMax val="0"/>
-          <dgm:bulletEnabled val="1"/>
-        </dgm:presLayoutVars>
-      </dgm:prSet>
-      <dgm:spPr/>
-      <dgm:t>
-        <a:bodyPr/>
-        <a:lstStyle/>
-        <a:p>
-          <a:endParaRPr lang="en-US"/>
-        </a:p>
-      </dgm:t>
-    </dgm:pt>
-    <dgm:pt modelId="{92641813-5179-4554-A4AA-CE9C7A39B4EC}" type="pres">
-      <dgm:prSet presAssocID="{F14627D2-99F3-4BB9-ACF0-9B3757D4BA23}" presName="negativeSpace" presStyleCnt="0"/>
-      <dgm:spPr/>
-    </dgm:pt>
-    <dgm:pt modelId="{2CC94E98-C2BC-40BA-BA2C-53E02A202477}" type="pres">
-      <dgm:prSet presAssocID="{F14627D2-99F3-4BB9-ACF0-9B3757D4BA23}" presName="childText" presStyleLbl="conFgAcc1" presStyleIdx="3" presStyleCnt="6">
-        <dgm:presLayoutVars>
-          <dgm:bulletEnabled val="1"/>
-        </dgm:presLayoutVars>
-      </dgm:prSet>
-      <dgm:spPr/>
-    </dgm:pt>
-    <dgm:pt modelId="{030C9054-684D-4B3C-A5A3-8C45E7C47894}" type="pres">
-      <dgm:prSet presAssocID="{BC2FB94A-0519-4109-B86D-1185FC588AD9}" presName="spaceBetweenRectangles" presStyleCnt="0"/>
-      <dgm:spPr/>
-    </dgm:pt>
-    <dgm:pt modelId="{588861EA-FE8F-4D0F-96CC-889C27A7F9A5}" type="pres">
-      <dgm:prSet presAssocID="{BE2D09AC-4CBB-4424-A502-FFF2C66BDC24}" presName="parentLin" presStyleCnt="0"/>
-      <dgm:spPr/>
-    </dgm:pt>
-    <dgm:pt modelId="{757F47A7-B9B2-4985-A0DB-301ED68CBB06}" type="pres">
-      <dgm:prSet presAssocID="{BE2D09AC-4CBB-4424-A502-FFF2C66BDC24}" presName="parentLeftMargin" presStyleLbl="node1" presStyleIdx="3" presStyleCnt="6" custScaleX="119481"/>
-      <dgm:spPr/>
-      <dgm:t>
-        <a:bodyPr/>
-        <a:lstStyle/>
-        <a:p>
-          <a:endParaRPr lang="en-US"/>
-        </a:p>
-      </dgm:t>
-    </dgm:pt>
-    <dgm:pt modelId="{1F9781A0-24EF-4D22-863B-387A9EB35B5D}" type="pres">
-      <dgm:prSet presAssocID="{BE2D09AC-4CBB-4424-A502-FFF2C66BDC24}" presName="parentText" presStyleLbl="node1" presStyleIdx="4" presStyleCnt="6">
-        <dgm:presLayoutVars>
-          <dgm:chMax val="0"/>
-          <dgm:bulletEnabled val="1"/>
-        </dgm:presLayoutVars>
-      </dgm:prSet>
-      <dgm:spPr/>
-      <dgm:t>
-        <a:bodyPr/>
-        <a:lstStyle/>
-        <a:p>
-          <a:endParaRPr lang="en-US"/>
-        </a:p>
-      </dgm:t>
-    </dgm:pt>
-    <dgm:pt modelId="{481254B0-7198-4BFC-A80D-3CB26DB1F0A8}" type="pres">
-      <dgm:prSet presAssocID="{BE2D09AC-4CBB-4424-A502-FFF2C66BDC24}" presName="negativeSpace" presStyleCnt="0"/>
-      <dgm:spPr/>
-    </dgm:pt>
-    <dgm:pt modelId="{10C80C59-D601-4AD4-9AE0-F459A2AD1F9A}" type="pres">
-      <dgm:prSet presAssocID="{BE2D09AC-4CBB-4424-A502-FFF2C66BDC24}" presName="childText" presStyleLbl="conFgAcc1" presStyleIdx="4" presStyleCnt="6">
-        <dgm:presLayoutVars>
-          <dgm:bulletEnabled val="1"/>
-        </dgm:presLayoutVars>
-      </dgm:prSet>
-      <dgm:spPr/>
-    </dgm:pt>
-    <dgm:pt modelId="{B4C4D495-AE16-4121-BE91-32BFC1BEEEB5}" type="pres">
-      <dgm:prSet presAssocID="{D40DD221-2846-496B-8E8B-A849F60C0C47}" presName="spaceBetweenRectangles" presStyleCnt="0"/>
-      <dgm:spPr/>
-    </dgm:pt>
-    <dgm:pt modelId="{2CD3D00A-2FB7-418E-9441-8C7E48C07CC2}" type="pres">
-      <dgm:prSet presAssocID="{700EE0F2-D2BF-46CD-ABAB-85E8CD19E387}" presName="parentLin" presStyleCnt="0"/>
-      <dgm:spPr/>
-    </dgm:pt>
-    <dgm:pt modelId="{AE055BEC-1FF1-49C3-AC9E-0EE2DBDEE993}" type="pres">
-      <dgm:prSet presAssocID="{700EE0F2-D2BF-46CD-ABAB-85E8CD19E387}" presName="parentLeftMargin" presStyleLbl="node1" presStyleIdx="4" presStyleCnt="6" custScaleX="119481"/>
-      <dgm:spPr/>
-      <dgm:t>
-        <a:bodyPr/>
-        <a:lstStyle/>
-        <a:p>
-          <a:endParaRPr lang="en-US"/>
-        </a:p>
-      </dgm:t>
-    </dgm:pt>
-    <dgm:pt modelId="{D321BBAD-41C6-45AB-9362-3E65DEBF3BC5}" type="pres">
-      <dgm:prSet presAssocID="{700EE0F2-D2BF-46CD-ABAB-85E8CD19E387}" presName="parentText" presStyleLbl="node1" presStyleIdx="5" presStyleCnt="6">
-        <dgm:presLayoutVars>
-          <dgm:chMax val="0"/>
-          <dgm:bulletEnabled val="1"/>
-        </dgm:presLayoutVars>
-      </dgm:prSet>
-      <dgm:spPr/>
-      <dgm:t>
-        <a:bodyPr/>
-        <a:lstStyle/>
-        <a:p>
-          <a:endParaRPr lang="en-US"/>
-        </a:p>
-      </dgm:t>
-    </dgm:pt>
-    <dgm:pt modelId="{2A10BBF1-7B96-4E5C-BC0C-EF1FEDDF9610}" type="pres">
-      <dgm:prSet presAssocID="{700EE0F2-D2BF-46CD-ABAB-85E8CD19E387}" presName="negativeSpace" presStyleCnt="0"/>
-      <dgm:spPr/>
-    </dgm:pt>
-    <dgm:pt modelId="{ECAED0D9-0A7B-453D-970D-A96E8C7059E3}" type="pres">
-      <dgm:prSet presAssocID="{700EE0F2-D2BF-46CD-ABAB-85E8CD19E387}" presName="childText" presStyleLbl="conFgAcc1" presStyleIdx="5" presStyleCnt="6">
-        <dgm:presLayoutVars>
-          <dgm:bulletEnabled val="1"/>
-        </dgm:presLayoutVars>
-      </dgm:prSet>
-      <dgm:spPr/>
-    </dgm:pt>
-  </dgm:ptLst>
-  <dgm:cxnLst>
-    <dgm:cxn modelId="{0CA3979B-5F60-4F39-B1F8-37FF98BA710A}" type="presOf" srcId="{0100315B-D429-4EAC-8AA1-BEFCB3B6B2D9}" destId="{AD646C37-0DDC-40B6-BFF6-68C35C41D431}" srcOrd="1" destOrd="0" presId="urn:microsoft.com/office/officeart/2005/8/layout/list1"/>
-    <dgm:cxn modelId="{1BF9344A-9CDC-4EEE-B226-8D9F4E47A0E6}" srcId="{FD345B50-5AD1-478C-8BEE-7B1273750DCB}" destId="{F14627D2-99F3-4BB9-ACF0-9B3757D4BA23}" srcOrd="3" destOrd="0" parTransId="{D0C48550-9AD0-477C-BC8B-C1F7314E24CF}" sibTransId="{BC2FB94A-0519-4109-B86D-1185FC588AD9}"/>
-    <dgm:cxn modelId="{00668819-1062-4358-9E19-D7FA3D8829C7}" type="presOf" srcId="{700EE0F2-D2BF-46CD-ABAB-85E8CD19E387}" destId="{D321BBAD-41C6-45AB-9362-3E65DEBF3BC5}" srcOrd="1" destOrd="0" presId="urn:microsoft.com/office/officeart/2005/8/layout/list1"/>
-    <dgm:cxn modelId="{5B3739E5-13D4-4099-938B-7C5F29A12EC1}" srcId="{FD345B50-5AD1-478C-8BEE-7B1273750DCB}" destId="{17F78D15-90A9-4321-80C0-7F95643E32E1}" srcOrd="1" destOrd="0" parTransId="{2D735C95-75E5-4BBE-97EF-B0901070C931}" sibTransId="{2C28AF82-B4B5-4FD7-B94F-BCF13943E541}"/>
-    <dgm:cxn modelId="{CE57512A-58E2-42DA-B069-996FF30E4A1C}" srcId="{FD345B50-5AD1-478C-8BEE-7B1273750DCB}" destId="{0100315B-D429-4EAC-8AA1-BEFCB3B6B2D9}" srcOrd="2" destOrd="0" parTransId="{DBA45244-1A55-431F-9254-F51FEE3E1101}" sibTransId="{D24FC51D-FCC1-4684-B9BB-807CB7CF9A0A}"/>
-    <dgm:cxn modelId="{3952E35B-D671-42D0-AD9E-B1B8A9FA6682}" type="presOf" srcId="{17F78D15-90A9-4321-80C0-7F95643E32E1}" destId="{0ABD91B7-67D8-4835-9472-249FD879718E}" srcOrd="1" destOrd="0" presId="urn:microsoft.com/office/officeart/2005/8/layout/list1"/>
-    <dgm:cxn modelId="{1BE4B6A6-3051-4DA4-9004-476A08922F47}" type="presOf" srcId="{BE2D09AC-4CBB-4424-A502-FFF2C66BDC24}" destId="{1F9781A0-24EF-4D22-863B-387A9EB35B5D}" srcOrd="1" destOrd="0" presId="urn:microsoft.com/office/officeart/2005/8/layout/list1"/>
-    <dgm:cxn modelId="{E4A59397-E674-412A-8895-5A4E59F0B2C2}" type="presOf" srcId="{700EE0F2-D2BF-46CD-ABAB-85E8CD19E387}" destId="{AE055BEC-1FF1-49C3-AC9E-0EE2DBDEE993}" srcOrd="0" destOrd="0" presId="urn:microsoft.com/office/officeart/2005/8/layout/list1"/>
-    <dgm:cxn modelId="{0AB6244E-E6D1-4603-8608-7786CE568958}" srcId="{FD345B50-5AD1-478C-8BEE-7B1273750DCB}" destId="{700EE0F2-D2BF-46CD-ABAB-85E8CD19E387}" srcOrd="5" destOrd="0" parTransId="{B29AB8E3-4DBF-4361-A563-941D6FF583AA}" sibTransId="{F27186F8-E82E-4AD8-ADC6-D28CDC967827}"/>
-    <dgm:cxn modelId="{0DB0ADA4-0654-4709-A70C-E8C645B3CF70}" type="presOf" srcId="{F14627D2-99F3-4BB9-ACF0-9B3757D4BA23}" destId="{90065A47-6053-496C-B292-B863C5F1C893}" srcOrd="1" destOrd="0" presId="urn:microsoft.com/office/officeart/2005/8/layout/list1"/>
-    <dgm:cxn modelId="{F4A2D41C-7F53-47CD-B3D0-685F66E00791}" type="presOf" srcId="{8CA78F25-E4A0-4965-A658-0084AB99CA1F}" destId="{4F622BEB-62C0-41FB-AA25-3807F8F602A7}" srcOrd="1" destOrd="0" presId="urn:microsoft.com/office/officeart/2005/8/layout/list1"/>
-    <dgm:cxn modelId="{84493C6D-D9C2-4796-A942-81D7A87FDEF1}" type="presOf" srcId="{F14627D2-99F3-4BB9-ACF0-9B3757D4BA23}" destId="{1599F2CB-C4E6-4818-A1E7-E4DBD180D586}" srcOrd="0" destOrd="0" presId="urn:microsoft.com/office/officeart/2005/8/layout/list1"/>
-    <dgm:cxn modelId="{B2E67F94-3BF8-4BAF-94F1-F2730CBDE085}" type="presOf" srcId="{FD345B50-5AD1-478C-8BEE-7B1273750DCB}" destId="{9EFE8DBD-3349-4550-A4EC-39766CB04F86}" srcOrd="0" destOrd="0" presId="urn:microsoft.com/office/officeart/2005/8/layout/list1"/>
-    <dgm:cxn modelId="{EF286308-48AB-46EF-B1DF-DCC2ECE74862}" srcId="{FD345B50-5AD1-478C-8BEE-7B1273750DCB}" destId="{8CA78F25-E4A0-4965-A658-0084AB99CA1F}" srcOrd="0" destOrd="0" parTransId="{2276D278-2A6B-416B-83EB-6F9D11A1587D}" sibTransId="{1C2299ED-875C-4AAF-9A51-9AFB85C9EB7C}"/>
-    <dgm:cxn modelId="{668A54BA-3784-42F1-9F39-8C2FC1623344}" srcId="{FD345B50-5AD1-478C-8BEE-7B1273750DCB}" destId="{BE2D09AC-4CBB-4424-A502-FFF2C66BDC24}" srcOrd="4" destOrd="0" parTransId="{E5366607-D931-467B-8B18-B07F15C0B1C9}" sibTransId="{D40DD221-2846-496B-8E8B-A849F60C0C47}"/>
-    <dgm:cxn modelId="{51D5BAA3-6F45-4159-A29B-7411169D207E}" type="presOf" srcId="{8CA78F25-E4A0-4965-A658-0084AB99CA1F}" destId="{5C1DC1E6-7DCB-43E0-BA21-A8A0AB80CD78}" srcOrd="0" destOrd="0" presId="urn:microsoft.com/office/officeart/2005/8/layout/list1"/>
-    <dgm:cxn modelId="{1B1F194C-4FFE-46E1-9D74-02CAF4921504}" type="presOf" srcId="{BE2D09AC-4CBB-4424-A502-FFF2C66BDC24}" destId="{757F47A7-B9B2-4985-A0DB-301ED68CBB06}" srcOrd="0" destOrd="0" presId="urn:microsoft.com/office/officeart/2005/8/layout/list1"/>
-    <dgm:cxn modelId="{02AF92E4-BADA-41AF-BEA2-4F2658F673FB}" type="presOf" srcId="{0100315B-D429-4EAC-8AA1-BEFCB3B6B2D9}" destId="{4290549B-C467-406D-AC08-B83AFD29D973}" srcOrd="0" destOrd="0" presId="urn:microsoft.com/office/officeart/2005/8/layout/list1"/>
-    <dgm:cxn modelId="{E7C567CB-BB56-48B8-9A15-3ACDE38AFAD4}" type="presOf" srcId="{17F78D15-90A9-4321-80C0-7F95643E32E1}" destId="{A5CDB8F0-A3D9-4691-8832-2F348E9FEF4B}" srcOrd="0" destOrd="0" presId="urn:microsoft.com/office/officeart/2005/8/layout/list1"/>
-    <dgm:cxn modelId="{C69FE8EE-66FC-48D3-A6A8-C1434CF23095}" type="presParOf" srcId="{9EFE8DBD-3349-4550-A4EC-39766CB04F86}" destId="{DF23568B-F979-44DF-84C3-ADBBD77DD4B6}" srcOrd="0" destOrd="0" presId="urn:microsoft.com/office/officeart/2005/8/layout/list1"/>
-    <dgm:cxn modelId="{10643998-E1DA-4564-925A-3AD2F67DBEC5}" type="presParOf" srcId="{DF23568B-F979-44DF-84C3-ADBBD77DD4B6}" destId="{5C1DC1E6-7DCB-43E0-BA21-A8A0AB80CD78}" srcOrd="0" destOrd="0" presId="urn:microsoft.com/office/officeart/2005/8/layout/list1"/>
-    <dgm:cxn modelId="{EBE2F32B-8ECC-4495-A251-14F1E4205103}" type="presParOf" srcId="{DF23568B-F979-44DF-84C3-ADBBD77DD4B6}" destId="{4F622BEB-62C0-41FB-AA25-3807F8F602A7}" srcOrd="1" destOrd="0" presId="urn:microsoft.com/office/officeart/2005/8/layout/list1"/>
-    <dgm:cxn modelId="{D3ADFDEB-893B-49D7-A6D8-1057F9071EBB}" type="presParOf" srcId="{9EFE8DBD-3349-4550-A4EC-39766CB04F86}" destId="{F112E137-4C01-4626-80BD-8612A623F0E4}" srcOrd="1" destOrd="0" presId="urn:microsoft.com/office/officeart/2005/8/layout/list1"/>
-    <dgm:cxn modelId="{CD15EDC0-A04C-475F-A1F9-54B4D2326401}" type="presParOf" srcId="{9EFE8DBD-3349-4550-A4EC-39766CB04F86}" destId="{56CABD1B-944E-49F7-866A-C6598132C0E2}" srcOrd="2" destOrd="0" presId="urn:microsoft.com/office/officeart/2005/8/layout/list1"/>
-    <dgm:cxn modelId="{597026C1-B20D-4B77-AEFD-9A4659956933}" type="presParOf" srcId="{9EFE8DBD-3349-4550-A4EC-39766CB04F86}" destId="{81ACD076-1FCC-4FF6-A274-B3BD90DC9978}" srcOrd="3" destOrd="0" presId="urn:microsoft.com/office/officeart/2005/8/layout/list1"/>
-    <dgm:cxn modelId="{042584E0-9DA7-4574-A321-CA930C4AEA17}" type="presParOf" srcId="{9EFE8DBD-3349-4550-A4EC-39766CB04F86}" destId="{EAA56398-F73A-4FE2-B746-BD84BFC141F8}" srcOrd="4" destOrd="0" presId="urn:microsoft.com/office/officeart/2005/8/layout/list1"/>
-    <dgm:cxn modelId="{5DC087C0-01A6-4F65-B6AA-C04622BF54D9}" type="presParOf" srcId="{EAA56398-F73A-4FE2-B746-BD84BFC141F8}" destId="{A5CDB8F0-A3D9-4691-8832-2F348E9FEF4B}" srcOrd="0" destOrd="0" presId="urn:microsoft.com/office/officeart/2005/8/layout/list1"/>
-    <dgm:cxn modelId="{123C87CE-662C-4544-8EAC-8C58FA82EAF0}" type="presParOf" srcId="{EAA56398-F73A-4FE2-B746-BD84BFC141F8}" destId="{0ABD91B7-67D8-4835-9472-249FD879718E}" srcOrd="1" destOrd="0" presId="urn:microsoft.com/office/officeart/2005/8/layout/list1"/>
-    <dgm:cxn modelId="{CAE7D2CD-D94B-4E2C-ABDD-FDC68F230F9E}" type="presParOf" srcId="{9EFE8DBD-3349-4550-A4EC-39766CB04F86}" destId="{46C1D4E5-54DD-4F5D-8B65-D8E3491AED12}" srcOrd="5" destOrd="0" presId="urn:microsoft.com/office/officeart/2005/8/layout/list1"/>
-    <dgm:cxn modelId="{FF6081B0-1BAF-44EE-A8FF-E966E4B0FCDA}" type="presParOf" srcId="{9EFE8DBD-3349-4550-A4EC-39766CB04F86}" destId="{8B5298D1-CF53-49BC-9023-0EE6E258E573}" srcOrd="6" destOrd="0" presId="urn:microsoft.com/office/officeart/2005/8/layout/list1"/>
-    <dgm:cxn modelId="{6D6ED370-E510-4058-A283-C5232E38B5F4}" type="presParOf" srcId="{9EFE8DBD-3349-4550-A4EC-39766CB04F86}" destId="{AB539887-6226-438A-9686-BCE467EC5E8D}" srcOrd="7" destOrd="0" presId="urn:microsoft.com/office/officeart/2005/8/layout/list1"/>
-    <dgm:cxn modelId="{7A7E0C2E-B7B7-4612-B3B0-492B107C478A}" type="presParOf" srcId="{9EFE8DBD-3349-4550-A4EC-39766CB04F86}" destId="{D0E10FBA-41A3-4B5B-B01A-D81B69CB9BA2}" srcOrd="8" destOrd="0" presId="urn:microsoft.com/office/officeart/2005/8/layout/list1"/>
-    <dgm:cxn modelId="{130DC2D7-5A6B-4C36-9F17-3973BE979BDC}" type="presParOf" srcId="{D0E10FBA-41A3-4B5B-B01A-D81B69CB9BA2}" destId="{4290549B-C467-406D-AC08-B83AFD29D973}" srcOrd="0" destOrd="0" presId="urn:microsoft.com/office/officeart/2005/8/layout/list1"/>
-    <dgm:cxn modelId="{745DBD57-EC79-4AC9-A9D4-0261EEB0ED23}" type="presParOf" srcId="{D0E10FBA-41A3-4B5B-B01A-D81B69CB9BA2}" destId="{AD646C37-0DDC-40B6-BFF6-68C35C41D431}" srcOrd="1" destOrd="0" presId="urn:microsoft.com/office/officeart/2005/8/layout/list1"/>
-    <dgm:cxn modelId="{371BA7B2-B30E-49A2-8E74-2ABEE7ADE1BB}" type="presParOf" srcId="{9EFE8DBD-3349-4550-A4EC-39766CB04F86}" destId="{BD781924-C0DF-43D6-B614-711C5553AD2F}" srcOrd="9" destOrd="0" presId="urn:microsoft.com/office/officeart/2005/8/layout/list1"/>
-    <dgm:cxn modelId="{0EF55432-EB76-401B-89D4-9379FCF83E0D}" type="presParOf" srcId="{9EFE8DBD-3349-4550-A4EC-39766CB04F86}" destId="{8011D070-568F-4A84-BD56-7ABA35D47A61}" srcOrd="10" destOrd="0" presId="urn:microsoft.com/office/officeart/2005/8/layout/list1"/>
-    <dgm:cxn modelId="{14E2AD86-09F0-43EE-B528-3037EADA6ABE}" type="presParOf" srcId="{9EFE8DBD-3349-4550-A4EC-39766CB04F86}" destId="{75BE8DB7-21DB-46A5-9B89-C43D3257A63A}" srcOrd="11" destOrd="0" presId="urn:microsoft.com/office/officeart/2005/8/layout/list1"/>
-    <dgm:cxn modelId="{598F67C0-173B-4FB4-89C0-CC531BD5806B}" type="presParOf" srcId="{9EFE8DBD-3349-4550-A4EC-39766CB04F86}" destId="{22B3EFEA-0ED8-4B23-A002-30559B3EF99F}" srcOrd="12" destOrd="0" presId="urn:microsoft.com/office/officeart/2005/8/layout/list1"/>
-    <dgm:cxn modelId="{4624E1E7-51C8-42F9-8EA2-AD649F511DFF}" type="presParOf" srcId="{22B3EFEA-0ED8-4B23-A002-30559B3EF99F}" destId="{1599F2CB-C4E6-4818-A1E7-E4DBD180D586}" srcOrd="0" destOrd="0" presId="urn:microsoft.com/office/officeart/2005/8/layout/list1"/>
-    <dgm:cxn modelId="{5FD048C2-2360-46E0-B229-5FF3C53FECDD}" type="presParOf" srcId="{22B3EFEA-0ED8-4B23-A002-30559B3EF99F}" destId="{90065A47-6053-496C-B292-B863C5F1C893}" srcOrd="1" destOrd="0" presId="urn:microsoft.com/office/officeart/2005/8/layout/list1"/>
-    <dgm:cxn modelId="{965293CC-2425-46D8-93E2-F2015A133BB0}" type="presParOf" srcId="{9EFE8DBD-3349-4550-A4EC-39766CB04F86}" destId="{92641813-5179-4554-A4AA-CE9C7A39B4EC}" srcOrd="13" destOrd="0" presId="urn:microsoft.com/office/officeart/2005/8/layout/list1"/>
-    <dgm:cxn modelId="{D227D435-2BB8-431D-A0E2-7F08232FDD1A}" type="presParOf" srcId="{9EFE8DBD-3349-4550-A4EC-39766CB04F86}" destId="{2CC94E98-C2BC-40BA-BA2C-53E02A202477}" srcOrd="14" destOrd="0" presId="urn:microsoft.com/office/officeart/2005/8/layout/list1"/>
-    <dgm:cxn modelId="{13BC27B6-676A-4D9D-84C7-871384C4B31A}" type="presParOf" srcId="{9EFE8DBD-3349-4550-A4EC-39766CB04F86}" destId="{030C9054-684D-4B3C-A5A3-8C45E7C47894}" srcOrd="15" destOrd="0" presId="urn:microsoft.com/office/officeart/2005/8/layout/list1"/>
-    <dgm:cxn modelId="{018437EE-892A-4E6B-B6D5-A5C378B1A638}" type="presParOf" srcId="{9EFE8DBD-3349-4550-A4EC-39766CB04F86}" destId="{588861EA-FE8F-4D0F-96CC-889C27A7F9A5}" srcOrd="16" destOrd="0" presId="urn:microsoft.com/office/officeart/2005/8/layout/list1"/>
-    <dgm:cxn modelId="{464ED95F-D56E-48CF-999D-E2A795736156}" type="presParOf" srcId="{588861EA-FE8F-4D0F-96CC-889C27A7F9A5}" destId="{757F47A7-B9B2-4985-A0DB-301ED68CBB06}" srcOrd="0" destOrd="0" presId="urn:microsoft.com/office/officeart/2005/8/layout/list1"/>
-    <dgm:cxn modelId="{9B984194-D77E-4633-B009-12DA9C1DD137}" type="presParOf" srcId="{588861EA-FE8F-4D0F-96CC-889C27A7F9A5}" destId="{1F9781A0-24EF-4D22-863B-387A9EB35B5D}" srcOrd="1" destOrd="0" presId="urn:microsoft.com/office/officeart/2005/8/layout/list1"/>
-    <dgm:cxn modelId="{8EDCAF60-4D69-4A5D-B917-5218D43A8F0F}" type="presParOf" srcId="{9EFE8DBD-3349-4550-A4EC-39766CB04F86}" destId="{481254B0-7198-4BFC-A80D-3CB26DB1F0A8}" srcOrd="17" destOrd="0" presId="urn:microsoft.com/office/officeart/2005/8/layout/list1"/>
-    <dgm:cxn modelId="{CA50795D-2889-4890-B969-0BE2C46350F5}" type="presParOf" srcId="{9EFE8DBD-3349-4550-A4EC-39766CB04F86}" destId="{10C80C59-D601-4AD4-9AE0-F459A2AD1F9A}" srcOrd="18" destOrd="0" presId="urn:microsoft.com/office/officeart/2005/8/layout/list1"/>
-    <dgm:cxn modelId="{B4ADB81E-3266-4097-AC00-CEB558458607}" type="presParOf" srcId="{9EFE8DBD-3349-4550-A4EC-39766CB04F86}" destId="{B4C4D495-AE16-4121-BE91-32BFC1BEEEB5}" srcOrd="19" destOrd="0" presId="urn:microsoft.com/office/officeart/2005/8/layout/list1"/>
-    <dgm:cxn modelId="{0B6A862E-0615-4D34-959B-BD14E1D89D61}" type="presParOf" srcId="{9EFE8DBD-3349-4550-A4EC-39766CB04F86}" destId="{2CD3D00A-2FB7-418E-9441-8C7E48C07CC2}" srcOrd="20" destOrd="0" presId="urn:microsoft.com/office/officeart/2005/8/layout/list1"/>
-    <dgm:cxn modelId="{77653E6D-09BE-428E-A9A9-D7C7B2D7FAE5}" type="presParOf" srcId="{2CD3D00A-2FB7-418E-9441-8C7E48C07CC2}" destId="{AE055BEC-1FF1-49C3-AC9E-0EE2DBDEE993}" srcOrd="0" destOrd="0" presId="urn:microsoft.com/office/officeart/2005/8/layout/list1"/>
-    <dgm:cxn modelId="{2C4D03E8-A7EA-4006-9755-CAB261F6E5B1}" type="presParOf" srcId="{2CD3D00A-2FB7-418E-9441-8C7E48C07CC2}" destId="{D321BBAD-41C6-45AB-9362-3E65DEBF3BC5}" srcOrd="1" destOrd="0" presId="urn:microsoft.com/office/officeart/2005/8/layout/list1"/>
-    <dgm:cxn modelId="{FEFA731B-6424-4FDA-850D-BB1F2FF24BE2}" type="presParOf" srcId="{9EFE8DBD-3349-4550-A4EC-39766CB04F86}" destId="{2A10BBF1-7B96-4E5C-BC0C-EF1FEDDF9610}" srcOrd="21" destOrd="0" presId="urn:microsoft.com/office/officeart/2005/8/layout/list1"/>
-    <dgm:cxn modelId="{54488F8C-B9D9-433F-BB7F-9DFA17D2D923}" type="presParOf" srcId="{9EFE8DBD-3349-4550-A4EC-39766CB04F86}" destId="{ECAED0D9-0A7B-453D-970D-A96E8C7059E3}" srcOrd="22" destOrd="0" presId="urn:microsoft.com/office/officeart/2005/8/layout/list1"/>
-  </dgm:cxnLst>
-  <dgm:bg/>
-  <dgm:whole/>
-  <dgm:extLst>
-    <a:ext uri="http://schemas.microsoft.com/office/drawing/2008/diagram">
-      <dsp:dataModelExt xmlns:dsp="http://schemas.microsoft.com/office/drawing/2008/diagram" xmlns="" relId="rId6" minVer="http://schemas.openxmlformats.org/drawingml/2006/diagram"/>
-    </a:ext>
-  </dgm:extLst>
-</dgm:dataModel>
-</file>
-
-<file path=ppt/diagrams/data2.xml><?xml version="1.0" encoding="utf-8"?>
-<dgm:dataModel xmlns:dgm="http://schemas.openxmlformats.org/drawingml/2006/diagram" xmlns:a="http://schemas.openxmlformats.org/drawingml/2006/main">
-  <dgm:ptLst>
-    <dgm:pt modelId="{FD345B50-5AD1-478C-8BEE-7B1273750DCB}" type="doc">
-      <dgm:prSet loTypeId="urn:microsoft.com/office/officeart/2005/8/layout/list1" loCatId="list" qsTypeId="urn:microsoft.com/office/officeart/2005/8/quickstyle/simple1" qsCatId="simple" csTypeId="urn:microsoft.com/office/officeart/2005/8/colors/accent1_2" csCatId="accent1" phldr="1"/>
-      <dgm:spPr/>
-      <dgm:t>
-        <a:bodyPr/>
-        <a:lstStyle/>
-        <a:p>
-          <a:endParaRPr lang="en-US"/>
-        </a:p>
-      </dgm:t>
-    </dgm:pt>
-    <dgm:pt modelId="{EE8CF9E2-D057-449B-9F77-989BF0A428D5}">
-      <dgm:prSet phldrT="[Text]" custT="1"/>
-      <dgm:spPr/>
-      <dgm:t>
-        <a:bodyPr/>
-        <a:lstStyle/>
-        <a:p>
-          <a:r>
-            <a:rPr lang="en-US" sz="2200" dirty="0" smtClean="0"/>
-            <a:t>Helps in analyzing requirements completely</a:t>
-          </a:r>
-          <a:endParaRPr lang="en-US" sz="2200" dirty="0"/>
-        </a:p>
-      </dgm:t>
-    </dgm:pt>
-    <dgm:pt modelId="{FBD8D5A9-F2B9-40DE-8570-070238AC5CE6}" type="parTrans" cxnId="{ADF3DC53-C732-439B-9C09-9C02D4311673}">
-      <dgm:prSet/>
-      <dgm:spPr/>
-      <dgm:t>
-        <a:bodyPr/>
-        <a:lstStyle/>
-        <a:p>
-          <a:endParaRPr lang="en-US"/>
-        </a:p>
-      </dgm:t>
-    </dgm:pt>
-    <dgm:pt modelId="{6AED833E-5DD9-45E9-B046-2AFCE6E21C09}" type="sibTrans" cxnId="{ADF3DC53-C732-439B-9C09-9C02D4311673}">
-      <dgm:prSet/>
-      <dgm:spPr/>
-      <dgm:t>
-        <a:bodyPr/>
-        <a:lstStyle/>
-        <a:p>
-          <a:endParaRPr lang="en-US"/>
-        </a:p>
-      </dgm:t>
-    </dgm:pt>
-    <dgm:pt modelId="{2937DDEE-C3F9-4543-9F3A-E8259D957669}">
-      <dgm:prSet phldrT="[Text]" custT="1"/>
-      <dgm:spPr>
-        <a:solidFill>
-          <a:schemeClr val="accent2"/>
-        </a:solidFill>
-      </dgm:spPr>
-      <dgm:t>
-        <a:bodyPr/>
-        <a:lstStyle/>
-        <a:p>
-          <a:r>
-            <a:rPr lang="en-US" sz="2200" dirty="0" smtClean="0"/>
-            <a:t>Helps in indentifying and planning for risks</a:t>
-          </a:r>
-          <a:endParaRPr lang="en-US" sz="2200" dirty="0"/>
-        </a:p>
-      </dgm:t>
-    </dgm:pt>
-    <dgm:pt modelId="{978DF0AD-B587-450B-A22A-20F55C6C5537}" type="parTrans" cxnId="{D01C8BBA-AD48-4098-9656-1C4528CAD923}">
-      <dgm:prSet/>
-      <dgm:spPr/>
-      <dgm:t>
-        <a:bodyPr/>
-        <a:lstStyle/>
-        <a:p>
-          <a:endParaRPr lang="en-US"/>
-        </a:p>
-      </dgm:t>
-    </dgm:pt>
-    <dgm:pt modelId="{89B47748-A16A-4DFF-8A4E-8B3A2E0AC180}" type="sibTrans" cxnId="{D01C8BBA-AD48-4098-9656-1C4528CAD923}">
-      <dgm:prSet/>
-      <dgm:spPr/>
-      <dgm:t>
-        <a:bodyPr/>
-        <a:lstStyle/>
-        <a:p>
-          <a:endParaRPr lang="en-US"/>
-        </a:p>
-      </dgm:t>
-    </dgm:pt>
-    <dgm:pt modelId="{751FA402-92B1-4F34-A9A9-21D2D327DD3D}">
-      <dgm:prSet phldrT="[Text]" custT="1"/>
-      <dgm:spPr>
-        <a:solidFill>
-          <a:schemeClr val="accent3"/>
-        </a:solidFill>
-      </dgm:spPr>
-      <dgm:t>
-        <a:bodyPr/>
-        <a:lstStyle/>
-        <a:p>
-          <a:r>
-            <a:rPr lang="en-US" sz="2200" dirty="0" smtClean="0"/>
-            <a:t>Helps in making cost/benefit analysis</a:t>
-          </a:r>
-          <a:endParaRPr lang="en-US" sz="2200" dirty="0"/>
-        </a:p>
-      </dgm:t>
-    </dgm:pt>
-    <dgm:pt modelId="{8360F6A5-75C1-4CCB-8253-B49AA6046ED6}" type="parTrans" cxnId="{107C8E7F-6B30-46F2-9211-DEDB030404C7}">
-      <dgm:prSet/>
-      <dgm:spPr/>
-      <dgm:t>
-        <a:bodyPr/>
-        <a:lstStyle/>
-        <a:p>
-          <a:endParaRPr lang="en-US"/>
-        </a:p>
-      </dgm:t>
-    </dgm:pt>
-    <dgm:pt modelId="{D28EDD0D-3827-43F3-9316-5C550EF82CD6}" type="sibTrans" cxnId="{107C8E7F-6B30-46F2-9211-DEDB030404C7}">
-      <dgm:prSet/>
-      <dgm:spPr/>
-      <dgm:t>
-        <a:bodyPr/>
-        <a:lstStyle/>
-        <a:p>
-          <a:endParaRPr lang="en-US"/>
-        </a:p>
-      </dgm:t>
-    </dgm:pt>
-    <dgm:pt modelId="{A18431F4-AB3C-4FFE-A51F-640AA583A75E}">
-      <dgm:prSet phldrT="[Text]" custT="1"/>
-      <dgm:spPr>
-        <a:solidFill>
-          <a:schemeClr val="accent4"/>
-        </a:solidFill>
-      </dgm:spPr>
-      <dgm:t>
-        <a:bodyPr/>
-        <a:lstStyle/>
-        <a:p>
-          <a:r>
-            <a:rPr lang="en-US" sz="2200" dirty="0" smtClean="0"/>
-            <a:t>Helps in making plan for training developers for implementing the system.</a:t>
-          </a:r>
-          <a:endParaRPr lang="en-US" sz="2200" dirty="0"/>
-        </a:p>
-      </dgm:t>
-    </dgm:pt>
-    <dgm:pt modelId="{AAE997E7-E755-4142-9CC9-7A3DDBB27FFC}" type="parTrans" cxnId="{3D5E3CF4-F29F-40DB-8D18-4BC59E001249}">
-      <dgm:prSet/>
-      <dgm:spPr/>
-      <dgm:t>
-        <a:bodyPr/>
-        <a:lstStyle/>
-        <a:p>
-          <a:endParaRPr lang="en-US"/>
-        </a:p>
-      </dgm:t>
-    </dgm:pt>
-    <dgm:pt modelId="{C67756B9-9363-48E5-A856-EBEA3F1B0500}" type="sibTrans" cxnId="{3D5E3CF4-F29F-40DB-8D18-4BC59E001249}">
-      <dgm:prSet/>
-      <dgm:spPr/>
-      <dgm:t>
-        <a:bodyPr/>
-        <a:lstStyle/>
-        <a:p>
-          <a:endParaRPr lang="en-US"/>
-        </a:p>
-      </dgm:t>
-    </dgm:pt>
-    <dgm:pt modelId="{9EFE8DBD-3349-4550-A4EC-39766CB04F86}" type="pres">
-      <dgm:prSet presAssocID="{FD345B50-5AD1-478C-8BEE-7B1273750DCB}" presName="linear" presStyleCnt="0">
-        <dgm:presLayoutVars>
-          <dgm:dir/>
-          <dgm:animLvl val="lvl"/>
-          <dgm:resizeHandles val="exact"/>
-        </dgm:presLayoutVars>
-      </dgm:prSet>
-      <dgm:spPr/>
-      <dgm:t>
-        <a:bodyPr/>
-        <a:lstStyle/>
-        <a:p>
-          <a:endParaRPr lang="en-US"/>
-        </a:p>
-      </dgm:t>
-    </dgm:pt>
-    <dgm:pt modelId="{E770DFFA-8742-4762-A4C6-461D9EEBF452}" type="pres">
-      <dgm:prSet presAssocID="{EE8CF9E2-D057-449B-9F77-989BF0A428D5}" presName="parentLin" presStyleCnt="0"/>
-      <dgm:spPr/>
-    </dgm:pt>
-    <dgm:pt modelId="{867F3D5F-57B6-4767-A5FE-FB4D9BE1412F}" type="pres">
-      <dgm:prSet presAssocID="{EE8CF9E2-D057-449B-9F77-989BF0A428D5}" presName="parentLeftMargin" presStyleLbl="node1" presStyleIdx="0" presStyleCnt="4" custScaleX="119481"/>
-      <dgm:spPr/>
-      <dgm:t>
-        <a:bodyPr/>
-        <a:lstStyle/>
-        <a:p>
-          <a:endParaRPr lang="en-US"/>
-        </a:p>
-      </dgm:t>
-    </dgm:pt>
-    <dgm:pt modelId="{DE21590D-5DE3-41E9-874A-72B6B165BD0F}" type="pres">
-      <dgm:prSet presAssocID="{EE8CF9E2-D057-449B-9F77-989BF0A428D5}" presName="parentText" presStyleLbl="node1" presStyleIdx="0" presStyleCnt="4" custScaleX="125573">
-        <dgm:presLayoutVars>
-          <dgm:chMax val="0"/>
-          <dgm:bulletEnabled val="1"/>
-        </dgm:presLayoutVars>
-      </dgm:prSet>
-      <dgm:spPr/>
-      <dgm:t>
-        <a:bodyPr/>
-        <a:lstStyle/>
-        <a:p>
-          <a:endParaRPr lang="en-US"/>
-        </a:p>
-      </dgm:t>
-    </dgm:pt>
-    <dgm:pt modelId="{5D10A079-3CEA-4429-AB9B-66A255F21ED3}" type="pres">
-      <dgm:prSet presAssocID="{EE8CF9E2-D057-449B-9F77-989BF0A428D5}" presName="negativeSpace" presStyleCnt="0"/>
-      <dgm:spPr/>
-    </dgm:pt>
-    <dgm:pt modelId="{00169986-F2F3-4B85-8ED4-5DAA51E975C1}" type="pres">
-      <dgm:prSet presAssocID="{EE8CF9E2-D057-449B-9F77-989BF0A428D5}" presName="childText" presStyleLbl="conFgAcc1" presStyleIdx="0" presStyleCnt="4">
-        <dgm:presLayoutVars>
-          <dgm:bulletEnabled val="1"/>
-        </dgm:presLayoutVars>
-      </dgm:prSet>
-      <dgm:spPr/>
-    </dgm:pt>
-    <dgm:pt modelId="{587EF223-F6DC-4691-AFC8-9D18FB663BB5}" type="pres">
-      <dgm:prSet presAssocID="{6AED833E-5DD9-45E9-B046-2AFCE6E21C09}" presName="spaceBetweenRectangles" presStyleCnt="0"/>
-      <dgm:spPr/>
-    </dgm:pt>
-    <dgm:pt modelId="{CE8F38E6-3CE4-4C9A-871B-93560FB7BFEB}" type="pres">
-      <dgm:prSet presAssocID="{2937DDEE-C3F9-4543-9F3A-E8259D957669}" presName="parentLin" presStyleCnt="0"/>
-      <dgm:spPr/>
-    </dgm:pt>
-    <dgm:pt modelId="{E71A77D1-0C64-45EC-A638-B21F18F784D2}" type="pres">
-      <dgm:prSet presAssocID="{2937DDEE-C3F9-4543-9F3A-E8259D957669}" presName="parentLeftMargin" presStyleLbl="node1" presStyleIdx="0" presStyleCnt="4"/>
-      <dgm:spPr/>
-      <dgm:t>
-        <a:bodyPr/>
-        <a:lstStyle/>
-        <a:p>
-          <a:endParaRPr lang="en-US"/>
-        </a:p>
-      </dgm:t>
-    </dgm:pt>
-    <dgm:pt modelId="{C264362E-209D-4D40-9D36-3FDCF2274E08}" type="pres">
-      <dgm:prSet presAssocID="{2937DDEE-C3F9-4543-9F3A-E8259D957669}" presName="parentText" presStyleLbl="node1" presStyleIdx="1" presStyleCnt="4" custScaleX="125573">
-        <dgm:presLayoutVars>
-          <dgm:chMax val="0"/>
-          <dgm:bulletEnabled val="1"/>
-        </dgm:presLayoutVars>
-      </dgm:prSet>
-      <dgm:spPr/>
-      <dgm:t>
-        <a:bodyPr/>
-        <a:lstStyle/>
-        <a:p>
-          <a:endParaRPr lang="en-US"/>
-        </a:p>
-      </dgm:t>
-    </dgm:pt>
-    <dgm:pt modelId="{6CE0A26B-7211-4925-9375-4897FB1E0F56}" type="pres">
-      <dgm:prSet presAssocID="{2937DDEE-C3F9-4543-9F3A-E8259D957669}" presName="negativeSpace" presStyleCnt="0"/>
-      <dgm:spPr/>
-    </dgm:pt>
-    <dgm:pt modelId="{0ED62FB5-CD8C-4E35-9A42-1C6E2E6D9675}" type="pres">
-      <dgm:prSet presAssocID="{2937DDEE-C3F9-4543-9F3A-E8259D957669}" presName="childText" presStyleLbl="conFgAcc1" presStyleIdx="1" presStyleCnt="4">
-        <dgm:presLayoutVars>
-          <dgm:bulletEnabled val="1"/>
-        </dgm:presLayoutVars>
-      </dgm:prSet>
-      <dgm:spPr/>
-    </dgm:pt>
-    <dgm:pt modelId="{253570E9-9F37-4E7B-8AFD-41C6C8C939E2}" type="pres">
-      <dgm:prSet presAssocID="{89B47748-A16A-4DFF-8A4E-8B3A2E0AC180}" presName="spaceBetweenRectangles" presStyleCnt="0"/>
-      <dgm:spPr/>
-    </dgm:pt>
-    <dgm:pt modelId="{B8898AE1-27C2-4A59-8D6B-60BCA6D3B817}" type="pres">
-      <dgm:prSet presAssocID="{751FA402-92B1-4F34-A9A9-21D2D327DD3D}" presName="parentLin" presStyleCnt="0"/>
-      <dgm:spPr/>
-    </dgm:pt>
-    <dgm:pt modelId="{64CA6F2C-D3F3-4B3E-B7DB-188235DAC2AC}" type="pres">
-      <dgm:prSet presAssocID="{751FA402-92B1-4F34-A9A9-21D2D327DD3D}" presName="parentLeftMargin" presStyleLbl="node1" presStyleIdx="1" presStyleCnt="4"/>
-      <dgm:spPr/>
-      <dgm:t>
-        <a:bodyPr/>
-        <a:lstStyle/>
-        <a:p>
-          <a:endParaRPr lang="en-US"/>
-        </a:p>
-      </dgm:t>
-    </dgm:pt>
-    <dgm:pt modelId="{06AF805B-F6F3-4E8C-87A7-7C5E13722586}" type="pres">
-      <dgm:prSet presAssocID="{751FA402-92B1-4F34-A9A9-21D2D327DD3D}" presName="parentText" presStyleLbl="node1" presStyleIdx="2" presStyleCnt="4" custScaleX="125573">
-        <dgm:presLayoutVars>
-          <dgm:chMax val="0"/>
-          <dgm:bulletEnabled val="1"/>
-        </dgm:presLayoutVars>
-      </dgm:prSet>
-      <dgm:spPr/>
-      <dgm:t>
-        <a:bodyPr/>
-        <a:lstStyle/>
-        <a:p>
-          <a:endParaRPr lang="en-US"/>
-        </a:p>
-      </dgm:t>
-    </dgm:pt>
-    <dgm:pt modelId="{19D48958-94FF-48AC-B7F5-539EE35ABDB5}" type="pres">
-      <dgm:prSet presAssocID="{751FA402-92B1-4F34-A9A9-21D2D327DD3D}" presName="negativeSpace" presStyleCnt="0"/>
-      <dgm:spPr/>
-    </dgm:pt>
-    <dgm:pt modelId="{3EB6538B-407D-401A-B5D9-4166DB5DE084}" type="pres">
-      <dgm:prSet presAssocID="{751FA402-92B1-4F34-A9A9-21D2D327DD3D}" presName="childText" presStyleLbl="conFgAcc1" presStyleIdx="2" presStyleCnt="4">
-        <dgm:presLayoutVars>
-          <dgm:bulletEnabled val="1"/>
-        </dgm:presLayoutVars>
-      </dgm:prSet>
-      <dgm:spPr/>
-    </dgm:pt>
-    <dgm:pt modelId="{6248AB87-84DD-410D-A491-32DBA78CB015}" type="pres">
-      <dgm:prSet presAssocID="{D28EDD0D-3827-43F3-9316-5C550EF82CD6}" presName="spaceBetweenRectangles" presStyleCnt="0"/>
-      <dgm:spPr/>
-    </dgm:pt>
-    <dgm:pt modelId="{CE7F436F-93F5-410F-B734-B200F60627A9}" type="pres">
-      <dgm:prSet presAssocID="{A18431F4-AB3C-4FFE-A51F-640AA583A75E}" presName="parentLin" presStyleCnt="0"/>
-      <dgm:spPr/>
-    </dgm:pt>
-    <dgm:pt modelId="{EEF9B4A1-0A47-4614-A3E7-8E12595AAAD2}" type="pres">
-      <dgm:prSet presAssocID="{A18431F4-AB3C-4FFE-A51F-640AA583A75E}" presName="parentLeftMargin" presStyleLbl="node1" presStyleIdx="2" presStyleCnt="4"/>
-      <dgm:spPr/>
-      <dgm:t>
-        <a:bodyPr/>
-        <a:lstStyle/>
-        <a:p>
-          <a:endParaRPr lang="en-US"/>
-        </a:p>
-      </dgm:t>
-    </dgm:pt>
-    <dgm:pt modelId="{5FAA833E-6D98-490D-A6E4-DC5E02D539A9}" type="pres">
-      <dgm:prSet presAssocID="{A18431F4-AB3C-4FFE-A51F-640AA583A75E}" presName="parentText" presStyleLbl="node1" presStyleIdx="3" presStyleCnt="4" custScaleX="125573">
-        <dgm:presLayoutVars>
-          <dgm:chMax val="0"/>
-          <dgm:bulletEnabled val="1"/>
-        </dgm:presLayoutVars>
-      </dgm:prSet>
-      <dgm:spPr/>
-      <dgm:t>
-        <a:bodyPr/>
-        <a:lstStyle/>
-        <a:p>
-          <a:endParaRPr lang="en-US"/>
-        </a:p>
-      </dgm:t>
-    </dgm:pt>
-    <dgm:pt modelId="{74085ECF-BEB8-4148-8092-8544F5301924}" type="pres">
-      <dgm:prSet presAssocID="{A18431F4-AB3C-4FFE-A51F-640AA583A75E}" presName="negativeSpace" presStyleCnt="0"/>
-      <dgm:spPr/>
-    </dgm:pt>
-    <dgm:pt modelId="{961EFD2A-04EA-415C-8C6D-9CC07418E6C7}" type="pres">
-      <dgm:prSet presAssocID="{A18431F4-AB3C-4FFE-A51F-640AA583A75E}" presName="childText" presStyleLbl="conFgAcc1" presStyleIdx="3" presStyleCnt="4">
-        <dgm:presLayoutVars>
-          <dgm:bulletEnabled val="1"/>
-        </dgm:presLayoutVars>
-      </dgm:prSet>
-      <dgm:spPr/>
-    </dgm:pt>
-  </dgm:ptLst>
-  <dgm:cxnLst>
-    <dgm:cxn modelId="{A32E1DD6-6EB8-4375-98D1-9F1DF23C2C6B}" type="presOf" srcId="{EE8CF9E2-D057-449B-9F77-989BF0A428D5}" destId="{DE21590D-5DE3-41E9-874A-72B6B165BD0F}" srcOrd="1" destOrd="0" presId="urn:microsoft.com/office/officeart/2005/8/layout/list1"/>
-    <dgm:cxn modelId="{D700E2AE-0110-40D2-9911-62EB76F12524}" type="presOf" srcId="{FD345B50-5AD1-478C-8BEE-7B1273750DCB}" destId="{9EFE8DBD-3349-4550-A4EC-39766CB04F86}" srcOrd="0" destOrd="0" presId="urn:microsoft.com/office/officeart/2005/8/layout/list1"/>
-    <dgm:cxn modelId="{107C8E7F-6B30-46F2-9211-DEDB030404C7}" srcId="{FD345B50-5AD1-478C-8BEE-7B1273750DCB}" destId="{751FA402-92B1-4F34-A9A9-21D2D327DD3D}" srcOrd="2" destOrd="0" parTransId="{8360F6A5-75C1-4CCB-8253-B49AA6046ED6}" sibTransId="{D28EDD0D-3827-43F3-9316-5C550EF82CD6}"/>
-    <dgm:cxn modelId="{81B554D5-14AF-4C6F-A736-14E0E3447238}" type="presOf" srcId="{A18431F4-AB3C-4FFE-A51F-640AA583A75E}" destId="{5FAA833E-6D98-490D-A6E4-DC5E02D539A9}" srcOrd="1" destOrd="0" presId="urn:microsoft.com/office/officeart/2005/8/layout/list1"/>
-    <dgm:cxn modelId="{EC14072B-B5A8-4DF5-8055-4614353FBBFA}" type="presOf" srcId="{751FA402-92B1-4F34-A9A9-21D2D327DD3D}" destId="{64CA6F2C-D3F3-4B3E-B7DB-188235DAC2AC}" srcOrd="0" destOrd="0" presId="urn:microsoft.com/office/officeart/2005/8/layout/list1"/>
-    <dgm:cxn modelId="{C2735C53-482E-4184-A99A-E5D142B195DB}" type="presOf" srcId="{2937DDEE-C3F9-4543-9F3A-E8259D957669}" destId="{C264362E-209D-4D40-9D36-3FDCF2274E08}" srcOrd="1" destOrd="0" presId="urn:microsoft.com/office/officeart/2005/8/layout/list1"/>
-    <dgm:cxn modelId="{4863E6F6-4C1F-4819-B0D8-47891457E469}" type="presOf" srcId="{751FA402-92B1-4F34-A9A9-21D2D327DD3D}" destId="{06AF805B-F6F3-4E8C-87A7-7C5E13722586}" srcOrd="1" destOrd="0" presId="urn:microsoft.com/office/officeart/2005/8/layout/list1"/>
-    <dgm:cxn modelId="{3D5E3CF4-F29F-40DB-8D18-4BC59E001249}" srcId="{FD345B50-5AD1-478C-8BEE-7B1273750DCB}" destId="{A18431F4-AB3C-4FFE-A51F-640AA583A75E}" srcOrd="3" destOrd="0" parTransId="{AAE997E7-E755-4142-9CC9-7A3DDBB27FFC}" sibTransId="{C67756B9-9363-48E5-A856-EBEA3F1B0500}"/>
-    <dgm:cxn modelId="{712A1435-D920-4237-8870-835A52895986}" type="presOf" srcId="{2937DDEE-C3F9-4543-9F3A-E8259D957669}" destId="{E71A77D1-0C64-45EC-A638-B21F18F784D2}" srcOrd="0" destOrd="0" presId="urn:microsoft.com/office/officeart/2005/8/layout/list1"/>
-    <dgm:cxn modelId="{324A4E70-B8AE-49B2-B149-5531720289B8}" type="presOf" srcId="{A18431F4-AB3C-4FFE-A51F-640AA583A75E}" destId="{EEF9B4A1-0A47-4614-A3E7-8E12595AAAD2}" srcOrd="0" destOrd="0" presId="urn:microsoft.com/office/officeart/2005/8/layout/list1"/>
-    <dgm:cxn modelId="{ADF3DC53-C732-439B-9C09-9C02D4311673}" srcId="{FD345B50-5AD1-478C-8BEE-7B1273750DCB}" destId="{EE8CF9E2-D057-449B-9F77-989BF0A428D5}" srcOrd="0" destOrd="0" parTransId="{FBD8D5A9-F2B9-40DE-8570-070238AC5CE6}" sibTransId="{6AED833E-5DD9-45E9-B046-2AFCE6E21C09}"/>
-    <dgm:cxn modelId="{D01C8BBA-AD48-4098-9656-1C4528CAD923}" srcId="{FD345B50-5AD1-478C-8BEE-7B1273750DCB}" destId="{2937DDEE-C3F9-4543-9F3A-E8259D957669}" srcOrd="1" destOrd="0" parTransId="{978DF0AD-B587-450B-A22A-20F55C6C5537}" sibTransId="{89B47748-A16A-4DFF-8A4E-8B3A2E0AC180}"/>
-    <dgm:cxn modelId="{37000585-4EE7-4257-ACC9-9866F3A30075}" type="presOf" srcId="{EE8CF9E2-D057-449B-9F77-989BF0A428D5}" destId="{867F3D5F-57B6-4767-A5FE-FB4D9BE1412F}" srcOrd="0" destOrd="0" presId="urn:microsoft.com/office/officeart/2005/8/layout/list1"/>
-    <dgm:cxn modelId="{17266A12-82A0-49AE-99BD-CB575DA22B05}" type="presParOf" srcId="{9EFE8DBD-3349-4550-A4EC-39766CB04F86}" destId="{E770DFFA-8742-4762-A4C6-461D9EEBF452}" srcOrd="0" destOrd="0" presId="urn:microsoft.com/office/officeart/2005/8/layout/list1"/>
-    <dgm:cxn modelId="{9484CDFE-4363-4544-80FA-2D2A90E8770B}" type="presParOf" srcId="{E770DFFA-8742-4762-A4C6-461D9EEBF452}" destId="{867F3D5F-57B6-4767-A5FE-FB4D9BE1412F}" srcOrd="0" destOrd="0" presId="urn:microsoft.com/office/officeart/2005/8/layout/list1"/>
-    <dgm:cxn modelId="{9CB9995D-D53E-4CDE-AF8D-18F033C1892E}" type="presParOf" srcId="{E770DFFA-8742-4762-A4C6-461D9EEBF452}" destId="{DE21590D-5DE3-41E9-874A-72B6B165BD0F}" srcOrd="1" destOrd="0" presId="urn:microsoft.com/office/officeart/2005/8/layout/list1"/>
-    <dgm:cxn modelId="{7375E139-56D0-416A-8564-8E0DB5EF5FD0}" type="presParOf" srcId="{9EFE8DBD-3349-4550-A4EC-39766CB04F86}" destId="{5D10A079-3CEA-4429-AB9B-66A255F21ED3}" srcOrd="1" destOrd="0" presId="urn:microsoft.com/office/officeart/2005/8/layout/list1"/>
-    <dgm:cxn modelId="{A4B6CD19-8A14-44A0-A5B7-4B80B61D7093}" type="presParOf" srcId="{9EFE8DBD-3349-4550-A4EC-39766CB04F86}" destId="{00169986-F2F3-4B85-8ED4-5DAA51E975C1}" srcOrd="2" destOrd="0" presId="urn:microsoft.com/office/officeart/2005/8/layout/list1"/>
-    <dgm:cxn modelId="{EC63F8C3-07ED-4FA0-9833-36846C2E7F3B}" type="presParOf" srcId="{9EFE8DBD-3349-4550-A4EC-39766CB04F86}" destId="{587EF223-F6DC-4691-AFC8-9D18FB663BB5}" srcOrd="3" destOrd="0" presId="urn:microsoft.com/office/officeart/2005/8/layout/list1"/>
-    <dgm:cxn modelId="{D04444FD-3B58-473D-945C-6F9A6A8E25BF}" type="presParOf" srcId="{9EFE8DBD-3349-4550-A4EC-39766CB04F86}" destId="{CE8F38E6-3CE4-4C9A-871B-93560FB7BFEB}" srcOrd="4" destOrd="0" presId="urn:microsoft.com/office/officeart/2005/8/layout/list1"/>
-    <dgm:cxn modelId="{F048367C-E991-40E2-B3B6-4C4F8B54274A}" type="presParOf" srcId="{CE8F38E6-3CE4-4C9A-871B-93560FB7BFEB}" destId="{E71A77D1-0C64-45EC-A638-B21F18F784D2}" srcOrd="0" destOrd="0" presId="urn:microsoft.com/office/officeart/2005/8/layout/list1"/>
-    <dgm:cxn modelId="{4C68C0D5-29BE-4CD2-9B43-5FDA892ED290}" type="presParOf" srcId="{CE8F38E6-3CE4-4C9A-871B-93560FB7BFEB}" destId="{C264362E-209D-4D40-9D36-3FDCF2274E08}" srcOrd="1" destOrd="0" presId="urn:microsoft.com/office/officeart/2005/8/layout/list1"/>
-    <dgm:cxn modelId="{1683B142-F208-431D-8B0F-5CDCB6D6B824}" type="presParOf" srcId="{9EFE8DBD-3349-4550-A4EC-39766CB04F86}" destId="{6CE0A26B-7211-4925-9375-4897FB1E0F56}" srcOrd="5" destOrd="0" presId="urn:microsoft.com/office/officeart/2005/8/layout/list1"/>
-    <dgm:cxn modelId="{8676EF92-95DF-4551-885A-4E544434ABE0}" type="presParOf" srcId="{9EFE8DBD-3349-4550-A4EC-39766CB04F86}" destId="{0ED62FB5-CD8C-4E35-9A42-1C6E2E6D9675}" srcOrd="6" destOrd="0" presId="urn:microsoft.com/office/officeart/2005/8/layout/list1"/>
-    <dgm:cxn modelId="{7734851F-94ED-4240-9032-4B96C6DCC34C}" type="presParOf" srcId="{9EFE8DBD-3349-4550-A4EC-39766CB04F86}" destId="{253570E9-9F37-4E7B-8AFD-41C6C8C939E2}" srcOrd="7" destOrd="0" presId="urn:microsoft.com/office/officeart/2005/8/layout/list1"/>
-    <dgm:cxn modelId="{8230B7D1-36AE-46B0-8877-A56080773FA6}" type="presParOf" srcId="{9EFE8DBD-3349-4550-A4EC-39766CB04F86}" destId="{B8898AE1-27C2-4A59-8D6B-60BCA6D3B817}" srcOrd="8" destOrd="0" presId="urn:microsoft.com/office/officeart/2005/8/layout/list1"/>
-    <dgm:cxn modelId="{1219789C-F9AC-4AB9-AB6E-18356800541C}" type="presParOf" srcId="{B8898AE1-27C2-4A59-8D6B-60BCA6D3B817}" destId="{64CA6F2C-D3F3-4B3E-B7DB-188235DAC2AC}" srcOrd="0" destOrd="0" presId="urn:microsoft.com/office/officeart/2005/8/layout/list1"/>
-    <dgm:cxn modelId="{018839BB-CB37-4362-8A97-295F33D3CD38}" type="presParOf" srcId="{B8898AE1-27C2-4A59-8D6B-60BCA6D3B817}" destId="{06AF805B-F6F3-4E8C-87A7-7C5E13722586}" srcOrd="1" destOrd="0" presId="urn:microsoft.com/office/officeart/2005/8/layout/list1"/>
-    <dgm:cxn modelId="{A3FB45B0-F18A-4CE8-AB54-7A3370CFA80B}" type="presParOf" srcId="{9EFE8DBD-3349-4550-A4EC-39766CB04F86}" destId="{19D48958-94FF-48AC-B7F5-539EE35ABDB5}" srcOrd="9" destOrd="0" presId="urn:microsoft.com/office/officeart/2005/8/layout/list1"/>
-    <dgm:cxn modelId="{978955C2-855A-450E-B75A-FE85C7931911}" type="presParOf" srcId="{9EFE8DBD-3349-4550-A4EC-39766CB04F86}" destId="{3EB6538B-407D-401A-B5D9-4166DB5DE084}" srcOrd="10" destOrd="0" presId="urn:microsoft.com/office/officeart/2005/8/layout/list1"/>
-    <dgm:cxn modelId="{65F689BC-A68E-44C9-AA72-85173722A446}" type="presParOf" srcId="{9EFE8DBD-3349-4550-A4EC-39766CB04F86}" destId="{6248AB87-84DD-410D-A491-32DBA78CB015}" srcOrd="11" destOrd="0" presId="urn:microsoft.com/office/officeart/2005/8/layout/list1"/>
-    <dgm:cxn modelId="{D51F6289-966F-4238-9169-3CF5A6AF7A12}" type="presParOf" srcId="{9EFE8DBD-3349-4550-A4EC-39766CB04F86}" destId="{CE7F436F-93F5-410F-B734-B200F60627A9}" srcOrd="12" destOrd="0" presId="urn:microsoft.com/office/officeart/2005/8/layout/list1"/>
-    <dgm:cxn modelId="{0A7FA6BA-5C71-477F-A847-2850FB0B4DB9}" type="presParOf" srcId="{CE7F436F-93F5-410F-B734-B200F60627A9}" destId="{EEF9B4A1-0A47-4614-A3E7-8E12595AAAD2}" srcOrd="0" destOrd="0" presId="urn:microsoft.com/office/officeart/2005/8/layout/list1"/>
-    <dgm:cxn modelId="{506CF3BC-57CB-423D-8B3A-05CEA84A1DA7}" type="presParOf" srcId="{CE7F436F-93F5-410F-B734-B200F60627A9}" destId="{5FAA833E-6D98-490D-A6E4-DC5E02D539A9}" srcOrd="1" destOrd="0" presId="urn:microsoft.com/office/officeart/2005/8/layout/list1"/>
-    <dgm:cxn modelId="{3C1BB48D-45F8-4C5E-A8F4-B71F221E3AFD}" type="presParOf" srcId="{9EFE8DBD-3349-4550-A4EC-39766CB04F86}" destId="{74085ECF-BEB8-4148-8092-8544F5301924}" srcOrd="13" destOrd="0" presId="urn:microsoft.com/office/officeart/2005/8/layout/list1"/>
-    <dgm:cxn modelId="{9C78B10F-4F29-4D3E-BA64-C7531F5766D7}" type="presParOf" srcId="{9EFE8DBD-3349-4550-A4EC-39766CB04F86}" destId="{961EFD2A-04EA-415C-8C6D-9CC07418E6C7}" srcOrd="14" destOrd="0" presId="urn:microsoft.com/office/officeart/2005/8/layout/list1"/>
-  </dgm:cxnLst>
-  <dgm:bg/>
-  <dgm:whole/>
-  <dgm:extLst>
-    <a:ext uri="http://schemas.microsoft.com/office/drawing/2008/diagram">
-      <dsp:dataModelExt xmlns:dsp="http://schemas.microsoft.com/office/drawing/2008/diagram" xmlns="" relId="rId6" minVer="http://schemas.openxmlformats.org/drawingml/2006/diagram"/>
-    </a:ext>
-  </dgm:extLst>
-</dgm:dataModel>
-</file>
-
-<file path=ppt/diagrams/drawing1.xml><?xml version="1.0" encoding="utf-8"?>
-<dsp:drawing xmlns:dgm="http://schemas.openxmlformats.org/drawingml/2006/diagram" xmlns:a="http://schemas.openxmlformats.org/drawingml/2006/main" xmlns:dsp="http://schemas.microsoft.com/office/drawing/2008/diagram">
-  <dsp:spTree>
-    <dsp:nvGrpSpPr>
-      <dsp:cNvPr id="0" name=""/>
-      <dsp:cNvGrpSpPr/>
-    </dsp:nvGrpSpPr>
-    <dsp:grpSpPr/>
-  </dsp:spTree>
-</dsp:drawing>
-</file>
-
-<file path=ppt/diagrams/drawing2.xml><?xml version="1.0" encoding="utf-8"?>
-<dsp:drawing xmlns:dgm="http://schemas.openxmlformats.org/drawingml/2006/diagram" xmlns:a="http://schemas.openxmlformats.org/drawingml/2006/main" xmlns:dsp="http://schemas.microsoft.com/office/drawing/2008/diagram">
-  <dsp:spTree>
-    <dsp:nvGrpSpPr>
-      <dsp:cNvPr id="0" name=""/>
-      <dsp:cNvGrpSpPr/>
-    </dsp:nvGrpSpPr>
-    <dsp:grpSpPr/>
-  </dsp:spTree>
-</dsp:drawing>
-</file>
-
-<file path=ppt/diagrams/layout1.xml><?xml version="1.0" encoding="utf-8"?>
-<dgm:layoutDef xmlns:dgm="http://schemas.openxmlformats.org/drawingml/2006/diagram" xmlns:a="http://schemas.openxmlformats.org/drawingml/2006/main" uniqueId="urn:microsoft.com/office/officeart/2005/8/layout/list1">
-  <dgm:title val=""/>
-  <dgm:desc val=""/>
-  <dgm:catLst>
-    <dgm:cat type="list" pri="4000"/>
-  </dgm:catLst>
-  <dgm:sampData>
-    <dgm:dataModel>
-      <dgm:ptLst>
-        <dgm:pt modelId="0" type="doc"/>
-        <dgm:pt modelId="1">
-          <dgm:prSet phldr="1"/>
-        </dgm:pt>
-        <dgm:pt modelId="2">
-          <dgm:prSet phldr="1"/>
-        </dgm:pt>
-        <dgm:pt modelId="3">
-          <dgm:prSet phldr="1"/>
-        </dgm:pt>
-      </dgm:ptLst>
-      <dgm:cxnLst>
-        <dgm:cxn modelId="4" srcId="0" destId="1" srcOrd="0" destOrd="0"/>
-        <dgm:cxn modelId="5" srcId="0" destId="2" srcOrd="1" destOrd="0"/>
-        <dgm:cxn modelId="6" srcId="0" destId="3" srcOrd="2" destOrd="0"/>
-      </dgm:cxnLst>
-      <dgm:bg/>
-      <dgm:whole/>
-    </dgm:dataModel>
-  </dgm:sampData>
-  <dgm:styleData>
-    <dgm:dataModel>
-      <dgm:ptLst>
-        <dgm:pt modelId="0" type="doc"/>
-        <dgm:pt modelId="1"/>
-        <dgm:pt modelId="2"/>
-      </dgm:ptLst>
-      <dgm:cxnLst>
-        <dgm:cxn modelId="4" srcId="0" destId="1" srcOrd="0" destOrd="0"/>
-        <dgm:cxn modelId="5" srcId="0" destId="2" srcOrd="1" destOrd="0"/>
-      </dgm:cxnLst>
-      <dgm:bg/>
-      <dgm:whole/>
-    </dgm:dataModel>
-  </dgm:styleData>
-  <dgm:clrData>
-    <dgm:dataModel>
-      <dgm:ptLst>
-        <dgm:pt modelId="0" type="doc"/>
-        <dgm:pt modelId="1"/>
-        <dgm:pt modelId="2"/>
-        <dgm:pt modelId="3"/>
-        <dgm:pt modelId="4"/>
-      </dgm:ptLst>
-      <dgm:cxnLst>
-        <dgm:cxn modelId="5" srcId="0" destId="1" srcOrd="0" destOrd="0"/>
-        <dgm:cxn modelId="6" srcId="0" destId="2" srcOrd="1" destOrd="0"/>
-        <dgm:cxn modelId="7" srcId="0" destId="3" srcOrd="2" destOrd="0"/>
-        <dgm:cxn modelId="8" srcId="0" destId="4" srcOrd="3" destOrd="0"/>
-      </dgm:cxnLst>
-      <dgm:bg/>
-      <dgm:whole/>
-    </dgm:dataModel>
-  </dgm:clrData>
-  <dgm:layoutNode name="linear">
-    <dgm:varLst>
-      <dgm:dir/>
-      <dgm:animLvl val="lvl"/>
-      <dgm:resizeHandles val="exact"/>
-    </dgm:varLst>
-    <dgm:choose name="Name0">
-      <dgm:if name="Name1" func="var" arg="dir" op="equ" val="norm">
-        <dgm:alg type="lin">
-          <dgm:param type="linDir" val="fromT"/>
-          <dgm:param type="vertAlign" val="mid"/>
-          <dgm:param type="horzAlign" val="l"/>
-          <dgm:param type="nodeHorzAlign" val="l"/>
-        </dgm:alg>
-      </dgm:if>
-      <dgm:else name="Name2">
-        <dgm:alg type="lin">
-          <dgm:param type="linDir" val="fromT"/>
-          <dgm:param type="vertAlign" val="mid"/>
-          <dgm:param type="horzAlign" val="r"/>
-          <dgm:param type="nodeHorzAlign" val="r"/>
-        </dgm:alg>
-      </dgm:else>
-    </dgm:choose>
-    <dgm:shape xmlns:r="http://schemas.openxmlformats.org/officeDocument/2006/relationships" r:blip="">
-      <dgm:adjLst/>
-    </dgm:shape>
-    <dgm:presOf/>
-    <dgm:constrLst>
-      <dgm:constr type="w" for="ch" forName="parentLin" refType="w"/>
-      <dgm:constr type="h" for="ch" forName="parentLin" val="INF"/>
-      <dgm:constr type="w" for="des" forName="parentLeftMargin" refType="w" fact="0.05"/>
-      <dgm:constr type="w" for="des" forName="parentText" refType="w" fact="0.7"/>
-      <dgm:constr type="h" for="des" forName="parentText" refType="primFontSz" refFor="des" refForName="parentText" fact="0.82"/>
-      <dgm:constr type="h" for="ch" forName="negativeSpace" refType="primFontSz" refFor="des" refForName="parentText" fact="-0.41"/>
-      <dgm:constr type="h" for="ch" forName="negativeSpace" refType="h" refFor="des" refForName="parentText" op="lte" fact="-0.82"/>
-      <dgm:constr type="h" for="ch" forName="negativeSpace" refType="h" refFor="des" refForName="parentText" op="gte" fact="-0.82"/>
-      <dgm:constr type="w" for="ch" forName="childText" refType="w"/>
-      <dgm:constr type="h" for="ch" forName="childText" refType="primFontSz" refFor="des" refForName="parentText" fact="0.7"/>
-      <dgm:constr type="primFontSz" for="des" forName="parentText" val="65"/>
-      <dgm:constr type="primFontSz" for="ch" forName="childText" refType="primFontSz" refFor="des" refForName="parentText"/>
-      <dgm:constr type="tMarg" for="ch" forName="childText" refType="primFontSz" refFor="des" refForName="parentText" fact="1.64"/>
-      <dgm:constr type="tMarg" for="ch" forName="childText" refType="h" refFor="des" refForName="parentText" op="lte" fact="3.28"/>
-      <dgm:constr type="tMarg" for="ch" forName="childText" refType="h" refFor="des" refForName="parentText" op="gte" fact="3.28"/>
-      <dgm:constr type="lMarg" for="ch" forName="childText" refType="w" fact="0.22"/>
-      <dgm:constr type="rMarg" for="ch" forName="childText" refType="lMarg" refFor="ch" refForName="childText"/>
-      <dgm:constr type="lMarg" for="des" forName="parentText" refType="w" fact="0.075"/>
-      <dgm:constr type="rMarg" for="des" forName="parentText" refType="lMarg" refFor="des" refForName="parentText"/>
-      <dgm:constr type="h" for="ch" forName="spaceBetweenRectangles" refType="primFontSz" refFor="des" refForName="parentText" fact="0.15"/>
-    </dgm:constrLst>
-    <dgm:ruleLst>
-      <dgm:rule type="primFontSz" for="des" forName="parentText" val="5" fact="NaN" max="NaN"/>
-    </dgm:ruleLst>
-    <dgm:forEach name="Name3" axis="ch" ptType="node">
-      <dgm:layoutNode name="parentLin">
-        <dgm:choose name="Name4">
-          <dgm:if name="Name5" func="var" arg="dir" op="equ" val="norm">
-            <dgm:alg type="lin">
-              <dgm:param type="linDir" val="fromL"/>
-              <dgm:param type="horzAlign" val="l"/>
-              <dgm:param type="nodeHorzAlign" val="l"/>
-            </dgm:alg>
-          </dgm:if>
-          <dgm:else name="Name6">
-            <dgm:alg type="lin">
-              <dgm:param type="linDir" val="fromR"/>
-              <dgm:param type="horzAlign" val="r"/>
-              <dgm:param type="nodeHorzAlign" val="r"/>
-            </dgm:alg>
-          </dgm:else>
-        </dgm:choose>
-        <dgm:shape xmlns:r="http://schemas.openxmlformats.org/officeDocument/2006/relationships" r:blip="">
-          <dgm:adjLst/>
-        </dgm:shape>
-        <dgm:presOf/>
-        <dgm:constrLst/>
-        <dgm:ruleLst/>
-        <dgm:layoutNode name="parentLeftMargin">
-          <dgm:alg type="sp"/>
-          <dgm:shape xmlns:r="http://schemas.openxmlformats.org/officeDocument/2006/relationships" type="rect" r:blip="" hideGeom="1">
-            <dgm:adjLst/>
-          </dgm:shape>
-          <dgm:presOf axis="self"/>
-          <dgm:constrLst>
-            <dgm:constr type="h"/>
-          </dgm:constrLst>
-          <dgm:ruleLst/>
-        </dgm:layoutNode>
-        <dgm:layoutNode name="parentText" styleLbl="node1">
-          <dgm:varLst>
-            <dgm:chMax val="0"/>
-            <dgm:bulletEnabled val="1"/>
-          </dgm:varLst>
-          <dgm:choose name="Name7">
-            <dgm:if name="Name8" func="var" arg="dir" op="equ" val="norm">
-              <dgm:alg type="tx">
-                <dgm:param type="parTxLTRAlign" val="l"/>
-                <dgm:param type="parTxRTLAlign" val="l"/>
-              </dgm:alg>
-            </dgm:if>
-            <dgm:else name="Name9">
-              <dgm:alg type="tx">
-                <dgm:param type="parTxLTRAlign" val="r"/>
-                <dgm:param type="parTxRTLAlign" val="r"/>
-              </dgm:alg>
-            </dgm:else>
-          </dgm:choose>
-          <dgm:shape xmlns:r="http://schemas.openxmlformats.org/officeDocument/2006/relationships" type="roundRect" r:blip="">
-            <dgm:adjLst/>
-          </dgm:shape>
-          <dgm:presOf axis="self" ptType="node"/>
-          <dgm:constrLst>
-            <dgm:constr type="tMarg"/>
-            <dgm:constr type="bMarg"/>
-          </dgm:constrLst>
-          <dgm:ruleLst/>
-        </dgm:layoutNode>
-      </dgm:layoutNode>
-      <dgm:layoutNode name="negativeSpace">
-        <dgm:alg type="sp"/>
-        <dgm:shape xmlns:r="http://schemas.openxmlformats.org/officeDocument/2006/relationships" r:blip="">
-          <dgm:adjLst/>
-        </dgm:shape>
-        <dgm:presOf/>
-        <dgm:constrLst/>
-        <dgm:ruleLst/>
-      </dgm:layoutNode>
-      <dgm:layoutNode name="childText" styleLbl="conFgAcc1">
-        <dgm:varLst>
-          <dgm:bulletEnabled val="1"/>
-        </dgm:varLst>
-        <dgm:alg type="tx">
-          <dgm:param type="stBulletLvl" val="1"/>
-        </dgm:alg>
-        <dgm:shape xmlns:r="http://schemas.openxmlformats.org/officeDocument/2006/relationships" type="rect" r:blip="" zOrderOff="-2">
-          <dgm:adjLst/>
-        </dgm:shape>
-        <dgm:presOf axis="des" ptType="node"/>
-        <dgm:constrLst>
-          <dgm:constr type="secFontSz" refType="primFontSz"/>
-        </dgm:constrLst>
-        <dgm:ruleLst>
-          <dgm:rule type="h" val="INF" fact="NaN" max="NaN"/>
-        </dgm:ruleLst>
-      </dgm:layoutNode>
-      <dgm:forEach name="Name10" axis="followSib" ptType="sibTrans" cnt="1">
-        <dgm:layoutNode name="spaceBetweenRectangles">
-          <dgm:alg type="sp"/>
-          <dgm:shape xmlns:r="http://schemas.openxmlformats.org/officeDocument/2006/relationships" r:blip="">
-            <dgm:adjLst/>
-          </dgm:shape>
-          <dgm:presOf/>
-          <dgm:constrLst/>
-          <dgm:ruleLst/>
-        </dgm:layoutNode>
-      </dgm:forEach>
-    </dgm:forEach>
-  </dgm:layoutNode>
-</dgm:layoutDef>
-</file>
-
-<file path=ppt/diagrams/layout2.xml><?xml version="1.0" encoding="utf-8"?>
-<dgm:layoutDef xmlns:dgm="http://schemas.openxmlformats.org/drawingml/2006/diagram" xmlns:a="http://schemas.openxmlformats.org/drawingml/2006/main" uniqueId="urn:microsoft.com/office/officeart/2005/8/layout/list1">
-  <dgm:title val=""/>
-  <dgm:desc val=""/>
-  <dgm:catLst>
-    <dgm:cat type="list" pri="4000"/>
-  </dgm:catLst>
-  <dgm:sampData>
-    <dgm:dataModel>
-      <dgm:ptLst>
-        <dgm:pt modelId="0" type="doc"/>
-        <dgm:pt modelId="1">
-          <dgm:prSet phldr="1"/>
-        </dgm:pt>
-        <dgm:pt modelId="2">
-          <dgm:prSet phldr="1"/>
-        </dgm:pt>
-        <dgm:pt modelId="3">
-          <dgm:prSet phldr="1"/>
-        </dgm:pt>
-      </dgm:ptLst>
-      <dgm:cxnLst>
-        <dgm:cxn modelId="4" srcId="0" destId="1" srcOrd="0" destOrd="0"/>
-        <dgm:cxn modelId="5" srcId="0" destId="2" srcOrd="1" destOrd="0"/>
-        <dgm:cxn modelId="6" srcId="0" destId="3" srcOrd="2" destOrd="0"/>
-      </dgm:cxnLst>
-      <dgm:bg/>
-      <dgm:whole/>
-    </dgm:dataModel>
-  </dgm:sampData>
-  <dgm:styleData>
-    <dgm:dataModel>
-      <dgm:ptLst>
-        <dgm:pt modelId="0" type="doc"/>
-        <dgm:pt modelId="1"/>
-        <dgm:pt modelId="2"/>
-      </dgm:ptLst>
-      <dgm:cxnLst>
-        <dgm:cxn modelId="4" srcId="0" destId="1" srcOrd="0" destOrd="0"/>
-        <dgm:cxn modelId="5" srcId="0" destId="2" srcOrd="1" destOrd="0"/>
-      </dgm:cxnLst>
-      <dgm:bg/>
-      <dgm:whole/>
-    </dgm:dataModel>
-  </dgm:styleData>
-  <dgm:clrData>
-    <dgm:dataModel>
-      <dgm:ptLst>
-        <dgm:pt modelId="0" type="doc"/>
-        <dgm:pt modelId="1"/>
-        <dgm:pt modelId="2"/>
-        <dgm:pt modelId="3"/>
-        <dgm:pt modelId="4"/>
-      </dgm:ptLst>
-      <dgm:cxnLst>
-        <dgm:cxn modelId="5" srcId="0" destId="1" srcOrd="0" destOrd="0"/>
-        <dgm:cxn modelId="6" srcId="0" destId="2" srcOrd="1" destOrd="0"/>
-        <dgm:cxn modelId="7" srcId="0" destId="3" srcOrd="2" destOrd="0"/>
-        <dgm:cxn modelId="8" srcId="0" destId="4" srcOrd="3" destOrd="0"/>
-      </dgm:cxnLst>
-      <dgm:bg/>
-      <dgm:whole/>
-    </dgm:dataModel>
-  </dgm:clrData>
-  <dgm:layoutNode name="linear">
-    <dgm:varLst>
-      <dgm:dir/>
-      <dgm:animLvl val="lvl"/>
-      <dgm:resizeHandles val="exact"/>
-    </dgm:varLst>
-    <dgm:choose name="Name0">
-      <dgm:if name="Name1" func="var" arg="dir" op="equ" val="norm">
-        <dgm:alg type="lin">
-          <dgm:param type="linDir" val="fromT"/>
-          <dgm:param type="vertAlign" val="mid"/>
-          <dgm:param type="horzAlign" val="l"/>
-          <dgm:param type="nodeHorzAlign" val="l"/>
-        </dgm:alg>
-      </dgm:if>
-      <dgm:else name="Name2">
-        <dgm:alg type="lin">
-          <dgm:param type="linDir" val="fromT"/>
-          <dgm:param type="vertAlign" val="mid"/>
-          <dgm:param type="horzAlign" val="r"/>
-          <dgm:param type="nodeHorzAlign" val="r"/>
-        </dgm:alg>
-      </dgm:else>
-    </dgm:choose>
-    <dgm:shape xmlns:r="http://schemas.openxmlformats.org/officeDocument/2006/relationships" r:blip="">
-      <dgm:adjLst/>
-    </dgm:shape>
-    <dgm:presOf/>
-    <dgm:constrLst>
-      <dgm:constr type="w" for="ch" forName="parentLin" refType="w"/>
-      <dgm:constr type="h" for="ch" forName="parentLin" val="INF"/>
-      <dgm:constr type="w" for="des" forName="parentLeftMargin" refType="w" fact="0.05"/>
-      <dgm:constr type="w" for="des" forName="parentText" refType="w" fact="0.7"/>
-      <dgm:constr type="h" for="des" forName="parentText" refType="primFontSz" refFor="des" refForName="parentText" fact="0.82"/>
-      <dgm:constr type="h" for="ch" forName="negativeSpace" refType="primFontSz" refFor="des" refForName="parentText" fact="-0.41"/>
-      <dgm:constr type="h" for="ch" forName="negativeSpace" refType="h" refFor="des" refForName="parentText" op="lte" fact="-0.82"/>
-      <dgm:constr type="h" for="ch" forName="negativeSpace" refType="h" refFor="des" refForName="parentText" op="gte" fact="-0.82"/>
-      <dgm:constr type="w" for="ch" forName="childText" refType="w"/>
-      <dgm:constr type="h" for="ch" forName="childText" refType="primFontSz" refFor="des" refForName="parentText" fact="0.7"/>
-      <dgm:constr type="primFontSz" for="des" forName="parentText" val="65"/>
-      <dgm:constr type="primFontSz" for="ch" forName="childText" refType="primFontSz" refFor="des" refForName="parentText"/>
-      <dgm:constr type="tMarg" for="ch" forName="childText" refType="primFontSz" refFor="des" refForName="parentText" fact="1.64"/>
-      <dgm:constr type="tMarg" for="ch" forName="childText" refType="h" refFor="des" refForName="parentText" op="lte" fact="3.28"/>
-      <dgm:constr type="tMarg" for="ch" forName="childText" refType="h" refFor="des" refForName="parentText" op="gte" fact="3.28"/>
-      <dgm:constr type="lMarg" for="ch" forName="childText" refType="w" fact="0.22"/>
-      <dgm:constr type="rMarg" for="ch" forName="childText" refType="lMarg" refFor="ch" refForName="childText"/>
-      <dgm:constr type="lMarg" for="des" forName="parentText" refType="w" fact="0.075"/>
-      <dgm:constr type="rMarg" for="des" forName="parentText" refType="lMarg" refFor="des" refForName="parentText"/>
-      <dgm:constr type="h" for="ch" forName="spaceBetweenRectangles" refType="primFontSz" refFor="des" refForName="parentText" fact="0.15"/>
-    </dgm:constrLst>
-    <dgm:ruleLst>
-      <dgm:rule type="primFontSz" for="des" forName="parentText" val="5" fact="NaN" max="NaN"/>
-    </dgm:ruleLst>
-    <dgm:forEach name="Name3" axis="ch" ptType="node">
-      <dgm:layoutNode name="parentLin">
-        <dgm:choose name="Name4">
-          <dgm:if name="Name5" func="var" arg="dir" op="equ" val="norm">
-            <dgm:alg type="lin">
-              <dgm:param type="linDir" val="fromL"/>
-              <dgm:param type="horzAlign" val="l"/>
-              <dgm:param type="nodeHorzAlign" val="l"/>
-            </dgm:alg>
-          </dgm:if>
-          <dgm:else name="Name6">
-            <dgm:alg type="lin">
-              <dgm:param type="linDir" val="fromR"/>
-              <dgm:param type="horzAlign" val="r"/>
-              <dgm:param type="nodeHorzAlign" val="r"/>
-            </dgm:alg>
-          </dgm:else>
-        </dgm:choose>
-        <dgm:shape xmlns:r="http://schemas.openxmlformats.org/officeDocument/2006/relationships" r:blip="">
-          <dgm:adjLst/>
-        </dgm:shape>
-        <dgm:presOf/>
-        <dgm:constrLst/>
-        <dgm:ruleLst/>
-        <dgm:layoutNode name="parentLeftMargin">
-          <dgm:alg type="sp"/>
-          <dgm:shape xmlns:r="http://schemas.openxmlformats.org/officeDocument/2006/relationships" type="rect" r:blip="" hideGeom="1">
-            <dgm:adjLst/>
-          </dgm:shape>
-          <dgm:presOf axis="self"/>
-          <dgm:constrLst>
-            <dgm:constr type="h"/>
-          </dgm:constrLst>
-          <dgm:ruleLst/>
-        </dgm:layoutNode>
-        <dgm:layoutNode name="parentText" styleLbl="node1">
-          <dgm:varLst>
-            <dgm:chMax val="0"/>
-            <dgm:bulletEnabled val="1"/>
-          </dgm:varLst>
-          <dgm:choose name="Name7">
-            <dgm:if name="Name8" func="var" arg="dir" op="equ" val="norm">
-              <dgm:alg type="tx">
-                <dgm:param type="parTxLTRAlign" val="l"/>
-                <dgm:param type="parTxRTLAlign" val="l"/>
-              </dgm:alg>
-            </dgm:if>
-            <dgm:else name="Name9">
-              <dgm:alg type="tx">
-                <dgm:param type="parTxLTRAlign" val="r"/>
-                <dgm:param type="parTxRTLAlign" val="r"/>
-              </dgm:alg>
-            </dgm:else>
-          </dgm:choose>
-          <dgm:shape xmlns:r="http://schemas.openxmlformats.org/officeDocument/2006/relationships" type="roundRect" r:blip="">
-            <dgm:adjLst/>
-          </dgm:shape>
-          <dgm:presOf axis="self" ptType="node"/>
-          <dgm:constrLst>
-            <dgm:constr type="tMarg"/>
-            <dgm:constr type="bMarg"/>
-          </dgm:constrLst>
-          <dgm:ruleLst/>
-        </dgm:layoutNode>
-      </dgm:layoutNode>
-      <dgm:layoutNode name="negativeSpace">
-        <dgm:alg type="sp"/>
-        <dgm:shape xmlns:r="http://schemas.openxmlformats.org/officeDocument/2006/relationships" r:blip="">
-          <dgm:adjLst/>
-        </dgm:shape>
-        <dgm:presOf/>
-        <dgm:constrLst/>
-        <dgm:ruleLst/>
-      </dgm:layoutNode>
-      <dgm:layoutNode name="childText" styleLbl="conFgAcc1">
-        <dgm:varLst>
-          <dgm:bulletEnabled val="1"/>
-        </dgm:varLst>
-        <dgm:alg type="tx">
-          <dgm:param type="stBulletLvl" val="1"/>
-        </dgm:alg>
-        <dgm:shape xmlns:r="http://schemas.openxmlformats.org/officeDocument/2006/relationships" type="rect" r:blip="" zOrderOff="-2">
-          <dgm:adjLst/>
-        </dgm:shape>
-        <dgm:presOf axis="des" ptType="node"/>
-        <dgm:constrLst>
-          <dgm:constr type="secFontSz" refType="primFontSz"/>
-        </dgm:constrLst>
-        <dgm:ruleLst>
-          <dgm:rule type="h" val="INF" fact="NaN" max="NaN"/>
-        </dgm:ruleLst>
-      </dgm:layoutNode>
-      <dgm:forEach name="Name10" axis="followSib" ptType="sibTrans" cnt="1">
-        <dgm:layoutNode name="spaceBetweenRectangles">
-          <dgm:alg type="sp"/>
-          <dgm:shape xmlns:r="http://schemas.openxmlformats.org/officeDocument/2006/relationships" r:blip="">
-            <dgm:adjLst/>
-          </dgm:shape>
-          <dgm:presOf/>
-          <dgm:constrLst/>
-          <dgm:ruleLst/>
-        </dgm:layoutNode>
-      </dgm:forEach>
-    </dgm:forEach>
-  </dgm:layoutNode>
-</dgm:layoutDef>
-</file>
-
-<file path=ppt/diagrams/quickStyle1.xml><?xml version="1.0" encoding="utf-8"?>
-<dgm:styleDef xmlns:dgm="http://schemas.openxmlformats.org/drawingml/2006/diagram" xmlns:a="http://schemas.openxmlformats.org/drawingml/2006/main" uniqueId="urn:microsoft.com/office/officeart/2005/8/quickstyle/simple1">
-  <dgm:title val=""/>
-  <dgm:desc val=""/>
-  <dgm:catLst>
-    <dgm:cat type="simple" pri="10100"/>
-  </dgm:catLst>
-  <dgm:scene3d>
-    <a:camera prst="orthographicFront"/>
-    <a:lightRig rig="threePt" dir="t"/>
-  </dgm:scene3d>
-  <dgm:styleLbl name="node0">
-    <dgm:scene3d>
-      <a:camera prst="orthographicFront"/>
-      <a:lightRig rig="threePt" dir="t"/>
-    </dgm:scene3d>
-    <dgm:sp3d/>
-    <dgm:txPr/>
-    <dgm:style>
-      <a:lnRef idx="2">
-        <a:scrgbClr r="0" g="0" b="0"/>
-      </a:lnRef>
-      <a:fillRef idx="1">
-        <a:scrgbClr r="0" g="0" b="0"/>
-      </a:fillRef>
-      <a:effectRef idx="0">
-        <a:scrgbClr r="0" g="0" b="0"/>
-      </a:effectRef>
-      <a:fontRef idx="minor">
-        <a:schemeClr val="lt1"/>
-      </a:fontRef>
-    </dgm:style>
-  </dgm:styleLbl>
-  <dgm:styleLbl name="lnNode1">
-    <dgm:scene3d>
-      <a:camera prst="orthographicFront"/>
-      <a:lightRig rig="threePt" dir="t"/>
-    </dgm:scene3d>
-    <dgm:sp3d/>
-    <dgm:txPr/>
-    <dgm:style>
-      <a:lnRef idx="2">
-        <a:scrgbClr r="0" g="0" b="0"/>
-      </a:lnRef>
-      <a:fillRef idx="1">
-        <a:scrgbClr r="0" g="0" b="0"/>
-      </a:fillRef>
-      <a:effectRef idx="0">
-        <a:scrgbClr r="0" g="0" b="0"/>
-      </a:effectRef>
-      <a:fontRef idx="minor">
-        <a:schemeClr val="lt1"/>
-      </a:fontRef>
-    </dgm:style>
-  </dgm:styleLbl>
-  <dgm:styleLbl name="vennNode1">
-    <dgm:scene3d>
-      <a:camera prst="orthographicFront"/>
-      <a:lightRig rig="threePt" dir="t"/>
-    </dgm:scene3d>
-    <dgm:sp3d/>
-    <dgm:txPr/>
-    <dgm:style>
-      <a:lnRef idx="2">
-        <a:scrgbClr r="0" g="0" b="0"/>
-      </a:lnRef>
-      <a:fillRef idx="1">
-        <a:scrgbClr r="0" g="0" b="0"/>
-      </a:fillRef>
-      <a:effectRef idx="0">
-        <a:scrgbClr r="0" g="0" b="0"/>
-      </a:effectRef>
-      <a:fontRef idx="minor">
-        <a:schemeClr val="tx1"/>
-      </a:fontRef>
-    </dgm:style>
-  </dgm:styleLbl>
-  <dgm:styleLbl name="alignNode1">
-    <dgm:scene3d>
-      <a:camera prst="orthographicFront"/>
-      <a:lightRig rig="threePt" dir="t"/>
-    </dgm:scene3d>
-    <dgm:sp3d/>
-    <dgm:txPr/>
-    <dgm:style>
-      <a:lnRef idx="2">
-        <a:scrgbClr r="0" g="0" b="0"/>
-      </a:lnRef>
-      <a:fillRef idx="1">
-        <a:scrgbClr r="0" g="0" b="0"/>
-      </a:fillRef>
-      <a:effectRef idx="0">
-        <a:scrgbClr r="0" g="0" b="0"/>
-      </a:effectRef>
-      <a:fontRef idx="minor">
-        <a:schemeClr val="lt1"/>
-      </a:fontRef>
-    </dgm:style>
-  </dgm:styleLbl>
-  <dgm:styleLbl name="node1">
-    <dgm:scene3d>
-      <a:camera prst="orthographicFront"/>
-      <a:lightRig rig="threePt" dir="t"/>
-    </dgm:scene3d>
-    <dgm:sp3d/>
-    <dgm:txPr/>
-    <dgm:style>
-      <a:lnRef idx="2">
-        <a:scrgbClr r="0" g="0" b="0"/>
-      </a:lnRef>
-      <a:fillRef idx="1">
-        <a:scrgbClr r="0" g="0" b="0"/>
-      </a:fillRef>
-      <a:effectRef idx="0">
-        <a:scrgbClr r="0" g="0" b="0"/>
-      </a:effectRef>
-      <a:fontRef idx="minor">
-        <a:schemeClr val="lt1"/>
-      </a:fontRef>
-    </dgm:style>
-  </dgm:styleLbl>
-  <dgm:styleLbl name="node2">
-    <dgm:scene3d>
-      <a:camera prst="orthographicFront"/>
-      <a:lightRig rig="threePt" dir="t"/>
-    </dgm:scene3d>
-    <dgm:sp3d/>
-    <dgm:txPr/>
-    <dgm:style>
-      <a:lnRef idx="2">
-        <a:scrgbClr r="0" g="0" b="0"/>
-      </a:lnRef>
-      <a:fillRef idx="1">
-        <a:scrgbClr r="0" g="0" b="0"/>
-      </a:fillRef>
-      <a:effectRef idx="0">
-        <a:scrgbClr r="0" g="0" b="0"/>
-      </a:effectRef>
-      <a:fontRef idx="minor">
-        <a:schemeClr val="lt1"/>
-      </a:fontRef>
-    </dgm:style>
-  </dgm:styleLbl>
-  <dgm:styleLbl name="node3">
-    <dgm:scene3d>
-      <a:camera prst="orthographicFront"/>
-      <a:lightRig rig="threePt" dir="t"/>
-    </dgm:scene3d>
-    <dgm:sp3d/>
-    <dgm:txPr/>
-    <dgm:style>
-      <a:lnRef idx="2">
-        <a:scrgbClr r="0" g="0" b="0"/>
-      </a:lnRef>
-      <a:fillRef idx="1">
-        <a:scrgbClr r="0" g="0" b="0"/>
-      </a:fillRef>
-      <a:effectRef idx="0">
-        <a:scrgbClr r="0" g="0" b="0"/>
-      </a:effectRef>
-      <a:fontRef idx="minor">
-        <a:schemeClr val="lt1"/>
-      </a:fontRef>
-    </dgm:style>
-  </dgm:styleLbl>
-  <dgm:styleLbl name="node4">
-    <dgm:scene3d>
-      <a:camera prst="orthographicFront"/>
-      <a:lightRig rig="threePt" dir="t"/>
-    </dgm:scene3d>
-    <dgm:sp3d/>
-    <dgm:txPr/>
-    <dgm:style>
-      <a:lnRef idx="2">
-        <a:scrgbClr r="0" g="0" b="0"/>
-      </a:lnRef>
-      <a:fillRef idx="1">
-        <a:scrgbClr r="0" g="0" b="0"/>
-      </a:fillRef>
-      <a:effectRef idx="0">
-        <a:scrgbClr r="0" g="0" b="0"/>
-      </a:effectRef>
-      <a:fontRef idx="minor">
-        <a:schemeClr val="lt1"/>
-      </a:fontRef>
-    </dgm:style>
-  </dgm:styleLbl>
-  <dgm:styleLbl name="fgImgPlace1">
-    <dgm:scene3d>
-      <a:camera prst="orthographicFront"/>
-      <a:lightRig rig="threePt" dir="t"/>
-    </dgm:scene3d>
-    <dgm:sp3d/>
-    <dgm:txPr/>
-    <dgm:style>
-      <a:lnRef idx="2">
-        <a:scrgbClr r="0" g="0" b="0"/>
-      </a:lnRef>
-      <a:fillRef idx="1">
-        <a:scrgbClr r="0" g="0" b="0"/>
-      </a:fillRef>
-      <a:effectRef idx="0">
-        <a:scrgbClr r="0" g="0" b="0"/>
-      </a:effectRef>
-      <a:fontRef idx="minor"/>
-    </dgm:style>
-  </dgm:styleLbl>
-  <dgm:styleLbl name="alignImgPlace1">
-    <dgm:scene3d>
-      <a:camera prst="orthographicFront"/>
-      <a:lightRig rig="threePt" dir="t"/>
-    </dgm:scene3d>
-    <dgm:sp3d/>
-    <dgm:txPr/>
-    <dgm:style>
-      <a:lnRef idx="2">
-        <a:scrgbClr r="0" g="0" b="0"/>
-      </a:lnRef>
-      <a:fillRef idx="1">
-        <a:scrgbClr r="0" g="0" b="0"/>
-      </a:fillRef>
-      <a:effectRef idx="0">
-        <a:scrgbClr r="0" g="0" b="0"/>
-      </a:effectRef>
-      <a:fontRef idx="minor"/>
-    </dgm:style>
-  </dgm:styleLbl>
-  <dgm:styleLbl name="bgImgPlace1">
-    <dgm:scene3d>
-      <a:camera prst="orthographicFront"/>
-      <a:lightRig rig="threePt" dir="t"/>
-    </dgm:scene3d>
-    <dgm:sp3d/>
-    <dgm:txPr/>
-    <dgm:style>
-      <a:lnRef idx="2">
-        <a:scrgbClr r="0" g="0" b="0"/>
-      </a:lnRef>
-      <a:fillRef idx="1">
-        <a:scrgbClr r="0" g="0" b="0"/>
-      </a:fillRef>
-      <a:effectRef idx="0">
-        <a:scrgbClr r="0" g="0" b="0"/>
-      </a:effectRef>
-      <a:fontRef idx="minor"/>
-    </dgm:style>
-  </dgm:styleLbl>
-  <dgm:styleLbl name="sibTrans2D1">
-    <dgm:scene3d>
-      <a:camera prst="orthographicFront"/>
-      <a:lightRig rig="threePt" dir="t"/>
-    </dgm:scene3d>
-    <dgm:sp3d/>
-    <dgm:txPr/>
-    <dgm:style>
-      <a:lnRef idx="0">
-        <a:scrgbClr r="0" g="0" b="0"/>
-      </a:lnRef>
-      <a:fillRef idx="1">
-        <a:scrgbClr r="0" g="0" b="0"/>
-      </a:fillRef>
-      <a:effectRef idx="0">
-        <a:scrgbClr r="0" g="0" b="0"/>
-      </a:effectRef>
-      <a:fontRef idx="minor">
-        <a:schemeClr val="lt1"/>
-      </a:fontRef>
-    </dgm:style>
-  </dgm:styleLbl>
-  <dgm:styleLbl name="fgSibTrans2D1">
-    <dgm:scene3d>
-      <a:camera prst="orthographicFront"/>
-      <a:lightRig rig="threePt" dir="t"/>
-    </dgm:scene3d>
-    <dgm:sp3d/>
-    <dgm:txPr/>
-    <dgm:style>
-      <a:lnRef idx="0">
-        <a:scrgbClr r="0" g="0" b="0"/>
-      </a:lnRef>
-      <a:fillRef idx="1">
-        <a:scrgbClr r="0" g="0" b="0"/>
-      </a:fillRef>
-      <a:effectRef idx="0">
-        <a:scrgbClr r="0" g="0" b="0"/>
-      </a:effectRef>
-      <a:fontRef idx="minor">
-        <a:schemeClr val="lt1"/>
-      </a:fontRef>
-    </dgm:style>
-  </dgm:styleLbl>
-  <dgm:styleLbl name="bgSibTrans2D1">
-    <dgm:scene3d>
-      <a:camera prst="orthographicFront"/>
-      <a:lightRig rig="threePt" dir="t"/>
-    </dgm:scene3d>
-    <dgm:sp3d/>
-    <dgm:txPr/>
-    <dgm:style>
-      <a:lnRef idx="0">
-        <a:scrgbClr r="0" g="0" b="0"/>
-      </a:lnRef>
-      <a:fillRef idx="1">
-        <a:scrgbClr r="0" g="0" b="0"/>
-      </a:fillRef>
-      <a:effectRef idx="0">
-        <a:scrgbClr r="0" g="0" b="0"/>
-      </a:effectRef>
-      <a:fontRef idx="minor">
-        <a:schemeClr val="lt1"/>
-      </a:fontRef>
-    </dgm:style>
-  </dgm:styleLbl>
-  <dgm:styleLbl name="sibTrans1D1">
-    <dgm:scene3d>
-      <a:camera prst="orthographicFront"/>
-      <a:lightRig rig="threePt" dir="t"/>
-    </dgm:scene3d>
-    <dgm:sp3d/>
-    <dgm:txPr/>
-    <dgm:style>
-      <a:lnRef idx="1">
-        <a:scrgbClr r="0" g="0" b="0"/>
-      </a:lnRef>
-      <a:fillRef idx="0">
-        <a:scrgbClr r="0" g="0" b="0"/>
-      </a:fillRef>
-      <a:effectRef idx="0">
-        <a:scrgbClr r="0" g="0" b="0"/>
-      </a:effectRef>
-      <a:fontRef idx="minor"/>
-    </dgm:style>
-  </dgm:styleLbl>
-  <dgm:styleLbl name="callout">
-    <dgm:scene3d>
-      <a:camera prst="orthographicFront"/>
-      <a:lightRig rig="threePt" dir="t"/>
-    </dgm:scene3d>
-    <dgm:sp3d/>
-    <dgm:txPr/>
-    <dgm:style>
-      <a:lnRef idx="2">
-        <a:scrgbClr r="0" g="0" b="0"/>
-      </a:lnRef>
-      <a:fillRef idx="1">
-        <a:scrgbClr r="0" g="0" b="0"/>
-      </a:fillRef>
-      <a:effectRef idx="0">
-        <a:scrgbClr r="0" g="0" b="0"/>
-      </a:effectRef>
-      <a:fontRef idx="minor"/>
-    </dgm:style>
-  </dgm:styleLbl>
-  <dgm:styleLbl name="asst0">
-    <dgm:scene3d>
-      <a:camera prst="orthographicFront"/>
-      <a:lightRig rig="threePt" dir="t"/>
-    </dgm:scene3d>
-    <dgm:sp3d/>
-    <dgm:txPr/>
-    <dgm:style>
-      <a:lnRef idx="2">
-        <a:scrgbClr r="0" g="0" b="0"/>
-      </a:lnRef>
-      <a:fillRef idx="1">
-        <a:scrgbClr r="0" g="0" b="0"/>
-      </a:fillRef>
-      <a:effectRef idx="0">
-        <a:scrgbClr r="0" g="0" b="0"/>
-      </a:effectRef>
-      <a:fontRef idx="minor">
-        <a:schemeClr val="lt1"/>
-      </a:fontRef>
-    </dgm:style>
-  </dgm:styleLbl>
-  <dgm:styleLbl name="asst1">
-    <dgm:scene3d>
-      <a:camera prst="orthographicFront"/>
-      <a:lightRig rig="threePt" dir="t"/>
-    </dgm:scene3d>
-    <dgm:sp3d/>
-    <dgm:txPr/>
-    <dgm:style>
-      <a:lnRef idx="2">
-        <a:scrgbClr r="0" g="0" b="0"/>
-      </a:lnRef>
-      <a:fillRef idx="1">
-        <a:scrgbClr r="0" g="0" b="0"/>
-      </a:fillRef>
-      <a:effectRef idx="0">
-        <a:scrgbClr r="0" g="0" b="0"/>
-      </a:effectRef>
-      <a:fontRef idx="minor">
-        <a:schemeClr val="lt1"/>
-      </a:fontRef>
-    </dgm:style>
-  </dgm:styleLbl>
-  <dgm:styleLbl name="asst2">
-    <dgm:scene3d>
-      <a:camera prst="orthographicFront"/>
-      <a:lightRig rig="threePt" dir="t"/>
-    </dgm:scene3d>
-    <dgm:sp3d/>
-    <dgm:txPr/>
-    <dgm:style>
-      <a:lnRef idx="2">
-        <a:scrgbClr r="0" g="0" b="0"/>
-      </a:lnRef>
-      <a:fillRef idx="1">
-        <a:scrgbClr r="0" g="0" b="0"/>
-      </a:fillRef>
-      <a:effectRef idx="0">
-        <a:scrgbClr r="0" g="0" b="0"/>
-      </a:effectRef>
-      <a:fontRef idx="minor">
-        <a:schemeClr val="lt1"/>
-      </a:fontRef>
-    </dgm:style>
-  </dgm:styleLbl>
-  <dgm:styleLbl name="asst3">
-    <dgm:scene3d>
-      <a:camera prst="orthographicFront"/>
-      <a:lightRig rig="threePt" dir="t"/>
-    </dgm:scene3d>
-    <dgm:sp3d/>
-    <dgm:txPr/>
-    <dgm:style>
-      <a:lnRef idx="2">
-        <a:scrgbClr r="0" g="0" b="0"/>
-      </a:lnRef>
-      <a:fillRef idx="1">
-        <a:scrgbClr r="0" g="0" b="0"/>
-      </a:fillRef>
-      <a:effectRef idx="0">
-        <a:scrgbClr r="0" g="0" b="0"/>
-      </a:effectRef>
-      <a:fontRef idx="minor">
-        <a:schemeClr val="lt1"/>
-      </a:fontRef>
-    </dgm:style>
-  </dgm:styleLbl>
-  <dgm:styleLbl name="asst4">
-    <dgm:scene3d>
-      <a:camera prst="orthographicFront"/>
-      <a:lightRig rig="threePt" dir="t"/>
-    </dgm:scene3d>
-    <dgm:sp3d/>
-    <dgm:txPr/>
-    <dgm:style>
-      <a:lnRef idx="2">
-        <a:scrgbClr r="0" g="0" b="0"/>
-      </a:lnRef>
-      <a:fillRef idx="1">
-        <a:scrgbClr r="0" g="0" b="0"/>
-      </a:fillRef>
-      <a:effectRef idx="0">
-        <a:scrgbClr r="0" g="0" b="0"/>
-      </a:effectRef>
-      <a:fontRef idx="minor">
-        <a:schemeClr val="lt1"/>
-      </a:fontRef>
-    </dgm:style>
-  </dgm:styleLbl>
-  <dgm:styleLbl name="parChTrans2D1">
-    <dgm:scene3d>
-      <a:camera prst="orthographicFront"/>
-      <a:lightRig rig="threePt" dir="t"/>
-    </dgm:scene3d>
-    <dgm:sp3d/>
-    <dgm:txPr/>
-    <dgm:style>
-      <a:lnRef idx="2">
-        <a:scrgbClr r="0" g="0" b="0"/>
-      </a:lnRef>
-      <a:fillRef idx="1">
-        <a:scrgbClr r="0" g="0" b="0"/>
-      </a:fillRef>
-      <a:effectRef idx="0">
-        <a:scrgbClr r="0" g="0" b="0"/>
-      </a:effectRef>
-      <a:fontRef idx="minor">
-        <a:schemeClr val="lt1"/>
-      </a:fontRef>
-    </dgm:style>
-  </dgm:styleLbl>
-  <dgm:styleLbl name="parChTrans2D2">
-    <dgm:scene3d>
-      <a:camera prst="orthographicFront"/>
-      <a:lightRig rig="threePt" dir="t"/>
-    </dgm:scene3d>
-    <dgm:sp3d/>
-    <dgm:txPr/>
-    <dgm:style>
-      <a:lnRef idx="2">
-        <a:scrgbClr r="0" g="0" b="0"/>
-      </a:lnRef>
-      <a:fillRef idx="1">
-        <a:scrgbClr r="0" g="0" b="0"/>
-      </a:fillRef>
-      <a:effectRef idx="0">
-        <a:scrgbClr r="0" g="0" b="0"/>
-      </a:effectRef>
-      <a:fontRef idx="minor">
-        <a:schemeClr val="lt1"/>
-      </a:fontRef>
-    </dgm:style>
-  </dgm:styleLbl>
-  <dgm:styleLbl name="parChTrans2D3">
-    <dgm:scene3d>
-      <a:camera prst="orthographicFront"/>
-      <a:lightRig rig="threePt" dir="t"/>
-    </dgm:scene3d>
-    <dgm:sp3d/>
-    <dgm:txPr/>
-    <dgm:style>
-      <a:lnRef idx="2">
-        <a:scrgbClr r="0" g="0" b="0"/>
-      </a:lnRef>
-      <a:fillRef idx="1">
-        <a:scrgbClr r="0" g="0" b="0"/>
-      </a:fillRef>
-      <a:effectRef idx="0">
-        <a:scrgbClr r="0" g="0" b="0"/>
-      </a:effectRef>
-      <a:fontRef idx="minor">
-        <a:schemeClr val="lt1"/>
-      </a:fontRef>
-    </dgm:style>
-  </dgm:styleLbl>
-  <dgm:styleLbl name="parChTrans2D4">
-    <dgm:scene3d>
-      <a:camera prst="orthographicFront"/>
-      <a:lightRig rig="threePt" dir="t"/>
-    </dgm:scene3d>
-    <dgm:sp3d/>
-    <dgm:txPr/>
-    <dgm:style>
-      <a:lnRef idx="2">
-        <a:scrgbClr r="0" g="0" b="0"/>
-      </a:lnRef>
-      <a:fillRef idx="1">
-        <a:scrgbClr r="0" g="0" b="0"/>
-      </a:fillRef>
-      <a:effectRef idx="0">
-        <a:scrgbClr r="0" g="0" b="0"/>
-      </a:effectRef>
-      <a:fontRef idx="minor">
-        <a:schemeClr val="lt1"/>
-      </a:fontRef>
-    </dgm:style>
-  </dgm:styleLbl>
-  <dgm:styleLbl name="parChTrans1D1">
-    <dgm:scene3d>
-      <a:camera prst="orthographicFront"/>
-      <a:lightRig rig="threePt" dir="t"/>
-    </dgm:scene3d>
-    <dgm:sp3d/>
-    <dgm:txPr/>
-    <dgm:style>
-      <a:lnRef idx="2">
-        <a:scrgbClr r="0" g="0" b="0"/>
-      </a:lnRef>
-      <a:fillRef idx="0">
-        <a:scrgbClr r="0" g="0" b="0"/>
-      </a:fillRef>
-      <a:effectRef idx="0">
-        <a:scrgbClr r="0" g="0" b="0"/>
-      </a:effectRef>
-      <a:fontRef idx="minor"/>
-    </dgm:style>
-  </dgm:styleLbl>
-  <dgm:styleLbl name="parChTrans1D2">
-    <dgm:scene3d>
-      <a:camera prst="orthographicFront"/>
-      <a:lightRig rig="threePt" dir="t"/>
-    </dgm:scene3d>
-    <dgm:sp3d/>
-    <dgm:txPr/>
-    <dgm:style>
-      <a:lnRef idx="2">
-        <a:scrgbClr r="0" g="0" b="0"/>
-      </a:lnRef>
-      <a:fillRef idx="0">
-        <a:scrgbClr r="0" g="0" b="0"/>
-      </a:fillRef>
-      <a:effectRef idx="0">
-        <a:scrgbClr r="0" g="0" b="0"/>
-      </a:effectRef>
-      <a:fontRef idx="minor"/>
-    </dgm:style>
-  </dgm:styleLbl>
-  <dgm:styleLbl name="parChTrans1D3">
-    <dgm:scene3d>
-      <a:camera prst="orthographicFront"/>
-      <a:lightRig rig="threePt" dir="t"/>
-    </dgm:scene3d>
-    <dgm:sp3d/>
-    <dgm:txPr/>
-    <dgm:style>
-      <a:lnRef idx="2">
-        <a:scrgbClr r="0" g="0" b="0"/>
-      </a:lnRef>
-      <a:fillRef idx="0">
-        <a:scrgbClr r="0" g="0" b="0"/>
-      </a:fillRef>
-      <a:effectRef idx="0">
-        <a:scrgbClr r="0" g="0" b="0"/>
-      </a:effectRef>
-      <a:fontRef idx="minor"/>
-    </dgm:style>
-  </dgm:styleLbl>
-  <dgm:styleLbl name="parChTrans1D4">
-    <dgm:scene3d>
-      <a:camera prst="orthographicFront"/>
-      <a:lightRig rig="threePt" dir="t"/>
-    </dgm:scene3d>
-    <dgm:sp3d/>
-    <dgm:txPr/>
-    <dgm:style>
-      <a:lnRef idx="2">
-        <a:scrgbClr r="0" g="0" b="0"/>
-      </a:lnRef>
-      <a:fillRef idx="0">
-        <a:scrgbClr r="0" g="0" b="0"/>
-      </a:fillRef>
-      <a:effectRef idx="0">
-        <a:scrgbClr r="0" g="0" b="0"/>
-      </a:effectRef>
-      <a:fontRef idx="minor"/>
-    </dgm:style>
-  </dgm:styleLbl>
-  <dgm:styleLbl name="fgAcc1">
-    <dgm:scene3d>
-      <a:camera prst="orthographicFront"/>
-      <a:lightRig rig="threePt" dir="t"/>
-    </dgm:scene3d>
-    <dgm:sp3d/>
-    <dgm:txPr/>
-    <dgm:style>
-      <a:lnRef idx="2">
-        <a:scrgbClr r="0" g="0" b="0"/>
-      </a:lnRef>
-      <a:fillRef idx="1">
-        <a:scrgbClr r="0" g="0" b="0"/>
-      </a:fillRef>
-      <a:effectRef idx="0">
-        <a:scrgbClr r="0" g="0" b="0"/>
-      </a:effectRef>
-      <a:fontRef idx="minor"/>
-    </dgm:style>
-  </dgm:styleLbl>
-  <dgm:styleLbl name="conFgAcc1">
-    <dgm:scene3d>
-      <a:camera prst="orthographicFront"/>
-      <a:lightRig rig="threePt" dir="t"/>
-    </dgm:scene3d>
-    <dgm:sp3d/>
-    <dgm:txPr/>
-    <dgm:style>
-      <a:lnRef idx="2">
-        <a:scrgbClr r="0" g="0" b="0"/>
-      </a:lnRef>
-      <a:fillRef idx="1">
-        <a:scrgbClr r="0" g="0" b="0"/>
-      </a:fillRef>
-      <a:effectRef idx="0">
-        <a:scrgbClr r="0" g="0" b="0"/>
-      </a:effectRef>
-      <a:fontRef idx="minor"/>
-    </dgm:style>
-  </dgm:styleLbl>
-  <dgm:styleLbl name="alignAcc1">
-    <dgm:scene3d>
-      <a:camera prst="orthographicFront"/>
-      <a:lightRig rig="threePt" dir="t"/>
-    </dgm:scene3d>
-    <dgm:sp3d/>
-    <dgm:txPr/>
-    <dgm:style>
-      <a:lnRef idx="2">
-        <a:scrgbClr r="0" g="0" b="0"/>
-      </a:lnRef>
-      <a:fillRef idx="1">
-        <a:scrgbClr r="0" g="0" b="0"/>
-      </a:fillRef>
-      <a:effectRef idx="0">
-        <a:scrgbClr r="0" g="0" b="0"/>
-      </a:effectRef>
-      <a:fontRef idx="minor"/>
-    </dgm:style>
-  </dgm:styleLbl>
-  <dgm:styleLbl name="trAlignAcc1">
-    <dgm:scene3d>
-      <a:camera prst="orthographicFront"/>
-      <a:lightRig rig="threePt" dir="t"/>
-    </dgm:scene3d>
-    <dgm:sp3d/>
-    <dgm:txPr/>
-    <dgm:style>
-      <a:lnRef idx="1">
-        <a:scrgbClr r="0" g="0" b="0"/>
-      </a:lnRef>
-      <a:fillRef idx="1">
-        <a:scrgbClr r="0" g="0" b="0"/>
-      </a:fillRef>
-      <a:effectRef idx="0">
-        <a:scrgbClr r="0" g="0" b="0"/>
-      </a:effectRef>
-      <a:fontRef idx="minor"/>
-    </dgm:style>
-  </dgm:styleLbl>
-  <dgm:styleLbl name="bgAcc1">
-    <dgm:scene3d>
-      <a:camera prst="orthographicFront"/>
-      <a:lightRig rig="threePt" dir="t"/>
-    </dgm:scene3d>
-    <dgm:sp3d/>
-    <dgm:txPr/>
-    <dgm:style>
-      <a:lnRef idx="2">
-        <a:scrgbClr r="0" g="0" b="0"/>
-      </a:lnRef>
-      <a:fillRef idx="1">
-        <a:scrgbClr r="0" g="0" b="0"/>
-      </a:fillRef>
-      <a:effectRef idx="0">
-        <a:scrgbClr r="0" g="0" b="0"/>
-      </a:effectRef>
-      <a:fontRef idx="minor"/>
-    </dgm:style>
-  </dgm:styleLbl>
-  <dgm:styleLbl name="solidFgAcc1">
-    <dgm:scene3d>
-      <a:camera prst="orthographicFront"/>
-      <a:lightRig rig="threePt" dir="t"/>
-    </dgm:scene3d>
-    <dgm:sp3d/>
-    <dgm:txPr/>
-    <dgm:style>
-      <a:lnRef idx="2">
-        <a:scrgbClr r="0" g="0" b="0"/>
-      </a:lnRef>
-      <a:fillRef idx="1">
-        <a:scrgbClr r="0" g="0" b="0"/>
-      </a:fillRef>
-      <a:effectRef idx="0">
-        <a:scrgbClr r="0" g="0" b="0"/>
-      </a:effectRef>
-      <a:fontRef idx="minor"/>
-    </dgm:style>
-  </dgm:styleLbl>
-  <dgm:styleLbl name="solidAlignAcc1">
-    <dgm:scene3d>
-      <a:camera prst="orthographicFront"/>
-      <a:lightRig rig="threePt" dir="t"/>
-    </dgm:scene3d>
-    <dgm:sp3d/>
-    <dgm:txPr/>
-    <dgm:style>
-      <a:lnRef idx="2">
-        <a:scrgbClr r="0" g="0" b="0"/>
-      </a:lnRef>
-      <a:fillRef idx="1">
-        <a:scrgbClr r="0" g="0" b="0"/>
-      </a:fillRef>
-      <a:effectRef idx="0">
-        <a:scrgbClr r="0" g="0" b="0"/>
-      </a:effectRef>
-      <a:fontRef idx="minor"/>
-    </dgm:style>
-  </dgm:styleLbl>
-  <dgm:styleLbl name="solidBgAcc1">
-    <dgm:scene3d>
-      <a:camera prst="orthographicFront"/>
-      <a:lightRig rig="threePt" dir="t"/>
-    </dgm:scene3d>
-    <dgm:sp3d/>
-    <dgm:txPr/>
-    <dgm:style>
-      <a:lnRef idx="2">
-        <a:scrgbClr r="0" g="0" b="0"/>
-      </a:lnRef>
-      <a:fillRef idx="1">
-        <a:scrgbClr r="0" g="0" b="0"/>
-      </a:fillRef>
-      <a:effectRef idx="0">
-        <a:scrgbClr r="0" g="0" b="0"/>
-      </a:effectRef>
-      <a:fontRef idx="minor"/>
-    </dgm:style>
-  </dgm:styleLbl>
-  <dgm:styleLbl name="fgAccFollowNode1">
-    <dgm:scene3d>
-      <a:camera prst="orthographicFront"/>
-      <a:lightRig rig="threePt" dir="t"/>
-    </dgm:scene3d>
-    <dgm:sp3d/>
-    <dgm:txPr/>
-    <dgm:style>
-      <a:lnRef idx="2">
-        <a:scrgbClr r="0" g="0" b="0"/>
-      </a:lnRef>
-      <a:fillRef idx="1">
-        <a:scrgbClr r="0" g="0" b="0"/>
-      </a:fillRef>
-      <a:effectRef idx="0">
-        <a:scrgbClr r="0" g="0" b="0"/>
-      </a:effectRef>
-      <a:fontRef idx="minor"/>
-    </dgm:style>
-  </dgm:styleLbl>
-  <dgm:styleLbl name="alignAccFollowNode1">
-    <dgm:scene3d>
-      <a:camera prst="orthographicFront"/>
-      <a:lightRig rig="threePt" dir="t"/>
-    </dgm:scene3d>
-    <dgm:sp3d/>
-    <dgm:txPr/>
-    <dgm:style>
-      <a:lnRef idx="2">
-        <a:scrgbClr r="0" g="0" b="0"/>
-      </a:lnRef>
-      <a:fillRef idx="1">
-        <a:scrgbClr r="0" g="0" b="0"/>
-      </a:fillRef>
-      <a:effectRef idx="0">
-        <a:scrgbClr r="0" g="0" b="0"/>
-      </a:effectRef>
-      <a:fontRef idx="minor"/>
-    </dgm:style>
-  </dgm:styleLbl>
-  <dgm:styleLbl name="bgAccFollowNode1">
-    <dgm:scene3d>
-      <a:camera prst="orthographicFront"/>
-      <a:lightRig rig="threePt" dir="t"/>
-    </dgm:scene3d>
-    <dgm:sp3d/>
-    <dgm:txPr/>
-    <dgm:style>
-      <a:lnRef idx="2">
-        <a:scrgbClr r="0" g="0" b="0"/>
-      </a:lnRef>
-      <a:fillRef idx="1">
-        <a:scrgbClr r="0" g="0" b="0"/>
-      </a:fillRef>
-      <a:effectRef idx="0">
-        <a:scrgbClr r="0" g="0" b="0"/>
-      </a:effectRef>
-      <a:fontRef idx="minor"/>
-    </dgm:style>
-  </dgm:styleLbl>
-  <dgm:styleLbl name="fgAcc0">
-    <dgm:scene3d>
-      <a:camera prst="orthographicFront"/>
-      <a:lightRig rig="threePt" dir="t"/>
-    </dgm:scene3d>
-    <dgm:sp3d/>
-    <dgm:txPr/>
-    <dgm:style>
-      <a:lnRef idx="2">
-        <a:scrgbClr r="0" g="0" b="0"/>
-      </a:lnRef>
-      <a:fillRef idx="1">
-        <a:scrgbClr r="0" g="0" b="0"/>
-      </a:fillRef>
-      <a:effectRef idx="0">
-        <a:scrgbClr r="0" g="0" b="0"/>
-      </a:effectRef>
-      <a:fontRef idx="minor"/>
-    </dgm:style>
-  </dgm:styleLbl>
-  <dgm:styleLbl name="fgAcc2">
-    <dgm:scene3d>
-      <a:camera prst="orthographicFront"/>
-      <a:lightRig rig="threePt" dir="t"/>
-    </dgm:scene3d>
-    <dgm:sp3d/>
-    <dgm:txPr/>
-    <dgm:style>
-      <a:lnRef idx="2">
-        <a:scrgbClr r="0" g="0" b="0"/>
-      </a:lnRef>
-      <a:fillRef idx="1">
-        <a:scrgbClr r="0" g="0" b="0"/>
-      </a:fillRef>
-      <a:effectRef idx="0">
-        <a:scrgbClr r="0" g="0" b="0"/>
-      </a:effectRef>
-      <a:fontRef idx="minor"/>
-    </dgm:style>
-  </dgm:styleLbl>
-  <dgm:styleLbl name="fgAcc3">
-    <dgm:scene3d>
-      <a:camera prst="orthographicFront"/>
-      <a:lightRig rig="threePt" dir="t"/>
-    </dgm:scene3d>
-    <dgm:sp3d/>
-    <dgm:txPr/>
-    <dgm:style>
-      <a:lnRef idx="2">
-        <a:scrgbClr r="0" g="0" b="0"/>
-      </a:lnRef>
-      <a:fillRef idx="1">
-        <a:scrgbClr r="0" g="0" b="0"/>
-      </a:fillRef>
-      <a:effectRef idx="0">
-        <a:scrgbClr r="0" g="0" b="0"/>
-      </a:effectRef>
-      <a:fontRef idx="minor"/>
-    </dgm:style>
-  </dgm:styleLbl>
-  <dgm:styleLbl name="fgAcc4">
-    <dgm:scene3d>
-      <a:camera prst="orthographicFront"/>
-      <a:lightRig rig="threePt" dir="t"/>
-    </dgm:scene3d>
-    <dgm:sp3d/>
-    <dgm:txPr/>
-    <dgm:style>
-      <a:lnRef idx="2">
-        <a:scrgbClr r="0" g="0" b="0"/>
-      </a:lnRef>
-      <a:fillRef idx="1">
-        <a:scrgbClr r="0" g="0" b="0"/>
-      </a:fillRef>
-      <a:effectRef idx="0">
-        <a:scrgbClr r="0" g="0" b="0"/>
-      </a:effectRef>
-      <a:fontRef idx="minor"/>
-    </dgm:style>
-  </dgm:styleLbl>
-  <dgm:styleLbl name="bgShp">
-    <dgm:scene3d>
-      <a:camera prst="orthographicFront"/>
-      <a:lightRig rig="threePt" dir="t"/>
-    </dgm:scene3d>
-    <dgm:sp3d/>
-    <dgm:txPr/>
-    <dgm:style>
-      <a:lnRef idx="0">
-        <a:scrgbClr r="0" g="0" b="0"/>
-      </a:lnRef>
-      <a:fillRef idx="1">
-        <a:scrgbClr r="0" g="0" b="0"/>
-      </a:fillRef>
-      <a:effectRef idx="0">
-        <a:scrgbClr r="0" g="0" b="0"/>
-      </a:effectRef>
-      <a:fontRef idx="minor"/>
-    </dgm:style>
-  </dgm:styleLbl>
-  <dgm:styleLbl name="dkBgShp">
-    <dgm:scene3d>
-      <a:camera prst="orthographicFront"/>
-      <a:lightRig rig="threePt" dir="t"/>
-    </dgm:scene3d>
-    <dgm:sp3d/>
-    <dgm:txPr/>
-    <dgm:style>
-      <a:lnRef idx="0">
-        <a:scrgbClr r="0" g="0" b="0"/>
-      </a:lnRef>
-      <a:fillRef idx="1">
-        <a:scrgbClr r="0" g="0" b="0"/>
-      </a:fillRef>
-      <a:effectRef idx="0">
-        <a:scrgbClr r="0" g="0" b="0"/>
-      </a:effectRef>
-      <a:fontRef idx="minor"/>
-    </dgm:style>
-  </dgm:styleLbl>
-  <dgm:styleLbl name="trBgShp">
-    <dgm:scene3d>
-      <a:camera prst="orthographicFront"/>
-      <a:lightRig rig="threePt" dir="t"/>
-    </dgm:scene3d>
-    <dgm:sp3d/>
-    <dgm:txPr/>
-    <dgm:style>
-      <a:lnRef idx="0">
-        <a:scrgbClr r="0" g="0" b="0"/>
-      </a:lnRef>
-      <a:fillRef idx="1">
-        <a:scrgbClr r="0" g="0" b="0"/>
-      </a:fillRef>
-      <a:effectRef idx="0">
-        <a:scrgbClr r="0" g="0" b="0"/>
-      </a:effectRef>
-      <a:fontRef idx="minor"/>
-    </dgm:style>
-  </dgm:styleLbl>
-  <dgm:styleLbl name="fgShp">
-    <dgm:scene3d>
-      <a:camera prst="orthographicFront"/>
-      <a:lightRig rig="threePt" dir="t"/>
-    </dgm:scene3d>
-    <dgm:sp3d/>
-    <dgm:txPr/>
-    <dgm:style>
-      <a:lnRef idx="2">
-        <a:scrgbClr r="0" g="0" b="0"/>
-      </a:lnRef>
-      <a:fillRef idx="1">
-        <a:scrgbClr r="0" g="0" b="0"/>
-      </a:fillRef>
-      <a:effectRef idx="0">
-        <a:scrgbClr r="0" g="0" b="0"/>
-      </a:effectRef>
-      <a:fontRef idx="minor"/>
-    </dgm:style>
-  </dgm:styleLbl>
-  <dgm:styleLbl name="revTx">
-    <dgm:scene3d>
-      <a:camera prst="orthographicFront"/>
-      <a:lightRig rig="threePt" dir="t"/>
-    </dgm:scene3d>
-    <dgm:sp3d/>
-    <dgm:txPr/>
-    <dgm:style>
-      <a:lnRef idx="0">
-        <a:scrgbClr r="0" g="0" b="0"/>
-      </a:lnRef>
-      <a:fillRef idx="0">
-        <a:scrgbClr r="0" g="0" b="0"/>
-      </a:fillRef>
-      <a:effectRef idx="0">
-        <a:scrgbClr r="0" g="0" b="0"/>
-      </a:effectRef>
-      <a:fontRef idx="minor"/>
-    </dgm:style>
-  </dgm:styleLbl>
-</dgm:styleDef>
-</file>
-
-<file path=ppt/diagrams/quickStyle2.xml><?xml version="1.0" encoding="utf-8"?>
-<dgm:styleDef xmlns:dgm="http://schemas.openxmlformats.org/drawingml/2006/diagram" xmlns:a="http://schemas.openxmlformats.org/drawingml/2006/main" uniqueId="urn:microsoft.com/office/officeart/2005/8/quickstyle/simple1">
-  <dgm:title val=""/>
-  <dgm:desc val=""/>
-  <dgm:catLst>
-    <dgm:cat type="simple" pri="10100"/>
-  </dgm:catLst>
-  <dgm:scene3d>
-    <a:camera prst="orthographicFront"/>
-    <a:lightRig rig="threePt" dir="t"/>
-  </dgm:scene3d>
-  <dgm:styleLbl name="node0">
-    <dgm:scene3d>
-      <a:camera prst="orthographicFront"/>
-      <a:lightRig rig="threePt" dir="t"/>
-    </dgm:scene3d>
-    <dgm:sp3d/>
-    <dgm:txPr/>
-    <dgm:style>
-      <a:lnRef idx="2">
-        <a:scrgbClr r="0" g="0" b="0"/>
-      </a:lnRef>
-      <a:fillRef idx="1">
-        <a:scrgbClr r="0" g="0" b="0"/>
-      </a:fillRef>
-      <a:effectRef idx="0">
-        <a:scrgbClr r="0" g="0" b="0"/>
-      </a:effectRef>
-      <a:fontRef idx="minor">
-        <a:schemeClr val="lt1"/>
-      </a:fontRef>
-    </dgm:style>
-  </dgm:styleLbl>
-  <dgm:styleLbl name="lnNode1">
-    <dgm:scene3d>
-      <a:camera prst="orthographicFront"/>
-      <a:lightRig rig="threePt" dir="t"/>
-    </dgm:scene3d>
-    <dgm:sp3d/>
-    <dgm:txPr/>
-    <dgm:style>
-      <a:lnRef idx="2">
-        <a:scrgbClr r="0" g="0" b="0"/>
-      </a:lnRef>
-      <a:fillRef idx="1">
-        <a:scrgbClr r="0" g="0" b="0"/>
-      </a:fillRef>
-      <a:effectRef idx="0">
-        <a:scrgbClr r="0" g="0" b="0"/>
-      </a:effectRef>
-      <a:fontRef idx="minor">
-        <a:schemeClr val="lt1"/>
-      </a:fontRef>
-    </dgm:style>
-  </dgm:styleLbl>
-  <dgm:styleLbl name="vennNode1">
-    <dgm:scene3d>
-      <a:camera prst="orthographicFront"/>
-      <a:lightRig rig="threePt" dir="t"/>
-    </dgm:scene3d>
-    <dgm:sp3d/>
-    <dgm:txPr/>
-    <dgm:style>
-      <a:lnRef idx="2">
-        <a:scrgbClr r="0" g="0" b="0"/>
-      </a:lnRef>
-      <a:fillRef idx="1">
-        <a:scrgbClr r="0" g="0" b="0"/>
-      </a:fillRef>
-      <a:effectRef idx="0">
-        <a:scrgbClr r="0" g="0" b="0"/>
-      </a:effectRef>
-      <a:fontRef idx="minor">
-        <a:schemeClr val="tx1"/>
-      </a:fontRef>
-    </dgm:style>
-  </dgm:styleLbl>
-  <dgm:styleLbl name="alignNode1">
-    <dgm:scene3d>
-      <a:camera prst="orthographicFront"/>
-      <a:lightRig rig="threePt" dir="t"/>
-    </dgm:scene3d>
-    <dgm:sp3d/>
-    <dgm:txPr/>
-    <dgm:style>
-      <a:lnRef idx="2">
-        <a:scrgbClr r="0" g="0" b="0"/>
-      </a:lnRef>
-      <a:fillRef idx="1">
-        <a:scrgbClr r="0" g="0" b="0"/>
-      </a:fillRef>
-      <a:effectRef idx="0">
-        <a:scrgbClr r="0" g="0" b="0"/>
-      </a:effectRef>
-      <a:fontRef idx="minor">
-        <a:schemeClr val="lt1"/>
-      </a:fontRef>
-    </dgm:style>
-  </dgm:styleLbl>
-  <dgm:styleLbl name="node1">
-    <dgm:scene3d>
-      <a:camera prst="orthographicFront"/>
-      <a:lightRig rig="threePt" dir="t"/>
-    </dgm:scene3d>
-    <dgm:sp3d/>
-    <dgm:txPr/>
-    <dgm:style>
-      <a:lnRef idx="2">
-        <a:scrgbClr r="0" g="0" b="0"/>
-      </a:lnRef>
-      <a:fillRef idx="1">
-        <a:scrgbClr r="0" g="0" b="0"/>
-      </a:fillRef>
-      <a:effectRef idx="0">
-        <a:scrgbClr r="0" g="0" b="0"/>
-      </a:effectRef>
-      <a:fontRef idx="minor">
-        <a:schemeClr val="lt1"/>
-      </a:fontRef>
-    </dgm:style>
-  </dgm:styleLbl>
-  <dgm:styleLbl name="node2">
-    <dgm:scene3d>
-      <a:camera prst="orthographicFront"/>
-      <a:lightRig rig="threePt" dir="t"/>
-    </dgm:scene3d>
-    <dgm:sp3d/>
-    <dgm:txPr/>
-    <dgm:style>
-      <a:lnRef idx="2">
-        <a:scrgbClr r="0" g="0" b="0"/>
-      </a:lnRef>
-      <a:fillRef idx="1">
-        <a:scrgbClr r="0" g="0" b="0"/>
-      </a:fillRef>
-      <a:effectRef idx="0">
-        <a:scrgbClr r="0" g="0" b="0"/>
-      </a:effectRef>
-      <a:fontRef idx="minor">
-        <a:schemeClr val="lt1"/>
-      </a:fontRef>
-    </dgm:style>
-  </dgm:styleLbl>
-  <dgm:styleLbl name="node3">
-    <dgm:scene3d>
-      <a:camera prst="orthographicFront"/>
-      <a:lightRig rig="threePt" dir="t"/>
-    </dgm:scene3d>
-    <dgm:sp3d/>
-    <dgm:txPr/>
-    <dgm:style>
-      <a:lnRef idx="2">
-        <a:scrgbClr r="0" g="0" b="0"/>
-      </a:lnRef>
-      <a:fillRef idx="1">
-        <a:scrgbClr r="0" g="0" b="0"/>
-      </a:fillRef>
-      <a:effectRef idx="0">
-        <a:scrgbClr r="0" g="0" b="0"/>
-      </a:effectRef>
-      <a:fontRef idx="minor">
-        <a:schemeClr val="lt1"/>
-      </a:fontRef>
-    </dgm:style>
-  </dgm:styleLbl>
-  <dgm:styleLbl name="node4">
-    <dgm:scene3d>
-      <a:camera prst="orthographicFront"/>
-      <a:lightRig rig="threePt" dir="t"/>
-    </dgm:scene3d>
-    <dgm:sp3d/>
-    <dgm:txPr/>
-    <dgm:style>
-      <a:lnRef idx="2">
-        <a:scrgbClr r="0" g="0" b="0"/>
-      </a:lnRef>
-      <a:fillRef idx="1">
-        <a:scrgbClr r="0" g="0" b="0"/>
-      </a:fillRef>
-      <a:effectRef idx="0">
-        <a:scrgbClr r="0" g="0" b="0"/>
-      </a:effectRef>
-      <a:fontRef idx="minor">
-        <a:schemeClr val="lt1"/>
-      </a:fontRef>
-    </dgm:style>
-  </dgm:styleLbl>
-  <dgm:styleLbl name="fgImgPlace1">
-    <dgm:scene3d>
-      <a:camera prst="orthographicFront"/>
-      <a:lightRig rig="threePt" dir="t"/>
-    </dgm:scene3d>
-    <dgm:sp3d/>
-    <dgm:txPr/>
-    <dgm:style>
-      <a:lnRef idx="2">
-        <a:scrgbClr r="0" g="0" b="0"/>
-      </a:lnRef>
-      <a:fillRef idx="1">
-        <a:scrgbClr r="0" g="0" b="0"/>
-      </a:fillRef>
-      <a:effectRef idx="0">
-        <a:scrgbClr r="0" g="0" b="0"/>
-      </a:effectRef>
-      <a:fontRef idx="minor"/>
-    </dgm:style>
-  </dgm:styleLbl>
-  <dgm:styleLbl name="alignImgPlace1">
-    <dgm:scene3d>
-      <a:camera prst="orthographicFront"/>
-      <a:lightRig rig="threePt" dir="t"/>
-    </dgm:scene3d>
-    <dgm:sp3d/>
-    <dgm:txPr/>
-    <dgm:style>
-      <a:lnRef idx="2">
-        <a:scrgbClr r="0" g="0" b="0"/>
-      </a:lnRef>
-      <a:fillRef idx="1">
-        <a:scrgbClr r="0" g="0" b="0"/>
-      </a:fillRef>
-      <a:effectRef idx="0">
-        <a:scrgbClr r="0" g="0" b="0"/>
-      </a:effectRef>
-      <a:fontRef idx="minor"/>
-    </dgm:style>
-  </dgm:styleLbl>
-  <dgm:styleLbl name="bgImgPlace1">
-    <dgm:scene3d>
-      <a:camera prst="orthographicFront"/>
-      <a:lightRig rig="threePt" dir="t"/>
-    </dgm:scene3d>
-    <dgm:sp3d/>
-    <dgm:txPr/>
-    <dgm:style>
-      <a:lnRef idx="2">
-        <a:scrgbClr r="0" g="0" b="0"/>
-      </a:lnRef>
-      <a:fillRef idx="1">
-        <a:scrgbClr r="0" g="0" b="0"/>
-      </a:fillRef>
-      <a:effectRef idx="0">
-        <a:scrgbClr r="0" g="0" b="0"/>
-      </a:effectRef>
-      <a:fontRef idx="minor"/>
-    </dgm:style>
-  </dgm:styleLbl>
-  <dgm:styleLbl name="sibTrans2D1">
-    <dgm:scene3d>
-      <a:camera prst="orthographicFront"/>
-      <a:lightRig rig="threePt" dir="t"/>
-    </dgm:scene3d>
-    <dgm:sp3d/>
-    <dgm:txPr/>
-    <dgm:style>
-      <a:lnRef idx="0">
-        <a:scrgbClr r="0" g="0" b="0"/>
-      </a:lnRef>
-      <a:fillRef idx="1">
-        <a:scrgbClr r="0" g="0" b="0"/>
-      </a:fillRef>
-      <a:effectRef idx="0">
-        <a:scrgbClr r="0" g="0" b="0"/>
-      </a:effectRef>
-      <a:fontRef idx="minor">
-        <a:schemeClr val="lt1"/>
-      </a:fontRef>
-    </dgm:style>
-  </dgm:styleLbl>
-  <dgm:styleLbl name="fgSibTrans2D1">
-    <dgm:scene3d>
-      <a:camera prst="orthographicFront"/>
-      <a:lightRig rig="threePt" dir="t"/>
-    </dgm:scene3d>
-    <dgm:sp3d/>
-    <dgm:txPr/>
-    <dgm:style>
-      <a:lnRef idx="0">
-        <a:scrgbClr r="0" g="0" b="0"/>
-      </a:lnRef>
-      <a:fillRef idx="1">
-        <a:scrgbClr r="0" g="0" b="0"/>
-      </a:fillRef>
-      <a:effectRef idx="0">
-        <a:scrgbClr r="0" g="0" b="0"/>
-      </a:effectRef>
-      <a:fontRef idx="minor">
-        <a:schemeClr val="lt1"/>
-      </a:fontRef>
-    </dgm:style>
-  </dgm:styleLbl>
-  <dgm:styleLbl name="bgSibTrans2D1">
-    <dgm:scene3d>
-      <a:camera prst="orthographicFront"/>
-      <a:lightRig rig="threePt" dir="t"/>
-    </dgm:scene3d>
-    <dgm:sp3d/>
-    <dgm:txPr/>
-    <dgm:style>
-      <a:lnRef idx="0">
-        <a:scrgbClr r="0" g="0" b="0"/>
-      </a:lnRef>
-      <a:fillRef idx="1">
-        <a:scrgbClr r="0" g="0" b="0"/>
-      </a:fillRef>
-      <a:effectRef idx="0">
-        <a:scrgbClr r="0" g="0" b="0"/>
-      </a:effectRef>
-      <a:fontRef idx="minor">
-        <a:schemeClr val="lt1"/>
-      </a:fontRef>
-    </dgm:style>
-  </dgm:styleLbl>
-  <dgm:styleLbl name="sibTrans1D1">
-    <dgm:scene3d>
-      <a:camera prst="orthographicFront"/>
-      <a:lightRig rig="threePt" dir="t"/>
-    </dgm:scene3d>
-    <dgm:sp3d/>
-    <dgm:txPr/>
-    <dgm:style>
-      <a:lnRef idx="1">
-        <a:scrgbClr r="0" g="0" b="0"/>
-      </a:lnRef>
-      <a:fillRef idx="0">
-        <a:scrgbClr r="0" g="0" b="0"/>
-      </a:fillRef>
-      <a:effectRef idx="0">
-        <a:scrgbClr r="0" g="0" b="0"/>
-      </a:effectRef>
-      <a:fontRef idx="minor"/>
-    </dgm:style>
-  </dgm:styleLbl>
-  <dgm:styleLbl name="callout">
-    <dgm:scene3d>
-      <a:camera prst="orthographicFront"/>
-      <a:lightRig rig="threePt" dir="t"/>
-    </dgm:scene3d>
-    <dgm:sp3d/>
-    <dgm:txPr/>
-    <dgm:style>
-      <a:lnRef idx="2">
-        <a:scrgbClr r="0" g="0" b="0"/>
-      </a:lnRef>
-      <a:fillRef idx="1">
-        <a:scrgbClr r="0" g="0" b="0"/>
-      </a:fillRef>
-      <a:effectRef idx="0">
-        <a:scrgbClr r="0" g="0" b="0"/>
-      </a:effectRef>
-      <a:fontRef idx="minor"/>
-    </dgm:style>
-  </dgm:styleLbl>
-  <dgm:styleLbl name="asst0">
-    <dgm:scene3d>
-      <a:camera prst="orthographicFront"/>
-      <a:lightRig rig="threePt" dir="t"/>
-    </dgm:scene3d>
-    <dgm:sp3d/>
-    <dgm:txPr/>
-    <dgm:style>
-      <a:lnRef idx="2">
-        <a:scrgbClr r="0" g="0" b="0"/>
-      </a:lnRef>
-      <a:fillRef idx="1">
-        <a:scrgbClr r="0" g="0" b="0"/>
-      </a:fillRef>
-      <a:effectRef idx="0">
-        <a:scrgbClr r="0" g="0" b="0"/>
-      </a:effectRef>
-      <a:fontRef idx="minor">
-        <a:schemeClr val="lt1"/>
-      </a:fontRef>
-    </dgm:style>
-  </dgm:styleLbl>
-  <dgm:styleLbl name="asst1">
-    <dgm:scene3d>
-      <a:camera prst="orthographicFront"/>
-      <a:lightRig rig="threePt" dir="t"/>
-    </dgm:scene3d>
-    <dgm:sp3d/>
-    <dgm:txPr/>
-    <dgm:style>
-      <a:lnRef idx="2">
-        <a:scrgbClr r="0" g="0" b="0"/>
-      </a:lnRef>
-      <a:fillRef idx="1">
-        <a:scrgbClr r="0" g="0" b="0"/>
-      </a:fillRef>
-      <a:effectRef idx="0">
-        <a:scrgbClr r="0" g="0" b="0"/>
-      </a:effectRef>
-      <a:fontRef idx="minor">
-        <a:schemeClr val="lt1"/>
-      </a:fontRef>
-    </dgm:style>
-  </dgm:styleLbl>
-  <dgm:styleLbl name="asst2">
-    <dgm:scene3d>
-      <a:camera prst="orthographicFront"/>
-      <a:lightRig rig="threePt" dir="t"/>
-    </dgm:scene3d>
-    <dgm:sp3d/>
-    <dgm:txPr/>
-    <dgm:style>
-      <a:lnRef idx="2">
-        <a:scrgbClr r="0" g="0" b="0"/>
-      </a:lnRef>
-      <a:fillRef idx="1">
-        <a:scrgbClr r="0" g="0" b="0"/>
-      </a:fillRef>
-      <a:effectRef idx="0">
-        <a:scrgbClr r="0" g="0" b="0"/>
-      </a:effectRef>
-      <a:fontRef idx="minor">
-        <a:schemeClr val="lt1"/>
-      </a:fontRef>
-    </dgm:style>
-  </dgm:styleLbl>
-  <dgm:styleLbl name="asst3">
-    <dgm:scene3d>
-      <a:camera prst="orthographicFront"/>
-      <a:lightRig rig="threePt" dir="t"/>
-    </dgm:scene3d>
-    <dgm:sp3d/>
-    <dgm:txPr/>
-    <dgm:style>
-      <a:lnRef idx="2">
-        <a:scrgbClr r="0" g="0" b="0"/>
-      </a:lnRef>
-      <a:fillRef idx="1">
-        <a:scrgbClr r="0" g="0" b="0"/>
-      </a:fillRef>
-      <a:effectRef idx="0">
-        <a:scrgbClr r="0" g="0" b="0"/>
-      </a:effectRef>
-      <a:fontRef idx="minor">
-        <a:schemeClr val="lt1"/>
-      </a:fontRef>
-    </dgm:style>
-  </dgm:styleLbl>
-  <dgm:styleLbl name="asst4">
-    <dgm:scene3d>
-      <a:camera prst="orthographicFront"/>
-      <a:lightRig rig="threePt" dir="t"/>
-    </dgm:scene3d>
-    <dgm:sp3d/>
-    <dgm:txPr/>
-    <dgm:style>
-      <a:lnRef idx="2">
-        <a:scrgbClr r="0" g="0" b="0"/>
-      </a:lnRef>
-      <a:fillRef idx="1">
-        <a:scrgbClr r="0" g="0" b="0"/>
-      </a:fillRef>
-      <a:effectRef idx="0">
-        <a:scrgbClr r="0" g="0" b="0"/>
-      </a:effectRef>
-      <a:fontRef idx="minor">
-        <a:schemeClr val="lt1"/>
-      </a:fontRef>
-    </dgm:style>
-  </dgm:styleLbl>
-  <dgm:styleLbl name="parChTrans2D1">
-    <dgm:scene3d>
-      <a:camera prst="orthographicFront"/>
-      <a:lightRig rig="threePt" dir="t"/>
-    </dgm:scene3d>
-    <dgm:sp3d/>
-    <dgm:txPr/>
-    <dgm:style>
-      <a:lnRef idx="2">
-        <a:scrgbClr r="0" g="0" b="0"/>
-      </a:lnRef>
-      <a:fillRef idx="1">
-        <a:scrgbClr r="0" g="0" b="0"/>
-      </a:fillRef>
-      <a:effectRef idx="0">
-        <a:scrgbClr r="0" g="0" b="0"/>
-      </a:effectRef>
-      <a:fontRef idx="minor">
-        <a:schemeClr val="lt1"/>
-      </a:fontRef>
-    </dgm:style>
-  </dgm:styleLbl>
-  <dgm:styleLbl name="parChTrans2D2">
-    <dgm:scene3d>
-      <a:camera prst="orthographicFront"/>
-      <a:lightRig rig="threePt" dir="t"/>
-    </dgm:scene3d>
-    <dgm:sp3d/>
-    <dgm:txPr/>
-    <dgm:style>
-      <a:lnRef idx="2">
-        <a:scrgbClr r="0" g="0" b="0"/>
-      </a:lnRef>
-      <a:fillRef idx="1">
-        <a:scrgbClr r="0" g="0" b="0"/>
-      </a:fillRef>
-      <a:effectRef idx="0">
-        <a:scrgbClr r="0" g="0" b="0"/>
-      </a:effectRef>
-      <a:fontRef idx="minor">
-        <a:schemeClr val="lt1"/>
-      </a:fontRef>
-    </dgm:style>
-  </dgm:styleLbl>
-  <dgm:styleLbl name="parChTrans2D3">
-    <dgm:scene3d>
-      <a:camera prst="orthographicFront"/>
-      <a:lightRig rig="threePt" dir="t"/>
-    </dgm:scene3d>
-    <dgm:sp3d/>
-    <dgm:txPr/>
-    <dgm:style>
-      <a:lnRef idx="2">
-        <a:scrgbClr r="0" g="0" b="0"/>
-      </a:lnRef>
-      <a:fillRef idx="1">
-        <a:scrgbClr r="0" g="0" b="0"/>
-      </a:fillRef>
-      <a:effectRef idx="0">
-        <a:scrgbClr r="0" g="0" b="0"/>
-      </a:effectRef>
-      <a:fontRef idx="minor">
-        <a:schemeClr val="lt1"/>
-      </a:fontRef>
-    </dgm:style>
-  </dgm:styleLbl>
-  <dgm:styleLbl name="parChTrans2D4">
-    <dgm:scene3d>
-      <a:camera prst="orthographicFront"/>
-      <a:lightRig rig="threePt" dir="t"/>
-    </dgm:scene3d>
-    <dgm:sp3d/>
-    <dgm:txPr/>
-    <dgm:style>
-      <a:lnRef idx="2">
-        <a:scrgbClr r="0" g="0" b="0"/>
-      </a:lnRef>
-      <a:fillRef idx="1">
-        <a:scrgbClr r="0" g="0" b="0"/>
-      </a:fillRef>
-      <a:effectRef idx="0">
-        <a:scrgbClr r="0" g="0" b="0"/>
-      </a:effectRef>
-      <a:fontRef idx="minor">
-        <a:schemeClr val="lt1"/>
-      </a:fontRef>
-    </dgm:style>
-  </dgm:styleLbl>
-  <dgm:styleLbl name="parChTrans1D1">
-    <dgm:scene3d>
-      <a:camera prst="orthographicFront"/>
-      <a:lightRig rig="threePt" dir="t"/>
-    </dgm:scene3d>
-    <dgm:sp3d/>
-    <dgm:txPr/>
-    <dgm:style>
-      <a:lnRef idx="2">
-        <a:scrgbClr r="0" g="0" b="0"/>
-      </a:lnRef>
-      <a:fillRef idx="0">
-        <a:scrgbClr r="0" g="0" b="0"/>
-      </a:fillRef>
-      <a:effectRef idx="0">
-        <a:scrgbClr r="0" g="0" b="0"/>
-      </a:effectRef>
-      <a:fontRef idx="minor"/>
-    </dgm:style>
-  </dgm:styleLbl>
-  <dgm:styleLbl name="parChTrans1D2">
-    <dgm:scene3d>
-      <a:camera prst="orthographicFront"/>
-      <a:lightRig rig="threePt" dir="t"/>
-    </dgm:scene3d>
-    <dgm:sp3d/>
-    <dgm:txPr/>
-    <dgm:style>
-      <a:lnRef idx="2">
-        <a:scrgbClr r="0" g="0" b="0"/>
-      </a:lnRef>
-      <a:fillRef idx="0">
-        <a:scrgbClr r="0" g="0" b="0"/>
-      </a:fillRef>
-      <a:effectRef idx="0">
-        <a:scrgbClr r="0" g="0" b="0"/>
-      </a:effectRef>
-      <a:fontRef idx="minor"/>
-    </dgm:style>
-  </dgm:styleLbl>
-  <dgm:styleLbl name="parChTrans1D3">
-    <dgm:scene3d>
-      <a:camera prst="orthographicFront"/>
-      <a:lightRig rig="threePt" dir="t"/>
-    </dgm:scene3d>
-    <dgm:sp3d/>
-    <dgm:txPr/>
-    <dgm:style>
-      <a:lnRef idx="2">
-        <a:scrgbClr r="0" g="0" b="0"/>
-      </a:lnRef>
-      <a:fillRef idx="0">
-        <a:scrgbClr r="0" g="0" b="0"/>
-      </a:fillRef>
-      <a:effectRef idx="0">
-        <a:scrgbClr r="0" g="0" b="0"/>
-      </a:effectRef>
-      <a:fontRef idx="minor"/>
-    </dgm:style>
-  </dgm:styleLbl>
-  <dgm:styleLbl name="parChTrans1D4">
-    <dgm:scene3d>
-      <a:camera prst="orthographicFront"/>
-      <a:lightRig rig="threePt" dir="t"/>
-    </dgm:scene3d>
-    <dgm:sp3d/>
-    <dgm:txPr/>
-    <dgm:style>
-      <a:lnRef idx="2">
-        <a:scrgbClr r="0" g="0" b="0"/>
-      </a:lnRef>
-      <a:fillRef idx="0">
-        <a:scrgbClr r="0" g="0" b="0"/>
-      </a:fillRef>
-      <a:effectRef idx="0">
-        <a:scrgbClr r="0" g="0" b="0"/>
-      </a:effectRef>
-      <a:fontRef idx="minor"/>
-    </dgm:style>
-  </dgm:styleLbl>
-  <dgm:styleLbl name="fgAcc1">
-    <dgm:scene3d>
-      <a:camera prst="orthographicFront"/>
-      <a:lightRig rig="threePt" dir="t"/>
-    </dgm:scene3d>
-    <dgm:sp3d/>
-    <dgm:txPr/>
-    <dgm:style>
-      <a:lnRef idx="2">
-        <a:scrgbClr r="0" g="0" b="0"/>
-      </a:lnRef>
-      <a:fillRef idx="1">
-        <a:scrgbClr r="0" g="0" b="0"/>
-      </a:fillRef>
-      <a:effectRef idx="0">
-        <a:scrgbClr r="0" g="0" b="0"/>
-      </a:effectRef>
-      <a:fontRef idx="minor"/>
-    </dgm:style>
-  </dgm:styleLbl>
-  <dgm:styleLbl name="conFgAcc1">
-    <dgm:scene3d>
-      <a:camera prst="orthographicFront"/>
-      <a:lightRig rig="threePt" dir="t"/>
-    </dgm:scene3d>
-    <dgm:sp3d/>
-    <dgm:txPr/>
-    <dgm:style>
-      <a:lnRef idx="2">
-        <a:scrgbClr r="0" g="0" b="0"/>
-      </a:lnRef>
-      <a:fillRef idx="1">
-        <a:scrgbClr r="0" g="0" b="0"/>
-      </a:fillRef>
-      <a:effectRef idx="0">
-        <a:scrgbClr r="0" g="0" b="0"/>
-      </a:effectRef>
-      <a:fontRef idx="minor"/>
-    </dgm:style>
-  </dgm:styleLbl>
-  <dgm:styleLbl name="alignAcc1">
-    <dgm:scene3d>
-      <a:camera prst="orthographicFront"/>
-      <a:lightRig rig="threePt" dir="t"/>
-    </dgm:scene3d>
-    <dgm:sp3d/>
-    <dgm:txPr/>
-    <dgm:style>
-      <a:lnRef idx="2">
-        <a:scrgbClr r="0" g="0" b="0"/>
-      </a:lnRef>
-      <a:fillRef idx="1">
-        <a:scrgbClr r="0" g="0" b="0"/>
-      </a:fillRef>
-      <a:effectRef idx="0">
-        <a:scrgbClr r="0" g="0" b="0"/>
-      </a:effectRef>
-      <a:fontRef idx="minor"/>
-    </dgm:style>
-  </dgm:styleLbl>
-  <dgm:styleLbl name="trAlignAcc1">
-    <dgm:scene3d>
-      <a:camera prst="orthographicFront"/>
-      <a:lightRig rig="threePt" dir="t"/>
-    </dgm:scene3d>
-    <dgm:sp3d/>
-    <dgm:txPr/>
-    <dgm:style>
-      <a:lnRef idx="1">
-        <a:scrgbClr r="0" g="0" b="0"/>
-      </a:lnRef>
-      <a:fillRef idx="1">
-        <a:scrgbClr r="0" g="0" b="0"/>
-      </a:fillRef>
-      <a:effectRef idx="0">
-        <a:scrgbClr r="0" g="0" b="0"/>
-      </a:effectRef>
-      <a:fontRef idx="minor"/>
-    </dgm:style>
-  </dgm:styleLbl>
-  <dgm:styleLbl name="bgAcc1">
-    <dgm:scene3d>
-      <a:camera prst="orthographicFront"/>
-      <a:lightRig rig="threePt" dir="t"/>
-    </dgm:scene3d>
-    <dgm:sp3d/>
-    <dgm:txPr/>
-    <dgm:style>
-      <a:lnRef idx="2">
-        <a:scrgbClr r="0" g="0" b="0"/>
-      </a:lnRef>
-      <a:fillRef idx="1">
-        <a:scrgbClr r="0" g="0" b="0"/>
-      </a:fillRef>
-      <a:effectRef idx="0">
-        <a:scrgbClr r="0" g="0" b="0"/>
-      </a:effectRef>
-      <a:fontRef idx="minor"/>
-    </dgm:style>
-  </dgm:styleLbl>
-  <dgm:styleLbl name="solidFgAcc1">
-    <dgm:scene3d>
-      <a:camera prst="orthographicFront"/>
-      <a:lightRig rig="threePt" dir="t"/>
-    </dgm:scene3d>
-    <dgm:sp3d/>
-    <dgm:txPr/>
-    <dgm:style>
-      <a:lnRef idx="2">
-        <a:scrgbClr r="0" g="0" b="0"/>
-      </a:lnRef>
-      <a:fillRef idx="1">
-        <a:scrgbClr r="0" g="0" b="0"/>
-      </a:fillRef>
-      <a:effectRef idx="0">
-        <a:scrgbClr r="0" g="0" b="0"/>
-      </a:effectRef>
-      <a:fontRef idx="minor"/>
-    </dgm:style>
-  </dgm:styleLbl>
-  <dgm:styleLbl name="solidAlignAcc1">
-    <dgm:scene3d>
-      <a:camera prst="orthographicFront"/>
-      <a:lightRig rig="threePt" dir="t"/>
-    </dgm:scene3d>
-    <dgm:sp3d/>
-    <dgm:txPr/>
-    <dgm:style>
-      <a:lnRef idx="2">
-        <a:scrgbClr r="0" g="0" b="0"/>
-      </a:lnRef>
-      <a:fillRef idx="1">
-        <a:scrgbClr r="0" g="0" b="0"/>
-      </a:fillRef>
-      <a:effectRef idx="0">
-        <a:scrgbClr r="0" g="0" b="0"/>
-      </a:effectRef>
-      <a:fontRef idx="minor"/>
-    </dgm:style>
-  </dgm:styleLbl>
-  <dgm:styleLbl name="solidBgAcc1">
-    <dgm:scene3d>
-      <a:camera prst="orthographicFront"/>
-      <a:lightRig rig="threePt" dir="t"/>
-    </dgm:scene3d>
-    <dgm:sp3d/>
-    <dgm:txPr/>
-    <dgm:style>
-      <a:lnRef idx="2">
-        <a:scrgbClr r="0" g="0" b="0"/>
-      </a:lnRef>
-      <a:fillRef idx="1">
-        <a:scrgbClr r="0" g="0" b="0"/>
-      </a:fillRef>
-      <a:effectRef idx="0">
-        <a:scrgbClr r="0" g="0" b="0"/>
-      </a:effectRef>
-      <a:fontRef idx="minor"/>
-    </dgm:style>
-  </dgm:styleLbl>
-  <dgm:styleLbl name="fgAccFollowNode1">
-    <dgm:scene3d>
-      <a:camera prst="orthographicFront"/>
-      <a:lightRig rig="threePt" dir="t"/>
-    </dgm:scene3d>
-    <dgm:sp3d/>
-    <dgm:txPr/>
-    <dgm:style>
-      <a:lnRef idx="2">
-        <a:scrgbClr r="0" g="0" b="0"/>
-      </a:lnRef>
-      <a:fillRef idx="1">
-        <a:scrgbClr r="0" g="0" b="0"/>
-      </a:fillRef>
-      <a:effectRef idx="0">
-        <a:scrgbClr r="0" g="0" b="0"/>
-      </a:effectRef>
-      <a:fontRef idx="minor"/>
-    </dgm:style>
-  </dgm:styleLbl>
-  <dgm:styleLbl name="alignAccFollowNode1">
-    <dgm:scene3d>
-      <a:camera prst="orthographicFront"/>
-      <a:lightRig rig="threePt" dir="t"/>
-    </dgm:scene3d>
-    <dgm:sp3d/>
-    <dgm:txPr/>
-    <dgm:style>
-      <a:lnRef idx="2">
-        <a:scrgbClr r="0" g="0" b="0"/>
-      </a:lnRef>
-      <a:fillRef idx="1">
-        <a:scrgbClr r="0" g="0" b="0"/>
-      </a:fillRef>
-      <a:effectRef idx="0">
-        <a:scrgbClr r="0" g="0" b="0"/>
-      </a:effectRef>
-      <a:fontRef idx="minor"/>
-    </dgm:style>
-  </dgm:styleLbl>
-  <dgm:styleLbl name="bgAccFollowNode1">
-    <dgm:scene3d>
-      <a:camera prst="orthographicFront"/>
-      <a:lightRig rig="threePt" dir="t"/>
-    </dgm:scene3d>
-    <dgm:sp3d/>
-    <dgm:txPr/>
-    <dgm:style>
-      <a:lnRef idx="2">
-        <a:scrgbClr r="0" g="0" b="0"/>
-      </a:lnRef>
-      <a:fillRef idx="1">
-        <a:scrgbClr r="0" g="0" b="0"/>
-      </a:fillRef>
-      <a:effectRef idx="0">
-        <a:scrgbClr r="0" g="0" b="0"/>
-      </a:effectRef>
-      <a:fontRef idx="minor"/>
-    </dgm:style>
-  </dgm:styleLbl>
-  <dgm:styleLbl name="fgAcc0">
-    <dgm:scene3d>
-      <a:camera prst="orthographicFront"/>
-      <a:lightRig rig="threePt" dir="t"/>
-    </dgm:scene3d>
-    <dgm:sp3d/>
-    <dgm:txPr/>
-    <dgm:style>
-      <a:lnRef idx="2">
-        <a:scrgbClr r="0" g="0" b="0"/>
-      </a:lnRef>
-      <a:fillRef idx="1">
-        <a:scrgbClr r="0" g="0" b="0"/>
-      </a:fillRef>
-      <a:effectRef idx="0">
-        <a:scrgbClr r="0" g="0" b="0"/>
-      </a:effectRef>
-      <a:fontRef idx="minor"/>
-    </dgm:style>
-  </dgm:styleLbl>
-  <dgm:styleLbl name="fgAcc2">
-    <dgm:scene3d>
-      <a:camera prst="orthographicFront"/>
-      <a:lightRig rig="threePt" dir="t"/>
-    </dgm:scene3d>
-    <dgm:sp3d/>
-    <dgm:txPr/>
-    <dgm:style>
-      <a:lnRef idx="2">
-        <a:scrgbClr r="0" g="0" b="0"/>
-      </a:lnRef>
-      <a:fillRef idx="1">
-        <a:scrgbClr r="0" g="0" b="0"/>
-      </a:fillRef>
-      <a:effectRef idx="0">
-        <a:scrgbClr r="0" g="0" b="0"/>
-      </a:effectRef>
-      <a:fontRef idx="minor"/>
-    </dgm:style>
-  </dgm:styleLbl>
-  <dgm:styleLbl name="fgAcc3">
-    <dgm:scene3d>
-      <a:camera prst="orthographicFront"/>
-      <a:lightRig rig="threePt" dir="t"/>
-    </dgm:scene3d>
-    <dgm:sp3d/>
-    <dgm:txPr/>
-    <dgm:style>
-      <a:lnRef idx="2">
-        <a:scrgbClr r="0" g="0" b="0"/>
-      </a:lnRef>
-      <a:fillRef idx="1">
-        <a:scrgbClr r="0" g="0" b="0"/>
-      </a:fillRef>
-      <a:effectRef idx="0">
-        <a:scrgbClr r="0" g="0" b="0"/>
-      </a:effectRef>
-      <a:fontRef idx="minor"/>
-    </dgm:style>
-  </dgm:styleLbl>
-  <dgm:styleLbl name="fgAcc4">
-    <dgm:scene3d>
-      <a:camera prst="orthographicFront"/>
-      <a:lightRig rig="threePt" dir="t"/>
-    </dgm:scene3d>
-    <dgm:sp3d/>
-    <dgm:txPr/>
-    <dgm:style>
-      <a:lnRef idx="2">
-        <a:scrgbClr r="0" g="0" b="0"/>
-      </a:lnRef>
-      <a:fillRef idx="1">
-        <a:scrgbClr r="0" g="0" b="0"/>
-      </a:fillRef>
-      <a:effectRef idx="0">
-        <a:scrgbClr r="0" g="0" b="0"/>
-      </a:effectRef>
-      <a:fontRef idx="minor"/>
-    </dgm:style>
-  </dgm:styleLbl>
-  <dgm:styleLbl name="bgShp">
-    <dgm:scene3d>
-      <a:camera prst="orthographicFront"/>
-      <a:lightRig rig="threePt" dir="t"/>
-    </dgm:scene3d>
-    <dgm:sp3d/>
-    <dgm:txPr/>
-    <dgm:style>
-      <a:lnRef idx="0">
-        <a:scrgbClr r="0" g="0" b="0"/>
-      </a:lnRef>
-      <a:fillRef idx="1">
-        <a:scrgbClr r="0" g="0" b="0"/>
-      </a:fillRef>
-      <a:effectRef idx="0">
-        <a:scrgbClr r="0" g="0" b="0"/>
-      </a:effectRef>
-      <a:fontRef idx="minor"/>
-    </dgm:style>
-  </dgm:styleLbl>
-  <dgm:styleLbl name="dkBgShp">
-    <dgm:scene3d>
-      <a:camera prst="orthographicFront"/>
-      <a:lightRig rig="threePt" dir="t"/>
-    </dgm:scene3d>
-    <dgm:sp3d/>
-    <dgm:txPr/>
-    <dgm:style>
-      <a:lnRef idx="0">
-        <a:scrgbClr r="0" g="0" b="0"/>
-      </a:lnRef>
-      <a:fillRef idx="1">
-        <a:scrgbClr r="0" g="0" b="0"/>
-      </a:fillRef>
-      <a:effectRef idx="0">
-        <a:scrgbClr r="0" g="0" b="0"/>
-      </a:effectRef>
-      <a:fontRef idx="minor"/>
-    </dgm:style>
-  </dgm:styleLbl>
-  <dgm:styleLbl name="trBgShp">
-    <dgm:scene3d>
-      <a:camera prst="orthographicFront"/>
-      <a:lightRig rig="threePt" dir="t"/>
-    </dgm:scene3d>
-    <dgm:sp3d/>
-    <dgm:txPr/>
-    <dgm:style>
-      <a:lnRef idx="0">
-        <a:scrgbClr r="0" g="0" b="0"/>
-      </a:lnRef>
-      <a:fillRef idx="1">
-        <a:scrgbClr r="0" g="0" b="0"/>
-      </a:fillRef>
-      <a:effectRef idx="0">
-        <a:scrgbClr r="0" g="0" b="0"/>
-      </a:effectRef>
-      <a:fontRef idx="minor"/>
-    </dgm:style>
-  </dgm:styleLbl>
-  <dgm:styleLbl name="fgShp">
-    <dgm:scene3d>
-      <a:camera prst="orthographicFront"/>
-      <a:lightRig rig="threePt" dir="t"/>
-    </dgm:scene3d>
-    <dgm:sp3d/>
-    <dgm:txPr/>
-    <dgm:style>
-      <a:lnRef idx="2">
-        <a:scrgbClr r="0" g="0" b="0"/>
-      </a:lnRef>
-      <a:fillRef idx="1">
-        <a:scrgbClr r="0" g="0" b="0"/>
-      </a:fillRef>
-      <a:effectRef idx="0">
-        <a:scrgbClr r="0" g="0" b="0"/>
-      </a:effectRef>
-      <a:fontRef idx="minor"/>
-    </dgm:style>
-  </dgm:styleLbl>
-  <dgm:styleLbl name="revTx">
-    <dgm:scene3d>
-      <a:camera prst="orthographicFront"/>
-      <a:lightRig rig="threePt" dir="t"/>
-    </dgm:scene3d>
-    <dgm:sp3d/>
-    <dgm:txPr/>
-    <dgm:style>
-      <a:lnRef idx="0">
-        <a:scrgbClr r="0" g="0" b="0"/>
-      </a:lnRef>
-      <a:fillRef idx="0">
-        <a:scrgbClr r="0" g="0" b="0"/>
-      </a:fillRef>
-      <a:effectRef idx="0">
-        <a:scrgbClr r="0" g="0" b="0"/>
-      </a:effectRef>
-      <a:fontRef idx="minor"/>
-    </dgm:style>
-  </dgm:styleLbl>
-</dgm:styleDef>
-</file>
-
 <file path=ppt/handoutMasters/handoutMaster1.xml><?xml version="1.0" encoding="utf-8"?>
 <p:handoutMaster xmlns:a="http://schemas.openxmlformats.org/drawingml/2006/main" xmlns:r="http://schemas.openxmlformats.org/officeDocument/2006/relationships" xmlns:p="http://schemas.openxmlformats.org/presentationml/2006/main">
   <p:cSld>
@@ -5983,7 +908,7 @@
             <a:fld id="{758E95B1-5ED0-4005-B293-784E4C93134E}" type="slidenum">
               <a:rPr lang="en-US" smtClean="0"/>
               <a:pPr/>
-              <a:t>29</a:t>
+              <a:t>18</a:t>
             </a:fld>
             <a:endParaRPr lang="en-US" dirty="0"/>
           </a:p>
@@ -6065,7 +990,7 @@
             <a:fld id="{758E95B1-5ED0-4005-B293-784E4C93134E}" type="slidenum">
               <a:rPr lang="en-US" smtClean="0"/>
               <a:pPr/>
-              <a:t>30</a:t>
+              <a:t>19</a:t>
             </a:fld>
             <a:endParaRPr lang="en-US" dirty="0"/>
           </a:p>
@@ -11811,65 +6736,9 @@
           <a:chExt cx="0" cy="0"/>
         </a:xfrm>
       </p:grpSpPr>
-      <p:sp>
-        <p:nvSpPr>
-          <p:cNvPr id="2" name="Title 1"/>
-          <p:cNvSpPr>
-            <a:spLocks noGrp="1"/>
-          </p:cNvSpPr>
-          <p:nvPr>
-            <p:ph type="title"/>
-          </p:nvPr>
-        </p:nvSpPr>
-        <p:spPr/>
-        <p:txBody>
-          <a:bodyPr/>
-          <a:lstStyle/>
-          <a:p>
-            <a:r>
-              <a:rPr lang="en-US" dirty="0" smtClean="0"/>
-              <a:t>Project Feasibility?</a:t>
-            </a:r>
-            <a:endParaRPr lang="en-US" dirty="0"/>
-          </a:p>
-        </p:txBody>
-      </p:sp>
       <p:pic>
         <p:nvPicPr>
-          <p:cNvPr id="2050" name="Picture 2"/>
-          <p:cNvPicPr>
-            <a:picLocks noChangeAspect="1" noChangeArrowheads="1"/>
-          </p:cNvPicPr>
-          <p:nvPr/>
-        </p:nvPicPr>
-        <p:blipFill>
-          <a:blip r:embed="rId2" cstate="print"/>
-          <a:srcRect/>
-          <a:stretch>
-            <a:fillRect/>
-          </a:stretch>
-        </p:blipFill>
-        <p:spPr bwMode="auto">
-          <a:xfrm>
-            <a:off x="1828800" y="1981200"/>
-            <a:ext cx="3810000" cy="3810000"/>
-          </a:xfrm>
-          <a:prstGeom prst="rect">
-            <a:avLst/>
-          </a:prstGeom>
-          <a:noFill/>
-          <a:ln w="9525">
-            <a:noFill/>
-            <a:miter lim="800000"/>
-            <a:headEnd/>
-            <a:tailEnd/>
-          </a:ln>
-          <a:effectLst/>
-        </p:spPr>
-      </p:pic>
-      <p:pic>
-        <p:nvPicPr>
-          <p:cNvPr id="6" name="Picture 4"/>
+          <p:cNvPr id="9" name="Picture 2"/>
           <p:cNvPicPr>
             <a:picLocks noChangeAspect="1" noChangeArrowheads="1"/>
           </p:cNvPicPr>
@@ -11884,8 +6753,8 @@
         </p:blipFill>
         <p:spPr bwMode="auto">
           <a:xfrm>
-            <a:off x="6096000" y="2743200"/>
-            <a:ext cx="1647825" cy="2381250"/>
+            <a:off x="4914900" y="2438400"/>
+            <a:ext cx="4076700" cy="3686175"/>
           </a:xfrm>
           <a:prstGeom prst="rect">
             <a:avLst/>
@@ -11897,9 +6766,286 @@
             <a:headEnd/>
             <a:tailEnd/>
           </a:ln>
-          <a:effectLst/>
         </p:spPr>
       </p:pic>
+      <p:sp>
+        <p:nvSpPr>
+          <p:cNvPr id="2" name="Title 1"/>
+          <p:cNvSpPr>
+            <a:spLocks noGrp="1"/>
+          </p:cNvSpPr>
+          <p:nvPr>
+            <p:ph type="title"/>
+          </p:nvPr>
+        </p:nvSpPr>
+        <p:spPr>
+          <a:xfrm>
+            <a:off x="457200" y="76200"/>
+            <a:ext cx="8229600" cy="1143000"/>
+          </a:xfrm>
+        </p:spPr>
+        <p:txBody>
+          <a:bodyPr/>
+          <a:lstStyle/>
+          <a:p>
+            <a:pPr lvl="0"/>
+            <a:r>
+              <a:rPr lang="en-US" dirty="0" smtClean="0"/>
+              <a:t>Project Charter</a:t>
+            </a:r>
+            <a:endParaRPr lang="en-US" dirty="0"/>
+          </a:p>
+        </p:txBody>
+      </p:sp>
+      <p:sp>
+        <p:nvSpPr>
+          <p:cNvPr id="12" name="Rectangle 11"/>
+          <p:cNvSpPr/>
+          <p:nvPr/>
+        </p:nvSpPr>
+        <p:spPr>
+          <a:xfrm>
+            <a:off x="304800" y="2362200"/>
+            <a:ext cx="5486400" cy="2739211"/>
+          </a:xfrm>
+          <a:prstGeom prst="rect">
+            <a:avLst/>
+          </a:prstGeom>
+        </p:spPr>
+        <p:txBody>
+          <a:bodyPr wrap="square">
+            <a:spAutoFit/>
+          </a:bodyPr>
+          <a:lstStyle/>
+          <a:p>
+            <a:pPr marL="514350" indent="-514350">
+              <a:buFont typeface="Arial" pitchFamily="34" charset="0"/>
+              <a:buChar char="•"/>
+            </a:pPr>
+            <a:r>
+              <a:rPr lang="en-US" sz="2000" dirty="0" smtClean="0">
+                <a:latin typeface="+mj-lt"/>
+              </a:rPr>
+              <a:t>The background, context, overview</a:t>
+            </a:r>
+            <a:endParaRPr lang="en-US" sz="2000" u="sng" dirty="0" smtClean="0">
+              <a:latin typeface="+mj-lt"/>
+            </a:endParaRPr>
+          </a:p>
+          <a:p>
+            <a:pPr marL="514350" indent="-514350">
+              <a:buFont typeface="Arial" pitchFamily="34" charset="0"/>
+              <a:buChar char="•"/>
+            </a:pPr>
+            <a:r>
+              <a:rPr lang="en-US" sz="2000" dirty="0" smtClean="0">
+                <a:latin typeface="+mj-lt"/>
+              </a:rPr>
+              <a:t>Project Management and Governance</a:t>
+            </a:r>
+          </a:p>
+          <a:p>
+            <a:pPr marL="971550" lvl="1" indent="-514350">
+              <a:buFont typeface="Wingdings" pitchFamily="2" charset="2"/>
+              <a:buChar char="v"/>
+            </a:pPr>
+            <a:r>
+              <a:rPr lang="en-US" sz="1600" dirty="0" smtClean="0">
+                <a:latin typeface="+mj-lt"/>
+              </a:rPr>
+              <a:t>Role/Name/Responsibilities</a:t>
+            </a:r>
+          </a:p>
+          <a:p>
+            <a:pPr marL="514350" indent="-514350">
+              <a:buFont typeface="Arial" pitchFamily="34" charset="0"/>
+              <a:buChar char="•"/>
+            </a:pPr>
+            <a:r>
+              <a:rPr lang="en-US" sz="2000" dirty="0" smtClean="0">
+                <a:latin typeface="+mj-lt"/>
+              </a:rPr>
+              <a:t>Project Facilities and Resources</a:t>
+            </a:r>
+          </a:p>
+          <a:p>
+            <a:pPr marL="514350" indent="-514350">
+              <a:buFont typeface="Arial" pitchFamily="34" charset="0"/>
+              <a:buChar char="•"/>
+            </a:pPr>
+            <a:r>
+              <a:rPr lang="en-US" sz="2000" dirty="0" smtClean="0">
+                <a:latin typeface="+mj-lt"/>
+              </a:rPr>
+              <a:t>Milestones.</a:t>
+            </a:r>
+          </a:p>
+          <a:p>
+            <a:pPr marL="514350" indent="-514350">
+              <a:buFont typeface="Arial" pitchFamily="34" charset="0"/>
+              <a:buChar char="•"/>
+            </a:pPr>
+            <a:r>
+              <a:rPr lang="en-US" sz="2000" dirty="0" smtClean="0">
+                <a:latin typeface="+mj-lt"/>
+              </a:rPr>
+              <a:t>Impact Analysis</a:t>
+            </a:r>
+          </a:p>
+          <a:p>
+            <a:pPr marL="971550" lvl="1" indent="-514350">
+              <a:buFont typeface="Wingdings" pitchFamily="2" charset="2"/>
+              <a:buChar char="v"/>
+            </a:pPr>
+            <a:r>
+              <a:rPr lang="en-US" sz="1600" dirty="0" smtClean="0">
+                <a:latin typeface="+mj-lt"/>
+              </a:rPr>
+              <a:t>Who? What?</a:t>
+            </a:r>
+          </a:p>
+          <a:p>
+            <a:pPr marL="514350" indent="-514350">
+              <a:buFont typeface="Arial" pitchFamily="34" charset="0"/>
+              <a:buChar char="•"/>
+            </a:pPr>
+            <a:r>
+              <a:rPr lang="en-US" sz="2000" dirty="0" smtClean="0">
+                <a:latin typeface="+mj-lt"/>
+              </a:rPr>
+              <a:t>Assumptions</a:t>
+            </a:r>
+          </a:p>
+          <a:p>
+            <a:pPr marL="514350" indent="-514350">
+              <a:buFont typeface="Arial" pitchFamily="34" charset="0"/>
+              <a:buChar char="•"/>
+            </a:pPr>
+            <a:r>
+              <a:rPr lang="en-US" sz="2000" dirty="0" smtClean="0">
+                <a:latin typeface="+mj-lt"/>
+              </a:rPr>
+              <a:t>Signatures</a:t>
+            </a:r>
+          </a:p>
+        </p:txBody>
+      </p:sp>
+      <p:sp>
+        <p:nvSpPr>
+          <p:cNvPr id="8" name="Rectangle 7"/>
+          <p:cNvSpPr/>
+          <p:nvPr/>
+        </p:nvSpPr>
+        <p:spPr>
+          <a:xfrm>
+            <a:off x="228600" y="1074003"/>
+            <a:ext cx="8610600" cy="1200329"/>
+          </a:xfrm>
+          <a:prstGeom prst="rect">
+            <a:avLst/>
+          </a:prstGeom>
+          <a:ln>
+            <a:noFill/>
+          </a:ln>
+        </p:spPr>
+        <p:style>
+          <a:lnRef idx="2">
+            <a:schemeClr val="dk1"/>
+          </a:lnRef>
+          <a:fillRef idx="1">
+            <a:schemeClr val="lt1"/>
+          </a:fillRef>
+          <a:effectRef idx="0">
+            <a:schemeClr val="dk1"/>
+          </a:effectRef>
+          <a:fontRef idx="minor">
+            <a:schemeClr val="dk1"/>
+          </a:fontRef>
+        </p:style>
+        <p:txBody>
+          <a:bodyPr wrap="square">
+            <a:spAutoFit/>
+          </a:bodyPr>
+          <a:lstStyle/>
+          <a:p>
+            <a:pPr algn="ctr">
+              <a:buNone/>
+            </a:pPr>
+            <a:r>
+              <a:rPr lang="en-US" sz="2400" dirty="0" smtClean="0">
+                <a:latin typeface="+mj-lt"/>
+              </a:rPr>
+              <a:t>A document that </a:t>
+            </a:r>
+            <a:r>
+              <a:rPr lang="en-US" sz="2400" u="sng" dirty="0" smtClean="0">
+                <a:latin typeface="+mj-lt"/>
+              </a:rPr>
+              <a:t>formally</a:t>
+            </a:r>
+            <a:r>
+              <a:rPr lang="en-US" sz="2400" dirty="0" smtClean="0">
+                <a:latin typeface="+mj-lt"/>
+              </a:rPr>
+              <a:t> </a:t>
+            </a:r>
+            <a:r>
+              <a:rPr lang="en-US" sz="2400" i="1" dirty="0" smtClean="0">
+                <a:solidFill>
+                  <a:srgbClr val="C00000"/>
+                </a:solidFill>
+                <a:latin typeface="+mj-lt"/>
+              </a:rPr>
+              <a:t>authorizes</a:t>
+            </a:r>
+            <a:r>
+              <a:rPr lang="en-US" sz="2400" dirty="0" smtClean="0">
+                <a:latin typeface="+mj-lt"/>
+              </a:rPr>
+              <a:t> a project or a phase and documenting </a:t>
+            </a:r>
+            <a:r>
+              <a:rPr lang="en-US" sz="2400" u="sng" dirty="0" smtClean="0">
+                <a:solidFill>
+                  <a:schemeClr val="tx1"/>
+                </a:solidFill>
+                <a:latin typeface="+mj-lt"/>
+              </a:rPr>
+              <a:t>initial requirements</a:t>
+            </a:r>
+            <a:r>
+              <a:rPr lang="en-US" sz="2400" dirty="0" smtClean="0">
+                <a:latin typeface="+mj-lt"/>
+              </a:rPr>
+              <a:t> that satisfy the stakeholder’s </a:t>
+            </a:r>
+            <a:r>
+              <a:rPr lang="en-US" sz="2400" u="sng" dirty="0" smtClean="0">
+                <a:latin typeface="+mj-lt"/>
+              </a:rPr>
+              <a:t>needs</a:t>
+            </a:r>
+            <a:r>
+              <a:rPr lang="en-US" sz="2400" dirty="0" smtClean="0">
+                <a:latin typeface="+mj-lt"/>
+              </a:rPr>
+              <a:t> and </a:t>
+            </a:r>
+            <a:r>
+              <a:rPr lang="en-US" sz="2400" u="sng" dirty="0" smtClean="0">
+                <a:latin typeface="+mj-lt"/>
+              </a:rPr>
+              <a:t>expectations</a:t>
+            </a:r>
+            <a:r>
+              <a:rPr lang="en-US" sz="2400" dirty="0" smtClean="0">
+                <a:latin typeface="+mj-lt"/>
+              </a:rPr>
+              <a:t>.</a:t>
+            </a:r>
+          </a:p>
+        </p:txBody>
+      </p:sp>
     </p:spTree>
   </p:cSld>
   <p:clrMapOvr>
@@ -11932,251 +7078,77 @@
           <a:chExt cx="0" cy="0"/>
         </a:xfrm>
       </p:grpSpPr>
+      <p:sp>
+        <p:nvSpPr>
+          <p:cNvPr id="2" name="Title 1"/>
+          <p:cNvSpPr>
+            <a:spLocks noGrp="1"/>
+          </p:cNvSpPr>
+          <p:nvPr>
+            <p:ph type="title"/>
+          </p:nvPr>
+        </p:nvSpPr>
+        <p:spPr/>
+        <p:txBody>
+          <a:bodyPr/>
+          <a:lstStyle/>
+          <a:p>
+            <a:r>
+              <a:rPr lang="en-US" dirty="0" smtClean="0"/>
+              <a:t>Responsibility Assignment Matrix</a:t>
+            </a:r>
+            <a:endParaRPr lang="en-US" dirty="0"/>
+          </a:p>
+        </p:txBody>
+      </p:sp>
+      <p:sp>
+        <p:nvSpPr>
+          <p:cNvPr id="3" name="Content Placeholder 2"/>
+          <p:cNvSpPr>
+            <a:spLocks noGrp="1"/>
+          </p:cNvSpPr>
+          <p:nvPr>
+            <p:ph idx="1"/>
+          </p:nvPr>
+        </p:nvSpPr>
+        <p:spPr>
+          <a:xfrm>
+            <a:off x="457200" y="1600201"/>
+            <a:ext cx="8229600" cy="2362200"/>
+          </a:xfrm>
+        </p:spPr>
+        <p:txBody>
+          <a:bodyPr/>
+          <a:lstStyle/>
+          <a:p>
+            <a:r>
+              <a:rPr lang="en-US" sz="2200" dirty="0" smtClean="0"/>
+              <a:t>Responsibility Assignment Matrix (RAM), also known as </a:t>
+            </a:r>
+          </a:p>
+          <a:p>
+            <a:r>
+              <a:rPr lang="en-US" sz="2200" dirty="0" smtClean="0"/>
+              <a:t>RACI matrix (Responsible, Accountable, Consulted, and Informed matrix), or</a:t>
+            </a:r>
+          </a:p>
+          <a:p>
+            <a:r>
+              <a:rPr lang="en-US" sz="2200" dirty="0" smtClean="0"/>
+              <a:t>LRC (linear responsibility chart)</a:t>
+            </a:r>
+          </a:p>
+          <a:p>
+            <a:r>
+              <a:rPr lang="en-US" sz="2200" dirty="0" smtClean="0"/>
+              <a:t>describes the participation by various roles in completing tasks or deliverables for a project.</a:t>
+            </a:r>
+          </a:p>
+        </p:txBody>
+      </p:sp>
       <p:pic>
         <p:nvPicPr>
-          <p:cNvPr id="1027" name="Picture 3"/>
-          <p:cNvPicPr>
-            <a:picLocks noChangeAspect="1" noChangeArrowheads="1"/>
-          </p:cNvPicPr>
-          <p:nvPr/>
-        </p:nvPicPr>
-        <p:blipFill>
-          <a:blip r:embed="rId2" cstate="print"/>
-          <a:srcRect/>
-          <a:stretch>
-            <a:fillRect/>
-          </a:stretch>
-        </p:blipFill>
-        <p:spPr bwMode="auto">
-          <a:xfrm>
-            <a:off x="5029200" y="3124200"/>
-            <a:ext cx="3960633" cy="3276600"/>
-          </a:xfrm>
-          <a:prstGeom prst="rect">
-            <a:avLst/>
-          </a:prstGeom>
-          <a:noFill/>
-          <a:ln w="9525">
-            <a:noFill/>
-            <a:miter lim="800000"/>
-            <a:headEnd/>
-            <a:tailEnd/>
-          </a:ln>
-          <a:effectLst/>
-        </p:spPr>
-      </p:pic>
-      <p:sp>
-        <p:nvSpPr>
-          <p:cNvPr id="6" name="Content Placeholder 2"/>
-          <p:cNvSpPr>
-            <a:spLocks noGrp="1"/>
-          </p:cNvSpPr>
-          <p:nvPr>
-            <p:ph idx="1"/>
-          </p:nvPr>
-        </p:nvSpPr>
-        <p:spPr>
-          <a:xfrm>
-            <a:off x="381000" y="2819400"/>
-            <a:ext cx="5638800" cy="3581400"/>
-          </a:xfrm>
-        </p:spPr>
-        <p:txBody>
-          <a:bodyPr/>
-          <a:lstStyle/>
-          <a:p>
-            <a:r>
-              <a:rPr lang="en-US" sz="2400" i="1" u="sng" dirty="0" smtClean="0">
-                <a:solidFill>
-                  <a:srgbClr val="C00000"/>
-                </a:solidFill>
-              </a:rPr>
-              <a:t>Legal</a:t>
-            </a:r>
-            <a:r>
-              <a:rPr lang="en-US" sz="2400" dirty="0" smtClean="0"/>
-              <a:t> feasibility</a:t>
-            </a:r>
-          </a:p>
-          <a:p>
-            <a:r>
-              <a:rPr lang="en-US" sz="2400" i="1" dirty="0" smtClean="0">
-                <a:solidFill>
-                  <a:srgbClr val="C00000"/>
-                </a:solidFill>
-              </a:rPr>
-              <a:t>Market</a:t>
-            </a:r>
-            <a:r>
-              <a:rPr lang="en-US" sz="2400" dirty="0" smtClean="0"/>
-              <a:t> feasibility (supply and demand)</a:t>
-            </a:r>
-          </a:p>
-          <a:p>
-            <a:r>
-              <a:rPr lang="en-US" sz="2400" i="1" dirty="0" smtClean="0">
-                <a:solidFill>
-                  <a:srgbClr val="C00000"/>
-                </a:solidFill>
-              </a:rPr>
-              <a:t>Economic</a:t>
-            </a:r>
-            <a:r>
-              <a:rPr lang="en-US" sz="2400" dirty="0" smtClean="0"/>
-              <a:t>  feasibility</a:t>
-            </a:r>
-          </a:p>
-          <a:p>
-            <a:r>
-              <a:rPr lang="en-US" sz="2400" i="1" dirty="0" smtClean="0">
-                <a:solidFill>
-                  <a:srgbClr val="C00000"/>
-                </a:solidFill>
-              </a:rPr>
-              <a:t>Technology and system</a:t>
-            </a:r>
-            <a:r>
-              <a:rPr lang="en-US" sz="2400" dirty="0" smtClean="0"/>
-              <a:t> feasibility</a:t>
-            </a:r>
-          </a:p>
-          <a:p>
-            <a:r>
-              <a:rPr lang="en-US" sz="2400" i="1" dirty="0" smtClean="0">
-                <a:solidFill>
-                  <a:srgbClr val="C00000"/>
-                </a:solidFill>
-              </a:rPr>
-              <a:t>Resource</a:t>
-            </a:r>
-            <a:r>
-              <a:rPr lang="en-US" sz="2400" dirty="0" smtClean="0"/>
-              <a:t> feasibility</a:t>
-            </a:r>
-          </a:p>
-          <a:p>
-            <a:r>
-              <a:rPr lang="en-US" sz="2400" i="1" dirty="0" smtClean="0">
-                <a:solidFill>
-                  <a:srgbClr val="C00000"/>
-                </a:solidFill>
-              </a:rPr>
-              <a:t>Operational</a:t>
-            </a:r>
-            <a:r>
-              <a:rPr lang="en-US" sz="2400" dirty="0" smtClean="0"/>
-              <a:t> feasibility</a:t>
-            </a:r>
-          </a:p>
-          <a:p>
-            <a:r>
-              <a:rPr lang="en-US" sz="2400" i="1" dirty="0" smtClean="0">
-                <a:solidFill>
-                  <a:srgbClr val="C00000"/>
-                </a:solidFill>
-              </a:rPr>
-              <a:t>Schedule</a:t>
-            </a:r>
-            <a:r>
-              <a:rPr lang="en-US" sz="2400" dirty="0" smtClean="0"/>
-              <a:t> feasibility</a:t>
-            </a:r>
-          </a:p>
-          <a:p>
-            <a:r>
-              <a:rPr lang="en-US" sz="2400" i="1" dirty="0" smtClean="0">
-                <a:solidFill>
-                  <a:srgbClr val="C00000"/>
-                </a:solidFill>
-              </a:rPr>
-              <a:t>Cultural</a:t>
-            </a:r>
-            <a:r>
-              <a:rPr lang="en-US" sz="2400" dirty="0" smtClean="0"/>
-              <a:t> feasibility</a:t>
-            </a:r>
-            <a:endParaRPr lang="en-US" sz="2400" dirty="0"/>
-          </a:p>
-        </p:txBody>
-      </p:sp>
-      <p:sp>
-        <p:nvSpPr>
-          <p:cNvPr id="2" name="Title 1"/>
-          <p:cNvSpPr>
-            <a:spLocks noGrp="1"/>
-          </p:cNvSpPr>
-          <p:nvPr>
-            <p:ph type="title"/>
-          </p:nvPr>
-        </p:nvSpPr>
-        <p:spPr/>
-        <p:txBody>
-          <a:bodyPr/>
-          <a:lstStyle/>
-          <a:p>
-            <a:r>
-              <a:rPr lang="en-US" dirty="0" smtClean="0"/>
-              <a:t>Feasibility Study [2]</a:t>
-            </a:r>
-            <a:endParaRPr lang="en-US" dirty="0"/>
-          </a:p>
-        </p:txBody>
-      </p:sp>
-      <p:sp>
-        <p:nvSpPr>
-          <p:cNvPr id="4" name="Rectangle 3"/>
-          <p:cNvSpPr/>
-          <p:nvPr/>
-        </p:nvSpPr>
-        <p:spPr>
-          <a:xfrm>
-            <a:off x="381000" y="1390471"/>
-            <a:ext cx="8305800" cy="1200329"/>
-          </a:xfrm>
-          <a:prstGeom prst="rect">
-            <a:avLst/>
-          </a:prstGeom>
-          <a:noFill/>
-        </p:spPr>
-        <p:txBody>
-          <a:bodyPr wrap="square">
-            <a:spAutoFit/>
-          </a:bodyPr>
-          <a:lstStyle/>
-          <a:p>
-            <a:pPr marL="342900" lvl="0" indent="-342900" algn="ctr" eaLnBrk="0" hangingPunct="0">
-              <a:spcBef>
-                <a:spcPct val="20000"/>
-              </a:spcBef>
-              <a:defRPr/>
-            </a:pPr>
-            <a:r>
-              <a:rPr lang="en-US" sz="2400" dirty="0" smtClean="0">
-                <a:latin typeface="+mj-lt"/>
-              </a:rPr>
-              <a:t>A </a:t>
-            </a:r>
-            <a:r>
-              <a:rPr lang="en-US" sz="2400" i="1" dirty="0" smtClean="0">
-                <a:solidFill>
-                  <a:srgbClr val="C00000"/>
-                </a:solidFill>
-                <a:latin typeface="+mj-lt"/>
-              </a:rPr>
-              <a:t>feasibility study</a:t>
-            </a:r>
-            <a:r>
-              <a:rPr lang="en-US" sz="2400" dirty="0" smtClean="0">
-                <a:latin typeface="+mj-lt"/>
-              </a:rPr>
-              <a:t> is a detailed assessment of the need, value, and practicality of a proposed enterprise, such as systems development.</a:t>
-            </a:r>
-          </a:p>
-        </p:txBody>
-      </p:sp>
-      <p:pic>
-        <p:nvPicPr>
-          <p:cNvPr id="17410" name="Picture 2" descr="http://img.over-blog-kiwi.com/1/00/37/92/20141224/ob_4067a6_attention.png"/>
+          <p:cNvPr id="38914" name="Picture 2"/>
           <p:cNvPicPr>
             <a:picLocks noChangeAspect="1" noChangeArrowheads="1"/>
           </p:cNvPicPr>
@@ -12191,27 +7163,142 @@
         </p:blipFill>
         <p:spPr bwMode="auto">
           <a:xfrm>
-            <a:off x="2895600" y="2667000"/>
-            <a:ext cx="1405334" cy="523727"/>
+            <a:off x="381000" y="4038600"/>
+            <a:ext cx="4417695" cy="2446020"/>
           </a:xfrm>
           <a:prstGeom prst="rect">
             <a:avLst/>
           </a:prstGeom>
           <a:noFill/>
+          <a:ln w="9525">
+            <a:noFill/>
+            <a:miter lim="800000"/>
+            <a:headEnd/>
+            <a:tailEnd/>
+          </a:ln>
         </p:spPr>
       </p:pic>
+      <p:sp>
+        <p:nvSpPr>
+          <p:cNvPr id="5" name="TextBox 4"/>
+          <p:cNvSpPr txBox="1"/>
+          <p:nvPr/>
+        </p:nvSpPr>
+        <p:spPr>
+          <a:xfrm>
+            <a:off x="4901044" y="4495800"/>
+            <a:ext cx="4014355" cy="1785104"/>
+          </a:xfrm>
+          <a:prstGeom prst="rect">
+            <a:avLst/>
+          </a:prstGeom>
+          <a:noFill/>
+        </p:spPr>
+        <p:txBody>
+          <a:bodyPr wrap="square" rtlCol="0">
+            <a:spAutoFit/>
+          </a:bodyPr>
+          <a:lstStyle/>
+          <a:p>
+            <a:pPr marL="457200" indent="-457200">
+              <a:buFont typeface="Arial" pitchFamily="34" charset="0"/>
+              <a:buChar char="•"/>
+            </a:pPr>
+            <a:r>
+              <a:rPr lang="en-US" sz="2200" i="1" dirty="0" smtClean="0">
+                <a:solidFill>
+                  <a:srgbClr val="C00000"/>
+                </a:solidFill>
+                <a:latin typeface="+mj-lt"/>
+              </a:rPr>
+              <a:t>Responsibility</a:t>
+            </a:r>
+            <a:r>
+              <a:rPr lang="en-US" sz="2200" dirty="0" smtClean="0">
+                <a:latin typeface="+mj-lt"/>
+              </a:rPr>
+              <a:t> can be shared.</a:t>
+            </a:r>
+          </a:p>
+          <a:p>
+            <a:pPr marL="457200" indent="-457200">
+              <a:buFont typeface="Arial" pitchFamily="34" charset="0"/>
+              <a:buChar char="•"/>
+            </a:pPr>
+            <a:r>
+              <a:rPr lang="en-US" sz="2200" i="1" dirty="0" smtClean="0">
+                <a:solidFill>
+                  <a:srgbClr val="C00000"/>
+                </a:solidFill>
+                <a:latin typeface="+mj-lt"/>
+              </a:rPr>
+              <a:t>Accountability</a:t>
+            </a:r>
+            <a:r>
+              <a:rPr lang="en-US" sz="2200" dirty="0" smtClean="0">
+                <a:latin typeface="+mj-lt"/>
+              </a:rPr>
+              <a:t> cannot be shared. It is something you hold a person to only after a task is done </a:t>
+            </a:r>
+            <a:r>
+              <a:rPr lang="en-US" sz="2200" b="1" dirty="0" smtClean="0">
+                <a:latin typeface="+mj-lt"/>
+              </a:rPr>
+              <a:t>or not done</a:t>
+            </a:r>
+            <a:r>
+              <a:rPr lang="en-US" sz="2200" dirty="0" smtClean="0">
+                <a:latin typeface="+mj-lt"/>
+              </a:rPr>
+              <a:t>.</a:t>
+            </a:r>
+          </a:p>
+        </p:txBody>
+      </p:sp>
+      <p:sp>
+        <p:nvSpPr>
+          <p:cNvPr id="9" name="Rectangle 8"/>
+          <p:cNvSpPr/>
+          <p:nvPr/>
+        </p:nvSpPr>
+        <p:spPr>
+          <a:xfrm>
+            <a:off x="609600" y="5410200"/>
+            <a:ext cx="1066800" cy="307777"/>
+          </a:xfrm>
+          <a:prstGeom prst="rect">
+            <a:avLst/>
+          </a:prstGeom>
+          <a:solidFill>
+            <a:schemeClr val="bg1">
+              <a:lumMod val="95000"/>
+            </a:schemeClr>
+          </a:solidFill>
+        </p:spPr>
+        <p:txBody>
+          <a:bodyPr wrap="square">
+            <a:spAutoFit/>
+          </a:bodyPr>
+          <a:lstStyle/>
+          <a:p>
+            <a:pPr algn="ctr"/>
+            <a:r>
+              <a:rPr lang="en-US" sz="1400" b="1" dirty="0" smtClean="0">
+                <a:latin typeface="+mj-lt"/>
+              </a:rPr>
+              <a:t>Deliverable</a:t>
+            </a:r>
+            <a:endParaRPr lang="en-US" sz="1400" b="1" dirty="0">
+              <a:latin typeface="+mj-lt"/>
+            </a:endParaRPr>
+          </a:p>
+        </p:txBody>
+      </p:sp>
     </p:spTree>
   </p:cSld>
   <p:clrMapOvr>
     <a:masterClrMapping/>
   </p:clrMapOvr>
-  <p:timing>
-    <p:tnLst>
-      <p:par>
-        <p:cTn id="1" dur="indefinite" restart="never" nodeType="tmRoot"/>
-      </p:par>
-    </p:tnLst>
-  </p:timing>
 </p:sld>
 </file>
 
@@ -12607,15 +7694,139 @@
           <a:p>
             <a:r>
               <a:rPr lang="en-US" dirty="0" smtClean="0"/>
-              <a:t>Project Profit Graph</a:t>
+              <a:t>Checklist</a:t>
             </a:r>
             <a:endParaRPr lang="en-US" dirty="0"/>
+          </a:p>
+        </p:txBody>
+      </p:sp>
+      <p:sp>
+        <p:nvSpPr>
+          <p:cNvPr id="3" name="Content Placeholder 2"/>
+          <p:cNvSpPr>
+            <a:spLocks noGrp="1"/>
+          </p:cNvSpPr>
+          <p:nvPr>
+            <p:ph idx="1"/>
+          </p:nvPr>
+        </p:nvSpPr>
+        <p:spPr/>
+        <p:txBody>
+          <a:bodyPr/>
+          <a:lstStyle/>
+          <a:p>
+            <a:r>
+              <a:rPr lang="en-US" sz="2400" i="1" dirty="0" smtClean="0">
+                <a:solidFill>
+                  <a:srgbClr val="C00000"/>
+                </a:solidFill>
+              </a:rPr>
+              <a:t>Why</a:t>
+            </a:r>
+            <a:r>
+              <a:rPr lang="en-US" sz="2400" dirty="0" smtClean="0"/>
+              <a:t> this project?</a:t>
+            </a:r>
+          </a:p>
+          <a:p>
+            <a:r>
+              <a:rPr lang="en-US" sz="2400" dirty="0" smtClean="0"/>
+              <a:t>What are the </a:t>
+            </a:r>
+            <a:r>
+              <a:rPr lang="en-US" sz="2400" i="1" dirty="0" smtClean="0">
+                <a:solidFill>
+                  <a:srgbClr val="C00000"/>
+                </a:solidFill>
+              </a:rPr>
+              <a:t>problems</a:t>
+            </a:r>
+            <a:r>
+              <a:rPr lang="en-US" sz="2400" dirty="0" smtClean="0"/>
+              <a:t>?</a:t>
+            </a:r>
+          </a:p>
+          <a:p>
+            <a:r>
+              <a:rPr lang="en-US" sz="2400" dirty="0" smtClean="0"/>
+              <a:t>What are the </a:t>
+            </a:r>
+            <a:r>
+              <a:rPr lang="en-US" sz="2400" i="1" dirty="0" smtClean="0">
+                <a:solidFill>
+                  <a:srgbClr val="C00000"/>
+                </a:solidFill>
+              </a:rPr>
+              <a:t>deliverables</a:t>
+            </a:r>
+            <a:r>
+              <a:rPr lang="en-US" sz="2400" dirty="0" smtClean="0"/>
+              <a:t>?</a:t>
+            </a:r>
+          </a:p>
+          <a:p>
+            <a:r>
+              <a:rPr lang="en-US" sz="2400" i="1" dirty="0" smtClean="0">
+                <a:solidFill>
+                  <a:srgbClr val="C00000"/>
+                </a:solidFill>
+              </a:rPr>
+              <a:t>How</a:t>
+            </a:r>
+            <a:r>
+              <a:rPr lang="en-US" sz="2400" dirty="0" smtClean="0"/>
+              <a:t> will we solve the problems?</a:t>
+            </a:r>
+          </a:p>
+          <a:p>
+            <a:pPr lvl="1"/>
+            <a:r>
+              <a:rPr lang="en-US" sz="2000" i="1" dirty="0" smtClean="0">
+                <a:solidFill>
+                  <a:srgbClr val="C00000"/>
+                </a:solidFill>
+              </a:rPr>
+              <a:t>Technical</a:t>
+            </a:r>
+            <a:r>
+              <a:rPr lang="en-US" sz="2000" dirty="0" smtClean="0"/>
+              <a:t> aspects</a:t>
+            </a:r>
+          </a:p>
+          <a:p>
+            <a:pPr lvl="1"/>
+            <a:r>
+              <a:rPr lang="en-US" sz="2000" i="1" dirty="0" smtClean="0">
+                <a:solidFill>
+                  <a:srgbClr val="C00000"/>
+                </a:solidFill>
+              </a:rPr>
+              <a:t>Management</a:t>
+            </a:r>
+            <a:r>
+              <a:rPr lang="en-US" sz="2000" dirty="0" smtClean="0"/>
+              <a:t> aspects</a:t>
+            </a:r>
+          </a:p>
+          <a:p>
+            <a:r>
+              <a:rPr lang="en-US" sz="2400" i="1" dirty="0" smtClean="0">
+                <a:solidFill>
+                  <a:srgbClr val="C00000"/>
+                </a:solidFill>
+              </a:rPr>
+              <a:t>When</a:t>
+            </a:r>
+            <a:r>
+              <a:rPr lang="en-US" sz="2400" dirty="0" smtClean="0"/>
+              <a:t> must we complete the project?</a:t>
+            </a:r>
           </a:p>
         </p:txBody>
       </p:sp>
       <p:pic>
         <p:nvPicPr>
-          <p:cNvPr id="1028" name="Picture 4"/>
+          <p:cNvPr id="4" name="Picture 2" descr="https://www.articlelist.com/wp-content/uploads/2019/02/Best-questions-to-get-to-know-someone-better.jpg"/>
           <p:cNvPicPr>
             <a:picLocks noChangeAspect="1" noChangeArrowheads="1"/>
           </p:cNvPicPr>
@@ -12630,66 +7841,8 @@
         </p:blipFill>
         <p:spPr bwMode="auto">
           <a:xfrm>
-            <a:off x="457200" y="3176016"/>
-            <a:ext cx="8164449" cy="3072384"/>
-          </a:xfrm>
-          <a:prstGeom prst="rect">
-            <a:avLst/>
-          </a:prstGeom>
-          <a:noFill/>
-          <a:ln w="9525">
-            <a:noFill/>
-            <a:miter lim="800000"/>
-            <a:headEnd/>
-            <a:tailEnd/>
-          </a:ln>
-        </p:spPr>
-      </p:pic>
-      <p:pic>
-        <p:nvPicPr>
-          <p:cNvPr id="2050" name="Picture 2" descr="Related image"/>
-          <p:cNvPicPr>
-            <a:picLocks noChangeAspect="1" noChangeArrowheads="1"/>
-          </p:cNvPicPr>
-          <p:nvPr/>
-        </p:nvPicPr>
-        <p:blipFill>
-          <a:blip r:embed="rId3" cstate="print"/>
-          <a:srcRect/>
-          <a:stretch>
-            <a:fillRect/>
-          </a:stretch>
-        </p:blipFill>
-        <p:spPr bwMode="auto">
-          <a:xfrm>
-            <a:off x="1066800" y="1447800"/>
-            <a:ext cx="2032000" cy="1524000"/>
-          </a:xfrm>
-          <a:prstGeom prst="rect">
-            <a:avLst/>
-          </a:prstGeom>
-          <a:noFill/>
-        </p:spPr>
-      </p:pic>
-      <p:pic>
-        <p:nvPicPr>
-          <p:cNvPr id="2052" name="Picture 4" descr="Image result for &quot;government projects&quot;"/>
-          <p:cNvPicPr>
-            <a:picLocks noChangeAspect="1" noChangeArrowheads="1"/>
-          </p:cNvPicPr>
-          <p:nvPr/>
-        </p:nvPicPr>
-        <p:blipFill>
-          <a:blip r:embed="rId4" cstate="print"/>
-          <a:srcRect/>
-          <a:stretch>
-            <a:fillRect/>
-          </a:stretch>
-        </p:blipFill>
-        <p:spPr bwMode="auto">
-          <a:xfrm>
-            <a:off x="6019800" y="1371600"/>
-            <a:ext cx="2438400" cy="1756410"/>
+            <a:off x="2895600" y="4724400"/>
+            <a:ext cx="3251200" cy="1625600"/>
           </a:xfrm>
           <a:prstGeom prst="rect">
             <a:avLst/>
@@ -12706,885 +7859,6 @@
 </file>
 
 <file path=ppt/slides/slide21.xml><?xml version="1.0" encoding="utf-8"?>
-<p:sld xmlns:a="http://schemas.openxmlformats.org/drawingml/2006/main" xmlns:r="http://schemas.openxmlformats.org/officeDocument/2006/relationships" xmlns:p="http://schemas.openxmlformats.org/presentationml/2006/main">
-  <p:cSld>
-    <p:spTree>
-      <p:nvGrpSpPr>
-        <p:cNvPr id="1" name=""/>
-        <p:cNvGrpSpPr/>
-        <p:nvPr/>
-      </p:nvGrpSpPr>
-      <p:grpSpPr>
-        <a:xfrm>
-          <a:off x="0" y="0"/>
-          <a:ext cx="0" cy="0"/>
-          <a:chOff x="0" y="0"/>
-          <a:chExt cx="0" cy="0"/>
-        </a:xfrm>
-      </p:grpSpPr>
-      <p:sp>
-        <p:nvSpPr>
-          <p:cNvPr id="9" name="Rectangle 8"/>
-          <p:cNvSpPr/>
-          <p:nvPr/>
-        </p:nvSpPr>
-        <p:spPr>
-          <a:xfrm>
-            <a:off x="457200" y="1524000"/>
-            <a:ext cx="8382000" cy="892552"/>
-          </a:xfrm>
-          <a:prstGeom prst="rect">
-            <a:avLst/>
-          </a:prstGeom>
-          <a:noFill/>
-        </p:spPr>
-        <p:txBody>
-          <a:bodyPr wrap="square">
-            <a:spAutoFit/>
-          </a:bodyPr>
-          <a:lstStyle/>
-          <a:p>
-            <a:pPr algn="ctr"/>
-            <a:r>
-              <a:rPr lang="en-US" sz="2600" dirty="0" smtClean="0">
-                <a:latin typeface="+mj-lt"/>
-              </a:rPr>
-              <a:t>A financial analysis tool used to determine the </a:t>
-            </a:r>
-            <a:r>
-              <a:rPr lang="en-US" sz="2600" i="1" dirty="0" smtClean="0">
-                <a:solidFill>
-                  <a:srgbClr val="C00000"/>
-                </a:solidFill>
-                <a:latin typeface="+mj-lt"/>
-              </a:rPr>
-              <a:t>benefits</a:t>
-            </a:r>
-            <a:r>
-              <a:rPr lang="en-US" sz="2600" dirty="0" smtClean="0">
-                <a:latin typeface="+mj-lt"/>
-              </a:rPr>
-              <a:t> provided by a project </a:t>
-            </a:r>
-            <a:r>
-              <a:rPr lang="en-US" sz="2600" i="1" dirty="0" smtClean="0">
-                <a:solidFill>
-                  <a:srgbClr val="C00000"/>
-                </a:solidFill>
-                <a:latin typeface="+mj-lt"/>
-              </a:rPr>
-              <a:t>against</a:t>
-            </a:r>
-            <a:r>
-              <a:rPr lang="en-US" sz="2600" dirty="0" smtClean="0">
-                <a:latin typeface="+mj-lt"/>
-              </a:rPr>
-              <a:t> its </a:t>
-            </a:r>
-            <a:r>
-              <a:rPr lang="en-US" sz="2600" i="1" dirty="0" smtClean="0">
-                <a:solidFill>
-                  <a:srgbClr val="C00000"/>
-                </a:solidFill>
-                <a:latin typeface="+mj-lt"/>
-              </a:rPr>
-              <a:t>costs</a:t>
-            </a:r>
-            <a:r>
-              <a:rPr lang="en-US" sz="2600" dirty="0" smtClean="0">
-                <a:latin typeface="+mj-lt"/>
-              </a:rPr>
-              <a:t>.</a:t>
-            </a:r>
-          </a:p>
-        </p:txBody>
-      </p:sp>
-      <p:sp>
-        <p:nvSpPr>
-          <p:cNvPr id="2" name="Title 1"/>
-          <p:cNvSpPr>
-            <a:spLocks noGrp="1"/>
-          </p:cNvSpPr>
-          <p:nvPr>
-            <p:ph type="title"/>
-          </p:nvPr>
-        </p:nvSpPr>
-        <p:spPr/>
-        <p:txBody>
-          <a:bodyPr/>
-          <a:lstStyle/>
-          <a:p>
-            <a:r>
-              <a:rPr lang="en-US" dirty="0" smtClean="0"/>
-              <a:t>Cost–Benefit Analysis</a:t>
-            </a:r>
-            <a:endParaRPr lang="en-US" dirty="0"/>
-          </a:p>
-        </p:txBody>
-      </p:sp>
-      <p:pic>
-        <p:nvPicPr>
-          <p:cNvPr id="1027" name="Picture 3"/>
-          <p:cNvPicPr>
-            <a:picLocks noChangeAspect="1" noChangeArrowheads="1"/>
-          </p:cNvPicPr>
-          <p:nvPr/>
-        </p:nvPicPr>
-        <p:blipFill>
-          <a:blip r:embed="rId2" cstate="print"/>
-          <a:srcRect/>
-          <a:stretch>
-            <a:fillRect/>
-          </a:stretch>
-        </p:blipFill>
-        <p:spPr bwMode="auto">
-          <a:xfrm>
-            <a:off x="3200400" y="4572000"/>
-            <a:ext cx="2733675" cy="1790700"/>
-          </a:xfrm>
-          <a:prstGeom prst="rect">
-            <a:avLst/>
-          </a:prstGeom>
-          <a:noFill/>
-          <a:ln w="9525">
-            <a:noFill/>
-            <a:miter lim="800000"/>
-            <a:headEnd/>
-            <a:tailEnd/>
-          </a:ln>
-        </p:spPr>
-      </p:pic>
-      <p:pic>
-        <p:nvPicPr>
-          <p:cNvPr id="4" name="Picture 3"/>
-          <p:cNvPicPr>
-            <a:picLocks noChangeAspect="1" noChangeArrowheads="1"/>
-          </p:cNvPicPr>
-          <p:nvPr/>
-        </p:nvPicPr>
-        <p:blipFill>
-          <a:blip r:embed="rId3" cstate="print"/>
-          <a:srcRect/>
-          <a:stretch>
-            <a:fillRect/>
-          </a:stretch>
-        </p:blipFill>
-        <p:spPr bwMode="auto">
-          <a:xfrm>
-            <a:off x="896938" y="2847975"/>
-            <a:ext cx="7350125" cy="1419225"/>
-          </a:xfrm>
-          <a:prstGeom prst="rect">
-            <a:avLst/>
-          </a:prstGeom>
-          <a:noFill/>
-          <a:ln w="9525">
-            <a:noFill/>
-            <a:miter lim="800000"/>
-            <a:headEnd/>
-            <a:tailEnd/>
-          </a:ln>
-        </p:spPr>
-      </p:pic>
-    </p:spTree>
-  </p:cSld>
-  <p:clrMapOvr>
-    <a:masterClrMapping/>
-  </p:clrMapOvr>
-  <p:timing>
-    <p:tnLst>
-      <p:par>
-        <p:cTn id="1" dur="indefinite" restart="never" nodeType="tmRoot"/>
-      </p:par>
-    </p:tnLst>
-  </p:timing>
-</p:sld>
-</file>
-
-<file path=ppt/slides/slide22.xml><?xml version="1.0" encoding="utf-8"?>
-<p:sld xmlns:a="http://schemas.openxmlformats.org/drawingml/2006/main" xmlns:r="http://schemas.openxmlformats.org/officeDocument/2006/relationships" xmlns:p="http://schemas.openxmlformats.org/presentationml/2006/main">
-  <p:cSld>
-    <p:spTree>
-      <p:nvGrpSpPr>
-        <p:cNvPr id="1" name=""/>
-        <p:cNvGrpSpPr/>
-        <p:nvPr/>
-      </p:nvGrpSpPr>
-      <p:grpSpPr>
-        <a:xfrm>
-          <a:off x="0" y="0"/>
-          <a:ext cx="0" cy="0"/>
-          <a:chOff x="0" y="0"/>
-          <a:chExt cx="0" cy="0"/>
-        </a:xfrm>
-      </p:grpSpPr>
-      <p:sp>
-        <p:nvSpPr>
-          <p:cNvPr id="9" name="Rectangle 8"/>
-          <p:cNvSpPr/>
-          <p:nvPr/>
-        </p:nvSpPr>
-        <p:spPr>
-          <a:xfrm>
-            <a:off x="457200" y="1524000"/>
-            <a:ext cx="8382000" cy="954107"/>
-          </a:xfrm>
-          <a:prstGeom prst="rect">
-            <a:avLst/>
-          </a:prstGeom>
-          <a:noFill/>
-        </p:spPr>
-        <p:txBody>
-          <a:bodyPr wrap="square">
-            <a:spAutoFit/>
-          </a:bodyPr>
-          <a:lstStyle/>
-          <a:p>
-            <a:pPr algn="ctr"/>
-            <a:r>
-              <a:rPr lang="en-US" sz="2800" dirty="0" smtClean="0">
-                <a:latin typeface="+mj-lt"/>
-              </a:rPr>
-              <a:t>The </a:t>
-            </a:r>
-            <a:r>
-              <a:rPr lang="en-US" sz="2800" i="1" dirty="0" smtClean="0">
-                <a:solidFill>
-                  <a:srgbClr val="C00000"/>
-                </a:solidFill>
-                <a:latin typeface="+mj-lt"/>
-              </a:rPr>
-              <a:t>return on investment (ROI)</a:t>
-            </a:r>
-            <a:r>
-              <a:rPr lang="en-US" sz="2800" dirty="0" smtClean="0">
-                <a:latin typeface="+mj-lt"/>
-              </a:rPr>
-              <a:t> is the additional amount earned after costs are earned back.</a:t>
-            </a:r>
-            <a:endParaRPr lang="en-US" sz="2800" dirty="0">
-              <a:latin typeface="+mj-lt"/>
-            </a:endParaRPr>
-          </a:p>
-        </p:txBody>
-      </p:sp>
-      <p:sp>
-        <p:nvSpPr>
-          <p:cNvPr id="2" name="Title 1"/>
-          <p:cNvSpPr>
-            <a:spLocks noGrp="1"/>
-          </p:cNvSpPr>
-          <p:nvPr>
-            <p:ph type="title"/>
-          </p:nvPr>
-        </p:nvSpPr>
-        <p:spPr/>
-        <p:txBody>
-          <a:bodyPr/>
-          <a:lstStyle/>
-          <a:p>
-            <a:r>
-              <a:rPr lang="en-US" dirty="0" smtClean="0"/>
-              <a:t>Return on Investment (ROI)</a:t>
-            </a:r>
-            <a:endParaRPr lang="en-US" dirty="0"/>
-          </a:p>
-        </p:txBody>
-      </p:sp>
-      <p:pic>
-        <p:nvPicPr>
-          <p:cNvPr id="6" name="Picture 4"/>
-          <p:cNvPicPr>
-            <a:picLocks noChangeAspect="1" noChangeArrowheads="1"/>
-          </p:cNvPicPr>
-          <p:nvPr/>
-        </p:nvPicPr>
-        <p:blipFill>
-          <a:blip r:embed="rId2" cstate="print"/>
-          <a:srcRect/>
-          <a:stretch>
-            <a:fillRect/>
-          </a:stretch>
-        </p:blipFill>
-        <p:spPr bwMode="auto">
-          <a:xfrm>
-            <a:off x="2514600" y="2971800"/>
-            <a:ext cx="3754755" cy="1165860"/>
-          </a:xfrm>
-          <a:prstGeom prst="rect">
-            <a:avLst/>
-          </a:prstGeom>
-          <a:noFill/>
-          <a:ln w="9525">
-            <a:noFill/>
-            <a:miter lim="800000"/>
-            <a:headEnd/>
-            <a:tailEnd/>
-          </a:ln>
-        </p:spPr>
-      </p:pic>
-      <p:sp>
-        <p:nvSpPr>
-          <p:cNvPr id="7" name="Rectangle 6"/>
-          <p:cNvSpPr/>
-          <p:nvPr/>
-        </p:nvSpPr>
-        <p:spPr>
-          <a:xfrm>
-            <a:off x="609600" y="4495800"/>
-            <a:ext cx="7924800" cy="1384995"/>
-          </a:xfrm>
-          <a:prstGeom prst="rect">
-            <a:avLst/>
-          </a:prstGeom>
-        </p:spPr>
-        <p:style>
-          <a:lnRef idx="3">
-            <a:schemeClr val="lt1"/>
-          </a:lnRef>
-          <a:fillRef idx="1">
-            <a:schemeClr val="dk1"/>
-          </a:fillRef>
-          <a:effectRef idx="1">
-            <a:schemeClr val="dk1"/>
-          </a:effectRef>
-          <a:fontRef idx="minor">
-            <a:schemeClr val="lt1"/>
-          </a:fontRef>
-        </p:style>
-        <p:txBody>
-          <a:bodyPr wrap="square">
-            <a:spAutoFit/>
-          </a:bodyPr>
-          <a:lstStyle/>
-          <a:p>
-            <a:pPr algn="ctr"/>
-            <a:r>
-              <a:rPr lang="en-US" sz="2800" i="1" dirty="0" smtClean="0">
-                <a:solidFill>
-                  <a:schemeClr val="bg1"/>
-                </a:solidFill>
-                <a:latin typeface="+mj-lt"/>
-              </a:rPr>
-              <a:t>If an investment does not have a positive ROI, or if there are other opportunities with a higher ROI, then the investment should not be undertaken.</a:t>
-            </a:r>
-            <a:endParaRPr lang="en-US" sz="2800" i="1" dirty="0">
-              <a:solidFill>
-                <a:schemeClr val="bg1"/>
-              </a:solidFill>
-              <a:latin typeface="+mj-lt"/>
-            </a:endParaRPr>
-          </a:p>
-        </p:txBody>
-      </p:sp>
-    </p:spTree>
-  </p:cSld>
-  <p:clrMapOvr>
-    <a:masterClrMapping/>
-  </p:clrMapOvr>
-  <p:timing>
-    <p:tnLst>
-      <p:par>
-        <p:cTn id="1" dur="indefinite" restart="never" nodeType="tmRoot"/>
-      </p:par>
-    </p:tnLst>
-  </p:timing>
-</p:sld>
-</file>
-
-<file path=ppt/slides/slide23.xml><?xml version="1.0" encoding="utf-8"?>
-<p:sld xmlns:a="http://schemas.openxmlformats.org/drawingml/2006/main" xmlns:r="http://schemas.openxmlformats.org/officeDocument/2006/relationships" xmlns:p="http://schemas.openxmlformats.org/presentationml/2006/main">
-  <p:cSld>
-    <p:spTree>
-      <p:nvGrpSpPr>
-        <p:cNvPr id="1" name=""/>
-        <p:cNvGrpSpPr/>
-        <p:nvPr/>
-      </p:nvGrpSpPr>
-      <p:grpSpPr>
-        <a:xfrm>
-          <a:off x="0" y="0"/>
-          <a:ext cx="0" cy="0"/>
-          <a:chOff x="0" y="0"/>
-          <a:chExt cx="0" cy="0"/>
-        </a:xfrm>
-      </p:grpSpPr>
-      <p:sp>
-        <p:nvSpPr>
-          <p:cNvPr id="2" name="Title 1"/>
-          <p:cNvSpPr>
-            <a:spLocks noGrp="1"/>
-          </p:cNvSpPr>
-          <p:nvPr>
-            <p:ph type="title"/>
-          </p:nvPr>
-        </p:nvSpPr>
-        <p:spPr/>
-        <p:txBody>
-          <a:bodyPr/>
-          <a:lstStyle/>
-          <a:p>
-            <a:r>
-              <a:rPr lang="en-US" dirty="0" smtClean="0"/>
-              <a:t>Stakeholder Analysis</a:t>
-            </a:r>
-            <a:endParaRPr lang="en-US" dirty="0"/>
-          </a:p>
-        </p:txBody>
-      </p:sp>
-      <p:sp>
-        <p:nvSpPr>
-          <p:cNvPr id="3" name="Content Placeholder 2"/>
-          <p:cNvSpPr>
-            <a:spLocks noGrp="1"/>
-          </p:cNvSpPr>
-          <p:nvPr>
-            <p:ph idx="1"/>
-          </p:nvPr>
-        </p:nvSpPr>
-        <p:spPr/>
-        <p:txBody>
-          <a:bodyPr/>
-          <a:lstStyle/>
-          <a:p>
-            <a:r>
-              <a:rPr lang="en-US" sz="2400" dirty="0" smtClean="0"/>
-              <a:t>Businesses cannot exist without external customers.</a:t>
-            </a:r>
-          </a:p>
-          <a:p>
-            <a:r>
-              <a:rPr lang="en-US" sz="2400" dirty="0" smtClean="0"/>
-              <a:t>External customers </a:t>
-            </a:r>
-            <a:r>
-              <a:rPr lang="en-US" sz="2400" dirty="0" smtClean="0">
-                <a:sym typeface="Wingdings" pitchFamily="2" charset="2"/>
-              </a:rPr>
-              <a:t> </a:t>
-            </a:r>
-            <a:r>
-              <a:rPr lang="en-US" sz="2400" dirty="0" smtClean="0"/>
-              <a:t>External stakeholders.</a:t>
-            </a:r>
-          </a:p>
-          <a:p>
-            <a:r>
-              <a:rPr lang="en-US" sz="2400" dirty="0" smtClean="0"/>
-              <a:t>Internal customers </a:t>
-            </a:r>
-            <a:r>
-              <a:rPr lang="en-US" sz="2400" dirty="0" smtClean="0">
-                <a:sym typeface="Wingdings" pitchFamily="2" charset="2"/>
-              </a:rPr>
-              <a:t> Internal stakeholders.</a:t>
-            </a:r>
-          </a:p>
-        </p:txBody>
-      </p:sp>
-      <p:pic>
-        <p:nvPicPr>
-          <p:cNvPr id="4" name="Picture 2" descr="https://www.pmi.org/kasimage/5e15b89e-6c9b-4e40-8e56-0c5d2c975aee/f2.jpg"/>
-          <p:cNvPicPr>
-            <a:picLocks noChangeAspect="1" noChangeArrowheads="1"/>
-          </p:cNvPicPr>
-          <p:nvPr/>
-        </p:nvPicPr>
-        <p:blipFill>
-          <a:blip r:embed="rId2" cstate="print"/>
-          <a:srcRect/>
-          <a:stretch>
-            <a:fillRect/>
-          </a:stretch>
-        </p:blipFill>
-        <p:spPr bwMode="auto">
-          <a:xfrm>
-            <a:off x="2286000" y="3270504"/>
-            <a:ext cx="4126992" cy="2901696"/>
-          </a:xfrm>
-          <a:prstGeom prst="rect">
-            <a:avLst/>
-          </a:prstGeom>
-          <a:noFill/>
-        </p:spPr>
-      </p:pic>
-    </p:spTree>
-  </p:cSld>
-  <p:clrMapOvr>
-    <a:masterClrMapping/>
-  </p:clrMapOvr>
-</p:sld>
-</file>
-
-<file path=ppt/slides/slide24.xml><?xml version="1.0" encoding="utf-8"?>
-<p:sld xmlns:a="http://schemas.openxmlformats.org/drawingml/2006/main" xmlns:r="http://schemas.openxmlformats.org/officeDocument/2006/relationships" xmlns:p="http://schemas.openxmlformats.org/presentationml/2006/main">
-  <p:cSld>
-    <p:spTree>
-      <p:nvGrpSpPr>
-        <p:cNvPr id="1" name=""/>
-        <p:cNvGrpSpPr/>
-        <p:nvPr/>
-      </p:nvGrpSpPr>
-      <p:grpSpPr>
-        <a:xfrm>
-          <a:off x="0" y="0"/>
-          <a:ext cx="0" cy="0"/>
-          <a:chOff x="0" y="0"/>
-          <a:chExt cx="0" cy="0"/>
-        </a:xfrm>
-      </p:grpSpPr>
-      <p:sp>
-        <p:nvSpPr>
-          <p:cNvPr id="2" name="Title 1"/>
-          <p:cNvSpPr>
-            <a:spLocks noGrp="1"/>
-          </p:cNvSpPr>
-          <p:nvPr>
-            <p:ph type="title"/>
-          </p:nvPr>
-        </p:nvSpPr>
-        <p:spPr/>
-        <p:txBody>
-          <a:bodyPr/>
-          <a:lstStyle/>
-          <a:p>
-            <a:r>
-              <a:rPr lang="en-US" dirty="0" smtClean="0"/>
-              <a:t>SWOT Analysis</a:t>
-            </a:r>
-            <a:endParaRPr lang="en-US" dirty="0"/>
-          </a:p>
-        </p:txBody>
-      </p:sp>
-      <p:pic>
-        <p:nvPicPr>
-          <p:cNvPr id="3" name="Picture 2"/>
-          <p:cNvPicPr>
-            <a:picLocks noChangeAspect="1" noChangeArrowheads="1"/>
-          </p:cNvPicPr>
-          <p:nvPr/>
-        </p:nvPicPr>
-        <p:blipFill>
-          <a:blip r:embed="rId2" cstate="print"/>
-          <a:srcRect/>
-          <a:stretch>
-            <a:fillRect/>
-          </a:stretch>
-        </p:blipFill>
-        <p:spPr bwMode="auto">
-          <a:xfrm>
-            <a:off x="2006600" y="2133600"/>
-            <a:ext cx="5080000" cy="3651250"/>
-          </a:xfrm>
-          <a:prstGeom prst="rect">
-            <a:avLst/>
-          </a:prstGeom>
-          <a:noFill/>
-          <a:ln w="9525">
-            <a:noFill/>
-            <a:miter lim="800000"/>
-            <a:headEnd/>
-            <a:tailEnd/>
-          </a:ln>
-        </p:spPr>
-      </p:pic>
-    </p:spTree>
-  </p:cSld>
-  <p:clrMapOvr>
-    <a:masterClrMapping/>
-  </p:clrMapOvr>
-</p:sld>
-</file>
-
-<file path=ppt/slides/slide25.xml><?xml version="1.0" encoding="utf-8"?>
-<p:sld xmlns:a="http://schemas.openxmlformats.org/drawingml/2006/main" xmlns:r="http://schemas.openxmlformats.org/officeDocument/2006/relationships" xmlns:p="http://schemas.openxmlformats.org/presentationml/2006/main">
-  <p:cSld>
-    <p:spTree>
-      <p:nvGrpSpPr>
-        <p:cNvPr id="1" name=""/>
-        <p:cNvGrpSpPr/>
-        <p:nvPr/>
-      </p:nvGrpSpPr>
-      <p:grpSpPr>
-        <a:xfrm>
-          <a:off x="0" y="0"/>
-          <a:ext cx="0" cy="0"/>
-          <a:chOff x="0" y="0"/>
-          <a:chExt cx="0" cy="0"/>
-        </a:xfrm>
-      </p:grpSpPr>
-      <p:sp>
-        <p:nvSpPr>
-          <p:cNvPr id="2" name="Title 1"/>
-          <p:cNvSpPr>
-            <a:spLocks noGrp="1"/>
-          </p:cNvSpPr>
-          <p:nvPr>
-            <p:ph type="title"/>
-          </p:nvPr>
-        </p:nvSpPr>
-        <p:spPr/>
-        <p:txBody>
-          <a:bodyPr/>
-          <a:lstStyle/>
-          <a:p>
-            <a:r>
-              <a:rPr lang="en-US" dirty="0" smtClean="0"/>
-              <a:t>Benchmarking</a:t>
-            </a:r>
-            <a:endParaRPr lang="en-US" dirty="0"/>
-          </a:p>
-        </p:txBody>
-      </p:sp>
-      <p:pic>
-        <p:nvPicPr>
-          <p:cNvPr id="2050" name="Picture 2"/>
-          <p:cNvPicPr>
-            <a:picLocks noChangeAspect="1" noChangeArrowheads="1"/>
-          </p:cNvPicPr>
-          <p:nvPr/>
-        </p:nvPicPr>
-        <p:blipFill>
-          <a:blip r:embed="rId2" cstate="print"/>
-          <a:srcRect/>
-          <a:stretch>
-            <a:fillRect/>
-          </a:stretch>
-        </p:blipFill>
-        <p:spPr bwMode="auto">
-          <a:xfrm>
-            <a:off x="2371725" y="1905000"/>
-            <a:ext cx="4333875" cy="3968750"/>
-          </a:xfrm>
-          <a:prstGeom prst="rect">
-            <a:avLst/>
-          </a:prstGeom>
-          <a:noFill/>
-          <a:ln w="9525">
-            <a:noFill/>
-            <a:miter lim="800000"/>
-            <a:headEnd/>
-            <a:tailEnd/>
-          </a:ln>
-        </p:spPr>
-      </p:pic>
-    </p:spTree>
-  </p:cSld>
-  <p:clrMapOvr>
-    <a:masterClrMapping/>
-  </p:clrMapOvr>
-</p:sld>
-</file>
-
-<file path=ppt/slides/slide26.xml><?xml version="1.0" encoding="utf-8"?>
-<p:sld xmlns:a="http://schemas.openxmlformats.org/drawingml/2006/main" xmlns:r="http://schemas.openxmlformats.org/officeDocument/2006/relationships" xmlns:p="http://schemas.openxmlformats.org/presentationml/2006/main">
-  <p:cSld>
-    <p:spTree>
-      <p:nvGrpSpPr>
-        <p:cNvPr id="1" name=""/>
-        <p:cNvGrpSpPr/>
-        <p:nvPr/>
-      </p:nvGrpSpPr>
-      <p:grpSpPr>
-        <a:xfrm>
-          <a:off x="0" y="0"/>
-          <a:ext cx="0" cy="0"/>
-          <a:chOff x="0" y="0"/>
-          <a:chExt cx="0" cy="0"/>
-        </a:xfrm>
-      </p:grpSpPr>
-      <p:sp>
-        <p:nvSpPr>
-          <p:cNvPr id="2" name="Title 1"/>
-          <p:cNvSpPr>
-            <a:spLocks noGrp="1"/>
-          </p:cNvSpPr>
-          <p:nvPr>
-            <p:ph type="title"/>
-          </p:nvPr>
-        </p:nvSpPr>
-        <p:spPr/>
-        <p:txBody>
-          <a:bodyPr/>
-          <a:lstStyle/>
-          <a:p>
-            <a:r>
-              <a:rPr lang="en-US" dirty="0" smtClean="0"/>
-              <a:t>Feasibility Study Report</a:t>
-            </a:r>
-            <a:endParaRPr lang="en-US" dirty="0"/>
-          </a:p>
-        </p:txBody>
-      </p:sp>
-      <p:graphicFrame>
-        <p:nvGraphicFramePr>
-          <p:cNvPr id="4" name="Diagram 3"/>
-          <p:cNvGraphicFramePr/>
-          <p:nvPr/>
-        </p:nvGraphicFramePr>
-        <p:xfrm>
-          <a:off x="3810000" y="1905000"/>
-          <a:ext cx="4572000" cy="3733800"/>
-        </p:xfrm>
-        <a:graphic>
-          <a:graphicData uri="http://schemas.openxmlformats.org/drawingml/2006/diagram">
-            <dgm:relIds xmlns:dgm="http://schemas.openxmlformats.org/drawingml/2006/diagram" xmlns:r="http://schemas.openxmlformats.org/officeDocument/2006/relationships" r:dm="rId2" r:lo="rId3" r:qs="rId4" r:cs="rId5"/>
-          </a:graphicData>
-        </a:graphic>
-      </p:graphicFrame>
-      <p:pic>
-        <p:nvPicPr>
-          <p:cNvPr id="3076" name="Picture 4"/>
-          <p:cNvPicPr>
-            <a:picLocks noChangeAspect="1" noChangeArrowheads="1"/>
-          </p:cNvPicPr>
-          <p:nvPr/>
-        </p:nvPicPr>
-        <p:blipFill>
-          <a:blip r:embed="rId7" cstate="print"/>
-          <a:srcRect/>
-          <a:stretch>
-            <a:fillRect/>
-          </a:stretch>
-        </p:blipFill>
-        <p:spPr bwMode="auto">
-          <a:xfrm>
-            <a:off x="609600" y="1524000"/>
-            <a:ext cx="2781300" cy="4010025"/>
-          </a:xfrm>
-          <a:prstGeom prst="rect">
-            <a:avLst/>
-          </a:prstGeom>
-          <a:noFill/>
-          <a:ln w="9525">
-            <a:noFill/>
-            <a:miter lim="800000"/>
-            <a:headEnd/>
-            <a:tailEnd/>
-          </a:ln>
-          <a:effectLst/>
-        </p:spPr>
-      </p:pic>
-    </p:spTree>
-  </p:cSld>
-  <p:clrMapOvr>
-    <a:masterClrMapping/>
-  </p:clrMapOvr>
-  <p:timing>
-    <p:tnLst>
-      <p:par>
-        <p:cTn id="1" dur="indefinite" restart="never" nodeType="tmRoot"/>
-      </p:par>
-    </p:tnLst>
-  </p:timing>
-</p:sld>
-</file>
-
-<file path=ppt/slides/slide27.xml><?xml version="1.0" encoding="utf-8"?>
-<p:sld xmlns:a="http://schemas.openxmlformats.org/drawingml/2006/main" xmlns:r="http://schemas.openxmlformats.org/officeDocument/2006/relationships" xmlns:p="http://schemas.openxmlformats.org/presentationml/2006/main">
-  <p:cSld>
-    <p:spTree>
-      <p:nvGrpSpPr>
-        <p:cNvPr id="1" name=""/>
-        <p:cNvGrpSpPr/>
-        <p:nvPr/>
-      </p:nvGrpSpPr>
-      <p:grpSpPr>
-        <a:xfrm>
-          <a:off x="0" y="0"/>
-          <a:ext cx="0" cy="0"/>
-          <a:chOff x="0" y="0"/>
-          <a:chExt cx="0" cy="0"/>
-        </a:xfrm>
-      </p:grpSpPr>
-      <p:sp>
-        <p:nvSpPr>
-          <p:cNvPr id="2" name="Title 1"/>
-          <p:cNvSpPr>
-            <a:spLocks noGrp="1"/>
-          </p:cNvSpPr>
-          <p:nvPr>
-            <p:ph type="title"/>
-          </p:nvPr>
-        </p:nvSpPr>
-        <p:spPr/>
-        <p:txBody>
-          <a:bodyPr/>
-          <a:lstStyle/>
-          <a:p>
-            <a:r>
-              <a:rPr lang="en-US" dirty="0" smtClean="0"/>
-              <a:t>Why Feasibility Study?</a:t>
-            </a:r>
-            <a:endParaRPr lang="en-US" dirty="0"/>
-          </a:p>
-        </p:txBody>
-      </p:sp>
-      <p:graphicFrame>
-        <p:nvGraphicFramePr>
-          <p:cNvPr id="4" name="Diagram 3"/>
-          <p:cNvGraphicFramePr/>
-          <p:nvPr/>
-        </p:nvGraphicFramePr>
-        <p:xfrm>
-          <a:off x="2590800" y="1905000"/>
-          <a:ext cx="6172200" cy="4495800"/>
-        </p:xfrm>
-        <a:graphic>
-          <a:graphicData uri="http://schemas.openxmlformats.org/drawingml/2006/diagram">
-            <dgm:relIds xmlns:dgm="http://schemas.openxmlformats.org/drawingml/2006/diagram" xmlns:r="http://schemas.openxmlformats.org/officeDocument/2006/relationships" r:dm="rId2" r:lo="rId3" r:qs="rId4" r:cs="rId5"/>
-          </a:graphicData>
-        </a:graphic>
-      </p:graphicFrame>
-      <p:pic>
-        <p:nvPicPr>
-          <p:cNvPr id="4099" name="Picture 3"/>
-          <p:cNvPicPr>
-            <a:picLocks noChangeAspect="1" noChangeArrowheads="1"/>
-          </p:cNvPicPr>
-          <p:nvPr/>
-        </p:nvPicPr>
-        <p:blipFill>
-          <a:blip r:embed="rId7" cstate="print"/>
-          <a:srcRect/>
-          <a:stretch>
-            <a:fillRect/>
-          </a:stretch>
-        </p:blipFill>
-        <p:spPr bwMode="auto">
-          <a:xfrm>
-            <a:off x="533400" y="2514600"/>
-            <a:ext cx="1828800" cy="2247900"/>
-          </a:xfrm>
-          <a:prstGeom prst="rect">
-            <a:avLst/>
-          </a:prstGeom>
-          <a:noFill/>
-          <a:ln w="9525">
-            <a:noFill/>
-            <a:miter lim="800000"/>
-            <a:headEnd/>
-            <a:tailEnd/>
-          </a:ln>
-          <a:effectLst/>
-        </p:spPr>
-      </p:pic>
-    </p:spTree>
-  </p:cSld>
-  <p:clrMapOvr>
-    <a:masterClrMapping/>
-  </p:clrMapOvr>
-  <p:timing>
-    <p:tnLst>
-      <p:par>
-        <p:cTn id="1" dur="indefinite" restart="never" nodeType="tmRoot"/>
-      </p:par>
-    </p:tnLst>
-  </p:timing>
-</p:sld>
-</file>
-
-<file path=ppt/slides/slide28.xml><?xml version="1.0" encoding="utf-8"?>
 <p:sld xmlns:a="http://schemas.openxmlformats.org/drawingml/2006/main" xmlns:r="http://schemas.openxmlformats.org/officeDocument/2006/relationships" xmlns:p="http://schemas.openxmlformats.org/presentationml/2006/main">
   <p:cSld>
     <p:spTree>
@@ -13635,7 +7909,7 @@
 </p:sld>
 </file>
 
-<file path=ppt/slides/slide29.xml><?xml version="1.0" encoding="utf-8"?>
+<file path=ppt/slides/slide22.xml><?xml version="1.0" encoding="utf-8"?>
 <p:sld xmlns:a="http://schemas.openxmlformats.org/drawingml/2006/main" xmlns:r="http://schemas.openxmlformats.org/officeDocument/2006/relationships" xmlns:p="http://schemas.openxmlformats.org/presentationml/2006/main">
   <p:cSld>
     <p:spTree>
@@ -13652,9 +7926,34 @@
           <a:chExt cx="0" cy="0"/>
         </a:xfrm>
       </p:grpSpPr>
+      <p:sp>
+        <p:nvSpPr>
+          <p:cNvPr id="2" name="Title 1"/>
+          <p:cNvSpPr>
+            <a:spLocks noGrp="1"/>
+          </p:cNvSpPr>
+          <p:nvPr>
+            <p:ph type="title"/>
+          </p:nvPr>
+        </p:nvSpPr>
+        <p:spPr/>
+        <p:txBody>
+          <a:bodyPr/>
+          <a:lstStyle/>
+          <a:p>
+            <a:r>
+              <a:rPr lang="en-US" dirty="0" smtClean="0"/>
+              <a:t>Which Methodology?</a:t>
+            </a:r>
+            <a:endParaRPr lang="en-US" dirty="0"/>
+          </a:p>
+        </p:txBody>
+      </p:sp>
       <p:pic>
         <p:nvPicPr>
-          <p:cNvPr id="9" name="Picture 2"/>
+          <p:cNvPr id="6" name="Picture 3">
+            <a:hlinkClick r:id="rId2" action="ppaction://hlinkpres?slideindex=1&amp;slidetitle="/>
+          </p:cNvPr>
           <p:cNvPicPr>
             <a:picLocks noChangeAspect="1" noChangeArrowheads="1"/>
           </p:cNvPicPr>
@@ -13669,8 +7968,8 @@
         </p:blipFill>
         <p:spPr bwMode="auto">
           <a:xfrm>
-            <a:off x="4914900" y="2438400"/>
-            <a:ext cx="4076700" cy="3686175"/>
+            <a:off x="304800" y="4087368"/>
+            <a:ext cx="3419094" cy="2389632"/>
           </a:xfrm>
           <a:prstGeom prst="rect">
             <a:avLst/>
@@ -13682,47 +7981,105 @@
             <a:headEnd/>
             <a:tailEnd/>
           </a:ln>
+          <a:effectLst/>
         </p:spPr>
       </p:pic>
-      <p:sp>
-        <p:nvSpPr>
-          <p:cNvPr id="2" name="Title 1"/>
-          <p:cNvSpPr>
-            <a:spLocks noGrp="1"/>
-          </p:cNvSpPr>
-          <p:nvPr>
-            <p:ph type="title"/>
-          </p:nvPr>
-        </p:nvSpPr>
-        <p:spPr>
-          <a:xfrm>
-            <a:off x="457200" y="76200"/>
-            <a:ext cx="8229600" cy="1143000"/>
-          </a:xfrm>
-        </p:spPr>
-        <p:txBody>
-          <a:bodyPr/>
-          <a:lstStyle/>
-          <a:p>
-            <a:pPr lvl="0"/>
-            <a:r>
-              <a:rPr lang="en-US" dirty="0" smtClean="0"/>
-              <a:t>Project Charter</a:t>
-            </a:r>
-            <a:endParaRPr lang="en-US" dirty="0"/>
-          </a:p>
-        </p:txBody>
-      </p:sp>
-      <p:sp>
-        <p:nvSpPr>
-          <p:cNvPr id="12" name="Rectangle 11"/>
+      <p:pic>
+        <p:nvPicPr>
+          <p:cNvPr id="7" name="Picture 2">
+            <a:hlinkClick r:id="rId4" action="ppaction://hlinkpres?slideindex=1&amp;slidetitle="/>
+          </p:cNvPr>
+          <p:cNvPicPr>
+            <a:picLocks noChangeAspect="1" noChangeArrowheads="1"/>
+          </p:cNvPicPr>
+          <p:nvPr/>
+        </p:nvPicPr>
+        <p:blipFill>
+          <a:blip r:embed="rId5" cstate="print"/>
+          <a:srcRect/>
+          <a:stretch>
+            <a:fillRect/>
+          </a:stretch>
+        </p:blipFill>
+        <p:spPr bwMode="auto">
+          <a:xfrm>
+            <a:off x="4038600" y="4422267"/>
+            <a:ext cx="4864227" cy="2130933"/>
+          </a:xfrm>
+          <a:prstGeom prst="rect">
+            <a:avLst/>
+          </a:prstGeom>
+          <a:noFill/>
+          <a:ln w="9525">
+            <a:noFill/>
+            <a:miter lim="800000"/>
+            <a:headEnd/>
+            <a:tailEnd/>
+          </a:ln>
+        </p:spPr>
+      </p:pic>
+      <p:pic>
+        <p:nvPicPr>
+          <p:cNvPr id="4098" name="Picture 2" descr="http://fastbiz101.com/101/wpfast-content/uploads/2016/06/review.jpeg"/>
+          <p:cNvPicPr>
+            <a:picLocks noChangeAspect="1" noChangeArrowheads="1"/>
+          </p:cNvPicPr>
+          <p:nvPr/>
+        </p:nvPicPr>
+        <p:blipFill>
+          <a:blip r:embed="rId6" cstate="print"/>
+          <a:srcRect/>
+          <a:stretch>
+            <a:fillRect/>
+          </a:stretch>
+        </p:blipFill>
+        <p:spPr bwMode="auto">
+          <a:xfrm>
+            <a:off x="6019800" y="3088767"/>
+            <a:ext cx="1600200" cy="800100"/>
+          </a:xfrm>
+          <a:prstGeom prst="rect">
+            <a:avLst/>
+          </a:prstGeom>
+          <a:noFill/>
+        </p:spPr>
+      </p:pic>
+      <p:pic>
+        <p:nvPicPr>
+          <p:cNvPr id="9" name="Picture 2" descr="http://fastbiz101.com/101/wpfast-content/uploads/2016/06/review.jpeg"/>
+          <p:cNvPicPr>
+            <a:picLocks noChangeAspect="1" noChangeArrowheads="1"/>
+          </p:cNvPicPr>
+          <p:nvPr/>
+        </p:nvPicPr>
+        <p:blipFill>
+          <a:blip r:embed="rId6" cstate="print"/>
+          <a:srcRect/>
+          <a:stretch>
+            <a:fillRect/>
+          </a:stretch>
+        </p:blipFill>
+        <p:spPr bwMode="auto">
+          <a:xfrm>
+            <a:off x="1295400" y="3172968"/>
+            <a:ext cx="1600200" cy="800100"/>
+          </a:xfrm>
+          <a:prstGeom prst="rect">
+            <a:avLst/>
+          </a:prstGeom>
+          <a:noFill/>
+        </p:spPr>
+      </p:pic>
+      <p:sp>
+        <p:nvSpPr>
+          <p:cNvPr id="8" name="Rectangle 7"/>
           <p:cNvSpPr/>
           <p:nvPr/>
         </p:nvSpPr>
         <p:spPr>
           <a:xfrm>
-            <a:off x="304800" y="2362200"/>
-            <a:ext cx="5486400" cy="2739211"/>
+            <a:off x="5486400" y="3965067"/>
+            <a:ext cx="3352799" cy="369332"/>
           </a:xfrm>
           <a:prstGeom prst="rect">
             <a:avLst/>
@@ -13734,135 +8091,90 @@
           </a:bodyPr>
           <a:lstStyle/>
           <a:p>
-            <a:pPr marL="514350" indent="-514350">
-              <a:buFont typeface="Arial" pitchFamily="34" charset="0"/>
-              <a:buChar char="•"/>
-            </a:pPr>
-            <a:r>
-              <a:rPr lang="en-US" sz="2000" dirty="0" smtClean="0">
+            <a:r>
+              <a:rPr lang="en-US" b="1" dirty="0" smtClean="0">
                 <a:latin typeface="+mj-lt"/>
               </a:rPr>
-              <a:t>The background, context, overview</a:t>
-            </a:r>
-            <a:endParaRPr lang="en-US" sz="2000" u="sng" dirty="0" smtClean="0">
+              <a:t>RUP (Rational Unified Process)</a:t>
+            </a:r>
+            <a:endParaRPr lang="en-US" b="1" dirty="0">
               <a:latin typeface="+mj-lt"/>
             </a:endParaRPr>
           </a:p>
-          <a:p>
-            <a:pPr marL="514350" indent="-514350">
-              <a:buFont typeface="Arial" pitchFamily="34" charset="0"/>
-              <a:buChar char="•"/>
-            </a:pPr>
-            <a:r>
-              <a:rPr lang="en-US" sz="2000" dirty="0" smtClean="0">
-                <a:latin typeface="+mj-lt"/>
-              </a:rPr>
-              <a:t>Project Management and Governance</a:t>
-            </a:r>
-          </a:p>
-          <a:p>
-            <a:pPr marL="971550" lvl="1" indent="-514350">
-              <a:buFont typeface="Wingdings" pitchFamily="2" charset="2"/>
-              <a:buChar char="v"/>
-            </a:pPr>
-            <a:r>
-              <a:rPr lang="en-US" sz="1600" dirty="0" smtClean="0">
-                <a:latin typeface="+mj-lt"/>
-              </a:rPr>
-              <a:t>Role/Name/Responsibilities</a:t>
-            </a:r>
-          </a:p>
-          <a:p>
-            <a:pPr marL="514350" indent="-514350">
-              <a:buFont typeface="Arial" pitchFamily="34" charset="0"/>
-              <a:buChar char="•"/>
-            </a:pPr>
-            <a:r>
-              <a:rPr lang="en-US" sz="2000" dirty="0" smtClean="0">
-                <a:latin typeface="+mj-lt"/>
-              </a:rPr>
-              <a:t>Project Facilities and Resources</a:t>
-            </a:r>
-          </a:p>
-          <a:p>
-            <a:pPr marL="514350" indent="-514350">
-              <a:buFont typeface="Arial" pitchFamily="34" charset="0"/>
-              <a:buChar char="•"/>
-            </a:pPr>
-            <a:r>
-              <a:rPr lang="en-US" sz="2000" dirty="0" smtClean="0">
-                <a:latin typeface="+mj-lt"/>
-              </a:rPr>
-              <a:t>Milestones.</a:t>
-            </a:r>
-          </a:p>
-          <a:p>
-            <a:pPr marL="514350" indent="-514350">
-              <a:buFont typeface="Arial" pitchFamily="34" charset="0"/>
-              <a:buChar char="•"/>
-            </a:pPr>
-            <a:r>
-              <a:rPr lang="en-US" sz="2000" dirty="0" smtClean="0">
-                <a:latin typeface="+mj-lt"/>
-              </a:rPr>
-              <a:t>Impact Analysis</a:t>
-            </a:r>
-          </a:p>
-          <a:p>
-            <a:pPr marL="971550" lvl="1" indent="-514350">
-              <a:buFont typeface="Wingdings" pitchFamily="2" charset="2"/>
-              <a:buChar char="v"/>
-            </a:pPr>
-            <a:r>
-              <a:rPr lang="en-US" sz="1600" dirty="0" smtClean="0">
-                <a:latin typeface="+mj-lt"/>
-              </a:rPr>
-              <a:t>Who? What?</a:t>
-            </a:r>
-          </a:p>
-          <a:p>
-            <a:pPr marL="514350" indent="-514350">
-              <a:buFont typeface="Arial" pitchFamily="34" charset="0"/>
-              <a:buChar char="•"/>
-            </a:pPr>
-            <a:r>
-              <a:rPr lang="en-US" sz="2000" dirty="0" smtClean="0">
-                <a:latin typeface="+mj-lt"/>
-              </a:rPr>
-              <a:t>Assumptions</a:t>
-            </a:r>
-          </a:p>
-          <a:p>
-            <a:pPr marL="514350" indent="-514350">
-              <a:buFont typeface="Arial" pitchFamily="34" charset="0"/>
-              <a:buChar char="•"/>
-            </a:pPr>
-            <a:r>
-              <a:rPr lang="en-US" sz="2000" dirty="0" smtClean="0">
-                <a:latin typeface="+mj-lt"/>
-              </a:rPr>
-              <a:t>Signatures</a:t>
-            </a:r>
-          </a:p>
-        </p:txBody>
-      </p:sp>
-      <p:sp>
-        <p:nvSpPr>
-          <p:cNvPr id="8" name="Rectangle 7"/>
-          <p:cNvSpPr/>
+        </p:txBody>
+      </p:sp>
+      <p:pic>
+        <p:nvPicPr>
+          <p:cNvPr id="2050" name="Picture 2" descr="http://www.texasrockgym.com/wp-content/uploads/2016/04/exercise.jpg"/>
+          <p:cNvPicPr>
+            <a:picLocks noChangeAspect="1" noChangeArrowheads="1"/>
+          </p:cNvPicPr>
           <p:nvPr/>
-        </p:nvSpPr>
-        <p:spPr>
-          <a:xfrm>
-            <a:off x="228600" y="1074003"/>
-            <a:ext cx="8610600" cy="1200329"/>
+        </p:nvPicPr>
+        <p:blipFill>
+          <a:blip r:embed="rId7" cstate="print"/>
+          <a:srcRect/>
+          <a:stretch>
+            <a:fillRect/>
+          </a:stretch>
+        </p:blipFill>
+        <p:spPr bwMode="auto">
+          <a:xfrm>
+            <a:off x="685800" y="1371600"/>
+            <a:ext cx="2602992" cy="1600200"/>
           </a:xfrm>
           <a:prstGeom prst="rect">
             <a:avLst/>
           </a:prstGeom>
-          <a:ln>
+          <a:noFill/>
+        </p:spPr>
+      </p:pic>
+      <p:pic>
+        <p:nvPicPr>
+          <p:cNvPr id="10" name="Picture 4"/>
+          <p:cNvPicPr>
+            <a:picLocks noChangeAspect="1" noChangeArrowheads="1"/>
+          </p:cNvPicPr>
+          <p:nvPr/>
+        </p:nvPicPr>
+        <p:blipFill>
+          <a:blip r:embed="rId8" cstate="print"/>
+          <a:srcRect/>
+          <a:stretch>
+            <a:fillRect/>
+          </a:stretch>
+        </p:blipFill>
+        <p:spPr bwMode="auto">
+          <a:xfrm>
+            <a:off x="7429500" y="381000"/>
+            <a:ext cx="1333500" cy="1314450"/>
+          </a:xfrm>
+          <a:prstGeom prst="rect">
+            <a:avLst/>
+          </a:prstGeom>
+          <a:noFill/>
+          <a:ln w="9525">
             <a:noFill/>
+            <a:miter lim="800000"/>
+            <a:headEnd/>
+            <a:tailEnd/>
           </a:ln>
+        </p:spPr>
+      </p:pic>
+      <p:sp>
+        <p:nvSpPr>
+          <p:cNvPr id="11" name="Rectangle 10"/>
+          <p:cNvSpPr/>
+          <p:nvPr/>
+        </p:nvSpPr>
+        <p:spPr>
+          <a:xfrm>
+            <a:off x="3581400" y="1897559"/>
+            <a:ext cx="5181600" cy="769441"/>
+          </a:xfrm>
+          <a:prstGeom prst="rect">
+            <a:avLst/>
+          </a:prstGeom>
         </p:spPr>
         <p:style>
           <a:lnRef idx="2">
@@ -13884,84 +8196,118 @@
           </a:bodyPr>
           <a:lstStyle/>
           <a:p>
-            <a:pPr algn="ctr">
-              <a:buNone/>
-            </a:pPr>
-            <a:r>
-              <a:rPr lang="en-US" sz="2400" dirty="0" smtClean="0">
-                <a:latin typeface="+mj-lt"/>
-              </a:rPr>
-              <a:t>A document that </a:t>
-            </a:r>
-            <a:r>
-              <a:rPr lang="en-US" sz="2400" u="sng" dirty="0" smtClean="0">
-                <a:latin typeface="+mj-lt"/>
-              </a:rPr>
-              <a:t>formally</a:t>
-            </a:r>
-            <a:r>
-              <a:rPr lang="en-US" sz="2400" dirty="0" smtClean="0">
-                <a:latin typeface="+mj-lt"/>
-              </a:rPr>
-              <a:t> </a:t>
-            </a:r>
-            <a:r>
-              <a:rPr lang="en-US" sz="2400" i="1" dirty="0" smtClean="0">
-                <a:solidFill>
-                  <a:srgbClr val="C00000"/>
-                </a:solidFill>
-                <a:latin typeface="+mj-lt"/>
-              </a:rPr>
-              <a:t>authorizes</a:t>
-            </a:r>
-            <a:r>
-              <a:rPr lang="en-US" sz="2400" dirty="0" smtClean="0">
-                <a:latin typeface="+mj-lt"/>
-              </a:rPr>
-              <a:t> a project or a phase and documenting </a:t>
-            </a:r>
-            <a:r>
-              <a:rPr lang="en-US" sz="2400" u="sng" dirty="0" smtClean="0">
+            <a:pPr algn="ctr"/>
+            <a:r>
+              <a:rPr lang="en-US" sz="2200" dirty="0" smtClean="0">
                 <a:solidFill>
                   <a:schemeClr val="tx1"/>
                 </a:solidFill>
                 <a:latin typeface="+mj-lt"/>
               </a:rPr>
-              <a:t>initial requirements</a:t>
-            </a:r>
-            <a:r>
-              <a:rPr lang="en-US" sz="2400" dirty="0" smtClean="0">
+              <a:t>Refer to the </a:t>
+            </a:r>
+            <a:r>
+              <a:rPr lang="en-US" sz="2200" b="1" dirty="0" smtClean="0">
+                <a:solidFill>
+                  <a:schemeClr val="tx1"/>
+                </a:solidFill>
                 <a:latin typeface="+mj-lt"/>
               </a:rPr>
-              <a:t> that satisfy the stakeholder’s </a:t>
-            </a:r>
-            <a:r>
-              <a:rPr lang="en-US" sz="2400" u="sng" dirty="0" smtClean="0">
+              <a:t>Introduction to Software Engineering </a:t>
+            </a:r>
+            <a:r>
+              <a:rPr lang="en-US" sz="2200" dirty="0" smtClean="0">
+                <a:solidFill>
+                  <a:schemeClr val="tx1"/>
+                </a:solidFill>
+              </a:rPr>
+              <a:t>course </a:t>
+            </a:r>
+            <a:r>
+              <a:rPr lang="en-US" sz="2200" dirty="0" smtClean="0">
+                <a:solidFill>
+                  <a:schemeClr val="tx1"/>
+                </a:solidFill>
                 <a:latin typeface="+mj-lt"/>
               </a:rPr>
-              <a:t>needs</a:t>
-            </a:r>
-            <a:r>
-              <a:rPr lang="en-US" sz="2400" dirty="0" smtClean="0">
-                <a:latin typeface="+mj-lt"/>
-              </a:rPr>
-              <a:t> and </a:t>
-            </a:r>
-            <a:r>
-              <a:rPr lang="en-US" sz="2400" u="sng" dirty="0" smtClean="0">
-                <a:latin typeface="+mj-lt"/>
-              </a:rPr>
-              <a:t>expectations</a:t>
-            </a:r>
-            <a:r>
-              <a:rPr lang="en-US" sz="2400" dirty="0" smtClean="0">
-                <a:latin typeface="+mj-lt"/>
-              </a:rPr>
-              <a:t>.</a:t>
-            </a:r>
-          </a:p>
-        </p:txBody>
-      </p:sp>
+              <a:t>for more information.</a:t>
+            </a:r>
+          </a:p>
+        </p:txBody>
+      </p:sp>
+    </p:spTree>
+  </p:cSld>
+  <p:clrMapOvr>
+    <a:masterClrMapping/>
+  </p:clrMapOvr>
+</p:sld>
+</file>
+
+<file path=ppt/slides/slide23.xml><?xml version="1.0" encoding="utf-8"?>
+<p:sld xmlns:a="http://schemas.openxmlformats.org/drawingml/2006/main" xmlns:r="http://schemas.openxmlformats.org/officeDocument/2006/relationships" xmlns:p="http://schemas.openxmlformats.org/presentationml/2006/main">
+  <p:cSld>
+    <p:spTree>
+      <p:nvGrpSpPr>
+        <p:cNvPr id="1" name=""/>
+        <p:cNvGrpSpPr/>
+        <p:nvPr/>
+      </p:nvGrpSpPr>
+      <p:grpSpPr>
+        <a:xfrm>
+          <a:off x="0" y="0"/>
+          <a:ext cx="0" cy="0"/>
+          <a:chOff x="0" y="0"/>
+          <a:chExt cx="0" cy="0"/>
+        </a:xfrm>
+      </p:grpSpPr>
+      <p:sp>
+        <p:nvSpPr>
+          <p:cNvPr id="18434" name="Title 1"/>
+          <p:cNvSpPr>
+            <a:spLocks noGrp="1"/>
+          </p:cNvSpPr>
+          <p:nvPr>
+            <p:ph type="title"/>
+          </p:nvPr>
+        </p:nvSpPr>
+        <p:spPr/>
+        <p:txBody>
+          <a:bodyPr/>
+          <a:lstStyle/>
+          <a:p>
+            <a:pPr eaLnBrk="1" hangingPunct="1"/>
+            <a:r>
+              <a:rPr lang="en-US" dirty="0" smtClean="0"/>
+              <a:t>Thank You &amp; See You Again</a:t>
+            </a:r>
+          </a:p>
+        </p:txBody>
+      </p:sp>
+      <p:pic>
+        <p:nvPicPr>
+          <p:cNvPr id="5" name="Content Placeholder 4"/>
+          <p:cNvPicPr>
+            <a:picLocks noGrp="1" noChangeAspect="1" noChangeArrowheads="1"/>
+          </p:cNvPicPr>
+          <p:nvPr>
+            <p:ph idx="1"/>
+          </p:nvPr>
+        </p:nvPicPr>
+        <p:blipFill>
+          <a:blip r:embed="rId2" cstate="print"/>
+          <a:srcRect/>
+          <a:stretch>
+            <a:fillRect/>
+          </a:stretch>
+        </p:blipFill>
+        <p:spPr>
+          <a:xfrm>
+            <a:off x="1143000" y="1676400"/>
+            <a:ext cx="6810375" cy="4525963"/>
+          </a:xfrm>
+          <a:noFill/>
+        </p:spPr>
+      </p:pic>
     </p:spTree>
   </p:cSld>
   <p:clrMapOvr>
@@ -14135,17 +8481,11 @@
             </a:pPr>
             <a:r>
               <a:rPr lang="en-US" sz="2400" dirty="0" smtClean="0"/>
-              <a:t>Feasibility study report.</a:t>
-            </a:r>
-          </a:p>
-          <a:p>
-            <a:pPr marL="571500" indent="-571500">
-              <a:buFont typeface="+mj-lt"/>
-              <a:buAutoNum type="romanUcPeriod"/>
-            </a:pPr>
+              <a:t>Project </a:t>
+            </a:r>
             <a:r>
               <a:rPr lang="en-US" sz="2400" dirty="0" smtClean="0"/>
-              <a:t>Project charter.</a:t>
+              <a:t>charter.</a:t>
             </a:r>
           </a:p>
           <a:p>
@@ -14172,910 +8512,6 @@
   <p:clrMapOvr>
     <a:masterClrMapping/>
   </p:clrMapOvr>
-</p:sld>
-</file>
-
-<file path=ppt/slides/slide30.xml><?xml version="1.0" encoding="utf-8"?>
-<p:sld xmlns:a="http://schemas.openxmlformats.org/drawingml/2006/main" xmlns:r="http://schemas.openxmlformats.org/officeDocument/2006/relationships" xmlns:p="http://schemas.openxmlformats.org/presentationml/2006/main">
-  <p:cSld>
-    <p:spTree>
-      <p:nvGrpSpPr>
-        <p:cNvPr id="1" name=""/>
-        <p:cNvGrpSpPr/>
-        <p:nvPr/>
-      </p:nvGrpSpPr>
-      <p:grpSpPr>
-        <a:xfrm>
-          <a:off x="0" y="0"/>
-          <a:ext cx="0" cy="0"/>
-          <a:chOff x="0" y="0"/>
-          <a:chExt cx="0" cy="0"/>
-        </a:xfrm>
-      </p:grpSpPr>
-      <p:sp>
-        <p:nvSpPr>
-          <p:cNvPr id="2" name="Title 1"/>
-          <p:cNvSpPr>
-            <a:spLocks noGrp="1"/>
-          </p:cNvSpPr>
-          <p:nvPr>
-            <p:ph type="title"/>
-          </p:nvPr>
-        </p:nvSpPr>
-        <p:spPr/>
-        <p:txBody>
-          <a:bodyPr/>
-          <a:lstStyle/>
-          <a:p>
-            <a:r>
-              <a:rPr lang="en-US" dirty="0" smtClean="0"/>
-              <a:t>Responsibility Assignment Matrix</a:t>
-            </a:r>
-            <a:endParaRPr lang="en-US" dirty="0"/>
-          </a:p>
-        </p:txBody>
-      </p:sp>
-      <p:sp>
-        <p:nvSpPr>
-          <p:cNvPr id="3" name="Content Placeholder 2"/>
-          <p:cNvSpPr>
-            <a:spLocks noGrp="1"/>
-          </p:cNvSpPr>
-          <p:nvPr>
-            <p:ph idx="1"/>
-          </p:nvPr>
-        </p:nvSpPr>
-        <p:spPr>
-          <a:xfrm>
-            <a:off x="457200" y="1600201"/>
-            <a:ext cx="8229600" cy="2362200"/>
-          </a:xfrm>
-        </p:spPr>
-        <p:txBody>
-          <a:bodyPr/>
-          <a:lstStyle/>
-          <a:p>
-            <a:r>
-              <a:rPr lang="en-US" sz="2200" dirty="0" smtClean="0"/>
-              <a:t>Responsibility Assignment Matrix (RAM), also known as </a:t>
-            </a:r>
-          </a:p>
-          <a:p>
-            <a:r>
-              <a:rPr lang="en-US" sz="2200" dirty="0" smtClean="0"/>
-              <a:t>RACI matrix (Responsible, Accountable, Consulted, and Informed matrix), or</a:t>
-            </a:r>
-          </a:p>
-          <a:p>
-            <a:r>
-              <a:rPr lang="en-US" sz="2200" dirty="0" smtClean="0"/>
-              <a:t>LRC (linear responsibility chart)</a:t>
-            </a:r>
-          </a:p>
-          <a:p>
-            <a:r>
-              <a:rPr lang="en-US" sz="2200" dirty="0" smtClean="0"/>
-              <a:t>describes the participation by various roles in completing tasks or deliverables for a project.</a:t>
-            </a:r>
-          </a:p>
-        </p:txBody>
-      </p:sp>
-      <p:pic>
-        <p:nvPicPr>
-          <p:cNvPr id="38914" name="Picture 2"/>
-          <p:cNvPicPr>
-            <a:picLocks noChangeAspect="1" noChangeArrowheads="1"/>
-          </p:cNvPicPr>
-          <p:nvPr/>
-        </p:nvPicPr>
-        <p:blipFill>
-          <a:blip r:embed="rId3" cstate="print"/>
-          <a:srcRect/>
-          <a:stretch>
-            <a:fillRect/>
-          </a:stretch>
-        </p:blipFill>
-        <p:spPr bwMode="auto">
-          <a:xfrm>
-            <a:off x="381000" y="4038600"/>
-            <a:ext cx="4417695" cy="2446020"/>
-          </a:xfrm>
-          <a:prstGeom prst="rect">
-            <a:avLst/>
-          </a:prstGeom>
-          <a:noFill/>
-          <a:ln w="9525">
-            <a:noFill/>
-            <a:miter lim="800000"/>
-            <a:headEnd/>
-            <a:tailEnd/>
-          </a:ln>
-        </p:spPr>
-      </p:pic>
-      <p:sp>
-        <p:nvSpPr>
-          <p:cNvPr id="5" name="TextBox 4"/>
-          <p:cNvSpPr txBox="1"/>
-          <p:nvPr/>
-        </p:nvSpPr>
-        <p:spPr>
-          <a:xfrm>
-            <a:off x="4901044" y="4495800"/>
-            <a:ext cx="4014355" cy="1785104"/>
-          </a:xfrm>
-          <a:prstGeom prst="rect">
-            <a:avLst/>
-          </a:prstGeom>
-          <a:noFill/>
-        </p:spPr>
-        <p:txBody>
-          <a:bodyPr wrap="square" rtlCol="0">
-            <a:spAutoFit/>
-          </a:bodyPr>
-          <a:lstStyle/>
-          <a:p>
-            <a:pPr marL="457200" indent="-457200">
-              <a:buFont typeface="Arial" pitchFamily="34" charset="0"/>
-              <a:buChar char="•"/>
-            </a:pPr>
-            <a:r>
-              <a:rPr lang="en-US" sz="2200" i="1" dirty="0" smtClean="0">
-                <a:solidFill>
-                  <a:srgbClr val="C00000"/>
-                </a:solidFill>
-                <a:latin typeface="+mj-lt"/>
-              </a:rPr>
-              <a:t>Responsibility</a:t>
-            </a:r>
-            <a:r>
-              <a:rPr lang="en-US" sz="2200" dirty="0" smtClean="0">
-                <a:latin typeface="+mj-lt"/>
-              </a:rPr>
-              <a:t> can be shared.</a:t>
-            </a:r>
-          </a:p>
-          <a:p>
-            <a:pPr marL="457200" indent="-457200">
-              <a:buFont typeface="Arial" pitchFamily="34" charset="0"/>
-              <a:buChar char="•"/>
-            </a:pPr>
-            <a:r>
-              <a:rPr lang="en-US" sz="2200" i="1" dirty="0" smtClean="0">
-                <a:solidFill>
-                  <a:srgbClr val="C00000"/>
-                </a:solidFill>
-                <a:latin typeface="+mj-lt"/>
-              </a:rPr>
-              <a:t>Accountability</a:t>
-            </a:r>
-            <a:r>
-              <a:rPr lang="en-US" sz="2200" dirty="0" smtClean="0">
-                <a:latin typeface="+mj-lt"/>
-              </a:rPr>
-              <a:t> cannot be shared. It is something you hold a person to only after a task is done </a:t>
-            </a:r>
-            <a:r>
-              <a:rPr lang="en-US" sz="2200" b="1" dirty="0" smtClean="0">
-                <a:latin typeface="+mj-lt"/>
-              </a:rPr>
-              <a:t>or not done</a:t>
-            </a:r>
-            <a:r>
-              <a:rPr lang="en-US" sz="2200" dirty="0" smtClean="0">
-                <a:latin typeface="+mj-lt"/>
-              </a:rPr>
-              <a:t>.</a:t>
-            </a:r>
-          </a:p>
-        </p:txBody>
-      </p:sp>
-      <p:sp>
-        <p:nvSpPr>
-          <p:cNvPr id="9" name="Rectangle 8"/>
-          <p:cNvSpPr/>
-          <p:nvPr/>
-        </p:nvSpPr>
-        <p:spPr>
-          <a:xfrm>
-            <a:off x="609600" y="5410200"/>
-            <a:ext cx="1066800" cy="307777"/>
-          </a:xfrm>
-          <a:prstGeom prst="rect">
-            <a:avLst/>
-          </a:prstGeom>
-          <a:solidFill>
-            <a:schemeClr val="bg1">
-              <a:lumMod val="95000"/>
-            </a:schemeClr>
-          </a:solidFill>
-        </p:spPr>
-        <p:txBody>
-          <a:bodyPr wrap="square">
-            <a:spAutoFit/>
-          </a:bodyPr>
-          <a:lstStyle/>
-          <a:p>
-            <a:pPr algn="ctr"/>
-            <a:r>
-              <a:rPr lang="en-US" sz="1400" b="1" dirty="0" smtClean="0">
-                <a:latin typeface="+mj-lt"/>
-              </a:rPr>
-              <a:t>Deliverable</a:t>
-            </a:r>
-            <a:endParaRPr lang="en-US" sz="1400" b="1" dirty="0">
-              <a:latin typeface="+mj-lt"/>
-            </a:endParaRPr>
-          </a:p>
-        </p:txBody>
-      </p:sp>
-    </p:spTree>
-  </p:cSld>
-  <p:clrMapOvr>
-    <a:masterClrMapping/>
-  </p:clrMapOvr>
-</p:sld>
-</file>
-
-<file path=ppt/slides/slide31.xml><?xml version="1.0" encoding="utf-8"?>
-<p:sld xmlns:a="http://schemas.openxmlformats.org/drawingml/2006/main" xmlns:r="http://schemas.openxmlformats.org/officeDocument/2006/relationships" xmlns:p="http://schemas.openxmlformats.org/presentationml/2006/main">
-  <p:cSld>
-    <p:spTree>
-      <p:nvGrpSpPr>
-        <p:cNvPr id="1" name=""/>
-        <p:cNvGrpSpPr/>
-        <p:nvPr/>
-      </p:nvGrpSpPr>
-      <p:grpSpPr>
-        <a:xfrm>
-          <a:off x="0" y="0"/>
-          <a:ext cx="0" cy="0"/>
-          <a:chOff x="0" y="0"/>
-          <a:chExt cx="0" cy="0"/>
-        </a:xfrm>
-      </p:grpSpPr>
-      <p:sp>
-        <p:nvSpPr>
-          <p:cNvPr id="2" name="Title 1"/>
-          <p:cNvSpPr>
-            <a:spLocks noGrp="1"/>
-          </p:cNvSpPr>
-          <p:nvPr>
-            <p:ph type="title"/>
-          </p:nvPr>
-        </p:nvSpPr>
-        <p:spPr/>
-        <p:txBody>
-          <a:bodyPr/>
-          <a:lstStyle/>
-          <a:p>
-            <a:r>
-              <a:rPr lang="en-US" dirty="0" smtClean="0"/>
-              <a:t>Checklist</a:t>
-            </a:r>
-            <a:endParaRPr lang="en-US" dirty="0"/>
-          </a:p>
-        </p:txBody>
-      </p:sp>
-      <p:sp>
-        <p:nvSpPr>
-          <p:cNvPr id="3" name="Content Placeholder 2"/>
-          <p:cNvSpPr>
-            <a:spLocks noGrp="1"/>
-          </p:cNvSpPr>
-          <p:nvPr>
-            <p:ph idx="1"/>
-          </p:nvPr>
-        </p:nvSpPr>
-        <p:spPr/>
-        <p:txBody>
-          <a:bodyPr/>
-          <a:lstStyle/>
-          <a:p>
-            <a:r>
-              <a:rPr lang="en-US" sz="2400" i="1" dirty="0" smtClean="0">
-                <a:solidFill>
-                  <a:srgbClr val="C00000"/>
-                </a:solidFill>
-              </a:rPr>
-              <a:t>Why</a:t>
-            </a:r>
-            <a:r>
-              <a:rPr lang="en-US" sz="2400" dirty="0" smtClean="0"/>
-              <a:t> this project?</a:t>
-            </a:r>
-          </a:p>
-          <a:p>
-            <a:r>
-              <a:rPr lang="en-US" sz="2400" dirty="0" smtClean="0"/>
-              <a:t>What are the </a:t>
-            </a:r>
-            <a:r>
-              <a:rPr lang="en-US" sz="2400" i="1" dirty="0" smtClean="0">
-                <a:solidFill>
-                  <a:srgbClr val="C00000"/>
-                </a:solidFill>
-              </a:rPr>
-              <a:t>problems</a:t>
-            </a:r>
-            <a:r>
-              <a:rPr lang="en-US" sz="2400" dirty="0" smtClean="0"/>
-              <a:t>?</a:t>
-            </a:r>
-          </a:p>
-          <a:p>
-            <a:r>
-              <a:rPr lang="en-US" sz="2400" dirty="0" smtClean="0"/>
-              <a:t>What are the </a:t>
-            </a:r>
-            <a:r>
-              <a:rPr lang="en-US" sz="2400" i="1" dirty="0" smtClean="0">
-                <a:solidFill>
-                  <a:srgbClr val="C00000"/>
-                </a:solidFill>
-              </a:rPr>
-              <a:t>deliverables</a:t>
-            </a:r>
-            <a:r>
-              <a:rPr lang="en-US" sz="2400" dirty="0" smtClean="0"/>
-              <a:t>?</a:t>
-            </a:r>
-          </a:p>
-          <a:p>
-            <a:r>
-              <a:rPr lang="en-US" sz="2400" i="1" dirty="0" smtClean="0">
-                <a:solidFill>
-                  <a:srgbClr val="C00000"/>
-                </a:solidFill>
-              </a:rPr>
-              <a:t>How</a:t>
-            </a:r>
-            <a:r>
-              <a:rPr lang="en-US" sz="2400" dirty="0" smtClean="0"/>
-              <a:t> will we solve the problems?</a:t>
-            </a:r>
-          </a:p>
-          <a:p>
-            <a:pPr lvl="1"/>
-            <a:r>
-              <a:rPr lang="en-US" sz="2000" i="1" dirty="0" smtClean="0">
-                <a:solidFill>
-                  <a:srgbClr val="C00000"/>
-                </a:solidFill>
-              </a:rPr>
-              <a:t>Technical</a:t>
-            </a:r>
-            <a:r>
-              <a:rPr lang="en-US" sz="2000" dirty="0" smtClean="0"/>
-              <a:t> aspects</a:t>
-            </a:r>
-          </a:p>
-          <a:p>
-            <a:pPr lvl="1"/>
-            <a:r>
-              <a:rPr lang="en-US" sz="2000" i="1" dirty="0" smtClean="0">
-                <a:solidFill>
-                  <a:srgbClr val="C00000"/>
-                </a:solidFill>
-              </a:rPr>
-              <a:t>Management</a:t>
-            </a:r>
-            <a:r>
-              <a:rPr lang="en-US" sz="2000" dirty="0" smtClean="0"/>
-              <a:t> aspects</a:t>
-            </a:r>
-          </a:p>
-          <a:p>
-            <a:r>
-              <a:rPr lang="en-US" sz="2400" i="1" dirty="0" smtClean="0">
-                <a:solidFill>
-                  <a:srgbClr val="C00000"/>
-                </a:solidFill>
-              </a:rPr>
-              <a:t>When</a:t>
-            </a:r>
-            <a:r>
-              <a:rPr lang="en-US" sz="2400" dirty="0" smtClean="0"/>
-              <a:t> must we complete the project?</a:t>
-            </a:r>
-          </a:p>
-        </p:txBody>
-      </p:sp>
-      <p:pic>
-        <p:nvPicPr>
-          <p:cNvPr id="4" name="Picture 2" descr="https://www.articlelist.com/wp-content/uploads/2019/02/Best-questions-to-get-to-know-someone-better.jpg"/>
-          <p:cNvPicPr>
-            <a:picLocks noChangeAspect="1" noChangeArrowheads="1"/>
-          </p:cNvPicPr>
-          <p:nvPr/>
-        </p:nvPicPr>
-        <p:blipFill>
-          <a:blip r:embed="rId2" cstate="print"/>
-          <a:srcRect/>
-          <a:stretch>
-            <a:fillRect/>
-          </a:stretch>
-        </p:blipFill>
-        <p:spPr bwMode="auto">
-          <a:xfrm>
-            <a:off x="2895600" y="4724400"/>
-            <a:ext cx="3251200" cy="1625600"/>
-          </a:xfrm>
-          <a:prstGeom prst="rect">
-            <a:avLst/>
-          </a:prstGeom>
-          <a:noFill/>
-        </p:spPr>
-      </p:pic>
-    </p:spTree>
-  </p:cSld>
-  <p:clrMapOvr>
-    <a:masterClrMapping/>
-  </p:clrMapOvr>
-</p:sld>
-</file>
-
-<file path=ppt/slides/slide32.xml><?xml version="1.0" encoding="utf-8"?>
-<p:sld xmlns:a="http://schemas.openxmlformats.org/drawingml/2006/main" xmlns:r="http://schemas.openxmlformats.org/officeDocument/2006/relationships" xmlns:p="http://schemas.openxmlformats.org/presentationml/2006/main">
-  <p:cSld>
-    <p:spTree>
-      <p:nvGrpSpPr>
-        <p:cNvPr id="1" name=""/>
-        <p:cNvGrpSpPr/>
-        <p:nvPr/>
-      </p:nvGrpSpPr>
-      <p:grpSpPr>
-        <a:xfrm>
-          <a:off x="0" y="0"/>
-          <a:ext cx="0" cy="0"/>
-          <a:chOff x="0" y="0"/>
-          <a:chExt cx="0" cy="0"/>
-        </a:xfrm>
-      </p:grpSpPr>
-      <p:pic>
-        <p:nvPicPr>
-          <p:cNvPr id="4" name="Picture 2" descr="https://lh3.ggpht.com/1IfZLL2QDSjZ0wS7sUhaMlsAOS8BBzdR3wZ1WawgRn7KZAM8nEVZYMOUM-lqQb0ikIzp=w300"/>
-          <p:cNvPicPr>
-            <a:picLocks noChangeAspect="1" noChangeArrowheads="1"/>
-          </p:cNvPicPr>
-          <p:nvPr/>
-        </p:nvPicPr>
-        <p:blipFill>
-          <a:blip r:embed="rId2" cstate="print"/>
-          <a:srcRect/>
-          <a:stretch>
-            <a:fillRect/>
-          </a:stretch>
-        </p:blipFill>
-        <p:spPr bwMode="auto">
-          <a:xfrm>
-            <a:off x="3276600" y="1905000"/>
-            <a:ext cx="2857500" cy="2857500"/>
-          </a:xfrm>
-          <a:prstGeom prst="rect">
-            <a:avLst/>
-          </a:prstGeom>
-          <a:noFill/>
-        </p:spPr>
-      </p:pic>
-    </p:spTree>
-  </p:cSld>
-  <p:clrMapOvr>
-    <a:masterClrMapping/>
-  </p:clrMapOvr>
-</p:sld>
-</file>
-
-<file path=ppt/slides/slide33.xml><?xml version="1.0" encoding="utf-8"?>
-<p:sld xmlns:a="http://schemas.openxmlformats.org/drawingml/2006/main" xmlns:r="http://schemas.openxmlformats.org/officeDocument/2006/relationships" xmlns:p="http://schemas.openxmlformats.org/presentationml/2006/main">
-  <p:cSld>
-    <p:spTree>
-      <p:nvGrpSpPr>
-        <p:cNvPr id="1" name=""/>
-        <p:cNvGrpSpPr/>
-        <p:nvPr/>
-      </p:nvGrpSpPr>
-      <p:grpSpPr>
-        <a:xfrm>
-          <a:off x="0" y="0"/>
-          <a:ext cx="0" cy="0"/>
-          <a:chOff x="0" y="0"/>
-          <a:chExt cx="0" cy="0"/>
-        </a:xfrm>
-      </p:grpSpPr>
-      <p:sp>
-        <p:nvSpPr>
-          <p:cNvPr id="2" name="Title 1"/>
-          <p:cNvSpPr>
-            <a:spLocks noGrp="1"/>
-          </p:cNvSpPr>
-          <p:nvPr>
-            <p:ph type="title"/>
-          </p:nvPr>
-        </p:nvSpPr>
-        <p:spPr/>
-        <p:txBody>
-          <a:bodyPr/>
-          <a:lstStyle/>
-          <a:p>
-            <a:r>
-              <a:rPr lang="en-US" dirty="0" smtClean="0"/>
-              <a:t>Which Methodology?</a:t>
-            </a:r>
-            <a:endParaRPr lang="en-US" dirty="0"/>
-          </a:p>
-        </p:txBody>
-      </p:sp>
-      <p:pic>
-        <p:nvPicPr>
-          <p:cNvPr id="6" name="Picture 3">
-            <a:hlinkClick r:id="rId2" action="ppaction://hlinkpres?slideindex=1&amp;slidetitle="/>
-          </p:cNvPr>
-          <p:cNvPicPr>
-            <a:picLocks noChangeAspect="1" noChangeArrowheads="1"/>
-          </p:cNvPicPr>
-          <p:nvPr/>
-        </p:nvPicPr>
-        <p:blipFill>
-          <a:blip r:embed="rId3" cstate="print"/>
-          <a:srcRect/>
-          <a:stretch>
-            <a:fillRect/>
-          </a:stretch>
-        </p:blipFill>
-        <p:spPr bwMode="auto">
-          <a:xfrm>
-            <a:off x="304800" y="4087368"/>
-            <a:ext cx="3419094" cy="2389632"/>
-          </a:xfrm>
-          <a:prstGeom prst="rect">
-            <a:avLst/>
-          </a:prstGeom>
-          <a:noFill/>
-          <a:ln w="9525">
-            <a:noFill/>
-            <a:miter lim="800000"/>
-            <a:headEnd/>
-            <a:tailEnd/>
-          </a:ln>
-          <a:effectLst/>
-        </p:spPr>
-      </p:pic>
-      <p:pic>
-        <p:nvPicPr>
-          <p:cNvPr id="7" name="Picture 2">
-            <a:hlinkClick r:id="rId4" action="ppaction://hlinkpres?slideindex=1&amp;slidetitle="/>
-          </p:cNvPr>
-          <p:cNvPicPr>
-            <a:picLocks noChangeAspect="1" noChangeArrowheads="1"/>
-          </p:cNvPicPr>
-          <p:nvPr/>
-        </p:nvPicPr>
-        <p:blipFill>
-          <a:blip r:embed="rId5" cstate="print"/>
-          <a:srcRect/>
-          <a:stretch>
-            <a:fillRect/>
-          </a:stretch>
-        </p:blipFill>
-        <p:spPr bwMode="auto">
-          <a:xfrm>
-            <a:off x="4038600" y="4422267"/>
-            <a:ext cx="4864227" cy="2130933"/>
-          </a:xfrm>
-          <a:prstGeom prst="rect">
-            <a:avLst/>
-          </a:prstGeom>
-          <a:noFill/>
-          <a:ln w="9525">
-            <a:noFill/>
-            <a:miter lim="800000"/>
-            <a:headEnd/>
-            <a:tailEnd/>
-          </a:ln>
-        </p:spPr>
-      </p:pic>
-      <p:pic>
-        <p:nvPicPr>
-          <p:cNvPr id="4098" name="Picture 2" descr="http://fastbiz101.com/101/wpfast-content/uploads/2016/06/review.jpeg"/>
-          <p:cNvPicPr>
-            <a:picLocks noChangeAspect="1" noChangeArrowheads="1"/>
-          </p:cNvPicPr>
-          <p:nvPr/>
-        </p:nvPicPr>
-        <p:blipFill>
-          <a:blip r:embed="rId6" cstate="print"/>
-          <a:srcRect/>
-          <a:stretch>
-            <a:fillRect/>
-          </a:stretch>
-        </p:blipFill>
-        <p:spPr bwMode="auto">
-          <a:xfrm>
-            <a:off x="6019800" y="3088767"/>
-            <a:ext cx="1600200" cy="800100"/>
-          </a:xfrm>
-          <a:prstGeom prst="rect">
-            <a:avLst/>
-          </a:prstGeom>
-          <a:noFill/>
-        </p:spPr>
-      </p:pic>
-      <p:pic>
-        <p:nvPicPr>
-          <p:cNvPr id="9" name="Picture 2" descr="http://fastbiz101.com/101/wpfast-content/uploads/2016/06/review.jpeg"/>
-          <p:cNvPicPr>
-            <a:picLocks noChangeAspect="1" noChangeArrowheads="1"/>
-          </p:cNvPicPr>
-          <p:nvPr/>
-        </p:nvPicPr>
-        <p:blipFill>
-          <a:blip r:embed="rId6" cstate="print"/>
-          <a:srcRect/>
-          <a:stretch>
-            <a:fillRect/>
-          </a:stretch>
-        </p:blipFill>
-        <p:spPr bwMode="auto">
-          <a:xfrm>
-            <a:off x="1295400" y="3172968"/>
-            <a:ext cx="1600200" cy="800100"/>
-          </a:xfrm>
-          <a:prstGeom prst="rect">
-            <a:avLst/>
-          </a:prstGeom>
-          <a:noFill/>
-        </p:spPr>
-      </p:pic>
-      <p:sp>
-        <p:nvSpPr>
-          <p:cNvPr id="8" name="Rectangle 7"/>
-          <p:cNvSpPr/>
-          <p:nvPr/>
-        </p:nvSpPr>
-        <p:spPr>
-          <a:xfrm>
-            <a:off x="5486400" y="3965067"/>
-            <a:ext cx="3352799" cy="369332"/>
-          </a:xfrm>
-          <a:prstGeom prst="rect">
-            <a:avLst/>
-          </a:prstGeom>
-        </p:spPr>
-        <p:txBody>
-          <a:bodyPr wrap="square">
-            <a:spAutoFit/>
-          </a:bodyPr>
-          <a:lstStyle/>
-          <a:p>
-            <a:r>
-              <a:rPr lang="en-US" b="1" dirty="0" smtClean="0">
-                <a:latin typeface="+mj-lt"/>
-              </a:rPr>
-              <a:t>RUP (Rational Unified Process)</a:t>
-            </a:r>
-            <a:endParaRPr lang="en-US" b="1" dirty="0">
-              <a:latin typeface="+mj-lt"/>
-            </a:endParaRPr>
-          </a:p>
-        </p:txBody>
-      </p:sp>
-      <p:pic>
-        <p:nvPicPr>
-          <p:cNvPr id="2050" name="Picture 2" descr="http://www.texasrockgym.com/wp-content/uploads/2016/04/exercise.jpg"/>
-          <p:cNvPicPr>
-            <a:picLocks noChangeAspect="1" noChangeArrowheads="1"/>
-          </p:cNvPicPr>
-          <p:nvPr/>
-        </p:nvPicPr>
-        <p:blipFill>
-          <a:blip r:embed="rId7" cstate="print"/>
-          <a:srcRect/>
-          <a:stretch>
-            <a:fillRect/>
-          </a:stretch>
-        </p:blipFill>
-        <p:spPr bwMode="auto">
-          <a:xfrm>
-            <a:off x="685800" y="1371600"/>
-            <a:ext cx="2602992" cy="1600200"/>
-          </a:xfrm>
-          <a:prstGeom prst="rect">
-            <a:avLst/>
-          </a:prstGeom>
-          <a:noFill/>
-        </p:spPr>
-      </p:pic>
-      <p:pic>
-        <p:nvPicPr>
-          <p:cNvPr id="10" name="Picture 4"/>
-          <p:cNvPicPr>
-            <a:picLocks noChangeAspect="1" noChangeArrowheads="1"/>
-          </p:cNvPicPr>
-          <p:nvPr/>
-        </p:nvPicPr>
-        <p:blipFill>
-          <a:blip r:embed="rId8" cstate="print"/>
-          <a:srcRect/>
-          <a:stretch>
-            <a:fillRect/>
-          </a:stretch>
-        </p:blipFill>
-        <p:spPr bwMode="auto">
-          <a:xfrm>
-            <a:off x="7429500" y="381000"/>
-            <a:ext cx="1333500" cy="1314450"/>
-          </a:xfrm>
-          <a:prstGeom prst="rect">
-            <a:avLst/>
-          </a:prstGeom>
-          <a:noFill/>
-          <a:ln w="9525">
-            <a:noFill/>
-            <a:miter lim="800000"/>
-            <a:headEnd/>
-            <a:tailEnd/>
-          </a:ln>
-        </p:spPr>
-      </p:pic>
-      <p:sp>
-        <p:nvSpPr>
-          <p:cNvPr id="11" name="Rectangle 10"/>
-          <p:cNvSpPr/>
-          <p:nvPr/>
-        </p:nvSpPr>
-        <p:spPr>
-          <a:xfrm>
-            <a:off x="3581400" y="1897559"/>
-            <a:ext cx="5181600" cy="769441"/>
-          </a:xfrm>
-          <a:prstGeom prst="rect">
-            <a:avLst/>
-          </a:prstGeom>
-        </p:spPr>
-        <p:style>
-          <a:lnRef idx="2">
-            <a:schemeClr val="dk1"/>
-          </a:lnRef>
-          <a:fillRef idx="1">
-            <a:schemeClr val="lt1"/>
-          </a:fillRef>
-          <a:effectRef idx="0">
-            <a:schemeClr val="dk1"/>
-          </a:effectRef>
-          <a:fontRef idx="minor">
-            <a:schemeClr val="dk1"/>
-          </a:fontRef>
-        </p:style>
-        <p:txBody>
-          <a:bodyPr wrap="square">
-            <a:spAutoFit/>
-          </a:bodyPr>
-          <a:lstStyle/>
-          <a:p>
-            <a:pPr algn="ctr"/>
-            <a:r>
-              <a:rPr lang="en-US" sz="2200" dirty="0" smtClean="0">
-                <a:solidFill>
-                  <a:schemeClr val="tx1"/>
-                </a:solidFill>
-                <a:latin typeface="+mj-lt"/>
-              </a:rPr>
-              <a:t>Refer to the </a:t>
-            </a:r>
-            <a:r>
-              <a:rPr lang="en-US" sz="2200" b="1" dirty="0" smtClean="0">
-                <a:solidFill>
-                  <a:schemeClr val="tx1"/>
-                </a:solidFill>
-                <a:latin typeface="+mj-lt"/>
-              </a:rPr>
-              <a:t>Introduction to Software Engineering </a:t>
-            </a:r>
-            <a:r>
-              <a:rPr lang="en-US" sz="2200" dirty="0" smtClean="0">
-                <a:solidFill>
-                  <a:schemeClr val="tx1"/>
-                </a:solidFill>
-              </a:rPr>
-              <a:t>course </a:t>
-            </a:r>
-            <a:r>
-              <a:rPr lang="en-US" sz="2200" dirty="0" smtClean="0">
-                <a:solidFill>
-                  <a:schemeClr val="tx1"/>
-                </a:solidFill>
-                <a:latin typeface="+mj-lt"/>
-              </a:rPr>
-              <a:t>for more information.</a:t>
-            </a:r>
-          </a:p>
-        </p:txBody>
-      </p:sp>
-    </p:spTree>
-  </p:cSld>
-  <p:clrMapOvr>
-    <a:masterClrMapping/>
-  </p:clrMapOvr>
-</p:sld>
-</file>
-
-<file path=ppt/slides/slide34.xml><?xml version="1.0" encoding="utf-8"?>
-<p:sld xmlns:a="http://schemas.openxmlformats.org/drawingml/2006/main" xmlns:r="http://schemas.openxmlformats.org/officeDocument/2006/relationships" xmlns:p="http://schemas.openxmlformats.org/presentationml/2006/main">
-  <p:cSld>
-    <p:spTree>
-      <p:nvGrpSpPr>
-        <p:cNvPr id="1" name=""/>
-        <p:cNvGrpSpPr/>
-        <p:nvPr/>
-      </p:nvGrpSpPr>
-      <p:grpSpPr>
-        <a:xfrm>
-          <a:off x="0" y="0"/>
-          <a:ext cx="0" cy="0"/>
-          <a:chOff x="0" y="0"/>
-          <a:chExt cx="0" cy="0"/>
-        </a:xfrm>
-      </p:grpSpPr>
-      <p:sp>
-        <p:nvSpPr>
-          <p:cNvPr id="18434" name="Title 1"/>
-          <p:cNvSpPr>
-            <a:spLocks noGrp="1"/>
-          </p:cNvSpPr>
-          <p:nvPr>
-            <p:ph type="title"/>
-          </p:nvPr>
-        </p:nvSpPr>
-        <p:spPr/>
-        <p:txBody>
-          <a:bodyPr/>
-          <a:lstStyle/>
-          <a:p>
-            <a:pPr eaLnBrk="1" hangingPunct="1"/>
-            <a:r>
-              <a:rPr lang="en-US" dirty="0" smtClean="0"/>
-              <a:t>Thank You &amp; See You Again</a:t>
-            </a:r>
-          </a:p>
-        </p:txBody>
-      </p:sp>
-      <p:pic>
-        <p:nvPicPr>
-          <p:cNvPr id="5" name="Content Placeholder 4"/>
-          <p:cNvPicPr>
-            <a:picLocks noGrp="1" noChangeAspect="1" noChangeArrowheads="1"/>
-          </p:cNvPicPr>
-          <p:nvPr>
-            <p:ph idx="1"/>
-          </p:nvPr>
-        </p:nvPicPr>
-        <p:blipFill>
-          <a:blip r:embed="rId2" cstate="print"/>
-          <a:srcRect/>
-          <a:stretch>
-            <a:fillRect/>
-          </a:stretch>
-        </p:blipFill>
-        <p:spPr>
-          <a:xfrm>
-            <a:off x="1143000" y="1676400"/>
-            <a:ext cx="6810375" cy="4525963"/>
-          </a:xfrm>
-          <a:noFill/>
-        </p:spPr>
-      </p:pic>
-    </p:spTree>
-  </p:cSld>
-  <p:clrMapOvr>
-    <a:masterClrMapping/>
-  </p:clrMapOvr>
-  <p:timing>
-    <p:tnLst>
-      <p:par>
-        <p:cTn id="1" dur="indefinite" restart="never" nodeType="tmRoot"/>
-      </p:par>
-    </p:tnLst>
-  </p:timing>
 </p:sld>
 </file>
 
@@ -15146,16 +8582,6 @@
             <a:r>
               <a:rPr lang="en-US" sz="2200" dirty="0" smtClean="0"/>
               <a:t>Project Management Institute (2017). A Guide to the Project Management Body of Knowledge. Sixth Edition. Project Management Institute.</a:t>
-            </a:r>
-          </a:p>
-          <a:p>
-            <a:pPr marL="514350" indent="-514350">
-              <a:buFont typeface="+mj-lt"/>
-              <a:buAutoNum type="arabicPeriod"/>
-            </a:pPr>
-            <a:r>
-              <a:rPr lang="en-US" sz="2200" dirty="0" smtClean="0"/>
-              <a:t>Jessica Keyes (2008). Leading IT Projects: The IT Manager's Guide. Taylor &amp; Francis Group.</a:t>
             </a:r>
           </a:p>
           <a:p>
@@ -15843,13 +9269,15 @@
           <a:p>
             <a:r>
               <a:rPr lang="en-US" sz="2000" dirty="0" smtClean="0"/>
-              <a:t>Time?</a:t>
-            </a:r>
-          </a:p>
-          <a:p>
+              <a:t>Time? </a:t>
+            </a:r>
             <a:r>
               <a:rPr lang="en-US" sz="2000" dirty="0" smtClean="0"/>
-              <a:t>Cost?</a:t>
+              <a:t>Cost? </a:t>
+            </a:r>
+            <a:r>
+              <a:rPr lang="en-US" sz="2000" dirty="0" smtClean="0"/>
+              <a:t>Feasibility? Risks?</a:t>
             </a:r>
             <a:endParaRPr lang="en-US" sz="2000" dirty="0"/>
           </a:p>

--- a/Software Project Management/03. Software Project Initiation.pptx
+++ b/Software Project Management/03. Software Project Initiation.pptx
@@ -248,7 +248,7 @@
             <a:fld id="{8FCF70C7-1A17-4B8F-8E82-A20E29AAAC58}" type="datetimeFigureOut">
               <a:rPr lang="en-US" smtClean="0"/>
               <a:pPr/>
-              <a:t>6/7/2026</a:t>
+              <a:t>6/18/2026</a:t>
             </a:fld>
             <a:endParaRPr lang="en-US" dirty="0"/>
           </a:p>
@@ -410,7 +410,7 @@
             <a:fld id="{B972150E-24DE-4D23-AF8D-CF01896B0C83}" type="datetimeFigureOut">
               <a:rPr lang="en-US" smtClean="0"/>
               <a:pPr/>
-              <a:t>6/7/2026</a:t>
+              <a:t>6/18/2026</a:t>
             </a:fld>
             <a:endParaRPr lang="en-US" dirty="0"/>
           </a:p>
@@ -1195,7 +1195,7 @@
               <a:pPr>
                 <a:defRPr/>
               </a:pPr>
-              <a:t>6/7/2026</a:t>
+              <a:t>6/18/2026</a:t>
             </a:fld>
             <a:endParaRPr lang="en-US" dirty="0"/>
           </a:p>
@@ -1387,7 +1387,7 @@
               <a:pPr>
                 <a:defRPr/>
               </a:pPr>
-              <a:t>6/7/2026</a:t>
+              <a:t>6/18/2026</a:t>
             </a:fld>
             <a:endParaRPr lang="en-US" dirty="0"/>
           </a:p>
@@ -1589,7 +1589,7 @@
               <a:pPr>
                 <a:defRPr/>
               </a:pPr>
-              <a:t>6/7/2026</a:t>
+              <a:t>6/18/2026</a:t>
             </a:fld>
             <a:endParaRPr lang="en-US" dirty="0"/>
           </a:p>
@@ -1781,7 +1781,7 @@
               <a:pPr>
                 <a:defRPr/>
               </a:pPr>
-              <a:t>6/7/2026</a:t>
+              <a:t>6/18/2026</a:t>
             </a:fld>
             <a:endParaRPr lang="en-US" dirty="0"/>
           </a:p>
@@ -2049,7 +2049,7 @@
               <a:pPr>
                 <a:defRPr/>
               </a:pPr>
-              <a:t>6/7/2026</a:t>
+              <a:t>6/18/2026</a:t>
             </a:fld>
             <a:endParaRPr lang="en-US" dirty="0"/>
           </a:p>
@@ -2359,7 +2359,7 @@
               <a:pPr>
                 <a:defRPr/>
               </a:pPr>
-              <a:t>6/7/2026</a:t>
+              <a:t>6/18/2026</a:t>
             </a:fld>
             <a:endParaRPr lang="en-US" dirty="0"/>
           </a:p>
@@ -2803,7 +2803,7 @@
               <a:pPr>
                 <a:defRPr/>
               </a:pPr>
-              <a:t>6/7/2026</a:t>
+              <a:t>6/18/2026</a:t>
             </a:fld>
             <a:endParaRPr lang="en-US" dirty="0"/>
           </a:p>
@@ -2943,7 +2943,7 @@
               <a:pPr>
                 <a:defRPr/>
               </a:pPr>
-              <a:t>6/7/2026</a:t>
+              <a:t>6/18/2026</a:t>
             </a:fld>
             <a:endParaRPr lang="en-US" dirty="0"/>
           </a:p>
@@ -3060,7 +3060,7 @@
               <a:pPr>
                 <a:defRPr/>
               </a:pPr>
-              <a:t>6/7/2026</a:t>
+              <a:t>6/18/2026</a:t>
             </a:fld>
             <a:endParaRPr lang="en-US" dirty="0"/>
           </a:p>
@@ -3359,7 +3359,7 @@
               <a:pPr>
                 <a:defRPr/>
               </a:pPr>
-              <a:t>6/7/2026</a:t>
+              <a:t>6/18/2026</a:t>
             </a:fld>
             <a:endParaRPr lang="en-US" dirty="0"/>
           </a:p>
@@ -3637,7 +3637,7 @@
               <a:pPr>
                 <a:defRPr/>
               </a:pPr>
-              <a:t>6/7/2026</a:t>
+              <a:t>6/18/2026</a:t>
             </a:fld>
             <a:endParaRPr lang="en-US" dirty="0"/>
           </a:p>
@@ -3885,7 +3885,7 @@
               <a:pPr>
                 <a:defRPr/>
               </a:pPr>
-              <a:t>6/7/2026</a:t>
+              <a:t>6/18/2026</a:t>
             </a:fld>
             <a:endParaRPr lang="en-US" dirty="0"/>
           </a:p>
@@ -4563,282 +4563,13 @@
           <a:p>
             <a:r>
               <a:rPr lang="en-US" dirty="0" smtClean="0"/>
-              <a:t>Documenting Team Project Idea</a:t>
+              <a:t>Finalizing </a:t>
+            </a:r>
+            <a:r>
+              <a:rPr lang="en-US" dirty="0" smtClean="0"/>
+              <a:t>Team Project Idea</a:t>
             </a:r>
             <a:endParaRPr lang="en-US" dirty="0"/>
-          </a:p>
-        </p:txBody>
-      </p:sp>
-      <p:sp>
-        <p:nvSpPr>
-          <p:cNvPr id="3" name="Content Placeholder 2"/>
-          <p:cNvSpPr>
-            <a:spLocks noGrp="1"/>
-          </p:cNvSpPr>
-          <p:nvPr>
-            <p:ph idx="1"/>
-          </p:nvPr>
-        </p:nvSpPr>
-        <p:spPr>
-          <a:xfrm>
-            <a:off x="457200" y="1600200"/>
-            <a:ext cx="5715000" cy="4525963"/>
-          </a:xfrm>
-        </p:spPr>
-        <p:txBody>
-          <a:bodyPr/>
-          <a:lstStyle/>
-          <a:p>
-            <a:r>
-              <a:rPr lang="en-US" sz="2400" dirty="0" smtClean="0">
-                <a:latin typeface="Calibri" pitchFamily="34" charset="0"/>
-                <a:cs typeface="Calibri" pitchFamily="34" charset="0"/>
-              </a:rPr>
-              <a:t>Group number</a:t>
-            </a:r>
-            <a:r>
-              <a:rPr lang="vi-VN" sz="2400" dirty="0" smtClean="0">
-                <a:latin typeface="Calibri" pitchFamily="34" charset="0"/>
-                <a:cs typeface="Calibri" pitchFamily="34" charset="0"/>
-              </a:rPr>
-              <a:t>: X (1 </a:t>
-            </a:r>
-            <a:r>
-              <a:rPr lang="en-US" sz="2400" dirty="0" smtClean="0">
-                <a:latin typeface="Calibri" pitchFamily="34" charset="0"/>
-                <a:cs typeface="Calibri" pitchFamily="34" charset="0"/>
-              </a:rPr>
-              <a:t>line</a:t>
-            </a:r>
-            <a:r>
-              <a:rPr lang="vi-VN" sz="2400" dirty="0" smtClean="0">
-                <a:latin typeface="Calibri" pitchFamily="34" charset="0"/>
-                <a:cs typeface="Calibri" pitchFamily="34" charset="0"/>
-              </a:rPr>
-              <a:t>)</a:t>
-            </a:r>
-            <a:r>
-              <a:rPr lang="en-US" sz="2400" dirty="0" smtClean="0">
-                <a:latin typeface="Calibri" pitchFamily="34" charset="0"/>
-                <a:cs typeface="Calibri" pitchFamily="34" charset="0"/>
-              </a:rPr>
-              <a:t>.</a:t>
-            </a:r>
-            <a:endParaRPr lang="vi-VN" sz="2400" dirty="0" smtClean="0">
-              <a:latin typeface="Calibri" pitchFamily="34" charset="0"/>
-              <a:cs typeface="Calibri" pitchFamily="34" charset="0"/>
-            </a:endParaRPr>
-          </a:p>
-          <a:p>
-            <a:r>
-              <a:rPr lang="en-US" sz="2400" dirty="0" smtClean="0">
-                <a:latin typeface="Calibri" pitchFamily="34" charset="0"/>
-                <a:cs typeface="Calibri" pitchFamily="34" charset="0"/>
-              </a:rPr>
-              <a:t>Project name</a:t>
-            </a:r>
-            <a:r>
-              <a:rPr lang="vi-VN" sz="2400" dirty="0" smtClean="0">
-                <a:latin typeface="Calibri" pitchFamily="34" charset="0"/>
-                <a:cs typeface="Calibri" pitchFamily="34" charset="0"/>
-              </a:rPr>
-              <a:t>: ABC (</a:t>
-            </a:r>
-            <a:r>
-              <a:rPr lang="en-US" sz="2400" dirty="0" smtClean="0">
-                <a:latin typeface="Calibri" pitchFamily="34" charset="0"/>
-                <a:cs typeface="Calibri" pitchFamily="34" charset="0"/>
-              </a:rPr>
-              <a:t>1 line</a:t>
-            </a:r>
-            <a:r>
-              <a:rPr lang="vi-VN" sz="2400" dirty="0" smtClean="0">
-                <a:latin typeface="Calibri" pitchFamily="34" charset="0"/>
-                <a:cs typeface="Calibri" pitchFamily="34" charset="0"/>
-              </a:rPr>
-              <a:t>)</a:t>
-            </a:r>
-            <a:r>
-              <a:rPr lang="en-US" sz="2400" dirty="0" smtClean="0">
-                <a:latin typeface="Calibri" pitchFamily="34" charset="0"/>
-                <a:cs typeface="Calibri" pitchFamily="34" charset="0"/>
-              </a:rPr>
-              <a:t>.</a:t>
-            </a:r>
-          </a:p>
-          <a:p>
-            <a:r>
-              <a:rPr lang="en-US" sz="2400" dirty="0" smtClean="0">
-                <a:latin typeface="Calibri" pitchFamily="34" charset="0"/>
-                <a:cs typeface="Calibri" pitchFamily="34" charset="0"/>
-              </a:rPr>
-              <a:t>Sponsor, customers</a:t>
-            </a:r>
-            <a:endParaRPr lang="vi-VN" sz="2400" dirty="0" smtClean="0">
-              <a:latin typeface="Calibri" pitchFamily="34" charset="0"/>
-              <a:cs typeface="Calibri" pitchFamily="34" charset="0"/>
-            </a:endParaRPr>
-          </a:p>
-          <a:p>
-            <a:r>
-              <a:rPr lang="en-US" sz="2400" i="1" dirty="0" smtClean="0">
-                <a:solidFill>
-                  <a:srgbClr val="C00000"/>
-                </a:solidFill>
-                <a:latin typeface="Calibri" pitchFamily="34" charset="0"/>
-                <a:cs typeface="Calibri" pitchFamily="34" charset="0"/>
-              </a:rPr>
-              <a:t>Problems</a:t>
-            </a:r>
-            <a:r>
-              <a:rPr lang="vi-VN" sz="2400" dirty="0" smtClean="0">
-                <a:latin typeface="Calibri" pitchFamily="34" charset="0"/>
-                <a:cs typeface="Calibri" pitchFamily="34" charset="0"/>
-              </a:rPr>
-              <a:t> (</a:t>
-            </a:r>
-            <a:r>
-              <a:rPr lang="en-US" sz="2400" u="sng" dirty="0" smtClean="0">
-                <a:latin typeface="Calibri" pitchFamily="34" charset="0"/>
-                <a:cs typeface="Calibri" pitchFamily="34" charset="0"/>
-              </a:rPr>
-              <a:t>NOT features</a:t>
-            </a:r>
-            <a:r>
-              <a:rPr lang="vi-VN" sz="2400" dirty="0" smtClean="0">
-                <a:latin typeface="Calibri" pitchFamily="34" charset="0"/>
-                <a:cs typeface="Calibri" pitchFamily="34" charset="0"/>
-              </a:rPr>
-              <a:t>)</a:t>
-            </a:r>
-            <a:r>
-              <a:rPr lang="en-US" sz="2400" dirty="0" smtClean="0">
-                <a:latin typeface="Calibri" pitchFamily="34" charset="0"/>
-                <a:cs typeface="Calibri" pitchFamily="34" charset="0"/>
-              </a:rPr>
-              <a:t>, </a:t>
-            </a:r>
-            <a:r>
-              <a:rPr lang="vi-VN" sz="2400" dirty="0" smtClean="0">
-                <a:latin typeface="Calibri" pitchFamily="34" charset="0"/>
-                <a:cs typeface="Calibri" pitchFamily="34" charset="0"/>
-              </a:rPr>
-              <a:t>pain points</a:t>
-            </a:r>
-            <a:r>
-              <a:rPr lang="en-US" sz="2400" dirty="0" smtClean="0">
-                <a:latin typeface="Calibri" pitchFamily="34" charset="0"/>
-                <a:cs typeface="Calibri" pitchFamily="34" charset="0"/>
-              </a:rPr>
-              <a:t>.</a:t>
-            </a:r>
-            <a:endParaRPr lang="vi-VN" sz="2400" dirty="0" smtClean="0">
-              <a:latin typeface="Calibri" pitchFamily="34" charset="0"/>
-              <a:cs typeface="Calibri" pitchFamily="34" charset="0"/>
-            </a:endParaRPr>
-          </a:p>
-          <a:p>
-            <a:r>
-              <a:rPr lang="en-US" sz="2400" i="1" dirty="0" smtClean="0">
-                <a:solidFill>
-                  <a:srgbClr val="C00000"/>
-                </a:solidFill>
-                <a:latin typeface="Calibri" pitchFamily="34" charset="0"/>
-                <a:cs typeface="Calibri" pitchFamily="34" charset="0"/>
-              </a:rPr>
-              <a:t>Solution</a:t>
-            </a:r>
-            <a:r>
-              <a:rPr lang="vi-VN" sz="2400" dirty="0" smtClean="0">
-                <a:latin typeface="Calibri" pitchFamily="34" charset="0"/>
-                <a:cs typeface="Calibri" pitchFamily="34" charset="0"/>
-              </a:rPr>
-              <a:t>: </a:t>
-            </a:r>
-            <a:r>
-              <a:rPr lang="en-US" sz="2400" dirty="0" smtClean="0">
-                <a:latin typeface="Calibri" pitchFamily="34" charset="0"/>
-                <a:cs typeface="Calibri" pitchFamily="34" charset="0"/>
-              </a:rPr>
-              <a:t>The core business use case (The real world scenario or workflow).</a:t>
-            </a:r>
-            <a:endParaRPr lang="vi-VN" sz="2400" dirty="0" smtClean="0">
-              <a:latin typeface="Calibri" pitchFamily="34" charset="0"/>
-              <a:cs typeface="Calibri" pitchFamily="34" charset="0"/>
-            </a:endParaRPr>
-          </a:p>
-          <a:p>
-            <a:r>
-              <a:rPr lang="en-US" sz="2400" i="1" dirty="0" smtClean="0">
-                <a:solidFill>
-                  <a:srgbClr val="C00000"/>
-                </a:solidFill>
-                <a:latin typeface="Calibri" pitchFamily="34" charset="0"/>
-                <a:cs typeface="Calibri" pitchFamily="34" charset="0"/>
-              </a:rPr>
-              <a:t>Reason</a:t>
-            </a:r>
-            <a:r>
-              <a:rPr lang="en-US" sz="2400" dirty="0" smtClean="0">
-                <a:latin typeface="Calibri" pitchFamily="34" charset="0"/>
-                <a:cs typeface="Calibri" pitchFamily="34" charset="0"/>
-              </a:rPr>
-              <a:t> to solve the problems.</a:t>
-            </a:r>
-          </a:p>
-          <a:p>
-            <a:r>
-              <a:rPr lang="vi-VN" sz="2400" dirty="0" smtClean="0">
-                <a:latin typeface="Calibri" pitchFamily="34" charset="0"/>
-                <a:cs typeface="Calibri" pitchFamily="34" charset="0"/>
-              </a:rPr>
-              <a:t>Competitors</a:t>
-            </a:r>
-            <a:r>
-              <a:rPr lang="en-US" sz="2400" dirty="0" smtClean="0">
-                <a:latin typeface="Calibri" pitchFamily="34" charset="0"/>
-                <a:cs typeface="Calibri" pitchFamily="34" charset="0"/>
-              </a:rPr>
-              <a:t> (minimum 3)</a:t>
-            </a:r>
-            <a:r>
-              <a:rPr lang="vi-VN" sz="2400" dirty="0" smtClean="0">
-                <a:latin typeface="Calibri" pitchFamily="34" charset="0"/>
-                <a:cs typeface="Calibri" pitchFamily="34" charset="0"/>
-              </a:rPr>
-              <a:t>.</a:t>
-            </a:r>
-            <a:endParaRPr lang="en-US" sz="2400" dirty="0" smtClean="0">
-              <a:latin typeface="Calibri" pitchFamily="34" charset="0"/>
-              <a:cs typeface="Calibri" pitchFamily="34" charset="0"/>
-            </a:endParaRPr>
-          </a:p>
-          <a:p>
-            <a:r>
-              <a:rPr lang="en-US" sz="2400" dirty="0" smtClean="0">
-                <a:latin typeface="Calibri" pitchFamily="34" charset="0"/>
-                <a:cs typeface="Calibri" pitchFamily="34" charset="0"/>
-              </a:rPr>
-              <a:t>Your d</a:t>
-            </a:r>
-            <a:r>
-              <a:rPr lang="vi-VN" sz="2400" dirty="0" smtClean="0">
-                <a:latin typeface="Calibri" pitchFamily="34" charset="0"/>
-                <a:cs typeface="Calibri" pitchFamily="34" charset="0"/>
-              </a:rPr>
-              <a:t>ifferentiators</a:t>
-            </a:r>
-            <a:r>
-              <a:rPr lang="en-US" sz="2400" dirty="0" smtClean="0">
-                <a:latin typeface="Calibri" pitchFamily="34" charset="0"/>
-                <a:cs typeface="Calibri" pitchFamily="34" charset="0"/>
-              </a:rPr>
-              <a:t>.</a:t>
-            </a:r>
-            <a:endParaRPr lang="vi-VN" sz="2400" dirty="0" smtClean="0">
-              <a:latin typeface="Calibri" pitchFamily="34" charset="0"/>
-              <a:cs typeface="Calibri" pitchFamily="34" charset="0"/>
-            </a:endParaRPr>
           </a:p>
         </p:txBody>
       </p:sp>
@@ -4859,7 +4590,7 @@
         </p:blipFill>
         <p:spPr bwMode="auto">
           <a:xfrm>
-            <a:off x="6324600" y="2415540"/>
+            <a:off x="3124200" y="2415540"/>
             <a:ext cx="2400300" cy="2461260"/>
           </a:xfrm>
           <a:prstGeom prst="rect">
@@ -8481,11 +8212,7 @@
             </a:pPr>
             <a:r>
               <a:rPr lang="en-US" sz="2400" dirty="0" smtClean="0"/>
-              <a:t>Project </a:t>
-            </a:r>
-            <a:r>
-              <a:rPr lang="en-US" sz="2400" dirty="0" smtClean="0"/>
-              <a:t>charter.</a:t>
+              <a:t>Project charter.</a:t>
             </a:r>
           </a:p>
           <a:p>
@@ -9184,15 +8911,7 @@
           <a:p>
             <a:r>
               <a:rPr lang="en-US" sz="2000" dirty="0" smtClean="0"/>
-              <a:t>Project </a:t>
-            </a:r>
-            <a:r>
-              <a:rPr lang="en-US" sz="2000" dirty="0" smtClean="0"/>
-              <a:t>Origins? Sponsor</a:t>
-            </a:r>
-            <a:r>
-              <a:rPr lang="en-US" sz="2000" dirty="0" smtClean="0"/>
-              <a:t>? Client?</a:t>
+              <a:t>Project Origins? Sponsor? Client?</a:t>
             </a:r>
           </a:p>
           <a:p>
@@ -9201,7 +8920,6 @@
               <a:rPr lang="en-US" sz="1800" dirty="0" smtClean="0"/>
               <a:t>Name, address, phone number?</a:t>
             </a:r>
-            <a:endParaRPr lang="en-US" sz="1800" dirty="0" smtClean="0"/>
           </a:p>
           <a:p>
             <a:r>
@@ -9232,13 +8950,8 @@
             <a:pPr lvl="1"/>
             <a:r>
               <a:rPr lang="en-US" sz="1800" dirty="0" smtClean="0"/>
-              <a:t>Product purchased by </a:t>
-            </a:r>
-            <a:r>
-              <a:rPr lang="en-US" sz="1800" dirty="0" smtClean="0"/>
-              <a:t>yourself?</a:t>
-            </a:r>
-            <a:endParaRPr lang="en-US" sz="1800" dirty="0" smtClean="0"/>
+              <a:t>Product purchased by yourself?</a:t>
+            </a:r>
           </a:p>
           <a:p>
             <a:pPr lvl="1"/>
@@ -9269,15 +8982,7 @@
           <a:p>
             <a:r>
               <a:rPr lang="en-US" sz="2000" dirty="0" smtClean="0"/>
-              <a:t>Time? </a:t>
-            </a:r>
-            <a:r>
-              <a:rPr lang="en-US" sz="2000" dirty="0" smtClean="0"/>
-              <a:t>Cost? </a:t>
-            </a:r>
-            <a:r>
-              <a:rPr lang="en-US" sz="2000" dirty="0" smtClean="0"/>
-              <a:t>Feasibility? Risks?</a:t>
+              <a:t>Time? Cost? Feasibility? Risks?</a:t>
             </a:r>
             <a:endParaRPr lang="en-US" sz="2000" dirty="0"/>
           </a:p>
@@ -9488,14 +9193,7 @@
                 <a:latin typeface="Calibri" pitchFamily="34" charset="0"/>
                 <a:cs typeface="Calibri" pitchFamily="34" charset="0"/>
               </a:rPr>
-              <a:t>Solving real world </a:t>
-            </a:r>
-            <a:r>
-              <a:rPr lang="en-US" sz="2400" b="1" dirty="0" smtClean="0">
-                <a:latin typeface="Calibri" pitchFamily="34" charset="0"/>
-                <a:cs typeface="Calibri" pitchFamily="34" charset="0"/>
-              </a:rPr>
-              <a:t>problems</a:t>
+              <a:t>Solving real world problems</a:t>
             </a:r>
             <a:endParaRPr lang="vi-VN" sz="2400" b="1" dirty="0">
               <a:latin typeface="Calibri" pitchFamily="34" charset="0"/>

--- a/Software Project Management/03. Software Project Initiation.pptx
+++ b/Software Project Management/03. Software Project Initiation.pptx
@@ -248,7 +248,7 @@
             <a:fld id="{8FCF70C7-1A17-4B8F-8E82-A20E29AAAC58}" type="datetimeFigureOut">
               <a:rPr lang="en-US" smtClean="0"/>
               <a:pPr/>
-              <a:t>6/18/2026</a:t>
+              <a:t>6/21/2026</a:t>
             </a:fld>
             <a:endParaRPr lang="en-US" dirty="0"/>
           </a:p>
@@ -410,7 +410,7 @@
             <a:fld id="{B972150E-24DE-4D23-AF8D-CF01896B0C83}" type="datetimeFigureOut">
               <a:rPr lang="en-US" smtClean="0"/>
               <a:pPr/>
-              <a:t>6/18/2026</a:t>
+              <a:t>6/21/2026</a:t>
             </a:fld>
             <a:endParaRPr lang="en-US" dirty="0"/>
           </a:p>
@@ -1195,7 +1195,7 @@
               <a:pPr>
                 <a:defRPr/>
               </a:pPr>
-              <a:t>6/18/2026</a:t>
+              <a:t>6/21/2026</a:t>
             </a:fld>
             <a:endParaRPr lang="en-US" dirty="0"/>
           </a:p>
@@ -1387,7 +1387,7 @@
               <a:pPr>
                 <a:defRPr/>
               </a:pPr>
-              <a:t>6/18/2026</a:t>
+              <a:t>6/21/2026</a:t>
             </a:fld>
             <a:endParaRPr lang="en-US" dirty="0"/>
           </a:p>
@@ -1589,7 +1589,7 @@
               <a:pPr>
                 <a:defRPr/>
               </a:pPr>
-              <a:t>6/18/2026</a:t>
+              <a:t>6/21/2026</a:t>
             </a:fld>
             <a:endParaRPr lang="en-US" dirty="0"/>
           </a:p>
@@ -1781,7 +1781,7 @@
               <a:pPr>
                 <a:defRPr/>
               </a:pPr>
-              <a:t>6/18/2026</a:t>
+              <a:t>6/21/2026</a:t>
             </a:fld>
             <a:endParaRPr lang="en-US" dirty="0"/>
           </a:p>
@@ -2049,7 +2049,7 @@
               <a:pPr>
                 <a:defRPr/>
               </a:pPr>
-              <a:t>6/18/2026</a:t>
+              <a:t>6/21/2026</a:t>
             </a:fld>
             <a:endParaRPr lang="en-US" dirty="0"/>
           </a:p>
@@ -2359,7 +2359,7 @@
               <a:pPr>
                 <a:defRPr/>
               </a:pPr>
-              <a:t>6/18/2026</a:t>
+              <a:t>6/21/2026</a:t>
             </a:fld>
             <a:endParaRPr lang="en-US" dirty="0"/>
           </a:p>
@@ -2803,7 +2803,7 @@
               <a:pPr>
                 <a:defRPr/>
               </a:pPr>
-              <a:t>6/18/2026</a:t>
+              <a:t>6/21/2026</a:t>
             </a:fld>
             <a:endParaRPr lang="en-US" dirty="0"/>
           </a:p>
@@ -2943,7 +2943,7 @@
               <a:pPr>
                 <a:defRPr/>
               </a:pPr>
-              <a:t>6/18/2026</a:t>
+              <a:t>6/21/2026</a:t>
             </a:fld>
             <a:endParaRPr lang="en-US" dirty="0"/>
           </a:p>
@@ -3060,7 +3060,7 @@
               <a:pPr>
                 <a:defRPr/>
               </a:pPr>
-              <a:t>6/18/2026</a:t>
+              <a:t>6/21/2026</a:t>
             </a:fld>
             <a:endParaRPr lang="en-US" dirty="0"/>
           </a:p>
@@ -3359,7 +3359,7 @@
               <a:pPr>
                 <a:defRPr/>
               </a:pPr>
-              <a:t>6/18/2026</a:t>
+              <a:t>6/21/2026</a:t>
             </a:fld>
             <a:endParaRPr lang="en-US" dirty="0"/>
           </a:p>
@@ -3637,7 +3637,7 @@
               <a:pPr>
                 <a:defRPr/>
               </a:pPr>
-              <a:t>6/18/2026</a:t>
+              <a:t>6/21/2026</a:t>
             </a:fld>
             <a:endParaRPr lang="en-US" dirty="0"/>
           </a:p>
@@ -3885,7 +3885,7 @@
               <a:pPr>
                 <a:defRPr/>
               </a:pPr>
-              <a:t>6/18/2026</a:t>
+              <a:t>6/21/2026</a:t>
             </a:fld>
             <a:endParaRPr lang="en-US" dirty="0"/>
           </a:p>
@@ -4563,11 +4563,7 @@
           <a:p>
             <a:r>
               <a:rPr lang="en-US" dirty="0" smtClean="0"/>
-              <a:t>Finalizing </a:t>
-            </a:r>
-            <a:r>
-              <a:rPr lang="en-US" dirty="0" smtClean="0"/>
-              <a:t>Team Project Idea</a:t>
+              <a:t>Finalizing Team Project Idea</a:t>
             </a:r>
             <a:endParaRPr lang="en-US" dirty="0"/>
           </a:p>
@@ -7209,14 +7205,10 @@
             </a:pPr>
             <a:r>
               <a:rPr lang="en-US" sz="2200" dirty="0" smtClean="0"/>
-              <a:t>To create </a:t>
-            </a:r>
-            <a:r>
-              <a:rPr lang="en-US" sz="2200" smtClean="0"/>
-              <a:t>an </a:t>
-            </a:r>
-            <a:r>
-              <a:rPr lang="en-US" sz="2200" i="1" smtClean="0">
+              <a:t>To create an </a:t>
+            </a:r>
+            <a:r>
+              <a:rPr lang="en-US" sz="2200" i="1" dirty="0" smtClean="0">
                 <a:solidFill>
                   <a:srgbClr val="C00000"/>
                 </a:solidFill>
@@ -7224,7 +7216,7 @@
               <a:t>architecture</a:t>
             </a:r>
             <a:r>
-              <a:rPr lang="en-US" sz="2200" smtClean="0"/>
+              <a:rPr lang="en-US" sz="2200" dirty="0" smtClean="0"/>
               <a:t>.</a:t>
             </a:r>
             <a:endParaRPr lang="en-US" sz="2200" i="1" dirty="0" smtClean="0">

--- a/Software Project Management/03. Software Project Initiation.pptx
+++ b/Software Project Management/03. Software Project Initiation.pptx
@@ -5,10 +5,10 @@
     <p:sldMasterId id="2147483708" r:id="rId1"/>
   </p:sldMasterIdLst>
   <p:notesMasterIdLst>
-    <p:notesMasterId r:id="rId25"/>
+    <p:notesMasterId r:id="rId26"/>
   </p:notesMasterIdLst>
   <p:handoutMasterIdLst>
-    <p:handoutMasterId r:id="rId26"/>
+    <p:handoutMasterId r:id="rId27"/>
   </p:handoutMasterIdLst>
   <p:sldIdLst>
     <p:sldId id="256" r:id="rId2"/>
@@ -18,22 +18,23 @@
     <p:sldId id="881" r:id="rId6"/>
     <p:sldId id="882" r:id="rId7"/>
     <p:sldId id="883" r:id="rId8"/>
-    <p:sldId id="888" r:id="rId9"/>
-    <p:sldId id="884" r:id="rId10"/>
-    <p:sldId id="886" r:id="rId11"/>
-    <p:sldId id="887" r:id="rId12"/>
-    <p:sldId id="855" r:id="rId13"/>
-    <p:sldId id="872" r:id="rId14"/>
-    <p:sldId id="879" r:id="rId15"/>
-    <p:sldId id="873" r:id="rId16"/>
-    <p:sldId id="874" r:id="rId17"/>
-    <p:sldId id="842" r:id="rId18"/>
-    <p:sldId id="875" r:id="rId19"/>
-    <p:sldId id="876" r:id="rId20"/>
-    <p:sldId id="877" r:id="rId21"/>
-    <p:sldId id="843" r:id="rId22"/>
-    <p:sldId id="830" r:id="rId23"/>
-    <p:sldId id="343" r:id="rId24"/>
+    <p:sldId id="889" r:id="rId9"/>
+    <p:sldId id="888" r:id="rId10"/>
+    <p:sldId id="884" r:id="rId11"/>
+    <p:sldId id="886" r:id="rId12"/>
+    <p:sldId id="887" r:id="rId13"/>
+    <p:sldId id="855" r:id="rId14"/>
+    <p:sldId id="872" r:id="rId15"/>
+    <p:sldId id="879" r:id="rId16"/>
+    <p:sldId id="873" r:id="rId17"/>
+    <p:sldId id="874" r:id="rId18"/>
+    <p:sldId id="842" r:id="rId19"/>
+    <p:sldId id="875" r:id="rId20"/>
+    <p:sldId id="876" r:id="rId21"/>
+    <p:sldId id="877" r:id="rId22"/>
+    <p:sldId id="843" r:id="rId23"/>
+    <p:sldId id="830" r:id="rId24"/>
+    <p:sldId id="343" r:id="rId25"/>
   </p:sldIdLst>
   <p:sldSz cx="9144000" cy="6858000" type="screen4x3"/>
   <p:notesSz cx="6858000" cy="9144000"/>
@@ -248,7 +249,7 @@
             <a:fld id="{8FCF70C7-1A17-4B8F-8E82-A20E29AAAC58}" type="datetimeFigureOut">
               <a:rPr lang="en-US" smtClean="0"/>
               <a:pPr/>
-              <a:t>6/21/2026</a:t>
+              <a:t>7/2/2026</a:t>
             </a:fld>
             <a:endParaRPr lang="en-US" dirty="0"/>
           </a:p>
@@ -410,7 +411,7 @@
             <a:fld id="{B972150E-24DE-4D23-AF8D-CF01896B0C83}" type="datetimeFigureOut">
               <a:rPr lang="en-US" smtClean="0"/>
               <a:pPr/>
-              <a:t>6/21/2026</a:t>
+              <a:t>7/2/2026</a:t>
             </a:fld>
             <a:endParaRPr lang="en-US" dirty="0"/>
           </a:p>
@@ -826,7 +827,7 @@
             <a:fld id="{B4E670EC-EF90-4A84-9798-83F1F2DBB460}" type="slidenum">
               <a:rPr lang="en-US" smtClean="0"/>
               <a:pPr/>
-              <a:t>9</a:t>
+              <a:t>10</a:t>
             </a:fld>
             <a:endParaRPr lang="en-US"/>
           </a:p>
@@ -908,7 +909,7 @@
             <a:fld id="{758E95B1-5ED0-4005-B293-784E4C93134E}" type="slidenum">
               <a:rPr lang="en-US" smtClean="0"/>
               <a:pPr/>
-              <a:t>18</a:t>
+              <a:t>19</a:t>
             </a:fld>
             <a:endParaRPr lang="en-US" dirty="0"/>
           </a:p>
@@ -990,7 +991,7 @@
             <a:fld id="{758E95B1-5ED0-4005-B293-784E4C93134E}" type="slidenum">
               <a:rPr lang="en-US" smtClean="0"/>
               <a:pPr/>
-              <a:t>19</a:t>
+              <a:t>20</a:t>
             </a:fld>
             <a:endParaRPr lang="en-US" dirty="0"/>
           </a:p>
@@ -1195,7 +1196,7 @@
               <a:pPr>
                 <a:defRPr/>
               </a:pPr>
-              <a:t>6/21/2026</a:t>
+              <a:t>7/2/2026</a:t>
             </a:fld>
             <a:endParaRPr lang="en-US" dirty="0"/>
           </a:p>
@@ -1387,7 +1388,7 @@
               <a:pPr>
                 <a:defRPr/>
               </a:pPr>
-              <a:t>6/21/2026</a:t>
+              <a:t>7/2/2026</a:t>
             </a:fld>
             <a:endParaRPr lang="en-US" dirty="0"/>
           </a:p>
@@ -1589,7 +1590,7 @@
               <a:pPr>
                 <a:defRPr/>
               </a:pPr>
-              <a:t>6/21/2026</a:t>
+              <a:t>7/2/2026</a:t>
             </a:fld>
             <a:endParaRPr lang="en-US" dirty="0"/>
           </a:p>
@@ -1781,7 +1782,7 @@
               <a:pPr>
                 <a:defRPr/>
               </a:pPr>
-              <a:t>6/21/2026</a:t>
+              <a:t>7/2/2026</a:t>
             </a:fld>
             <a:endParaRPr lang="en-US" dirty="0"/>
           </a:p>
@@ -2049,7 +2050,7 @@
               <a:pPr>
                 <a:defRPr/>
               </a:pPr>
-              <a:t>6/21/2026</a:t>
+              <a:t>7/2/2026</a:t>
             </a:fld>
             <a:endParaRPr lang="en-US" dirty="0"/>
           </a:p>
@@ -2359,7 +2360,7 @@
               <a:pPr>
                 <a:defRPr/>
               </a:pPr>
-              <a:t>6/21/2026</a:t>
+              <a:t>7/2/2026</a:t>
             </a:fld>
             <a:endParaRPr lang="en-US" dirty="0"/>
           </a:p>
@@ -2803,7 +2804,7 @@
               <a:pPr>
                 <a:defRPr/>
               </a:pPr>
-              <a:t>6/21/2026</a:t>
+              <a:t>7/2/2026</a:t>
             </a:fld>
             <a:endParaRPr lang="en-US" dirty="0"/>
           </a:p>
@@ -2943,7 +2944,7 @@
               <a:pPr>
                 <a:defRPr/>
               </a:pPr>
-              <a:t>6/21/2026</a:t>
+              <a:t>7/2/2026</a:t>
             </a:fld>
             <a:endParaRPr lang="en-US" dirty="0"/>
           </a:p>
@@ -3060,7 +3061,7 @@
               <a:pPr>
                 <a:defRPr/>
               </a:pPr>
-              <a:t>6/21/2026</a:t>
+              <a:t>7/2/2026</a:t>
             </a:fld>
             <a:endParaRPr lang="en-US" dirty="0"/>
           </a:p>
@@ -3359,7 +3360,7 @@
               <a:pPr>
                 <a:defRPr/>
               </a:pPr>
-              <a:t>6/21/2026</a:t>
+              <a:t>7/2/2026</a:t>
             </a:fld>
             <a:endParaRPr lang="en-US" dirty="0"/>
           </a:p>
@@ -3637,7 +3638,7 @@
               <a:pPr>
                 <a:defRPr/>
               </a:pPr>
-              <a:t>6/21/2026</a:t>
+              <a:t>7/2/2026</a:t>
             </a:fld>
             <a:endParaRPr lang="en-US" dirty="0"/>
           </a:p>
@@ -3885,7 +3886,7 @@
               <a:pPr>
                 <a:defRPr/>
               </a:pPr>
-              <a:t>6/21/2026</a:t>
+              <a:t>7/2/2026</a:t>
             </a:fld>
             <a:endParaRPr lang="en-US" dirty="0"/>
           </a:p>
@@ -4563,7 +4564,7 @@
           <a:p>
             <a:r>
               <a:rPr lang="en-US" dirty="0" smtClean="0"/>
-              <a:t>Finalizing Team Project Idea</a:t>
+              <a:t>Team Project Idea Selection</a:t>
             </a:r>
             <a:endParaRPr lang="en-US" dirty="0"/>
           </a:p>
@@ -4571,14 +4572,14 @@
       </p:sp>
       <p:pic>
         <p:nvPicPr>
-          <p:cNvPr id="8" name="Picture 1"/>
+          <p:cNvPr id="4" name="Picture 2" descr="http://www.texasrockgym.com/wp-content/uploads/2016/04/exercise.jpg"/>
           <p:cNvPicPr>
             <a:picLocks noChangeAspect="1" noChangeArrowheads="1"/>
           </p:cNvPicPr>
           <p:nvPr/>
         </p:nvPicPr>
         <p:blipFill>
-          <a:blip r:embed="rId2" cstate="print"/>
+          <a:blip r:embed="rId3" cstate="print"/>
           <a:srcRect/>
           <a:stretch>
             <a:fillRect/>
@@ -4586,8 +4587,142 @@
         </p:blipFill>
         <p:spPr bwMode="auto">
           <a:xfrm>
-            <a:off x="3124200" y="2415540"/>
-            <a:ext cx="2400300" cy="2461260"/>
+            <a:off x="5562600" y="2514600"/>
+            <a:ext cx="2602992" cy="1600200"/>
+          </a:xfrm>
+          <a:prstGeom prst="rect">
+            <a:avLst/>
+          </a:prstGeom>
+          <a:noFill/>
+        </p:spPr>
+      </p:pic>
+      <p:pic>
+        <p:nvPicPr>
+          <p:cNvPr id="5" name="Picture 2" descr="https://ideascale.com/wp-content/uploads/2015/02/Innovation-Leadership.png"/>
+          <p:cNvPicPr>
+            <a:picLocks noChangeAspect="1" noChangeArrowheads="1"/>
+          </p:cNvPicPr>
+          <p:nvPr/>
+        </p:nvPicPr>
+        <p:blipFill>
+          <a:blip r:embed="rId4" cstate="print"/>
+          <a:srcRect/>
+          <a:stretch>
+            <a:fillRect/>
+          </a:stretch>
+        </p:blipFill>
+        <p:spPr bwMode="auto">
+          <a:xfrm>
+            <a:off x="990600" y="2362200"/>
+            <a:ext cx="1905000" cy="1905000"/>
+          </a:xfrm>
+          <a:prstGeom prst="rect">
+            <a:avLst/>
+          </a:prstGeom>
+          <a:noFill/>
+        </p:spPr>
+      </p:pic>
+      <p:sp>
+        <p:nvSpPr>
+          <p:cNvPr id="6" name="Rectangle 5"/>
+          <p:cNvSpPr/>
+          <p:nvPr/>
+        </p:nvSpPr>
+        <p:spPr>
+          <a:xfrm>
+            <a:off x="4724400" y="1600200"/>
+            <a:ext cx="3962400" cy="830997"/>
+          </a:xfrm>
+          <a:prstGeom prst="rect">
+            <a:avLst/>
+          </a:prstGeom>
+        </p:spPr>
+        <p:txBody>
+          <a:bodyPr wrap="square">
+            <a:spAutoFit/>
+          </a:bodyPr>
+          <a:lstStyle/>
+          <a:p>
+            <a:pPr algn="ctr"/>
+            <a:r>
+              <a:rPr lang="en-US" sz="2400" b="1" dirty="0" smtClean="0">
+                <a:latin typeface="Calibri" pitchFamily="34" charset="0"/>
+                <a:cs typeface="Calibri" pitchFamily="34" charset="0"/>
+              </a:rPr>
+              <a:t>6 members</a:t>
+            </a:r>
+          </a:p>
+          <a:p>
+            <a:pPr algn="ctr"/>
+            <a:r>
+              <a:rPr lang="en-US" sz="2400" b="1" dirty="0" smtClean="0">
+                <a:latin typeface="Calibri" pitchFamily="34" charset="0"/>
+                <a:cs typeface="Calibri" pitchFamily="34" charset="0"/>
+              </a:rPr>
+              <a:t>8 hours per week / member</a:t>
+            </a:r>
+            <a:endParaRPr lang="vi-VN" sz="2400" b="1" dirty="0">
+              <a:latin typeface="Calibri" pitchFamily="34" charset="0"/>
+              <a:cs typeface="Calibri" pitchFamily="34" charset="0"/>
+            </a:endParaRPr>
+          </a:p>
+        </p:txBody>
+      </p:sp>
+      <p:sp>
+        <p:nvSpPr>
+          <p:cNvPr id="7" name="Rectangle 6"/>
+          <p:cNvSpPr/>
+          <p:nvPr/>
+        </p:nvSpPr>
+        <p:spPr>
+          <a:xfrm>
+            <a:off x="990600" y="1447800"/>
+            <a:ext cx="2209800" cy="830997"/>
+          </a:xfrm>
+          <a:prstGeom prst="rect">
+            <a:avLst/>
+          </a:prstGeom>
+        </p:spPr>
+        <p:txBody>
+          <a:bodyPr wrap="square">
+            <a:spAutoFit/>
+          </a:bodyPr>
+          <a:lstStyle/>
+          <a:p>
+            <a:pPr algn="ctr"/>
+            <a:r>
+              <a:rPr lang="en-US" sz="2400" b="1" dirty="0" smtClean="0">
+                <a:latin typeface="Calibri" pitchFamily="34" charset="0"/>
+                <a:cs typeface="Calibri" pitchFamily="34" charset="0"/>
+              </a:rPr>
+              <a:t>Solving real world problems</a:t>
+            </a:r>
+            <a:endParaRPr lang="vi-VN" sz="2400" b="1" dirty="0">
+              <a:latin typeface="Calibri" pitchFamily="34" charset="0"/>
+              <a:cs typeface="Calibri" pitchFamily="34" charset="0"/>
+            </a:endParaRPr>
+          </a:p>
+        </p:txBody>
+      </p:sp>
+      <p:pic>
+        <p:nvPicPr>
+          <p:cNvPr id="8" name="Picture 2"/>
+          <p:cNvPicPr>
+            <a:picLocks noChangeAspect="1" noChangeArrowheads="1"/>
+          </p:cNvPicPr>
+          <p:nvPr/>
+        </p:nvPicPr>
+        <p:blipFill>
+          <a:blip r:embed="rId5" cstate="print"/>
+          <a:srcRect/>
+          <a:stretch>
+            <a:fillRect/>
+          </a:stretch>
+        </p:blipFill>
+        <p:spPr bwMode="auto">
+          <a:xfrm>
+            <a:off x="1676400" y="3908425"/>
+            <a:ext cx="5965825" cy="2416175"/>
           </a:xfrm>
           <a:prstGeom prst="rect">
             <a:avLst/>
@@ -4650,6 +4785,93 @@
           <a:p>
             <a:r>
               <a:rPr lang="en-US" dirty="0" smtClean="0"/>
+              <a:t>Finalizing Team Project Idea</a:t>
+            </a:r>
+            <a:endParaRPr lang="en-US" dirty="0"/>
+          </a:p>
+        </p:txBody>
+      </p:sp>
+      <p:pic>
+        <p:nvPicPr>
+          <p:cNvPr id="8" name="Picture 1"/>
+          <p:cNvPicPr>
+            <a:picLocks noChangeAspect="1" noChangeArrowheads="1"/>
+          </p:cNvPicPr>
+          <p:nvPr/>
+        </p:nvPicPr>
+        <p:blipFill>
+          <a:blip r:embed="rId2" cstate="print"/>
+          <a:srcRect/>
+          <a:stretch>
+            <a:fillRect/>
+          </a:stretch>
+        </p:blipFill>
+        <p:spPr bwMode="auto">
+          <a:xfrm>
+            <a:off x="3124200" y="2415540"/>
+            <a:ext cx="2400300" cy="2461260"/>
+          </a:xfrm>
+          <a:prstGeom prst="rect">
+            <a:avLst/>
+          </a:prstGeom>
+          <a:noFill/>
+          <a:ln w="9525">
+            <a:noFill/>
+            <a:miter lim="800000"/>
+            <a:headEnd/>
+            <a:tailEnd/>
+          </a:ln>
+        </p:spPr>
+      </p:pic>
+    </p:spTree>
+  </p:cSld>
+  <p:clrMapOvr>
+    <a:masterClrMapping/>
+  </p:clrMapOvr>
+  <p:timing>
+    <p:tnLst>
+      <p:par>
+        <p:cTn id="1" dur="indefinite" restart="never" nodeType="tmRoot"/>
+      </p:par>
+    </p:tnLst>
+  </p:timing>
+</p:sld>
+</file>
+
+<file path=ppt/slides/slide12.xml><?xml version="1.0" encoding="utf-8"?>
+<p:sld xmlns:a="http://schemas.openxmlformats.org/drawingml/2006/main" xmlns:r="http://schemas.openxmlformats.org/officeDocument/2006/relationships" xmlns:p="http://schemas.openxmlformats.org/presentationml/2006/main">
+  <p:cSld>
+    <p:spTree>
+      <p:nvGrpSpPr>
+        <p:cNvPr id="1" name=""/>
+        <p:cNvGrpSpPr/>
+        <p:nvPr/>
+      </p:nvGrpSpPr>
+      <p:grpSpPr>
+        <a:xfrm>
+          <a:off x="0" y="0"/>
+          <a:ext cx="0" cy="0"/>
+          <a:chOff x="0" y="0"/>
+          <a:chExt cx="0" cy="0"/>
+        </a:xfrm>
+      </p:grpSpPr>
+      <p:sp>
+        <p:nvSpPr>
+          <p:cNvPr id="2" name="Title 1"/>
+          <p:cNvSpPr>
+            <a:spLocks noGrp="1"/>
+          </p:cNvSpPr>
+          <p:nvPr>
+            <p:ph type="title"/>
+          </p:nvPr>
+        </p:nvSpPr>
+        <p:spPr/>
+        <p:txBody>
+          <a:bodyPr/>
+          <a:lstStyle/>
+          <a:p>
+            <a:r>
+              <a:rPr lang="en-US" dirty="0" smtClean="0"/>
               <a:t>Tools</a:t>
             </a:r>
             <a:endParaRPr lang="en-US" dirty="0"/>
@@ -4738,7 +4960,7 @@
 </p:sld>
 </file>
 
-<file path=ppt/slides/slide12.xml><?xml version="1.0" encoding="utf-8"?>
+<file path=ppt/slides/slide13.xml><?xml version="1.0" encoding="utf-8"?>
 <p:sld xmlns:a="http://schemas.openxmlformats.org/drawingml/2006/main" xmlns:r="http://schemas.openxmlformats.org/officeDocument/2006/relationships" xmlns:p="http://schemas.openxmlformats.org/presentationml/2006/main">
   <p:cSld>
     <p:spTree>
@@ -5004,7 +5226,7 @@
 </p:sld>
 </file>
 
-<file path=ppt/slides/slide13.xml><?xml version="1.0" encoding="utf-8"?>
+<file path=ppt/slides/slide14.xml><?xml version="1.0" encoding="utf-8"?>
 <p:sld xmlns:a="http://schemas.openxmlformats.org/drawingml/2006/main" xmlns:r="http://schemas.openxmlformats.org/officeDocument/2006/relationships" xmlns:p="http://schemas.openxmlformats.org/presentationml/2006/main">
   <p:cSld>
     <p:spTree>
@@ -5289,7 +5511,7 @@
 </p:sld>
 </file>
 
-<file path=ppt/slides/slide14.xml><?xml version="1.0" encoding="utf-8"?>
+<file path=ppt/slides/slide15.xml><?xml version="1.0" encoding="utf-8"?>
 <p:sld xmlns:a="http://schemas.openxmlformats.org/drawingml/2006/main" xmlns:r="http://schemas.openxmlformats.org/officeDocument/2006/relationships" xmlns:p="http://schemas.openxmlformats.org/presentationml/2006/main">
   <p:cSld>
     <p:spTree>
@@ -5630,7 +5852,7 @@
 </p:sld>
 </file>
 
-<file path=ppt/slides/slide15.xml><?xml version="1.0" encoding="utf-8"?>
+<file path=ppt/slides/slide16.xml><?xml version="1.0" encoding="utf-8"?>
 <p:sld xmlns:a="http://schemas.openxmlformats.org/drawingml/2006/main" xmlns:r="http://schemas.openxmlformats.org/officeDocument/2006/relationships" xmlns:p="http://schemas.openxmlformats.org/presentationml/2006/main">
   <p:cSld>
     <p:spTree>
@@ -5995,7 +6217,7 @@
 </p:sld>
 </file>
 
-<file path=ppt/slides/slide16.xml><?xml version="1.0" encoding="utf-8"?>
+<file path=ppt/slides/slide17.xml><?xml version="1.0" encoding="utf-8"?>
 <p:sld xmlns:a="http://schemas.openxmlformats.org/drawingml/2006/main" xmlns:r="http://schemas.openxmlformats.org/officeDocument/2006/relationships" xmlns:p="http://schemas.openxmlformats.org/presentationml/2006/main">
   <p:cSld>
     <p:spTree>
@@ -6395,7 +6617,7 @@
 </p:sld>
 </file>
 
-<file path=ppt/slides/slide17.xml><?xml version="1.0" encoding="utf-8"?>
+<file path=ppt/slides/slide18.xml><?xml version="1.0" encoding="utf-8"?>
 <p:sld xmlns:a="http://schemas.openxmlformats.org/drawingml/2006/main" xmlns:r="http://schemas.openxmlformats.org/officeDocument/2006/relationships" xmlns:p="http://schemas.openxmlformats.org/presentationml/2006/main">
   <p:cSld>
     <p:spTree>
@@ -6446,7 +6668,7 @@
 </p:sld>
 </file>
 
-<file path=ppt/slides/slide18.xml><?xml version="1.0" encoding="utf-8"?>
+<file path=ppt/slides/slide19.xml><?xml version="1.0" encoding="utf-8"?>
 <p:sld xmlns:a="http://schemas.openxmlformats.org/drawingml/2006/main" xmlns:r="http://schemas.openxmlformats.org/officeDocument/2006/relationships" xmlns:p="http://schemas.openxmlformats.org/presentationml/2006/main">
   <p:cSld>
     <p:spTree>
@@ -6785,247 +7007,6 @@
       </p:par>
     </p:tnLst>
   </p:timing>
-</p:sld>
-</file>
-
-<file path=ppt/slides/slide19.xml><?xml version="1.0" encoding="utf-8"?>
-<p:sld xmlns:a="http://schemas.openxmlformats.org/drawingml/2006/main" xmlns:r="http://schemas.openxmlformats.org/officeDocument/2006/relationships" xmlns:p="http://schemas.openxmlformats.org/presentationml/2006/main">
-  <p:cSld>
-    <p:spTree>
-      <p:nvGrpSpPr>
-        <p:cNvPr id="1" name=""/>
-        <p:cNvGrpSpPr/>
-        <p:nvPr/>
-      </p:nvGrpSpPr>
-      <p:grpSpPr>
-        <a:xfrm>
-          <a:off x="0" y="0"/>
-          <a:ext cx="0" cy="0"/>
-          <a:chOff x="0" y="0"/>
-          <a:chExt cx="0" cy="0"/>
-        </a:xfrm>
-      </p:grpSpPr>
-      <p:sp>
-        <p:nvSpPr>
-          <p:cNvPr id="2" name="Title 1"/>
-          <p:cNvSpPr>
-            <a:spLocks noGrp="1"/>
-          </p:cNvSpPr>
-          <p:nvPr>
-            <p:ph type="title"/>
-          </p:nvPr>
-        </p:nvSpPr>
-        <p:spPr/>
-        <p:txBody>
-          <a:bodyPr/>
-          <a:lstStyle/>
-          <a:p>
-            <a:r>
-              <a:rPr lang="en-US" dirty="0" smtClean="0"/>
-              <a:t>Responsibility Assignment Matrix</a:t>
-            </a:r>
-            <a:endParaRPr lang="en-US" dirty="0"/>
-          </a:p>
-        </p:txBody>
-      </p:sp>
-      <p:sp>
-        <p:nvSpPr>
-          <p:cNvPr id="3" name="Content Placeholder 2"/>
-          <p:cNvSpPr>
-            <a:spLocks noGrp="1"/>
-          </p:cNvSpPr>
-          <p:nvPr>
-            <p:ph idx="1"/>
-          </p:nvPr>
-        </p:nvSpPr>
-        <p:spPr>
-          <a:xfrm>
-            <a:off x="457200" y="1600201"/>
-            <a:ext cx="8229600" cy="2362200"/>
-          </a:xfrm>
-        </p:spPr>
-        <p:txBody>
-          <a:bodyPr/>
-          <a:lstStyle/>
-          <a:p>
-            <a:r>
-              <a:rPr lang="en-US" sz="2200" dirty="0" smtClean="0"/>
-              <a:t>Responsibility Assignment Matrix (RAM), also known as </a:t>
-            </a:r>
-          </a:p>
-          <a:p>
-            <a:r>
-              <a:rPr lang="en-US" sz="2200" dirty="0" smtClean="0"/>
-              <a:t>RACI matrix (Responsible, Accountable, Consulted, and Informed matrix), or</a:t>
-            </a:r>
-          </a:p>
-          <a:p>
-            <a:r>
-              <a:rPr lang="en-US" sz="2200" dirty="0" smtClean="0"/>
-              <a:t>LRC (linear responsibility chart)</a:t>
-            </a:r>
-          </a:p>
-          <a:p>
-            <a:r>
-              <a:rPr lang="en-US" sz="2200" dirty="0" smtClean="0"/>
-              <a:t>describes the participation by various roles in completing tasks or deliverables for a project.</a:t>
-            </a:r>
-          </a:p>
-        </p:txBody>
-      </p:sp>
-      <p:pic>
-        <p:nvPicPr>
-          <p:cNvPr id="38914" name="Picture 2"/>
-          <p:cNvPicPr>
-            <a:picLocks noChangeAspect="1" noChangeArrowheads="1"/>
-          </p:cNvPicPr>
-          <p:nvPr/>
-        </p:nvPicPr>
-        <p:blipFill>
-          <a:blip r:embed="rId3" cstate="print"/>
-          <a:srcRect/>
-          <a:stretch>
-            <a:fillRect/>
-          </a:stretch>
-        </p:blipFill>
-        <p:spPr bwMode="auto">
-          <a:xfrm>
-            <a:off x="381000" y="4038600"/>
-            <a:ext cx="4417695" cy="2446020"/>
-          </a:xfrm>
-          <a:prstGeom prst="rect">
-            <a:avLst/>
-          </a:prstGeom>
-          <a:noFill/>
-          <a:ln w="9525">
-            <a:noFill/>
-            <a:miter lim="800000"/>
-            <a:headEnd/>
-            <a:tailEnd/>
-          </a:ln>
-        </p:spPr>
-      </p:pic>
-      <p:sp>
-        <p:nvSpPr>
-          <p:cNvPr id="5" name="TextBox 4"/>
-          <p:cNvSpPr txBox="1"/>
-          <p:nvPr/>
-        </p:nvSpPr>
-        <p:spPr>
-          <a:xfrm>
-            <a:off x="4901044" y="4495800"/>
-            <a:ext cx="4014355" cy="1785104"/>
-          </a:xfrm>
-          <a:prstGeom prst="rect">
-            <a:avLst/>
-          </a:prstGeom>
-          <a:noFill/>
-        </p:spPr>
-        <p:txBody>
-          <a:bodyPr wrap="square" rtlCol="0">
-            <a:spAutoFit/>
-          </a:bodyPr>
-          <a:lstStyle/>
-          <a:p>
-            <a:pPr marL="457200" indent="-457200">
-              <a:buFont typeface="Arial" pitchFamily="34" charset="0"/>
-              <a:buChar char="•"/>
-            </a:pPr>
-            <a:r>
-              <a:rPr lang="en-US" sz="2200" i="1" dirty="0" smtClean="0">
-                <a:solidFill>
-                  <a:srgbClr val="C00000"/>
-                </a:solidFill>
-                <a:latin typeface="+mj-lt"/>
-              </a:rPr>
-              <a:t>Responsibility</a:t>
-            </a:r>
-            <a:r>
-              <a:rPr lang="en-US" sz="2200" dirty="0" smtClean="0">
-                <a:latin typeface="+mj-lt"/>
-              </a:rPr>
-              <a:t> can be shared.</a:t>
-            </a:r>
-          </a:p>
-          <a:p>
-            <a:pPr marL="457200" indent="-457200">
-              <a:buFont typeface="Arial" pitchFamily="34" charset="0"/>
-              <a:buChar char="•"/>
-            </a:pPr>
-            <a:r>
-              <a:rPr lang="en-US" sz="2200" i="1" dirty="0" smtClean="0">
-                <a:solidFill>
-                  <a:srgbClr val="C00000"/>
-                </a:solidFill>
-                <a:latin typeface="+mj-lt"/>
-              </a:rPr>
-              <a:t>Accountability</a:t>
-            </a:r>
-            <a:r>
-              <a:rPr lang="en-US" sz="2200" dirty="0" smtClean="0">
-                <a:latin typeface="+mj-lt"/>
-              </a:rPr>
-              <a:t> cannot be shared. It is something you hold a person to only after a task is done </a:t>
-            </a:r>
-            <a:r>
-              <a:rPr lang="en-US" sz="2200" b="1" dirty="0" smtClean="0">
-                <a:latin typeface="+mj-lt"/>
-              </a:rPr>
-              <a:t>or not done</a:t>
-            </a:r>
-            <a:r>
-              <a:rPr lang="en-US" sz="2200" dirty="0" smtClean="0">
-                <a:latin typeface="+mj-lt"/>
-              </a:rPr>
-              <a:t>.</a:t>
-            </a:r>
-          </a:p>
-        </p:txBody>
-      </p:sp>
-      <p:sp>
-        <p:nvSpPr>
-          <p:cNvPr id="9" name="Rectangle 8"/>
-          <p:cNvSpPr/>
-          <p:nvPr/>
-        </p:nvSpPr>
-        <p:spPr>
-          <a:xfrm>
-            <a:off x="609600" y="5410200"/>
-            <a:ext cx="1066800" cy="307777"/>
-          </a:xfrm>
-          <a:prstGeom prst="rect">
-            <a:avLst/>
-          </a:prstGeom>
-          <a:solidFill>
-            <a:schemeClr val="bg1">
-              <a:lumMod val="95000"/>
-            </a:schemeClr>
-          </a:solidFill>
-        </p:spPr>
-        <p:txBody>
-          <a:bodyPr wrap="square">
-            <a:spAutoFit/>
-          </a:bodyPr>
-          <a:lstStyle/>
-          <a:p>
-            <a:pPr algn="ctr"/>
-            <a:r>
-              <a:rPr lang="en-US" sz="1400" b="1" dirty="0" smtClean="0">
-                <a:latin typeface="+mj-lt"/>
-              </a:rPr>
-              <a:t>Deliverable</a:t>
-            </a:r>
-            <a:endParaRPr lang="en-US" sz="1400" b="1" dirty="0">
-              <a:latin typeface="+mj-lt"/>
-            </a:endParaRPr>
-          </a:p>
-        </p:txBody>
-      </p:sp>
-    </p:spTree>
-  </p:cSld>
-  <p:clrMapOvr>
-    <a:masterClrMapping/>
-  </p:clrMapOvr>
 </p:sld>
 </file>
 
@@ -7417,6 +7398,247 @@
           <a:p>
             <a:r>
               <a:rPr lang="en-US" dirty="0" smtClean="0"/>
+              <a:t>Responsibility Assignment Matrix</a:t>
+            </a:r>
+            <a:endParaRPr lang="en-US" dirty="0"/>
+          </a:p>
+        </p:txBody>
+      </p:sp>
+      <p:sp>
+        <p:nvSpPr>
+          <p:cNvPr id="3" name="Content Placeholder 2"/>
+          <p:cNvSpPr>
+            <a:spLocks noGrp="1"/>
+          </p:cNvSpPr>
+          <p:nvPr>
+            <p:ph idx="1"/>
+          </p:nvPr>
+        </p:nvSpPr>
+        <p:spPr>
+          <a:xfrm>
+            <a:off x="457200" y="1600201"/>
+            <a:ext cx="8229600" cy="2362200"/>
+          </a:xfrm>
+        </p:spPr>
+        <p:txBody>
+          <a:bodyPr/>
+          <a:lstStyle/>
+          <a:p>
+            <a:r>
+              <a:rPr lang="en-US" sz="2200" dirty="0" smtClean="0"/>
+              <a:t>Responsibility Assignment Matrix (RAM), also known as </a:t>
+            </a:r>
+          </a:p>
+          <a:p>
+            <a:r>
+              <a:rPr lang="en-US" sz="2200" dirty="0" smtClean="0"/>
+              <a:t>RACI matrix (Responsible, Accountable, Consulted, and Informed matrix), or</a:t>
+            </a:r>
+          </a:p>
+          <a:p>
+            <a:r>
+              <a:rPr lang="en-US" sz="2200" dirty="0" smtClean="0"/>
+              <a:t>LRC (linear responsibility chart)</a:t>
+            </a:r>
+          </a:p>
+          <a:p>
+            <a:r>
+              <a:rPr lang="en-US" sz="2200" dirty="0" smtClean="0"/>
+              <a:t>describes the participation by various roles in completing tasks or deliverables for a project.</a:t>
+            </a:r>
+          </a:p>
+        </p:txBody>
+      </p:sp>
+      <p:pic>
+        <p:nvPicPr>
+          <p:cNvPr id="38914" name="Picture 2"/>
+          <p:cNvPicPr>
+            <a:picLocks noChangeAspect="1" noChangeArrowheads="1"/>
+          </p:cNvPicPr>
+          <p:nvPr/>
+        </p:nvPicPr>
+        <p:blipFill>
+          <a:blip r:embed="rId3" cstate="print"/>
+          <a:srcRect/>
+          <a:stretch>
+            <a:fillRect/>
+          </a:stretch>
+        </p:blipFill>
+        <p:spPr bwMode="auto">
+          <a:xfrm>
+            <a:off x="381000" y="4038600"/>
+            <a:ext cx="4417695" cy="2446020"/>
+          </a:xfrm>
+          <a:prstGeom prst="rect">
+            <a:avLst/>
+          </a:prstGeom>
+          <a:noFill/>
+          <a:ln w="9525">
+            <a:noFill/>
+            <a:miter lim="800000"/>
+            <a:headEnd/>
+            <a:tailEnd/>
+          </a:ln>
+        </p:spPr>
+      </p:pic>
+      <p:sp>
+        <p:nvSpPr>
+          <p:cNvPr id="5" name="TextBox 4"/>
+          <p:cNvSpPr txBox="1"/>
+          <p:nvPr/>
+        </p:nvSpPr>
+        <p:spPr>
+          <a:xfrm>
+            <a:off x="4901044" y="4495800"/>
+            <a:ext cx="4014355" cy="1785104"/>
+          </a:xfrm>
+          <a:prstGeom prst="rect">
+            <a:avLst/>
+          </a:prstGeom>
+          <a:noFill/>
+        </p:spPr>
+        <p:txBody>
+          <a:bodyPr wrap="square" rtlCol="0">
+            <a:spAutoFit/>
+          </a:bodyPr>
+          <a:lstStyle/>
+          <a:p>
+            <a:pPr marL="457200" indent="-457200">
+              <a:buFont typeface="Arial" pitchFamily="34" charset="0"/>
+              <a:buChar char="•"/>
+            </a:pPr>
+            <a:r>
+              <a:rPr lang="en-US" sz="2200" i="1" dirty="0" smtClean="0">
+                <a:solidFill>
+                  <a:srgbClr val="C00000"/>
+                </a:solidFill>
+                <a:latin typeface="+mj-lt"/>
+              </a:rPr>
+              <a:t>Responsibility</a:t>
+            </a:r>
+            <a:r>
+              <a:rPr lang="en-US" sz="2200" dirty="0" smtClean="0">
+                <a:latin typeface="+mj-lt"/>
+              </a:rPr>
+              <a:t> can be shared.</a:t>
+            </a:r>
+          </a:p>
+          <a:p>
+            <a:pPr marL="457200" indent="-457200">
+              <a:buFont typeface="Arial" pitchFamily="34" charset="0"/>
+              <a:buChar char="•"/>
+            </a:pPr>
+            <a:r>
+              <a:rPr lang="en-US" sz="2200" i="1" dirty="0" smtClean="0">
+                <a:solidFill>
+                  <a:srgbClr val="C00000"/>
+                </a:solidFill>
+                <a:latin typeface="+mj-lt"/>
+              </a:rPr>
+              <a:t>Accountability</a:t>
+            </a:r>
+            <a:r>
+              <a:rPr lang="en-US" sz="2200" dirty="0" smtClean="0">
+                <a:latin typeface="+mj-lt"/>
+              </a:rPr>
+              <a:t> cannot be shared. It is something you hold a person to only after a task is done </a:t>
+            </a:r>
+            <a:r>
+              <a:rPr lang="en-US" sz="2200" b="1" dirty="0" smtClean="0">
+                <a:latin typeface="+mj-lt"/>
+              </a:rPr>
+              <a:t>or not done</a:t>
+            </a:r>
+            <a:r>
+              <a:rPr lang="en-US" sz="2200" dirty="0" smtClean="0">
+                <a:latin typeface="+mj-lt"/>
+              </a:rPr>
+              <a:t>.</a:t>
+            </a:r>
+          </a:p>
+        </p:txBody>
+      </p:sp>
+      <p:sp>
+        <p:nvSpPr>
+          <p:cNvPr id="9" name="Rectangle 8"/>
+          <p:cNvSpPr/>
+          <p:nvPr/>
+        </p:nvSpPr>
+        <p:spPr>
+          <a:xfrm>
+            <a:off x="609600" y="5410200"/>
+            <a:ext cx="1066800" cy="307777"/>
+          </a:xfrm>
+          <a:prstGeom prst="rect">
+            <a:avLst/>
+          </a:prstGeom>
+          <a:solidFill>
+            <a:schemeClr val="bg1">
+              <a:lumMod val="95000"/>
+            </a:schemeClr>
+          </a:solidFill>
+        </p:spPr>
+        <p:txBody>
+          <a:bodyPr wrap="square">
+            <a:spAutoFit/>
+          </a:bodyPr>
+          <a:lstStyle/>
+          <a:p>
+            <a:pPr algn="ctr"/>
+            <a:r>
+              <a:rPr lang="en-US" sz="1400" b="1" dirty="0" smtClean="0">
+                <a:latin typeface="+mj-lt"/>
+              </a:rPr>
+              <a:t>Deliverable</a:t>
+            </a:r>
+            <a:endParaRPr lang="en-US" sz="1400" b="1" dirty="0">
+              <a:latin typeface="+mj-lt"/>
+            </a:endParaRPr>
+          </a:p>
+        </p:txBody>
+      </p:sp>
+    </p:spTree>
+  </p:cSld>
+  <p:clrMapOvr>
+    <a:masterClrMapping/>
+  </p:clrMapOvr>
+</p:sld>
+</file>
+
+<file path=ppt/slides/slide21.xml><?xml version="1.0" encoding="utf-8"?>
+<p:sld xmlns:a="http://schemas.openxmlformats.org/drawingml/2006/main" xmlns:r="http://schemas.openxmlformats.org/officeDocument/2006/relationships" xmlns:p="http://schemas.openxmlformats.org/presentationml/2006/main">
+  <p:cSld>
+    <p:spTree>
+      <p:nvGrpSpPr>
+        <p:cNvPr id="1" name=""/>
+        <p:cNvGrpSpPr/>
+        <p:nvPr/>
+      </p:nvGrpSpPr>
+      <p:grpSpPr>
+        <a:xfrm>
+          <a:off x="0" y="0"/>
+          <a:ext cx="0" cy="0"/>
+          <a:chOff x="0" y="0"/>
+          <a:chExt cx="0" cy="0"/>
+        </a:xfrm>
+      </p:grpSpPr>
+      <p:sp>
+        <p:nvSpPr>
+          <p:cNvPr id="2" name="Title 1"/>
+          <p:cNvSpPr>
+            <a:spLocks noGrp="1"/>
+          </p:cNvSpPr>
+          <p:nvPr>
+            <p:ph type="title"/>
+          </p:nvPr>
+        </p:nvSpPr>
+        <p:spPr/>
+        <p:txBody>
+          <a:bodyPr/>
+          <a:lstStyle/>
+          <a:p>
+            <a:r>
+              <a:rPr lang="en-US" dirty="0" smtClean="0"/>
               <a:t>Checklist</a:t>
             </a:r>
             <a:endParaRPr lang="en-US" dirty="0"/>
@@ -7581,7 +7803,7 @@
 </p:sld>
 </file>
 
-<file path=ppt/slides/slide21.xml><?xml version="1.0" encoding="utf-8"?>
+<file path=ppt/slides/slide22.xml><?xml version="1.0" encoding="utf-8"?>
 <p:sld xmlns:a="http://schemas.openxmlformats.org/drawingml/2006/main" xmlns:r="http://schemas.openxmlformats.org/officeDocument/2006/relationships" xmlns:p="http://schemas.openxmlformats.org/presentationml/2006/main">
   <p:cSld>
     <p:spTree>
@@ -7632,7 +7854,7 @@
 </p:sld>
 </file>
 
-<file path=ppt/slides/slide22.xml><?xml version="1.0" encoding="utf-8"?>
+<file path=ppt/slides/slide23.xml><?xml version="1.0" encoding="utf-8"?>
 <p:sld xmlns:a="http://schemas.openxmlformats.org/drawingml/2006/main" xmlns:r="http://schemas.openxmlformats.org/officeDocument/2006/relationships" xmlns:p="http://schemas.openxmlformats.org/presentationml/2006/main">
   <p:cSld>
     <p:spTree>
@@ -7966,7 +8188,7 @@
 </p:sld>
 </file>
 
-<file path=ppt/slides/slide23.xml><?xml version="1.0" encoding="utf-8"?>
+<file path=ppt/slides/slide24.xml><?xml version="1.0" encoding="utf-8"?>
 <p:sld xmlns:a="http://schemas.openxmlformats.org/drawingml/2006/main" xmlns:r="http://schemas.openxmlformats.org/officeDocument/2006/relationships" xmlns:p="http://schemas.openxmlformats.org/presentationml/2006/main">
   <p:cSld>
     <p:spTree>
@@ -8880,7 +9102,7 @@
           <a:p>
             <a:r>
               <a:rPr lang="en-US" dirty="0" smtClean="0"/>
-              <a:t>Evaluating the Project Ideas</a:t>
+              <a:t>2026</a:t>
             </a:r>
             <a:endParaRPr lang="en-US" dirty="0"/>
           </a:p>
@@ -8902,116 +9124,40 @@
           <a:lstStyle/>
           <a:p>
             <a:r>
-              <a:rPr lang="en-US" sz="2000" dirty="0" smtClean="0"/>
-              <a:t>Project Origins? Sponsor? Client?</a:t>
-            </a:r>
-          </a:p>
-          <a:p>
-            <a:pPr lvl="1"/>
-            <a:r>
-              <a:rPr lang="en-US" sz="1800" dirty="0" smtClean="0"/>
-              <a:t>Name, address, phone number?</a:t>
-            </a:r>
-          </a:p>
-          <a:p>
-            <a:r>
-              <a:rPr lang="en-US" sz="2000" dirty="0" smtClean="0"/>
-              <a:t>Budget?</a:t>
-            </a:r>
-          </a:p>
-          <a:p>
-            <a:r>
-              <a:rPr lang="en-US" sz="2000" dirty="0" smtClean="0"/>
-              <a:t>Problems?</a:t>
-            </a:r>
-          </a:p>
-          <a:p>
-            <a:r>
-              <a:rPr lang="en-US" sz="2000" dirty="0" smtClean="0"/>
-              <a:t>Problem Relevance?</a:t>
-            </a:r>
-          </a:p>
-          <a:p>
-            <a:pPr lvl="1"/>
-            <a:r>
-              <a:rPr lang="en-US" sz="1800" dirty="0" smtClean="0"/>
-              <a:t>Competitors? Similar products? Business goals?</a:t>
-            </a:r>
-          </a:p>
-          <a:p>
-            <a:pPr lvl="1"/>
-            <a:r>
-              <a:rPr lang="en-US" sz="1800" dirty="0" smtClean="0"/>
-              <a:t>Product purchased by yourself?</a:t>
-            </a:r>
-          </a:p>
-          <a:p>
-            <a:pPr lvl="1"/>
-            <a:r>
-              <a:rPr lang="en-US" sz="1800" dirty="0" smtClean="0"/>
-              <a:t>Related work? Evaluation?</a:t>
-            </a:r>
-          </a:p>
-          <a:p>
-            <a:r>
-              <a:rPr lang="en-US" sz="2000" dirty="0" smtClean="0"/>
-              <a:t>Stakeholders?</a:t>
-            </a:r>
-          </a:p>
-          <a:p>
-            <a:pPr lvl="1"/>
-            <a:r>
-              <a:rPr lang="en-US" sz="1800" dirty="0" smtClean="0"/>
-              <a:t>Can you meet with them or reach an agreement?</a:t>
-            </a:r>
-          </a:p>
-          <a:p>
-            <a:r>
-              <a:rPr lang="en-US" sz="2000" dirty="0" smtClean="0"/>
-              <a:t>Business Use Cases?</a:t>
-            </a:r>
-          </a:p>
-          <a:p>
-            <a:r>
-              <a:rPr lang="en-US" sz="2000" dirty="0" smtClean="0"/>
-              <a:t>Time? Cost? Feasibility? Risks?</a:t>
-            </a:r>
-            <a:endParaRPr lang="en-US" sz="2000" dirty="0"/>
-          </a:p>
-        </p:txBody>
-      </p:sp>
-      <p:pic>
-        <p:nvPicPr>
-          <p:cNvPr id="5" name="Picture 3"/>
-          <p:cNvPicPr>
-            <a:picLocks noChangeAspect="1" noChangeArrowheads="1"/>
-          </p:cNvPicPr>
-          <p:nvPr/>
-        </p:nvPicPr>
-        <p:blipFill>
-          <a:blip r:embed="rId2" cstate="print"/>
-          <a:srcRect/>
-          <a:stretch>
-            <a:fillRect/>
-          </a:stretch>
-        </p:blipFill>
-        <p:spPr bwMode="auto">
-          <a:xfrm>
-            <a:off x="6248400" y="2065020"/>
-            <a:ext cx="2103120" cy="2735580"/>
-          </a:xfrm>
-          <a:prstGeom prst="rect">
-            <a:avLst/>
-          </a:prstGeom>
-          <a:noFill/>
-          <a:ln w="9525">
-            <a:noFill/>
-            <a:miter lim="800000"/>
-            <a:headEnd/>
-            <a:tailEnd/>
-          </a:ln>
-        </p:spPr>
-      </p:pic>
+              <a:rPr lang="en-US" dirty="0" smtClean="0"/>
+              <a:t>OCR with LLM-Based </a:t>
+            </a:r>
+            <a:r>
+              <a:rPr lang="en-US" dirty="0" smtClean="0"/>
+              <a:t>Agents.</a:t>
+            </a:r>
+            <a:endParaRPr lang="en-US" dirty="0" smtClean="0"/>
+          </a:p>
+          <a:p>
+            <a:r>
+              <a:rPr lang="en-US" dirty="0" smtClean="0"/>
+              <a:t>Document </a:t>
+            </a:r>
+            <a:r>
+              <a:rPr lang="en-US" dirty="0" err="1" smtClean="0"/>
+              <a:t>Autocompletion</a:t>
+            </a:r>
+            <a:r>
+              <a:rPr lang="en-US" dirty="0" smtClean="0"/>
+              <a:t> with Templates and LLM-Based </a:t>
+            </a:r>
+            <a:r>
+              <a:rPr lang="en-US" dirty="0" smtClean="0"/>
+              <a:t>Agents. (Conga </a:t>
+            </a:r>
+            <a:r>
+              <a:rPr lang="en-US" smtClean="0"/>
+              <a:t>Salesforce)</a:t>
+            </a:r>
+            <a:endParaRPr lang="en-US" dirty="0"/>
+          </a:p>
+        </p:txBody>
+      </p:sp>
     </p:spTree>
   </p:cSld>
   <p:clrMapOvr>
@@ -9054,22 +9200,116 @@
           <a:p>
             <a:r>
               <a:rPr lang="en-US" dirty="0" smtClean="0"/>
-              <a:t>Team Project Idea Selection</a:t>
+              <a:t>Evaluating the Project Ideas</a:t>
             </a:r>
             <a:endParaRPr lang="en-US" dirty="0"/>
+          </a:p>
+        </p:txBody>
+      </p:sp>
+      <p:sp>
+        <p:nvSpPr>
+          <p:cNvPr id="3" name="Content Placeholder 2"/>
+          <p:cNvSpPr>
+            <a:spLocks noGrp="1"/>
+          </p:cNvSpPr>
+          <p:nvPr>
+            <p:ph idx="1"/>
+          </p:nvPr>
+        </p:nvSpPr>
+        <p:spPr/>
+        <p:txBody>
+          <a:bodyPr/>
+          <a:lstStyle/>
+          <a:p>
+            <a:r>
+              <a:rPr lang="en-US" sz="2000" dirty="0" smtClean="0"/>
+              <a:t>Project Origins? Sponsor? Client?</a:t>
+            </a:r>
+          </a:p>
+          <a:p>
+            <a:pPr lvl="1"/>
+            <a:r>
+              <a:rPr lang="en-US" sz="1800" dirty="0" smtClean="0"/>
+              <a:t>Name, address, phone number?</a:t>
+            </a:r>
+          </a:p>
+          <a:p>
+            <a:r>
+              <a:rPr lang="en-US" sz="2000" dirty="0" smtClean="0"/>
+              <a:t>Budget?</a:t>
+            </a:r>
+          </a:p>
+          <a:p>
+            <a:r>
+              <a:rPr lang="en-US" sz="2000" dirty="0" smtClean="0"/>
+              <a:t>Problems?</a:t>
+            </a:r>
+          </a:p>
+          <a:p>
+            <a:r>
+              <a:rPr lang="en-US" sz="2000" dirty="0" smtClean="0"/>
+              <a:t>Problem Relevance?</a:t>
+            </a:r>
+          </a:p>
+          <a:p>
+            <a:pPr lvl="1"/>
+            <a:r>
+              <a:rPr lang="en-US" sz="1800" dirty="0" smtClean="0"/>
+              <a:t>Competitors? Similar products? Business goals?</a:t>
+            </a:r>
+          </a:p>
+          <a:p>
+            <a:pPr lvl="1"/>
+            <a:r>
+              <a:rPr lang="en-US" sz="1800" dirty="0" smtClean="0"/>
+              <a:t>Product purchased by yourself?</a:t>
+            </a:r>
+          </a:p>
+          <a:p>
+            <a:pPr lvl="1"/>
+            <a:r>
+              <a:rPr lang="en-US" sz="1800" dirty="0" smtClean="0"/>
+              <a:t>Related work? Evaluation?</a:t>
+            </a:r>
+          </a:p>
+          <a:p>
+            <a:r>
+              <a:rPr lang="en-US" sz="2000" dirty="0" smtClean="0"/>
+              <a:t>Stakeholders?</a:t>
+            </a:r>
+          </a:p>
+          <a:p>
+            <a:pPr lvl="1"/>
+            <a:r>
+              <a:rPr lang="en-US" sz="1800" dirty="0" smtClean="0"/>
+              <a:t>Can you meet with them or reach an agreement?</a:t>
+            </a:r>
+          </a:p>
+          <a:p>
+            <a:r>
+              <a:rPr lang="en-US" sz="2000" dirty="0" smtClean="0"/>
+              <a:t>Business Use Cases?</a:t>
+            </a:r>
+          </a:p>
+          <a:p>
+            <a:r>
+              <a:rPr lang="en-US" sz="2000" dirty="0" smtClean="0"/>
+              <a:t>Time? Cost? Feasibility? Risks?</a:t>
+            </a:r>
+            <a:endParaRPr lang="en-US" sz="2000" dirty="0"/>
           </a:p>
         </p:txBody>
       </p:sp>
       <p:pic>
         <p:nvPicPr>
-          <p:cNvPr id="4" name="Picture 2" descr="http://www.texasrockgym.com/wp-content/uploads/2016/04/exercise.jpg"/>
+          <p:cNvPr id="5" name="Picture 3"/>
           <p:cNvPicPr>
             <a:picLocks noChangeAspect="1" noChangeArrowheads="1"/>
           </p:cNvPicPr>
           <p:nvPr/>
         </p:nvPicPr>
         <p:blipFill>
-          <a:blip r:embed="rId3" cstate="print"/>
+          <a:blip r:embed="rId2" cstate="print"/>
           <a:srcRect/>
           <a:stretch>
             <a:fillRect/>
@@ -9077,142 +9317,8 @@
         </p:blipFill>
         <p:spPr bwMode="auto">
           <a:xfrm>
-            <a:off x="5562600" y="2514600"/>
-            <a:ext cx="2602992" cy="1600200"/>
-          </a:xfrm>
-          <a:prstGeom prst="rect">
-            <a:avLst/>
-          </a:prstGeom>
-          <a:noFill/>
-        </p:spPr>
-      </p:pic>
-      <p:pic>
-        <p:nvPicPr>
-          <p:cNvPr id="5" name="Picture 2" descr="https://ideascale.com/wp-content/uploads/2015/02/Innovation-Leadership.png"/>
-          <p:cNvPicPr>
-            <a:picLocks noChangeAspect="1" noChangeArrowheads="1"/>
-          </p:cNvPicPr>
-          <p:nvPr/>
-        </p:nvPicPr>
-        <p:blipFill>
-          <a:blip r:embed="rId4" cstate="print"/>
-          <a:srcRect/>
-          <a:stretch>
-            <a:fillRect/>
-          </a:stretch>
-        </p:blipFill>
-        <p:spPr bwMode="auto">
-          <a:xfrm>
-            <a:off x="990600" y="2362200"/>
-            <a:ext cx="1905000" cy="1905000"/>
-          </a:xfrm>
-          <a:prstGeom prst="rect">
-            <a:avLst/>
-          </a:prstGeom>
-          <a:noFill/>
-        </p:spPr>
-      </p:pic>
-      <p:sp>
-        <p:nvSpPr>
-          <p:cNvPr id="6" name="Rectangle 5"/>
-          <p:cNvSpPr/>
-          <p:nvPr/>
-        </p:nvSpPr>
-        <p:spPr>
-          <a:xfrm>
-            <a:off x="4724400" y="1600200"/>
-            <a:ext cx="3962400" cy="830997"/>
-          </a:xfrm>
-          <a:prstGeom prst="rect">
-            <a:avLst/>
-          </a:prstGeom>
-        </p:spPr>
-        <p:txBody>
-          <a:bodyPr wrap="square">
-            <a:spAutoFit/>
-          </a:bodyPr>
-          <a:lstStyle/>
-          <a:p>
-            <a:pPr algn="ctr"/>
-            <a:r>
-              <a:rPr lang="en-US" sz="2400" b="1" dirty="0" smtClean="0">
-                <a:latin typeface="Calibri" pitchFamily="34" charset="0"/>
-                <a:cs typeface="Calibri" pitchFamily="34" charset="0"/>
-              </a:rPr>
-              <a:t>6 members</a:t>
-            </a:r>
-          </a:p>
-          <a:p>
-            <a:pPr algn="ctr"/>
-            <a:r>
-              <a:rPr lang="en-US" sz="2400" b="1" dirty="0" smtClean="0">
-                <a:latin typeface="Calibri" pitchFamily="34" charset="0"/>
-                <a:cs typeface="Calibri" pitchFamily="34" charset="0"/>
-              </a:rPr>
-              <a:t>8 hours per week / member</a:t>
-            </a:r>
-            <a:endParaRPr lang="vi-VN" sz="2400" b="1" dirty="0">
-              <a:latin typeface="Calibri" pitchFamily="34" charset="0"/>
-              <a:cs typeface="Calibri" pitchFamily="34" charset="0"/>
-            </a:endParaRPr>
-          </a:p>
-        </p:txBody>
-      </p:sp>
-      <p:sp>
-        <p:nvSpPr>
-          <p:cNvPr id="7" name="Rectangle 6"/>
-          <p:cNvSpPr/>
-          <p:nvPr/>
-        </p:nvSpPr>
-        <p:spPr>
-          <a:xfrm>
-            <a:off x="990600" y="1447800"/>
-            <a:ext cx="2209800" cy="830997"/>
-          </a:xfrm>
-          <a:prstGeom prst="rect">
-            <a:avLst/>
-          </a:prstGeom>
-        </p:spPr>
-        <p:txBody>
-          <a:bodyPr wrap="square">
-            <a:spAutoFit/>
-          </a:bodyPr>
-          <a:lstStyle/>
-          <a:p>
-            <a:pPr algn="ctr"/>
-            <a:r>
-              <a:rPr lang="en-US" sz="2400" b="1" dirty="0" smtClean="0">
-                <a:latin typeface="Calibri" pitchFamily="34" charset="0"/>
-                <a:cs typeface="Calibri" pitchFamily="34" charset="0"/>
-              </a:rPr>
-              <a:t>Solving real world problems</a:t>
-            </a:r>
-            <a:endParaRPr lang="vi-VN" sz="2400" b="1" dirty="0">
-              <a:latin typeface="Calibri" pitchFamily="34" charset="0"/>
-              <a:cs typeface="Calibri" pitchFamily="34" charset="0"/>
-            </a:endParaRPr>
-          </a:p>
-        </p:txBody>
-      </p:sp>
-      <p:pic>
-        <p:nvPicPr>
-          <p:cNvPr id="8" name="Picture 2"/>
-          <p:cNvPicPr>
-            <a:picLocks noChangeAspect="1" noChangeArrowheads="1"/>
-          </p:cNvPicPr>
-          <p:nvPr/>
-        </p:nvPicPr>
-        <p:blipFill>
-          <a:blip r:embed="rId5" cstate="print"/>
-          <a:srcRect/>
-          <a:stretch>
-            <a:fillRect/>
-          </a:stretch>
-        </p:blipFill>
-        <p:spPr bwMode="auto">
-          <a:xfrm>
-            <a:off x="1676400" y="3908425"/>
-            <a:ext cx="5965825" cy="2416175"/>
+            <a:off x="6248400" y="2065020"/>
+            <a:ext cx="2103120" cy="2735580"/>
           </a:xfrm>
           <a:prstGeom prst="rect">
             <a:avLst/>
@@ -9231,13 +9337,6 @@
   <p:clrMapOvr>
     <a:masterClrMapping/>
   </p:clrMapOvr>
-  <p:timing>
-    <p:tnLst>
-      <p:par>
-        <p:cTn id="1" dur="indefinite" restart="never" nodeType="tmRoot"/>
-      </p:par>
-    </p:tnLst>
-  </p:timing>
 </p:sld>
 </file>
 

--- a/Software Project Management/03. Software Project Initiation.pptx
+++ b/Software Project Management/03. Software Project Initiation.pptx
@@ -9151,8 +9151,12 @@
               <a:t>Agents. (Conga </a:t>
             </a:r>
             <a:r>
-              <a:rPr lang="en-US" smtClean="0"/>
-              <a:t>Salesforce)</a:t>
+              <a:rPr lang="en-US" dirty="0" err="1" smtClean="0"/>
+              <a:t>Salesforce</a:t>
+            </a:r>
+            <a:r>
+              <a:rPr lang="en-US" dirty="0" smtClean="0"/>
+              <a:t>)</a:t>
             </a:r>
             <a:endParaRPr lang="en-US" dirty="0"/>
           </a:p>

--- a/Software Project Management/03. Software Project Initiation.pptx
+++ b/Software Project Management/03. Software Project Initiation.pptx
@@ -9102,7 +9102,7 @@
           <a:p>
             <a:r>
               <a:rPr lang="en-US" dirty="0" smtClean="0"/>
-              <a:t>2026</a:t>
+              <a:t>2026 Project Ideas</a:t>
             </a:r>
             <a:endParaRPr lang="en-US" dirty="0"/>
           </a:p>

--- a/Software Project Management/03. Software Project Initiation.pptx
+++ b/Software Project Management/03. Software Project Initiation.pptx
@@ -5,10 +5,10 @@
     <p:sldMasterId id="2147483708" r:id="rId1"/>
   </p:sldMasterIdLst>
   <p:notesMasterIdLst>
-    <p:notesMasterId r:id="rId26"/>
+    <p:notesMasterId r:id="rId28"/>
   </p:notesMasterIdLst>
   <p:handoutMasterIdLst>
-    <p:handoutMasterId r:id="rId27"/>
+    <p:handoutMasterId r:id="rId29"/>
   </p:handoutMasterIdLst>
   <p:sldIdLst>
     <p:sldId id="256" r:id="rId2"/>
@@ -17,24 +17,26 @@
     <p:sldId id="839" r:id="rId5"/>
     <p:sldId id="881" r:id="rId6"/>
     <p:sldId id="882" r:id="rId7"/>
-    <p:sldId id="883" r:id="rId8"/>
-    <p:sldId id="889" r:id="rId9"/>
-    <p:sldId id="888" r:id="rId10"/>
-    <p:sldId id="884" r:id="rId11"/>
-    <p:sldId id="886" r:id="rId12"/>
-    <p:sldId id="887" r:id="rId13"/>
-    <p:sldId id="855" r:id="rId14"/>
-    <p:sldId id="872" r:id="rId15"/>
-    <p:sldId id="879" r:id="rId16"/>
-    <p:sldId id="873" r:id="rId17"/>
-    <p:sldId id="874" r:id="rId18"/>
-    <p:sldId id="842" r:id="rId19"/>
-    <p:sldId id="875" r:id="rId20"/>
-    <p:sldId id="876" r:id="rId21"/>
-    <p:sldId id="877" r:id="rId22"/>
-    <p:sldId id="843" r:id="rId23"/>
-    <p:sldId id="830" r:id="rId24"/>
-    <p:sldId id="343" r:id="rId25"/>
+    <p:sldId id="898" r:id="rId8"/>
+    <p:sldId id="883" r:id="rId9"/>
+    <p:sldId id="889" r:id="rId10"/>
+    <p:sldId id="888" r:id="rId11"/>
+    <p:sldId id="892" r:id="rId12"/>
+    <p:sldId id="893" r:id="rId13"/>
+    <p:sldId id="894" r:id="rId14"/>
+    <p:sldId id="895" r:id="rId15"/>
+    <p:sldId id="896" r:id="rId16"/>
+    <p:sldId id="899" r:id="rId17"/>
+    <p:sldId id="897" r:id="rId18"/>
+    <p:sldId id="886" r:id="rId19"/>
+    <p:sldId id="874" r:id="rId20"/>
+    <p:sldId id="842" r:id="rId21"/>
+    <p:sldId id="875" r:id="rId22"/>
+    <p:sldId id="876" r:id="rId23"/>
+    <p:sldId id="877" r:id="rId24"/>
+    <p:sldId id="843" r:id="rId25"/>
+    <p:sldId id="830" r:id="rId26"/>
+    <p:sldId id="343" r:id="rId27"/>
   </p:sldIdLst>
   <p:sldSz cx="9144000" cy="6858000" type="screen4x3"/>
   <p:notesSz cx="6858000" cy="9144000"/>
@@ -249,7 +251,7 @@
             <a:fld id="{8FCF70C7-1A17-4B8F-8E82-A20E29AAAC58}" type="datetimeFigureOut">
               <a:rPr lang="en-US" smtClean="0"/>
               <a:pPr/>
-              <a:t>7/2/2026</a:t>
+              <a:t>7/3/2026</a:t>
             </a:fld>
             <a:endParaRPr lang="en-US" dirty="0"/>
           </a:p>
@@ -411,7 +413,7 @@
             <a:fld id="{B972150E-24DE-4D23-AF8D-CF01896B0C83}" type="datetimeFigureOut">
               <a:rPr lang="en-US" smtClean="0"/>
               <a:pPr/>
-              <a:t>7/2/2026</a:t>
+              <a:t>7/3/2026</a:t>
             </a:fld>
             <a:endParaRPr lang="en-US" dirty="0"/>
           </a:p>
@@ -745,7 +747,7 @@
             <a:fld id="{B4E670EC-EF90-4A84-9798-83F1F2DBB460}" type="slidenum">
               <a:rPr lang="en-US" smtClean="0"/>
               <a:pPr/>
-              <a:t>7</a:t>
+              <a:t>8</a:t>
             </a:fld>
             <a:endParaRPr lang="en-US"/>
           </a:p>
@@ -824,12 +826,12 @@
           <a:bodyPr/>
           <a:lstStyle/>
           <a:p>
-            <a:fld id="{B4E670EC-EF90-4A84-9798-83F1F2DBB460}" type="slidenum">
+            <a:fld id="{758E95B1-5ED0-4005-B293-784E4C93134E}" type="slidenum">
               <a:rPr lang="en-US" smtClean="0"/>
               <a:pPr/>
-              <a:t>10</a:t>
+              <a:t>21</a:t>
             </a:fld>
-            <a:endParaRPr lang="en-US"/>
+            <a:endParaRPr lang="en-US" dirty="0"/>
           </a:p>
         </p:txBody>
       </p:sp>
@@ -909,89 +911,7 @@
             <a:fld id="{758E95B1-5ED0-4005-B293-784E4C93134E}" type="slidenum">
               <a:rPr lang="en-US" smtClean="0"/>
               <a:pPr/>
-              <a:t>19</a:t>
-            </a:fld>
-            <a:endParaRPr lang="en-US" dirty="0"/>
-          </a:p>
-        </p:txBody>
-      </p:sp>
-    </p:spTree>
-  </p:cSld>
-  <p:clrMapOvr>
-    <a:masterClrMapping/>
-  </p:clrMapOvr>
-</p:notes>
-</file>
-
-<file path=ppt/notesSlides/notesSlide4.xml><?xml version="1.0" encoding="utf-8"?>
-<p:notes xmlns:a="http://schemas.openxmlformats.org/drawingml/2006/main" xmlns:r="http://schemas.openxmlformats.org/officeDocument/2006/relationships" xmlns:p="http://schemas.openxmlformats.org/presentationml/2006/main">
-  <p:cSld>
-    <p:spTree>
-      <p:nvGrpSpPr>
-        <p:cNvPr id="1" name=""/>
-        <p:cNvGrpSpPr/>
-        <p:nvPr/>
-      </p:nvGrpSpPr>
-      <p:grpSpPr>
-        <a:xfrm>
-          <a:off x="0" y="0"/>
-          <a:ext cx="0" cy="0"/>
-          <a:chOff x="0" y="0"/>
-          <a:chExt cx="0" cy="0"/>
-        </a:xfrm>
-      </p:grpSpPr>
-      <p:sp>
-        <p:nvSpPr>
-          <p:cNvPr id="2" name="Slide Image Placeholder 1"/>
-          <p:cNvSpPr>
-            <a:spLocks noGrp="1" noRot="1" noChangeAspect="1"/>
-          </p:cNvSpPr>
-          <p:nvPr>
-            <p:ph type="sldImg"/>
-          </p:nvPr>
-        </p:nvSpPr>
-        <p:spPr/>
-      </p:sp>
-      <p:sp>
-        <p:nvSpPr>
-          <p:cNvPr id="3" name="Notes Placeholder 2"/>
-          <p:cNvSpPr>
-            <a:spLocks noGrp="1"/>
-          </p:cNvSpPr>
-          <p:nvPr>
-            <p:ph type="body" idx="1"/>
-          </p:nvPr>
-        </p:nvSpPr>
-        <p:spPr/>
-        <p:txBody>
-          <a:bodyPr>
-            <a:normAutofit/>
-          </a:bodyPr>
-          <a:lstStyle/>
-          <a:p>
-            <a:endParaRPr lang="en-US" dirty="0"/>
-          </a:p>
-        </p:txBody>
-      </p:sp>
-      <p:sp>
-        <p:nvSpPr>
-          <p:cNvPr id="4" name="Slide Number Placeholder 3"/>
-          <p:cNvSpPr>
-            <a:spLocks noGrp="1"/>
-          </p:cNvSpPr>
-          <p:nvPr>
-            <p:ph type="sldNum" sz="quarter" idx="10"/>
-          </p:nvPr>
-        </p:nvSpPr>
-        <p:spPr/>
-        <p:txBody>
-          <a:bodyPr/>
-          <a:lstStyle/>
-          <a:p>
-            <a:fld id="{758E95B1-5ED0-4005-B293-784E4C93134E}" type="slidenum">
-              <a:rPr lang="en-US" smtClean="0"/>
-              <a:pPr/>
-              <a:t>20</a:t>
+              <a:t>22</a:t>
             </a:fld>
             <a:endParaRPr lang="en-US" dirty="0"/>
           </a:p>
@@ -1196,7 +1116,7 @@
               <a:pPr>
                 <a:defRPr/>
               </a:pPr>
-              <a:t>7/2/2026</a:t>
+              <a:t>7/3/2026</a:t>
             </a:fld>
             <a:endParaRPr lang="en-US" dirty="0"/>
           </a:p>
@@ -1388,7 +1308,7 @@
               <a:pPr>
                 <a:defRPr/>
               </a:pPr>
-              <a:t>7/2/2026</a:t>
+              <a:t>7/3/2026</a:t>
             </a:fld>
             <a:endParaRPr lang="en-US" dirty="0"/>
           </a:p>
@@ -1590,7 +1510,7 @@
               <a:pPr>
                 <a:defRPr/>
               </a:pPr>
-              <a:t>7/2/2026</a:t>
+              <a:t>7/3/2026</a:t>
             </a:fld>
             <a:endParaRPr lang="en-US" dirty="0"/>
           </a:p>
@@ -1782,7 +1702,7 @@
               <a:pPr>
                 <a:defRPr/>
               </a:pPr>
-              <a:t>7/2/2026</a:t>
+              <a:t>7/3/2026</a:t>
             </a:fld>
             <a:endParaRPr lang="en-US" dirty="0"/>
           </a:p>
@@ -2050,7 +1970,7 @@
               <a:pPr>
                 <a:defRPr/>
               </a:pPr>
-              <a:t>7/2/2026</a:t>
+              <a:t>7/3/2026</a:t>
             </a:fld>
             <a:endParaRPr lang="en-US" dirty="0"/>
           </a:p>
@@ -2360,7 +2280,7 @@
               <a:pPr>
                 <a:defRPr/>
               </a:pPr>
-              <a:t>7/2/2026</a:t>
+              <a:t>7/3/2026</a:t>
             </a:fld>
             <a:endParaRPr lang="en-US" dirty="0"/>
           </a:p>
@@ -2804,7 +2724,7 @@
               <a:pPr>
                 <a:defRPr/>
               </a:pPr>
-              <a:t>7/2/2026</a:t>
+              <a:t>7/3/2026</a:t>
             </a:fld>
             <a:endParaRPr lang="en-US" dirty="0"/>
           </a:p>
@@ -2944,7 +2864,7 @@
               <a:pPr>
                 <a:defRPr/>
               </a:pPr>
-              <a:t>7/2/2026</a:t>
+              <a:t>7/3/2026</a:t>
             </a:fld>
             <a:endParaRPr lang="en-US" dirty="0"/>
           </a:p>
@@ -3061,7 +2981,7 @@
               <a:pPr>
                 <a:defRPr/>
               </a:pPr>
-              <a:t>7/2/2026</a:t>
+              <a:t>7/3/2026</a:t>
             </a:fld>
             <a:endParaRPr lang="en-US" dirty="0"/>
           </a:p>
@@ -3360,7 +3280,7 @@
               <a:pPr>
                 <a:defRPr/>
               </a:pPr>
-              <a:t>7/2/2026</a:t>
+              <a:t>7/3/2026</a:t>
             </a:fld>
             <a:endParaRPr lang="en-US" dirty="0"/>
           </a:p>
@@ -3638,7 +3558,7 @@
               <a:pPr>
                 <a:defRPr/>
               </a:pPr>
-              <a:t>7/2/2026</a:t>
+              <a:t>7/3/2026</a:t>
             </a:fld>
             <a:endParaRPr lang="en-US" dirty="0"/>
           </a:p>
@@ -3886,7 +3806,7 @@
               <a:pPr>
                 <a:defRPr/>
               </a:pPr>
-              <a:t>7/2/2026</a:t>
+              <a:t>7/3/2026</a:t>
             </a:fld>
             <a:endParaRPr lang="en-US" dirty="0"/>
           </a:p>
@@ -4564,15 +4484,141 @@
           <a:p>
             <a:r>
               <a:rPr lang="en-US" dirty="0" smtClean="0"/>
-              <a:t>Team Project Idea Selection</a:t>
+              <a:t>Prepare Project Proposal</a:t>
             </a:r>
             <a:endParaRPr lang="en-US" dirty="0"/>
+          </a:p>
+        </p:txBody>
+      </p:sp>
+      <p:sp>
+        <p:nvSpPr>
+          <p:cNvPr id="3" name="Content Placeholder 2"/>
+          <p:cNvSpPr>
+            <a:spLocks noGrp="1"/>
+          </p:cNvSpPr>
+          <p:nvPr>
+            <p:ph idx="1"/>
+          </p:nvPr>
+        </p:nvSpPr>
+        <p:spPr/>
+        <p:txBody>
+          <a:bodyPr/>
+          <a:lstStyle/>
+          <a:p>
+            <a:r>
+              <a:rPr lang="en-US" sz="2000" dirty="0" smtClean="0"/>
+              <a:t>Project Origins? Sponsor? Client?</a:t>
+            </a:r>
+          </a:p>
+          <a:p>
+            <a:pPr lvl="1"/>
+            <a:r>
+              <a:rPr lang="en-US" sz="1800" dirty="0" smtClean="0"/>
+              <a:t>Name, address, phone number?</a:t>
+            </a:r>
+          </a:p>
+          <a:p>
+            <a:r>
+              <a:rPr lang="en-US" sz="2000" dirty="0" smtClean="0"/>
+              <a:t>Budget?</a:t>
+            </a:r>
+          </a:p>
+          <a:p>
+            <a:r>
+              <a:rPr lang="en-US" sz="2000" dirty="0" smtClean="0"/>
+              <a:t>Problems?</a:t>
+            </a:r>
+          </a:p>
+          <a:p>
+            <a:r>
+              <a:rPr lang="en-US" sz="2000" dirty="0" smtClean="0"/>
+              <a:t>Problem Relevance?</a:t>
+            </a:r>
+          </a:p>
+          <a:p>
+            <a:pPr lvl="1"/>
+            <a:r>
+              <a:rPr lang="en-US" sz="1800" dirty="0" smtClean="0"/>
+              <a:t>Competitors? Similar products? Business goals?</a:t>
+            </a:r>
+          </a:p>
+          <a:p>
+            <a:pPr lvl="1"/>
+            <a:r>
+              <a:rPr lang="en-US" sz="1800" dirty="0" smtClean="0"/>
+              <a:t>Product purchased by yourself?</a:t>
+            </a:r>
+          </a:p>
+          <a:p>
+            <a:pPr lvl="1"/>
+            <a:r>
+              <a:rPr lang="en-US" sz="1800" dirty="0" smtClean="0"/>
+              <a:t>Related work? Evaluation?</a:t>
+            </a:r>
+          </a:p>
+          <a:p>
+            <a:r>
+              <a:rPr lang="en-US" sz="2000" dirty="0" smtClean="0"/>
+              <a:t>Stakeholders?</a:t>
+            </a:r>
+          </a:p>
+          <a:p>
+            <a:pPr lvl="1"/>
+            <a:r>
+              <a:rPr lang="en-US" sz="1800" dirty="0" smtClean="0"/>
+              <a:t>Can you meet with them or reach an agreement?</a:t>
+            </a:r>
+          </a:p>
+          <a:p>
+            <a:r>
+              <a:rPr lang="en-US" sz="2000" dirty="0" smtClean="0"/>
+              <a:t>Business Use Cases?</a:t>
+            </a:r>
+          </a:p>
+          <a:p>
+            <a:r>
+              <a:rPr lang="en-US" sz="2000" dirty="0" smtClean="0"/>
+              <a:t>Time? Cost? Feasibility? Risks?</a:t>
+            </a:r>
+            <a:endParaRPr lang="en-US" sz="2000" dirty="0"/>
           </a:p>
         </p:txBody>
       </p:sp>
       <p:pic>
         <p:nvPicPr>
-          <p:cNvPr id="4" name="Picture 2" descr="http://www.texasrockgym.com/wp-content/uploads/2016/04/exercise.jpg"/>
+          <p:cNvPr id="10" name="Picture 2"/>
+          <p:cNvPicPr>
+            <a:picLocks noChangeAspect="1" noChangeArrowheads="1"/>
+          </p:cNvPicPr>
+          <p:nvPr/>
+        </p:nvPicPr>
+        <p:blipFill>
+          <a:blip r:embed="rId2" cstate="print"/>
+          <a:srcRect/>
+          <a:stretch>
+            <a:fillRect/>
+          </a:stretch>
+        </p:blipFill>
+        <p:spPr bwMode="auto">
+          <a:xfrm>
+            <a:off x="6477000" y="1828800"/>
+            <a:ext cx="1714500" cy="2286000"/>
+          </a:xfrm>
+          <a:prstGeom prst="rect">
+            <a:avLst/>
+          </a:prstGeom>
+          <a:noFill/>
+          <a:ln w="9525">
+            <a:noFill/>
+            <a:miter lim="800000"/>
+            <a:headEnd/>
+            <a:tailEnd/>
+          </a:ln>
+        </p:spPr>
+      </p:pic>
+      <p:pic>
+        <p:nvPicPr>
+          <p:cNvPr id="11" name="Picture 2" descr="http://kurld.com/images/wallpapers/document-image/document-image-17.jpg"/>
           <p:cNvPicPr>
             <a:picLocks noChangeAspect="1" noChangeArrowheads="1"/>
           </p:cNvPicPr>
@@ -4587,8 +4633,8 @@
         </p:blipFill>
         <p:spPr bwMode="auto">
           <a:xfrm>
-            <a:off x="5562600" y="2514600"/>
-            <a:ext cx="2602992" cy="1600200"/>
+            <a:off x="7086600" y="2057400"/>
+            <a:ext cx="1567542" cy="1755648"/>
           </a:xfrm>
           <a:prstGeom prst="rect">
             <a:avLst/>
@@ -4596,42 +4642,16 @@
           <a:noFill/>
         </p:spPr>
       </p:pic>
-      <p:pic>
-        <p:nvPicPr>
-          <p:cNvPr id="5" name="Picture 2" descr="https://ideascale.com/wp-content/uploads/2015/02/Innovation-Leadership.png"/>
-          <p:cNvPicPr>
-            <a:picLocks noChangeAspect="1" noChangeArrowheads="1"/>
-          </p:cNvPicPr>
-          <p:nvPr/>
-        </p:nvPicPr>
-        <p:blipFill>
-          <a:blip r:embed="rId4" cstate="print"/>
-          <a:srcRect/>
-          <a:stretch>
-            <a:fillRect/>
-          </a:stretch>
-        </p:blipFill>
-        <p:spPr bwMode="auto">
-          <a:xfrm>
-            <a:off x="990600" y="2362200"/>
-            <a:ext cx="1905000" cy="1905000"/>
-          </a:xfrm>
-          <a:prstGeom prst="rect">
-            <a:avLst/>
-          </a:prstGeom>
-          <a:noFill/>
-        </p:spPr>
-      </p:pic>
-      <p:sp>
-        <p:nvSpPr>
-          <p:cNvPr id="6" name="Rectangle 5"/>
+      <p:sp>
+        <p:nvSpPr>
+          <p:cNvPr id="13" name="Rectangle 12"/>
           <p:cNvSpPr/>
           <p:nvPr/>
         </p:nvSpPr>
         <p:spPr>
           <a:xfrm>
-            <a:off x="4724400" y="1600200"/>
-            <a:ext cx="3962400" cy="830997"/>
+            <a:off x="6553200" y="4724400"/>
+            <a:ext cx="2209800" cy="646331"/>
           </a:xfrm>
           <a:prstGeom prst="rect">
             <a:avLst/>
@@ -4643,111 +4663,25 @@
           </a:bodyPr>
           <a:lstStyle/>
           <a:p>
-            <a:pPr algn="ctr"/>
-            <a:r>
-              <a:rPr lang="en-US" sz="2400" b="1" dirty="0" smtClean="0">
-                <a:latin typeface="Calibri" pitchFamily="34" charset="0"/>
-                <a:cs typeface="Calibri" pitchFamily="34" charset="0"/>
+            <a:r>
+              <a:rPr lang="en-US" i="1" dirty="0" smtClean="0">
+                <a:solidFill>
+                  <a:srgbClr val="C00000"/>
+                </a:solidFill>
+                <a:latin typeface="Consolas" pitchFamily="49" charset="0"/>
+                <a:cs typeface="Courier New" pitchFamily="49" charset="0"/>
               </a:rPr>
-              <a:t>6 members</a:t>
-            </a:r>
-          </a:p>
-          <a:p>
-            <a:pPr algn="ctr"/>
-            <a:r>
-              <a:rPr lang="en-US" sz="2400" b="1" dirty="0" smtClean="0">
-                <a:latin typeface="Calibri" pitchFamily="34" charset="0"/>
-                <a:cs typeface="Calibri" pitchFamily="34" charset="0"/>
-              </a:rPr>
-              <a:t>8 hours per week / member</a:t>
-            </a:r>
-            <a:endParaRPr lang="vi-VN" sz="2400" b="1" dirty="0">
-              <a:latin typeface="Calibri" pitchFamily="34" charset="0"/>
-              <a:cs typeface="Calibri" pitchFamily="34" charset="0"/>
-            </a:endParaRPr>
-          </a:p>
-        </p:txBody>
-      </p:sp>
-      <p:sp>
-        <p:nvSpPr>
-          <p:cNvPr id="7" name="Rectangle 6"/>
-          <p:cNvSpPr/>
-          <p:nvPr/>
-        </p:nvSpPr>
-        <p:spPr>
-          <a:xfrm>
-            <a:off x="990600" y="1447800"/>
-            <a:ext cx="2209800" cy="830997"/>
-          </a:xfrm>
-          <a:prstGeom prst="rect">
-            <a:avLst/>
-          </a:prstGeom>
-        </p:spPr>
-        <p:txBody>
-          <a:bodyPr wrap="square">
-            <a:spAutoFit/>
-          </a:bodyPr>
-          <a:lstStyle/>
-          <a:p>
-            <a:pPr algn="ctr"/>
-            <a:r>
-              <a:rPr lang="en-US" sz="2400" b="1" dirty="0" smtClean="0">
-                <a:latin typeface="Calibri" pitchFamily="34" charset="0"/>
-                <a:cs typeface="Calibri" pitchFamily="34" charset="0"/>
-              </a:rPr>
-              <a:t>Solving real world problems</a:t>
-            </a:r>
-            <a:endParaRPr lang="vi-VN" sz="2400" b="1" dirty="0">
-              <a:latin typeface="Calibri" pitchFamily="34" charset="0"/>
-              <a:cs typeface="Calibri" pitchFamily="34" charset="0"/>
-            </a:endParaRPr>
-          </a:p>
-        </p:txBody>
-      </p:sp>
-      <p:pic>
-        <p:nvPicPr>
-          <p:cNvPr id="8" name="Picture 2"/>
-          <p:cNvPicPr>
-            <a:picLocks noChangeAspect="1" noChangeArrowheads="1"/>
-          </p:cNvPicPr>
-          <p:nvPr/>
-        </p:nvPicPr>
-        <p:blipFill>
-          <a:blip r:embed="rId5" cstate="print"/>
-          <a:srcRect/>
-          <a:stretch>
-            <a:fillRect/>
-          </a:stretch>
-        </p:blipFill>
-        <p:spPr bwMode="auto">
-          <a:xfrm>
-            <a:off x="1676400" y="3908425"/>
-            <a:ext cx="5965825" cy="2416175"/>
-          </a:xfrm>
-          <a:prstGeom prst="rect">
-            <a:avLst/>
-          </a:prstGeom>
-          <a:noFill/>
-          <a:ln w="9525">
-            <a:noFill/>
-            <a:miter lim="800000"/>
-            <a:headEnd/>
-            <a:tailEnd/>
-          </a:ln>
-        </p:spPr>
-      </p:pic>
+              <a:t>Business Requirements</a:t>
+            </a:r>
+            <a:endParaRPr lang="en-US" dirty="0"/>
+          </a:p>
+        </p:txBody>
+      </p:sp>
     </p:spTree>
   </p:cSld>
   <p:clrMapOvr>
     <a:masterClrMapping/>
   </p:clrMapOvr>
-  <p:timing>
-    <p:tnLst>
-      <p:par>
-        <p:cTn id="1" dur="indefinite" restart="never" nodeType="tmRoot"/>
-      </p:par>
-    </p:tnLst>
-  </p:timing>
 </p:sld>
 </file>
 
@@ -4785,15 +4719,76 @@
           <a:p>
             <a:r>
               <a:rPr lang="en-US" dirty="0" smtClean="0"/>
-              <a:t>Finalizing Team Project Idea</a:t>
+              <a:t>Selecting </a:t>
+            </a:r>
+            <a:r>
+              <a:rPr lang="en-US" dirty="0" smtClean="0"/>
+              <a:t>Evaluation Criteria and Evaluators</a:t>
             </a:r>
             <a:endParaRPr lang="en-US" dirty="0"/>
+          </a:p>
+        </p:txBody>
+      </p:sp>
+      <p:sp>
+        <p:nvSpPr>
+          <p:cNvPr id="3" name="Content Placeholder 2"/>
+          <p:cNvSpPr>
+            <a:spLocks noGrp="1"/>
+          </p:cNvSpPr>
+          <p:nvPr>
+            <p:ph idx="1"/>
+          </p:nvPr>
+        </p:nvSpPr>
+        <p:spPr/>
+        <p:txBody>
+          <a:bodyPr/>
+          <a:lstStyle/>
+          <a:p>
+            <a:r>
+              <a:rPr lang="en-US" dirty="0" smtClean="0"/>
+              <a:t>Criteria</a:t>
+            </a:r>
+            <a:endParaRPr lang="en-US" dirty="0" smtClean="0"/>
+          </a:p>
+          <a:p>
+            <a:pPr lvl="1"/>
+            <a:r>
+              <a:rPr lang="en-US" dirty="0" smtClean="0"/>
+              <a:t>Previous Slide</a:t>
+            </a:r>
+          </a:p>
+          <a:p>
+            <a:pPr lvl="1"/>
+            <a:r>
+              <a:rPr lang="en-US" dirty="0" smtClean="0"/>
+              <a:t>Asking AI</a:t>
+            </a:r>
+          </a:p>
+          <a:p>
+            <a:r>
+              <a:rPr lang="en-US" dirty="0" smtClean="0"/>
+              <a:t>Evaluators</a:t>
+            </a:r>
+          </a:p>
+          <a:p>
+            <a:pPr lvl="1"/>
+            <a:r>
+              <a:rPr lang="en-US" dirty="0" smtClean="0"/>
+              <a:t>Human</a:t>
+            </a:r>
+          </a:p>
+          <a:p>
+            <a:pPr lvl="1"/>
+            <a:r>
+              <a:rPr lang="en-US" dirty="0" smtClean="0"/>
+              <a:t>AI</a:t>
+            </a:r>
           </a:p>
         </p:txBody>
       </p:sp>
       <p:pic>
         <p:nvPicPr>
-          <p:cNvPr id="8" name="Picture 1"/>
+          <p:cNvPr id="5" name="Picture 3"/>
           <p:cNvPicPr>
             <a:picLocks noChangeAspect="1" noChangeArrowheads="1"/>
           </p:cNvPicPr>
@@ -4808,8 +4803,8 @@
         </p:blipFill>
         <p:spPr bwMode="auto">
           <a:xfrm>
-            <a:off x="3124200" y="2415540"/>
-            <a:ext cx="2400300" cy="2461260"/>
+            <a:off x="5943600" y="2065020"/>
+            <a:ext cx="2103120" cy="2735580"/>
           </a:xfrm>
           <a:prstGeom prst="rect">
             <a:avLst/>
@@ -4828,13 +4823,6 @@
   <p:clrMapOvr>
     <a:masterClrMapping/>
   </p:clrMapOvr>
-  <p:timing>
-    <p:tnLst>
-      <p:par>
-        <p:cTn id="1" dur="indefinite" restart="never" nodeType="tmRoot"/>
-      </p:par>
-    </p:tnLst>
-  </p:timing>
 </p:sld>
 </file>
 
@@ -4872,7 +4860,11 @@
           <a:p>
             <a:r>
               <a:rPr lang="en-US" dirty="0" smtClean="0"/>
-              <a:t>Tools</a:t>
+              <a:t>Evaluating </a:t>
+            </a:r>
+            <a:r>
+              <a:rPr lang="en-US" dirty="0" smtClean="0"/>
+              <a:t>Criteria</a:t>
             </a:r>
             <a:endParaRPr lang="en-US" dirty="0"/>
           </a:p>
@@ -4894,64 +4886,63 @@
           <a:lstStyle/>
           <a:p>
             <a:r>
-              <a:rPr lang="en-US" sz="2400" dirty="0" smtClean="0">
-                <a:hlinkClick r:id="rId2"/>
-              </a:rPr>
-              <a:t>https://chatgpt.com/</a:t>
-            </a:r>
-          </a:p>
-          <a:p>
-            <a:r>
-              <a:rPr lang="en-US" sz="2400" dirty="0" smtClean="0">
-                <a:hlinkClick r:id="rId2"/>
-              </a:rPr>
-              <a:t>https://www.trendhunter.com/</a:t>
-            </a:r>
-          </a:p>
-          <a:p>
-            <a:r>
-              <a:rPr lang="en-US" sz="2400" dirty="0" smtClean="0">
-                <a:hlinkClick r:id="rId2"/>
-              </a:rPr>
-              <a:t>https://miro.com/</a:t>
-            </a:r>
-            <a:endParaRPr lang="en-US" sz="2400" dirty="0" smtClean="0"/>
-          </a:p>
-          <a:p>
-            <a:r>
-              <a:rPr lang="en-US" sz="2400" dirty="0" smtClean="0">
-                <a:hlinkClick r:id="rId3"/>
-              </a:rPr>
-              <a:t>https://www.figma.com/figjam/</a:t>
-            </a:r>
-            <a:endParaRPr lang="en-US" sz="2400" dirty="0" smtClean="0"/>
-          </a:p>
-          <a:p>
-            <a:r>
-              <a:rPr lang="en-US" sz="2400" dirty="0" smtClean="0">
-                <a:hlinkClick r:id="rId4"/>
-              </a:rPr>
-              <a:t>https://www.notion.com/</a:t>
-            </a:r>
-            <a:endParaRPr lang="en-US" sz="2400" dirty="0" smtClean="0"/>
-          </a:p>
-          <a:p>
-            <a:r>
-              <a:rPr lang="en-US" sz="2400" dirty="0" smtClean="0">
-                <a:hlinkClick r:id="rId5"/>
-              </a:rPr>
-              <a:t>https://workspace.google.com/products/docs/</a:t>
-            </a:r>
-            <a:endParaRPr lang="en-US" sz="2400" dirty="0" smtClean="0"/>
-          </a:p>
-          <a:p>
-            <a:endParaRPr lang="en-US" sz="2400" dirty="0" smtClean="0"/>
-          </a:p>
-          <a:p>
+              <a:rPr lang="en-US" sz="2400" dirty="0" smtClean="0"/>
+              <a:t>Evaluate these criteria for evaluating software project proposal.</a:t>
+            </a:r>
+          </a:p>
+          <a:p>
+            <a:r>
+              <a:rPr lang="en-US" sz="2400" dirty="0" smtClean="0"/>
+              <a:t>Search extensively, and evaluate…</a:t>
+            </a:r>
+          </a:p>
+          <a:p>
+            <a:r>
+              <a:rPr lang="en-US" sz="2400" dirty="0" smtClean="0"/>
+              <a:t>Search extensively, </a:t>
+            </a:r>
+            <a:r>
+              <a:rPr lang="en-US" sz="2400" dirty="0" smtClean="0"/>
+              <a:t>and critique </a:t>
+            </a:r>
+            <a:r>
+              <a:rPr lang="en-US" sz="2400" dirty="0" smtClean="0"/>
+              <a:t>these </a:t>
+            </a:r>
+            <a:r>
+              <a:rPr lang="en-US" sz="2400" dirty="0" smtClean="0"/>
+              <a:t>criteria…</a:t>
+            </a:r>
             <a:endParaRPr lang="en-US" sz="2400" dirty="0"/>
           </a:p>
         </p:txBody>
       </p:sp>
+      <p:pic>
+        <p:nvPicPr>
+          <p:cNvPr id="4" name="Picture 2" descr="http://www.texasrockgym.com/wp-content/uploads/2016/04/exercise.jpg"/>
+          <p:cNvPicPr>
+            <a:picLocks noChangeAspect="1" noChangeArrowheads="1"/>
+          </p:cNvPicPr>
+          <p:nvPr/>
+        </p:nvPicPr>
+        <p:blipFill>
+          <a:blip r:embed="rId2" cstate="print"/>
+          <a:srcRect/>
+          <a:stretch>
+            <a:fillRect/>
+          </a:stretch>
+        </p:blipFill>
+        <p:spPr bwMode="auto">
+          <a:xfrm>
+            <a:off x="3352800" y="4191000"/>
+            <a:ext cx="2602992" cy="1600200"/>
+          </a:xfrm>
+          <a:prstGeom prst="rect">
+            <a:avLst/>
+          </a:prstGeom>
+          <a:noFill/>
+        </p:spPr>
+      </p:pic>
     </p:spTree>
   </p:cSld>
   <p:clrMapOvr>
@@ -4977,9 +4968,91 @@
           <a:chExt cx="0" cy="0"/>
         </a:xfrm>
       </p:grpSpPr>
+      <p:sp>
+        <p:nvSpPr>
+          <p:cNvPr id="2" name="Title 1"/>
+          <p:cNvSpPr>
+            <a:spLocks noGrp="1"/>
+          </p:cNvSpPr>
+          <p:nvPr>
+            <p:ph type="title"/>
+          </p:nvPr>
+        </p:nvSpPr>
+        <p:spPr/>
+        <p:txBody>
+          <a:bodyPr/>
+          <a:lstStyle/>
+          <a:p>
+            <a:r>
+              <a:rPr lang="en-US" dirty="0" smtClean="0"/>
+              <a:t>Evaluating </a:t>
+            </a:r>
+            <a:r>
+              <a:rPr lang="en-US" dirty="0" smtClean="0"/>
+              <a:t>Project Proposal</a:t>
+            </a:r>
+            <a:endParaRPr lang="en-US" dirty="0"/>
+          </a:p>
+        </p:txBody>
+      </p:sp>
+      <p:sp>
+        <p:nvSpPr>
+          <p:cNvPr id="3" name="Content Placeholder 2"/>
+          <p:cNvSpPr>
+            <a:spLocks noGrp="1"/>
+          </p:cNvSpPr>
+          <p:nvPr>
+            <p:ph idx="1"/>
+          </p:nvPr>
+        </p:nvSpPr>
+        <p:spPr/>
+        <p:txBody>
+          <a:bodyPr/>
+          <a:lstStyle/>
+          <a:p>
+            <a:r>
+              <a:rPr lang="en-US" sz="2400" dirty="0" smtClean="0"/>
+              <a:t>Evaluate [software project proposal.pdf] using </a:t>
+            </a:r>
+            <a:r>
+              <a:rPr lang="en-US" sz="2400" dirty="0" smtClean="0"/>
+              <a:t>these </a:t>
+            </a:r>
+            <a:r>
+              <a:rPr lang="en-US" sz="2400" dirty="0" smtClean="0"/>
+              <a:t>criteria:</a:t>
+            </a:r>
+          </a:p>
+          <a:p>
+            <a:r>
+              <a:rPr lang="en-US" sz="2400" dirty="0" smtClean="0"/>
+              <a:t>Search extensively, then evaluate…</a:t>
+            </a:r>
+          </a:p>
+          <a:p>
+            <a:r>
+              <a:rPr lang="en-US" sz="2400" dirty="0" smtClean="0"/>
+              <a:t>Search extensively, </a:t>
+            </a:r>
+            <a:r>
+              <a:rPr lang="en-US" sz="2400" dirty="0" smtClean="0"/>
+              <a:t>then critique </a:t>
+            </a:r>
+            <a:r>
+              <a:rPr lang="en-US" sz="2400" dirty="0" smtClean="0"/>
+              <a:t>[software project proposal.pdf]</a:t>
+            </a:r>
+            <a:r>
+              <a:rPr lang="en-US" sz="2400" dirty="0" smtClean="0"/>
+              <a:t>…</a:t>
+            </a:r>
+            <a:endParaRPr lang="en-US" sz="2400" dirty="0"/>
+          </a:p>
+        </p:txBody>
+      </p:sp>
       <p:pic>
         <p:nvPicPr>
-          <p:cNvPr id="7" name="Picture 2" descr="http://www.resg.org.uk/wp-content/themes/resg-theme/images/resg-wordle.png"/>
+          <p:cNvPr id="7" name="Picture 2" descr="Image result for kick-off meeting"/>
           <p:cNvPicPr>
             <a:picLocks noChangeAspect="1" noChangeArrowheads="1"/>
           </p:cNvPicPr>
@@ -4994,8 +5067,8 @@
         </p:blipFill>
         <p:spPr bwMode="auto">
           <a:xfrm>
-            <a:off x="4953000" y="1638300"/>
-            <a:ext cx="3276600" cy="1066800"/>
+            <a:off x="2971800" y="3962400"/>
+            <a:ext cx="3630222" cy="1745778"/>
           </a:xfrm>
           <a:prstGeom prst="rect">
             <a:avLst/>
@@ -5003,6 +5076,31 @@
           <a:noFill/>
         </p:spPr>
       </p:pic>
+    </p:spTree>
+  </p:cSld>
+  <p:clrMapOvr>
+    <a:masterClrMapping/>
+  </p:clrMapOvr>
+</p:sld>
+</file>
+
+<file path=ppt/slides/slide14.xml><?xml version="1.0" encoding="utf-8"?>
+<p:sld xmlns:a="http://schemas.openxmlformats.org/drawingml/2006/main" xmlns:r="http://schemas.openxmlformats.org/officeDocument/2006/relationships" xmlns:p="http://schemas.openxmlformats.org/presentationml/2006/main">
+  <p:cSld>
+    <p:spTree>
+      <p:nvGrpSpPr>
+        <p:cNvPr id="1" name=""/>
+        <p:cNvGrpSpPr/>
+        <p:nvPr/>
+      </p:nvGrpSpPr>
+      <p:grpSpPr>
+        <a:xfrm>
+          <a:off x="0" y="0"/>
+          <a:ext cx="0" cy="0"/>
+          <a:chOff x="0" y="0"/>
+          <a:chExt cx="0" cy="0"/>
+        </a:xfrm>
+      </p:grpSpPr>
       <p:sp>
         <p:nvSpPr>
           <p:cNvPr id="2" name="Title 1"/>
@@ -5020,15 +5118,76 @@
           <a:p>
             <a:r>
               <a:rPr lang="en-US" dirty="0" smtClean="0"/>
-              <a:t>Kickoff Meeting</a:t>
+              <a:t>Prepare Project Vision and Scope</a:t>
             </a:r>
             <a:endParaRPr lang="en-US" dirty="0"/>
+          </a:p>
+        </p:txBody>
+      </p:sp>
+      <p:sp>
+        <p:nvSpPr>
+          <p:cNvPr id="3" name="Content Placeholder 2"/>
+          <p:cNvSpPr>
+            <a:spLocks noGrp="1"/>
+          </p:cNvSpPr>
+          <p:nvPr>
+            <p:ph idx="1"/>
+          </p:nvPr>
+        </p:nvSpPr>
+        <p:spPr/>
+        <p:txBody>
+          <a:bodyPr/>
+          <a:lstStyle/>
+          <a:p>
+            <a:r>
+              <a:rPr lang="en-US" sz="2400" dirty="0" smtClean="0"/>
+              <a:t>Current state, workflows, features.</a:t>
+            </a:r>
+          </a:p>
+          <a:p>
+            <a:r>
+              <a:rPr lang="en-US" sz="2400" dirty="0" smtClean="0"/>
+              <a:t>Future state, workflows, features.</a:t>
+            </a:r>
+            <a:endParaRPr lang="en-US" sz="2400" dirty="0"/>
           </a:p>
         </p:txBody>
       </p:sp>
       <p:pic>
         <p:nvPicPr>
-          <p:cNvPr id="1026" name="Picture 2" descr="Image result for kick-off meeting"/>
+          <p:cNvPr id="10" name="Picture 2"/>
+          <p:cNvPicPr>
+            <a:picLocks noChangeAspect="1" noChangeArrowheads="1"/>
+          </p:cNvPicPr>
+          <p:nvPr/>
+        </p:nvPicPr>
+        <p:blipFill>
+          <a:blip r:embed="rId2" cstate="print"/>
+          <a:srcRect/>
+          <a:stretch>
+            <a:fillRect/>
+          </a:stretch>
+        </p:blipFill>
+        <p:spPr bwMode="auto">
+          <a:xfrm>
+            <a:off x="6477000" y="1828800"/>
+            <a:ext cx="1714500" cy="2286000"/>
+          </a:xfrm>
+          <a:prstGeom prst="rect">
+            <a:avLst/>
+          </a:prstGeom>
+          <a:noFill/>
+          <a:ln w="9525">
+            <a:noFill/>
+            <a:miter lim="800000"/>
+            <a:headEnd/>
+            <a:tailEnd/>
+          </a:ln>
+        </p:spPr>
+      </p:pic>
+      <p:pic>
+        <p:nvPicPr>
+          <p:cNvPr id="11" name="Picture 2" descr="http://kurld.com/images/wallpapers/document-image/document-image-17.jpg"/>
           <p:cNvPicPr>
             <a:picLocks noChangeAspect="1" noChangeArrowheads="1"/>
           </p:cNvPicPr>
@@ -5043,8 +5202,8 @@
         </p:blipFill>
         <p:spPr bwMode="auto">
           <a:xfrm>
-            <a:off x="941778" y="1683222"/>
-            <a:ext cx="3630222" cy="1745778"/>
+            <a:off x="7086600" y="2057400"/>
+            <a:ext cx="1567542" cy="1755648"/>
           </a:xfrm>
           <a:prstGeom prst="rect">
             <a:avLst/>
@@ -5054,14 +5213,14 @@
       </p:pic>
       <p:sp>
         <p:nvSpPr>
-          <p:cNvPr id="5" name="Rectangle 4"/>
+          <p:cNvPr id="13" name="Rectangle 12"/>
           <p:cNvSpPr/>
           <p:nvPr/>
         </p:nvSpPr>
         <p:spPr>
           <a:xfrm>
-            <a:off x="2819400" y="4268450"/>
-            <a:ext cx="5791200" cy="1446550"/>
+            <a:off x="6553200" y="4724400"/>
+            <a:ext cx="2209800" cy="646331"/>
           </a:xfrm>
           <a:prstGeom prst="rect">
             <a:avLst/>
@@ -5073,49 +5232,8 @@
           </a:bodyPr>
           <a:lstStyle/>
           <a:p>
-            <a:pPr marL="342900" indent="-342900">
-              <a:buFont typeface="+mj-lt"/>
-              <a:buAutoNum type="arabicPeriod"/>
-            </a:pPr>
-            <a:r>
-              <a:rPr lang="en-US" sz="2200" dirty="0" smtClean="0">
-                <a:latin typeface="Consolas" pitchFamily="49" charset="0"/>
-                <a:cs typeface="Courier New" pitchFamily="49" charset="0"/>
-              </a:rPr>
-              <a:t>Executive Summary (</a:t>
-            </a:r>
-            <a:r>
-              <a:rPr lang="en-US" sz="2200" i="1" dirty="0" smtClean="0">
-                <a:solidFill>
-                  <a:srgbClr val="C00000"/>
-                </a:solidFill>
-                <a:latin typeface="Consolas" pitchFamily="49" charset="0"/>
-                <a:cs typeface="Courier New" pitchFamily="49" charset="0"/>
-              </a:rPr>
-              <a:t>Business Requirements</a:t>
-            </a:r>
-            <a:r>
-              <a:rPr lang="en-US" sz="2200" dirty="0" smtClean="0">
-                <a:latin typeface="Consolas" pitchFamily="49" charset="0"/>
-                <a:cs typeface="Courier New" pitchFamily="49" charset="0"/>
-              </a:rPr>
-              <a:t>)</a:t>
-            </a:r>
-          </a:p>
-          <a:p>
-            <a:pPr marL="342900" indent="-342900">
-              <a:buFont typeface="+mj-lt"/>
-              <a:buAutoNum type="arabicPeriod"/>
-            </a:pPr>
-            <a:r>
-              <a:rPr lang="en-US" sz="2200" dirty="0" smtClean="0">
-                <a:latin typeface="Consolas" pitchFamily="49" charset="0"/>
-                <a:cs typeface="Courier New" pitchFamily="49" charset="0"/>
-              </a:rPr>
-              <a:t>Project Vision and Scope (</a:t>
-            </a:r>
-            <a:r>
-              <a:rPr lang="en-US" sz="2200" i="1" dirty="0" smtClean="0">
+            <a:r>
+              <a:rPr lang="en-US" i="1" dirty="0" smtClean="0">
                 <a:solidFill>
                   <a:srgbClr val="C00000"/>
                 </a:solidFill>
@@ -5124,100 +5242,10 @@
               </a:rPr>
               <a:t>User Requirements</a:t>
             </a:r>
-            <a:r>
-              <a:rPr lang="en-US" sz="2200" dirty="0" smtClean="0">
-                <a:latin typeface="Consolas" pitchFamily="49" charset="0"/>
-                <a:cs typeface="Courier New" pitchFamily="49" charset="0"/>
-              </a:rPr>
-              <a:t>)</a:t>
-            </a:r>
-          </a:p>
-        </p:txBody>
-      </p:sp>
-      <p:pic>
-        <p:nvPicPr>
-          <p:cNvPr id="8" name="Picture 2" descr="http://fastbiz101.com/101/wpfast-content/uploads/2016/06/review.jpeg"/>
-          <p:cNvPicPr>
-            <a:picLocks noChangeAspect="1" noChangeArrowheads="1"/>
-          </p:cNvPicPr>
-          <p:nvPr/>
-        </p:nvPicPr>
-        <p:blipFill>
-          <a:blip r:embed="rId4" cstate="print"/>
-          <a:srcRect/>
-          <a:stretch>
-            <a:fillRect/>
-          </a:stretch>
-        </p:blipFill>
-        <p:spPr bwMode="auto">
-          <a:xfrm>
-            <a:off x="5867400" y="2781300"/>
-            <a:ext cx="1600200" cy="800100"/>
-          </a:xfrm>
-          <a:prstGeom prst="rect">
-            <a:avLst/>
-          </a:prstGeom>
-          <a:noFill/>
-        </p:spPr>
-      </p:pic>
-      <p:pic>
-        <p:nvPicPr>
-          <p:cNvPr id="9" name="Picture 2"/>
-          <p:cNvPicPr>
-            <a:picLocks noChangeAspect="1" noChangeArrowheads="1"/>
-          </p:cNvPicPr>
-          <p:nvPr/>
-        </p:nvPicPr>
-        <p:blipFill>
-          <a:blip r:embed="rId5" cstate="print"/>
-          <a:srcRect/>
-          <a:stretch>
-            <a:fillRect/>
-          </a:stretch>
-        </p:blipFill>
-        <p:spPr bwMode="auto">
-          <a:xfrm>
-            <a:off x="457200" y="3810000"/>
-            <a:ext cx="1714500" cy="2286000"/>
-          </a:xfrm>
-          <a:prstGeom prst="rect">
-            <a:avLst/>
-          </a:prstGeom>
-          <a:noFill/>
-          <a:ln w="9525">
-            <a:noFill/>
-            <a:miter lim="800000"/>
-            <a:headEnd/>
-            <a:tailEnd/>
-          </a:ln>
-        </p:spPr>
-      </p:pic>
-      <p:pic>
-        <p:nvPicPr>
-          <p:cNvPr id="6" name="Picture 2" descr="http://kurld.com/images/wallpapers/document-image/document-image-17.jpg"/>
-          <p:cNvPicPr>
-            <a:picLocks noChangeAspect="1" noChangeArrowheads="1"/>
-          </p:cNvPicPr>
-          <p:nvPr/>
-        </p:nvPicPr>
-        <p:blipFill>
-          <a:blip r:embed="rId6" cstate="print"/>
-          <a:srcRect/>
-          <a:stretch>
-            <a:fillRect/>
-          </a:stretch>
-        </p:blipFill>
-        <p:spPr bwMode="auto">
-          <a:xfrm>
-            <a:off x="1066800" y="4038600"/>
-            <a:ext cx="1567542" cy="1755648"/>
-          </a:xfrm>
-          <a:prstGeom prst="rect">
-            <a:avLst/>
-          </a:prstGeom>
-          <a:noFill/>
-        </p:spPr>
-      </p:pic>
+            <a:endParaRPr lang="en-US" dirty="0"/>
+          </a:p>
+        </p:txBody>
+      </p:sp>
     </p:spTree>
   </p:cSld>
   <p:clrMapOvr>
@@ -5226,7 +5254,7 @@
 </p:sld>
 </file>
 
-<file path=ppt/slides/slide14.xml><?xml version="1.0" encoding="utf-8"?>
+<file path=ppt/slides/slide15.xml><?xml version="1.0" encoding="utf-8"?>
 <p:sld xmlns:a="http://schemas.openxmlformats.org/drawingml/2006/main" xmlns:r="http://schemas.openxmlformats.org/officeDocument/2006/relationships" xmlns:p="http://schemas.openxmlformats.org/presentationml/2006/main">
   <p:cSld>
     <p:spTree>
@@ -5286,7 +5314,7 @@
           <a:p>
             <a:r>
               <a:rPr lang="en-US" dirty="0" smtClean="0"/>
-              <a:t>How Will the Solution Work?</a:t>
+              <a:t>Prepare a Prototype</a:t>
             </a:r>
             <a:endParaRPr lang="en-US" dirty="0"/>
           </a:p>
@@ -5421,419 +5449,6 @@
             <a:endParaRPr lang="en-US" sz="3200" u="sng" dirty="0" smtClean="0">
               <a:latin typeface="+mj-lt"/>
             </a:endParaRPr>
-          </a:p>
-        </p:txBody>
-      </p:sp>
-      <p:sp>
-        <p:nvSpPr>
-          <p:cNvPr id="14" name="Rectangle 13"/>
-          <p:cNvSpPr/>
-          <p:nvPr/>
-        </p:nvSpPr>
-        <p:spPr>
-          <a:xfrm>
-            <a:off x="762000" y="1676400"/>
-            <a:ext cx="4038600" cy="1107996"/>
-          </a:xfrm>
-          <a:prstGeom prst="rect">
-            <a:avLst/>
-          </a:prstGeom>
-        </p:spPr>
-        <p:style>
-          <a:lnRef idx="2">
-            <a:schemeClr val="dk1"/>
-          </a:lnRef>
-          <a:fillRef idx="1">
-            <a:schemeClr val="lt1"/>
-          </a:fillRef>
-          <a:effectRef idx="0">
-            <a:schemeClr val="dk1"/>
-          </a:effectRef>
-          <a:fontRef idx="minor">
-            <a:schemeClr val="dk1"/>
-          </a:fontRef>
-        </p:style>
-        <p:txBody>
-          <a:bodyPr wrap="square">
-            <a:spAutoFit/>
-          </a:bodyPr>
-          <a:lstStyle/>
-          <a:p>
-            <a:pPr algn="ctr"/>
-            <a:r>
-              <a:rPr lang="en-US" sz="2200" dirty="0" smtClean="0">
-                <a:solidFill>
-                  <a:schemeClr val="tx1"/>
-                </a:solidFill>
-                <a:latin typeface="+mj-lt"/>
-              </a:rPr>
-              <a:t>Refer to the </a:t>
-            </a:r>
-            <a:r>
-              <a:rPr lang="en-US" sz="2200" b="1" dirty="0" smtClean="0">
-                <a:solidFill>
-                  <a:schemeClr val="tx1"/>
-                </a:solidFill>
-                <a:latin typeface="+mj-lt"/>
-              </a:rPr>
-              <a:t>Designing the User Interface</a:t>
-            </a:r>
-            <a:r>
-              <a:rPr lang="en-US" sz="2200" dirty="0" smtClean="0">
-                <a:solidFill>
-                  <a:schemeClr val="tx1"/>
-                </a:solidFill>
-                <a:latin typeface="+mj-lt"/>
-              </a:rPr>
-              <a:t> course for more information.</a:t>
-            </a:r>
-            <a:endParaRPr lang="en-US" sz="2200" dirty="0">
-              <a:solidFill>
-                <a:schemeClr val="tx1"/>
-              </a:solidFill>
-              <a:latin typeface="+mj-lt"/>
-            </a:endParaRPr>
-          </a:p>
-        </p:txBody>
-      </p:sp>
-    </p:spTree>
-  </p:cSld>
-  <p:clrMapOvr>
-    <a:masterClrMapping/>
-  </p:clrMapOvr>
-  <p:timing>
-    <p:tnLst>
-      <p:par>
-        <p:cTn id="1" dur="indefinite" restart="never" nodeType="tmRoot"/>
-      </p:par>
-    </p:tnLst>
-  </p:timing>
-</p:sld>
-</file>
-
-<file path=ppt/slides/slide15.xml><?xml version="1.0" encoding="utf-8"?>
-<p:sld xmlns:a="http://schemas.openxmlformats.org/drawingml/2006/main" xmlns:r="http://schemas.openxmlformats.org/officeDocument/2006/relationships" xmlns:p="http://schemas.openxmlformats.org/presentationml/2006/main">
-  <p:cSld>
-    <p:spTree>
-      <p:nvGrpSpPr>
-        <p:cNvPr id="1" name=""/>
-        <p:cNvGrpSpPr/>
-        <p:nvPr/>
-      </p:nvGrpSpPr>
-      <p:grpSpPr>
-        <a:xfrm>
-          <a:off x="0" y="0"/>
-          <a:ext cx="0" cy="0"/>
-          <a:chOff x="0" y="0"/>
-          <a:chExt cx="0" cy="0"/>
-        </a:xfrm>
-      </p:grpSpPr>
-      <p:sp>
-        <p:nvSpPr>
-          <p:cNvPr id="2" name="Title 1"/>
-          <p:cNvSpPr>
-            <a:spLocks noGrp="1"/>
-          </p:cNvSpPr>
-          <p:nvPr>
-            <p:ph type="title"/>
-          </p:nvPr>
-        </p:nvSpPr>
-        <p:spPr/>
-        <p:txBody>
-          <a:bodyPr/>
-          <a:lstStyle/>
-          <a:p>
-            <a:r>
-              <a:rPr lang="en-US" dirty="0" smtClean="0"/>
-              <a:t>What Do We Need to Complete?</a:t>
-            </a:r>
-            <a:endParaRPr lang="en-US" dirty="0"/>
-          </a:p>
-        </p:txBody>
-      </p:sp>
-      <p:pic>
-        <p:nvPicPr>
-          <p:cNvPr id="4098" name="Picture 2"/>
-          <p:cNvPicPr>
-            <a:picLocks noChangeAspect="1" noChangeArrowheads="1"/>
-          </p:cNvPicPr>
-          <p:nvPr/>
-        </p:nvPicPr>
-        <p:blipFill>
-          <a:blip r:embed="rId2" cstate="print"/>
-          <a:srcRect/>
-          <a:stretch>
-            <a:fillRect/>
-          </a:stretch>
-        </p:blipFill>
-        <p:spPr bwMode="auto">
-          <a:xfrm>
-            <a:off x="533400" y="2579687"/>
-            <a:ext cx="3181350" cy="3419475"/>
-          </a:xfrm>
-          <a:prstGeom prst="rect">
-            <a:avLst/>
-          </a:prstGeom>
-          <a:noFill/>
-          <a:ln w="9525">
-            <a:noFill/>
-            <a:miter lim="800000"/>
-            <a:headEnd/>
-            <a:tailEnd/>
-          </a:ln>
-          <a:effectLst/>
-        </p:spPr>
-      </p:pic>
-      <p:pic>
-        <p:nvPicPr>
-          <p:cNvPr id="4" name="Picture 4"/>
-          <p:cNvPicPr>
-            <a:picLocks noChangeAspect="1" noChangeArrowheads="1"/>
-          </p:cNvPicPr>
-          <p:nvPr/>
-        </p:nvPicPr>
-        <p:blipFill>
-          <a:blip r:embed="rId3" cstate="print"/>
-          <a:srcRect/>
-          <a:stretch>
-            <a:fillRect/>
-          </a:stretch>
-        </p:blipFill>
-        <p:spPr bwMode="auto">
-          <a:xfrm>
-            <a:off x="3810000" y="3733800"/>
-            <a:ext cx="1333500" cy="1314450"/>
-          </a:xfrm>
-          <a:prstGeom prst="rect">
-            <a:avLst/>
-          </a:prstGeom>
-          <a:noFill/>
-          <a:ln w="9525">
-            <a:noFill/>
-            <a:miter lim="800000"/>
-            <a:headEnd/>
-            <a:tailEnd/>
-          </a:ln>
-        </p:spPr>
-      </p:pic>
-      <p:cxnSp>
-        <p:nvCxnSpPr>
-          <p:cNvPr id="12" name="Straight Arrow Connector 11"/>
-          <p:cNvCxnSpPr/>
-          <p:nvPr/>
-        </p:nvCxnSpPr>
-        <p:spPr>
-          <a:xfrm flipV="1">
-            <a:off x="3124200" y="2960687"/>
-            <a:ext cx="1828800" cy="609600"/>
-          </a:xfrm>
-          <a:prstGeom prst="straightConnector1">
-            <a:avLst/>
-          </a:prstGeom>
-          <a:ln>
-            <a:tailEnd type="arrow"/>
-          </a:ln>
-        </p:spPr>
-        <p:style>
-          <a:lnRef idx="3">
-            <a:schemeClr val="accent2"/>
-          </a:lnRef>
-          <a:fillRef idx="0">
-            <a:schemeClr val="accent2"/>
-          </a:fillRef>
-          <a:effectRef idx="2">
-            <a:schemeClr val="accent2"/>
-          </a:effectRef>
-          <a:fontRef idx="minor">
-            <a:schemeClr val="tx1"/>
-          </a:fontRef>
-        </p:style>
-      </p:cxnSp>
-      <p:sp>
-        <p:nvSpPr>
-          <p:cNvPr id="21" name="Rectangle 20"/>
-          <p:cNvSpPr/>
-          <p:nvPr/>
-        </p:nvSpPr>
-        <p:spPr>
-          <a:xfrm>
-            <a:off x="5562600" y="4343400"/>
-            <a:ext cx="2869503" cy="584775"/>
-          </a:xfrm>
-          <a:prstGeom prst="rect">
-            <a:avLst/>
-          </a:prstGeom>
-        </p:spPr>
-        <p:txBody>
-          <a:bodyPr wrap="none">
-            <a:spAutoFit/>
-          </a:bodyPr>
-          <a:lstStyle/>
-          <a:p>
-            <a:pPr marL="514350" indent="-514350"/>
-            <a:r>
-              <a:rPr lang="en-US" sz="3200" dirty="0" smtClean="0">
-                <a:latin typeface="+mj-lt"/>
-              </a:rPr>
-              <a:t>Product Backlog</a:t>
-            </a:r>
-            <a:endParaRPr lang="en-US" sz="3200" u="sng" dirty="0" smtClean="0">
-              <a:latin typeface="+mj-lt"/>
-            </a:endParaRPr>
-          </a:p>
-        </p:txBody>
-      </p:sp>
-      <p:sp>
-        <p:nvSpPr>
-          <p:cNvPr id="14" name="Rectangle 13"/>
-          <p:cNvSpPr/>
-          <p:nvPr/>
-        </p:nvSpPr>
-        <p:spPr>
-          <a:xfrm>
-            <a:off x="609600" y="1752600"/>
-            <a:ext cx="4572000" cy="769441"/>
-          </a:xfrm>
-          <a:prstGeom prst="rect">
-            <a:avLst/>
-          </a:prstGeom>
-        </p:spPr>
-        <p:style>
-          <a:lnRef idx="2">
-            <a:schemeClr val="dk1"/>
-          </a:lnRef>
-          <a:fillRef idx="1">
-            <a:schemeClr val="lt1"/>
-          </a:fillRef>
-          <a:effectRef idx="0">
-            <a:schemeClr val="dk1"/>
-          </a:effectRef>
-          <a:fontRef idx="minor">
-            <a:schemeClr val="dk1"/>
-          </a:fontRef>
-        </p:style>
-        <p:txBody>
-          <a:bodyPr wrap="square">
-            <a:spAutoFit/>
-          </a:bodyPr>
-          <a:lstStyle/>
-          <a:p>
-            <a:pPr algn="ctr"/>
-            <a:r>
-              <a:rPr lang="en-US" sz="2200" dirty="0" smtClean="0">
-                <a:solidFill>
-                  <a:schemeClr val="tx1"/>
-                </a:solidFill>
-                <a:latin typeface="+mj-lt"/>
-              </a:rPr>
-              <a:t>Refer to the </a:t>
-            </a:r>
-            <a:r>
-              <a:rPr lang="en-US" sz="2200" b="1" dirty="0" smtClean="0">
-                <a:solidFill>
-                  <a:schemeClr val="tx1"/>
-                </a:solidFill>
-                <a:latin typeface="+mj-lt"/>
-              </a:rPr>
-              <a:t>Software Requirements</a:t>
-            </a:r>
-            <a:r>
-              <a:rPr lang="en-US" sz="2200" dirty="0" smtClean="0">
-                <a:solidFill>
-                  <a:schemeClr val="tx1"/>
-                </a:solidFill>
-                <a:latin typeface="+mj-lt"/>
-              </a:rPr>
-              <a:t> course for more information.</a:t>
-            </a:r>
-            <a:endParaRPr lang="en-US" sz="2200" dirty="0">
-              <a:solidFill>
-                <a:schemeClr val="tx1"/>
-              </a:solidFill>
-              <a:latin typeface="+mj-lt"/>
-            </a:endParaRPr>
-          </a:p>
-        </p:txBody>
-      </p:sp>
-      <p:pic>
-        <p:nvPicPr>
-          <p:cNvPr id="1026" name="Picture 2" descr="https://encrypted-tbn0.gstatic.com/images?q=tbn:ANd9GcSFjELCnVms4p5uVj-2QT-D0xKkPIXw-rq3XA&amp;s"/>
-          <p:cNvPicPr>
-            <a:picLocks noChangeAspect="1" noChangeArrowheads="1"/>
-          </p:cNvPicPr>
-          <p:nvPr/>
-        </p:nvPicPr>
-        <p:blipFill>
-          <a:blip r:embed="rId4" cstate="print"/>
-          <a:srcRect/>
-          <a:stretch>
-            <a:fillRect/>
-          </a:stretch>
-        </p:blipFill>
-        <p:spPr bwMode="auto">
-          <a:xfrm>
-            <a:off x="5486400" y="1828800"/>
-            <a:ext cx="2143125" cy="2143125"/>
-          </a:xfrm>
-          <a:prstGeom prst="rect">
-            <a:avLst/>
-          </a:prstGeom>
-          <a:noFill/>
-        </p:spPr>
-      </p:pic>
-      <p:sp>
-        <p:nvSpPr>
-          <p:cNvPr id="11" name="Rectangle 10"/>
-          <p:cNvSpPr/>
-          <p:nvPr/>
-        </p:nvSpPr>
-        <p:spPr>
-          <a:xfrm>
-            <a:off x="3733800" y="5486400"/>
-            <a:ext cx="4572000" cy="830997"/>
-          </a:xfrm>
-          <a:prstGeom prst="rect">
-            <a:avLst/>
-          </a:prstGeom>
-        </p:spPr>
-        <p:style>
-          <a:lnRef idx="2">
-            <a:schemeClr val="dk1"/>
-          </a:lnRef>
-          <a:fillRef idx="1">
-            <a:schemeClr val="lt1"/>
-          </a:fillRef>
-          <a:effectRef idx="0">
-            <a:schemeClr val="dk1"/>
-          </a:effectRef>
-          <a:fontRef idx="minor">
-            <a:schemeClr val="dk1"/>
-          </a:fontRef>
-        </p:style>
-        <p:txBody>
-          <a:bodyPr>
-            <a:spAutoFit/>
-          </a:bodyPr>
-          <a:lstStyle/>
-          <a:p>
-            <a:pPr algn="ctr"/>
-            <a:r>
-              <a:rPr lang="en-US" sz="2400" dirty="0" smtClean="0"/>
-              <a:t>(</a:t>
-            </a:r>
-            <a:r>
-              <a:rPr lang="en-US" sz="2400" i="1" dirty="0" smtClean="0">
-                <a:solidFill>
-                  <a:srgbClr val="C00000"/>
-                </a:solidFill>
-              </a:rPr>
-              <a:t>Partial</a:t>
-            </a:r>
-            <a:r>
-              <a:rPr lang="en-US" sz="2400" dirty="0" smtClean="0"/>
-              <a:t>) Software Requirements Specification or Product Backlog</a:t>
-            </a:r>
-            <a:endParaRPr lang="en-US" sz="2400" dirty="0"/>
           </a:p>
         </p:txBody>
       </p:sp>
@@ -5886,7 +5501,276 @@
           <a:p>
             <a:r>
               <a:rPr lang="en-US" dirty="0" smtClean="0"/>
-              <a:t>Which Architecture?</a:t>
+              <a:t>Prepare a Product Backlog</a:t>
+            </a:r>
+            <a:endParaRPr lang="en-US" dirty="0"/>
+          </a:p>
+        </p:txBody>
+      </p:sp>
+      <p:pic>
+        <p:nvPicPr>
+          <p:cNvPr id="4098" name="Picture 2"/>
+          <p:cNvPicPr>
+            <a:picLocks noChangeAspect="1" noChangeArrowheads="1"/>
+          </p:cNvPicPr>
+          <p:nvPr/>
+        </p:nvPicPr>
+        <p:blipFill>
+          <a:blip r:embed="rId2" cstate="print"/>
+          <a:srcRect/>
+          <a:stretch>
+            <a:fillRect/>
+          </a:stretch>
+        </p:blipFill>
+        <p:spPr bwMode="auto">
+          <a:xfrm>
+            <a:off x="533400" y="2579687"/>
+            <a:ext cx="3181350" cy="3419475"/>
+          </a:xfrm>
+          <a:prstGeom prst="rect">
+            <a:avLst/>
+          </a:prstGeom>
+          <a:noFill/>
+          <a:ln w="9525">
+            <a:noFill/>
+            <a:miter lim="800000"/>
+            <a:headEnd/>
+            <a:tailEnd/>
+          </a:ln>
+          <a:effectLst/>
+        </p:spPr>
+      </p:pic>
+      <p:pic>
+        <p:nvPicPr>
+          <p:cNvPr id="4" name="Picture 4"/>
+          <p:cNvPicPr>
+            <a:picLocks noChangeAspect="1" noChangeArrowheads="1"/>
+          </p:cNvPicPr>
+          <p:nvPr/>
+        </p:nvPicPr>
+        <p:blipFill>
+          <a:blip r:embed="rId3" cstate="print"/>
+          <a:srcRect/>
+          <a:stretch>
+            <a:fillRect/>
+          </a:stretch>
+        </p:blipFill>
+        <p:spPr bwMode="auto">
+          <a:xfrm>
+            <a:off x="3810000" y="3733800"/>
+            <a:ext cx="1333500" cy="1314450"/>
+          </a:xfrm>
+          <a:prstGeom prst="rect">
+            <a:avLst/>
+          </a:prstGeom>
+          <a:noFill/>
+          <a:ln w="9525">
+            <a:noFill/>
+            <a:miter lim="800000"/>
+            <a:headEnd/>
+            <a:tailEnd/>
+          </a:ln>
+        </p:spPr>
+      </p:pic>
+      <p:cxnSp>
+        <p:nvCxnSpPr>
+          <p:cNvPr id="12" name="Straight Arrow Connector 11"/>
+          <p:cNvCxnSpPr/>
+          <p:nvPr/>
+        </p:nvCxnSpPr>
+        <p:spPr>
+          <a:xfrm flipV="1">
+            <a:off x="3124200" y="2960687"/>
+            <a:ext cx="1828800" cy="609600"/>
+          </a:xfrm>
+          <a:prstGeom prst="straightConnector1">
+            <a:avLst/>
+          </a:prstGeom>
+          <a:ln>
+            <a:tailEnd type="arrow"/>
+          </a:ln>
+        </p:spPr>
+        <p:style>
+          <a:lnRef idx="3">
+            <a:schemeClr val="accent2"/>
+          </a:lnRef>
+          <a:fillRef idx="0">
+            <a:schemeClr val="accent2"/>
+          </a:fillRef>
+          <a:effectRef idx="2">
+            <a:schemeClr val="accent2"/>
+          </a:effectRef>
+          <a:fontRef idx="minor">
+            <a:schemeClr val="tx1"/>
+          </a:fontRef>
+        </p:style>
+      </p:cxnSp>
+      <p:sp>
+        <p:nvSpPr>
+          <p:cNvPr id="21" name="Rectangle 20"/>
+          <p:cNvSpPr/>
+          <p:nvPr/>
+        </p:nvSpPr>
+        <p:spPr>
+          <a:xfrm>
+            <a:off x="5562600" y="4343400"/>
+            <a:ext cx="2869503" cy="584775"/>
+          </a:xfrm>
+          <a:prstGeom prst="rect">
+            <a:avLst/>
+          </a:prstGeom>
+        </p:spPr>
+        <p:txBody>
+          <a:bodyPr wrap="none">
+            <a:spAutoFit/>
+          </a:bodyPr>
+          <a:lstStyle/>
+          <a:p>
+            <a:pPr marL="514350" indent="-514350"/>
+            <a:r>
+              <a:rPr lang="en-US" sz="3200" dirty="0" smtClean="0">
+                <a:latin typeface="+mj-lt"/>
+              </a:rPr>
+              <a:t>Product Backlog</a:t>
+            </a:r>
+            <a:endParaRPr lang="en-US" sz="3200" u="sng" dirty="0" smtClean="0">
+              <a:latin typeface="+mj-lt"/>
+            </a:endParaRPr>
+          </a:p>
+        </p:txBody>
+      </p:sp>
+      <p:pic>
+        <p:nvPicPr>
+          <p:cNvPr id="1026" name="Picture 2" descr="https://encrypted-tbn0.gstatic.com/images?q=tbn:ANd9GcSFjELCnVms4p5uVj-2QT-D0xKkPIXw-rq3XA&amp;s"/>
+          <p:cNvPicPr>
+            <a:picLocks noChangeAspect="1" noChangeArrowheads="1"/>
+          </p:cNvPicPr>
+          <p:nvPr/>
+        </p:nvPicPr>
+        <p:blipFill>
+          <a:blip r:embed="rId4" cstate="print"/>
+          <a:srcRect/>
+          <a:stretch>
+            <a:fillRect/>
+          </a:stretch>
+        </p:blipFill>
+        <p:spPr bwMode="auto">
+          <a:xfrm>
+            <a:off x="5486400" y="1828800"/>
+            <a:ext cx="2143125" cy="2143125"/>
+          </a:xfrm>
+          <a:prstGeom prst="rect">
+            <a:avLst/>
+          </a:prstGeom>
+          <a:noFill/>
+        </p:spPr>
+      </p:pic>
+      <p:sp>
+        <p:nvSpPr>
+          <p:cNvPr id="11" name="Rectangle 10"/>
+          <p:cNvSpPr/>
+          <p:nvPr/>
+        </p:nvSpPr>
+        <p:spPr>
+          <a:xfrm>
+            <a:off x="3733800" y="5486400"/>
+            <a:ext cx="4572000" cy="830997"/>
+          </a:xfrm>
+          <a:prstGeom prst="rect">
+            <a:avLst/>
+          </a:prstGeom>
+        </p:spPr>
+        <p:style>
+          <a:lnRef idx="2">
+            <a:schemeClr val="dk1"/>
+          </a:lnRef>
+          <a:fillRef idx="1">
+            <a:schemeClr val="lt1"/>
+          </a:fillRef>
+          <a:effectRef idx="0">
+            <a:schemeClr val="dk1"/>
+          </a:effectRef>
+          <a:fontRef idx="minor">
+            <a:schemeClr val="dk1"/>
+          </a:fontRef>
+        </p:style>
+        <p:txBody>
+          <a:bodyPr>
+            <a:spAutoFit/>
+          </a:bodyPr>
+          <a:lstStyle/>
+          <a:p>
+            <a:pPr algn="ctr"/>
+            <a:r>
+              <a:rPr lang="en-US" sz="2400" dirty="0" smtClean="0"/>
+              <a:t>(</a:t>
+            </a:r>
+            <a:r>
+              <a:rPr lang="en-US" sz="2400" i="1" dirty="0" smtClean="0">
+                <a:solidFill>
+                  <a:srgbClr val="C00000"/>
+                </a:solidFill>
+              </a:rPr>
+              <a:t>Partial</a:t>
+            </a:r>
+            <a:r>
+              <a:rPr lang="en-US" sz="2400" dirty="0" smtClean="0"/>
+              <a:t>) Software Requirements Specification or Product Backlog</a:t>
+            </a:r>
+            <a:endParaRPr lang="en-US" sz="2400" dirty="0"/>
+          </a:p>
+        </p:txBody>
+      </p:sp>
+    </p:spTree>
+  </p:cSld>
+  <p:clrMapOvr>
+    <a:masterClrMapping/>
+  </p:clrMapOvr>
+  <p:timing>
+    <p:tnLst>
+      <p:par>
+        <p:cTn id="1" dur="indefinite" restart="never" nodeType="tmRoot"/>
+      </p:par>
+    </p:tnLst>
+  </p:timing>
+</p:sld>
+</file>
+
+<file path=ppt/slides/slide17.xml><?xml version="1.0" encoding="utf-8"?>
+<p:sld xmlns:a="http://schemas.openxmlformats.org/drawingml/2006/main" xmlns:r="http://schemas.openxmlformats.org/officeDocument/2006/relationships" xmlns:p="http://schemas.openxmlformats.org/presentationml/2006/main">
+  <p:cSld>
+    <p:spTree>
+      <p:nvGrpSpPr>
+        <p:cNvPr id="1" name=""/>
+        <p:cNvGrpSpPr/>
+        <p:nvPr/>
+      </p:nvGrpSpPr>
+      <p:grpSpPr>
+        <a:xfrm>
+          <a:off x="0" y="0"/>
+          <a:ext cx="0" cy="0"/>
+          <a:chOff x="0" y="0"/>
+          <a:chExt cx="0" cy="0"/>
+        </a:xfrm>
+      </p:grpSpPr>
+      <p:sp>
+        <p:nvSpPr>
+          <p:cNvPr id="2" name="Title 1"/>
+          <p:cNvSpPr>
+            <a:spLocks noGrp="1"/>
+          </p:cNvSpPr>
+          <p:nvPr>
+            <p:ph type="title"/>
+          </p:nvPr>
+        </p:nvSpPr>
+        <p:spPr/>
+        <p:txBody>
+          <a:bodyPr/>
+          <a:lstStyle/>
+          <a:p>
+            <a:r>
+              <a:rPr lang="en-US" dirty="0" smtClean="0"/>
+              <a:t>Prepare Architecture</a:t>
             </a:r>
             <a:endParaRPr lang="en-US" dirty="0"/>
           </a:p>
@@ -6129,86 +6013,6 @@
           </a:ln>
         </p:spPr>
       </p:pic>
-      <p:sp>
-        <p:nvSpPr>
-          <p:cNvPr id="8" name="Rectangle 7"/>
-          <p:cNvSpPr/>
-          <p:nvPr/>
-        </p:nvSpPr>
-        <p:spPr>
-          <a:xfrm>
-            <a:off x="5715000" y="2049959"/>
-            <a:ext cx="3048000" cy="1107996"/>
-          </a:xfrm>
-          <a:prstGeom prst="rect">
-            <a:avLst/>
-          </a:prstGeom>
-        </p:spPr>
-        <p:style>
-          <a:lnRef idx="2">
-            <a:schemeClr val="dk1"/>
-          </a:lnRef>
-          <a:fillRef idx="1">
-            <a:schemeClr val="lt1"/>
-          </a:fillRef>
-          <a:effectRef idx="0">
-            <a:schemeClr val="dk1"/>
-          </a:effectRef>
-          <a:fontRef idx="minor">
-            <a:schemeClr val="dk1"/>
-          </a:fontRef>
-        </p:style>
-        <p:txBody>
-          <a:bodyPr wrap="square">
-            <a:spAutoFit/>
-          </a:bodyPr>
-          <a:lstStyle/>
-          <a:p>
-            <a:pPr algn="ctr"/>
-            <a:r>
-              <a:rPr lang="en-US" sz="2200" dirty="0" smtClean="0">
-                <a:solidFill>
-                  <a:schemeClr val="tx1"/>
-                </a:solidFill>
-                <a:latin typeface="+mj-lt"/>
-              </a:rPr>
-              <a:t>Refer to the </a:t>
-            </a:r>
-            <a:r>
-              <a:rPr lang="en-US" sz="2200" b="1" dirty="0" smtClean="0">
-                <a:solidFill>
-                  <a:schemeClr val="tx1"/>
-                </a:solidFill>
-                <a:latin typeface="+mj-lt"/>
-              </a:rPr>
-              <a:t>Software Architecture </a:t>
-            </a:r>
-            <a:r>
-              <a:rPr lang="en-US" sz="2200" dirty="0" smtClean="0">
-                <a:solidFill>
-                  <a:schemeClr val="tx1"/>
-                </a:solidFill>
-              </a:rPr>
-              <a:t>course </a:t>
-            </a:r>
-            <a:r>
-              <a:rPr lang="en-US" sz="2200" dirty="0" smtClean="0">
-                <a:solidFill>
-                  <a:schemeClr val="tx1"/>
-                </a:solidFill>
-                <a:latin typeface="+mj-lt"/>
-              </a:rPr>
-              <a:t>for more information.</a:t>
-            </a:r>
-            <a:endParaRPr lang="en-US" sz="2200" dirty="0">
-              <a:solidFill>
-                <a:schemeClr val="tx1"/>
-              </a:solidFill>
-              <a:latin typeface="+mj-lt"/>
-            </a:endParaRPr>
-          </a:p>
-        </p:txBody>
-      </p:sp>
     </p:spTree>
   </p:cSld>
   <p:clrMapOvr>
@@ -6217,7 +6021,7 @@
 </p:sld>
 </file>
 
-<file path=ppt/slides/slide17.xml><?xml version="1.0" encoding="utf-8"?>
+<file path=ppt/slides/slide18.xml><?xml version="1.0" encoding="utf-8"?>
 <p:sld xmlns:a="http://schemas.openxmlformats.org/drawingml/2006/main" xmlns:r="http://schemas.openxmlformats.org/officeDocument/2006/relationships" xmlns:p="http://schemas.openxmlformats.org/presentationml/2006/main">
   <p:cSld>
     <p:spTree>
@@ -6251,7 +6055,94 @@
           <a:p>
             <a:r>
               <a:rPr lang="en-US" dirty="0" smtClean="0"/>
-              <a:t>Can We Really Do It?</a:t>
+              <a:t>Finalizing Team Project Idea</a:t>
+            </a:r>
+            <a:endParaRPr lang="en-US" dirty="0"/>
+          </a:p>
+        </p:txBody>
+      </p:sp>
+      <p:pic>
+        <p:nvPicPr>
+          <p:cNvPr id="8" name="Picture 1"/>
+          <p:cNvPicPr>
+            <a:picLocks noChangeAspect="1" noChangeArrowheads="1"/>
+          </p:cNvPicPr>
+          <p:nvPr/>
+        </p:nvPicPr>
+        <p:blipFill>
+          <a:blip r:embed="rId2" cstate="print"/>
+          <a:srcRect/>
+          <a:stretch>
+            <a:fillRect/>
+          </a:stretch>
+        </p:blipFill>
+        <p:spPr bwMode="auto">
+          <a:xfrm>
+            <a:off x="3124200" y="2415540"/>
+            <a:ext cx="2400300" cy="2461260"/>
+          </a:xfrm>
+          <a:prstGeom prst="rect">
+            <a:avLst/>
+          </a:prstGeom>
+          <a:noFill/>
+          <a:ln w="9525">
+            <a:noFill/>
+            <a:miter lim="800000"/>
+            <a:headEnd/>
+            <a:tailEnd/>
+          </a:ln>
+        </p:spPr>
+      </p:pic>
+    </p:spTree>
+  </p:cSld>
+  <p:clrMapOvr>
+    <a:masterClrMapping/>
+  </p:clrMapOvr>
+  <p:timing>
+    <p:tnLst>
+      <p:par>
+        <p:cTn id="1" dur="indefinite" restart="never" nodeType="tmRoot"/>
+      </p:par>
+    </p:tnLst>
+  </p:timing>
+</p:sld>
+</file>
+
+<file path=ppt/slides/slide19.xml><?xml version="1.0" encoding="utf-8"?>
+<p:sld xmlns:a="http://schemas.openxmlformats.org/drawingml/2006/main" xmlns:r="http://schemas.openxmlformats.org/officeDocument/2006/relationships" xmlns:p="http://schemas.openxmlformats.org/presentationml/2006/main">
+  <p:cSld>
+    <p:spTree>
+      <p:nvGrpSpPr>
+        <p:cNvPr id="1" name=""/>
+        <p:cNvGrpSpPr/>
+        <p:nvPr/>
+      </p:nvGrpSpPr>
+      <p:grpSpPr>
+        <a:xfrm>
+          <a:off x="0" y="0"/>
+          <a:ext cx="0" cy="0"/>
+          <a:chOff x="0" y="0"/>
+          <a:chExt cx="0" cy="0"/>
+        </a:xfrm>
+      </p:grpSpPr>
+      <p:sp>
+        <p:nvSpPr>
+          <p:cNvPr id="2" name="Title 1"/>
+          <p:cNvSpPr>
+            <a:spLocks noGrp="1"/>
+          </p:cNvSpPr>
+          <p:nvPr>
+            <p:ph type="title"/>
+          </p:nvPr>
+        </p:nvSpPr>
+        <p:spPr/>
+        <p:txBody>
+          <a:bodyPr/>
+          <a:lstStyle/>
+          <a:p>
+            <a:r>
+              <a:rPr lang="en-US" dirty="0" smtClean="0"/>
+              <a:t>Create a Proof of Concept</a:t>
             </a:r>
             <a:endParaRPr lang="en-US" dirty="0"/>
           </a:p>
@@ -6512,96 +6403,6 @@
           <a:noFill/>
         </p:spPr>
       </p:pic>
-      <p:sp>
-        <p:nvSpPr>
-          <p:cNvPr id="15" name="Rectangle 14"/>
-          <p:cNvSpPr/>
-          <p:nvPr/>
-        </p:nvSpPr>
-        <p:spPr>
-          <a:xfrm>
-            <a:off x="6705600" y="2514600"/>
-            <a:ext cx="2057400" cy="2123658"/>
-          </a:xfrm>
-          <a:prstGeom prst="rect">
-            <a:avLst/>
-          </a:prstGeom>
-        </p:spPr>
-        <p:style>
-          <a:lnRef idx="2">
-            <a:schemeClr val="dk1"/>
-          </a:lnRef>
-          <a:fillRef idx="1">
-            <a:schemeClr val="lt1"/>
-          </a:fillRef>
-          <a:effectRef idx="0">
-            <a:schemeClr val="dk1"/>
-          </a:effectRef>
-          <a:fontRef idx="minor">
-            <a:schemeClr val="dk1"/>
-          </a:fontRef>
-        </p:style>
-        <p:txBody>
-          <a:bodyPr wrap="square">
-            <a:spAutoFit/>
-          </a:bodyPr>
-          <a:lstStyle/>
-          <a:p>
-            <a:pPr algn="ctr"/>
-            <a:r>
-              <a:rPr lang="en-US" sz="2200" dirty="0" smtClean="0">
-                <a:solidFill>
-                  <a:schemeClr val="tx1"/>
-                </a:solidFill>
-                <a:latin typeface="+mj-lt"/>
-              </a:rPr>
-              <a:t>Refer to the </a:t>
-            </a:r>
-            <a:r>
-              <a:rPr lang="en-US" sz="2200" b="1" dirty="0" smtClean="0">
-                <a:solidFill>
-                  <a:schemeClr val="tx1"/>
-                </a:solidFill>
-                <a:latin typeface="+mj-lt"/>
-              </a:rPr>
-              <a:t>Algorithms</a:t>
-            </a:r>
-            <a:r>
-              <a:rPr lang="en-US" sz="2200" dirty="0" smtClean="0">
-                <a:solidFill>
-                  <a:schemeClr val="tx1"/>
-                </a:solidFill>
-                <a:latin typeface="+mj-lt"/>
-              </a:rPr>
-              <a:t> and </a:t>
-            </a:r>
-            <a:r>
-              <a:rPr lang="en-US" sz="2200" b="1" dirty="0" smtClean="0">
-                <a:solidFill>
-                  <a:schemeClr val="tx1"/>
-                </a:solidFill>
-                <a:latin typeface="+mj-lt"/>
-              </a:rPr>
-              <a:t>Programming</a:t>
-            </a:r>
-            <a:r>
-              <a:rPr lang="en-US" sz="2200" dirty="0" smtClean="0">
-                <a:solidFill>
-                  <a:schemeClr val="tx1"/>
-                </a:solidFill>
-                <a:latin typeface="+mj-lt"/>
-              </a:rPr>
-              <a:t> courses for more information.</a:t>
-            </a:r>
-            <a:endParaRPr lang="en-US" sz="2200" dirty="0">
-              <a:solidFill>
-                <a:schemeClr val="tx1"/>
-              </a:solidFill>
-              <a:latin typeface="+mj-lt"/>
-            </a:endParaRPr>
-          </a:p>
-        </p:txBody>
-      </p:sp>
     </p:spTree>
   </p:cSld>
   <p:clrMapOvr>
@@ -6617,7 +6418,361 @@
 </p:sld>
 </file>
 
-<file path=ppt/slides/slide18.xml><?xml version="1.0" encoding="utf-8"?>
+<file path=ppt/slides/slide2.xml><?xml version="1.0" encoding="utf-8"?>
+<p:sld xmlns:a="http://schemas.openxmlformats.org/drawingml/2006/main" xmlns:r="http://schemas.openxmlformats.org/officeDocument/2006/relationships" xmlns:p="http://schemas.openxmlformats.org/presentationml/2006/main">
+  <p:cSld>
+    <p:spTree>
+      <p:nvGrpSpPr>
+        <p:cNvPr id="1" name=""/>
+        <p:cNvGrpSpPr/>
+        <p:nvPr/>
+      </p:nvGrpSpPr>
+      <p:grpSpPr>
+        <a:xfrm>
+          <a:off x="0" y="0"/>
+          <a:ext cx="0" cy="0"/>
+          <a:chOff x="0" y="0"/>
+          <a:chExt cx="0" cy="0"/>
+        </a:xfrm>
+      </p:grpSpPr>
+      <p:sp>
+        <p:nvSpPr>
+          <p:cNvPr id="2" name="Title 1"/>
+          <p:cNvSpPr>
+            <a:spLocks noGrp="1"/>
+          </p:cNvSpPr>
+          <p:nvPr>
+            <p:ph type="title"/>
+          </p:nvPr>
+        </p:nvSpPr>
+        <p:spPr/>
+        <p:txBody>
+          <a:bodyPr/>
+          <a:lstStyle/>
+          <a:p>
+            <a:r>
+              <a:rPr lang="en-US" dirty="0" smtClean="0"/>
+              <a:t>Objectives</a:t>
+            </a:r>
+            <a:endParaRPr lang="en-US" dirty="0"/>
+          </a:p>
+        </p:txBody>
+      </p:sp>
+      <p:sp>
+        <p:nvSpPr>
+          <p:cNvPr id="3" name="Content Placeholder 2"/>
+          <p:cNvSpPr>
+            <a:spLocks noGrp="1"/>
+          </p:cNvSpPr>
+          <p:nvPr>
+            <p:ph idx="1"/>
+          </p:nvPr>
+        </p:nvSpPr>
+        <p:spPr>
+          <a:xfrm>
+            <a:off x="457200" y="1600200"/>
+            <a:ext cx="5562600" cy="4343400"/>
+          </a:xfrm>
+        </p:spPr>
+        <p:txBody>
+          <a:bodyPr/>
+          <a:lstStyle/>
+          <a:p>
+            <a:pPr marL="457200" indent="-457200">
+              <a:buFont typeface="Wingdings" pitchFamily="2" charset="2"/>
+              <a:buChar char="Ø"/>
+            </a:pPr>
+            <a:r>
+              <a:rPr lang="en-US" sz="2200" dirty="0" smtClean="0"/>
+              <a:t>To create an </a:t>
+            </a:r>
+            <a:r>
+              <a:rPr lang="en-US" sz="2200" i="1" dirty="0" smtClean="0">
+                <a:solidFill>
+                  <a:srgbClr val="C00000"/>
+                </a:solidFill>
+              </a:rPr>
+              <a:t>executive summary document</a:t>
+            </a:r>
+            <a:r>
+              <a:rPr lang="en-US" sz="2200" dirty="0" smtClean="0"/>
+              <a:t>.</a:t>
+            </a:r>
+          </a:p>
+          <a:p>
+            <a:pPr marL="457200" indent="-457200">
+              <a:buFont typeface="Wingdings" pitchFamily="2" charset="2"/>
+              <a:buChar char="Ø"/>
+            </a:pPr>
+            <a:r>
+              <a:rPr lang="en-US" sz="2200" dirty="0" smtClean="0"/>
+              <a:t>To create a </a:t>
+            </a:r>
+            <a:r>
+              <a:rPr lang="en-US" sz="2200" i="1" dirty="0" smtClean="0">
+                <a:solidFill>
+                  <a:srgbClr val="C00000"/>
+                </a:solidFill>
+              </a:rPr>
+              <a:t>project vision and scope document</a:t>
+            </a:r>
+            <a:r>
+              <a:rPr lang="en-US" sz="2200" dirty="0" smtClean="0"/>
+              <a:t>.</a:t>
+            </a:r>
+          </a:p>
+          <a:p>
+            <a:pPr marL="457200" indent="-457200">
+              <a:buFont typeface="Wingdings" pitchFamily="2" charset="2"/>
+              <a:buChar char="Ø"/>
+            </a:pPr>
+            <a:r>
+              <a:rPr lang="en-US" sz="2200" dirty="0" smtClean="0"/>
+              <a:t>To create a </a:t>
+            </a:r>
+            <a:r>
+              <a:rPr lang="en-US" sz="2200" i="1" dirty="0" smtClean="0">
+                <a:solidFill>
+                  <a:srgbClr val="C00000"/>
+                </a:solidFill>
+              </a:rPr>
+              <a:t>mockup</a:t>
+            </a:r>
+            <a:r>
+              <a:rPr lang="en-US" sz="2200" dirty="0" smtClean="0"/>
+              <a:t> and </a:t>
+            </a:r>
+            <a:r>
+              <a:rPr lang="en-US" sz="2200" i="1" dirty="0" smtClean="0">
+                <a:solidFill>
+                  <a:srgbClr val="C00000"/>
+                </a:solidFill>
+              </a:rPr>
+              <a:t>prototype</a:t>
+            </a:r>
+            <a:r>
+              <a:rPr lang="en-US" sz="2200" dirty="0" smtClean="0"/>
+              <a:t>.</a:t>
+            </a:r>
+            <a:endParaRPr lang="en-US" sz="2200" i="1" dirty="0" smtClean="0">
+              <a:solidFill>
+                <a:srgbClr val="C00000"/>
+              </a:solidFill>
+            </a:endParaRPr>
+          </a:p>
+          <a:p>
+            <a:pPr marL="457200" indent="-457200">
+              <a:buFont typeface="Wingdings" pitchFamily="2" charset="2"/>
+              <a:buChar char="Ø"/>
+            </a:pPr>
+            <a:r>
+              <a:rPr lang="en-US" sz="2200" dirty="0" smtClean="0"/>
+              <a:t>To create a </a:t>
+            </a:r>
+            <a:r>
+              <a:rPr lang="en-US" sz="2200" i="1" dirty="0" smtClean="0">
+                <a:solidFill>
+                  <a:srgbClr val="C00000"/>
+                </a:solidFill>
+              </a:rPr>
+              <a:t>software requirements specification</a:t>
+            </a:r>
+            <a:r>
+              <a:rPr lang="en-US" sz="2200" dirty="0" smtClean="0"/>
+              <a:t>.</a:t>
+            </a:r>
+            <a:endParaRPr lang="en-US" sz="2200" i="1" dirty="0" smtClean="0">
+              <a:solidFill>
+                <a:srgbClr val="C00000"/>
+              </a:solidFill>
+            </a:endParaRPr>
+          </a:p>
+          <a:p>
+            <a:pPr marL="457200" indent="-457200">
+              <a:buFont typeface="Wingdings" pitchFamily="2" charset="2"/>
+              <a:buChar char="Ø"/>
+            </a:pPr>
+            <a:r>
+              <a:rPr lang="en-US" sz="2200" dirty="0" smtClean="0"/>
+              <a:t>To create an </a:t>
+            </a:r>
+            <a:r>
+              <a:rPr lang="en-US" sz="2200" i="1" dirty="0" smtClean="0">
+                <a:solidFill>
+                  <a:srgbClr val="C00000"/>
+                </a:solidFill>
+              </a:rPr>
+              <a:t>architecture</a:t>
+            </a:r>
+            <a:r>
+              <a:rPr lang="en-US" sz="2200" dirty="0" smtClean="0"/>
+              <a:t>.</a:t>
+            </a:r>
+            <a:endParaRPr lang="en-US" sz="2200" i="1" dirty="0" smtClean="0">
+              <a:solidFill>
+                <a:srgbClr val="C00000"/>
+              </a:solidFill>
+            </a:endParaRPr>
+          </a:p>
+          <a:p>
+            <a:pPr marL="457200" indent="-457200">
+              <a:buFont typeface="Wingdings" pitchFamily="2" charset="2"/>
+              <a:buChar char="Ø"/>
+            </a:pPr>
+            <a:r>
+              <a:rPr lang="en-US" sz="2200" dirty="0" smtClean="0"/>
+              <a:t>To create a </a:t>
+            </a:r>
+            <a:r>
+              <a:rPr lang="en-US" sz="2200" i="1" dirty="0" smtClean="0">
+                <a:solidFill>
+                  <a:srgbClr val="C00000"/>
+                </a:solidFill>
+              </a:rPr>
+              <a:t>feasibility study report</a:t>
+            </a:r>
+            <a:r>
+              <a:rPr lang="en-US" sz="2200" dirty="0" smtClean="0"/>
+              <a:t>.</a:t>
+            </a:r>
+            <a:endParaRPr lang="en-US" sz="2200" i="1" dirty="0" smtClean="0">
+              <a:solidFill>
+                <a:srgbClr val="C00000"/>
+              </a:solidFill>
+            </a:endParaRPr>
+          </a:p>
+          <a:p>
+            <a:pPr marL="457200" indent="-457200">
+              <a:buFont typeface="Wingdings" pitchFamily="2" charset="2"/>
+              <a:buChar char="Ø"/>
+            </a:pPr>
+            <a:r>
+              <a:rPr lang="en-US" sz="2200" dirty="0" smtClean="0"/>
+              <a:t>To create a </a:t>
+            </a:r>
+            <a:r>
+              <a:rPr lang="en-US" sz="2200" i="1" dirty="0" smtClean="0">
+                <a:solidFill>
+                  <a:srgbClr val="C00000"/>
+                </a:solidFill>
+              </a:rPr>
+              <a:t>proof of concept</a:t>
+            </a:r>
+            <a:r>
+              <a:rPr lang="en-US" sz="2200" dirty="0" smtClean="0"/>
+              <a:t>.</a:t>
+            </a:r>
+            <a:endParaRPr lang="en-US" sz="2200" i="1" dirty="0" smtClean="0">
+              <a:solidFill>
+                <a:srgbClr val="C00000"/>
+              </a:solidFill>
+            </a:endParaRPr>
+          </a:p>
+          <a:p>
+            <a:pPr marL="457200" indent="-457200">
+              <a:buFont typeface="Wingdings" pitchFamily="2" charset="2"/>
+              <a:buChar char="Ø"/>
+            </a:pPr>
+            <a:r>
+              <a:rPr lang="en-US" sz="2200" dirty="0" smtClean="0"/>
+              <a:t>To create a </a:t>
+            </a:r>
+            <a:r>
+              <a:rPr lang="en-US" sz="2200" i="1" dirty="0" smtClean="0">
+                <a:solidFill>
+                  <a:srgbClr val="C00000"/>
+                </a:solidFill>
+              </a:rPr>
+              <a:t>project charter</a:t>
+            </a:r>
+            <a:r>
+              <a:rPr lang="en-US" sz="2200" dirty="0" smtClean="0"/>
+              <a:t>.</a:t>
+            </a:r>
+            <a:endParaRPr lang="en-US" sz="2200" i="1" dirty="0" smtClean="0">
+              <a:solidFill>
+                <a:srgbClr val="C00000"/>
+              </a:solidFill>
+            </a:endParaRPr>
+          </a:p>
+          <a:p>
+            <a:pPr marL="457200" indent="-457200">
+              <a:buFont typeface="Wingdings" pitchFamily="2" charset="2"/>
+              <a:buChar char="Ø"/>
+            </a:pPr>
+            <a:r>
+              <a:rPr lang="en-US" sz="2200" dirty="0" smtClean="0"/>
+              <a:t>To create a </a:t>
+            </a:r>
+            <a:r>
+              <a:rPr lang="en-US" sz="2200" i="1" dirty="0" smtClean="0">
+                <a:solidFill>
+                  <a:srgbClr val="C00000"/>
+                </a:solidFill>
+              </a:rPr>
+              <a:t>process definition document</a:t>
+            </a:r>
+            <a:r>
+              <a:rPr lang="en-US" sz="2200" dirty="0" smtClean="0"/>
+              <a:t>.</a:t>
+            </a:r>
+            <a:endParaRPr lang="en-US" sz="2200" i="1" dirty="0" smtClean="0">
+              <a:solidFill>
+                <a:srgbClr val="C00000"/>
+              </a:solidFill>
+            </a:endParaRPr>
+          </a:p>
+        </p:txBody>
+      </p:sp>
+      <p:pic>
+        <p:nvPicPr>
+          <p:cNvPr id="4" name="Picture 2"/>
+          <p:cNvPicPr>
+            <a:picLocks noChangeAspect="1" noChangeArrowheads="1"/>
+          </p:cNvPicPr>
+          <p:nvPr/>
+        </p:nvPicPr>
+        <p:blipFill>
+          <a:blip r:embed="rId2" cstate="print"/>
+          <a:srcRect/>
+          <a:stretch>
+            <a:fillRect/>
+          </a:stretch>
+        </p:blipFill>
+        <p:spPr bwMode="auto">
+          <a:xfrm>
+            <a:off x="6000750" y="2609850"/>
+            <a:ext cx="2762250" cy="2114550"/>
+          </a:xfrm>
+          <a:prstGeom prst="rect">
+            <a:avLst/>
+          </a:prstGeom>
+          <a:noFill/>
+          <a:ln w="9525">
+            <a:noFill/>
+            <a:miter lim="800000"/>
+            <a:headEnd/>
+            <a:tailEnd/>
+          </a:ln>
+          <a:effectLst/>
+        </p:spPr>
+      </p:pic>
+    </p:spTree>
+  </p:cSld>
+  <p:clrMapOvr>
+    <a:masterClrMapping/>
+  </p:clrMapOvr>
+  <p:timing>
+    <p:tnLst>
+      <p:par>
+        <p:cTn id="1" dur="indefinite" restart="never" nodeType="tmRoot"/>
+      </p:par>
+    </p:tnLst>
+  </p:timing>
+</p:sld>
+</file>
+
+<file path=ppt/slides/slide20.xml><?xml version="1.0" encoding="utf-8"?>
 <p:sld xmlns:a="http://schemas.openxmlformats.org/drawingml/2006/main" xmlns:r="http://schemas.openxmlformats.org/officeDocument/2006/relationships" xmlns:p="http://schemas.openxmlformats.org/presentationml/2006/main">
   <p:cSld>
     <p:spTree>
@@ -6668,7 +6823,7 @@
 </p:sld>
 </file>
 
-<file path=ppt/slides/slide19.xml><?xml version="1.0" encoding="utf-8"?>
+<file path=ppt/slides/slide21.xml><?xml version="1.0" encoding="utf-8"?>
 <p:sld xmlns:a="http://schemas.openxmlformats.org/drawingml/2006/main" xmlns:r="http://schemas.openxmlformats.org/officeDocument/2006/relationships" xmlns:p="http://schemas.openxmlformats.org/presentationml/2006/main">
   <p:cSld>
     <p:spTree>
@@ -7010,361 +7165,7 @@
 </p:sld>
 </file>
 
-<file path=ppt/slides/slide2.xml><?xml version="1.0" encoding="utf-8"?>
-<p:sld xmlns:a="http://schemas.openxmlformats.org/drawingml/2006/main" xmlns:r="http://schemas.openxmlformats.org/officeDocument/2006/relationships" xmlns:p="http://schemas.openxmlformats.org/presentationml/2006/main">
-  <p:cSld>
-    <p:spTree>
-      <p:nvGrpSpPr>
-        <p:cNvPr id="1" name=""/>
-        <p:cNvGrpSpPr/>
-        <p:nvPr/>
-      </p:nvGrpSpPr>
-      <p:grpSpPr>
-        <a:xfrm>
-          <a:off x="0" y="0"/>
-          <a:ext cx="0" cy="0"/>
-          <a:chOff x="0" y="0"/>
-          <a:chExt cx="0" cy="0"/>
-        </a:xfrm>
-      </p:grpSpPr>
-      <p:sp>
-        <p:nvSpPr>
-          <p:cNvPr id="2" name="Title 1"/>
-          <p:cNvSpPr>
-            <a:spLocks noGrp="1"/>
-          </p:cNvSpPr>
-          <p:nvPr>
-            <p:ph type="title"/>
-          </p:nvPr>
-        </p:nvSpPr>
-        <p:spPr/>
-        <p:txBody>
-          <a:bodyPr/>
-          <a:lstStyle/>
-          <a:p>
-            <a:r>
-              <a:rPr lang="en-US" dirty="0" smtClean="0"/>
-              <a:t>Objectives</a:t>
-            </a:r>
-            <a:endParaRPr lang="en-US" dirty="0"/>
-          </a:p>
-        </p:txBody>
-      </p:sp>
-      <p:sp>
-        <p:nvSpPr>
-          <p:cNvPr id="3" name="Content Placeholder 2"/>
-          <p:cNvSpPr>
-            <a:spLocks noGrp="1"/>
-          </p:cNvSpPr>
-          <p:nvPr>
-            <p:ph idx="1"/>
-          </p:nvPr>
-        </p:nvSpPr>
-        <p:spPr>
-          <a:xfrm>
-            <a:off x="457200" y="1600200"/>
-            <a:ext cx="5562600" cy="4343400"/>
-          </a:xfrm>
-        </p:spPr>
-        <p:txBody>
-          <a:bodyPr/>
-          <a:lstStyle/>
-          <a:p>
-            <a:pPr marL="457200" indent="-457200">
-              <a:buFont typeface="Wingdings" pitchFamily="2" charset="2"/>
-              <a:buChar char="Ø"/>
-            </a:pPr>
-            <a:r>
-              <a:rPr lang="en-US" sz="2200" dirty="0" smtClean="0"/>
-              <a:t>To create an </a:t>
-            </a:r>
-            <a:r>
-              <a:rPr lang="en-US" sz="2200" i="1" dirty="0" smtClean="0">
-                <a:solidFill>
-                  <a:srgbClr val="C00000"/>
-                </a:solidFill>
-              </a:rPr>
-              <a:t>executive summary document</a:t>
-            </a:r>
-            <a:r>
-              <a:rPr lang="en-US" sz="2200" dirty="0" smtClean="0"/>
-              <a:t>.</a:t>
-            </a:r>
-          </a:p>
-          <a:p>
-            <a:pPr marL="457200" indent="-457200">
-              <a:buFont typeface="Wingdings" pitchFamily="2" charset="2"/>
-              <a:buChar char="Ø"/>
-            </a:pPr>
-            <a:r>
-              <a:rPr lang="en-US" sz="2200" dirty="0" smtClean="0"/>
-              <a:t>To create a </a:t>
-            </a:r>
-            <a:r>
-              <a:rPr lang="en-US" sz="2200" i="1" dirty="0" smtClean="0">
-                <a:solidFill>
-                  <a:srgbClr val="C00000"/>
-                </a:solidFill>
-              </a:rPr>
-              <a:t>project vision and scope document</a:t>
-            </a:r>
-            <a:r>
-              <a:rPr lang="en-US" sz="2200" dirty="0" smtClean="0"/>
-              <a:t>.</a:t>
-            </a:r>
-          </a:p>
-          <a:p>
-            <a:pPr marL="457200" indent="-457200">
-              <a:buFont typeface="Wingdings" pitchFamily="2" charset="2"/>
-              <a:buChar char="Ø"/>
-            </a:pPr>
-            <a:r>
-              <a:rPr lang="en-US" sz="2200" dirty="0" smtClean="0"/>
-              <a:t>To create a </a:t>
-            </a:r>
-            <a:r>
-              <a:rPr lang="en-US" sz="2200" i="1" dirty="0" smtClean="0">
-                <a:solidFill>
-                  <a:srgbClr val="C00000"/>
-                </a:solidFill>
-              </a:rPr>
-              <a:t>mockup</a:t>
-            </a:r>
-            <a:r>
-              <a:rPr lang="en-US" sz="2200" dirty="0" smtClean="0"/>
-              <a:t> and </a:t>
-            </a:r>
-            <a:r>
-              <a:rPr lang="en-US" sz="2200" i="1" dirty="0" smtClean="0">
-                <a:solidFill>
-                  <a:srgbClr val="C00000"/>
-                </a:solidFill>
-              </a:rPr>
-              <a:t>prototype</a:t>
-            </a:r>
-            <a:r>
-              <a:rPr lang="en-US" sz="2200" dirty="0" smtClean="0"/>
-              <a:t>.</a:t>
-            </a:r>
-            <a:endParaRPr lang="en-US" sz="2200" i="1" dirty="0" smtClean="0">
-              <a:solidFill>
-                <a:srgbClr val="C00000"/>
-              </a:solidFill>
-            </a:endParaRPr>
-          </a:p>
-          <a:p>
-            <a:pPr marL="457200" indent="-457200">
-              <a:buFont typeface="Wingdings" pitchFamily="2" charset="2"/>
-              <a:buChar char="Ø"/>
-            </a:pPr>
-            <a:r>
-              <a:rPr lang="en-US" sz="2200" dirty="0" smtClean="0"/>
-              <a:t>To create a </a:t>
-            </a:r>
-            <a:r>
-              <a:rPr lang="en-US" sz="2200" i="1" dirty="0" smtClean="0">
-                <a:solidFill>
-                  <a:srgbClr val="C00000"/>
-                </a:solidFill>
-              </a:rPr>
-              <a:t>software requirements specification</a:t>
-            </a:r>
-            <a:r>
-              <a:rPr lang="en-US" sz="2200" dirty="0" smtClean="0"/>
-              <a:t>.</a:t>
-            </a:r>
-            <a:endParaRPr lang="en-US" sz="2200" i="1" dirty="0" smtClean="0">
-              <a:solidFill>
-                <a:srgbClr val="C00000"/>
-              </a:solidFill>
-            </a:endParaRPr>
-          </a:p>
-          <a:p>
-            <a:pPr marL="457200" indent="-457200">
-              <a:buFont typeface="Wingdings" pitchFamily="2" charset="2"/>
-              <a:buChar char="Ø"/>
-            </a:pPr>
-            <a:r>
-              <a:rPr lang="en-US" sz="2200" dirty="0" smtClean="0"/>
-              <a:t>To create an </a:t>
-            </a:r>
-            <a:r>
-              <a:rPr lang="en-US" sz="2200" i="1" dirty="0" smtClean="0">
-                <a:solidFill>
-                  <a:srgbClr val="C00000"/>
-                </a:solidFill>
-              </a:rPr>
-              <a:t>architecture</a:t>
-            </a:r>
-            <a:r>
-              <a:rPr lang="en-US" sz="2200" dirty="0" smtClean="0"/>
-              <a:t>.</a:t>
-            </a:r>
-            <a:endParaRPr lang="en-US" sz="2200" i="1" dirty="0" smtClean="0">
-              <a:solidFill>
-                <a:srgbClr val="C00000"/>
-              </a:solidFill>
-            </a:endParaRPr>
-          </a:p>
-          <a:p>
-            <a:pPr marL="457200" indent="-457200">
-              <a:buFont typeface="Wingdings" pitchFamily="2" charset="2"/>
-              <a:buChar char="Ø"/>
-            </a:pPr>
-            <a:r>
-              <a:rPr lang="en-US" sz="2200" dirty="0" smtClean="0"/>
-              <a:t>To create a </a:t>
-            </a:r>
-            <a:r>
-              <a:rPr lang="en-US" sz="2200" i="1" dirty="0" smtClean="0">
-                <a:solidFill>
-                  <a:srgbClr val="C00000"/>
-                </a:solidFill>
-              </a:rPr>
-              <a:t>feasibility study report</a:t>
-            </a:r>
-            <a:r>
-              <a:rPr lang="en-US" sz="2200" dirty="0" smtClean="0"/>
-              <a:t>.</a:t>
-            </a:r>
-            <a:endParaRPr lang="en-US" sz="2200" i="1" dirty="0" smtClean="0">
-              <a:solidFill>
-                <a:srgbClr val="C00000"/>
-              </a:solidFill>
-            </a:endParaRPr>
-          </a:p>
-          <a:p>
-            <a:pPr marL="457200" indent="-457200">
-              <a:buFont typeface="Wingdings" pitchFamily="2" charset="2"/>
-              <a:buChar char="Ø"/>
-            </a:pPr>
-            <a:r>
-              <a:rPr lang="en-US" sz="2200" dirty="0" smtClean="0"/>
-              <a:t>To create a </a:t>
-            </a:r>
-            <a:r>
-              <a:rPr lang="en-US" sz="2200" i="1" dirty="0" smtClean="0">
-                <a:solidFill>
-                  <a:srgbClr val="C00000"/>
-                </a:solidFill>
-              </a:rPr>
-              <a:t>proof of concept</a:t>
-            </a:r>
-            <a:r>
-              <a:rPr lang="en-US" sz="2200" dirty="0" smtClean="0"/>
-              <a:t>.</a:t>
-            </a:r>
-            <a:endParaRPr lang="en-US" sz="2200" i="1" dirty="0" smtClean="0">
-              <a:solidFill>
-                <a:srgbClr val="C00000"/>
-              </a:solidFill>
-            </a:endParaRPr>
-          </a:p>
-          <a:p>
-            <a:pPr marL="457200" indent="-457200">
-              <a:buFont typeface="Wingdings" pitchFamily="2" charset="2"/>
-              <a:buChar char="Ø"/>
-            </a:pPr>
-            <a:r>
-              <a:rPr lang="en-US" sz="2200" dirty="0" smtClean="0"/>
-              <a:t>To create a </a:t>
-            </a:r>
-            <a:r>
-              <a:rPr lang="en-US" sz="2200" i="1" dirty="0" smtClean="0">
-                <a:solidFill>
-                  <a:srgbClr val="C00000"/>
-                </a:solidFill>
-              </a:rPr>
-              <a:t>project charter</a:t>
-            </a:r>
-            <a:r>
-              <a:rPr lang="en-US" sz="2200" dirty="0" smtClean="0"/>
-              <a:t>.</a:t>
-            </a:r>
-            <a:endParaRPr lang="en-US" sz="2200" i="1" dirty="0" smtClean="0">
-              <a:solidFill>
-                <a:srgbClr val="C00000"/>
-              </a:solidFill>
-            </a:endParaRPr>
-          </a:p>
-          <a:p>
-            <a:pPr marL="457200" indent="-457200">
-              <a:buFont typeface="Wingdings" pitchFamily="2" charset="2"/>
-              <a:buChar char="Ø"/>
-            </a:pPr>
-            <a:r>
-              <a:rPr lang="en-US" sz="2200" dirty="0" smtClean="0"/>
-              <a:t>To create a </a:t>
-            </a:r>
-            <a:r>
-              <a:rPr lang="en-US" sz="2200" i="1" dirty="0" smtClean="0">
-                <a:solidFill>
-                  <a:srgbClr val="C00000"/>
-                </a:solidFill>
-              </a:rPr>
-              <a:t>process definition document</a:t>
-            </a:r>
-            <a:r>
-              <a:rPr lang="en-US" sz="2200" dirty="0" smtClean="0"/>
-              <a:t>.</a:t>
-            </a:r>
-            <a:endParaRPr lang="en-US" sz="2200" i="1" dirty="0" smtClean="0">
-              <a:solidFill>
-                <a:srgbClr val="C00000"/>
-              </a:solidFill>
-            </a:endParaRPr>
-          </a:p>
-        </p:txBody>
-      </p:sp>
-      <p:pic>
-        <p:nvPicPr>
-          <p:cNvPr id="4" name="Picture 2"/>
-          <p:cNvPicPr>
-            <a:picLocks noChangeAspect="1" noChangeArrowheads="1"/>
-          </p:cNvPicPr>
-          <p:nvPr/>
-        </p:nvPicPr>
-        <p:blipFill>
-          <a:blip r:embed="rId2" cstate="print"/>
-          <a:srcRect/>
-          <a:stretch>
-            <a:fillRect/>
-          </a:stretch>
-        </p:blipFill>
-        <p:spPr bwMode="auto">
-          <a:xfrm>
-            <a:off x="6000750" y="2609850"/>
-            <a:ext cx="2762250" cy="2114550"/>
-          </a:xfrm>
-          <a:prstGeom prst="rect">
-            <a:avLst/>
-          </a:prstGeom>
-          <a:noFill/>
-          <a:ln w="9525">
-            <a:noFill/>
-            <a:miter lim="800000"/>
-            <a:headEnd/>
-            <a:tailEnd/>
-          </a:ln>
-          <a:effectLst/>
-        </p:spPr>
-      </p:pic>
-    </p:spTree>
-  </p:cSld>
-  <p:clrMapOvr>
-    <a:masterClrMapping/>
-  </p:clrMapOvr>
-  <p:timing>
-    <p:tnLst>
-      <p:par>
-        <p:cTn id="1" dur="indefinite" restart="never" nodeType="tmRoot"/>
-      </p:par>
-    </p:tnLst>
-  </p:timing>
-</p:sld>
-</file>
-
-<file path=ppt/slides/slide20.xml><?xml version="1.0" encoding="utf-8"?>
+<file path=ppt/slides/slide22.xml><?xml version="1.0" encoding="utf-8"?>
 <p:sld xmlns:a="http://schemas.openxmlformats.org/drawingml/2006/main" xmlns:r="http://schemas.openxmlformats.org/officeDocument/2006/relationships" xmlns:p="http://schemas.openxmlformats.org/presentationml/2006/main">
   <p:cSld>
     <p:spTree>
@@ -7605,7 +7406,7 @@
 </p:sld>
 </file>
 
-<file path=ppt/slides/slide21.xml><?xml version="1.0" encoding="utf-8"?>
+<file path=ppt/slides/slide23.xml><?xml version="1.0" encoding="utf-8"?>
 <p:sld xmlns:a="http://schemas.openxmlformats.org/drawingml/2006/main" xmlns:r="http://schemas.openxmlformats.org/officeDocument/2006/relationships" xmlns:p="http://schemas.openxmlformats.org/presentationml/2006/main">
   <p:cSld>
     <p:spTree>
@@ -7803,7 +7604,7 @@
 </p:sld>
 </file>
 
-<file path=ppt/slides/slide22.xml><?xml version="1.0" encoding="utf-8"?>
+<file path=ppt/slides/slide24.xml><?xml version="1.0" encoding="utf-8"?>
 <p:sld xmlns:a="http://schemas.openxmlformats.org/drawingml/2006/main" xmlns:r="http://schemas.openxmlformats.org/officeDocument/2006/relationships" xmlns:p="http://schemas.openxmlformats.org/presentationml/2006/main">
   <p:cSld>
     <p:spTree>
@@ -7854,7 +7655,7 @@
 </p:sld>
 </file>
 
-<file path=ppt/slides/slide23.xml><?xml version="1.0" encoding="utf-8"?>
+<file path=ppt/slides/slide25.xml><?xml version="1.0" encoding="utf-8"?>
 <p:sld xmlns:a="http://schemas.openxmlformats.org/drawingml/2006/main" xmlns:r="http://schemas.openxmlformats.org/officeDocument/2006/relationships" xmlns:p="http://schemas.openxmlformats.org/presentationml/2006/main">
   <p:cSld>
     <p:spTree>
@@ -8188,7 +7989,7 @@
 </p:sld>
 </file>
 
-<file path=ppt/slides/slide24.xml><?xml version="1.0" encoding="utf-8"?>
+<file path=ppt/slides/slide26.xml><?xml version="1.0" encoding="utf-8"?>
 <p:sld xmlns:a="http://schemas.openxmlformats.org/drawingml/2006/main" xmlns:r="http://schemas.openxmlformats.org/officeDocument/2006/relationships" xmlns:p="http://schemas.openxmlformats.org/presentationml/2006/main">
   <p:cSld>
     <p:spTree>
@@ -8970,7 +8771,7 @@
           <a:p>
             <a:r>
               <a:rPr lang="en-US" dirty="0" smtClean="0"/>
-              <a:t>Products: Practical Problems</a:t>
+              <a:t>Tools</a:t>
             </a:r>
             <a:endParaRPr lang="en-US" dirty="0"/>
           </a:p>
@@ -8992,74 +8793,64 @@
           <a:lstStyle/>
           <a:p>
             <a:r>
-              <a:rPr lang="en-US" sz="2200" dirty="0" smtClean="0"/>
-              <a:t>Apps on your mobile device, your most visited websites.</a:t>
-            </a:r>
-          </a:p>
-          <a:p>
-            <a:r>
-              <a:rPr lang="en-US" sz="2200" dirty="0" smtClean="0"/>
-              <a:t>Trending apps on Google Play, App Store.</a:t>
-            </a:r>
-          </a:p>
-          <a:p>
-            <a:r>
-              <a:rPr lang="en-US" sz="2200" dirty="0" smtClean="0"/>
-              <a:t>Open source software.</a:t>
-            </a:r>
-          </a:p>
-          <a:p>
-            <a:r>
-              <a:rPr lang="en-US" sz="2200" dirty="0" smtClean="0"/>
-              <a:t>Your daily job responsibilities.</a:t>
-            </a:r>
-          </a:p>
-          <a:p>
-            <a:r>
-              <a:rPr lang="en-US" sz="2200" dirty="0" smtClean="0"/>
-              <a:t>Your current </a:t>
-            </a:r>
-            <a:r>
-              <a:rPr lang="en-US" sz="2200" i="1" dirty="0" smtClean="0">
-                <a:solidFill>
-                  <a:srgbClr val="C00000"/>
-                </a:solidFill>
+              <a:rPr lang="en-US" sz="2400" dirty="0" smtClean="0">
+                <a:hlinkClick r:id="rId2"/>
               </a:rPr>
-              <a:t>obstacles</a:t>
-            </a:r>
-            <a:r>
-              <a:rPr lang="en-US" sz="2200" dirty="0" smtClean="0"/>
-              <a:t>?</a:t>
-            </a:r>
-          </a:p>
-        </p:txBody>
-      </p:sp>
-      <p:pic>
-        <p:nvPicPr>
-          <p:cNvPr id="4" name="Picture 2" descr="https://bizflyportal.mediacdn.vn/thumb_wm/1000,100/bizflyportal/techblog/app/so-sanh-google-play-va-app-store-1-16819015419562.jpg"/>
-          <p:cNvPicPr>
-            <a:picLocks noChangeAspect="1" noChangeArrowheads="1"/>
-          </p:cNvPicPr>
-          <p:nvPr/>
-        </p:nvPicPr>
-        <p:blipFill>
-          <a:blip r:embed="rId3" cstate="print"/>
-          <a:srcRect/>
-          <a:stretch>
-            <a:fillRect/>
-          </a:stretch>
-        </p:blipFill>
-        <p:spPr bwMode="auto">
-          <a:xfrm>
-            <a:off x="2743200" y="3962400"/>
-            <a:ext cx="3810000" cy="2141220"/>
-          </a:xfrm>
-          <a:prstGeom prst="rect">
-            <a:avLst/>
-          </a:prstGeom>
-          <a:noFill/>
-        </p:spPr>
-      </p:pic>
+              <a:t>https://chatgpt.com/</a:t>
+            </a:r>
+          </a:p>
+          <a:p>
+            <a:r>
+              <a:rPr lang="en-US" sz="2400" dirty="0" smtClean="0">
+                <a:hlinkClick r:id="rId2"/>
+              </a:rPr>
+              <a:t>https://www.trendhunter.com/</a:t>
+            </a:r>
+          </a:p>
+          <a:p>
+            <a:r>
+              <a:rPr lang="en-US" sz="2400" dirty="0" smtClean="0">
+                <a:hlinkClick r:id="rId2"/>
+              </a:rPr>
+              <a:t>https://miro.com/</a:t>
+            </a:r>
+            <a:endParaRPr lang="en-US" sz="2400" dirty="0" smtClean="0"/>
+          </a:p>
+          <a:p>
+            <a:r>
+              <a:rPr lang="en-US" sz="2400" dirty="0" smtClean="0">
+                <a:hlinkClick r:id="rId3"/>
+              </a:rPr>
+              <a:t>https://www.figma.com/figjam/</a:t>
+            </a:r>
+            <a:endParaRPr lang="en-US" sz="2400" dirty="0" smtClean="0"/>
+          </a:p>
+          <a:p>
+            <a:r>
+              <a:rPr lang="en-US" sz="2400" dirty="0" smtClean="0">
+                <a:hlinkClick r:id="rId4"/>
+              </a:rPr>
+              <a:t>https://www.notion.com/</a:t>
+            </a:r>
+            <a:endParaRPr lang="en-US" sz="2400" dirty="0" smtClean="0"/>
+          </a:p>
+          <a:p>
+            <a:r>
+              <a:rPr lang="en-US" sz="2400" dirty="0" smtClean="0">
+                <a:hlinkClick r:id="rId5"/>
+              </a:rPr>
+              <a:t>https://workspace.google.com/products/docs/</a:t>
+            </a:r>
+            <a:endParaRPr lang="en-US" sz="2400" dirty="0" smtClean="0"/>
+          </a:p>
+          <a:p>
+            <a:endParaRPr lang="en-US" sz="2400" dirty="0" smtClean="0"/>
+          </a:p>
+          <a:p>
+            <a:endParaRPr lang="en-US" sz="2400" dirty="0"/>
+          </a:p>
+        </p:txBody>
+      </p:sp>
     </p:spTree>
   </p:cSld>
   <p:clrMapOvr>
@@ -9102,7 +8893,7 @@
           <a:p>
             <a:r>
               <a:rPr lang="en-US" dirty="0" smtClean="0"/>
-              <a:t>2026 Project Ideas</a:t>
+              <a:t>Products: Practical Problems</a:t>
             </a:r>
             <a:endParaRPr lang="en-US" dirty="0"/>
           </a:p>
@@ -9124,44 +8915,74 @@
           <a:lstStyle/>
           <a:p>
             <a:r>
-              <a:rPr lang="en-US" dirty="0" smtClean="0"/>
-              <a:t>OCR with LLM-Based </a:t>
-            </a:r>
-            <a:r>
-              <a:rPr lang="en-US" dirty="0" smtClean="0"/>
-              <a:t>Agents.</a:t>
-            </a:r>
-            <a:endParaRPr lang="en-US" dirty="0" smtClean="0"/>
-          </a:p>
-          <a:p>
-            <a:r>
-              <a:rPr lang="en-US" dirty="0" smtClean="0"/>
-              <a:t>Document </a:t>
-            </a:r>
-            <a:r>
-              <a:rPr lang="en-US" dirty="0" err="1" smtClean="0"/>
-              <a:t>Autocompletion</a:t>
-            </a:r>
-            <a:r>
-              <a:rPr lang="en-US" dirty="0" smtClean="0"/>
-              <a:t> with Templates and LLM-Based </a:t>
-            </a:r>
-            <a:r>
-              <a:rPr lang="en-US" dirty="0" smtClean="0"/>
-              <a:t>Agents. (Conga </a:t>
-            </a:r>
-            <a:r>
-              <a:rPr lang="en-US" dirty="0" err="1" smtClean="0"/>
-              <a:t>Salesforce</a:t>
-            </a:r>
-            <a:r>
-              <a:rPr lang="en-US" dirty="0" smtClean="0"/>
-              <a:t>)</a:t>
-            </a:r>
-            <a:endParaRPr lang="en-US" dirty="0"/>
-          </a:p>
-        </p:txBody>
-      </p:sp>
+              <a:rPr lang="en-US" sz="2200" dirty="0" smtClean="0"/>
+              <a:t>Apps on your mobile device, your most visited websites.</a:t>
+            </a:r>
+          </a:p>
+          <a:p>
+            <a:r>
+              <a:rPr lang="en-US" sz="2200" dirty="0" smtClean="0"/>
+              <a:t>Trending apps on Google Play, App Store.</a:t>
+            </a:r>
+          </a:p>
+          <a:p>
+            <a:r>
+              <a:rPr lang="en-US" sz="2200" dirty="0" smtClean="0"/>
+              <a:t>Open source software.</a:t>
+            </a:r>
+          </a:p>
+          <a:p>
+            <a:r>
+              <a:rPr lang="en-US" sz="2200" dirty="0" smtClean="0"/>
+              <a:t>Your daily job responsibilities.</a:t>
+            </a:r>
+          </a:p>
+          <a:p>
+            <a:r>
+              <a:rPr lang="en-US" sz="2200" dirty="0" smtClean="0"/>
+              <a:t>Your current </a:t>
+            </a:r>
+            <a:r>
+              <a:rPr lang="en-US" sz="2200" i="1" dirty="0" smtClean="0">
+                <a:solidFill>
+                  <a:srgbClr val="C00000"/>
+                </a:solidFill>
+              </a:rPr>
+              <a:t>obstacles</a:t>
+            </a:r>
+            <a:r>
+              <a:rPr lang="en-US" sz="2200" dirty="0" smtClean="0"/>
+              <a:t>?</a:t>
+            </a:r>
+          </a:p>
+        </p:txBody>
+      </p:sp>
+      <p:pic>
+        <p:nvPicPr>
+          <p:cNvPr id="4" name="Picture 2" descr="https://bizflyportal.mediacdn.vn/thumb_wm/1000,100/bizflyportal/techblog/app/so-sanh-google-play-va-app-store-1-16819015419562.jpg"/>
+          <p:cNvPicPr>
+            <a:picLocks noChangeAspect="1" noChangeArrowheads="1"/>
+          </p:cNvPicPr>
+          <p:nvPr/>
+        </p:nvPicPr>
+        <p:blipFill>
+          <a:blip r:embed="rId3" cstate="print"/>
+          <a:srcRect/>
+          <a:stretch>
+            <a:fillRect/>
+          </a:stretch>
+        </p:blipFill>
+        <p:spPr bwMode="auto">
+          <a:xfrm>
+            <a:off x="2743200" y="3962400"/>
+            <a:ext cx="3810000" cy="2141220"/>
+          </a:xfrm>
+          <a:prstGeom prst="rect">
+            <a:avLst/>
+          </a:prstGeom>
+          <a:noFill/>
+        </p:spPr>
+      </p:pic>
     </p:spTree>
   </p:cSld>
   <p:clrMapOvr>
@@ -9204,7 +9025,7 @@
           <a:p>
             <a:r>
               <a:rPr lang="en-US" dirty="0" smtClean="0"/>
-              <a:t>Evaluating the Project Ideas</a:t>
+              <a:t>2026 Project Ideas</a:t>
             </a:r>
             <a:endParaRPr lang="en-US" dirty="0"/>
           </a:p>
@@ -9226,87 +9047,38 @@
           <a:lstStyle/>
           <a:p>
             <a:r>
-              <a:rPr lang="en-US" sz="2000" dirty="0" smtClean="0"/>
-              <a:t>Project Origins? Sponsor? Client?</a:t>
-            </a:r>
-          </a:p>
-          <a:p>
-            <a:pPr lvl="1"/>
-            <a:r>
-              <a:rPr lang="en-US" sz="1800" dirty="0" smtClean="0"/>
-              <a:t>Name, address, phone number?</a:t>
-            </a:r>
-          </a:p>
-          <a:p>
-            <a:r>
-              <a:rPr lang="en-US" sz="2000" dirty="0" smtClean="0"/>
-              <a:t>Budget?</a:t>
-            </a:r>
-          </a:p>
-          <a:p>
-            <a:r>
-              <a:rPr lang="en-US" sz="2000" dirty="0" smtClean="0"/>
-              <a:t>Problems?</a:t>
-            </a:r>
-          </a:p>
-          <a:p>
-            <a:r>
-              <a:rPr lang="en-US" sz="2000" dirty="0" smtClean="0"/>
-              <a:t>Problem Relevance?</a:t>
-            </a:r>
-          </a:p>
-          <a:p>
-            <a:pPr lvl="1"/>
-            <a:r>
-              <a:rPr lang="en-US" sz="1800" dirty="0" smtClean="0"/>
-              <a:t>Competitors? Similar products? Business goals?</a:t>
-            </a:r>
-          </a:p>
-          <a:p>
-            <a:pPr lvl="1"/>
-            <a:r>
-              <a:rPr lang="en-US" sz="1800" dirty="0" smtClean="0"/>
-              <a:t>Product purchased by yourself?</a:t>
-            </a:r>
-          </a:p>
-          <a:p>
-            <a:pPr lvl="1"/>
-            <a:r>
-              <a:rPr lang="en-US" sz="1800" dirty="0" smtClean="0"/>
-              <a:t>Related work? Evaluation?</a:t>
-            </a:r>
-          </a:p>
-          <a:p>
-            <a:r>
-              <a:rPr lang="en-US" sz="2000" dirty="0" smtClean="0"/>
-              <a:t>Stakeholders?</a:t>
-            </a:r>
-          </a:p>
-          <a:p>
-            <a:pPr lvl="1"/>
-            <a:r>
-              <a:rPr lang="en-US" sz="1800" dirty="0" smtClean="0"/>
-              <a:t>Can you meet with them or reach an agreement?</a:t>
-            </a:r>
-          </a:p>
-          <a:p>
-            <a:r>
-              <a:rPr lang="en-US" sz="2000" dirty="0" smtClean="0"/>
-              <a:t>Business Use Cases?</a:t>
-            </a:r>
-          </a:p>
-          <a:p>
-            <a:r>
-              <a:rPr lang="en-US" sz="2000" dirty="0" smtClean="0"/>
-              <a:t>Time? Cost? Feasibility? Risks?</a:t>
-            </a:r>
-            <a:endParaRPr lang="en-US" sz="2000" dirty="0"/>
+              <a:rPr lang="en-US" dirty="0" smtClean="0"/>
+              <a:t>OCR with LLM-Based Agents.</a:t>
+            </a:r>
+          </a:p>
+          <a:p>
+            <a:r>
+              <a:rPr lang="en-US" dirty="0" smtClean="0"/>
+              <a:t>Document </a:t>
+            </a:r>
+            <a:r>
+              <a:rPr lang="en-US" dirty="0" err="1" smtClean="0"/>
+              <a:t>Autocompletion</a:t>
+            </a:r>
+            <a:r>
+              <a:rPr lang="en-US" dirty="0" smtClean="0"/>
+              <a:t> with Templates and LLM-Based Agents. (Conga </a:t>
+            </a:r>
+            <a:r>
+              <a:rPr lang="en-US" dirty="0" err="1" smtClean="0"/>
+              <a:t>Salesforce</a:t>
+            </a:r>
+            <a:r>
+              <a:rPr lang="en-US" dirty="0" smtClean="0"/>
+              <a:t>)</a:t>
+            </a:r>
+            <a:endParaRPr lang="en-US" dirty="0"/>
           </a:p>
         </p:txBody>
       </p:sp>
       <p:pic>
         <p:nvPicPr>
-          <p:cNvPr id="5" name="Picture 3"/>
+          <p:cNvPr id="6" name="Picture 2" descr="https://ideascale.com/wp-content/uploads/2015/02/Innovation-Leadership.png"/>
           <p:cNvPicPr>
             <a:picLocks noChangeAspect="1" noChangeArrowheads="1"/>
           </p:cNvPicPr>
@@ -9321,19 +9093,13 @@
         </p:blipFill>
         <p:spPr bwMode="auto">
           <a:xfrm>
-            <a:off x="6248400" y="2065020"/>
-            <a:ext cx="2103120" cy="2735580"/>
+            <a:off x="3276600" y="3886200"/>
+            <a:ext cx="1905000" cy="1905000"/>
           </a:xfrm>
           <a:prstGeom prst="rect">
             <a:avLst/>
           </a:prstGeom>
           <a:noFill/>
-          <a:ln w="9525">
-            <a:noFill/>
-            <a:miter lim="800000"/>
-            <a:headEnd/>
-            <a:tailEnd/>
-          </a:ln>
         </p:spPr>
       </p:pic>
     </p:spTree>

--- a/Software Project Management/03. Software Project Initiation.pptx
+++ b/Software Project Management/03. Software Project Initiation.pptx
@@ -24,12 +24,12 @@
     <p:sldId id="892" r:id="rId12"/>
     <p:sldId id="893" r:id="rId13"/>
     <p:sldId id="894" r:id="rId14"/>
-    <p:sldId id="895" r:id="rId15"/>
-    <p:sldId id="896" r:id="rId16"/>
-    <p:sldId id="899" r:id="rId17"/>
-    <p:sldId id="897" r:id="rId18"/>
-    <p:sldId id="886" r:id="rId19"/>
-    <p:sldId id="874" r:id="rId20"/>
+    <p:sldId id="901" r:id="rId15"/>
+    <p:sldId id="895" r:id="rId16"/>
+    <p:sldId id="896" r:id="rId17"/>
+    <p:sldId id="899" r:id="rId18"/>
+    <p:sldId id="897" r:id="rId19"/>
+    <p:sldId id="900" r:id="rId20"/>
     <p:sldId id="842" r:id="rId21"/>
     <p:sldId id="875" r:id="rId22"/>
     <p:sldId id="876" r:id="rId23"/>
@@ -251,7 +251,7 @@
             <a:fld id="{8FCF70C7-1A17-4B8F-8E82-A20E29AAAC58}" type="datetimeFigureOut">
               <a:rPr lang="en-US" smtClean="0"/>
               <a:pPr/>
-              <a:t>7/3/2026</a:t>
+              <a:t>7/5/2026</a:t>
             </a:fld>
             <a:endParaRPr lang="en-US" dirty="0"/>
           </a:p>
@@ -413,7 +413,7 @@
             <a:fld id="{B972150E-24DE-4D23-AF8D-CF01896B0C83}" type="datetimeFigureOut">
               <a:rPr lang="en-US" smtClean="0"/>
               <a:pPr/>
-              <a:t>7/3/2026</a:t>
+              <a:t>7/5/2026</a:t>
             </a:fld>
             <a:endParaRPr lang="en-US" dirty="0"/>
           </a:p>
@@ -1116,7 +1116,7 @@
               <a:pPr>
                 <a:defRPr/>
               </a:pPr>
-              <a:t>7/3/2026</a:t>
+              <a:t>7/5/2026</a:t>
             </a:fld>
             <a:endParaRPr lang="en-US" dirty="0"/>
           </a:p>
@@ -1308,7 +1308,7 @@
               <a:pPr>
                 <a:defRPr/>
               </a:pPr>
-              <a:t>7/3/2026</a:t>
+              <a:t>7/5/2026</a:t>
             </a:fld>
             <a:endParaRPr lang="en-US" dirty="0"/>
           </a:p>
@@ -1510,7 +1510,7 @@
               <a:pPr>
                 <a:defRPr/>
               </a:pPr>
-              <a:t>7/3/2026</a:t>
+              <a:t>7/5/2026</a:t>
             </a:fld>
             <a:endParaRPr lang="en-US" dirty="0"/>
           </a:p>
@@ -1702,7 +1702,7 @@
               <a:pPr>
                 <a:defRPr/>
               </a:pPr>
-              <a:t>7/3/2026</a:t>
+              <a:t>7/5/2026</a:t>
             </a:fld>
             <a:endParaRPr lang="en-US" dirty="0"/>
           </a:p>
@@ -1970,7 +1970,7 @@
               <a:pPr>
                 <a:defRPr/>
               </a:pPr>
-              <a:t>7/3/2026</a:t>
+              <a:t>7/5/2026</a:t>
             </a:fld>
             <a:endParaRPr lang="en-US" dirty="0"/>
           </a:p>
@@ -2280,7 +2280,7 @@
               <a:pPr>
                 <a:defRPr/>
               </a:pPr>
-              <a:t>7/3/2026</a:t>
+              <a:t>7/5/2026</a:t>
             </a:fld>
             <a:endParaRPr lang="en-US" dirty="0"/>
           </a:p>
@@ -2724,7 +2724,7 @@
               <a:pPr>
                 <a:defRPr/>
               </a:pPr>
-              <a:t>7/3/2026</a:t>
+              <a:t>7/5/2026</a:t>
             </a:fld>
             <a:endParaRPr lang="en-US" dirty="0"/>
           </a:p>
@@ -2864,7 +2864,7 @@
               <a:pPr>
                 <a:defRPr/>
               </a:pPr>
-              <a:t>7/3/2026</a:t>
+              <a:t>7/5/2026</a:t>
             </a:fld>
             <a:endParaRPr lang="en-US" dirty="0"/>
           </a:p>
@@ -2981,7 +2981,7 @@
               <a:pPr>
                 <a:defRPr/>
               </a:pPr>
-              <a:t>7/3/2026</a:t>
+              <a:t>7/5/2026</a:t>
             </a:fld>
             <a:endParaRPr lang="en-US" dirty="0"/>
           </a:p>
@@ -3280,7 +3280,7 @@
               <a:pPr>
                 <a:defRPr/>
               </a:pPr>
-              <a:t>7/3/2026</a:t>
+              <a:t>7/5/2026</a:t>
             </a:fld>
             <a:endParaRPr lang="en-US" dirty="0"/>
           </a:p>
@@ -3558,7 +3558,7 @@
               <a:pPr>
                 <a:defRPr/>
               </a:pPr>
-              <a:t>7/3/2026</a:t>
+              <a:t>7/5/2026</a:t>
             </a:fld>
             <a:endParaRPr lang="en-US" dirty="0"/>
           </a:p>
@@ -3806,7 +3806,7 @@
               <a:pPr>
                 <a:defRPr/>
               </a:pPr>
-              <a:t>7/3/2026</a:t>
+              <a:t>7/5/2026</a:t>
             </a:fld>
             <a:endParaRPr lang="en-US" dirty="0"/>
           </a:p>
@@ -4719,11 +4719,7 @@
           <a:p>
             <a:r>
               <a:rPr lang="en-US" dirty="0" smtClean="0"/>
-              <a:t>Selecting </a:t>
-            </a:r>
-            <a:r>
-              <a:rPr lang="en-US" dirty="0" smtClean="0"/>
-              <a:t>Evaluation Criteria and Evaluators</a:t>
+              <a:t>Selecting Evaluation Criteria and Evaluators</a:t>
             </a:r>
             <a:endParaRPr lang="en-US" dirty="0"/>
           </a:p>
@@ -4748,7 +4744,6 @@
               <a:rPr lang="en-US" dirty="0" smtClean="0"/>
               <a:t>Criteria</a:t>
             </a:r>
-            <a:endParaRPr lang="en-US" dirty="0" smtClean="0"/>
           </a:p>
           <a:p>
             <a:pPr lvl="1"/>
@@ -4860,11 +4855,7 @@
           <a:p>
             <a:r>
               <a:rPr lang="en-US" dirty="0" smtClean="0"/>
-              <a:t>Evaluating </a:t>
-            </a:r>
-            <a:r>
-              <a:rPr lang="en-US" dirty="0" smtClean="0"/>
-              <a:t>Criteria</a:t>
+              <a:t>Evaluating Criteria</a:t>
             </a:r>
             <a:endParaRPr lang="en-US" dirty="0"/>
           </a:p>
@@ -4899,19 +4890,7 @@
           <a:p>
             <a:r>
               <a:rPr lang="en-US" sz="2400" dirty="0" smtClean="0"/>
-              <a:t>Search extensively, </a:t>
-            </a:r>
-            <a:r>
-              <a:rPr lang="en-US" sz="2400" dirty="0" smtClean="0"/>
-              <a:t>and critique </a:t>
-            </a:r>
-            <a:r>
-              <a:rPr lang="en-US" sz="2400" dirty="0" smtClean="0"/>
-              <a:t>these </a:t>
-            </a:r>
-            <a:r>
-              <a:rPr lang="en-US" sz="2400" dirty="0" smtClean="0"/>
-              <a:t>criteria…</a:t>
+              <a:t>Search extensively, and critique these criteria…</a:t>
             </a:r>
             <a:endParaRPr lang="en-US" sz="2400" dirty="0"/>
           </a:p>
@@ -4985,11 +4964,7 @@
           <a:p>
             <a:r>
               <a:rPr lang="en-US" dirty="0" smtClean="0"/>
-              <a:t>Evaluating </a:t>
-            </a:r>
-            <a:r>
-              <a:rPr lang="en-US" dirty="0" smtClean="0"/>
-              <a:t>Project Proposal</a:t>
+              <a:t>Evaluating Project Proposal</a:t>
             </a:r>
             <a:endParaRPr lang="en-US" dirty="0"/>
           </a:p>
@@ -5011,42 +4986,72 @@
           <a:lstStyle/>
           <a:p>
             <a:r>
-              <a:rPr lang="en-US" sz="2400" dirty="0" smtClean="0"/>
-              <a:t>Evaluate [software project proposal.pdf] using </a:t>
-            </a:r>
-            <a:r>
-              <a:rPr lang="en-US" sz="2400" dirty="0" smtClean="0"/>
-              <a:t>these </a:t>
-            </a:r>
-            <a:r>
-              <a:rPr lang="en-US" sz="2400" dirty="0" smtClean="0"/>
-              <a:t>criteria:</a:t>
-            </a:r>
-          </a:p>
-          <a:p>
-            <a:r>
-              <a:rPr lang="en-US" sz="2400" dirty="0" smtClean="0"/>
-              <a:t>Search extensively, then evaluate…</a:t>
-            </a:r>
-          </a:p>
-          <a:p>
-            <a:r>
-              <a:rPr lang="en-US" sz="2400" dirty="0" smtClean="0"/>
-              <a:t>Search extensively, </a:t>
-            </a:r>
-            <a:r>
-              <a:rPr lang="en-US" sz="2400" dirty="0" smtClean="0"/>
-              <a:t>then critique </a:t>
-            </a:r>
-            <a:r>
-              <a:rPr lang="en-US" sz="2400" dirty="0" smtClean="0"/>
-              <a:t>[software project proposal.pdf]</a:t>
-            </a:r>
-            <a:r>
-              <a:rPr lang="en-US" sz="2400" dirty="0" smtClean="0"/>
-              <a:t>…</a:t>
-            </a:r>
-            <a:endParaRPr lang="en-US" sz="2400" dirty="0"/>
+              <a:rPr lang="en-US" sz="2000" dirty="0" smtClean="0"/>
+              <a:t>Evaluate </a:t>
+            </a:r>
+            <a:r>
+              <a:rPr lang="en-US" sz="2000" dirty="0" smtClean="0"/>
+              <a:t>[proposal.pdf</a:t>
+            </a:r>
+            <a:r>
+              <a:rPr lang="en-US" sz="2000" dirty="0" smtClean="0"/>
+              <a:t>] using these criteria:</a:t>
+            </a:r>
+          </a:p>
+          <a:p>
+            <a:r>
+              <a:rPr lang="en-US" sz="2000" dirty="0" smtClean="0"/>
+              <a:t>Search extensively, then </a:t>
+            </a:r>
+            <a:r>
+              <a:rPr lang="en-US" sz="2000" dirty="0" smtClean="0"/>
+              <a:t>evaluate the proposal.</a:t>
+            </a:r>
+            <a:endParaRPr lang="en-US" sz="2000" dirty="0" smtClean="0"/>
+          </a:p>
+          <a:p>
+            <a:r>
+              <a:rPr lang="en-US" sz="2000" dirty="0" smtClean="0"/>
+              <a:t>Search extensively, then </a:t>
+            </a:r>
+            <a:r>
+              <a:rPr lang="en-US" sz="2000" dirty="0" smtClean="0"/>
+              <a:t>critique the proposal.</a:t>
+            </a:r>
+            <a:endParaRPr lang="en-US" sz="2000" dirty="0" smtClean="0"/>
+          </a:p>
+          <a:p>
+            <a:r>
+              <a:rPr lang="en-US" sz="2000" dirty="0" smtClean="0"/>
+              <a:t>Conduct an extensive search of </a:t>
+            </a:r>
+            <a:r>
+              <a:rPr lang="en-US" sz="2000" dirty="0" smtClean="0"/>
+              <a:t>competitors' solutions, </a:t>
+            </a:r>
+            <a:r>
+              <a:rPr lang="en-US" sz="2000" dirty="0" smtClean="0"/>
+              <a:t>then critique the proposal.</a:t>
+            </a:r>
+            <a:endParaRPr lang="en-US" sz="2000" dirty="0" smtClean="0"/>
+          </a:p>
+          <a:p>
+            <a:r>
+              <a:rPr lang="en-US" sz="2000" dirty="0" smtClean="0"/>
+              <a:t>Search </a:t>
+            </a:r>
+            <a:r>
+              <a:rPr lang="en-US" sz="2000" dirty="0" smtClean="0"/>
+              <a:t>extensively for existing solutions that can be combined to form a solution to the </a:t>
+            </a:r>
+            <a:r>
+              <a:rPr lang="en-US" sz="2000" dirty="0" smtClean="0"/>
+              <a:t>problem, </a:t>
+            </a:r>
+            <a:r>
+              <a:rPr lang="en-US" sz="2000" dirty="0" smtClean="0"/>
+              <a:t>then critique the proposal.</a:t>
+            </a:r>
           </a:p>
         </p:txBody>
       </p:sp>
@@ -5067,7 +5072,7 @@
         </p:blipFill>
         <p:spPr bwMode="auto">
           <a:xfrm>
-            <a:off x="2971800" y="3962400"/>
+            <a:off x="2971800" y="4350222"/>
             <a:ext cx="3630222" cy="1745778"/>
           </a:xfrm>
           <a:prstGeom prst="rect">
@@ -5118,6 +5123,97 @@
           <a:p>
             <a:r>
               <a:rPr lang="en-US" dirty="0" smtClean="0"/>
+              <a:t>Finalizing </a:t>
+            </a:r>
+            <a:r>
+              <a:rPr lang="en-US" dirty="0" smtClean="0"/>
+              <a:t>Project Proposal</a:t>
+            </a:r>
+            <a:endParaRPr lang="en-US" dirty="0"/>
+          </a:p>
+        </p:txBody>
+      </p:sp>
+      <p:pic>
+        <p:nvPicPr>
+          <p:cNvPr id="8" name="Picture 1"/>
+          <p:cNvPicPr>
+            <a:picLocks noChangeAspect="1" noChangeArrowheads="1"/>
+          </p:cNvPicPr>
+          <p:nvPr/>
+        </p:nvPicPr>
+        <p:blipFill>
+          <a:blip r:embed="rId2" cstate="print"/>
+          <a:srcRect/>
+          <a:stretch>
+            <a:fillRect/>
+          </a:stretch>
+        </p:blipFill>
+        <p:spPr bwMode="auto">
+          <a:xfrm>
+            <a:off x="3124200" y="2415540"/>
+            <a:ext cx="2400300" cy="2461260"/>
+          </a:xfrm>
+          <a:prstGeom prst="rect">
+            <a:avLst/>
+          </a:prstGeom>
+          <a:noFill/>
+          <a:ln w="9525">
+            <a:noFill/>
+            <a:miter lim="800000"/>
+            <a:headEnd/>
+            <a:tailEnd/>
+          </a:ln>
+        </p:spPr>
+      </p:pic>
+    </p:spTree>
+  </p:cSld>
+  <p:clrMapOvr>
+    <a:masterClrMapping/>
+  </p:clrMapOvr>
+  <p:timing>
+    <p:tnLst>
+      <p:par>
+        <p:cTn id="1" dur="indefinite" restart="never" nodeType="tmRoot"/>
+      </p:par>
+    </p:tnLst>
+  </p:timing>
+</p:sld>
+</file>
+
+<file path=ppt/slides/slide15.xml><?xml version="1.0" encoding="utf-8"?>
+<p:sld xmlns:a="http://schemas.openxmlformats.org/drawingml/2006/main" xmlns:r="http://schemas.openxmlformats.org/officeDocument/2006/relationships" xmlns:p="http://schemas.openxmlformats.org/presentationml/2006/main">
+  <p:cSld>
+    <p:spTree>
+      <p:nvGrpSpPr>
+        <p:cNvPr id="1" name=""/>
+        <p:cNvGrpSpPr/>
+        <p:nvPr/>
+      </p:nvGrpSpPr>
+      <p:grpSpPr>
+        <a:xfrm>
+          <a:off x="0" y="0"/>
+          <a:ext cx="0" cy="0"/>
+          <a:chOff x="0" y="0"/>
+          <a:chExt cx="0" cy="0"/>
+        </a:xfrm>
+      </p:grpSpPr>
+      <p:sp>
+        <p:nvSpPr>
+          <p:cNvPr id="2" name="Title 1"/>
+          <p:cNvSpPr>
+            <a:spLocks noGrp="1"/>
+          </p:cNvSpPr>
+          <p:nvPr>
+            <p:ph type="title"/>
+          </p:nvPr>
+        </p:nvSpPr>
+        <p:spPr/>
+        <p:txBody>
+          <a:bodyPr/>
+          <a:lstStyle/>
+          <a:p>
+            <a:r>
+              <a:rPr lang="en-US" dirty="0" smtClean="0"/>
               <a:t>Prepare Project Vision and Scope</a:t>
             </a:r>
             <a:endParaRPr lang="en-US" dirty="0"/>
@@ -5254,7 +5350,7 @@
 </p:sld>
 </file>
 
-<file path=ppt/slides/slide15.xml><?xml version="1.0" encoding="utf-8"?>
+<file path=ppt/slides/slide16.xml><?xml version="1.0" encoding="utf-8"?>
 <p:sld xmlns:a="http://schemas.openxmlformats.org/drawingml/2006/main" xmlns:r="http://schemas.openxmlformats.org/officeDocument/2006/relationships" xmlns:p="http://schemas.openxmlformats.org/presentationml/2006/main">
   <p:cSld>
     <p:spTree>
@@ -5467,7 +5563,7 @@
 </p:sld>
 </file>
 
-<file path=ppt/slides/slide16.xml><?xml version="1.0" encoding="utf-8"?>
+<file path=ppt/slides/slide17.xml><?xml version="1.0" encoding="utf-8"?>
 <p:sld xmlns:a="http://schemas.openxmlformats.org/drawingml/2006/main" xmlns:r="http://schemas.openxmlformats.org/officeDocument/2006/relationships" xmlns:p="http://schemas.openxmlformats.org/presentationml/2006/main">
   <p:cSld>
     <p:spTree>
@@ -5501,7 +5597,15 @@
           <a:p>
             <a:r>
               <a:rPr lang="en-US" dirty="0" smtClean="0"/>
-              <a:t>Prepare a Product Backlog</a:t>
+              <a:t>Prepare </a:t>
+            </a:r>
+            <a:r>
+              <a:rPr lang="en-US" dirty="0" smtClean="0"/>
+              <a:t>a Partial </a:t>
+            </a:r>
+            <a:r>
+              <a:rPr lang="en-US" dirty="0" smtClean="0"/>
+              <a:t>Product Backlog</a:t>
             </a:r>
             <a:endParaRPr lang="en-US" dirty="0"/>
           </a:p>
@@ -5736,7 +5840,7 @@
 </p:sld>
 </file>
 
-<file path=ppt/slides/slide17.xml><?xml version="1.0" encoding="utf-8"?>
+<file path=ppt/slides/slide18.xml><?xml version="1.0" encoding="utf-8"?>
 <p:sld xmlns:a="http://schemas.openxmlformats.org/drawingml/2006/main" xmlns:r="http://schemas.openxmlformats.org/officeDocument/2006/relationships" xmlns:p="http://schemas.openxmlformats.org/presentationml/2006/main">
   <p:cSld>
     <p:spTree>
@@ -6018,93 +6122,6 @@
   <p:clrMapOvr>
     <a:masterClrMapping/>
   </p:clrMapOvr>
-</p:sld>
-</file>
-
-<file path=ppt/slides/slide18.xml><?xml version="1.0" encoding="utf-8"?>
-<p:sld xmlns:a="http://schemas.openxmlformats.org/drawingml/2006/main" xmlns:r="http://schemas.openxmlformats.org/officeDocument/2006/relationships" xmlns:p="http://schemas.openxmlformats.org/presentationml/2006/main">
-  <p:cSld>
-    <p:spTree>
-      <p:nvGrpSpPr>
-        <p:cNvPr id="1" name=""/>
-        <p:cNvGrpSpPr/>
-        <p:nvPr/>
-      </p:nvGrpSpPr>
-      <p:grpSpPr>
-        <a:xfrm>
-          <a:off x="0" y="0"/>
-          <a:ext cx="0" cy="0"/>
-          <a:chOff x="0" y="0"/>
-          <a:chExt cx="0" cy="0"/>
-        </a:xfrm>
-      </p:grpSpPr>
-      <p:sp>
-        <p:nvSpPr>
-          <p:cNvPr id="2" name="Title 1"/>
-          <p:cNvSpPr>
-            <a:spLocks noGrp="1"/>
-          </p:cNvSpPr>
-          <p:nvPr>
-            <p:ph type="title"/>
-          </p:nvPr>
-        </p:nvSpPr>
-        <p:spPr/>
-        <p:txBody>
-          <a:bodyPr/>
-          <a:lstStyle/>
-          <a:p>
-            <a:r>
-              <a:rPr lang="en-US" dirty="0" smtClean="0"/>
-              <a:t>Finalizing Team Project Idea</a:t>
-            </a:r>
-            <a:endParaRPr lang="en-US" dirty="0"/>
-          </a:p>
-        </p:txBody>
-      </p:sp>
-      <p:pic>
-        <p:nvPicPr>
-          <p:cNvPr id="8" name="Picture 1"/>
-          <p:cNvPicPr>
-            <a:picLocks noChangeAspect="1" noChangeArrowheads="1"/>
-          </p:cNvPicPr>
-          <p:nvPr/>
-        </p:nvPicPr>
-        <p:blipFill>
-          <a:blip r:embed="rId2" cstate="print"/>
-          <a:srcRect/>
-          <a:stretch>
-            <a:fillRect/>
-          </a:stretch>
-        </p:blipFill>
-        <p:spPr bwMode="auto">
-          <a:xfrm>
-            <a:off x="3124200" y="2415540"/>
-            <a:ext cx="2400300" cy="2461260"/>
-          </a:xfrm>
-          <a:prstGeom prst="rect">
-            <a:avLst/>
-          </a:prstGeom>
-          <a:noFill/>
-          <a:ln w="9525">
-            <a:noFill/>
-            <a:miter lim="800000"/>
-            <a:headEnd/>
-            <a:tailEnd/>
-          </a:ln>
-        </p:spPr>
-      </p:pic>
-    </p:spTree>
-  </p:cSld>
-  <p:clrMapOvr>
-    <a:masterClrMapping/>
-  </p:clrMapOvr>
-  <p:timing>
-    <p:tnLst>
-      <p:par>
-        <p:cTn id="1" dur="indefinite" restart="never" nodeType="tmRoot"/>
-      </p:par>
-    </p:tnLst>
-  </p:timing>
 </p:sld>
 </file>
 
@@ -6484,7 +6501,11 @@
             </a:pPr>
             <a:r>
               <a:rPr lang="en-US" sz="2200" dirty="0" smtClean="0"/>
-              <a:t>To create an </a:t>
+              <a:t>To </a:t>
+            </a:r>
+            <a:r>
+              <a:rPr lang="en-US" sz="2200" dirty="0" smtClean="0"/>
+              <a:t>create and evaluate a </a:t>
             </a:r>
             <a:r>
               <a:rPr lang="en-US" sz="2200" i="1" dirty="0" smtClean="0">
@@ -6492,12 +6513,13 @@
                   <a:srgbClr val="C00000"/>
                 </a:solidFill>
               </a:rPr>
-              <a:t>executive summary document</a:t>
+              <a:t>project proposal</a:t>
             </a:r>
             <a:r>
               <a:rPr lang="en-US" sz="2200" dirty="0" smtClean="0"/>
               <a:t>.</a:t>
             </a:r>
+            <a:endParaRPr lang="en-US" sz="2200" dirty="0" smtClean="0"/>
           </a:p>
           <a:p>
             <a:pPr marL="457200" indent="-457200">
@@ -8167,8 +8189,9 @@
             </a:pPr>
             <a:r>
               <a:rPr lang="en-US" sz="2400" dirty="0" smtClean="0"/>
-              <a:t>Executive summary.</a:t>
-            </a:r>
+              <a:t>Project proposal.</a:t>
+            </a:r>
+            <a:endParaRPr lang="en-US" sz="2400" dirty="0" smtClean="0"/>
           </a:p>
           <a:p>
             <a:pPr marL="571500" indent="-571500">

--- a/Software Project Management/03. Software Project Initiation.pptx
+++ b/Software Project Management/03. Software Project Initiation.pptx
@@ -5,10 +5,10 @@
     <p:sldMasterId id="2147483708" r:id="rId1"/>
   </p:sldMasterIdLst>
   <p:notesMasterIdLst>
-    <p:notesMasterId r:id="rId28"/>
+    <p:notesMasterId r:id="rId27"/>
   </p:notesMasterIdLst>
   <p:handoutMasterIdLst>
-    <p:handoutMasterId r:id="rId29"/>
+    <p:handoutMasterId r:id="rId28"/>
   </p:handoutMasterIdLst>
   <p:sldIdLst>
     <p:sldId id="256" r:id="rId2"/>
@@ -26,17 +26,16 @@
     <p:sldId id="894" r:id="rId14"/>
     <p:sldId id="901" r:id="rId15"/>
     <p:sldId id="895" r:id="rId16"/>
-    <p:sldId id="896" r:id="rId17"/>
-    <p:sldId id="899" r:id="rId18"/>
-    <p:sldId id="897" r:id="rId19"/>
-    <p:sldId id="900" r:id="rId20"/>
-    <p:sldId id="842" r:id="rId21"/>
-    <p:sldId id="875" r:id="rId22"/>
-    <p:sldId id="876" r:id="rId23"/>
-    <p:sldId id="877" r:id="rId24"/>
-    <p:sldId id="843" r:id="rId25"/>
-    <p:sldId id="830" r:id="rId26"/>
-    <p:sldId id="343" r:id="rId27"/>
+    <p:sldId id="875" r:id="rId17"/>
+    <p:sldId id="876" r:id="rId18"/>
+    <p:sldId id="877" r:id="rId19"/>
+    <p:sldId id="843" r:id="rId20"/>
+    <p:sldId id="906" r:id="rId21"/>
+    <p:sldId id="907" r:id="rId22"/>
+    <p:sldId id="904" r:id="rId23"/>
+    <p:sldId id="909" r:id="rId24"/>
+    <p:sldId id="908" r:id="rId25"/>
+    <p:sldId id="343" r:id="rId26"/>
   </p:sldIdLst>
   <p:sldSz cx="9144000" cy="6858000" type="screen4x3"/>
   <p:notesSz cx="6858000" cy="9144000"/>
@@ -251,7 +250,7 @@
             <a:fld id="{8FCF70C7-1A17-4B8F-8E82-A20E29AAAC58}" type="datetimeFigureOut">
               <a:rPr lang="en-US" smtClean="0"/>
               <a:pPr/>
-              <a:t>7/5/2026</a:t>
+              <a:t>7/11/2026</a:t>
             </a:fld>
             <a:endParaRPr lang="en-US" dirty="0"/>
           </a:p>
@@ -413,7 +412,7 @@
             <a:fld id="{B972150E-24DE-4D23-AF8D-CF01896B0C83}" type="datetimeFigureOut">
               <a:rPr lang="en-US" smtClean="0"/>
               <a:pPr/>
-              <a:t>7/5/2026</a:t>
+              <a:t>7/11/2026</a:t>
             </a:fld>
             <a:endParaRPr lang="en-US" dirty="0"/>
           </a:p>
@@ -829,7 +828,7 @@
             <a:fld id="{758E95B1-5ED0-4005-B293-784E4C93134E}" type="slidenum">
               <a:rPr lang="en-US" smtClean="0"/>
               <a:pPr/>
-              <a:t>21</a:t>
+              <a:t>16</a:t>
             </a:fld>
             <a:endParaRPr lang="en-US" dirty="0"/>
           </a:p>
@@ -911,7 +910,7 @@
             <a:fld id="{758E95B1-5ED0-4005-B293-784E4C93134E}" type="slidenum">
               <a:rPr lang="en-US" smtClean="0"/>
               <a:pPr/>
-              <a:t>22</a:t>
+              <a:t>17</a:t>
             </a:fld>
             <a:endParaRPr lang="en-US" dirty="0"/>
           </a:p>
@@ -1116,7 +1115,7 @@
               <a:pPr>
                 <a:defRPr/>
               </a:pPr>
-              <a:t>7/5/2026</a:t>
+              <a:t>7/11/2026</a:t>
             </a:fld>
             <a:endParaRPr lang="en-US" dirty="0"/>
           </a:p>
@@ -1308,7 +1307,7 @@
               <a:pPr>
                 <a:defRPr/>
               </a:pPr>
-              <a:t>7/5/2026</a:t>
+              <a:t>7/11/2026</a:t>
             </a:fld>
             <a:endParaRPr lang="en-US" dirty="0"/>
           </a:p>
@@ -1510,7 +1509,7 @@
               <a:pPr>
                 <a:defRPr/>
               </a:pPr>
-              <a:t>7/5/2026</a:t>
+              <a:t>7/11/2026</a:t>
             </a:fld>
             <a:endParaRPr lang="en-US" dirty="0"/>
           </a:p>
@@ -1702,7 +1701,7 @@
               <a:pPr>
                 <a:defRPr/>
               </a:pPr>
-              <a:t>7/5/2026</a:t>
+              <a:t>7/11/2026</a:t>
             </a:fld>
             <a:endParaRPr lang="en-US" dirty="0"/>
           </a:p>
@@ -1970,7 +1969,7 @@
               <a:pPr>
                 <a:defRPr/>
               </a:pPr>
-              <a:t>7/5/2026</a:t>
+              <a:t>7/11/2026</a:t>
             </a:fld>
             <a:endParaRPr lang="en-US" dirty="0"/>
           </a:p>
@@ -2280,7 +2279,7 @@
               <a:pPr>
                 <a:defRPr/>
               </a:pPr>
-              <a:t>7/5/2026</a:t>
+              <a:t>7/11/2026</a:t>
             </a:fld>
             <a:endParaRPr lang="en-US" dirty="0"/>
           </a:p>
@@ -2724,7 +2723,7 @@
               <a:pPr>
                 <a:defRPr/>
               </a:pPr>
-              <a:t>7/5/2026</a:t>
+              <a:t>7/11/2026</a:t>
             </a:fld>
             <a:endParaRPr lang="en-US" dirty="0"/>
           </a:p>
@@ -2864,7 +2863,7 @@
               <a:pPr>
                 <a:defRPr/>
               </a:pPr>
-              <a:t>7/5/2026</a:t>
+              <a:t>7/11/2026</a:t>
             </a:fld>
             <a:endParaRPr lang="en-US" dirty="0"/>
           </a:p>
@@ -2981,7 +2980,7 @@
               <a:pPr>
                 <a:defRPr/>
               </a:pPr>
-              <a:t>7/5/2026</a:t>
+              <a:t>7/11/2026</a:t>
             </a:fld>
             <a:endParaRPr lang="en-US" dirty="0"/>
           </a:p>
@@ -3280,7 +3279,7 @@
               <a:pPr>
                 <a:defRPr/>
               </a:pPr>
-              <a:t>7/5/2026</a:t>
+              <a:t>7/11/2026</a:t>
             </a:fld>
             <a:endParaRPr lang="en-US" dirty="0"/>
           </a:p>
@@ -3558,7 +3557,7 @@
               <a:pPr>
                 <a:defRPr/>
               </a:pPr>
-              <a:t>7/5/2026</a:t>
+              <a:t>7/11/2026</a:t>
             </a:fld>
             <a:endParaRPr lang="en-US" dirty="0"/>
           </a:p>
@@ -3806,7 +3805,7 @@
               <a:pPr>
                 <a:defRPr/>
               </a:pPr>
-              <a:t>7/5/2026</a:t>
+              <a:t>7/11/2026</a:t>
             </a:fld>
             <a:endParaRPr lang="en-US" dirty="0"/>
           </a:p>
@@ -4987,70 +4986,31 @@
           <a:p>
             <a:r>
               <a:rPr lang="en-US" sz="2000" dirty="0" smtClean="0"/>
-              <a:t>Evaluate </a:t>
-            </a:r>
+              <a:t>Evaluate [proposal.pdf] using these criteria:</a:t>
+            </a:r>
+          </a:p>
+          <a:p>
             <a:r>
               <a:rPr lang="en-US" sz="2000" dirty="0" smtClean="0"/>
-              <a:t>[proposal.pdf</a:t>
-            </a:r>
+              <a:t>Search extensively, then evaluate the proposal.</a:t>
+            </a:r>
+          </a:p>
+          <a:p>
             <a:r>
               <a:rPr lang="en-US" sz="2000" dirty="0" smtClean="0"/>
-              <a:t>] using these criteria:</a:t>
+              <a:t>Search extensively, then critique the proposal.</a:t>
             </a:r>
           </a:p>
           <a:p>
             <a:r>
               <a:rPr lang="en-US" sz="2000" dirty="0" smtClean="0"/>
-              <a:t>Search extensively, then </a:t>
-            </a:r>
+              <a:t>Conduct an extensive search of competitors' solutions, then critique the proposal.</a:t>
+            </a:r>
+          </a:p>
+          <a:p>
             <a:r>
               <a:rPr lang="en-US" sz="2000" dirty="0" smtClean="0"/>
-              <a:t>evaluate the proposal.</a:t>
-            </a:r>
-            <a:endParaRPr lang="en-US" sz="2000" dirty="0" smtClean="0"/>
-          </a:p>
-          <a:p>
-            <a:r>
-              <a:rPr lang="en-US" sz="2000" dirty="0" smtClean="0"/>
-              <a:t>Search extensively, then </a:t>
-            </a:r>
-            <a:r>
-              <a:rPr lang="en-US" sz="2000" dirty="0" smtClean="0"/>
-              <a:t>critique the proposal.</a:t>
-            </a:r>
-            <a:endParaRPr lang="en-US" sz="2000" dirty="0" smtClean="0"/>
-          </a:p>
-          <a:p>
-            <a:r>
-              <a:rPr lang="en-US" sz="2000" dirty="0" smtClean="0"/>
-              <a:t>Conduct an extensive search of </a:t>
-            </a:r>
-            <a:r>
-              <a:rPr lang="en-US" sz="2000" dirty="0" smtClean="0"/>
-              <a:t>competitors' solutions, </a:t>
-            </a:r>
-            <a:r>
-              <a:rPr lang="en-US" sz="2000" dirty="0" smtClean="0"/>
-              <a:t>then critique the proposal.</a:t>
-            </a:r>
-            <a:endParaRPr lang="en-US" sz="2000" dirty="0" smtClean="0"/>
-          </a:p>
-          <a:p>
-            <a:r>
-              <a:rPr lang="en-US" sz="2000" dirty="0" smtClean="0"/>
-              <a:t>Search </a:t>
-            </a:r>
-            <a:r>
-              <a:rPr lang="en-US" sz="2000" dirty="0" smtClean="0"/>
-              <a:t>extensively for existing solutions that can be combined to form a solution to the </a:t>
-            </a:r>
-            <a:r>
-              <a:rPr lang="en-US" sz="2000" dirty="0" smtClean="0"/>
-              <a:t>problem, </a:t>
-            </a:r>
-            <a:r>
-              <a:rPr lang="en-US" sz="2000" dirty="0" smtClean="0"/>
-              <a:t>then critique the proposal.</a:t>
+              <a:t>Search extensively for existing solutions that can be combined to form a solution to the problem, then critique the proposal.</a:t>
             </a:r>
           </a:p>
         </p:txBody>
@@ -5123,11 +5083,7 @@
           <a:p>
             <a:r>
               <a:rPr lang="en-US" dirty="0" smtClean="0"/>
-              <a:t>Finalizing </a:t>
-            </a:r>
-            <a:r>
-              <a:rPr lang="en-US" dirty="0" smtClean="0"/>
-              <a:t>Project Proposal</a:t>
+              <a:t>Finalizing Project Proposal</a:t>
             </a:r>
             <a:endParaRPr lang="en-US" dirty="0"/>
           </a:p>
@@ -5237,13 +5193,37 @@
           <a:p>
             <a:r>
               <a:rPr lang="en-US" sz="2400" dirty="0" smtClean="0"/>
-              <a:t>Current state, workflows, features.</a:t>
-            </a:r>
-          </a:p>
-          <a:p>
+              <a:t>Current state, (manual) </a:t>
+            </a:r>
+            <a:r>
+              <a:rPr lang="en-US" sz="2400" i="1" dirty="0" smtClean="0">
+                <a:solidFill>
+                  <a:srgbClr val="C00000"/>
+                </a:solidFill>
+              </a:rPr>
+              <a:t>workflows</a:t>
+            </a:r>
             <a:r>
               <a:rPr lang="en-US" sz="2400" dirty="0" smtClean="0"/>
-              <a:t>Future state, workflows, features.</a:t>
+              <a:t>, features.</a:t>
+            </a:r>
+          </a:p>
+          <a:p>
+            <a:r>
+              <a:rPr lang="en-US" sz="2400" dirty="0" smtClean="0"/>
+              <a:t>Future state, </a:t>
+            </a:r>
+            <a:r>
+              <a:rPr lang="en-US" sz="2400" i="1" dirty="0" smtClean="0">
+                <a:solidFill>
+                  <a:srgbClr val="C00000"/>
+                </a:solidFill>
+              </a:rPr>
+              <a:t>workflows</a:t>
+            </a:r>
+            <a:r>
+              <a:rPr lang="en-US" sz="2400" dirty="0" smtClean="0"/>
+              <a:t>, features.</a:t>
             </a:r>
             <a:endParaRPr lang="en-US" sz="2400" dirty="0"/>
           </a:p>
@@ -5266,7 +5246,7 @@
         </p:blipFill>
         <p:spPr bwMode="auto">
           <a:xfrm>
-            <a:off x="6477000" y="1828800"/>
+            <a:off x="3352800" y="3048000"/>
             <a:ext cx="1714500" cy="2286000"/>
           </a:xfrm>
           <a:prstGeom prst="rect">
@@ -5298,7 +5278,7 @@
         </p:blipFill>
         <p:spPr bwMode="auto">
           <a:xfrm>
-            <a:off x="7086600" y="2057400"/>
+            <a:off x="3962400" y="3276600"/>
             <a:ext cx="1567542" cy="1755648"/>
           </a:xfrm>
           <a:prstGeom prst="rect">
@@ -5315,8 +5295,8 @@
         </p:nvSpPr>
         <p:spPr>
           <a:xfrm>
-            <a:off x="6553200" y="4724400"/>
-            <a:ext cx="2209800" cy="646331"/>
+            <a:off x="2819400" y="5638800"/>
+            <a:ext cx="3124200" cy="430887"/>
           </a:xfrm>
           <a:prstGeom prst="rect">
             <a:avLst/>
@@ -5329,7 +5309,7 @@
           <a:lstStyle/>
           <a:p>
             <a:r>
-              <a:rPr lang="en-US" i="1" dirty="0" smtClean="0">
+              <a:rPr lang="en-US" sz="2200" i="1" dirty="0" smtClean="0">
                 <a:solidFill>
                   <a:srgbClr val="C00000"/>
                 </a:solidFill>
@@ -5338,7 +5318,7 @@
               </a:rPr>
               <a:t>User Requirements</a:t>
             </a:r>
-            <a:endParaRPr lang="en-US" dirty="0"/>
+            <a:endParaRPr lang="en-US" sz="2200" dirty="0"/>
           </a:p>
         </p:txBody>
       </p:sp>
@@ -5369,7 +5349,1239 @@
       </p:grpSpPr>
       <p:pic>
         <p:nvPicPr>
-          <p:cNvPr id="116738" name="Picture 2" descr="https://media.licdn.com/mpr/mpr/shrinknp_400_400/p/8/005/06e/2c4/3ea6fad.jpg"/>
+          <p:cNvPr id="9" name="Picture 2"/>
+          <p:cNvPicPr>
+            <a:picLocks noChangeAspect="1" noChangeArrowheads="1"/>
+          </p:cNvPicPr>
+          <p:nvPr/>
+        </p:nvPicPr>
+        <p:blipFill>
+          <a:blip r:embed="rId3" cstate="print"/>
+          <a:srcRect/>
+          <a:stretch>
+            <a:fillRect/>
+          </a:stretch>
+        </p:blipFill>
+        <p:spPr bwMode="auto">
+          <a:xfrm>
+            <a:off x="4914900" y="2438400"/>
+            <a:ext cx="4076700" cy="3686175"/>
+          </a:xfrm>
+          <a:prstGeom prst="rect">
+            <a:avLst/>
+          </a:prstGeom>
+          <a:noFill/>
+          <a:ln w="9525">
+            <a:noFill/>
+            <a:miter lim="800000"/>
+            <a:headEnd/>
+            <a:tailEnd/>
+          </a:ln>
+        </p:spPr>
+      </p:pic>
+      <p:sp>
+        <p:nvSpPr>
+          <p:cNvPr id="2" name="Title 1"/>
+          <p:cNvSpPr>
+            <a:spLocks noGrp="1"/>
+          </p:cNvSpPr>
+          <p:nvPr>
+            <p:ph type="title"/>
+          </p:nvPr>
+        </p:nvSpPr>
+        <p:spPr>
+          <a:xfrm>
+            <a:off x="457200" y="76200"/>
+            <a:ext cx="8229600" cy="1143000"/>
+          </a:xfrm>
+        </p:spPr>
+        <p:txBody>
+          <a:bodyPr/>
+          <a:lstStyle/>
+          <a:p>
+            <a:pPr lvl="0"/>
+            <a:r>
+              <a:rPr lang="en-US" dirty="0" smtClean="0"/>
+              <a:t>Project Charter</a:t>
+            </a:r>
+            <a:endParaRPr lang="en-US" dirty="0"/>
+          </a:p>
+        </p:txBody>
+      </p:sp>
+      <p:sp>
+        <p:nvSpPr>
+          <p:cNvPr id="12" name="Rectangle 11"/>
+          <p:cNvSpPr/>
+          <p:nvPr/>
+        </p:nvSpPr>
+        <p:spPr>
+          <a:xfrm>
+            <a:off x="304800" y="2362200"/>
+            <a:ext cx="5486400" cy="2739211"/>
+          </a:xfrm>
+          <a:prstGeom prst="rect">
+            <a:avLst/>
+          </a:prstGeom>
+        </p:spPr>
+        <p:txBody>
+          <a:bodyPr wrap="square">
+            <a:spAutoFit/>
+          </a:bodyPr>
+          <a:lstStyle/>
+          <a:p>
+            <a:pPr marL="514350" indent="-514350">
+              <a:buFont typeface="Arial" pitchFamily="34" charset="0"/>
+              <a:buChar char="•"/>
+            </a:pPr>
+            <a:r>
+              <a:rPr lang="en-US" sz="2000" dirty="0" smtClean="0">
+                <a:latin typeface="+mj-lt"/>
+              </a:rPr>
+              <a:t>The background, context, overview</a:t>
+            </a:r>
+            <a:endParaRPr lang="en-US" sz="2000" u="sng" dirty="0" smtClean="0">
+              <a:latin typeface="+mj-lt"/>
+            </a:endParaRPr>
+          </a:p>
+          <a:p>
+            <a:pPr marL="514350" indent="-514350">
+              <a:buFont typeface="Arial" pitchFamily="34" charset="0"/>
+              <a:buChar char="•"/>
+            </a:pPr>
+            <a:r>
+              <a:rPr lang="en-US" sz="2000" dirty="0" smtClean="0">
+                <a:latin typeface="+mj-lt"/>
+              </a:rPr>
+              <a:t>Project Management and Governance</a:t>
+            </a:r>
+          </a:p>
+          <a:p>
+            <a:pPr marL="971550" lvl="1" indent="-514350">
+              <a:buFont typeface="Wingdings" pitchFamily="2" charset="2"/>
+              <a:buChar char="v"/>
+            </a:pPr>
+            <a:r>
+              <a:rPr lang="en-US" sz="1600" dirty="0" smtClean="0">
+                <a:latin typeface="+mj-lt"/>
+              </a:rPr>
+              <a:t>Role/Name/Responsibilities</a:t>
+            </a:r>
+          </a:p>
+          <a:p>
+            <a:pPr marL="514350" indent="-514350">
+              <a:buFont typeface="Arial" pitchFamily="34" charset="0"/>
+              <a:buChar char="•"/>
+            </a:pPr>
+            <a:r>
+              <a:rPr lang="en-US" sz="2000" dirty="0" smtClean="0">
+                <a:latin typeface="+mj-lt"/>
+              </a:rPr>
+              <a:t>Project Facilities and Resources</a:t>
+            </a:r>
+          </a:p>
+          <a:p>
+            <a:pPr marL="514350" indent="-514350">
+              <a:buFont typeface="Arial" pitchFamily="34" charset="0"/>
+              <a:buChar char="•"/>
+            </a:pPr>
+            <a:r>
+              <a:rPr lang="en-US" sz="2000" dirty="0" smtClean="0">
+                <a:latin typeface="+mj-lt"/>
+              </a:rPr>
+              <a:t>Milestones.</a:t>
+            </a:r>
+          </a:p>
+          <a:p>
+            <a:pPr marL="514350" indent="-514350">
+              <a:buFont typeface="Arial" pitchFamily="34" charset="0"/>
+              <a:buChar char="•"/>
+            </a:pPr>
+            <a:r>
+              <a:rPr lang="en-US" sz="2000" dirty="0" smtClean="0">
+                <a:latin typeface="+mj-lt"/>
+              </a:rPr>
+              <a:t>Impact Analysis</a:t>
+            </a:r>
+          </a:p>
+          <a:p>
+            <a:pPr marL="971550" lvl="1" indent="-514350">
+              <a:buFont typeface="Wingdings" pitchFamily="2" charset="2"/>
+              <a:buChar char="v"/>
+            </a:pPr>
+            <a:r>
+              <a:rPr lang="en-US" sz="1600" dirty="0" smtClean="0">
+                <a:latin typeface="+mj-lt"/>
+              </a:rPr>
+              <a:t>Who? What?</a:t>
+            </a:r>
+          </a:p>
+          <a:p>
+            <a:pPr marL="514350" indent="-514350">
+              <a:buFont typeface="Arial" pitchFamily="34" charset="0"/>
+              <a:buChar char="•"/>
+            </a:pPr>
+            <a:r>
+              <a:rPr lang="en-US" sz="2000" dirty="0" smtClean="0">
+                <a:latin typeface="+mj-lt"/>
+              </a:rPr>
+              <a:t>Assumptions</a:t>
+            </a:r>
+          </a:p>
+          <a:p>
+            <a:pPr marL="514350" indent="-514350">
+              <a:buFont typeface="Arial" pitchFamily="34" charset="0"/>
+              <a:buChar char="•"/>
+            </a:pPr>
+            <a:r>
+              <a:rPr lang="en-US" sz="2000" dirty="0" smtClean="0">
+                <a:latin typeface="+mj-lt"/>
+              </a:rPr>
+              <a:t>Signatures</a:t>
+            </a:r>
+          </a:p>
+        </p:txBody>
+      </p:sp>
+      <p:sp>
+        <p:nvSpPr>
+          <p:cNvPr id="8" name="Rectangle 7"/>
+          <p:cNvSpPr/>
+          <p:nvPr/>
+        </p:nvSpPr>
+        <p:spPr>
+          <a:xfrm>
+            <a:off x="228600" y="1074003"/>
+            <a:ext cx="8610600" cy="1200329"/>
+          </a:xfrm>
+          <a:prstGeom prst="rect">
+            <a:avLst/>
+          </a:prstGeom>
+          <a:ln>
+            <a:noFill/>
+          </a:ln>
+        </p:spPr>
+        <p:style>
+          <a:lnRef idx="2">
+            <a:schemeClr val="dk1"/>
+          </a:lnRef>
+          <a:fillRef idx="1">
+            <a:schemeClr val="lt1"/>
+          </a:fillRef>
+          <a:effectRef idx="0">
+            <a:schemeClr val="dk1"/>
+          </a:effectRef>
+          <a:fontRef idx="minor">
+            <a:schemeClr val="dk1"/>
+          </a:fontRef>
+        </p:style>
+        <p:txBody>
+          <a:bodyPr wrap="square">
+            <a:spAutoFit/>
+          </a:bodyPr>
+          <a:lstStyle/>
+          <a:p>
+            <a:pPr algn="ctr">
+              <a:buNone/>
+            </a:pPr>
+            <a:r>
+              <a:rPr lang="en-US" sz="2400" dirty="0" smtClean="0">
+                <a:latin typeface="+mj-lt"/>
+              </a:rPr>
+              <a:t>A document that </a:t>
+            </a:r>
+            <a:r>
+              <a:rPr lang="en-US" sz="2400" u="sng" dirty="0" smtClean="0">
+                <a:latin typeface="+mj-lt"/>
+              </a:rPr>
+              <a:t>formally</a:t>
+            </a:r>
+            <a:r>
+              <a:rPr lang="en-US" sz="2400" dirty="0" smtClean="0">
+                <a:latin typeface="+mj-lt"/>
+              </a:rPr>
+              <a:t> </a:t>
+            </a:r>
+            <a:r>
+              <a:rPr lang="en-US" sz="2400" i="1" dirty="0" smtClean="0">
+                <a:solidFill>
+                  <a:srgbClr val="C00000"/>
+                </a:solidFill>
+                <a:latin typeface="+mj-lt"/>
+              </a:rPr>
+              <a:t>authorizes</a:t>
+            </a:r>
+            <a:r>
+              <a:rPr lang="en-US" sz="2400" dirty="0" smtClean="0">
+                <a:latin typeface="+mj-lt"/>
+              </a:rPr>
+              <a:t> a project or a phase and documenting </a:t>
+            </a:r>
+            <a:r>
+              <a:rPr lang="en-US" sz="2400" u="sng" dirty="0" smtClean="0">
+                <a:solidFill>
+                  <a:schemeClr val="tx1"/>
+                </a:solidFill>
+                <a:latin typeface="+mj-lt"/>
+              </a:rPr>
+              <a:t>initial requirements</a:t>
+            </a:r>
+            <a:r>
+              <a:rPr lang="en-US" sz="2400" dirty="0" smtClean="0">
+                <a:latin typeface="+mj-lt"/>
+              </a:rPr>
+              <a:t> that satisfy the stakeholder’s </a:t>
+            </a:r>
+            <a:r>
+              <a:rPr lang="en-US" sz="2400" u="sng" dirty="0" smtClean="0">
+                <a:latin typeface="+mj-lt"/>
+              </a:rPr>
+              <a:t>needs</a:t>
+            </a:r>
+            <a:r>
+              <a:rPr lang="en-US" sz="2400" dirty="0" smtClean="0">
+                <a:latin typeface="+mj-lt"/>
+              </a:rPr>
+              <a:t> and </a:t>
+            </a:r>
+            <a:r>
+              <a:rPr lang="en-US" sz="2400" u="sng" dirty="0" smtClean="0">
+                <a:latin typeface="+mj-lt"/>
+              </a:rPr>
+              <a:t>expectations</a:t>
+            </a:r>
+            <a:r>
+              <a:rPr lang="en-US" sz="2400" dirty="0" smtClean="0">
+                <a:latin typeface="+mj-lt"/>
+              </a:rPr>
+              <a:t>.</a:t>
+            </a:r>
+          </a:p>
+        </p:txBody>
+      </p:sp>
+    </p:spTree>
+  </p:cSld>
+  <p:clrMapOvr>
+    <a:masterClrMapping/>
+  </p:clrMapOvr>
+  <p:timing>
+    <p:tnLst>
+      <p:par>
+        <p:cTn id="1" dur="indefinite" restart="never" nodeType="tmRoot"/>
+      </p:par>
+    </p:tnLst>
+  </p:timing>
+</p:sld>
+</file>
+
+<file path=ppt/slides/slide17.xml><?xml version="1.0" encoding="utf-8"?>
+<p:sld xmlns:a="http://schemas.openxmlformats.org/drawingml/2006/main" xmlns:r="http://schemas.openxmlformats.org/officeDocument/2006/relationships" xmlns:p="http://schemas.openxmlformats.org/presentationml/2006/main">
+  <p:cSld>
+    <p:spTree>
+      <p:nvGrpSpPr>
+        <p:cNvPr id="1" name=""/>
+        <p:cNvGrpSpPr/>
+        <p:nvPr/>
+      </p:nvGrpSpPr>
+      <p:grpSpPr>
+        <a:xfrm>
+          <a:off x="0" y="0"/>
+          <a:ext cx="0" cy="0"/>
+          <a:chOff x="0" y="0"/>
+          <a:chExt cx="0" cy="0"/>
+        </a:xfrm>
+      </p:grpSpPr>
+      <p:sp>
+        <p:nvSpPr>
+          <p:cNvPr id="2" name="Title 1"/>
+          <p:cNvSpPr>
+            <a:spLocks noGrp="1"/>
+          </p:cNvSpPr>
+          <p:nvPr>
+            <p:ph type="title"/>
+          </p:nvPr>
+        </p:nvSpPr>
+        <p:spPr/>
+        <p:txBody>
+          <a:bodyPr/>
+          <a:lstStyle/>
+          <a:p>
+            <a:r>
+              <a:rPr lang="en-US" dirty="0" smtClean="0"/>
+              <a:t>Responsibility Assignment Matrix</a:t>
+            </a:r>
+            <a:endParaRPr lang="en-US" dirty="0"/>
+          </a:p>
+        </p:txBody>
+      </p:sp>
+      <p:sp>
+        <p:nvSpPr>
+          <p:cNvPr id="3" name="Content Placeholder 2"/>
+          <p:cNvSpPr>
+            <a:spLocks noGrp="1"/>
+          </p:cNvSpPr>
+          <p:nvPr>
+            <p:ph idx="1"/>
+          </p:nvPr>
+        </p:nvSpPr>
+        <p:spPr>
+          <a:xfrm>
+            <a:off x="457200" y="1600201"/>
+            <a:ext cx="8229600" cy="2362200"/>
+          </a:xfrm>
+        </p:spPr>
+        <p:txBody>
+          <a:bodyPr/>
+          <a:lstStyle/>
+          <a:p>
+            <a:r>
+              <a:rPr lang="en-US" sz="2200" dirty="0" smtClean="0"/>
+              <a:t>Responsibility Assignment Matrix (RAM), also known as </a:t>
+            </a:r>
+          </a:p>
+          <a:p>
+            <a:r>
+              <a:rPr lang="en-US" sz="2200" dirty="0" smtClean="0"/>
+              <a:t>RACI matrix (Responsible, Accountable, Consulted, and Informed matrix), or</a:t>
+            </a:r>
+          </a:p>
+          <a:p>
+            <a:r>
+              <a:rPr lang="en-US" sz="2200" dirty="0" smtClean="0"/>
+              <a:t>LRC (linear responsibility chart)</a:t>
+            </a:r>
+          </a:p>
+          <a:p>
+            <a:r>
+              <a:rPr lang="en-US" sz="2200" dirty="0" smtClean="0"/>
+              <a:t>describes the participation by various roles in completing tasks or deliverables for a project.</a:t>
+            </a:r>
+          </a:p>
+        </p:txBody>
+      </p:sp>
+      <p:pic>
+        <p:nvPicPr>
+          <p:cNvPr id="38914" name="Picture 2"/>
+          <p:cNvPicPr>
+            <a:picLocks noChangeAspect="1" noChangeArrowheads="1"/>
+          </p:cNvPicPr>
+          <p:nvPr/>
+        </p:nvPicPr>
+        <p:blipFill>
+          <a:blip r:embed="rId3" cstate="print"/>
+          <a:srcRect/>
+          <a:stretch>
+            <a:fillRect/>
+          </a:stretch>
+        </p:blipFill>
+        <p:spPr bwMode="auto">
+          <a:xfrm>
+            <a:off x="381000" y="4038600"/>
+            <a:ext cx="4417695" cy="2446020"/>
+          </a:xfrm>
+          <a:prstGeom prst="rect">
+            <a:avLst/>
+          </a:prstGeom>
+          <a:noFill/>
+          <a:ln w="9525">
+            <a:noFill/>
+            <a:miter lim="800000"/>
+            <a:headEnd/>
+            <a:tailEnd/>
+          </a:ln>
+        </p:spPr>
+      </p:pic>
+      <p:sp>
+        <p:nvSpPr>
+          <p:cNvPr id="5" name="TextBox 4"/>
+          <p:cNvSpPr txBox="1"/>
+          <p:nvPr/>
+        </p:nvSpPr>
+        <p:spPr>
+          <a:xfrm>
+            <a:off x="4901044" y="4495800"/>
+            <a:ext cx="4014355" cy="1785104"/>
+          </a:xfrm>
+          <a:prstGeom prst="rect">
+            <a:avLst/>
+          </a:prstGeom>
+          <a:noFill/>
+        </p:spPr>
+        <p:txBody>
+          <a:bodyPr wrap="square" rtlCol="0">
+            <a:spAutoFit/>
+          </a:bodyPr>
+          <a:lstStyle/>
+          <a:p>
+            <a:pPr marL="457200" indent="-457200">
+              <a:buFont typeface="Arial" pitchFamily="34" charset="0"/>
+              <a:buChar char="•"/>
+            </a:pPr>
+            <a:r>
+              <a:rPr lang="en-US" sz="2200" i="1" dirty="0" smtClean="0">
+                <a:solidFill>
+                  <a:srgbClr val="C00000"/>
+                </a:solidFill>
+                <a:latin typeface="+mj-lt"/>
+              </a:rPr>
+              <a:t>Responsibility</a:t>
+            </a:r>
+            <a:r>
+              <a:rPr lang="en-US" sz="2200" dirty="0" smtClean="0">
+                <a:latin typeface="+mj-lt"/>
+              </a:rPr>
+              <a:t> can be shared.</a:t>
+            </a:r>
+          </a:p>
+          <a:p>
+            <a:pPr marL="457200" indent="-457200">
+              <a:buFont typeface="Arial" pitchFamily="34" charset="0"/>
+              <a:buChar char="•"/>
+            </a:pPr>
+            <a:r>
+              <a:rPr lang="en-US" sz="2200" i="1" dirty="0" smtClean="0">
+                <a:solidFill>
+                  <a:srgbClr val="C00000"/>
+                </a:solidFill>
+                <a:latin typeface="+mj-lt"/>
+              </a:rPr>
+              <a:t>Accountability</a:t>
+            </a:r>
+            <a:r>
+              <a:rPr lang="en-US" sz="2200" dirty="0" smtClean="0">
+                <a:latin typeface="+mj-lt"/>
+              </a:rPr>
+              <a:t> cannot be shared. It is something you hold a person to only after a task is done </a:t>
+            </a:r>
+            <a:r>
+              <a:rPr lang="en-US" sz="2200" b="1" dirty="0" smtClean="0">
+                <a:latin typeface="+mj-lt"/>
+              </a:rPr>
+              <a:t>or not done</a:t>
+            </a:r>
+            <a:r>
+              <a:rPr lang="en-US" sz="2200" dirty="0" smtClean="0">
+                <a:latin typeface="+mj-lt"/>
+              </a:rPr>
+              <a:t>.</a:t>
+            </a:r>
+          </a:p>
+        </p:txBody>
+      </p:sp>
+      <p:sp>
+        <p:nvSpPr>
+          <p:cNvPr id="9" name="Rectangle 8"/>
+          <p:cNvSpPr/>
+          <p:nvPr/>
+        </p:nvSpPr>
+        <p:spPr>
+          <a:xfrm>
+            <a:off x="609600" y="5410200"/>
+            <a:ext cx="1066800" cy="307777"/>
+          </a:xfrm>
+          <a:prstGeom prst="rect">
+            <a:avLst/>
+          </a:prstGeom>
+          <a:solidFill>
+            <a:schemeClr val="bg1">
+              <a:lumMod val="95000"/>
+            </a:schemeClr>
+          </a:solidFill>
+        </p:spPr>
+        <p:txBody>
+          <a:bodyPr wrap="square">
+            <a:spAutoFit/>
+          </a:bodyPr>
+          <a:lstStyle/>
+          <a:p>
+            <a:pPr algn="ctr"/>
+            <a:r>
+              <a:rPr lang="en-US" sz="1400" b="1" dirty="0" smtClean="0">
+                <a:latin typeface="+mj-lt"/>
+              </a:rPr>
+              <a:t>Deliverable</a:t>
+            </a:r>
+            <a:endParaRPr lang="en-US" sz="1400" b="1" dirty="0">
+              <a:latin typeface="+mj-lt"/>
+            </a:endParaRPr>
+          </a:p>
+        </p:txBody>
+      </p:sp>
+    </p:spTree>
+  </p:cSld>
+  <p:clrMapOvr>
+    <a:masterClrMapping/>
+  </p:clrMapOvr>
+</p:sld>
+</file>
+
+<file path=ppt/slides/slide18.xml><?xml version="1.0" encoding="utf-8"?>
+<p:sld xmlns:a="http://schemas.openxmlformats.org/drawingml/2006/main" xmlns:r="http://schemas.openxmlformats.org/officeDocument/2006/relationships" xmlns:p="http://schemas.openxmlformats.org/presentationml/2006/main">
+  <p:cSld>
+    <p:spTree>
+      <p:nvGrpSpPr>
+        <p:cNvPr id="1" name=""/>
+        <p:cNvGrpSpPr/>
+        <p:nvPr/>
+      </p:nvGrpSpPr>
+      <p:grpSpPr>
+        <a:xfrm>
+          <a:off x="0" y="0"/>
+          <a:ext cx="0" cy="0"/>
+          <a:chOff x="0" y="0"/>
+          <a:chExt cx="0" cy="0"/>
+        </a:xfrm>
+      </p:grpSpPr>
+      <p:sp>
+        <p:nvSpPr>
+          <p:cNvPr id="2" name="Title 1"/>
+          <p:cNvSpPr>
+            <a:spLocks noGrp="1"/>
+          </p:cNvSpPr>
+          <p:nvPr>
+            <p:ph type="title"/>
+          </p:nvPr>
+        </p:nvSpPr>
+        <p:spPr/>
+        <p:txBody>
+          <a:bodyPr/>
+          <a:lstStyle/>
+          <a:p>
+            <a:r>
+              <a:rPr lang="en-US" dirty="0" smtClean="0"/>
+              <a:t>Checklist</a:t>
+            </a:r>
+            <a:endParaRPr lang="en-US" dirty="0"/>
+          </a:p>
+        </p:txBody>
+      </p:sp>
+      <p:sp>
+        <p:nvSpPr>
+          <p:cNvPr id="3" name="Content Placeholder 2"/>
+          <p:cNvSpPr>
+            <a:spLocks noGrp="1"/>
+          </p:cNvSpPr>
+          <p:nvPr>
+            <p:ph idx="1"/>
+          </p:nvPr>
+        </p:nvSpPr>
+        <p:spPr/>
+        <p:txBody>
+          <a:bodyPr/>
+          <a:lstStyle/>
+          <a:p>
+            <a:r>
+              <a:rPr lang="en-US" sz="2400" i="1" dirty="0" smtClean="0">
+                <a:solidFill>
+                  <a:srgbClr val="C00000"/>
+                </a:solidFill>
+              </a:rPr>
+              <a:t>Why</a:t>
+            </a:r>
+            <a:r>
+              <a:rPr lang="en-US" sz="2400" dirty="0" smtClean="0"/>
+              <a:t> this project?</a:t>
+            </a:r>
+          </a:p>
+          <a:p>
+            <a:r>
+              <a:rPr lang="en-US" sz="2400" dirty="0" smtClean="0"/>
+              <a:t>What are the </a:t>
+            </a:r>
+            <a:r>
+              <a:rPr lang="en-US" sz="2400" i="1" dirty="0" smtClean="0">
+                <a:solidFill>
+                  <a:srgbClr val="C00000"/>
+                </a:solidFill>
+              </a:rPr>
+              <a:t>problems</a:t>
+            </a:r>
+            <a:r>
+              <a:rPr lang="en-US" sz="2400" dirty="0" smtClean="0"/>
+              <a:t>?</a:t>
+            </a:r>
+          </a:p>
+          <a:p>
+            <a:r>
+              <a:rPr lang="en-US" sz="2400" dirty="0" smtClean="0"/>
+              <a:t>What are the </a:t>
+            </a:r>
+            <a:r>
+              <a:rPr lang="en-US" sz="2400" i="1" dirty="0" smtClean="0">
+                <a:solidFill>
+                  <a:srgbClr val="C00000"/>
+                </a:solidFill>
+              </a:rPr>
+              <a:t>deliverables</a:t>
+            </a:r>
+            <a:r>
+              <a:rPr lang="en-US" sz="2400" dirty="0" smtClean="0"/>
+              <a:t>?</a:t>
+            </a:r>
+          </a:p>
+          <a:p>
+            <a:r>
+              <a:rPr lang="en-US" sz="2400" i="1" dirty="0" smtClean="0">
+                <a:solidFill>
+                  <a:srgbClr val="C00000"/>
+                </a:solidFill>
+              </a:rPr>
+              <a:t>How</a:t>
+            </a:r>
+            <a:r>
+              <a:rPr lang="en-US" sz="2400" dirty="0" smtClean="0"/>
+              <a:t> will we solve the problems?</a:t>
+            </a:r>
+          </a:p>
+          <a:p>
+            <a:pPr lvl="1"/>
+            <a:r>
+              <a:rPr lang="en-US" sz="2000" i="1" dirty="0" smtClean="0">
+                <a:solidFill>
+                  <a:srgbClr val="C00000"/>
+                </a:solidFill>
+              </a:rPr>
+              <a:t>Technical</a:t>
+            </a:r>
+            <a:r>
+              <a:rPr lang="en-US" sz="2000" dirty="0" smtClean="0"/>
+              <a:t> aspects (High level solution)</a:t>
+            </a:r>
+          </a:p>
+          <a:p>
+            <a:pPr lvl="1"/>
+            <a:r>
+              <a:rPr lang="en-US" sz="2000" i="1" dirty="0" smtClean="0">
+                <a:solidFill>
+                  <a:srgbClr val="C00000"/>
+                </a:solidFill>
+              </a:rPr>
+              <a:t>Management</a:t>
+            </a:r>
+            <a:r>
+              <a:rPr lang="en-US" sz="2000" dirty="0" smtClean="0"/>
+              <a:t> aspects (Who is responsible for what?)</a:t>
+            </a:r>
+          </a:p>
+          <a:p>
+            <a:r>
+              <a:rPr lang="en-US" sz="2400" i="1" dirty="0" smtClean="0">
+                <a:solidFill>
+                  <a:srgbClr val="C00000"/>
+                </a:solidFill>
+              </a:rPr>
+              <a:t>When</a:t>
+            </a:r>
+            <a:r>
+              <a:rPr lang="en-US" sz="2400" dirty="0" smtClean="0"/>
+              <a:t> must we complete the project?</a:t>
+            </a:r>
+          </a:p>
+        </p:txBody>
+      </p:sp>
+      <p:pic>
+        <p:nvPicPr>
+          <p:cNvPr id="4" name="Picture 2" descr="https://www.articlelist.com/wp-content/uploads/2019/02/Best-questions-to-get-to-know-someone-better.jpg"/>
+          <p:cNvPicPr>
+            <a:picLocks noChangeAspect="1" noChangeArrowheads="1"/>
+          </p:cNvPicPr>
+          <p:nvPr/>
+        </p:nvPicPr>
+        <p:blipFill>
+          <a:blip r:embed="rId2" cstate="print"/>
+          <a:srcRect/>
+          <a:stretch>
+            <a:fillRect/>
+          </a:stretch>
+        </p:blipFill>
+        <p:spPr bwMode="auto">
+          <a:xfrm>
+            <a:off x="2895600" y="4724400"/>
+            <a:ext cx="3251200" cy="1625600"/>
+          </a:xfrm>
+          <a:prstGeom prst="rect">
+            <a:avLst/>
+          </a:prstGeom>
+          <a:noFill/>
+        </p:spPr>
+      </p:pic>
+    </p:spTree>
+  </p:cSld>
+  <p:clrMapOvr>
+    <a:masterClrMapping/>
+  </p:clrMapOvr>
+</p:sld>
+</file>
+
+<file path=ppt/slides/slide19.xml><?xml version="1.0" encoding="utf-8"?>
+<p:sld xmlns:a="http://schemas.openxmlformats.org/drawingml/2006/main" xmlns:r="http://schemas.openxmlformats.org/officeDocument/2006/relationships" xmlns:p="http://schemas.openxmlformats.org/presentationml/2006/main">
+  <p:cSld>
+    <p:spTree>
+      <p:nvGrpSpPr>
+        <p:cNvPr id="1" name=""/>
+        <p:cNvGrpSpPr/>
+        <p:nvPr/>
+      </p:nvGrpSpPr>
+      <p:grpSpPr>
+        <a:xfrm>
+          <a:off x="0" y="0"/>
+          <a:ext cx="0" cy="0"/>
+          <a:chOff x="0" y="0"/>
+          <a:chExt cx="0" cy="0"/>
+        </a:xfrm>
+      </p:grpSpPr>
+      <p:pic>
+        <p:nvPicPr>
+          <p:cNvPr id="4" name="Picture 2" descr="https://lh3.ggpht.com/1IfZLL2QDSjZ0wS7sUhaMlsAOS8BBzdR3wZ1WawgRn7KZAM8nEVZYMOUM-lqQb0ikIzp=w300"/>
+          <p:cNvPicPr>
+            <a:picLocks noChangeAspect="1" noChangeArrowheads="1"/>
+          </p:cNvPicPr>
+          <p:nvPr/>
+        </p:nvPicPr>
+        <p:blipFill>
+          <a:blip r:embed="rId2" cstate="print"/>
+          <a:srcRect/>
+          <a:stretch>
+            <a:fillRect/>
+          </a:stretch>
+        </p:blipFill>
+        <p:spPr bwMode="auto">
+          <a:xfrm>
+            <a:off x="3276600" y="1905000"/>
+            <a:ext cx="2857500" cy="2857500"/>
+          </a:xfrm>
+          <a:prstGeom prst="rect">
+            <a:avLst/>
+          </a:prstGeom>
+          <a:noFill/>
+        </p:spPr>
+      </p:pic>
+    </p:spTree>
+  </p:cSld>
+  <p:clrMapOvr>
+    <a:masterClrMapping/>
+  </p:clrMapOvr>
+</p:sld>
+</file>
+
+<file path=ppt/slides/slide2.xml><?xml version="1.0" encoding="utf-8"?>
+<p:sld xmlns:a="http://schemas.openxmlformats.org/drawingml/2006/main" xmlns:r="http://schemas.openxmlformats.org/officeDocument/2006/relationships" xmlns:p="http://schemas.openxmlformats.org/presentationml/2006/main">
+  <p:cSld>
+    <p:spTree>
+      <p:nvGrpSpPr>
+        <p:cNvPr id="1" name=""/>
+        <p:cNvGrpSpPr/>
+        <p:nvPr/>
+      </p:nvGrpSpPr>
+      <p:grpSpPr>
+        <a:xfrm>
+          <a:off x="0" y="0"/>
+          <a:ext cx="0" cy="0"/>
+          <a:chOff x="0" y="0"/>
+          <a:chExt cx="0" cy="0"/>
+        </a:xfrm>
+      </p:grpSpPr>
+      <p:sp>
+        <p:nvSpPr>
+          <p:cNvPr id="2" name="Title 1"/>
+          <p:cNvSpPr>
+            <a:spLocks noGrp="1"/>
+          </p:cNvSpPr>
+          <p:nvPr>
+            <p:ph type="title"/>
+          </p:nvPr>
+        </p:nvSpPr>
+        <p:spPr/>
+        <p:txBody>
+          <a:bodyPr/>
+          <a:lstStyle/>
+          <a:p>
+            <a:r>
+              <a:rPr lang="en-US" dirty="0" smtClean="0"/>
+              <a:t>Objectives</a:t>
+            </a:r>
+            <a:endParaRPr lang="en-US" dirty="0"/>
+          </a:p>
+        </p:txBody>
+      </p:sp>
+      <p:sp>
+        <p:nvSpPr>
+          <p:cNvPr id="3" name="Content Placeholder 2"/>
+          <p:cNvSpPr>
+            <a:spLocks noGrp="1"/>
+          </p:cNvSpPr>
+          <p:nvPr>
+            <p:ph idx="1"/>
+          </p:nvPr>
+        </p:nvSpPr>
+        <p:spPr>
+          <a:xfrm>
+            <a:off x="457200" y="1600200"/>
+            <a:ext cx="5562600" cy="4343400"/>
+          </a:xfrm>
+        </p:spPr>
+        <p:txBody>
+          <a:bodyPr/>
+          <a:lstStyle/>
+          <a:p>
+            <a:pPr marL="457200" indent="-457200">
+              <a:buFont typeface="Wingdings" pitchFamily="2" charset="2"/>
+              <a:buChar char="Ø"/>
+            </a:pPr>
+            <a:r>
+              <a:rPr lang="en-US" sz="2200" dirty="0" smtClean="0"/>
+              <a:t>To create and evaluate a </a:t>
+            </a:r>
+            <a:r>
+              <a:rPr lang="en-US" sz="2200" i="1" dirty="0" smtClean="0">
+                <a:solidFill>
+                  <a:srgbClr val="C00000"/>
+                </a:solidFill>
+              </a:rPr>
+              <a:t>project proposal</a:t>
+            </a:r>
+            <a:r>
+              <a:rPr lang="en-US" sz="2200" dirty="0" smtClean="0"/>
+              <a:t>.</a:t>
+            </a:r>
+          </a:p>
+          <a:p>
+            <a:pPr marL="457200" indent="-457200">
+              <a:buFont typeface="Wingdings" pitchFamily="2" charset="2"/>
+              <a:buChar char="Ø"/>
+            </a:pPr>
+            <a:r>
+              <a:rPr lang="en-US" sz="2200" dirty="0" smtClean="0"/>
+              <a:t>To create a </a:t>
+            </a:r>
+            <a:r>
+              <a:rPr lang="en-US" sz="2200" i="1" dirty="0" smtClean="0">
+                <a:solidFill>
+                  <a:srgbClr val="C00000"/>
+                </a:solidFill>
+              </a:rPr>
+              <a:t>project vision and scope document</a:t>
+            </a:r>
+            <a:r>
+              <a:rPr lang="en-US" sz="2200" dirty="0" smtClean="0"/>
+              <a:t>.</a:t>
+            </a:r>
+          </a:p>
+          <a:p>
+            <a:pPr marL="457200" indent="-457200">
+              <a:buFont typeface="Wingdings" pitchFamily="2" charset="2"/>
+              <a:buChar char="Ø"/>
+            </a:pPr>
+            <a:r>
+              <a:rPr lang="en-US" sz="2200" dirty="0" smtClean="0"/>
+              <a:t>To create a </a:t>
+            </a:r>
+            <a:r>
+              <a:rPr lang="en-US" sz="2200" i="1" dirty="0" smtClean="0">
+                <a:solidFill>
+                  <a:srgbClr val="C00000"/>
+                </a:solidFill>
+              </a:rPr>
+              <a:t>mockup</a:t>
+            </a:r>
+            <a:r>
+              <a:rPr lang="en-US" sz="2200" dirty="0" smtClean="0"/>
+              <a:t> and </a:t>
+            </a:r>
+            <a:r>
+              <a:rPr lang="en-US" sz="2200" i="1" dirty="0" smtClean="0">
+                <a:solidFill>
+                  <a:srgbClr val="C00000"/>
+                </a:solidFill>
+              </a:rPr>
+              <a:t>prototype</a:t>
+            </a:r>
+            <a:r>
+              <a:rPr lang="en-US" sz="2200" dirty="0" smtClean="0"/>
+              <a:t>.</a:t>
+            </a:r>
+            <a:endParaRPr lang="en-US" sz="2200" i="1" dirty="0" smtClean="0">
+              <a:solidFill>
+                <a:srgbClr val="C00000"/>
+              </a:solidFill>
+            </a:endParaRPr>
+          </a:p>
+          <a:p>
+            <a:pPr marL="457200" indent="-457200">
+              <a:buFont typeface="Wingdings" pitchFamily="2" charset="2"/>
+              <a:buChar char="Ø"/>
+            </a:pPr>
+            <a:r>
+              <a:rPr lang="en-US" sz="2200" dirty="0" smtClean="0"/>
+              <a:t>To create a </a:t>
+            </a:r>
+            <a:r>
+              <a:rPr lang="en-US" sz="2200" i="1" dirty="0" smtClean="0">
+                <a:solidFill>
+                  <a:srgbClr val="C00000"/>
+                </a:solidFill>
+              </a:rPr>
+              <a:t>software requirements specification</a:t>
+            </a:r>
+            <a:r>
+              <a:rPr lang="en-US" sz="2200" dirty="0" smtClean="0"/>
+              <a:t>.</a:t>
+            </a:r>
+            <a:endParaRPr lang="en-US" sz="2200" i="1" dirty="0" smtClean="0">
+              <a:solidFill>
+                <a:srgbClr val="C00000"/>
+              </a:solidFill>
+            </a:endParaRPr>
+          </a:p>
+          <a:p>
+            <a:pPr marL="457200" indent="-457200">
+              <a:buFont typeface="Wingdings" pitchFamily="2" charset="2"/>
+              <a:buChar char="Ø"/>
+            </a:pPr>
+            <a:r>
+              <a:rPr lang="en-US" sz="2200" dirty="0" smtClean="0"/>
+              <a:t>To create an </a:t>
+            </a:r>
+            <a:r>
+              <a:rPr lang="en-US" sz="2200" i="1" dirty="0" smtClean="0">
+                <a:solidFill>
+                  <a:srgbClr val="C00000"/>
+                </a:solidFill>
+              </a:rPr>
+              <a:t>architecture</a:t>
+            </a:r>
+            <a:r>
+              <a:rPr lang="en-US" sz="2200" dirty="0" smtClean="0"/>
+              <a:t>.</a:t>
+            </a:r>
+            <a:endParaRPr lang="en-US" sz="2200" i="1" dirty="0" smtClean="0">
+              <a:solidFill>
+                <a:srgbClr val="C00000"/>
+              </a:solidFill>
+            </a:endParaRPr>
+          </a:p>
+          <a:p>
+            <a:pPr marL="457200" indent="-457200">
+              <a:buFont typeface="Wingdings" pitchFamily="2" charset="2"/>
+              <a:buChar char="Ø"/>
+            </a:pPr>
+            <a:r>
+              <a:rPr lang="en-US" sz="2200" dirty="0" smtClean="0"/>
+              <a:t>To create a </a:t>
+            </a:r>
+            <a:r>
+              <a:rPr lang="en-US" sz="2200" i="1" dirty="0" smtClean="0">
+                <a:solidFill>
+                  <a:srgbClr val="C00000"/>
+                </a:solidFill>
+              </a:rPr>
+              <a:t>feasibility study report</a:t>
+            </a:r>
+            <a:r>
+              <a:rPr lang="en-US" sz="2200" dirty="0" smtClean="0"/>
+              <a:t>.</a:t>
+            </a:r>
+            <a:endParaRPr lang="en-US" sz="2200" i="1" dirty="0" smtClean="0">
+              <a:solidFill>
+                <a:srgbClr val="C00000"/>
+              </a:solidFill>
+            </a:endParaRPr>
+          </a:p>
+          <a:p>
+            <a:pPr marL="457200" indent="-457200">
+              <a:buFont typeface="Wingdings" pitchFamily="2" charset="2"/>
+              <a:buChar char="Ø"/>
+            </a:pPr>
+            <a:r>
+              <a:rPr lang="en-US" sz="2200" dirty="0" smtClean="0"/>
+              <a:t>To create a </a:t>
+            </a:r>
+            <a:r>
+              <a:rPr lang="en-US" sz="2200" i="1" dirty="0" smtClean="0">
+                <a:solidFill>
+                  <a:srgbClr val="C00000"/>
+                </a:solidFill>
+              </a:rPr>
+              <a:t>proof of concept</a:t>
+            </a:r>
+            <a:r>
+              <a:rPr lang="en-US" sz="2200" dirty="0" smtClean="0"/>
+              <a:t>.</a:t>
+            </a:r>
+            <a:endParaRPr lang="en-US" sz="2200" i="1" dirty="0" smtClean="0">
+              <a:solidFill>
+                <a:srgbClr val="C00000"/>
+              </a:solidFill>
+            </a:endParaRPr>
+          </a:p>
+          <a:p>
+            <a:pPr marL="457200" indent="-457200">
+              <a:buFont typeface="Wingdings" pitchFamily="2" charset="2"/>
+              <a:buChar char="Ø"/>
+            </a:pPr>
+            <a:r>
+              <a:rPr lang="en-US" sz="2200" dirty="0" smtClean="0"/>
+              <a:t>To create a </a:t>
+            </a:r>
+            <a:r>
+              <a:rPr lang="en-US" sz="2200" i="1" dirty="0" smtClean="0">
+                <a:solidFill>
+                  <a:srgbClr val="C00000"/>
+                </a:solidFill>
+              </a:rPr>
+              <a:t>project charter</a:t>
+            </a:r>
+            <a:r>
+              <a:rPr lang="en-US" sz="2200" dirty="0" smtClean="0"/>
+              <a:t>.</a:t>
+            </a:r>
+            <a:endParaRPr lang="en-US" sz="2200" i="1" dirty="0" smtClean="0">
+              <a:solidFill>
+                <a:srgbClr val="C00000"/>
+              </a:solidFill>
+            </a:endParaRPr>
+          </a:p>
+          <a:p>
+            <a:pPr marL="457200" indent="-457200">
+              <a:buFont typeface="Wingdings" pitchFamily="2" charset="2"/>
+              <a:buChar char="Ø"/>
+            </a:pPr>
+            <a:r>
+              <a:rPr lang="en-US" sz="2200" dirty="0" smtClean="0"/>
+              <a:t>To create a </a:t>
+            </a:r>
+            <a:r>
+              <a:rPr lang="en-US" sz="2200" i="1" dirty="0" smtClean="0">
+                <a:solidFill>
+                  <a:srgbClr val="C00000"/>
+                </a:solidFill>
+              </a:rPr>
+              <a:t>process definition document</a:t>
+            </a:r>
+            <a:r>
+              <a:rPr lang="en-US" sz="2200" dirty="0" smtClean="0"/>
+              <a:t>.</a:t>
+            </a:r>
+            <a:endParaRPr lang="en-US" sz="2200" i="1" dirty="0" smtClean="0">
+              <a:solidFill>
+                <a:srgbClr val="C00000"/>
+              </a:solidFill>
+            </a:endParaRPr>
+          </a:p>
+        </p:txBody>
+      </p:sp>
+      <p:pic>
+        <p:nvPicPr>
+          <p:cNvPr id="4" name="Picture 2"/>
+          <p:cNvPicPr>
+            <a:picLocks noChangeAspect="1" noChangeArrowheads="1"/>
+          </p:cNvPicPr>
+          <p:nvPr/>
+        </p:nvPicPr>
+        <p:blipFill>
+          <a:blip r:embed="rId2" cstate="print"/>
+          <a:srcRect/>
+          <a:stretch>
+            <a:fillRect/>
+          </a:stretch>
+        </p:blipFill>
+        <p:spPr bwMode="auto">
+          <a:xfrm>
+            <a:off x="6000750" y="2609850"/>
+            <a:ext cx="2762250" cy="2114550"/>
+          </a:xfrm>
+          <a:prstGeom prst="rect">
+            <a:avLst/>
+          </a:prstGeom>
+          <a:noFill/>
+          <a:ln w="9525">
+            <a:noFill/>
+            <a:miter lim="800000"/>
+            <a:headEnd/>
+            <a:tailEnd/>
+          </a:ln>
+          <a:effectLst/>
+        </p:spPr>
+      </p:pic>
+    </p:spTree>
+  </p:cSld>
+  <p:clrMapOvr>
+    <a:masterClrMapping/>
+  </p:clrMapOvr>
+  <p:timing>
+    <p:tnLst>
+      <p:par>
+        <p:cTn id="1" dur="indefinite" restart="never" nodeType="tmRoot"/>
+      </p:par>
+    </p:tnLst>
+  </p:timing>
+</p:sld>
+</file>
+
+<file path=ppt/slides/slide20.xml><?xml version="1.0" encoding="utf-8"?>
+<p:sld xmlns:a="http://schemas.openxmlformats.org/drawingml/2006/main" xmlns:r="http://schemas.openxmlformats.org/officeDocument/2006/relationships" xmlns:p="http://schemas.openxmlformats.org/presentationml/2006/main">
+  <p:cSld>
+    <p:spTree>
+      <p:nvGrpSpPr>
+        <p:cNvPr id="1" name=""/>
+        <p:cNvGrpSpPr/>
+        <p:nvPr/>
+      </p:nvGrpSpPr>
+      <p:grpSpPr>
+        <a:xfrm>
+          <a:off x="0" y="0"/>
+          <a:ext cx="0" cy="0"/>
+          <a:chOff x="0" y="0"/>
+          <a:chExt cx="0" cy="0"/>
+        </a:xfrm>
+      </p:grpSpPr>
+      <p:sp>
+        <p:nvSpPr>
+          <p:cNvPr id="2" name="Title 1"/>
+          <p:cNvSpPr>
+            <a:spLocks noGrp="1"/>
+          </p:cNvSpPr>
+          <p:nvPr>
+            <p:ph type="title"/>
+          </p:nvPr>
+        </p:nvSpPr>
+        <p:spPr/>
+        <p:txBody>
+          <a:bodyPr/>
+          <a:lstStyle/>
+          <a:p>
+            <a:r>
+              <a:rPr lang="en-US" dirty="0" smtClean="0"/>
+              <a:t>Create a Prototype</a:t>
+            </a:r>
+            <a:endParaRPr lang="en-US" dirty="0"/>
+          </a:p>
+        </p:txBody>
+      </p:sp>
+      <p:sp>
+        <p:nvSpPr>
+          <p:cNvPr id="3" name="Content Placeholder 2"/>
+          <p:cNvSpPr>
+            <a:spLocks noGrp="1"/>
+          </p:cNvSpPr>
+          <p:nvPr>
+            <p:ph idx="1"/>
+          </p:nvPr>
+        </p:nvSpPr>
+        <p:spPr/>
+        <p:txBody>
+          <a:bodyPr/>
+          <a:lstStyle/>
+          <a:p>
+            <a:r>
+              <a:rPr lang="en-US" dirty="0" smtClean="0"/>
+              <a:t>Workflow UIs.</a:t>
+            </a:r>
+            <a:endParaRPr lang="en-US" dirty="0"/>
+          </a:p>
+        </p:txBody>
+      </p:sp>
+      <p:pic>
+        <p:nvPicPr>
+          <p:cNvPr id="4" name="Picture 2" descr="https://media.licdn.com/mpr/mpr/shrinknp_400_400/p/8/005/06e/2c4/3ea6fad.jpg"/>
           <p:cNvPicPr>
             <a:picLocks noChangeAspect="1" noChangeArrowheads="1"/>
           </p:cNvPicPr>
@@ -5393,32 +6605,9 @@
           <a:noFill/>
         </p:spPr>
       </p:pic>
-      <p:sp>
-        <p:nvSpPr>
-          <p:cNvPr id="2" name="Title 1"/>
-          <p:cNvSpPr>
-            <a:spLocks noGrp="1"/>
-          </p:cNvSpPr>
-          <p:nvPr>
-            <p:ph type="title"/>
-          </p:nvPr>
-        </p:nvSpPr>
-        <p:spPr/>
-        <p:txBody>
-          <a:bodyPr/>
-          <a:lstStyle/>
-          <a:p>
-            <a:r>
-              <a:rPr lang="en-US" dirty="0" smtClean="0"/>
-              <a:t>Prepare a Prototype</a:t>
-            </a:r>
-            <a:endParaRPr lang="en-US" dirty="0"/>
-          </a:p>
-        </p:txBody>
-      </p:sp>
       <p:pic>
         <p:nvPicPr>
-          <p:cNvPr id="4098" name="Picture 2"/>
+          <p:cNvPr id="5" name="Picture 2"/>
           <p:cNvPicPr>
             <a:picLocks noChangeAspect="1" noChangeArrowheads="1"/>
           </p:cNvPicPr>
@@ -5451,7 +6640,7 @@
       </p:pic>
       <p:pic>
         <p:nvPicPr>
-          <p:cNvPr id="4" name="Picture 4"/>
+          <p:cNvPr id="6" name="Picture 4"/>
           <p:cNvPicPr>
             <a:picLocks noChangeAspect="1" noChangeArrowheads="1"/>
           </p:cNvPicPr>
@@ -5483,7 +6672,7 @@
       </p:pic>
       <p:cxnSp>
         <p:nvCxnSpPr>
-          <p:cNvPr id="12" name="Straight Arrow Connector 11"/>
+          <p:cNvPr id="7" name="Straight Arrow Connector 6"/>
           <p:cNvCxnSpPr/>
           <p:nvPr/>
         </p:nvCxnSpPr>
@@ -5516,7 +6705,7 @@
       </p:cxnSp>
       <p:sp>
         <p:nvSpPr>
-          <p:cNvPr id="21" name="Rectangle 20"/>
+          <p:cNvPr id="8" name="Rectangle 7"/>
           <p:cNvSpPr/>
           <p:nvPr/>
         </p:nvSpPr>
@@ -5553,17 +6742,10 @@
   <p:clrMapOvr>
     <a:masterClrMapping/>
   </p:clrMapOvr>
-  <p:timing>
-    <p:tnLst>
-      <p:par>
-        <p:cTn id="1" dur="indefinite" restart="never" nodeType="tmRoot"/>
-      </p:par>
-    </p:tnLst>
-  </p:timing>
 </p:sld>
 </file>
 
-<file path=ppt/slides/slide17.xml><?xml version="1.0" encoding="utf-8"?>
+<file path=ppt/slides/slide21.xml><?xml version="1.0" encoding="utf-8"?>
 <p:sld xmlns:a="http://schemas.openxmlformats.org/drawingml/2006/main" xmlns:r="http://schemas.openxmlformats.org/officeDocument/2006/relationships" xmlns:p="http://schemas.openxmlformats.org/presentationml/2006/main">
   <p:cSld>
     <p:spTree>
@@ -5597,23 +6779,50 @@
           <a:p>
             <a:r>
               <a:rPr lang="en-US" dirty="0" smtClean="0"/>
-              <a:t>Prepare </a:t>
-            </a:r>
-            <a:r>
-              <a:rPr lang="en-US" dirty="0" smtClean="0"/>
-              <a:t>a Partial </a:t>
-            </a:r>
-            <a:r>
-              <a:rPr lang="en-US" dirty="0" smtClean="0"/>
-              <a:t>Product Backlog</a:t>
+              <a:t>Create a Product Backlog</a:t>
             </a:r>
             <a:endParaRPr lang="en-US" dirty="0"/>
+          </a:p>
+        </p:txBody>
+      </p:sp>
+      <p:sp>
+        <p:nvSpPr>
+          <p:cNvPr id="3" name="Content Placeholder 2"/>
+          <p:cNvSpPr>
+            <a:spLocks noGrp="1"/>
+          </p:cNvSpPr>
+          <p:nvPr>
+            <p:ph idx="1"/>
+          </p:nvPr>
+        </p:nvSpPr>
+        <p:spPr/>
+        <p:txBody>
+          <a:bodyPr/>
+          <a:lstStyle/>
+          <a:p>
+            <a:r>
+              <a:rPr lang="en-US" sz="2400" dirty="0" smtClean="0"/>
+              <a:t>Features with </a:t>
+            </a:r>
+            <a:r>
+              <a:rPr lang="en-US" sz="2400" i="1" dirty="0" smtClean="0">
+                <a:solidFill>
+                  <a:srgbClr val="C00000"/>
+                </a:solidFill>
+              </a:rPr>
+              <a:t>acceptance criteria</a:t>
+            </a:r>
+            <a:r>
+              <a:rPr lang="en-US" sz="2400" dirty="0" smtClean="0"/>
+              <a:t> mapped to workflows.</a:t>
+            </a:r>
+            <a:endParaRPr lang="en-US" sz="2400" dirty="0"/>
           </a:p>
         </p:txBody>
       </p:sp>
       <p:pic>
         <p:nvPicPr>
-          <p:cNvPr id="4098" name="Picture 2"/>
+          <p:cNvPr id="4" name="Picture 2"/>
           <p:cNvPicPr>
             <a:picLocks noChangeAspect="1" noChangeArrowheads="1"/>
           </p:cNvPicPr>
@@ -5646,7 +6855,7 @@
       </p:pic>
       <p:pic>
         <p:nvPicPr>
-          <p:cNvPr id="4" name="Picture 4"/>
+          <p:cNvPr id="5" name="Picture 4"/>
           <p:cNvPicPr>
             <a:picLocks noChangeAspect="1" noChangeArrowheads="1"/>
           </p:cNvPicPr>
@@ -5678,7 +6887,7 @@
       </p:pic>
       <p:cxnSp>
         <p:nvCxnSpPr>
-          <p:cNvPr id="12" name="Straight Arrow Connector 11"/>
+          <p:cNvPr id="6" name="Straight Arrow Connector 5"/>
           <p:cNvCxnSpPr/>
           <p:nvPr/>
         </p:nvCxnSpPr>
@@ -5711,14 +6920,14 @@
       </p:cxnSp>
       <p:sp>
         <p:nvSpPr>
-          <p:cNvPr id="21" name="Rectangle 20"/>
+          <p:cNvPr id="7" name="Rectangle 6"/>
           <p:cNvSpPr/>
           <p:nvPr/>
         </p:nvSpPr>
         <p:spPr>
           <a:xfrm>
-            <a:off x="5562600" y="4343400"/>
-            <a:ext cx="2869503" cy="584775"/>
+            <a:off x="5562600" y="4415135"/>
+            <a:ext cx="2733441" cy="461665"/>
           </a:xfrm>
           <a:prstGeom prst="rect">
             <a:avLst/>
@@ -5732,20 +6941,26 @@
           <a:p>
             <a:pPr marL="514350" indent="-514350"/>
             <a:r>
-              <a:rPr lang="en-US" sz="3200" dirty="0" smtClean="0">
-                <a:latin typeface="+mj-lt"/>
+              <a:rPr lang="en-US" sz="2400" dirty="0" smtClean="0">
+                <a:solidFill>
+                  <a:srgbClr val="C00000"/>
+                </a:solidFill>
+                <a:latin typeface="Consolas" pitchFamily="49" charset="0"/>
               </a:rPr>
               <a:t>Product Backlog</a:t>
             </a:r>
-            <a:endParaRPr lang="en-US" sz="3200" u="sng" dirty="0" smtClean="0">
-              <a:latin typeface="+mj-lt"/>
+            <a:endParaRPr lang="en-US" sz="2400" u="sng" dirty="0" smtClean="0">
+              <a:solidFill>
+                <a:srgbClr val="C00000"/>
+              </a:solidFill>
+              <a:latin typeface="Consolas" pitchFamily="49" charset="0"/>
             </a:endParaRPr>
           </a:p>
         </p:txBody>
       </p:sp>
       <p:pic>
         <p:nvPicPr>
-          <p:cNvPr id="1026" name="Picture 2" descr="https://encrypted-tbn0.gstatic.com/images?q=tbn:ANd9GcSFjELCnVms4p5uVj-2QT-D0xKkPIXw-rq3XA&amp;s"/>
+          <p:cNvPr id="8" name="Picture 2" descr="https://encrypted-tbn0.gstatic.com/images?q=tbn:ANd9GcSFjELCnVms4p5uVj-2QT-D0xKkPIXw-rq3XA&amp;s"/>
           <p:cNvPicPr>
             <a:picLocks noChangeAspect="1" noChangeArrowheads="1"/>
           </p:cNvPicPr>
@@ -5760,7 +6975,7 @@
         </p:blipFill>
         <p:spPr bwMode="auto">
           <a:xfrm>
-            <a:off x="5486400" y="1828800"/>
+            <a:off x="5486400" y="2205335"/>
             <a:ext cx="2143125" cy="2143125"/>
           </a:xfrm>
           <a:prstGeom prst="rect">
@@ -5771,7 +6986,7 @@
       </p:pic>
       <p:sp>
         <p:nvSpPr>
-          <p:cNvPr id="11" name="Rectangle 10"/>
+          <p:cNvPr id="9" name="Rectangle 8"/>
           <p:cNvSpPr/>
           <p:nvPr/>
         </p:nvSpPr>
@@ -5807,19 +7022,7 @@
             <a:pPr algn="ctr"/>
             <a:r>
               <a:rPr lang="en-US" sz="2400" dirty="0" smtClean="0"/>
-              <a:t>(</a:t>
-            </a:r>
-            <a:r>
-              <a:rPr lang="en-US" sz="2400" i="1" dirty="0" smtClean="0">
-                <a:solidFill>
-                  <a:srgbClr val="C00000"/>
-                </a:solidFill>
-              </a:rPr>
-              <a:t>Partial</a:t>
-            </a:r>
-            <a:r>
-              <a:rPr lang="en-US" sz="2400" dirty="0" smtClean="0"/>
-              <a:t>) Software Requirements Specification or Product Backlog</a:t>
+              <a:t>Software Requirements Specification or Product Backlog</a:t>
             </a:r>
             <a:endParaRPr lang="en-US" sz="2400" dirty="0"/>
           </a:p>
@@ -5830,17 +7033,10 @@
   <p:clrMapOvr>
     <a:masterClrMapping/>
   </p:clrMapOvr>
-  <p:timing>
-    <p:tnLst>
-      <p:par>
-        <p:cTn id="1" dur="indefinite" restart="never" nodeType="tmRoot"/>
-      </p:par>
-    </p:tnLst>
-  </p:timing>
 </p:sld>
 </file>
 
-<file path=ppt/slides/slide18.xml><?xml version="1.0" encoding="utf-8"?>
+<file path=ppt/slides/slide22.xml><?xml version="1.0" encoding="utf-8"?>
 <p:sld xmlns:a="http://schemas.openxmlformats.org/drawingml/2006/main" xmlns:r="http://schemas.openxmlformats.org/officeDocument/2006/relationships" xmlns:p="http://schemas.openxmlformats.org/presentationml/2006/main">
   <p:cSld>
     <p:spTree>
@@ -5874,7 +7070,7 @@
           <a:p>
             <a:r>
               <a:rPr lang="en-US" dirty="0" smtClean="0"/>
-              <a:t>Prepare Architecture</a:t>
+              <a:t>Create Architecture</a:t>
             </a:r>
             <a:endParaRPr lang="en-US" dirty="0"/>
           </a:p>
@@ -5910,6 +7106,18 @@
                   <a:srgbClr val="C00000"/>
                 </a:solidFill>
               </a:rPr>
+              <a:t>application type</a:t>
+            </a:r>
+            <a:r>
+              <a:rPr lang="en-US" sz="2400" dirty="0" smtClean="0"/>
+              <a:t>, this </a:t>
+            </a:r>
+            <a:r>
+              <a:rPr lang="en-US" sz="2400" i="1" dirty="0" smtClean="0">
+                <a:solidFill>
+                  <a:srgbClr val="C00000"/>
+                </a:solidFill>
+              </a:rPr>
               <a:t>architectural style</a:t>
             </a:r>
             <a:r>
@@ -5950,16 +7158,7 @@
             </a:r>
             <a:r>
               <a:rPr lang="en-US" sz="2400" dirty="0" smtClean="0"/>
-              <a:t>, </a:t>
-            </a:r>
-          </a:p>
-          <a:p>
-            <a:pPr>
-              <a:buNone/>
-            </a:pPr>
-            <a:r>
-              <a:rPr lang="en-US" sz="2400" dirty="0" smtClean="0"/>
-              <a:t>	this  </a:t>
+              <a:t>, this  </a:t>
             </a:r>
             <a:r>
               <a:rPr lang="en-US" sz="2400" i="1" dirty="0" smtClean="0">
@@ -6102,7 +7301,7 @@
         </p:blipFill>
         <p:spPr bwMode="auto">
           <a:xfrm>
-            <a:off x="7391400" y="381000"/>
+            <a:off x="7200900" y="3562350"/>
             <a:ext cx="1333500" cy="1314450"/>
           </a:xfrm>
           <a:prstGeom prst="rect">
@@ -6125,7 +7324,7 @@
 </p:sld>
 </file>
 
-<file path=ppt/slides/slide19.xml><?xml version="1.0" encoding="utf-8"?>
+<file path=ppt/slides/slide23.xml><?xml version="1.0" encoding="utf-8"?>
 <p:sld xmlns:a="http://schemas.openxmlformats.org/drawingml/2006/main" xmlns:r="http://schemas.openxmlformats.org/officeDocument/2006/relationships" xmlns:p="http://schemas.openxmlformats.org/presentationml/2006/main">
   <p:cSld>
     <p:spTree>
@@ -6165,9 +7364,38 @@
           </a:p>
         </p:txBody>
       </p:sp>
+      <p:sp>
+        <p:nvSpPr>
+          <p:cNvPr id="3" name="Content Placeholder 2"/>
+          <p:cNvSpPr>
+            <a:spLocks noGrp="1"/>
+          </p:cNvSpPr>
+          <p:nvPr>
+            <p:ph idx="1"/>
+          </p:nvPr>
+        </p:nvSpPr>
+        <p:spPr/>
+        <p:txBody>
+          <a:bodyPr/>
+          <a:lstStyle/>
+          <a:p>
+            <a:r>
+              <a:rPr lang="en-US" sz="2200" dirty="0" smtClean="0"/>
+              <a:t>The simplest feature that demonstrates the entire technology stack.</a:t>
+            </a:r>
+          </a:p>
+          <a:p>
+            <a:r>
+              <a:rPr lang="en-US" sz="2200" dirty="0" smtClean="0"/>
+              <a:t>The most difficult feature.</a:t>
+            </a:r>
+            <a:endParaRPr lang="en-US" sz="2200" dirty="0"/>
+          </a:p>
+        </p:txBody>
+      </p:sp>
       <p:pic>
         <p:nvPicPr>
-          <p:cNvPr id="4098" name="Picture 2"/>
+          <p:cNvPr id="4" name="Picture 2"/>
           <p:cNvPicPr>
             <a:picLocks noChangeAspect="1" noChangeArrowheads="1"/>
           </p:cNvPicPr>
@@ -6182,7 +7410,7 @@
         </p:blipFill>
         <p:spPr bwMode="auto">
           <a:xfrm>
-            <a:off x="0" y="1893887"/>
+            <a:off x="552450" y="2819400"/>
             <a:ext cx="3181350" cy="3419475"/>
           </a:xfrm>
           <a:prstGeom prst="rect">
@@ -6198,47 +7426,15 @@
           <a:effectLst/>
         </p:spPr>
       </p:pic>
-      <p:pic>
-        <p:nvPicPr>
-          <p:cNvPr id="4" name="Picture 4"/>
-          <p:cNvPicPr>
-            <a:picLocks noChangeAspect="1" noChangeArrowheads="1"/>
-          </p:cNvPicPr>
-          <p:nvPr/>
-        </p:nvPicPr>
-        <p:blipFill>
-          <a:blip r:embed="rId3" cstate="print"/>
-          <a:srcRect/>
-          <a:stretch>
-            <a:fillRect/>
-          </a:stretch>
-        </p:blipFill>
-        <p:spPr bwMode="auto">
-          <a:xfrm>
-            <a:off x="2819400" y="1524000"/>
-            <a:ext cx="1333500" cy="1314450"/>
-          </a:xfrm>
-          <a:prstGeom prst="rect">
-            <a:avLst/>
-          </a:prstGeom>
-          <a:noFill/>
-          <a:ln w="9525">
-            <a:noFill/>
-            <a:miter lim="800000"/>
-            <a:headEnd/>
-            <a:tailEnd/>
-          </a:ln>
-        </p:spPr>
-      </p:pic>
       <p:cxnSp>
         <p:nvCxnSpPr>
-          <p:cNvPr id="7" name="Straight Arrow Connector 6"/>
+          <p:cNvPr id="5" name="Straight Arrow Connector 4"/>
           <p:cNvCxnSpPr/>
           <p:nvPr/>
         </p:nvCxnSpPr>
         <p:spPr>
           <a:xfrm>
-            <a:off x="2971800" y="3875087"/>
+            <a:off x="2971800" y="3646487"/>
             <a:ext cx="1219200" cy="0"/>
           </a:xfrm>
           <a:prstGeom prst="straightConnector1">
@@ -6265,14 +7461,14 @@
       </p:cxnSp>
       <p:pic>
         <p:nvPicPr>
-          <p:cNvPr id="9" name="Picture 3"/>
+          <p:cNvPr id="6" name="Picture 3"/>
           <p:cNvPicPr>
             <a:picLocks noChangeAspect="1" noChangeArrowheads="1"/>
           </p:cNvPicPr>
           <p:nvPr/>
         </p:nvPicPr>
         <p:blipFill>
-          <a:blip r:embed="rId4" cstate="print"/>
+          <a:blip r:embed="rId3" cstate="print"/>
           <a:srcRect/>
           <a:stretch>
             <a:fillRect/>
@@ -6280,7 +7476,7 @@
         </p:blipFill>
         <p:spPr bwMode="auto">
           <a:xfrm>
-            <a:off x="4343400" y="4941887"/>
+            <a:off x="4343400" y="4713287"/>
             <a:ext cx="1474787" cy="1306513"/>
           </a:xfrm>
           <a:prstGeom prst="rect">
@@ -6297,14 +7493,14 @@
       </p:pic>
       <p:pic>
         <p:nvPicPr>
-          <p:cNvPr id="10" name="Picture 3"/>
+          <p:cNvPr id="7" name="Picture 3"/>
           <p:cNvPicPr>
             <a:picLocks noChangeAspect="1" noChangeArrowheads="1"/>
           </p:cNvPicPr>
           <p:nvPr/>
         </p:nvPicPr>
         <p:blipFill>
-          <a:blip r:embed="rId5" cstate="print"/>
+          <a:blip r:embed="rId4" cstate="print"/>
           <a:srcRect/>
           <a:stretch>
             <a:fillRect/>
@@ -6312,7 +7508,7 @@
         </p:blipFill>
         <p:spPr bwMode="auto">
           <a:xfrm>
-            <a:off x="4267200" y="3036887"/>
+            <a:off x="4267200" y="2823591"/>
             <a:ext cx="2298954" cy="1672209"/>
           </a:xfrm>
           <a:prstGeom prst="rect">
@@ -6329,13 +7525,13 @@
       </p:pic>
       <p:cxnSp>
         <p:nvCxnSpPr>
-          <p:cNvPr id="19" name="Straight Arrow Connector 18"/>
+          <p:cNvPr id="8" name="Straight Arrow Connector 7"/>
           <p:cNvCxnSpPr/>
           <p:nvPr/>
         </p:nvCxnSpPr>
         <p:spPr>
           <a:xfrm>
-            <a:off x="3733800" y="5486400"/>
+            <a:off x="3733800" y="5257800"/>
             <a:ext cx="685800" cy="1"/>
           </a:xfrm>
           <a:prstGeom prst="straightConnector1">
@@ -6362,13 +7558,13 @@
       </p:cxnSp>
       <p:sp>
         <p:nvSpPr>
-          <p:cNvPr id="22" name="Rectangle 21"/>
+          <p:cNvPr id="9" name="Rectangle 8"/>
           <p:cNvSpPr/>
           <p:nvPr/>
         </p:nvSpPr>
         <p:spPr>
           <a:xfrm>
-            <a:off x="5943600" y="5399087"/>
+            <a:off x="5943600" y="5170487"/>
             <a:ext cx="2847061" cy="584775"/>
           </a:xfrm>
           <a:prstGeom prst="rect">
@@ -6396,7 +7592,33 @@
       </p:sp>
       <p:pic>
         <p:nvPicPr>
-          <p:cNvPr id="13" name="Picture 2" descr="https://assets.jobscore.com/pictures/retina_aotZ6gqfGr6A7gcR_n82lY.jpg"/>
+          <p:cNvPr id="10" name="Picture 2" descr="https://assets.jobscore.com/pictures/retina_aotZ6gqfGr6A7gcR_n82lY.jpg"/>
+          <p:cNvPicPr>
+            <a:picLocks noChangeAspect="1" noChangeArrowheads="1"/>
+          </p:cNvPicPr>
+          <p:nvPr/>
+        </p:nvPicPr>
+        <p:blipFill>
+          <a:blip r:embed="rId5" cstate="print"/>
+          <a:srcRect/>
+          <a:stretch>
+            <a:fillRect/>
+          </a:stretch>
+        </p:blipFill>
+        <p:spPr bwMode="auto">
+          <a:xfrm>
+            <a:off x="685800" y="4256087"/>
+            <a:ext cx="2933700" cy="1762316"/>
+          </a:xfrm>
+          <a:prstGeom prst="rect">
+            <a:avLst/>
+          </a:prstGeom>
+          <a:noFill/>
+        </p:spPr>
+      </p:pic>
+      <p:pic>
+        <p:nvPicPr>
+          <p:cNvPr id="11" name="Picture 4"/>
           <p:cNvPicPr>
             <a:picLocks noChangeAspect="1" noChangeArrowheads="1"/>
           </p:cNvPicPr>
@@ -6411,360 +7633,8 @@
         </p:blipFill>
         <p:spPr bwMode="auto">
           <a:xfrm>
-            <a:off x="685800" y="4484687"/>
-            <a:ext cx="2933700" cy="1762316"/>
-          </a:xfrm>
-          <a:prstGeom prst="rect">
-            <a:avLst/>
-          </a:prstGeom>
-          <a:noFill/>
-        </p:spPr>
-      </p:pic>
-    </p:spTree>
-  </p:cSld>
-  <p:clrMapOvr>
-    <a:masterClrMapping/>
-  </p:clrMapOvr>
-  <p:timing>
-    <p:tnLst>
-      <p:par>
-        <p:cTn id="1" dur="indefinite" restart="never" nodeType="tmRoot"/>
-      </p:par>
-    </p:tnLst>
-  </p:timing>
-</p:sld>
-</file>
-
-<file path=ppt/slides/slide2.xml><?xml version="1.0" encoding="utf-8"?>
-<p:sld xmlns:a="http://schemas.openxmlformats.org/drawingml/2006/main" xmlns:r="http://schemas.openxmlformats.org/officeDocument/2006/relationships" xmlns:p="http://schemas.openxmlformats.org/presentationml/2006/main">
-  <p:cSld>
-    <p:spTree>
-      <p:nvGrpSpPr>
-        <p:cNvPr id="1" name=""/>
-        <p:cNvGrpSpPr/>
-        <p:nvPr/>
-      </p:nvGrpSpPr>
-      <p:grpSpPr>
-        <a:xfrm>
-          <a:off x="0" y="0"/>
-          <a:ext cx="0" cy="0"/>
-          <a:chOff x="0" y="0"/>
-          <a:chExt cx="0" cy="0"/>
-        </a:xfrm>
-      </p:grpSpPr>
-      <p:sp>
-        <p:nvSpPr>
-          <p:cNvPr id="2" name="Title 1"/>
-          <p:cNvSpPr>
-            <a:spLocks noGrp="1"/>
-          </p:cNvSpPr>
-          <p:nvPr>
-            <p:ph type="title"/>
-          </p:nvPr>
-        </p:nvSpPr>
-        <p:spPr/>
-        <p:txBody>
-          <a:bodyPr/>
-          <a:lstStyle/>
-          <a:p>
-            <a:r>
-              <a:rPr lang="en-US" dirty="0" smtClean="0"/>
-              <a:t>Objectives</a:t>
-            </a:r>
-            <a:endParaRPr lang="en-US" dirty="0"/>
-          </a:p>
-        </p:txBody>
-      </p:sp>
-      <p:sp>
-        <p:nvSpPr>
-          <p:cNvPr id="3" name="Content Placeholder 2"/>
-          <p:cNvSpPr>
-            <a:spLocks noGrp="1"/>
-          </p:cNvSpPr>
-          <p:nvPr>
-            <p:ph idx="1"/>
-          </p:nvPr>
-        </p:nvSpPr>
-        <p:spPr>
-          <a:xfrm>
-            <a:off x="457200" y="1600200"/>
-            <a:ext cx="5562600" cy="4343400"/>
-          </a:xfrm>
-        </p:spPr>
-        <p:txBody>
-          <a:bodyPr/>
-          <a:lstStyle/>
-          <a:p>
-            <a:pPr marL="457200" indent="-457200">
-              <a:buFont typeface="Wingdings" pitchFamily="2" charset="2"/>
-              <a:buChar char="Ø"/>
-            </a:pPr>
-            <a:r>
-              <a:rPr lang="en-US" sz="2200" dirty="0" smtClean="0"/>
-              <a:t>To </a:t>
-            </a:r>
-            <a:r>
-              <a:rPr lang="en-US" sz="2200" dirty="0" smtClean="0"/>
-              <a:t>create and evaluate a </a:t>
-            </a:r>
-            <a:r>
-              <a:rPr lang="en-US" sz="2200" i="1" dirty="0" smtClean="0">
-                <a:solidFill>
-                  <a:srgbClr val="C00000"/>
-                </a:solidFill>
-              </a:rPr>
-              <a:t>project proposal</a:t>
-            </a:r>
-            <a:r>
-              <a:rPr lang="en-US" sz="2200" dirty="0" smtClean="0"/>
-              <a:t>.</a:t>
-            </a:r>
-            <a:endParaRPr lang="en-US" sz="2200" dirty="0" smtClean="0"/>
-          </a:p>
-          <a:p>
-            <a:pPr marL="457200" indent="-457200">
-              <a:buFont typeface="Wingdings" pitchFamily="2" charset="2"/>
-              <a:buChar char="Ø"/>
-            </a:pPr>
-            <a:r>
-              <a:rPr lang="en-US" sz="2200" dirty="0" smtClean="0"/>
-              <a:t>To create a </a:t>
-            </a:r>
-            <a:r>
-              <a:rPr lang="en-US" sz="2200" i="1" dirty="0" smtClean="0">
-                <a:solidFill>
-                  <a:srgbClr val="C00000"/>
-                </a:solidFill>
-              </a:rPr>
-              <a:t>project vision and scope document</a:t>
-            </a:r>
-            <a:r>
-              <a:rPr lang="en-US" sz="2200" dirty="0" smtClean="0"/>
-              <a:t>.</a:t>
-            </a:r>
-          </a:p>
-          <a:p>
-            <a:pPr marL="457200" indent="-457200">
-              <a:buFont typeface="Wingdings" pitchFamily="2" charset="2"/>
-              <a:buChar char="Ø"/>
-            </a:pPr>
-            <a:r>
-              <a:rPr lang="en-US" sz="2200" dirty="0" smtClean="0"/>
-              <a:t>To create a </a:t>
-            </a:r>
-            <a:r>
-              <a:rPr lang="en-US" sz="2200" i="1" dirty="0" smtClean="0">
-                <a:solidFill>
-                  <a:srgbClr val="C00000"/>
-                </a:solidFill>
-              </a:rPr>
-              <a:t>mockup</a:t>
-            </a:r>
-            <a:r>
-              <a:rPr lang="en-US" sz="2200" dirty="0" smtClean="0"/>
-              <a:t> and </a:t>
-            </a:r>
-            <a:r>
-              <a:rPr lang="en-US" sz="2200" i="1" dirty="0" smtClean="0">
-                <a:solidFill>
-                  <a:srgbClr val="C00000"/>
-                </a:solidFill>
-              </a:rPr>
-              <a:t>prototype</a:t>
-            </a:r>
-            <a:r>
-              <a:rPr lang="en-US" sz="2200" dirty="0" smtClean="0"/>
-              <a:t>.</a:t>
-            </a:r>
-            <a:endParaRPr lang="en-US" sz="2200" i="1" dirty="0" smtClean="0">
-              <a:solidFill>
-                <a:srgbClr val="C00000"/>
-              </a:solidFill>
-            </a:endParaRPr>
-          </a:p>
-          <a:p>
-            <a:pPr marL="457200" indent="-457200">
-              <a:buFont typeface="Wingdings" pitchFamily="2" charset="2"/>
-              <a:buChar char="Ø"/>
-            </a:pPr>
-            <a:r>
-              <a:rPr lang="en-US" sz="2200" dirty="0" smtClean="0"/>
-              <a:t>To create a </a:t>
-            </a:r>
-            <a:r>
-              <a:rPr lang="en-US" sz="2200" i="1" dirty="0" smtClean="0">
-                <a:solidFill>
-                  <a:srgbClr val="C00000"/>
-                </a:solidFill>
-              </a:rPr>
-              <a:t>software requirements specification</a:t>
-            </a:r>
-            <a:r>
-              <a:rPr lang="en-US" sz="2200" dirty="0" smtClean="0"/>
-              <a:t>.</a:t>
-            </a:r>
-            <a:endParaRPr lang="en-US" sz="2200" i="1" dirty="0" smtClean="0">
-              <a:solidFill>
-                <a:srgbClr val="C00000"/>
-              </a:solidFill>
-            </a:endParaRPr>
-          </a:p>
-          <a:p>
-            <a:pPr marL="457200" indent="-457200">
-              <a:buFont typeface="Wingdings" pitchFamily="2" charset="2"/>
-              <a:buChar char="Ø"/>
-            </a:pPr>
-            <a:r>
-              <a:rPr lang="en-US" sz="2200" dirty="0" smtClean="0"/>
-              <a:t>To create an </a:t>
-            </a:r>
-            <a:r>
-              <a:rPr lang="en-US" sz="2200" i="1" dirty="0" smtClean="0">
-                <a:solidFill>
-                  <a:srgbClr val="C00000"/>
-                </a:solidFill>
-              </a:rPr>
-              <a:t>architecture</a:t>
-            </a:r>
-            <a:r>
-              <a:rPr lang="en-US" sz="2200" dirty="0" smtClean="0"/>
-              <a:t>.</a:t>
-            </a:r>
-            <a:endParaRPr lang="en-US" sz="2200" i="1" dirty="0" smtClean="0">
-              <a:solidFill>
-                <a:srgbClr val="C00000"/>
-              </a:solidFill>
-            </a:endParaRPr>
-          </a:p>
-          <a:p>
-            <a:pPr marL="457200" indent="-457200">
-              <a:buFont typeface="Wingdings" pitchFamily="2" charset="2"/>
-              <a:buChar char="Ø"/>
-            </a:pPr>
-            <a:r>
-              <a:rPr lang="en-US" sz="2200" dirty="0" smtClean="0"/>
-              <a:t>To create a </a:t>
-            </a:r>
-            <a:r>
-              <a:rPr lang="en-US" sz="2200" i="1" dirty="0" smtClean="0">
-                <a:solidFill>
-                  <a:srgbClr val="C00000"/>
-                </a:solidFill>
-              </a:rPr>
-              <a:t>feasibility study report</a:t>
-            </a:r>
-            <a:r>
-              <a:rPr lang="en-US" sz="2200" dirty="0" smtClean="0"/>
-              <a:t>.</a:t>
-            </a:r>
-            <a:endParaRPr lang="en-US" sz="2200" i="1" dirty="0" smtClean="0">
-              <a:solidFill>
-                <a:srgbClr val="C00000"/>
-              </a:solidFill>
-            </a:endParaRPr>
-          </a:p>
-          <a:p>
-            <a:pPr marL="457200" indent="-457200">
-              <a:buFont typeface="Wingdings" pitchFamily="2" charset="2"/>
-              <a:buChar char="Ø"/>
-            </a:pPr>
-            <a:r>
-              <a:rPr lang="en-US" sz="2200" dirty="0" smtClean="0"/>
-              <a:t>To create a </a:t>
-            </a:r>
-            <a:r>
-              <a:rPr lang="en-US" sz="2200" i="1" dirty="0" smtClean="0">
-                <a:solidFill>
-                  <a:srgbClr val="C00000"/>
-                </a:solidFill>
-              </a:rPr>
-              <a:t>proof of concept</a:t>
-            </a:r>
-            <a:r>
-              <a:rPr lang="en-US" sz="2200" dirty="0" smtClean="0"/>
-              <a:t>.</a:t>
-            </a:r>
-            <a:endParaRPr lang="en-US" sz="2200" i="1" dirty="0" smtClean="0">
-              <a:solidFill>
-                <a:srgbClr val="C00000"/>
-              </a:solidFill>
-            </a:endParaRPr>
-          </a:p>
-          <a:p>
-            <a:pPr marL="457200" indent="-457200">
-              <a:buFont typeface="Wingdings" pitchFamily="2" charset="2"/>
-              <a:buChar char="Ø"/>
-            </a:pPr>
-            <a:r>
-              <a:rPr lang="en-US" sz="2200" dirty="0" smtClean="0"/>
-              <a:t>To create a </a:t>
-            </a:r>
-            <a:r>
-              <a:rPr lang="en-US" sz="2200" i="1" dirty="0" smtClean="0">
-                <a:solidFill>
-                  <a:srgbClr val="C00000"/>
-                </a:solidFill>
-              </a:rPr>
-              <a:t>project charter</a:t>
-            </a:r>
-            <a:r>
-              <a:rPr lang="en-US" sz="2200" dirty="0" smtClean="0"/>
-              <a:t>.</a:t>
-            </a:r>
-            <a:endParaRPr lang="en-US" sz="2200" i="1" dirty="0" smtClean="0">
-              <a:solidFill>
-                <a:srgbClr val="C00000"/>
-              </a:solidFill>
-            </a:endParaRPr>
-          </a:p>
-          <a:p>
-            <a:pPr marL="457200" indent="-457200">
-              <a:buFont typeface="Wingdings" pitchFamily="2" charset="2"/>
-              <a:buChar char="Ø"/>
-            </a:pPr>
-            <a:r>
-              <a:rPr lang="en-US" sz="2200" dirty="0" smtClean="0"/>
-              <a:t>To create a </a:t>
-            </a:r>
-            <a:r>
-              <a:rPr lang="en-US" sz="2200" i="1" dirty="0" smtClean="0">
-                <a:solidFill>
-                  <a:srgbClr val="C00000"/>
-                </a:solidFill>
-              </a:rPr>
-              <a:t>process definition document</a:t>
-            </a:r>
-            <a:r>
-              <a:rPr lang="en-US" sz="2200" dirty="0" smtClean="0"/>
-              <a:t>.</a:t>
-            </a:r>
-            <a:endParaRPr lang="en-US" sz="2200" i="1" dirty="0" smtClean="0">
-              <a:solidFill>
-                <a:srgbClr val="C00000"/>
-              </a:solidFill>
-            </a:endParaRPr>
-          </a:p>
-        </p:txBody>
-      </p:sp>
-      <p:pic>
-        <p:nvPicPr>
-          <p:cNvPr id="4" name="Picture 2"/>
-          <p:cNvPicPr>
-            <a:picLocks noChangeAspect="1" noChangeArrowheads="1"/>
-          </p:cNvPicPr>
-          <p:nvPr/>
-        </p:nvPicPr>
-        <p:blipFill>
-          <a:blip r:embed="rId2" cstate="print"/>
-          <a:srcRect/>
-          <a:stretch>
-            <a:fillRect/>
-          </a:stretch>
-        </p:blipFill>
-        <p:spPr bwMode="auto">
-          <a:xfrm>
-            <a:off x="6000750" y="2609850"/>
-            <a:ext cx="2762250" cy="2114550"/>
+            <a:off x="6934200" y="3048000"/>
+            <a:ext cx="1333500" cy="1314450"/>
           </a:xfrm>
           <a:prstGeom prst="rect">
             <a:avLst/>
@@ -6776,846 +7646,6 @@
             <a:headEnd/>
             <a:tailEnd/>
           </a:ln>
-          <a:effectLst/>
-        </p:spPr>
-      </p:pic>
-    </p:spTree>
-  </p:cSld>
-  <p:clrMapOvr>
-    <a:masterClrMapping/>
-  </p:clrMapOvr>
-  <p:timing>
-    <p:tnLst>
-      <p:par>
-        <p:cTn id="1" dur="indefinite" restart="never" nodeType="tmRoot"/>
-      </p:par>
-    </p:tnLst>
-  </p:timing>
-</p:sld>
-</file>
-
-<file path=ppt/slides/slide20.xml><?xml version="1.0" encoding="utf-8"?>
-<p:sld xmlns:a="http://schemas.openxmlformats.org/drawingml/2006/main" xmlns:r="http://schemas.openxmlformats.org/officeDocument/2006/relationships" xmlns:p="http://schemas.openxmlformats.org/presentationml/2006/main">
-  <p:cSld>
-    <p:spTree>
-      <p:nvGrpSpPr>
-        <p:cNvPr id="1" name=""/>
-        <p:cNvGrpSpPr/>
-        <p:nvPr/>
-      </p:nvGrpSpPr>
-      <p:grpSpPr>
-        <a:xfrm>
-          <a:off x="0" y="0"/>
-          <a:ext cx="0" cy="0"/>
-          <a:chOff x="0" y="0"/>
-          <a:chExt cx="0" cy="0"/>
-        </a:xfrm>
-      </p:grpSpPr>
-      <p:pic>
-        <p:nvPicPr>
-          <p:cNvPr id="4" name="Picture 2" descr="https://lh3.ggpht.com/1IfZLL2QDSjZ0wS7sUhaMlsAOS8BBzdR3wZ1WawgRn7KZAM8nEVZYMOUM-lqQb0ikIzp=w300"/>
-          <p:cNvPicPr>
-            <a:picLocks noChangeAspect="1" noChangeArrowheads="1"/>
-          </p:cNvPicPr>
-          <p:nvPr/>
-        </p:nvPicPr>
-        <p:blipFill>
-          <a:blip r:embed="rId2" cstate="print"/>
-          <a:srcRect/>
-          <a:stretch>
-            <a:fillRect/>
-          </a:stretch>
-        </p:blipFill>
-        <p:spPr bwMode="auto">
-          <a:xfrm>
-            <a:off x="3276600" y="1905000"/>
-            <a:ext cx="2857500" cy="2857500"/>
-          </a:xfrm>
-          <a:prstGeom prst="rect">
-            <a:avLst/>
-          </a:prstGeom>
-          <a:noFill/>
-        </p:spPr>
-      </p:pic>
-    </p:spTree>
-  </p:cSld>
-  <p:clrMapOvr>
-    <a:masterClrMapping/>
-  </p:clrMapOvr>
-</p:sld>
-</file>
-
-<file path=ppt/slides/slide21.xml><?xml version="1.0" encoding="utf-8"?>
-<p:sld xmlns:a="http://schemas.openxmlformats.org/drawingml/2006/main" xmlns:r="http://schemas.openxmlformats.org/officeDocument/2006/relationships" xmlns:p="http://schemas.openxmlformats.org/presentationml/2006/main">
-  <p:cSld>
-    <p:spTree>
-      <p:nvGrpSpPr>
-        <p:cNvPr id="1" name=""/>
-        <p:cNvGrpSpPr/>
-        <p:nvPr/>
-      </p:nvGrpSpPr>
-      <p:grpSpPr>
-        <a:xfrm>
-          <a:off x="0" y="0"/>
-          <a:ext cx="0" cy="0"/>
-          <a:chOff x="0" y="0"/>
-          <a:chExt cx="0" cy="0"/>
-        </a:xfrm>
-      </p:grpSpPr>
-      <p:pic>
-        <p:nvPicPr>
-          <p:cNvPr id="9" name="Picture 2"/>
-          <p:cNvPicPr>
-            <a:picLocks noChangeAspect="1" noChangeArrowheads="1"/>
-          </p:cNvPicPr>
-          <p:nvPr/>
-        </p:nvPicPr>
-        <p:blipFill>
-          <a:blip r:embed="rId3" cstate="print"/>
-          <a:srcRect/>
-          <a:stretch>
-            <a:fillRect/>
-          </a:stretch>
-        </p:blipFill>
-        <p:spPr bwMode="auto">
-          <a:xfrm>
-            <a:off x="4914900" y="2438400"/>
-            <a:ext cx="4076700" cy="3686175"/>
-          </a:xfrm>
-          <a:prstGeom prst="rect">
-            <a:avLst/>
-          </a:prstGeom>
-          <a:noFill/>
-          <a:ln w="9525">
-            <a:noFill/>
-            <a:miter lim="800000"/>
-            <a:headEnd/>
-            <a:tailEnd/>
-          </a:ln>
-        </p:spPr>
-      </p:pic>
-      <p:sp>
-        <p:nvSpPr>
-          <p:cNvPr id="2" name="Title 1"/>
-          <p:cNvSpPr>
-            <a:spLocks noGrp="1"/>
-          </p:cNvSpPr>
-          <p:nvPr>
-            <p:ph type="title"/>
-          </p:nvPr>
-        </p:nvSpPr>
-        <p:spPr>
-          <a:xfrm>
-            <a:off x="457200" y="76200"/>
-            <a:ext cx="8229600" cy="1143000"/>
-          </a:xfrm>
-        </p:spPr>
-        <p:txBody>
-          <a:bodyPr/>
-          <a:lstStyle/>
-          <a:p>
-            <a:pPr lvl="0"/>
-            <a:r>
-              <a:rPr lang="en-US" dirty="0" smtClean="0"/>
-              <a:t>Project Charter</a:t>
-            </a:r>
-            <a:endParaRPr lang="en-US" dirty="0"/>
-          </a:p>
-        </p:txBody>
-      </p:sp>
-      <p:sp>
-        <p:nvSpPr>
-          <p:cNvPr id="12" name="Rectangle 11"/>
-          <p:cNvSpPr/>
-          <p:nvPr/>
-        </p:nvSpPr>
-        <p:spPr>
-          <a:xfrm>
-            <a:off x="304800" y="2362200"/>
-            <a:ext cx="5486400" cy="2739211"/>
-          </a:xfrm>
-          <a:prstGeom prst="rect">
-            <a:avLst/>
-          </a:prstGeom>
-        </p:spPr>
-        <p:txBody>
-          <a:bodyPr wrap="square">
-            <a:spAutoFit/>
-          </a:bodyPr>
-          <a:lstStyle/>
-          <a:p>
-            <a:pPr marL="514350" indent="-514350">
-              <a:buFont typeface="Arial" pitchFamily="34" charset="0"/>
-              <a:buChar char="•"/>
-            </a:pPr>
-            <a:r>
-              <a:rPr lang="en-US" sz="2000" dirty="0" smtClean="0">
-                <a:latin typeface="+mj-lt"/>
-              </a:rPr>
-              <a:t>The background, context, overview</a:t>
-            </a:r>
-            <a:endParaRPr lang="en-US" sz="2000" u="sng" dirty="0" smtClean="0">
-              <a:latin typeface="+mj-lt"/>
-            </a:endParaRPr>
-          </a:p>
-          <a:p>
-            <a:pPr marL="514350" indent="-514350">
-              <a:buFont typeface="Arial" pitchFamily="34" charset="0"/>
-              <a:buChar char="•"/>
-            </a:pPr>
-            <a:r>
-              <a:rPr lang="en-US" sz="2000" dirty="0" smtClean="0">
-                <a:latin typeface="+mj-lt"/>
-              </a:rPr>
-              <a:t>Project Management and Governance</a:t>
-            </a:r>
-          </a:p>
-          <a:p>
-            <a:pPr marL="971550" lvl="1" indent="-514350">
-              <a:buFont typeface="Wingdings" pitchFamily="2" charset="2"/>
-              <a:buChar char="v"/>
-            </a:pPr>
-            <a:r>
-              <a:rPr lang="en-US" sz="1600" dirty="0" smtClean="0">
-                <a:latin typeface="+mj-lt"/>
-              </a:rPr>
-              <a:t>Role/Name/Responsibilities</a:t>
-            </a:r>
-          </a:p>
-          <a:p>
-            <a:pPr marL="514350" indent="-514350">
-              <a:buFont typeface="Arial" pitchFamily="34" charset="0"/>
-              <a:buChar char="•"/>
-            </a:pPr>
-            <a:r>
-              <a:rPr lang="en-US" sz="2000" dirty="0" smtClean="0">
-                <a:latin typeface="+mj-lt"/>
-              </a:rPr>
-              <a:t>Project Facilities and Resources</a:t>
-            </a:r>
-          </a:p>
-          <a:p>
-            <a:pPr marL="514350" indent="-514350">
-              <a:buFont typeface="Arial" pitchFamily="34" charset="0"/>
-              <a:buChar char="•"/>
-            </a:pPr>
-            <a:r>
-              <a:rPr lang="en-US" sz="2000" dirty="0" smtClean="0">
-                <a:latin typeface="+mj-lt"/>
-              </a:rPr>
-              <a:t>Milestones.</a:t>
-            </a:r>
-          </a:p>
-          <a:p>
-            <a:pPr marL="514350" indent="-514350">
-              <a:buFont typeface="Arial" pitchFamily="34" charset="0"/>
-              <a:buChar char="•"/>
-            </a:pPr>
-            <a:r>
-              <a:rPr lang="en-US" sz="2000" dirty="0" smtClean="0">
-                <a:latin typeface="+mj-lt"/>
-              </a:rPr>
-              <a:t>Impact Analysis</a:t>
-            </a:r>
-          </a:p>
-          <a:p>
-            <a:pPr marL="971550" lvl="1" indent="-514350">
-              <a:buFont typeface="Wingdings" pitchFamily="2" charset="2"/>
-              <a:buChar char="v"/>
-            </a:pPr>
-            <a:r>
-              <a:rPr lang="en-US" sz="1600" dirty="0" smtClean="0">
-                <a:latin typeface="+mj-lt"/>
-              </a:rPr>
-              <a:t>Who? What?</a:t>
-            </a:r>
-          </a:p>
-          <a:p>
-            <a:pPr marL="514350" indent="-514350">
-              <a:buFont typeface="Arial" pitchFamily="34" charset="0"/>
-              <a:buChar char="•"/>
-            </a:pPr>
-            <a:r>
-              <a:rPr lang="en-US" sz="2000" dirty="0" smtClean="0">
-                <a:latin typeface="+mj-lt"/>
-              </a:rPr>
-              <a:t>Assumptions</a:t>
-            </a:r>
-          </a:p>
-          <a:p>
-            <a:pPr marL="514350" indent="-514350">
-              <a:buFont typeface="Arial" pitchFamily="34" charset="0"/>
-              <a:buChar char="•"/>
-            </a:pPr>
-            <a:r>
-              <a:rPr lang="en-US" sz="2000" dirty="0" smtClean="0">
-                <a:latin typeface="+mj-lt"/>
-              </a:rPr>
-              <a:t>Signatures</a:t>
-            </a:r>
-          </a:p>
-        </p:txBody>
-      </p:sp>
-      <p:sp>
-        <p:nvSpPr>
-          <p:cNvPr id="8" name="Rectangle 7"/>
-          <p:cNvSpPr/>
-          <p:nvPr/>
-        </p:nvSpPr>
-        <p:spPr>
-          <a:xfrm>
-            <a:off x="228600" y="1074003"/>
-            <a:ext cx="8610600" cy="1200329"/>
-          </a:xfrm>
-          <a:prstGeom prst="rect">
-            <a:avLst/>
-          </a:prstGeom>
-          <a:ln>
-            <a:noFill/>
-          </a:ln>
-        </p:spPr>
-        <p:style>
-          <a:lnRef idx="2">
-            <a:schemeClr val="dk1"/>
-          </a:lnRef>
-          <a:fillRef idx="1">
-            <a:schemeClr val="lt1"/>
-          </a:fillRef>
-          <a:effectRef idx="0">
-            <a:schemeClr val="dk1"/>
-          </a:effectRef>
-          <a:fontRef idx="minor">
-            <a:schemeClr val="dk1"/>
-          </a:fontRef>
-        </p:style>
-        <p:txBody>
-          <a:bodyPr wrap="square">
-            <a:spAutoFit/>
-          </a:bodyPr>
-          <a:lstStyle/>
-          <a:p>
-            <a:pPr algn="ctr">
-              <a:buNone/>
-            </a:pPr>
-            <a:r>
-              <a:rPr lang="en-US" sz="2400" dirty="0" smtClean="0">
-                <a:latin typeface="+mj-lt"/>
-              </a:rPr>
-              <a:t>A document that </a:t>
-            </a:r>
-            <a:r>
-              <a:rPr lang="en-US" sz="2400" u="sng" dirty="0" smtClean="0">
-                <a:latin typeface="+mj-lt"/>
-              </a:rPr>
-              <a:t>formally</a:t>
-            </a:r>
-            <a:r>
-              <a:rPr lang="en-US" sz="2400" dirty="0" smtClean="0">
-                <a:latin typeface="+mj-lt"/>
-              </a:rPr>
-              <a:t> </a:t>
-            </a:r>
-            <a:r>
-              <a:rPr lang="en-US" sz="2400" i="1" dirty="0" smtClean="0">
-                <a:solidFill>
-                  <a:srgbClr val="C00000"/>
-                </a:solidFill>
-                <a:latin typeface="+mj-lt"/>
-              </a:rPr>
-              <a:t>authorizes</a:t>
-            </a:r>
-            <a:r>
-              <a:rPr lang="en-US" sz="2400" dirty="0" smtClean="0">
-                <a:latin typeface="+mj-lt"/>
-              </a:rPr>
-              <a:t> a project or a phase and documenting </a:t>
-            </a:r>
-            <a:r>
-              <a:rPr lang="en-US" sz="2400" u="sng" dirty="0" smtClean="0">
-                <a:solidFill>
-                  <a:schemeClr val="tx1"/>
-                </a:solidFill>
-                <a:latin typeface="+mj-lt"/>
-              </a:rPr>
-              <a:t>initial requirements</a:t>
-            </a:r>
-            <a:r>
-              <a:rPr lang="en-US" sz="2400" dirty="0" smtClean="0">
-                <a:latin typeface="+mj-lt"/>
-              </a:rPr>
-              <a:t> that satisfy the stakeholder’s </a:t>
-            </a:r>
-            <a:r>
-              <a:rPr lang="en-US" sz="2400" u="sng" dirty="0" smtClean="0">
-                <a:latin typeface="+mj-lt"/>
-              </a:rPr>
-              <a:t>needs</a:t>
-            </a:r>
-            <a:r>
-              <a:rPr lang="en-US" sz="2400" dirty="0" smtClean="0">
-                <a:latin typeface="+mj-lt"/>
-              </a:rPr>
-              <a:t> and </a:t>
-            </a:r>
-            <a:r>
-              <a:rPr lang="en-US" sz="2400" u="sng" dirty="0" smtClean="0">
-                <a:latin typeface="+mj-lt"/>
-              </a:rPr>
-              <a:t>expectations</a:t>
-            </a:r>
-            <a:r>
-              <a:rPr lang="en-US" sz="2400" dirty="0" smtClean="0">
-                <a:latin typeface="+mj-lt"/>
-              </a:rPr>
-              <a:t>.</a:t>
-            </a:r>
-          </a:p>
-        </p:txBody>
-      </p:sp>
-    </p:spTree>
-  </p:cSld>
-  <p:clrMapOvr>
-    <a:masterClrMapping/>
-  </p:clrMapOvr>
-  <p:timing>
-    <p:tnLst>
-      <p:par>
-        <p:cTn id="1" dur="indefinite" restart="never" nodeType="tmRoot"/>
-      </p:par>
-    </p:tnLst>
-  </p:timing>
-</p:sld>
-</file>
-
-<file path=ppt/slides/slide22.xml><?xml version="1.0" encoding="utf-8"?>
-<p:sld xmlns:a="http://schemas.openxmlformats.org/drawingml/2006/main" xmlns:r="http://schemas.openxmlformats.org/officeDocument/2006/relationships" xmlns:p="http://schemas.openxmlformats.org/presentationml/2006/main">
-  <p:cSld>
-    <p:spTree>
-      <p:nvGrpSpPr>
-        <p:cNvPr id="1" name=""/>
-        <p:cNvGrpSpPr/>
-        <p:nvPr/>
-      </p:nvGrpSpPr>
-      <p:grpSpPr>
-        <a:xfrm>
-          <a:off x="0" y="0"/>
-          <a:ext cx="0" cy="0"/>
-          <a:chOff x="0" y="0"/>
-          <a:chExt cx="0" cy="0"/>
-        </a:xfrm>
-      </p:grpSpPr>
-      <p:sp>
-        <p:nvSpPr>
-          <p:cNvPr id="2" name="Title 1"/>
-          <p:cNvSpPr>
-            <a:spLocks noGrp="1"/>
-          </p:cNvSpPr>
-          <p:nvPr>
-            <p:ph type="title"/>
-          </p:nvPr>
-        </p:nvSpPr>
-        <p:spPr/>
-        <p:txBody>
-          <a:bodyPr/>
-          <a:lstStyle/>
-          <a:p>
-            <a:r>
-              <a:rPr lang="en-US" dirty="0" smtClean="0"/>
-              <a:t>Responsibility Assignment Matrix</a:t>
-            </a:r>
-            <a:endParaRPr lang="en-US" dirty="0"/>
-          </a:p>
-        </p:txBody>
-      </p:sp>
-      <p:sp>
-        <p:nvSpPr>
-          <p:cNvPr id="3" name="Content Placeholder 2"/>
-          <p:cNvSpPr>
-            <a:spLocks noGrp="1"/>
-          </p:cNvSpPr>
-          <p:nvPr>
-            <p:ph idx="1"/>
-          </p:nvPr>
-        </p:nvSpPr>
-        <p:spPr>
-          <a:xfrm>
-            <a:off x="457200" y="1600201"/>
-            <a:ext cx="8229600" cy="2362200"/>
-          </a:xfrm>
-        </p:spPr>
-        <p:txBody>
-          <a:bodyPr/>
-          <a:lstStyle/>
-          <a:p>
-            <a:r>
-              <a:rPr lang="en-US" sz="2200" dirty="0" smtClean="0"/>
-              <a:t>Responsibility Assignment Matrix (RAM), also known as </a:t>
-            </a:r>
-          </a:p>
-          <a:p>
-            <a:r>
-              <a:rPr lang="en-US" sz="2200" dirty="0" smtClean="0"/>
-              <a:t>RACI matrix (Responsible, Accountable, Consulted, and Informed matrix), or</a:t>
-            </a:r>
-          </a:p>
-          <a:p>
-            <a:r>
-              <a:rPr lang="en-US" sz="2200" dirty="0" smtClean="0"/>
-              <a:t>LRC (linear responsibility chart)</a:t>
-            </a:r>
-          </a:p>
-          <a:p>
-            <a:r>
-              <a:rPr lang="en-US" sz="2200" dirty="0" smtClean="0"/>
-              <a:t>describes the participation by various roles in completing tasks or deliverables for a project.</a:t>
-            </a:r>
-          </a:p>
-        </p:txBody>
-      </p:sp>
-      <p:pic>
-        <p:nvPicPr>
-          <p:cNvPr id="38914" name="Picture 2"/>
-          <p:cNvPicPr>
-            <a:picLocks noChangeAspect="1" noChangeArrowheads="1"/>
-          </p:cNvPicPr>
-          <p:nvPr/>
-        </p:nvPicPr>
-        <p:blipFill>
-          <a:blip r:embed="rId3" cstate="print"/>
-          <a:srcRect/>
-          <a:stretch>
-            <a:fillRect/>
-          </a:stretch>
-        </p:blipFill>
-        <p:spPr bwMode="auto">
-          <a:xfrm>
-            <a:off x="381000" y="4038600"/>
-            <a:ext cx="4417695" cy="2446020"/>
-          </a:xfrm>
-          <a:prstGeom prst="rect">
-            <a:avLst/>
-          </a:prstGeom>
-          <a:noFill/>
-          <a:ln w="9525">
-            <a:noFill/>
-            <a:miter lim="800000"/>
-            <a:headEnd/>
-            <a:tailEnd/>
-          </a:ln>
-        </p:spPr>
-      </p:pic>
-      <p:sp>
-        <p:nvSpPr>
-          <p:cNvPr id="5" name="TextBox 4"/>
-          <p:cNvSpPr txBox="1"/>
-          <p:nvPr/>
-        </p:nvSpPr>
-        <p:spPr>
-          <a:xfrm>
-            <a:off x="4901044" y="4495800"/>
-            <a:ext cx="4014355" cy="1785104"/>
-          </a:xfrm>
-          <a:prstGeom prst="rect">
-            <a:avLst/>
-          </a:prstGeom>
-          <a:noFill/>
-        </p:spPr>
-        <p:txBody>
-          <a:bodyPr wrap="square" rtlCol="0">
-            <a:spAutoFit/>
-          </a:bodyPr>
-          <a:lstStyle/>
-          <a:p>
-            <a:pPr marL="457200" indent="-457200">
-              <a:buFont typeface="Arial" pitchFamily="34" charset="0"/>
-              <a:buChar char="•"/>
-            </a:pPr>
-            <a:r>
-              <a:rPr lang="en-US" sz="2200" i="1" dirty="0" smtClean="0">
-                <a:solidFill>
-                  <a:srgbClr val="C00000"/>
-                </a:solidFill>
-                <a:latin typeface="+mj-lt"/>
-              </a:rPr>
-              <a:t>Responsibility</a:t>
-            </a:r>
-            <a:r>
-              <a:rPr lang="en-US" sz="2200" dirty="0" smtClean="0">
-                <a:latin typeface="+mj-lt"/>
-              </a:rPr>
-              <a:t> can be shared.</a:t>
-            </a:r>
-          </a:p>
-          <a:p>
-            <a:pPr marL="457200" indent="-457200">
-              <a:buFont typeface="Arial" pitchFamily="34" charset="0"/>
-              <a:buChar char="•"/>
-            </a:pPr>
-            <a:r>
-              <a:rPr lang="en-US" sz="2200" i="1" dirty="0" smtClean="0">
-                <a:solidFill>
-                  <a:srgbClr val="C00000"/>
-                </a:solidFill>
-                <a:latin typeface="+mj-lt"/>
-              </a:rPr>
-              <a:t>Accountability</a:t>
-            </a:r>
-            <a:r>
-              <a:rPr lang="en-US" sz="2200" dirty="0" smtClean="0">
-                <a:latin typeface="+mj-lt"/>
-              </a:rPr>
-              <a:t> cannot be shared. It is something you hold a person to only after a task is done </a:t>
-            </a:r>
-            <a:r>
-              <a:rPr lang="en-US" sz="2200" b="1" dirty="0" smtClean="0">
-                <a:latin typeface="+mj-lt"/>
-              </a:rPr>
-              <a:t>or not done</a:t>
-            </a:r>
-            <a:r>
-              <a:rPr lang="en-US" sz="2200" dirty="0" smtClean="0">
-                <a:latin typeface="+mj-lt"/>
-              </a:rPr>
-              <a:t>.</a:t>
-            </a:r>
-          </a:p>
-        </p:txBody>
-      </p:sp>
-      <p:sp>
-        <p:nvSpPr>
-          <p:cNvPr id="9" name="Rectangle 8"/>
-          <p:cNvSpPr/>
-          <p:nvPr/>
-        </p:nvSpPr>
-        <p:spPr>
-          <a:xfrm>
-            <a:off x="609600" y="5410200"/>
-            <a:ext cx="1066800" cy="307777"/>
-          </a:xfrm>
-          <a:prstGeom prst="rect">
-            <a:avLst/>
-          </a:prstGeom>
-          <a:solidFill>
-            <a:schemeClr val="bg1">
-              <a:lumMod val="95000"/>
-            </a:schemeClr>
-          </a:solidFill>
-        </p:spPr>
-        <p:txBody>
-          <a:bodyPr wrap="square">
-            <a:spAutoFit/>
-          </a:bodyPr>
-          <a:lstStyle/>
-          <a:p>
-            <a:pPr algn="ctr"/>
-            <a:r>
-              <a:rPr lang="en-US" sz="1400" b="1" dirty="0" smtClean="0">
-                <a:latin typeface="+mj-lt"/>
-              </a:rPr>
-              <a:t>Deliverable</a:t>
-            </a:r>
-            <a:endParaRPr lang="en-US" sz="1400" b="1" dirty="0">
-              <a:latin typeface="+mj-lt"/>
-            </a:endParaRPr>
-          </a:p>
-        </p:txBody>
-      </p:sp>
-    </p:spTree>
-  </p:cSld>
-  <p:clrMapOvr>
-    <a:masterClrMapping/>
-  </p:clrMapOvr>
-</p:sld>
-</file>
-
-<file path=ppt/slides/slide23.xml><?xml version="1.0" encoding="utf-8"?>
-<p:sld xmlns:a="http://schemas.openxmlformats.org/drawingml/2006/main" xmlns:r="http://schemas.openxmlformats.org/officeDocument/2006/relationships" xmlns:p="http://schemas.openxmlformats.org/presentationml/2006/main">
-  <p:cSld>
-    <p:spTree>
-      <p:nvGrpSpPr>
-        <p:cNvPr id="1" name=""/>
-        <p:cNvGrpSpPr/>
-        <p:nvPr/>
-      </p:nvGrpSpPr>
-      <p:grpSpPr>
-        <a:xfrm>
-          <a:off x="0" y="0"/>
-          <a:ext cx="0" cy="0"/>
-          <a:chOff x="0" y="0"/>
-          <a:chExt cx="0" cy="0"/>
-        </a:xfrm>
-      </p:grpSpPr>
-      <p:sp>
-        <p:nvSpPr>
-          <p:cNvPr id="2" name="Title 1"/>
-          <p:cNvSpPr>
-            <a:spLocks noGrp="1"/>
-          </p:cNvSpPr>
-          <p:nvPr>
-            <p:ph type="title"/>
-          </p:nvPr>
-        </p:nvSpPr>
-        <p:spPr/>
-        <p:txBody>
-          <a:bodyPr/>
-          <a:lstStyle/>
-          <a:p>
-            <a:r>
-              <a:rPr lang="en-US" dirty="0" smtClean="0"/>
-              <a:t>Checklist</a:t>
-            </a:r>
-            <a:endParaRPr lang="en-US" dirty="0"/>
-          </a:p>
-        </p:txBody>
-      </p:sp>
-      <p:sp>
-        <p:nvSpPr>
-          <p:cNvPr id="3" name="Content Placeholder 2"/>
-          <p:cNvSpPr>
-            <a:spLocks noGrp="1"/>
-          </p:cNvSpPr>
-          <p:nvPr>
-            <p:ph idx="1"/>
-          </p:nvPr>
-        </p:nvSpPr>
-        <p:spPr/>
-        <p:txBody>
-          <a:bodyPr/>
-          <a:lstStyle/>
-          <a:p>
-            <a:r>
-              <a:rPr lang="en-US" sz="2400" i="1" dirty="0" smtClean="0">
-                <a:solidFill>
-                  <a:srgbClr val="C00000"/>
-                </a:solidFill>
-              </a:rPr>
-              <a:t>Why</a:t>
-            </a:r>
-            <a:r>
-              <a:rPr lang="en-US" sz="2400" dirty="0" smtClean="0"/>
-              <a:t> this project?</a:t>
-            </a:r>
-          </a:p>
-          <a:p>
-            <a:r>
-              <a:rPr lang="en-US" sz="2400" dirty="0" smtClean="0"/>
-              <a:t>What are the </a:t>
-            </a:r>
-            <a:r>
-              <a:rPr lang="en-US" sz="2400" i="1" dirty="0" smtClean="0">
-                <a:solidFill>
-                  <a:srgbClr val="C00000"/>
-                </a:solidFill>
-              </a:rPr>
-              <a:t>problems</a:t>
-            </a:r>
-            <a:r>
-              <a:rPr lang="en-US" sz="2400" dirty="0" smtClean="0"/>
-              <a:t>?</a:t>
-            </a:r>
-          </a:p>
-          <a:p>
-            <a:r>
-              <a:rPr lang="en-US" sz="2400" dirty="0" smtClean="0"/>
-              <a:t>What are the </a:t>
-            </a:r>
-            <a:r>
-              <a:rPr lang="en-US" sz="2400" i="1" dirty="0" smtClean="0">
-                <a:solidFill>
-                  <a:srgbClr val="C00000"/>
-                </a:solidFill>
-              </a:rPr>
-              <a:t>deliverables</a:t>
-            </a:r>
-            <a:r>
-              <a:rPr lang="en-US" sz="2400" dirty="0" smtClean="0"/>
-              <a:t>?</a:t>
-            </a:r>
-          </a:p>
-          <a:p>
-            <a:r>
-              <a:rPr lang="en-US" sz="2400" i="1" dirty="0" smtClean="0">
-                <a:solidFill>
-                  <a:srgbClr val="C00000"/>
-                </a:solidFill>
-              </a:rPr>
-              <a:t>How</a:t>
-            </a:r>
-            <a:r>
-              <a:rPr lang="en-US" sz="2400" dirty="0" smtClean="0"/>
-              <a:t> will we solve the problems?</a:t>
-            </a:r>
-          </a:p>
-          <a:p>
-            <a:pPr lvl="1"/>
-            <a:r>
-              <a:rPr lang="en-US" sz="2000" i="1" dirty="0" smtClean="0">
-                <a:solidFill>
-                  <a:srgbClr val="C00000"/>
-                </a:solidFill>
-              </a:rPr>
-              <a:t>Technical</a:t>
-            </a:r>
-            <a:r>
-              <a:rPr lang="en-US" sz="2000" dirty="0" smtClean="0"/>
-              <a:t> aspects</a:t>
-            </a:r>
-          </a:p>
-          <a:p>
-            <a:pPr lvl="1"/>
-            <a:r>
-              <a:rPr lang="en-US" sz="2000" i="1" dirty="0" smtClean="0">
-                <a:solidFill>
-                  <a:srgbClr val="C00000"/>
-                </a:solidFill>
-              </a:rPr>
-              <a:t>Management</a:t>
-            </a:r>
-            <a:r>
-              <a:rPr lang="en-US" sz="2000" dirty="0" smtClean="0"/>
-              <a:t> aspects</a:t>
-            </a:r>
-          </a:p>
-          <a:p>
-            <a:r>
-              <a:rPr lang="en-US" sz="2400" i="1" dirty="0" smtClean="0">
-                <a:solidFill>
-                  <a:srgbClr val="C00000"/>
-                </a:solidFill>
-              </a:rPr>
-              <a:t>When</a:t>
-            </a:r>
-            <a:r>
-              <a:rPr lang="en-US" sz="2400" dirty="0" smtClean="0"/>
-              <a:t> must we complete the project?</a:t>
-            </a:r>
-          </a:p>
-        </p:txBody>
-      </p:sp>
-      <p:pic>
-        <p:nvPicPr>
-          <p:cNvPr id="4" name="Picture 2" descr="https://www.articlelist.com/wp-content/uploads/2019/02/Best-questions-to-get-to-know-someone-better.jpg"/>
-          <p:cNvPicPr>
-            <a:picLocks noChangeAspect="1" noChangeArrowheads="1"/>
-          </p:cNvPicPr>
-          <p:nvPr/>
-        </p:nvPicPr>
-        <p:blipFill>
-          <a:blip r:embed="rId2" cstate="print"/>
-          <a:srcRect/>
-          <a:stretch>
-            <a:fillRect/>
-          </a:stretch>
-        </p:blipFill>
-        <p:spPr bwMode="auto">
-          <a:xfrm>
-            <a:off x="2895600" y="4724400"/>
-            <a:ext cx="3251200" cy="1625600"/>
-          </a:xfrm>
-          <a:prstGeom prst="rect">
-            <a:avLst/>
-          </a:prstGeom>
-          <a:noFill/>
         </p:spPr>
       </p:pic>
     </p:spTree>
@@ -7643,83 +7673,77 @@
           <a:chExt cx="0" cy="0"/>
         </a:xfrm>
       </p:grpSpPr>
+      <p:sp>
+        <p:nvSpPr>
+          <p:cNvPr id="2" name="Title 1"/>
+          <p:cNvSpPr>
+            <a:spLocks noGrp="1"/>
+          </p:cNvSpPr>
+          <p:nvPr>
+            <p:ph type="title"/>
+          </p:nvPr>
+        </p:nvSpPr>
+        <p:spPr/>
+        <p:txBody>
+          <a:bodyPr/>
+          <a:lstStyle/>
+          <a:p>
+            <a:r>
+              <a:rPr lang="en-US" dirty="0" smtClean="0"/>
+              <a:t>Select a Development Method</a:t>
+            </a:r>
+            <a:endParaRPr lang="en-US" dirty="0"/>
+          </a:p>
+        </p:txBody>
+      </p:sp>
+      <p:sp>
+        <p:nvSpPr>
+          <p:cNvPr id="3" name="Content Placeholder 2"/>
+          <p:cNvSpPr>
+            <a:spLocks noGrp="1"/>
+          </p:cNvSpPr>
+          <p:nvPr>
+            <p:ph idx="1"/>
+          </p:nvPr>
+        </p:nvSpPr>
+        <p:spPr/>
+        <p:txBody>
+          <a:bodyPr/>
+          <a:lstStyle/>
+          <a:p>
+            <a:r>
+              <a:rPr lang="en-US" sz="2500" dirty="0" smtClean="0"/>
+              <a:t>Waterfall?</a:t>
+            </a:r>
+          </a:p>
+          <a:p>
+            <a:r>
+              <a:rPr lang="en-US" sz="2500" dirty="0" smtClean="0"/>
+              <a:t>RUP?</a:t>
+            </a:r>
+          </a:p>
+          <a:p>
+            <a:r>
+              <a:rPr lang="en-US" sz="2500" dirty="0" smtClean="0"/>
+              <a:t>Scrum?</a:t>
+            </a:r>
+          </a:p>
+          <a:p>
+            <a:r>
+              <a:rPr lang="en-US" sz="2500" dirty="0" err="1" smtClean="0"/>
+              <a:t>Kanban</a:t>
+            </a:r>
+            <a:r>
+              <a:rPr lang="en-US" sz="2500" dirty="0" smtClean="0"/>
+              <a:t>?</a:t>
+            </a:r>
+            <a:endParaRPr lang="en-US" sz="2500" dirty="0"/>
+          </a:p>
+        </p:txBody>
+      </p:sp>
       <p:pic>
         <p:nvPicPr>
-          <p:cNvPr id="4" name="Picture 2" descr="https://lh3.ggpht.com/1IfZLL2QDSjZ0wS7sUhaMlsAOS8BBzdR3wZ1WawgRn7KZAM8nEVZYMOUM-lqQb0ikIzp=w300"/>
-          <p:cNvPicPr>
-            <a:picLocks noChangeAspect="1" noChangeArrowheads="1"/>
-          </p:cNvPicPr>
-          <p:nvPr/>
-        </p:nvPicPr>
-        <p:blipFill>
-          <a:blip r:embed="rId2" cstate="print"/>
-          <a:srcRect/>
-          <a:stretch>
-            <a:fillRect/>
-          </a:stretch>
-        </p:blipFill>
-        <p:spPr bwMode="auto">
-          <a:xfrm>
-            <a:off x="3276600" y="1905000"/>
-            <a:ext cx="2857500" cy="2857500"/>
-          </a:xfrm>
-          <a:prstGeom prst="rect">
-            <a:avLst/>
-          </a:prstGeom>
-          <a:noFill/>
-        </p:spPr>
-      </p:pic>
-    </p:spTree>
-  </p:cSld>
-  <p:clrMapOvr>
-    <a:masterClrMapping/>
-  </p:clrMapOvr>
-</p:sld>
-</file>
-
-<file path=ppt/slides/slide25.xml><?xml version="1.0" encoding="utf-8"?>
-<p:sld xmlns:a="http://schemas.openxmlformats.org/drawingml/2006/main" xmlns:r="http://schemas.openxmlformats.org/officeDocument/2006/relationships" xmlns:p="http://schemas.openxmlformats.org/presentationml/2006/main">
-  <p:cSld>
-    <p:spTree>
-      <p:nvGrpSpPr>
-        <p:cNvPr id="1" name=""/>
-        <p:cNvGrpSpPr/>
-        <p:nvPr/>
-      </p:nvGrpSpPr>
-      <p:grpSpPr>
-        <a:xfrm>
-          <a:off x="0" y="0"/>
-          <a:ext cx="0" cy="0"/>
-          <a:chOff x="0" y="0"/>
-          <a:chExt cx="0" cy="0"/>
-        </a:xfrm>
-      </p:grpSpPr>
-      <p:sp>
-        <p:nvSpPr>
-          <p:cNvPr id="2" name="Title 1"/>
-          <p:cNvSpPr>
-            <a:spLocks noGrp="1"/>
-          </p:cNvSpPr>
-          <p:nvPr>
-            <p:ph type="title"/>
-          </p:nvPr>
-        </p:nvSpPr>
-        <p:spPr/>
-        <p:txBody>
-          <a:bodyPr/>
-          <a:lstStyle/>
-          <a:p>
-            <a:r>
-              <a:rPr lang="en-US" dirty="0" smtClean="0"/>
-              <a:t>Which Methodology?</a:t>
-            </a:r>
-            <a:endParaRPr lang="en-US" dirty="0"/>
-          </a:p>
-        </p:txBody>
-      </p:sp>
-      <p:pic>
-        <p:nvPicPr>
-          <p:cNvPr id="6" name="Picture 3">
+          <p:cNvPr id="5" name="Picture 3">
             <a:hlinkClick r:id="rId2" action="ppaction://hlinkpres?slideindex=1&amp;slidetitle="/>
           </p:cNvPr>
           <p:cNvPicPr>
@@ -7754,7 +7778,7 @@
       </p:pic>
       <p:pic>
         <p:nvPicPr>
-          <p:cNvPr id="7" name="Picture 2">
+          <p:cNvPr id="6" name="Picture 2">
             <a:hlinkClick r:id="rId4" action="ppaction://hlinkpres?slideindex=1&amp;slidetitle="/>
           </p:cNvPr>
           <p:cNvPicPr>
@@ -7786,9 +7810,42 @@
           </a:ln>
         </p:spPr>
       </p:pic>
+      <p:sp>
+        <p:nvSpPr>
+          <p:cNvPr id="7" name="Rectangle 6"/>
+          <p:cNvSpPr/>
+          <p:nvPr/>
+        </p:nvSpPr>
+        <p:spPr>
+          <a:xfrm>
+            <a:off x="5486400" y="3965067"/>
+            <a:ext cx="3352799" cy="369332"/>
+          </a:xfrm>
+          <a:prstGeom prst="rect">
+            <a:avLst/>
+          </a:prstGeom>
+        </p:spPr>
+        <p:txBody>
+          <a:bodyPr wrap="square">
+            <a:spAutoFit/>
+          </a:bodyPr>
+          <a:lstStyle/>
+          <a:p>
+            <a:r>
+              <a:rPr lang="en-US" b="1" dirty="0" smtClean="0">
+                <a:latin typeface="+mj-lt"/>
+              </a:rPr>
+              <a:t>RUP (Rational Unified Process)</a:t>
+            </a:r>
+            <a:endParaRPr lang="en-US" b="1" dirty="0">
+              <a:latin typeface="+mj-lt"/>
+            </a:endParaRPr>
+          </a:p>
+        </p:txBody>
+      </p:sp>
       <p:pic>
         <p:nvPicPr>
-          <p:cNvPr id="4098" name="Picture 2" descr="http://fastbiz101.com/101/wpfast-content/uploads/2016/06/review.jpeg"/>
+          <p:cNvPr id="8" name="Picture 2" descr="http://www.texasrockgym.com/wp-content/uploads/2016/04/exercise.jpg"/>
           <p:cNvPicPr>
             <a:picLocks noChangeAspect="1" noChangeArrowheads="1"/>
           </p:cNvPicPr>
@@ -7803,8 +7860,8 @@
         </p:blipFill>
         <p:spPr bwMode="auto">
           <a:xfrm>
-            <a:off x="6019800" y="3088767"/>
-            <a:ext cx="1600200" cy="800100"/>
+            <a:off x="3962400" y="1752600"/>
+            <a:ext cx="2602992" cy="1600200"/>
           </a:xfrm>
           <a:prstGeom prst="rect">
             <a:avLst/>
@@ -7814,66 +7871,7 @@
       </p:pic>
       <p:pic>
         <p:nvPicPr>
-          <p:cNvPr id="9" name="Picture 2" descr="http://fastbiz101.com/101/wpfast-content/uploads/2016/06/review.jpeg"/>
-          <p:cNvPicPr>
-            <a:picLocks noChangeAspect="1" noChangeArrowheads="1"/>
-          </p:cNvPicPr>
-          <p:nvPr/>
-        </p:nvPicPr>
-        <p:blipFill>
-          <a:blip r:embed="rId6" cstate="print"/>
-          <a:srcRect/>
-          <a:stretch>
-            <a:fillRect/>
-          </a:stretch>
-        </p:blipFill>
-        <p:spPr bwMode="auto">
-          <a:xfrm>
-            <a:off x="1295400" y="3172968"/>
-            <a:ext cx="1600200" cy="800100"/>
-          </a:xfrm>
-          <a:prstGeom prst="rect">
-            <a:avLst/>
-          </a:prstGeom>
-          <a:noFill/>
-        </p:spPr>
-      </p:pic>
-      <p:sp>
-        <p:nvSpPr>
-          <p:cNvPr id="8" name="Rectangle 7"/>
-          <p:cNvSpPr/>
-          <p:nvPr/>
-        </p:nvSpPr>
-        <p:spPr>
-          <a:xfrm>
-            <a:off x="5486400" y="3965067"/>
-            <a:ext cx="3352799" cy="369332"/>
-          </a:xfrm>
-          <a:prstGeom prst="rect">
-            <a:avLst/>
-          </a:prstGeom>
-        </p:spPr>
-        <p:txBody>
-          <a:bodyPr wrap="square">
-            <a:spAutoFit/>
-          </a:bodyPr>
-          <a:lstStyle/>
-          <a:p>
-            <a:r>
-              <a:rPr lang="en-US" b="1" dirty="0" smtClean="0">
-                <a:latin typeface="+mj-lt"/>
-              </a:rPr>
-              <a:t>RUP (Rational Unified Process)</a:t>
-            </a:r>
-            <a:endParaRPr lang="en-US" b="1" dirty="0">
-              <a:latin typeface="+mj-lt"/>
-            </a:endParaRPr>
-          </a:p>
-        </p:txBody>
-      </p:sp>
-      <p:pic>
-        <p:nvPicPr>
-          <p:cNvPr id="2050" name="Picture 2" descr="http://www.texasrockgym.com/wp-content/uploads/2016/04/exercise.jpg"/>
+          <p:cNvPr id="9" name="Picture 4"/>
           <p:cNvPicPr>
             <a:picLocks noChangeAspect="1" noChangeArrowheads="1"/>
           </p:cNvPicPr>
@@ -7888,33 +7886,7 @@
         </p:blipFill>
         <p:spPr bwMode="auto">
           <a:xfrm>
-            <a:off x="685800" y="1371600"/>
-            <a:ext cx="2602992" cy="1600200"/>
-          </a:xfrm>
-          <a:prstGeom prst="rect">
-            <a:avLst/>
-          </a:prstGeom>
-          <a:noFill/>
-        </p:spPr>
-      </p:pic>
-      <p:pic>
-        <p:nvPicPr>
-          <p:cNvPr id="10" name="Picture 4"/>
-          <p:cNvPicPr>
-            <a:picLocks noChangeAspect="1" noChangeArrowheads="1"/>
-          </p:cNvPicPr>
-          <p:nvPr/>
-        </p:nvPicPr>
-        <p:blipFill>
-          <a:blip r:embed="rId8" cstate="print"/>
-          <a:srcRect/>
-          <a:stretch>
-            <a:fillRect/>
-          </a:stretch>
-        </p:blipFill>
-        <p:spPr bwMode="auto">
-          <a:xfrm>
-            <a:off x="7429500" y="381000"/>
+            <a:off x="6858000" y="1905000"/>
             <a:ext cx="1333500" cy="1314450"/>
           </a:xfrm>
           <a:prstGeom prst="rect">
@@ -7929,80 +7901,6 @@
           </a:ln>
         </p:spPr>
       </p:pic>
-      <p:sp>
-        <p:nvSpPr>
-          <p:cNvPr id="11" name="Rectangle 10"/>
-          <p:cNvSpPr/>
-          <p:nvPr/>
-        </p:nvSpPr>
-        <p:spPr>
-          <a:xfrm>
-            <a:off x="3581400" y="1897559"/>
-            <a:ext cx="5181600" cy="769441"/>
-          </a:xfrm>
-          <a:prstGeom prst="rect">
-            <a:avLst/>
-          </a:prstGeom>
-        </p:spPr>
-        <p:style>
-          <a:lnRef idx="2">
-            <a:schemeClr val="dk1"/>
-          </a:lnRef>
-          <a:fillRef idx="1">
-            <a:schemeClr val="lt1"/>
-          </a:fillRef>
-          <a:effectRef idx="0">
-            <a:schemeClr val="dk1"/>
-          </a:effectRef>
-          <a:fontRef idx="minor">
-            <a:schemeClr val="dk1"/>
-          </a:fontRef>
-        </p:style>
-        <p:txBody>
-          <a:bodyPr wrap="square">
-            <a:spAutoFit/>
-          </a:bodyPr>
-          <a:lstStyle/>
-          <a:p>
-            <a:pPr algn="ctr"/>
-            <a:r>
-              <a:rPr lang="en-US" sz="2200" dirty="0" smtClean="0">
-                <a:solidFill>
-                  <a:schemeClr val="tx1"/>
-                </a:solidFill>
-                <a:latin typeface="+mj-lt"/>
-              </a:rPr>
-              <a:t>Refer to the </a:t>
-            </a:r>
-            <a:r>
-              <a:rPr lang="en-US" sz="2200" b="1" dirty="0" smtClean="0">
-                <a:solidFill>
-                  <a:schemeClr val="tx1"/>
-                </a:solidFill>
-                <a:latin typeface="+mj-lt"/>
-              </a:rPr>
-              <a:t>Introduction to Software Engineering </a:t>
-            </a:r>
-            <a:r>
-              <a:rPr lang="en-US" sz="2200" dirty="0" smtClean="0">
-                <a:solidFill>
-                  <a:schemeClr val="tx1"/>
-                </a:solidFill>
-              </a:rPr>
-              <a:t>course </a:t>
-            </a:r>
-            <a:r>
-              <a:rPr lang="en-US" sz="2200" dirty="0" smtClean="0">
-                <a:solidFill>
-                  <a:schemeClr val="tx1"/>
-                </a:solidFill>
-                <a:latin typeface="+mj-lt"/>
-              </a:rPr>
-              <a:t>for more information.</a:t>
-            </a:r>
-          </a:p>
-        </p:txBody>
-      </p:sp>
     </p:spTree>
   </p:cSld>
   <p:clrMapOvr>
@@ -8011,7 +7909,7 @@
 </p:sld>
 </file>
 
-<file path=ppt/slides/slide26.xml><?xml version="1.0" encoding="utf-8"?>
+<file path=ppt/slides/slide25.xml><?xml version="1.0" encoding="utf-8"?>
 <p:sld xmlns:a="http://schemas.openxmlformats.org/drawingml/2006/main" xmlns:r="http://schemas.openxmlformats.org/officeDocument/2006/relationships" xmlns:p="http://schemas.openxmlformats.org/presentationml/2006/main">
   <p:cSld>
     <p:spTree>
@@ -8191,7 +8089,6 @@
               <a:rPr lang="en-US" sz="2400" dirty="0" smtClean="0"/>
               <a:t>Project proposal.</a:t>
             </a:r>
-            <a:endParaRPr lang="en-US" sz="2400" dirty="0" smtClean="0"/>
           </a:p>
           <a:p>
             <a:pPr marL="571500" indent="-571500">
@@ -8200,8 +8097,35 @@
             </a:pPr>
             <a:r>
               <a:rPr lang="en-US" sz="2400" dirty="0" smtClean="0"/>
-              <a:t>Project vision and scope.</a:t>
-            </a:r>
+              <a:t>Project vision and scope</a:t>
+            </a:r>
+            <a:r>
+              <a:rPr lang="en-US" sz="2400" dirty="0" smtClean="0"/>
+              <a:t>.</a:t>
+            </a:r>
+          </a:p>
+          <a:p>
+            <a:pPr marL="571500" lvl="0" indent="-571500">
+              <a:buFont typeface="+mj-lt"/>
+              <a:buAutoNum type="romanUcPeriod"/>
+            </a:pPr>
+            <a:r>
+              <a:rPr lang="en-US" sz="2400" dirty="0" smtClean="0"/>
+              <a:t>Feasibility </a:t>
+            </a:r>
+            <a:r>
+              <a:rPr lang="en-US" sz="2400" dirty="0" smtClean="0"/>
+              <a:t>study </a:t>
+            </a:r>
+            <a:r>
+              <a:rPr lang="en-US" sz="2400" dirty="0" smtClean="0"/>
+              <a:t>r</a:t>
+            </a:r>
+            <a:r>
+              <a:rPr lang="en-US" sz="2400" dirty="0" smtClean="0"/>
+              <a:t>eport.</a:t>
+            </a:r>
+            <a:endParaRPr lang="en-US" sz="2400" dirty="0" smtClean="0"/>
           </a:p>
           <a:p>
             <a:pPr marL="571500" indent="-571500">
@@ -8210,7 +8134,11 @@
             </a:pPr>
             <a:r>
               <a:rPr lang="en-US" sz="2400" dirty="0" smtClean="0"/>
-              <a:t>Mockup, prototype.</a:t>
+              <a:t>Project </a:t>
+            </a:r>
+            <a:r>
+              <a:rPr lang="en-US" sz="2400" dirty="0" smtClean="0"/>
+              <a:t>charter.</a:t>
             </a:r>
           </a:p>
           <a:p>
@@ -8220,7 +8148,7 @@
             </a:pPr>
             <a:r>
               <a:rPr lang="en-US" sz="2400" dirty="0" smtClean="0"/>
-              <a:t>Software requirements specification.</a:t>
+              <a:t>Prototype.</a:t>
             </a:r>
           </a:p>
           <a:p>
@@ -8230,7 +8158,11 @@
             </a:pPr>
             <a:r>
               <a:rPr lang="en-US" sz="2400" dirty="0" smtClean="0"/>
-              <a:t>Architecture.</a:t>
+              <a:t>Software </a:t>
+            </a:r>
+            <a:r>
+              <a:rPr lang="en-US" sz="2400" dirty="0" smtClean="0"/>
+              <a:t>requirements specification.</a:t>
             </a:r>
           </a:p>
           <a:p>
@@ -8240,7 +8172,7 @@
             </a:pPr>
             <a:r>
               <a:rPr lang="en-US" sz="2400" dirty="0" smtClean="0"/>
-              <a:t>Proof of concept.</a:t>
+              <a:t>Architecture.</a:t>
             </a:r>
           </a:p>
           <a:p>
@@ -8250,7 +8182,7 @@
             </a:pPr>
             <a:r>
               <a:rPr lang="en-US" sz="2400" dirty="0" smtClean="0"/>
-              <a:t>Project charter.</a:t>
+              <a:t>Proof of concept.</a:t>
             </a:r>
           </a:p>
           <a:p>
@@ -8260,7 +8192,11 @@
             </a:pPr>
             <a:r>
               <a:rPr lang="en-US" sz="2400" dirty="0" smtClean="0"/>
-              <a:t>Process definition document.</a:t>
+              <a:t>Process </a:t>
+            </a:r>
+            <a:r>
+              <a:rPr lang="en-US" sz="2400" dirty="0" smtClean="0"/>
+              <a:t>definition document.</a:t>
             </a:r>
           </a:p>
           <a:p>

--- a/Software Project Management/03. Software Project Initiation.pptx
+++ b/Software Project Management/03. Software Project Initiation.pptx
@@ -5,10 +5,10 @@
     <p:sldMasterId id="2147483708" r:id="rId1"/>
   </p:sldMasterIdLst>
   <p:notesMasterIdLst>
-    <p:notesMasterId r:id="rId27"/>
+    <p:notesMasterId r:id="rId28"/>
   </p:notesMasterIdLst>
   <p:handoutMasterIdLst>
-    <p:handoutMasterId r:id="rId28"/>
+    <p:handoutMasterId r:id="rId29"/>
   </p:handoutMasterIdLst>
   <p:sldIdLst>
     <p:sldId id="256" r:id="rId2"/>
@@ -28,14 +28,15 @@
     <p:sldId id="895" r:id="rId16"/>
     <p:sldId id="875" r:id="rId17"/>
     <p:sldId id="876" r:id="rId18"/>
-    <p:sldId id="877" r:id="rId19"/>
-    <p:sldId id="843" r:id="rId20"/>
-    <p:sldId id="906" r:id="rId21"/>
-    <p:sldId id="907" r:id="rId22"/>
-    <p:sldId id="904" r:id="rId23"/>
-    <p:sldId id="909" r:id="rId24"/>
-    <p:sldId id="908" r:id="rId25"/>
-    <p:sldId id="343" r:id="rId26"/>
+    <p:sldId id="910" r:id="rId19"/>
+    <p:sldId id="877" r:id="rId20"/>
+    <p:sldId id="843" r:id="rId21"/>
+    <p:sldId id="906" r:id="rId22"/>
+    <p:sldId id="907" r:id="rId23"/>
+    <p:sldId id="904" r:id="rId24"/>
+    <p:sldId id="909" r:id="rId25"/>
+    <p:sldId id="908" r:id="rId26"/>
+    <p:sldId id="343" r:id="rId27"/>
   </p:sldIdLst>
   <p:sldSz cx="9144000" cy="6858000" type="screen4x3"/>
   <p:notesSz cx="6858000" cy="9144000"/>
@@ -5947,6 +5948,221 @@
           <a:p>
             <a:r>
               <a:rPr lang="en-US" dirty="0" smtClean="0"/>
+              <a:t>Project </a:t>
+            </a:r>
+            <a:r>
+              <a:rPr lang="en-US" dirty="0" smtClean="0"/>
+              <a:t>Blastoff Meeting </a:t>
+            </a:r>
+            <a:r>
+              <a:rPr lang="en-US" dirty="0" smtClean="0"/>
+              <a:t>[1]</a:t>
+            </a:r>
+            <a:endParaRPr lang="en-US" dirty="0"/>
+          </a:p>
+        </p:txBody>
+      </p:sp>
+      <p:sp>
+        <p:nvSpPr>
+          <p:cNvPr id="3" name="Content Placeholder 2"/>
+          <p:cNvSpPr>
+            <a:spLocks noGrp="1"/>
+          </p:cNvSpPr>
+          <p:nvPr>
+            <p:ph idx="1"/>
+          </p:nvPr>
+        </p:nvSpPr>
+        <p:spPr/>
+        <p:txBody>
+          <a:bodyPr/>
+          <a:lstStyle/>
+          <a:p>
+            <a:r>
+              <a:rPr lang="en-US" sz="2400" i="1" dirty="0" smtClean="0">
+                <a:solidFill>
+                  <a:srgbClr val="C00000"/>
+                </a:solidFill>
+              </a:rPr>
+              <a:t>Blastoff</a:t>
+            </a:r>
+            <a:r>
+              <a:rPr lang="en-US" sz="2400" dirty="0" smtClean="0"/>
+              <a:t> is also known as "project initiation," "</a:t>
+            </a:r>
+            <a:r>
+              <a:rPr lang="en-US" sz="2400" i="1" dirty="0" smtClean="0">
+                <a:solidFill>
+                  <a:srgbClr val="C00000"/>
+                </a:solidFill>
+              </a:rPr>
+              <a:t>kickoff</a:t>
+            </a:r>
+            <a:r>
+              <a:rPr lang="en-US" sz="2400" dirty="0" smtClean="0"/>
+              <a:t>," "charter," "project launch," and many other things.</a:t>
+            </a:r>
+          </a:p>
+          <a:p>
+            <a:r>
+              <a:rPr lang="en-US" sz="2400" dirty="0" smtClean="0"/>
+              <a:t>The blastoff meeting prepares the project and ensures its </a:t>
+            </a:r>
+            <a:r>
+              <a:rPr lang="en-US" sz="2400" i="1" dirty="0" smtClean="0">
+                <a:solidFill>
+                  <a:srgbClr val="C00000"/>
+                </a:solidFill>
+              </a:rPr>
+              <a:t>feasibility</a:t>
+            </a:r>
+            <a:r>
+              <a:rPr lang="en-US" sz="2400" dirty="0" smtClean="0"/>
+              <a:t> before launching the detailed requirements effort.</a:t>
+            </a:r>
+          </a:p>
+          <a:p>
+            <a:endParaRPr lang="en-US" sz="2400" dirty="0"/>
+          </a:p>
+        </p:txBody>
+      </p:sp>
+      <p:pic>
+        <p:nvPicPr>
+          <p:cNvPr id="4" name="Picture 3"/>
+          <p:cNvPicPr>
+            <a:picLocks noChangeAspect="1" noChangeArrowheads="1"/>
+          </p:cNvPicPr>
+          <p:nvPr/>
+        </p:nvPicPr>
+        <p:blipFill>
+          <a:blip r:embed="rId2" cstate="print"/>
+          <a:srcRect/>
+          <a:stretch>
+            <a:fillRect/>
+          </a:stretch>
+        </p:blipFill>
+        <p:spPr bwMode="auto">
+          <a:xfrm>
+            <a:off x="3124200" y="3352800"/>
+            <a:ext cx="4286250" cy="3133725"/>
+          </a:xfrm>
+          <a:prstGeom prst="rect">
+            <a:avLst/>
+          </a:prstGeom>
+          <a:noFill/>
+          <a:ln w="9525">
+            <a:noFill/>
+            <a:miter lim="800000"/>
+            <a:headEnd/>
+            <a:tailEnd/>
+          </a:ln>
+        </p:spPr>
+      </p:pic>
+      <p:pic>
+        <p:nvPicPr>
+          <p:cNvPr id="5" name="Picture 5"/>
+          <p:cNvPicPr>
+            <a:picLocks noChangeAspect="1" noChangeArrowheads="1"/>
+          </p:cNvPicPr>
+          <p:nvPr/>
+        </p:nvPicPr>
+        <p:blipFill>
+          <a:blip r:embed="rId3" cstate="print"/>
+          <a:srcRect/>
+          <a:stretch>
+            <a:fillRect/>
+          </a:stretch>
+        </p:blipFill>
+        <p:spPr bwMode="auto">
+          <a:xfrm>
+            <a:off x="685800" y="3429000"/>
+            <a:ext cx="1699260" cy="811530"/>
+          </a:xfrm>
+          <a:prstGeom prst="rect">
+            <a:avLst/>
+          </a:prstGeom>
+          <a:noFill/>
+          <a:ln w="9525">
+            <a:noFill/>
+            <a:miter lim="800000"/>
+            <a:headEnd/>
+            <a:tailEnd/>
+          </a:ln>
+        </p:spPr>
+      </p:pic>
+      <p:pic>
+        <p:nvPicPr>
+          <p:cNvPr id="6" name="Picture 2"/>
+          <p:cNvPicPr>
+            <a:picLocks noChangeAspect="1" noChangeArrowheads="1"/>
+          </p:cNvPicPr>
+          <p:nvPr/>
+        </p:nvPicPr>
+        <p:blipFill>
+          <a:blip r:embed="rId4" cstate="print"/>
+          <a:srcRect/>
+          <a:stretch>
+            <a:fillRect/>
+          </a:stretch>
+        </p:blipFill>
+        <p:spPr bwMode="auto">
+          <a:xfrm>
+            <a:off x="914400" y="4419600"/>
+            <a:ext cx="1552575" cy="1685925"/>
+          </a:xfrm>
+          <a:prstGeom prst="rect">
+            <a:avLst/>
+          </a:prstGeom>
+          <a:noFill/>
+          <a:ln w="9525">
+            <a:noFill/>
+            <a:miter lim="800000"/>
+            <a:headEnd/>
+            <a:tailEnd/>
+          </a:ln>
+        </p:spPr>
+      </p:pic>
+    </p:spTree>
+  </p:cSld>
+  <p:clrMapOvr>
+    <a:masterClrMapping/>
+  </p:clrMapOvr>
+</p:sld>
+</file>
+
+<file path=ppt/slides/slide19.xml><?xml version="1.0" encoding="utf-8"?>
+<p:sld xmlns:a="http://schemas.openxmlformats.org/drawingml/2006/main" xmlns:r="http://schemas.openxmlformats.org/officeDocument/2006/relationships" xmlns:p="http://schemas.openxmlformats.org/presentationml/2006/main">
+  <p:cSld>
+    <p:spTree>
+      <p:nvGrpSpPr>
+        <p:cNvPr id="1" name=""/>
+        <p:cNvGrpSpPr/>
+        <p:nvPr/>
+      </p:nvGrpSpPr>
+      <p:grpSpPr>
+        <a:xfrm>
+          <a:off x="0" y="0"/>
+          <a:ext cx="0" cy="0"/>
+          <a:chOff x="0" y="0"/>
+          <a:chExt cx="0" cy="0"/>
+        </a:xfrm>
+      </p:grpSpPr>
+      <p:sp>
+        <p:nvSpPr>
+          <p:cNvPr id="2" name="Title 1"/>
+          <p:cNvSpPr>
+            <a:spLocks noGrp="1"/>
+          </p:cNvSpPr>
+          <p:nvPr>
+            <p:ph type="title"/>
+          </p:nvPr>
+        </p:nvSpPr>
+        <p:spPr/>
+        <p:txBody>
+          <a:bodyPr/>
+          <a:lstStyle/>
+          <a:p>
+            <a:r>
+              <a:rPr lang="en-US" dirty="0" smtClean="0"/>
               <a:t>Checklist</a:t>
             </a:r>
             <a:endParaRPr lang="en-US" dirty="0"/>
@@ -6111,7 +6327,361 @@
 </p:sld>
 </file>
 
-<file path=ppt/slides/slide19.xml><?xml version="1.0" encoding="utf-8"?>
+<file path=ppt/slides/slide2.xml><?xml version="1.0" encoding="utf-8"?>
+<p:sld xmlns:a="http://schemas.openxmlformats.org/drawingml/2006/main" xmlns:r="http://schemas.openxmlformats.org/officeDocument/2006/relationships" xmlns:p="http://schemas.openxmlformats.org/presentationml/2006/main">
+  <p:cSld>
+    <p:spTree>
+      <p:nvGrpSpPr>
+        <p:cNvPr id="1" name=""/>
+        <p:cNvGrpSpPr/>
+        <p:nvPr/>
+      </p:nvGrpSpPr>
+      <p:grpSpPr>
+        <a:xfrm>
+          <a:off x="0" y="0"/>
+          <a:ext cx="0" cy="0"/>
+          <a:chOff x="0" y="0"/>
+          <a:chExt cx="0" cy="0"/>
+        </a:xfrm>
+      </p:grpSpPr>
+      <p:sp>
+        <p:nvSpPr>
+          <p:cNvPr id="2" name="Title 1"/>
+          <p:cNvSpPr>
+            <a:spLocks noGrp="1"/>
+          </p:cNvSpPr>
+          <p:nvPr>
+            <p:ph type="title"/>
+          </p:nvPr>
+        </p:nvSpPr>
+        <p:spPr/>
+        <p:txBody>
+          <a:bodyPr/>
+          <a:lstStyle/>
+          <a:p>
+            <a:r>
+              <a:rPr lang="en-US" dirty="0" smtClean="0"/>
+              <a:t>Objectives</a:t>
+            </a:r>
+            <a:endParaRPr lang="en-US" dirty="0"/>
+          </a:p>
+        </p:txBody>
+      </p:sp>
+      <p:sp>
+        <p:nvSpPr>
+          <p:cNvPr id="3" name="Content Placeholder 2"/>
+          <p:cNvSpPr>
+            <a:spLocks noGrp="1"/>
+          </p:cNvSpPr>
+          <p:nvPr>
+            <p:ph idx="1"/>
+          </p:nvPr>
+        </p:nvSpPr>
+        <p:spPr>
+          <a:xfrm>
+            <a:off x="457200" y="1600200"/>
+            <a:ext cx="5562600" cy="4343400"/>
+          </a:xfrm>
+        </p:spPr>
+        <p:txBody>
+          <a:bodyPr/>
+          <a:lstStyle/>
+          <a:p>
+            <a:pPr marL="457200" indent="-457200">
+              <a:buFont typeface="Wingdings" pitchFamily="2" charset="2"/>
+              <a:buChar char="Ø"/>
+            </a:pPr>
+            <a:r>
+              <a:rPr lang="en-US" sz="2200" dirty="0" smtClean="0"/>
+              <a:t>To create and evaluate a </a:t>
+            </a:r>
+            <a:r>
+              <a:rPr lang="en-US" sz="2200" i="1" dirty="0" smtClean="0">
+                <a:solidFill>
+                  <a:srgbClr val="C00000"/>
+                </a:solidFill>
+              </a:rPr>
+              <a:t>project proposal</a:t>
+            </a:r>
+            <a:r>
+              <a:rPr lang="en-US" sz="2200" dirty="0" smtClean="0"/>
+              <a:t>.</a:t>
+            </a:r>
+          </a:p>
+          <a:p>
+            <a:pPr marL="457200" indent="-457200">
+              <a:buFont typeface="Wingdings" pitchFamily="2" charset="2"/>
+              <a:buChar char="Ø"/>
+            </a:pPr>
+            <a:r>
+              <a:rPr lang="en-US" sz="2200" dirty="0" smtClean="0"/>
+              <a:t>To create a </a:t>
+            </a:r>
+            <a:r>
+              <a:rPr lang="en-US" sz="2200" i="1" dirty="0" smtClean="0">
+                <a:solidFill>
+                  <a:srgbClr val="C00000"/>
+                </a:solidFill>
+              </a:rPr>
+              <a:t>project vision and scope document</a:t>
+            </a:r>
+            <a:r>
+              <a:rPr lang="en-US" sz="2200" dirty="0" smtClean="0"/>
+              <a:t>.</a:t>
+            </a:r>
+          </a:p>
+          <a:p>
+            <a:pPr marL="457200" indent="-457200">
+              <a:buFont typeface="Wingdings" pitchFamily="2" charset="2"/>
+              <a:buChar char="Ø"/>
+            </a:pPr>
+            <a:r>
+              <a:rPr lang="en-US" sz="2200" dirty="0" smtClean="0"/>
+              <a:t>To create a </a:t>
+            </a:r>
+            <a:r>
+              <a:rPr lang="en-US" sz="2200" i="1" dirty="0" smtClean="0">
+                <a:solidFill>
+                  <a:srgbClr val="C00000"/>
+                </a:solidFill>
+              </a:rPr>
+              <a:t>mockup</a:t>
+            </a:r>
+            <a:r>
+              <a:rPr lang="en-US" sz="2200" dirty="0" smtClean="0"/>
+              <a:t> and </a:t>
+            </a:r>
+            <a:r>
+              <a:rPr lang="en-US" sz="2200" i="1" dirty="0" smtClean="0">
+                <a:solidFill>
+                  <a:srgbClr val="C00000"/>
+                </a:solidFill>
+              </a:rPr>
+              <a:t>prototype</a:t>
+            </a:r>
+            <a:r>
+              <a:rPr lang="en-US" sz="2200" dirty="0" smtClean="0"/>
+              <a:t>.</a:t>
+            </a:r>
+            <a:endParaRPr lang="en-US" sz="2200" i="1" dirty="0" smtClean="0">
+              <a:solidFill>
+                <a:srgbClr val="C00000"/>
+              </a:solidFill>
+            </a:endParaRPr>
+          </a:p>
+          <a:p>
+            <a:pPr marL="457200" indent="-457200">
+              <a:buFont typeface="Wingdings" pitchFamily="2" charset="2"/>
+              <a:buChar char="Ø"/>
+            </a:pPr>
+            <a:r>
+              <a:rPr lang="en-US" sz="2200" dirty="0" smtClean="0"/>
+              <a:t>To create a </a:t>
+            </a:r>
+            <a:r>
+              <a:rPr lang="en-US" sz="2200" i="1" dirty="0" smtClean="0">
+                <a:solidFill>
+                  <a:srgbClr val="C00000"/>
+                </a:solidFill>
+              </a:rPr>
+              <a:t>software requirements specification</a:t>
+            </a:r>
+            <a:r>
+              <a:rPr lang="en-US" sz="2200" dirty="0" smtClean="0"/>
+              <a:t>.</a:t>
+            </a:r>
+            <a:endParaRPr lang="en-US" sz="2200" i="1" dirty="0" smtClean="0">
+              <a:solidFill>
+                <a:srgbClr val="C00000"/>
+              </a:solidFill>
+            </a:endParaRPr>
+          </a:p>
+          <a:p>
+            <a:pPr marL="457200" indent="-457200">
+              <a:buFont typeface="Wingdings" pitchFamily="2" charset="2"/>
+              <a:buChar char="Ø"/>
+            </a:pPr>
+            <a:r>
+              <a:rPr lang="en-US" sz="2200" dirty="0" smtClean="0"/>
+              <a:t>To create an </a:t>
+            </a:r>
+            <a:r>
+              <a:rPr lang="en-US" sz="2200" i="1" dirty="0" smtClean="0">
+                <a:solidFill>
+                  <a:srgbClr val="C00000"/>
+                </a:solidFill>
+              </a:rPr>
+              <a:t>architecture</a:t>
+            </a:r>
+            <a:r>
+              <a:rPr lang="en-US" sz="2200" dirty="0" smtClean="0"/>
+              <a:t>.</a:t>
+            </a:r>
+            <a:endParaRPr lang="en-US" sz="2200" i="1" dirty="0" smtClean="0">
+              <a:solidFill>
+                <a:srgbClr val="C00000"/>
+              </a:solidFill>
+            </a:endParaRPr>
+          </a:p>
+          <a:p>
+            <a:pPr marL="457200" indent="-457200">
+              <a:buFont typeface="Wingdings" pitchFamily="2" charset="2"/>
+              <a:buChar char="Ø"/>
+            </a:pPr>
+            <a:r>
+              <a:rPr lang="en-US" sz="2200" dirty="0" smtClean="0"/>
+              <a:t>To create a </a:t>
+            </a:r>
+            <a:r>
+              <a:rPr lang="en-US" sz="2200" i="1" dirty="0" smtClean="0">
+                <a:solidFill>
+                  <a:srgbClr val="C00000"/>
+                </a:solidFill>
+              </a:rPr>
+              <a:t>feasibility study report</a:t>
+            </a:r>
+            <a:r>
+              <a:rPr lang="en-US" sz="2200" dirty="0" smtClean="0"/>
+              <a:t>.</a:t>
+            </a:r>
+            <a:endParaRPr lang="en-US" sz="2200" i="1" dirty="0" smtClean="0">
+              <a:solidFill>
+                <a:srgbClr val="C00000"/>
+              </a:solidFill>
+            </a:endParaRPr>
+          </a:p>
+          <a:p>
+            <a:pPr marL="457200" indent="-457200">
+              <a:buFont typeface="Wingdings" pitchFamily="2" charset="2"/>
+              <a:buChar char="Ø"/>
+            </a:pPr>
+            <a:r>
+              <a:rPr lang="en-US" sz="2200" dirty="0" smtClean="0"/>
+              <a:t>To create a </a:t>
+            </a:r>
+            <a:r>
+              <a:rPr lang="en-US" sz="2200" i="1" dirty="0" smtClean="0">
+                <a:solidFill>
+                  <a:srgbClr val="C00000"/>
+                </a:solidFill>
+              </a:rPr>
+              <a:t>proof of concept</a:t>
+            </a:r>
+            <a:r>
+              <a:rPr lang="en-US" sz="2200" dirty="0" smtClean="0"/>
+              <a:t>.</a:t>
+            </a:r>
+            <a:endParaRPr lang="en-US" sz="2200" i="1" dirty="0" smtClean="0">
+              <a:solidFill>
+                <a:srgbClr val="C00000"/>
+              </a:solidFill>
+            </a:endParaRPr>
+          </a:p>
+          <a:p>
+            <a:pPr marL="457200" indent="-457200">
+              <a:buFont typeface="Wingdings" pitchFamily="2" charset="2"/>
+              <a:buChar char="Ø"/>
+            </a:pPr>
+            <a:r>
+              <a:rPr lang="en-US" sz="2200" dirty="0" smtClean="0"/>
+              <a:t>To create a </a:t>
+            </a:r>
+            <a:r>
+              <a:rPr lang="en-US" sz="2200" i="1" dirty="0" smtClean="0">
+                <a:solidFill>
+                  <a:srgbClr val="C00000"/>
+                </a:solidFill>
+              </a:rPr>
+              <a:t>project charter</a:t>
+            </a:r>
+            <a:r>
+              <a:rPr lang="en-US" sz="2200" dirty="0" smtClean="0"/>
+              <a:t>.</a:t>
+            </a:r>
+            <a:endParaRPr lang="en-US" sz="2200" i="1" dirty="0" smtClean="0">
+              <a:solidFill>
+                <a:srgbClr val="C00000"/>
+              </a:solidFill>
+            </a:endParaRPr>
+          </a:p>
+          <a:p>
+            <a:pPr marL="457200" indent="-457200">
+              <a:buFont typeface="Wingdings" pitchFamily="2" charset="2"/>
+              <a:buChar char="Ø"/>
+            </a:pPr>
+            <a:r>
+              <a:rPr lang="en-US" sz="2200" dirty="0" smtClean="0"/>
+              <a:t>To create a </a:t>
+            </a:r>
+            <a:r>
+              <a:rPr lang="en-US" sz="2200" i="1" dirty="0" smtClean="0">
+                <a:solidFill>
+                  <a:srgbClr val="C00000"/>
+                </a:solidFill>
+              </a:rPr>
+              <a:t>process definition document</a:t>
+            </a:r>
+            <a:r>
+              <a:rPr lang="en-US" sz="2200" dirty="0" smtClean="0"/>
+              <a:t>.</a:t>
+            </a:r>
+            <a:endParaRPr lang="en-US" sz="2200" i="1" dirty="0" smtClean="0">
+              <a:solidFill>
+                <a:srgbClr val="C00000"/>
+              </a:solidFill>
+            </a:endParaRPr>
+          </a:p>
+        </p:txBody>
+      </p:sp>
+      <p:pic>
+        <p:nvPicPr>
+          <p:cNvPr id="4" name="Picture 2"/>
+          <p:cNvPicPr>
+            <a:picLocks noChangeAspect="1" noChangeArrowheads="1"/>
+          </p:cNvPicPr>
+          <p:nvPr/>
+        </p:nvPicPr>
+        <p:blipFill>
+          <a:blip r:embed="rId2" cstate="print"/>
+          <a:srcRect/>
+          <a:stretch>
+            <a:fillRect/>
+          </a:stretch>
+        </p:blipFill>
+        <p:spPr bwMode="auto">
+          <a:xfrm>
+            <a:off x="6000750" y="2609850"/>
+            <a:ext cx="2762250" cy="2114550"/>
+          </a:xfrm>
+          <a:prstGeom prst="rect">
+            <a:avLst/>
+          </a:prstGeom>
+          <a:noFill/>
+          <a:ln w="9525">
+            <a:noFill/>
+            <a:miter lim="800000"/>
+            <a:headEnd/>
+            <a:tailEnd/>
+          </a:ln>
+          <a:effectLst/>
+        </p:spPr>
+      </p:pic>
+    </p:spTree>
+  </p:cSld>
+  <p:clrMapOvr>
+    <a:masterClrMapping/>
+  </p:clrMapOvr>
+  <p:timing>
+    <p:tnLst>
+      <p:par>
+        <p:cTn id="1" dur="indefinite" restart="never" nodeType="tmRoot"/>
+      </p:par>
+    </p:tnLst>
+  </p:timing>
+</p:sld>
+</file>
+
+<file path=ppt/slides/slide20.xml><?xml version="1.0" encoding="utf-8"?>
 <p:sld xmlns:a="http://schemas.openxmlformats.org/drawingml/2006/main" xmlns:r="http://schemas.openxmlformats.org/officeDocument/2006/relationships" xmlns:p="http://schemas.openxmlformats.org/presentationml/2006/main">
   <p:cSld>
     <p:spTree>
@@ -6162,361 +6732,7 @@
 </p:sld>
 </file>
 
-<file path=ppt/slides/slide2.xml><?xml version="1.0" encoding="utf-8"?>
-<p:sld xmlns:a="http://schemas.openxmlformats.org/drawingml/2006/main" xmlns:r="http://schemas.openxmlformats.org/officeDocument/2006/relationships" xmlns:p="http://schemas.openxmlformats.org/presentationml/2006/main">
-  <p:cSld>
-    <p:spTree>
-      <p:nvGrpSpPr>
-        <p:cNvPr id="1" name=""/>
-        <p:cNvGrpSpPr/>
-        <p:nvPr/>
-      </p:nvGrpSpPr>
-      <p:grpSpPr>
-        <a:xfrm>
-          <a:off x="0" y="0"/>
-          <a:ext cx="0" cy="0"/>
-          <a:chOff x="0" y="0"/>
-          <a:chExt cx="0" cy="0"/>
-        </a:xfrm>
-      </p:grpSpPr>
-      <p:sp>
-        <p:nvSpPr>
-          <p:cNvPr id="2" name="Title 1"/>
-          <p:cNvSpPr>
-            <a:spLocks noGrp="1"/>
-          </p:cNvSpPr>
-          <p:nvPr>
-            <p:ph type="title"/>
-          </p:nvPr>
-        </p:nvSpPr>
-        <p:spPr/>
-        <p:txBody>
-          <a:bodyPr/>
-          <a:lstStyle/>
-          <a:p>
-            <a:r>
-              <a:rPr lang="en-US" dirty="0" smtClean="0"/>
-              <a:t>Objectives</a:t>
-            </a:r>
-            <a:endParaRPr lang="en-US" dirty="0"/>
-          </a:p>
-        </p:txBody>
-      </p:sp>
-      <p:sp>
-        <p:nvSpPr>
-          <p:cNvPr id="3" name="Content Placeholder 2"/>
-          <p:cNvSpPr>
-            <a:spLocks noGrp="1"/>
-          </p:cNvSpPr>
-          <p:nvPr>
-            <p:ph idx="1"/>
-          </p:nvPr>
-        </p:nvSpPr>
-        <p:spPr>
-          <a:xfrm>
-            <a:off x="457200" y="1600200"/>
-            <a:ext cx="5562600" cy="4343400"/>
-          </a:xfrm>
-        </p:spPr>
-        <p:txBody>
-          <a:bodyPr/>
-          <a:lstStyle/>
-          <a:p>
-            <a:pPr marL="457200" indent="-457200">
-              <a:buFont typeface="Wingdings" pitchFamily="2" charset="2"/>
-              <a:buChar char="Ø"/>
-            </a:pPr>
-            <a:r>
-              <a:rPr lang="en-US" sz="2200" dirty="0" smtClean="0"/>
-              <a:t>To create and evaluate a </a:t>
-            </a:r>
-            <a:r>
-              <a:rPr lang="en-US" sz="2200" i="1" dirty="0" smtClean="0">
-                <a:solidFill>
-                  <a:srgbClr val="C00000"/>
-                </a:solidFill>
-              </a:rPr>
-              <a:t>project proposal</a:t>
-            </a:r>
-            <a:r>
-              <a:rPr lang="en-US" sz="2200" dirty="0" smtClean="0"/>
-              <a:t>.</a:t>
-            </a:r>
-          </a:p>
-          <a:p>
-            <a:pPr marL="457200" indent="-457200">
-              <a:buFont typeface="Wingdings" pitchFamily="2" charset="2"/>
-              <a:buChar char="Ø"/>
-            </a:pPr>
-            <a:r>
-              <a:rPr lang="en-US" sz="2200" dirty="0" smtClean="0"/>
-              <a:t>To create a </a:t>
-            </a:r>
-            <a:r>
-              <a:rPr lang="en-US" sz="2200" i="1" dirty="0" smtClean="0">
-                <a:solidFill>
-                  <a:srgbClr val="C00000"/>
-                </a:solidFill>
-              </a:rPr>
-              <a:t>project vision and scope document</a:t>
-            </a:r>
-            <a:r>
-              <a:rPr lang="en-US" sz="2200" dirty="0" smtClean="0"/>
-              <a:t>.</a:t>
-            </a:r>
-          </a:p>
-          <a:p>
-            <a:pPr marL="457200" indent="-457200">
-              <a:buFont typeface="Wingdings" pitchFamily="2" charset="2"/>
-              <a:buChar char="Ø"/>
-            </a:pPr>
-            <a:r>
-              <a:rPr lang="en-US" sz="2200" dirty="0" smtClean="0"/>
-              <a:t>To create a </a:t>
-            </a:r>
-            <a:r>
-              <a:rPr lang="en-US" sz="2200" i="1" dirty="0" smtClean="0">
-                <a:solidFill>
-                  <a:srgbClr val="C00000"/>
-                </a:solidFill>
-              </a:rPr>
-              <a:t>mockup</a:t>
-            </a:r>
-            <a:r>
-              <a:rPr lang="en-US" sz="2200" dirty="0" smtClean="0"/>
-              <a:t> and </a:t>
-            </a:r>
-            <a:r>
-              <a:rPr lang="en-US" sz="2200" i="1" dirty="0" smtClean="0">
-                <a:solidFill>
-                  <a:srgbClr val="C00000"/>
-                </a:solidFill>
-              </a:rPr>
-              <a:t>prototype</a:t>
-            </a:r>
-            <a:r>
-              <a:rPr lang="en-US" sz="2200" dirty="0" smtClean="0"/>
-              <a:t>.</a:t>
-            </a:r>
-            <a:endParaRPr lang="en-US" sz="2200" i="1" dirty="0" smtClean="0">
-              <a:solidFill>
-                <a:srgbClr val="C00000"/>
-              </a:solidFill>
-            </a:endParaRPr>
-          </a:p>
-          <a:p>
-            <a:pPr marL="457200" indent="-457200">
-              <a:buFont typeface="Wingdings" pitchFamily="2" charset="2"/>
-              <a:buChar char="Ø"/>
-            </a:pPr>
-            <a:r>
-              <a:rPr lang="en-US" sz="2200" dirty="0" smtClean="0"/>
-              <a:t>To create a </a:t>
-            </a:r>
-            <a:r>
-              <a:rPr lang="en-US" sz="2200" i="1" dirty="0" smtClean="0">
-                <a:solidFill>
-                  <a:srgbClr val="C00000"/>
-                </a:solidFill>
-              </a:rPr>
-              <a:t>software requirements specification</a:t>
-            </a:r>
-            <a:r>
-              <a:rPr lang="en-US" sz="2200" dirty="0" smtClean="0"/>
-              <a:t>.</a:t>
-            </a:r>
-            <a:endParaRPr lang="en-US" sz="2200" i="1" dirty="0" smtClean="0">
-              <a:solidFill>
-                <a:srgbClr val="C00000"/>
-              </a:solidFill>
-            </a:endParaRPr>
-          </a:p>
-          <a:p>
-            <a:pPr marL="457200" indent="-457200">
-              <a:buFont typeface="Wingdings" pitchFamily="2" charset="2"/>
-              <a:buChar char="Ø"/>
-            </a:pPr>
-            <a:r>
-              <a:rPr lang="en-US" sz="2200" dirty="0" smtClean="0"/>
-              <a:t>To create an </a:t>
-            </a:r>
-            <a:r>
-              <a:rPr lang="en-US" sz="2200" i="1" dirty="0" smtClean="0">
-                <a:solidFill>
-                  <a:srgbClr val="C00000"/>
-                </a:solidFill>
-              </a:rPr>
-              <a:t>architecture</a:t>
-            </a:r>
-            <a:r>
-              <a:rPr lang="en-US" sz="2200" dirty="0" smtClean="0"/>
-              <a:t>.</a:t>
-            </a:r>
-            <a:endParaRPr lang="en-US" sz="2200" i="1" dirty="0" smtClean="0">
-              <a:solidFill>
-                <a:srgbClr val="C00000"/>
-              </a:solidFill>
-            </a:endParaRPr>
-          </a:p>
-          <a:p>
-            <a:pPr marL="457200" indent="-457200">
-              <a:buFont typeface="Wingdings" pitchFamily="2" charset="2"/>
-              <a:buChar char="Ø"/>
-            </a:pPr>
-            <a:r>
-              <a:rPr lang="en-US" sz="2200" dirty="0" smtClean="0"/>
-              <a:t>To create a </a:t>
-            </a:r>
-            <a:r>
-              <a:rPr lang="en-US" sz="2200" i="1" dirty="0" smtClean="0">
-                <a:solidFill>
-                  <a:srgbClr val="C00000"/>
-                </a:solidFill>
-              </a:rPr>
-              <a:t>feasibility study report</a:t>
-            </a:r>
-            <a:r>
-              <a:rPr lang="en-US" sz="2200" dirty="0" smtClean="0"/>
-              <a:t>.</a:t>
-            </a:r>
-            <a:endParaRPr lang="en-US" sz="2200" i="1" dirty="0" smtClean="0">
-              <a:solidFill>
-                <a:srgbClr val="C00000"/>
-              </a:solidFill>
-            </a:endParaRPr>
-          </a:p>
-          <a:p>
-            <a:pPr marL="457200" indent="-457200">
-              <a:buFont typeface="Wingdings" pitchFamily="2" charset="2"/>
-              <a:buChar char="Ø"/>
-            </a:pPr>
-            <a:r>
-              <a:rPr lang="en-US" sz="2200" dirty="0" smtClean="0"/>
-              <a:t>To create a </a:t>
-            </a:r>
-            <a:r>
-              <a:rPr lang="en-US" sz="2200" i="1" dirty="0" smtClean="0">
-                <a:solidFill>
-                  <a:srgbClr val="C00000"/>
-                </a:solidFill>
-              </a:rPr>
-              <a:t>proof of concept</a:t>
-            </a:r>
-            <a:r>
-              <a:rPr lang="en-US" sz="2200" dirty="0" smtClean="0"/>
-              <a:t>.</a:t>
-            </a:r>
-            <a:endParaRPr lang="en-US" sz="2200" i="1" dirty="0" smtClean="0">
-              <a:solidFill>
-                <a:srgbClr val="C00000"/>
-              </a:solidFill>
-            </a:endParaRPr>
-          </a:p>
-          <a:p>
-            <a:pPr marL="457200" indent="-457200">
-              <a:buFont typeface="Wingdings" pitchFamily="2" charset="2"/>
-              <a:buChar char="Ø"/>
-            </a:pPr>
-            <a:r>
-              <a:rPr lang="en-US" sz="2200" dirty="0" smtClean="0"/>
-              <a:t>To create a </a:t>
-            </a:r>
-            <a:r>
-              <a:rPr lang="en-US" sz="2200" i="1" dirty="0" smtClean="0">
-                <a:solidFill>
-                  <a:srgbClr val="C00000"/>
-                </a:solidFill>
-              </a:rPr>
-              <a:t>project charter</a:t>
-            </a:r>
-            <a:r>
-              <a:rPr lang="en-US" sz="2200" dirty="0" smtClean="0"/>
-              <a:t>.</a:t>
-            </a:r>
-            <a:endParaRPr lang="en-US" sz="2200" i="1" dirty="0" smtClean="0">
-              <a:solidFill>
-                <a:srgbClr val="C00000"/>
-              </a:solidFill>
-            </a:endParaRPr>
-          </a:p>
-          <a:p>
-            <a:pPr marL="457200" indent="-457200">
-              <a:buFont typeface="Wingdings" pitchFamily="2" charset="2"/>
-              <a:buChar char="Ø"/>
-            </a:pPr>
-            <a:r>
-              <a:rPr lang="en-US" sz="2200" dirty="0" smtClean="0"/>
-              <a:t>To create a </a:t>
-            </a:r>
-            <a:r>
-              <a:rPr lang="en-US" sz="2200" i="1" dirty="0" smtClean="0">
-                <a:solidFill>
-                  <a:srgbClr val="C00000"/>
-                </a:solidFill>
-              </a:rPr>
-              <a:t>process definition document</a:t>
-            </a:r>
-            <a:r>
-              <a:rPr lang="en-US" sz="2200" dirty="0" smtClean="0"/>
-              <a:t>.</a:t>
-            </a:r>
-            <a:endParaRPr lang="en-US" sz="2200" i="1" dirty="0" smtClean="0">
-              <a:solidFill>
-                <a:srgbClr val="C00000"/>
-              </a:solidFill>
-            </a:endParaRPr>
-          </a:p>
-        </p:txBody>
-      </p:sp>
-      <p:pic>
-        <p:nvPicPr>
-          <p:cNvPr id="4" name="Picture 2"/>
-          <p:cNvPicPr>
-            <a:picLocks noChangeAspect="1" noChangeArrowheads="1"/>
-          </p:cNvPicPr>
-          <p:nvPr/>
-        </p:nvPicPr>
-        <p:blipFill>
-          <a:blip r:embed="rId2" cstate="print"/>
-          <a:srcRect/>
-          <a:stretch>
-            <a:fillRect/>
-          </a:stretch>
-        </p:blipFill>
-        <p:spPr bwMode="auto">
-          <a:xfrm>
-            <a:off x="6000750" y="2609850"/>
-            <a:ext cx="2762250" cy="2114550"/>
-          </a:xfrm>
-          <a:prstGeom prst="rect">
-            <a:avLst/>
-          </a:prstGeom>
-          <a:noFill/>
-          <a:ln w="9525">
-            <a:noFill/>
-            <a:miter lim="800000"/>
-            <a:headEnd/>
-            <a:tailEnd/>
-          </a:ln>
-          <a:effectLst/>
-        </p:spPr>
-      </p:pic>
-    </p:spTree>
-  </p:cSld>
-  <p:clrMapOvr>
-    <a:masterClrMapping/>
-  </p:clrMapOvr>
-  <p:timing>
-    <p:tnLst>
-      <p:par>
-        <p:cTn id="1" dur="indefinite" restart="never" nodeType="tmRoot"/>
-      </p:par>
-    </p:tnLst>
-  </p:timing>
-</p:sld>
-</file>
-
-<file path=ppt/slides/slide20.xml><?xml version="1.0" encoding="utf-8"?>
+<file path=ppt/slides/slide21.xml><?xml version="1.0" encoding="utf-8"?>
 <p:sld xmlns:a="http://schemas.openxmlformats.org/drawingml/2006/main" xmlns:r="http://schemas.openxmlformats.org/officeDocument/2006/relationships" xmlns:p="http://schemas.openxmlformats.org/presentationml/2006/main">
   <p:cSld>
     <p:spTree>
@@ -6745,7 +6961,7 @@
 </p:sld>
 </file>
 
-<file path=ppt/slides/slide21.xml><?xml version="1.0" encoding="utf-8"?>
+<file path=ppt/slides/slide22.xml><?xml version="1.0" encoding="utf-8"?>
 <p:sld xmlns:a="http://schemas.openxmlformats.org/drawingml/2006/main" xmlns:r="http://schemas.openxmlformats.org/officeDocument/2006/relationships" xmlns:p="http://schemas.openxmlformats.org/presentationml/2006/main">
   <p:cSld>
     <p:spTree>
@@ -7036,7 +7252,7 @@
 </p:sld>
 </file>
 
-<file path=ppt/slides/slide22.xml><?xml version="1.0" encoding="utf-8"?>
+<file path=ppt/slides/slide23.xml><?xml version="1.0" encoding="utf-8"?>
 <p:sld xmlns:a="http://schemas.openxmlformats.org/drawingml/2006/main" xmlns:r="http://schemas.openxmlformats.org/officeDocument/2006/relationships" xmlns:p="http://schemas.openxmlformats.org/presentationml/2006/main">
   <p:cSld>
     <p:spTree>
@@ -7324,7 +7540,7 @@
 </p:sld>
 </file>
 
-<file path=ppt/slides/slide23.xml><?xml version="1.0" encoding="utf-8"?>
+<file path=ppt/slides/slide24.xml><?xml version="1.0" encoding="utf-8"?>
 <p:sld xmlns:a="http://schemas.openxmlformats.org/drawingml/2006/main" xmlns:r="http://schemas.openxmlformats.org/officeDocument/2006/relationships" xmlns:p="http://schemas.openxmlformats.org/presentationml/2006/main">
   <p:cSld>
     <p:spTree>
@@ -7656,7 +7872,7 @@
 </p:sld>
 </file>
 
-<file path=ppt/slides/slide24.xml><?xml version="1.0" encoding="utf-8"?>
+<file path=ppt/slides/slide25.xml><?xml version="1.0" encoding="utf-8"?>
 <p:sld xmlns:a="http://schemas.openxmlformats.org/drawingml/2006/main" xmlns:r="http://schemas.openxmlformats.org/officeDocument/2006/relationships" xmlns:p="http://schemas.openxmlformats.org/presentationml/2006/main">
   <p:cSld>
     <p:spTree>
@@ -7909,7 +8125,7 @@
 </p:sld>
 </file>
 
-<file path=ppt/slides/slide25.xml><?xml version="1.0" encoding="utf-8"?>
+<file path=ppt/slides/slide26.xml><?xml version="1.0" encoding="utf-8"?>
 <p:sld xmlns:a="http://schemas.openxmlformats.org/drawingml/2006/main" xmlns:r="http://schemas.openxmlformats.org/officeDocument/2006/relationships" xmlns:p="http://schemas.openxmlformats.org/presentationml/2006/main">
   <p:cSld>
     <p:spTree>
@@ -8276,21 +8492,15 @@
           <a:bodyPr/>
           <a:lstStyle/>
           <a:p>
-            <a:pPr marL="514350" indent="-514350">
+            <a:pPr marL="457200" lvl="0" indent="-457200">
               <a:buFont typeface="+mj-lt"/>
               <a:buAutoNum type="arabicPeriod"/>
             </a:pPr>
             <a:r>
-              <a:rPr lang="en-US" sz="2200" dirty="0" smtClean="0"/>
-              <a:t>Project Management Institute (2017). A Guide to the Project Management Body of Knowledge. Sixth Edition. Project Management Institute.</a:t>
-            </a:r>
-          </a:p>
-          <a:p>
-            <a:pPr marL="514350" indent="-514350">
-              <a:buFont typeface="+mj-lt"/>
-              <a:buAutoNum type="arabicPeriod"/>
-            </a:pPr>
-            <a:endParaRPr lang="en-US" sz="2200" dirty="0"/>
+              <a:rPr lang="en-US" sz="2400" dirty="0" smtClean="0"/>
+              <a:t>Suzanne Robertson and James Robertson (2012). Mastering the Requirements Process. Addison Wesley Professional.</a:t>
+            </a:r>
+            <a:endParaRPr lang="en-US" sz="2400" dirty="0" smtClean="0"/>
           </a:p>
         </p:txBody>
       </p:sp>
